--- a/downloads/presentations/modules/gov-410.pptx
+++ b/downloads/presentations/modules/gov-410.pptx
@@ -614,7 +614,8 @@
               <a:t>Technical and Governance Deep Dive
 Risk appetite should be expressed in plain language and translated into operating rules. For example, an agency might state that it encourages low-risk AI uses that reduce internal administrative burden when no sensitive data are used and outputs are reviewed by staff. It might state that it will consider moderate-risk uses involving operational data only with documented validation, access controls, human review, and monitoring. It might state that it does not permit AI to make final public health enforcement, eligibility, or legal decisions without authorized human review.
 Risk tolerance turns these statements into thresholds. A tolerance may specify that a tool cannot be launched if source traceability is absent, if subgroup performance cannot be assessed for a prioritization model, if the false negative rate exceeds a defined threshold, or if the vendor cannot provide adequate documentation. Tolerances should be appropriate to the use case. A lower threshold may be acceptable for internal drafting than for case triage.
-Risk appetite should be reviewed regularly. Public expectations, laws, model capabilities, agency experience, and technical safeguards change over time. A use that was too risky during the first year of AI adoption may become acceptable after better infrastructure, policies, and monitoring are in place. Conversely, a use may become unacceptable if incidents, evidence, or community concerns reveal new harms.</a:t>
+Risk appetite should be reviewed regularly. Public expectations, laws, model capabilities, agency experience, and technical safeguards change over time. A use that was too risky during the first year of AI adoption may become acceptable after better infrastructure, policies, and monitoring are in place. Conversely, a use may become unacceptable if incidents, evidence, or community concerns reveal new harms.
+Application guidance: Translate this concept into clear decision rights, review steps, documentation expectations, and escalation paths before an AI-supported workflow is approved.</a:t>
             </a:r>
             <a:endParaRPr lang="en-US" dirty="0"/>
           </a:p>
@@ -704,7 +705,8 @@
               <a:rPr lang="en-US" dirty="0"/>
               <a:t>Risks, Failure Modes, and Guardrails
 A common failure mode is vague risk language. Phrases like 'use AI responsibly' do not help staff decide what is allowed. A guardrail is to define concrete examples of encouraged, conditional, restricted, and prohibited uses.
-Another risk is risk appetite that ignores equity. A tool may appear operationally useful while shifting burden to communities that are already underrepresented or over-surveilled. A guardrail is to require equity impact review for uses that affect prioritization, access, enforcement, communication, or resource allocation.</a:t>
+Another risk is risk appetite that ignores equity. A tool may appear operationally useful while shifting burden to communities that are already underrepresented or over-surveilled. A guardrail is to require equity impact review for uses that affect prioritization, access, enforcement, communication, or resource allocation.
+Application guidance: Identify what could go wrong, who could be affected, what safeguards are needed, and what evidence should be reviewed before use expands.</a:t>
             </a:r>
             <a:endParaRPr lang="en-US" dirty="0"/>
           </a:p>
@@ -793,7 +795,8 @@
             <a:r>
               <a:rPr lang="en-US" dirty="0"/>
               <a:t>Application to AI-Supported Workflows
-Risk appetite applies differently across AI types. Generative AI for internal drafting may fall into a lower-risk category when reviewed by humans. Predictive models used for prioritization require stronger validation and monitoring. Agentic tools that can take system actions require strict limits, stop authority, and auditability. Risk appetite helps define these boundaries in advance.</a:t>
+Risk appetite applies differently across AI types. Generative AI for internal drafting may fall into a lower-risk category when reviewed by humans. Predictive models used for prioritization require stronger validation and monitoring. Agentic tools that can take system actions require strict limits, stop authority, and auditability. Risk appetite helps define these boundaries in advance.
+Application guidance: Identify what could go wrong, who could be affected, what safeguards are needed, and what evidence should be reviewed before use expands.</a:t>
             </a:r>
             <a:endParaRPr lang="en-US" dirty="0"/>
           </a:p>
@@ -884,7 +887,8 @@
               <a:t>Reflection Questions
 Which current or proposed AI use case in your agency raises this leadership or governance issue most clearly?
 Who currently has authority to make decisions about this issue, and is that authority documented?
-What evidence would governance or leadership need before approving the use case?</a:t>
+What evidence would governance or leadership need before approving the use case?
+Application guidance: Identify what could go wrong, who could be affected, what safeguards are needed, and what evidence should be reviewed before use expands.</a:t>
             </a:r>
             <a:endParaRPr lang="en-US" dirty="0"/>
           </a:p>
@@ -974,7 +978,8 @@
               <a:rPr lang="en-US" dirty="0"/>
               <a:t>Reflection Questions
 Which staff, partners, or communities would be affected if this issue were handled poorly?
-What policy, process, or artifact should be created or updated after this module?</a:t>
+What policy, process, or artifact should be created or updated after this module?
+Application guidance: Identify what could go wrong, who could be affected, what safeguards are needed, and what evidence should be reviewed before use expands.</a:t>
             </a:r>
             <a:endParaRPr lang="en-US" dirty="0"/>
           </a:p>
@@ -1063,7 +1068,8 @@
             <a:r>
               <a:rPr lang="en-US" dirty="0"/>
               <a:t>Practical Exercise
-Draft a risk appetite statement and a risk tolerance table for at least four AI use categories: internal productivity, staff decision support, public-facing communication, and automated or agentic workflows.</a:t>
+Draft a risk appetite statement and a risk tolerance table for at least four AI use categories: internal productivity, staff decision support, public-facing communication, and automated or agentic workflows.
+Application guidance: Use the assignment to test whether you can explain the concept, apply it to a realistic public health situation, and identify what would need review before the work moves forward.</a:t>
             </a:r>
             <a:endParaRPr lang="en-US" dirty="0"/>
           </a:p>
@@ -1152,7 +1158,8 @@
             <a:r>
               <a:rPr lang="en-US" dirty="0"/>
               <a:t>Before You Begin
-Choose a real or realistic public health AI use case. Document assumptions, unresolved questions, and which agency roles would need to review the artifact before it is adopted. The exercise should produce a work product that could support governance review, leadership discussion, implementation planning, or policy development.</a:t>
+Choose a real or realistic public health AI use case. Document assumptions, unresolved questions, and which agency roles would need to review the artifact before it is adopted. The exercise should produce a work product that could support governance review, leadership discussion, implementation planning, or policy development.
+Application guidance: Identify what could go wrong, who could be affected, what safeguards are needed, and what evidence should be reviewed before use expands.</a:t>
             </a:r>
             <a:endParaRPr lang="en-US" dirty="0"/>
           </a:p>
@@ -1241,7 +1248,8 @@
             <a:r>
               <a:rPr lang="en-US" dirty="0"/>
               <a:t>Expected Artifact or Evidence
-AI risk appetite statement; risk tolerance table; prohibited-use examples; mitigation and escalation conditions.</a:t>
+AI risk appetite statement; risk tolerance table; prohibited-use examples; mitigation and escalation conditions.
+Application guidance: Identify what could go wrong, who could be affected, what safeguards are needed, and what evidence should be reviewed before use expands.</a:t>
             </a:r>
             <a:endParaRPr lang="en-US" dirty="0"/>
           </a:p>
@@ -1330,7 +1338,8 @@
             <a:r>
               <a:rPr lang="en-US" dirty="0"/>
               <a:t>Expected Assignment
-AI risk appetite statement; risk tolerance table; prohibited-use examples; mitigation and escalation conditions.</a:t>
+AI risk appetite statement; risk tolerance table; prohibited-use examples; mitigation and escalation conditions.
+Application guidance: Use the assignment to test whether you can explain the concept, apply it to a realistic public health situation, and identify what would need review before the work moves forward.</a:t>
             </a:r>
             <a:endParaRPr lang="en-US" dirty="0"/>
           </a:p>
@@ -1423,7 +1432,8 @@
 2. Which practice best supports accountable public health AI governance?
 3. When should an AI use case be escalated for leadership or governance review?
 4. What is weak evidence of completion for a leadership and governance module?
-5. What should leaders do when an AI use case has meaningful benefits but unresolved risks?</a:t>
+5. What should leaders do when an AI use case has meaningful benefits but unresolved risks?
+Application guidance: Use the assignment to test whether you can explain the concept, apply it to a realistic public health situation, and identify what would need review before the work moves forward.</a:t>
             </a:r>
             <a:endParaRPr lang="en-US" dirty="0"/>
           </a:p>
@@ -1608,7 +1618,8 @@
 NIST Generative AI Profile: https://www.nist.gov/publications/artificial-intelligence-risk-management-framework-generative-artificial-intelligence
 NIST Privacy Framework
 CDC Public Health Data Strategy and Data Modernization resources: https://www.cdc.gov/public-health-data-strategy/php/about/index.html
-WHO Ethics and Governance of Artificial Intelligence for Health: https://www.who.int/publications/i/item/9789240029200</a:t>
+WHO Ethics and Governance of Artificial Intelligence for Health: https://www.who.int/publications/i/item/9789240029200
+Application guidance: Identify what could go wrong, who could be affected, what safeguards are needed, and what evidence should be reviewed before use expands.</a:t>
             </a:r>
             <a:endParaRPr lang="en-US" dirty="0"/>
           </a:p>
@@ -1698,7 +1709,8 @@
               <a:rPr lang="en-US" dirty="0"/>
               <a:t>References and Resources
 OMB Memorandum M-24-10 on federal AI governance, risk management, and innovation, where relevant to public-sector governance models
-Agency strategic plans, procurement policies, privacy policies, cybersecurity policies, records policies, and equity plans</a:t>
+Agency strategic plans, procurement policies, privacy policies, cybersecurity policies, records policies, and equity plans
+Application guidance: Identify what could go wrong, who could be affected, what safeguards are needed, and what evidence should be reviewed before use expands.</a:t>
             </a:r>
             <a:endParaRPr lang="en-US" dirty="0"/>
           </a:p>
@@ -1977,7 +1989,8 @@
 Identify AI uses that may be low, moderate, high, or unacceptable risk in a public health context.
 Develop risk tolerance statements for different AI use categories.
 Connect risk tolerance to review level, safeguards, monitoring, and escalation.
-Produce a draft AI risk appetite statement for leadership or governance discussion.</a:t>
+Produce a draft AI risk appetite statement for leadership or governance discussion.
+Application guidance: Use the assignment to test whether you can explain the concept, apply it to a realistic public health situation, and identify what would need review before the work moves forward.</a:t>
             </a:r>
             <a:endParaRPr lang="en-US" dirty="0"/>
           </a:p>
@@ -2067,7 +2080,8 @@
               <a:rPr lang="en-US" dirty="0"/>
               <a:t>Module Overview
 Leaders cannot manage AI risk effectively unless they define how much risk the agency is willing to accept for different types of use. Risk appetite describes the broad level of risk an organization is willing to take in pursuit of its mission. Risk tolerance translates that appetite into practical thresholds, conditions, and limits for specific AI uses.
-This module helps public health leaders define AI risk appetite in a way that reflects public health authority, community trust, legal obligations, health equity, privacy, safety, and operational needs. The goal is not to eliminate all risk. The goal is to make risk decisions explicit, proportionate, documented, and aligned with public health values.</a:t>
+This module helps public health leaders define AI risk appetite in a way that reflects public health authority, community trust, legal obligations, health equity, privacy, safety, and operational needs. The goal is not to eliminate all risk. The goal is to make risk decisions explicit, proportionate, documented, and aligned with public health values.
+Application guidance: Identify what could go wrong, who could be affected, what safeguards are needed, and what evidence should be reviewed before use expands.</a:t>
             </a:r>
             <a:endParaRPr lang="en-US" dirty="0"/>
           </a:p>
@@ -2156,7 +2170,8 @@
             <a:r>
               <a:rPr lang="en-US" dirty="0"/>
               <a:t>Jurisdiction and Agency Policy Note
-This module provides national-level training guidance for public health agencies and partners. It is not legal advice and does not replace review by agency legal counsel, privacy officers, procurement officials, civil rights staff, records officers, or other authorized decision-makers. Requirements may vary by state, locality, territory, Tribe, agency, funding source, data-sharing agreement, emergency authority, and organizational policy. Learners should use this module to identify the issues that require review and should confirm applicable requirements before approving, procuring, deploying, or publicly communicating about AI-supported work.</a:t>
+This module provides national-level training guidance for public health agencies and partners. It is not legal advice and does not replace review by agency legal counsel, privacy officers, procurement officials, civil rights staff, records officers, or other authorized decision-makers. Requirements may vary by state, locality, territory, Tribe, agency, funding source, data-sharing agreement, emergency authority, and organizational policy. Learners should use this module to identify the issues that require review and should confirm applicable requirements before approving, procuring, deploying, or publicly communicating about AI-supported work.
+Application guidance: Translate this concept into clear decision rights, review steps, documentation expectations, and escalation paths before an AI-supported workflow is approved.</a:t>
             </a:r>
             <a:endParaRPr lang="en-US" dirty="0"/>
           </a:p>
@@ -2246,7 +2261,8 @@
               <a:rPr lang="en-US" dirty="0"/>
               <a:t>Why This Topic Matters for Public Health AI
 Public health agencies make risk decisions every day, but AI can make those decisions less visible. A generative AI tool might be acceptable for drafting internal meeting notes but not for producing unsupervised public health guidance. A predictive model might be acceptable for planning staffing levels but not for denying services. An agentic workflow might be acceptable for creating a draft task but not for sending an enforcement notice without human approval.
-Risk appetite helps agencies explain these distinctions. It provides a leadership-level statement of where the agency encourages innovation, where it requires caution, and where it prohibits use. It also helps staff understand that responsible AI is not a binary choice between adoption and avoidance. It is a disciplined process for matching safeguards to risk.</a:t>
+Risk appetite helps agencies explain these distinctions. It provides a leadership-level statement of where the agency encourages innovation, where it requires caution, and where it prohibits use. It also helps staff understand that responsible AI is not a binary choice between adoption and avoidance. It is a disciplined process for matching safeguards to risk.
+Application guidance: Identify what could go wrong, who could be affected, what safeguards are needed, and what evidence should be reviewed before use expands.</a:t>
             </a:r>
             <a:endParaRPr lang="en-US" dirty="0"/>
           </a:p>
@@ -2336,7 +2352,8 @@
               <a:rPr lang="en-US" dirty="0"/>
               <a:t>Public Health Example
 An agency may define a higher risk appetite for internal administrative uses that do not involve sensitive data, public communication, or public health action. It may define a moderate appetite for staff-facing decision support when human review, validation, and documentation are required. It may define a very low appetite for unsupervised public-facing advice, automated eligibility decisions, enforcement actions, or tools that process sensitive data without approved safeguards.
-These statements help governance reviewers make consistent decisions. Instead of debating each proposal from the beginning, reviewers can ask whether the proposed use fits the agency's defined risk category and whether required safeguards are present. The discussion becomes more disciplined and less dependent on individual comfort with AI.</a:t>
+These statements help governance reviewers make consistent decisions. Instead of debating each proposal from the beginning, reviewers can ask whether the proposed use fits the agency's defined risk category and whether required safeguards are present. The discussion becomes more disciplined and less dependent on individual comfort with AI.
+Application guidance: Identify what could go wrong, who could be affected, what safeguards are needed, and what evidence should be reviewed before use expands.</a:t>
             </a:r>
             <a:endParaRPr lang="en-US" dirty="0"/>
           </a:p>
@@ -3107,8 +3124,8 @@
         </p:nvSpPr>
         <p:spPr>
           <a:xfrm>
-            <a:off x="9966960" y="6537960"/>
-            <a:ext cx="1645920" cy="201168"/>
+            <a:off x="9646920" y="6537960"/>
+            <a:ext cx="1965960" cy="201168"/>
           </a:xfrm>
           <a:prstGeom prst="rect">
             <a:avLst/>
@@ -3132,7 +3149,7 @@
                 <a:ea typeface="Aptos" pitchFamily="34" charset="-122"/>
                 <a:cs typeface="Aptos" pitchFamily="34" charset="-120"/>
               </a:rPr>
-              <a:t>Â© Paula Soper</a:t>
+              <a:t>Copyright Paula Soper</a:t>
             </a:r>
             <a:endParaRPr lang="en-US" sz="800" dirty="0"/>
           </a:p>
@@ -3179,14 +3196,257 @@
       </p:sp>
       <p:sp>
         <p:nvSpPr>
-          <p:cNvPr id="8" name="Shape 6"/>
+          <p:cNvPr id="8" name="Text 6"/>
           <p:cNvSpPr/>
           <p:nvPr/>
         </p:nvSpPr>
         <p:spPr>
           <a:xfrm>
             <a:off x="640080" y="658368"/>
-            <a:ext cx="420624" cy="420624"/>
+            <a:ext cx="10881360" cy="713232"/>
+          </a:xfrm>
+          <a:prstGeom prst="rect">
+            <a:avLst/>
+          </a:prstGeom>
+          <a:noFill/>
+          <a:ln/>
+        </p:spPr>
+        <p:txBody>
+          <a:bodyPr wrap="square" lIns="0" tIns="0" rIns="0" bIns="0" rtlCol="0" anchor="ctr">
+            <a:normAutofit/>
+          </a:bodyPr>
+          <a:lstStyle/>
+          <a:p>
+            <a:pPr indent="0" marL="0">
+              <a:buNone/>
+            </a:pPr>
+            <a:r>
+              <a:rPr lang="en-US" sz="3400" b="1" dirty="0">
+                <a:solidFill>
+                  <a:srgbClr val="003A63"/>
+                </a:solidFill>
+                <a:latin typeface="Aptos Display" pitchFamily="34" charset="0"/>
+                <a:ea typeface="Aptos Display" pitchFamily="34" charset="-122"/>
+                <a:cs typeface="Aptos Display" pitchFamily="34" charset="-120"/>
+              </a:rPr>
+              <a:t>Technical and Governance Deep Dive</a:t>
+            </a:r>
+            <a:endParaRPr lang="en-US" sz="3400" dirty="0"/>
+          </a:p>
+        </p:txBody>
+      </p:sp>
+      <p:sp>
+        <p:nvSpPr>
+          <p:cNvPr id="9" name="Text 7"/>
+          <p:cNvSpPr/>
+          <p:nvPr/>
+        </p:nvSpPr>
+        <p:spPr>
+          <a:xfrm>
+            <a:off x="868680" y="1508760"/>
+            <a:ext cx="6309360" cy="4160520"/>
+          </a:xfrm>
+          <a:prstGeom prst="rect">
+            <a:avLst/>
+          </a:prstGeom>
+          <a:noFill/>
+          <a:ln/>
+        </p:spPr>
+        <p:txBody>
+          <a:bodyPr wrap="square" lIns="635" tIns="635" rIns="635" bIns="635" rtlCol="0" anchor="t">
+            <a:normAutofit/>
+          </a:bodyPr>
+          <a:lstStyle/>
+          <a:p>
+            <a:r>
+              <a:rPr lang="en-US" sz="2100" dirty="0">
+                <a:solidFill>
+                  <a:srgbClr val="17364A"/>
+                </a:solidFill>
+                <a:latin typeface="Aptos" pitchFamily="34" charset="0"/>
+                <a:ea typeface="Aptos" pitchFamily="34" charset="-122"/>
+                <a:cs typeface="Aptos" pitchFamily="34" charset="-120"/>
+              </a:rPr>
+              <a:t>Risk appetite should be expressed in plain language and translated into operating rules.</a:t>
+            </a:r>
+            <a:endParaRPr lang="en-US" sz="2100" dirty="0"/>
+          </a:p>
+          <a:p>
+            <a:r>
+              <a:rPr lang="en-US" sz="2100" dirty="0">
+                <a:solidFill>
+                  <a:srgbClr val="17364A"/>
+                </a:solidFill>
+                <a:latin typeface="Aptos" pitchFamily="34" charset="0"/>
+                <a:ea typeface="Aptos" pitchFamily="34" charset="-122"/>
+                <a:cs typeface="Aptos" pitchFamily="34" charset="-120"/>
+              </a:rPr>
+              <a:t>For example, an agency might state that it encourages low-risk AI uses that reduce internal.</a:t>
+            </a:r>
+            <a:endParaRPr lang="en-US" sz="2100" dirty="0"/>
+          </a:p>
+          <a:p>
+            <a:r>
+              <a:rPr lang="en-US" sz="2100" dirty="0">
+                <a:solidFill>
+                  <a:srgbClr val="17364A"/>
+                </a:solidFill>
+                <a:latin typeface="Aptos" pitchFamily="34" charset="0"/>
+                <a:ea typeface="Aptos" pitchFamily="34" charset="-122"/>
+                <a:cs typeface="Aptos" pitchFamily="34" charset="-120"/>
+              </a:rPr>
+              <a:t>It might state that it will consider moderate-risk uses involving operational data only with documented.</a:t>
+            </a:r>
+            <a:endParaRPr lang="en-US" sz="2100" dirty="0"/>
+          </a:p>
+        </p:txBody>
+      </p:sp>
+      <p:sp>
+        <p:nvSpPr>
+          <p:cNvPr id="10" name="Shape 8"/>
+          <p:cNvSpPr/>
+          <p:nvPr/>
+        </p:nvSpPr>
+        <p:spPr>
+          <a:xfrm>
+            <a:off x="7635240" y="1325880"/>
+            <a:ext cx="3474720" cy="1325880"/>
+          </a:xfrm>
+          <a:prstGeom prst="roundRect">
+            <a:avLst>
+              <a:gd name="adj" fmla="val 8276"/>
+            </a:avLst>
+          </a:prstGeom>
+          <a:solidFill>
+            <a:srgbClr val="EEF8ED"/>
+          </a:solidFill>
+          <a:ln w="12700">
+            <a:solidFill>
+              <a:srgbClr val="B9D7E6"/>
+            </a:solidFill>
+            <a:prstDash val="solid"/>
+          </a:ln>
+        </p:spPr>
+      </p:sp>
+      <p:sp>
+        <p:nvSpPr>
+          <p:cNvPr id="11" name="Text 9"/>
+          <p:cNvSpPr/>
+          <p:nvPr/>
+        </p:nvSpPr>
+        <p:spPr>
+          <a:xfrm>
+            <a:off x="7799832" y="1472184"/>
+            <a:ext cx="3145536" cy="256032"/>
+          </a:xfrm>
+          <a:prstGeom prst="rect">
+            <a:avLst/>
+          </a:prstGeom>
+          <a:noFill/>
+          <a:ln/>
+        </p:spPr>
+        <p:txBody>
+          <a:bodyPr wrap="square" lIns="0" tIns="0" rIns="0" bIns="0" rtlCol="0" anchor="ctr"/>
+          <a:lstStyle/>
+          <a:p>
+            <a:pPr indent="0" marL="0">
+              <a:buNone/>
+            </a:pPr>
+            <a:r>
+              <a:rPr lang="en-US" sz="1300" b="1" dirty="0">
+                <a:solidFill>
+                  <a:srgbClr val="0068B7"/>
+                </a:solidFill>
+                <a:latin typeface="Aptos" pitchFamily="34" charset="0"/>
+                <a:ea typeface="Aptos" pitchFamily="34" charset="-122"/>
+                <a:cs typeface="Aptos" pitchFamily="34" charset="-120"/>
+              </a:rPr>
+              <a:t>Governance lens</a:t>
+            </a:r>
+            <a:endParaRPr lang="en-US" sz="1300" dirty="0"/>
+          </a:p>
+        </p:txBody>
+      </p:sp>
+      <p:sp>
+        <p:nvSpPr>
+          <p:cNvPr id="12" name="Text 10"/>
+          <p:cNvSpPr/>
+          <p:nvPr/>
+        </p:nvSpPr>
+        <p:spPr>
+          <a:xfrm>
+            <a:off x="7799832" y="1828800"/>
+            <a:ext cx="3145536" cy="685800"/>
+          </a:xfrm>
+          <a:prstGeom prst="rect">
+            <a:avLst/>
+          </a:prstGeom>
+          <a:noFill/>
+          <a:ln/>
+        </p:spPr>
+        <p:txBody>
+          <a:bodyPr wrap="square" lIns="0" tIns="0" rIns="0" bIns="0" rtlCol="0" anchor="t">
+            <a:normAutofit/>
+          </a:bodyPr>
+          <a:lstStyle/>
+          <a:p>
+            <a:pPr indent="0" marL="0">
+              <a:buNone/>
+            </a:pPr>
+            <a:r>
+              <a:rPr lang="en-US" sz="1550" dirty="0">
+                <a:solidFill>
+                  <a:srgbClr val="17364A"/>
+                </a:solidFill>
+                <a:latin typeface="Aptos" pitchFamily="34" charset="0"/>
+                <a:ea typeface="Aptos" pitchFamily="34" charset="-122"/>
+                <a:cs typeface="Aptos" pitchFamily="34" charset="-120"/>
+              </a:rPr>
+              <a:t>Risk appetite should be expressed in plain language and translated into operating rules.</a:t>
+            </a:r>
+            <a:endParaRPr lang="en-US" sz="1550" dirty="0"/>
+          </a:p>
+        </p:txBody>
+      </p:sp>
+      <p:sp>
+        <p:nvSpPr>
+          <p:cNvPr id="13" name="Shape 11"/>
+          <p:cNvSpPr/>
+          <p:nvPr/>
+        </p:nvSpPr>
+        <p:spPr>
+          <a:xfrm>
+            <a:off x="7635240" y="2788920"/>
+            <a:ext cx="3474720" cy="1536192"/>
+          </a:xfrm>
+          <a:prstGeom prst="roundRect">
+            <a:avLst>
+              <a:gd name="adj" fmla="val 7143"/>
+            </a:avLst>
+          </a:prstGeom>
+          <a:solidFill>
+            <a:srgbClr val="FFFFFF">
+              <a:alpha val="88000"/>
+            </a:srgbClr>
+          </a:solidFill>
+          <a:ln w="12700">
+            <a:solidFill>
+              <a:srgbClr val="D6E8F2"/>
+            </a:solidFill>
+            <a:prstDash val="solid"/>
+          </a:ln>
+        </p:spPr>
+      </p:sp>
+      <p:sp>
+        <p:nvSpPr>
+          <p:cNvPr id="14" name="Shape 12"/>
+          <p:cNvSpPr/>
+          <p:nvPr/>
+        </p:nvSpPr>
+        <p:spPr>
+          <a:xfrm>
+            <a:off x="7891272" y="3108960"/>
+            <a:ext cx="566928" cy="566928"/>
           </a:xfrm>
           <a:prstGeom prst="ellipse">
             <a:avLst/>
@@ -3204,172 +3464,24 @@
       </p:sp>
       <p:sp>
         <p:nvSpPr>
-          <p:cNvPr id="9" name="Text 7"/>
-          <p:cNvSpPr/>
-          <p:nvPr/>
-        </p:nvSpPr>
-        <p:spPr>
-          <a:xfrm>
-            <a:off x="640080" y="731520"/>
-            <a:ext cx="420624" cy="164592"/>
-          </a:xfrm>
-          <a:prstGeom prst="rect">
-            <a:avLst/>
-          </a:prstGeom>
-          <a:noFill/>
-          <a:ln/>
-        </p:spPr>
-        <p:txBody>
-          <a:bodyPr wrap="square" lIns="0" tIns="0" rIns="0" bIns="0" rtlCol="0" anchor="ctr"/>
-          <a:lstStyle/>
-          <a:p>
-            <a:pPr algn="ctr" indent="0" marL="0">
-              <a:buNone/>
-            </a:pPr>
-            <a:r>
-              <a:rPr lang="en-US" sz="1100" b="1" dirty="0">
-                <a:solidFill>
-                  <a:srgbClr val="FFFFFF"/>
-                </a:solidFill>
-                <a:latin typeface="Aptos" pitchFamily="34" charset="0"/>
-                <a:ea typeface="Aptos" pitchFamily="34" charset="-122"/>
-                <a:cs typeface="Aptos" pitchFamily="34" charset="-120"/>
-              </a:rPr>
-              <a:t>6</a:t>
-            </a:r>
-            <a:endParaRPr lang="en-US" sz="1100" dirty="0"/>
-          </a:p>
-        </p:txBody>
-      </p:sp>
-      <p:sp>
-        <p:nvSpPr>
-          <p:cNvPr id="10" name="Text 8"/>
-          <p:cNvSpPr/>
-          <p:nvPr/>
-        </p:nvSpPr>
-        <p:spPr>
-          <a:xfrm>
-            <a:off x="640080" y="621792"/>
-            <a:ext cx="10881360" cy="713232"/>
-          </a:xfrm>
-          <a:prstGeom prst="rect">
-            <a:avLst/>
-          </a:prstGeom>
-          <a:noFill/>
-          <a:ln/>
-        </p:spPr>
-        <p:txBody>
-          <a:bodyPr wrap="square" lIns="0" tIns="0" rIns="0" bIns="0" rtlCol="0" anchor="ctr">
-            <a:normAutofit/>
-          </a:bodyPr>
-          <a:lstStyle/>
-          <a:p>
-            <a:pPr indent="0" marL="0">
-              <a:buNone/>
-            </a:pPr>
-            <a:r>
-              <a:rPr lang="en-US" sz="3400" b="1" dirty="0">
-                <a:solidFill>
-                  <a:srgbClr val="003A63"/>
-                </a:solidFill>
-                <a:latin typeface="Aptos Display" pitchFamily="34" charset="0"/>
-                <a:ea typeface="Aptos Display" pitchFamily="34" charset="-122"/>
-                <a:cs typeface="Aptos Display" pitchFamily="34" charset="-120"/>
-              </a:rPr>
-              <a:t>Technical and Governance Deep Dive</a:t>
-            </a:r>
-            <a:endParaRPr lang="en-US" sz="3400" dirty="0"/>
-          </a:p>
-        </p:txBody>
-      </p:sp>
-      <p:sp>
-        <p:nvSpPr>
-          <p:cNvPr id="11" name="Text 9"/>
-          <p:cNvSpPr/>
-          <p:nvPr/>
-        </p:nvSpPr>
-        <p:spPr>
-          <a:xfrm>
-            <a:off x="868680" y="1508760"/>
-            <a:ext cx="6537960" cy="4160520"/>
-          </a:xfrm>
-          <a:prstGeom prst="rect">
-            <a:avLst/>
-          </a:prstGeom>
-          <a:noFill/>
-          <a:ln/>
-        </p:spPr>
-        <p:txBody>
-          <a:bodyPr wrap="square" lIns="635" tIns="635" rIns="635" bIns="635" rtlCol="0" anchor="t">
-            <a:normAutofit/>
-          </a:bodyPr>
-          <a:lstStyle/>
-          <a:p>
-            <a:r>
-              <a:rPr lang="en-US" sz="2100" dirty="0">
-                <a:solidFill>
-                  <a:srgbClr val="17364A"/>
-                </a:solidFill>
-                <a:latin typeface="Aptos" pitchFamily="34" charset="0"/>
-                <a:ea typeface="Aptos" pitchFamily="34" charset="-122"/>
-                <a:cs typeface="Aptos" pitchFamily="34" charset="-120"/>
-              </a:rPr>
-              <a:t>Risk appetite should be expressed in plain language and translated into operating rules.</a:t>
-            </a:r>
-            <a:endParaRPr lang="en-US" sz="2100" dirty="0"/>
-          </a:p>
-          <a:p>
-            <a:r>
-              <a:rPr lang="en-US" sz="2100" dirty="0">
-                <a:solidFill>
-                  <a:srgbClr val="17364A"/>
-                </a:solidFill>
-                <a:latin typeface="Aptos" pitchFamily="34" charset="0"/>
-                <a:ea typeface="Aptos" pitchFamily="34" charset="-122"/>
-                <a:cs typeface="Aptos" pitchFamily="34" charset="-120"/>
-              </a:rPr>
-              <a:t>For example, an agency might state that it encourages low-risk AI uses that reduce internal.</a:t>
-            </a:r>
-            <a:endParaRPr lang="en-US" sz="2100" dirty="0"/>
-          </a:p>
-          <a:p>
-            <a:r>
-              <a:rPr lang="en-US" sz="2100" dirty="0">
-                <a:solidFill>
-                  <a:srgbClr val="17364A"/>
-                </a:solidFill>
-                <a:latin typeface="Aptos" pitchFamily="34" charset="0"/>
-                <a:ea typeface="Aptos" pitchFamily="34" charset="-122"/>
-                <a:cs typeface="Aptos" pitchFamily="34" charset="-120"/>
-              </a:rPr>
-              <a:t>It might state that it will consider moderate-risk uses involving operational data only with documented.</a:t>
-            </a:r>
-            <a:endParaRPr lang="en-US" sz="2100" dirty="0"/>
-          </a:p>
-        </p:txBody>
-      </p:sp>
-      <p:sp>
-        <p:nvSpPr>
-          <p:cNvPr id="12" name="Shape 10"/>
-          <p:cNvSpPr/>
-          <p:nvPr/>
-        </p:nvSpPr>
-        <p:spPr>
-          <a:xfrm>
-            <a:off x="7909560" y="1417320"/>
-            <a:ext cx="3154680" cy="1828800"/>
-          </a:xfrm>
-          <a:prstGeom prst="roundRect">
-            <a:avLst>
-              <a:gd name="adj" fmla="val 6000"/>
-            </a:avLst>
+          <p:cNvPr id="15" name="Shape 13"/>
+          <p:cNvSpPr/>
+          <p:nvPr/>
+        </p:nvSpPr>
+        <p:spPr>
+          <a:xfrm>
+            <a:off x="10287000" y="3108960"/>
+            <a:ext cx="566928" cy="566928"/>
+          </a:xfrm>
+          <a:prstGeom prst="ellipse">
+            <a:avLst/>
           </a:prstGeom>
           <a:solidFill>
-            <a:srgbClr val="EEF8ED"/>
+            <a:srgbClr val="2F8A28"/>
           </a:solidFill>
           <a:ln w="12700">
             <a:solidFill>
-              <a:srgbClr val="B9D7E6"/>
+              <a:srgbClr val="2F8A28"/>
             </a:solidFill>
             <a:prstDash val="solid"/>
           </a:ln>
@@ -3377,14 +3489,108 @@
       </p:sp>
       <p:sp>
         <p:nvSpPr>
-          <p:cNvPr id="13" name="Text 11"/>
-          <p:cNvSpPr/>
-          <p:nvPr/>
-        </p:nvSpPr>
-        <p:spPr>
-          <a:xfrm>
-            <a:off x="8074152" y="1563624"/>
-            <a:ext cx="2825496" cy="256032"/>
+          <p:cNvPr id="16" name="Shape 14"/>
+          <p:cNvSpPr/>
+          <p:nvPr/>
+        </p:nvSpPr>
+        <p:spPr>
+          <a:xfrm>
+            <a:off x="9089136" y="3456432"/>
+            <a:ext cx="566928" cy="566928"/>
+          </a:xfrm>
+          <a:prstGeom prst="ellipse">
+            <a:avLst/>
+          </a:prstGeom>
+          <a:solidFill>
+            <a:srgbClr val="6A4CA3"/>
+          </a:solidFill>
+          <a:ln w="12700">
+            <a:solidFill>
+              <a:srgbClr val="6A4CA3"/>
+            </a:solidFill>
+            <a:prstDash val="solid"/>
+          </a:ln>
+        </p:spPr>
+      </p:sp>
+      <p:sp>
+        <p:nvSpPr>
+          <p:cNvPr id="17" name="Shape 15"/>
+          <p:cNvSpPr/>
+          <p:nvPr/>
+        </p:nvSpPr>
+        <p:spPr>
+          <a:xfrm>
+            <a:off x="8385048" y="3419856"/>
+            <a:ext cx="1975104" cy="0"/>
+          </a:xfrm>
+          <a:prstGeom prst="line">
+            <a:avLst/>
+          </a:prstGeom>
+          <a:noFill/>
+          <a:ln w="25400">
+            <a:solidFill>
+              <a:srgbClr val="8ABBD8"/>
+            </a:solidFill>
+            <a:prstDash val="solid"/>
+          </a:ln>
+        </p:spPr>
+      </p:sp>
+      <p:sp>
+        <p:nvSpPr>
+          <p:cNvPr id="18" name="Shape 16"/>
+          <p:cNvSpPr/>
+          <p:nvPr/>
+        </p:nvSpPr>
+        <p:spPr>
+          <a:xfrm>
+            <a:off x="8202168" y="3630168"/>
+            <a:ext cx="1170432" cy="118872"/>
+          </a:xfrm>
+          <a:prstGeom prst="line">
+            <a:avLst/>
+          </a:prstGeom>
+          <a:noFill/>
+          <a:ln w="25400">
+            <a:solidFill>
+              <a:srgbClr val="8ABBD8"/>
+            </a:solidFill>
+            <a:prstDash val="solid"/>
+          </a:ln>
+        </p:spPr>
+      </p:sp>
+      <p:sp>
+        <p:nvSpPr>
+          <p:cNvPr id="19" name="Shape 17"/>
+          <p:cNvSpPr/>
+          <p:nvPr/>
+        </p:nvSpPr>
+        <p:spPr>
+          <a:xfrm>
+            <a:off x="10543032" y="3630168"/>
+            <a:ext cx="-1170432" cy="118872"/>
+          </a:xfrm>
+          <a:prstGeom prst="line">
+            <a:avLst/>
+          </a:prstGeom>
+          <a:noFill/>
+          <a:ln w="25400">
+            <a:solidFill>
+              <a:srgbClr val="8ABBD8"/>
+            </a:solidFill>
+            <a:prstDash val="solid"/>
+          </a:ln>
+        </p:spPr>
+      </p:sp>
+      <p:sp>
+        <p:nvSpPr>
+          <p:cNvPr id="20" name="Text 18"/>
+          <p:cNvSpPr/>
+          <p:nvPr/>
+        </p:nvSpPr>
+        <p:spPr>
+          <a:xfrm>
+            <a:off x="7863840" y="4069080"/>
+            <a:ext cx="3017520" cy="164592"/>
           </a:xfrm>
           <a:prstGeom prst="rect">
             <a:avLst/>
@@ -3396,79 +3602,38 @@
           <a:bodyPr wrap="square" lIns="0" tIns="0" rIns="0" bIns="0" rtlCol="0" anchor="ctr"/>
           <a:lstStyle/>
           <a:p>
-            <a:pPr indent="0" marL="0">
-              <a:buNone/>
-            </a:pPr>
-            <a:r>
-              <a:rPr lang="en-US" sz="1300" b="1" dirty="0">
-                <a:solidFill>
-                  <a:srgbClr val="0068B7"/>
-                </a:solidFill>
-                <a:latin typeface="Aptos" pitchFamily="34" charset="0"/>
-                <a:ea typeface="Aptos" pitchFamily="34" charset="-122"/>
-                <a:cs typeface="Aptos" pitchFamily="34" charset="-120"/>
-              </a:rPr>
-              <a:t>Key idea</a:t>
-            </a:r>
-            <a:endParaRPr lang="en-US" sz="1300" dirty="0"/>
-          </a:p>
-        </p:txBody>
-      </p:sp>
-      <p:sp>
-        <p:nvSpPr>
-          <p:cNvPr id="14" name="Text 12"/>
-          <p:cNvSpPr/>
-          <p:nvPr/>
-        </p:nvSpPr>
-        <p:spPr>
-          <a:xfrm>
-            <a:off x="8074152" y="1920240"/>
-            <a:ext cx="2825496" cy="1188720"/>
-          </a:xfrm>
-          <a:prstGeom prst="rect">
-            <a:avLst/>
-          </a:prstGeom>
-          <a:noFill/>
-          <a:ln/>
-        </p:spPr>
-        <p:txBody>
-          <a:bodyPr wrap="square" lIns="0" tIns="0" rIns="0" bIns="0" rtlCol="0" anchor="t">
-            <a:normAutofit/>
-          </a:bodyPr>
-          <a:lstStyle/>
-          <a:p>
-            <a:pPr indent="0" marL="0">
-              <a:buNone/>
-            </a:pPr>
-            <a:r>
-              <a:rPr lang="en-US" sz="1550" dirty="0">
-                <a:solidFill>
-                  <a:srgbClr val="17364A"/>
-                </a:solidFill>
-                <a:latin typeface="Aptos" pitchFamily="34" charset="0"/>
-                <a:ea typeface="Aptos" pitchFamily="34" charset="-122"/>
-                <a:cs typeface="Aptos" pitchFamily="34" charset="-120"/>
-              </a:rPr>
-              <a:t>Risk appetite should be expressed in plain language and translated into operating rules.</a:t>
-            </a:r>
-            <a:endParaRPr lang="en-US" sz="1550" dirty="0"/>
-          </a:p>
-        </p:txBody>
-      </p:sp>
-      <p:sp>
-        <p:nvSpPr>
-          <p:cNvPr id="15" name="Shape 13"/>
-          <p:cNvSpPr/>
-          <p:nvPr/>
-        </p:nvSpPr>
-        <p:spPr>
-          <a:xfrm>
-            <a:off x="7909560" y="3520440"/>
-            <a:ext cx="3154680" cy="1737360"/>
+            <a:pPr algn="ctr" indent="0" marL="0">
+              <a:buNone/>
+            </a:pPr>
+            <a:r>
+              <a:rPr lang="en-US" sz="900" b="1" dirty="0">
+                <a:solidFill>
+                  <a:srgbClr val="003A63"/>
+                </a:solidFill>
+                <a:latin typeface="Aptos" pitchFamily="34" charset="0"/>
+                <a:ea typeface="Aptos" pitchFamily="34" charset="-122"/>
+                <a:cs typeface="Aptos" pitchFamily="34" charset="-120"/>
+              </a:rPr>
+              <a:t>Decision rights</a:t>
+            </a:r>
+            <a:endParaRPr lang="en-US" sz="900" dirty="0"/>
+          </a:p>
+        </p:txBody>
+      </p:sp>
+      <p:sp>
+        <p:nvSpPr>
+          <p:cNvPr id="21" name="Shape 19"/>
+          <p:cNvSpPr/>
+          <p:nvPr/>
+        </p:nvSpPr>
+        <p:spPr>
+          <a:xfrm>
+            <a:off x="7635240" y="4498848"/>
+            <a:ext cx="3474720" cy="1143000"/>
           </a:xfrm>
           <a:prstGeom prst="roundRect">
             <a:avLst>
-              <a:gd name="adj" fmla="val 6316"/>
+              <a:gd name="adj" fmla="val 9600"/>
             </a:avLst>
           </a:prstGeom>
           <a:solidFill>
@@ -3484,14 +3649,14 @@
       </p:sp>
       <p:sp>
         <p:nvSpPr>
-          <p:cNvPr id="16" name="Text 14"/>
-          <p:cNvSpPr/>
-          <p:nvPr/>
-        </p:nvSpPr>
-        <p:spPr>
-          <a:xfrm>
-            <a:off x="8074152" y="3666744"/>
-            <a:ext cx="2825496" cy="256032"/>
+          <p:cNvPr id="22" name="Text 20"/>
+          <p:cNvSpPr/>
+          <p:nvPr/>
+        </p:nvSpPr>
+        <p:spPr>
+          <a:xfrm>
+            <a:off x="7799832" y="4645152"/>
+            <a:ext cx="3145536" cy="256032"/>
           </a:xfrm>
           <a:prstGeom prst="rect">
             <a:avLst/>
@@ -3515,7 +3680,7 @@
                 <a:ea typeface="Aptos" pitchFamily="34" charset="-122"/>
                 <a:cs typeface="Aptos" pitchFamily="34" charset="-120"/>
               </a:rPr>
-              <a:t>Use this for</a:t>
+              <a:t>What to document</a:t>
             </a:r>
             <a:endParaRPr lang="en-US" sz="1300" dirty="0"/>
           </a:p>
@@ -3523,14 +3688,14 @@
       </p:sp>
       <p:sp>
         <p:nvSpPr>
-          <p:cNvPr id="17" name="Text 15"/>
-          <p:cNvSpPr/>
-          <p:nvPr/>
-        </p:nvSpPr>
-        <p:spPr>
-          <a:xfrm>
-            <a:off x="8074152" y="4023360"/>
-            <a:ext cx="2825496" cy="1097280"/>
+          <p:cNvPr id="23" name="Text 21"/>
+          <p:cNvSpPr/>
+          <p:nvPr/>
+        </p:nvSpPr>
+        <p:spPr>
+          <a:xfrm>
+            <a:off x="7799832" y="5001768"/>
+            <a:ext cx="3145536" cy="502920"/>
           </a:xfrm>
           <a:prstGeom prst="rect">
             <a:avLst/>
@@ -3556,7 +3721,7 @@
                 <a:ea typeface="Aptos" pitchFamily="34" charset="-122"/>
                 <a:cs typeface="Aptos" pitchFamily="34" charset="-120"/>
               </a:rPr>
-              <a:t>Connect the concept to public health decisions, safeguards, documentation, or implementation work.</a:t>
+              <a:t>Translate this concept into clear decision rights, review steps, documentation expectations, and escalation paths before an AI-supported workflow is approved.</a:t>
             </a:r>
             <a:endParaRPr lang="en-US" sz="1550" dirty="0"/>
           </a:p>
@@ -3730,8 +3895,8 @@
         </p:nvSpPr>
         <p:spPr>
           <a:xfrm>
-            <a:off x="9966960" y="6537960"/>
-            <a:ext cx="1645920" cy="201168"/>
+            <a:off x="9646920" y="6537960"/>
+            <a:ext cx="1965960" cy="201168"/>
           </a:xfrm>
           <a:prstGeom prst="rect">
             <a:avLst/>
@@ -3755,7 +3920,7 @@
                 <a:ea typeface="Aptos" pitchFamily="34" charset="-122"/>
                 <a:cs typeface="Aptos" pitchFamily="34" charset="-120"/>
               </a:rPr>
-              <a:t>Â© Paula Soper</a:t>
+              <a:t>Copyright Paula Soper</a:t>
             </a:r>
             <a:endParaRPr lang="en-US" sz="800" dirty="0"/>
           </a:p>
@@ -3802,77 +3967,13 @@
       </p:sp>
       <p:sp>
         <p:nvSpPr>
-          <p:cNvPr id="8" name="Shape 6"/>
+          <p:cNvPr id="8" name="Text 6"/>
           <p:cNvSpPr/>
           <p:nvPr/>
         </p:nvSpPr>
         <p:spPr>
           <a:xfrm>
             <a:off x="640080" y="658368"/>
-            <a:ext cx="420624" cy="420624"/>
-          </a:xfrm>
-          <a:prstGeom prst="ellipse">
-            <a:avLst/>
-          </a:prstGeom>
-          <a:solidFill>
-            <a:srgbClr val="0068B7"/>
-          </a:solidFill>
-          <a:ln w="12700">
-            <a:solidFill>
-              <a:srgbClr val="0068B7"/>
-            </a:solidFill>
-            <a:prstDash val="solid"/>
-          </a:ln>
-        </p:spPr>
-      </p:sp>
-      <p:sp>
-        <p:nvSpPr>
-          <p:cNvPr id="9" name="Text 7"/>
-          <p:cNvSpPr/>
-          <p:nvPr/>
-        </p:nvSpPr>
-        <p:spPr>
-          <a:xfrm>
-            <a:off x="640080" y="731520"/>
-            <a:ext cx="420624" cy="164592"/>
-          </a:xfrm>
-          <a:prstGeom prst="rect">
-            <a:avLst/>
-          </a:prstGeom>
-          <a:noFill/>
-          <a:ln/>
-        </p:spPr>
-        <p:txBody>
-          <a:bodyPr wrap="square" lIns="0" tIns="0" rIns="0" bIns="0" rtlCol="0" anchor="ctr"/>
-          <a:lstStyle/>
-          <a:p>
-            <a:pPr algn="ctr" indent="0" marL="0">
-              <a:buNone/>
-            </a:pPr>
-            <a:r>
-              <a:rPr lang="en-US" sz="1100" b="1" dirty="0">
-                <a:solidFill>
-                  <a:srgbClr val="FFFFFF"/>
-                </a:solidFill>
-                <a:latin typeface="Aptos" pitchFamily="34" charset="0"/>
-                <a:ea typeface="Aptos" pitchFamily="34" charset="-122"/>
-                <a:cs typeface="Aptos" pitchFamily="34" charset="-120"/>
-              </a:rPr>
-              <a:t>7</a:t>
-            </a:r>
-            <a:endParaRPr lang="en-US" sz="1100" dirty="0"/>
-          </a:p>
-        </p:txBody>
-      </p:sp>
-      <p:sp>
-        <p:nvSpPr>
-          <p:cNvPr id="10" name="Text 8"/>
-          <p:cNvSpPr/>
-          <p:nvPr/>
-        </p:nvSpPr>
-        <p:spPr>
-          <a:xfrm>
-            <a:off x="640080" y="621792"/>
             <a:ext cx="10881360" cy="713232"/>
           </a:xfrm>
           <a:prstGeom prst="rect">
@@ -3907,14 +4008,14 @@
       </p:sp>
       <p:sp>
         <p:nvSpPr>
-          <p:cNvPr id="11" name="Text 9"/>
+          <p:cNvPr id="9" name="Text 7"/>
           <p:cNvSpPr/>
           <p:nvPr/>
         </p:nvSpPr>
         <p:spPr>
           <a:xfrm>
             <a:off x="868680" y="1508760"/>
-            <a:ext cx="6537960" cy="4160520"/>
+            <a:ext cx="6309360" cy="4160520"/>
           </a:xfrm>
           <a:prstGeom prst="rect">
             <a:avLst/>
@@ -3973,18 +4074,18 @@
       </p:sp>
       <p:sp>
         <p:nvSpPr>
-          <p:cNvPr id="12" name="Shape 10"/>
-          <p:cNvSpPr/>
-          <p:nvPr/>
-        </p:nvSpPr>
-        <p:spPr>
-          <a:xfrm>
-            <a:off x="7909560" y="1417320"/>
-            <a:ext cx="3154680" cy="1828800"/>
+          <p:cNvPr id="10" name="Shape 8"/>
+          <p:cNvSpPr/>
+          <p:nvPr/>
+        </p:nvSpPr>
+        <p:spPr>
+          <a:xfrm>
+            <a:off x="7635240" y="1325880"/>
+            <a:ext cx="3474720" cy="1325880"/>
           </a:xfrm>
           <a:prstGeom prst="roundRect">
             <a:avLst>
-              <a:gd name="adj" fmla="val 6000"/>
+              <a:gd name="adj" fmla="val 8276"/>
             </a:avLst>
           </a:prstGeom>
           <a:solidFill>
@@ -4000,14 +4101,14 @@
       </p:sp>
       <p:sp>
         <p:nvSpPr>
-          <p:cNvPr id="13" name="Text 11"/>
-          <p:cNvSpPr/>
-          <p:nvPr/>
-        </p:nvSpPr>
-        <p:spPr>
-          <a:xfrm>
-            <a:off x="8074152" y="1563624"/>
-            <a:ext cx="2825496" cy="256032"/>
+          <p:cNvPr id="11" name="Text 9"/>
+          <p:cNvSpPr/>
+          <p:nvPr/>
+        </p:nvSpPr>
+        <p:spPr>
+          <a:xfrm>
+            <a:off x="7799832" y="1472184"/>
+            <a:ext cx="3145536" cy="256032"/>
           </a:xfrm>
           <a:prstGeom prst="rect">
             <a:avLst/>
@@ -4031,7 +4132,7 @@
                 <a:ea typeface="Aptos" pitchFamily="34" charset="-122"/>
                 <a:cs typeface="Aptos" pitchFamily="34" charset="-120"/>
               </a:rPr>
-              <a:t>Key idea</a:t>
+              <a:t>Risk check</a:t>
             </a:r>
             <a:endParaRPr lang="en-US" sz="1300" dirty="0"/>
           </a:p>
@@ -4039,14 +4140,14 @@
       </p:sp>
       <p:sp>
         <p:nvSpPr>
-          <p:cNvPr id="14" name="Text 12"/>
-          <p:cNvSpPr/>
-          <p:nvPr/>
-        </p:nvSpPr>
-        <p:spPr>
-          <a:xfrm>
-            <a:off x="8074152" y="1920240"/>
-            <a:ext cx="2825496" cy="1188720"/>
+          <p:cNvPr id="12" name="Text 10"/>
+          <p:cNvSpPr/>
+          <p:nvPr/>
+        </p:nvSpPr>
+        <p:spPr>
+          <a:xfrm>
+            <a:off x="7799832" y="1828800"/>
+            <a:ext cx="3145536" cy="685800"/>
           </a:xfrm>
           <a:prstGeom prst="rect">
             <a:avLst/>
@@ -4080,18 +4181,171 @@
       </p:sp>
       <p:sp>
         <p:nvSpPr>
-          <p:cNvPr id="15" name="Shape 13"/>
-          <p:cNvSpPr/>
-          <p:nvPr/>
-        </p:nvSpPr>
-        <p:spPr>
-          <a:xfrm>
-            <a:off x="7909560" y="3520440"/>
-            <a:ext cx="3154680" cy="1737360"/>
+          <p:cNvPr id="13" name="Shape 11"/>
+          <p:cNvSpPr/>
+          <p:nvPr/>
+        </p:nvSpPr>
+        <p:spPr>
+          <a:xfrm>
+            <a:off x="7635240" y="2788920"/>
+            <a:ext cx="3474720" cy="1536192"/>
           </a:xfrm>
           <a:prstGeom prst="roundRect">
             <a:avLst>
-              <a:gd name="adj" fmla="val 6316"/>
+              <a:gd name="adj" fmla="val 7143"/>
+            </a:avLst>
+          </a:prstGeom>
+          <a:solidFill>
+            <a:srgbClr val="FFFFFF">
+              <a:alpha val="88000"/>
+            </a:srgbClr>
+          </a:solidFill>
+          <a:ln w="12700">
+            <a:solidFill>
+              <a:srgbClr val="D6E8F2"/>
+            </a:solidFill>
+            <a:prstDash val="solid"/>
+          </a:ln>
+        </p:spPr>
+      </p:sp>
+      <p:sp>
+        <p:nvSpPr>
+          <p:cNvPr id="14" name="Shape 12"/>
+          <p:cNvSpPr/>
+          <p:nvPr/>
+        </p:nvSpPr>
+        <p:spPr>
+          <a:xfrm>
+            <a:off x="8046720" y="3108960"/>
+            <a:ext cx="2651760" cy="896112"/>
+          </a:xfrm>
+          <a:prstGeom prst="arc">
+            <a:avLst/>
+          </a:prstGeom>
+          <a:noFill/>
+          <a:ln w="25400">
+            <a:solidFill>
+              <a:srgbClr val="0068B7"/>
+            </a:solidFill>
+            <a:prstDash val="solid"/>
+          </a:ln>
+        </p:spPr>
+      </p:sp>
+      <p:sp>
+        <p:nvSpPr>
+          <p:cNvPr id="15" name="Text 13"/>
+          <p:cNvSpPr/>
+          <p:nvPr/>
+        </p:nvSpPr>
+        <p:spPr>
+          <a:xfrm>
+            <a:off x="7909560" y="3099816"/>
+            <a:ext cx="2926080" cy="256032"/>
+          </a:xfrm>
+          <a:prstGeom prst="rect">
+            <a:avLst/>
+          </a:prstGeom>
+          <a:noFill/>
+          <a:ln/>
+        </p:spPr>
+        <p:txBody>
+          <a:bodyPr wrap="square" lIns="0" tIns="0" rIns="0" bIns="0" rtlCol="0" anchor="ctr"/>
+          <a:lstStyle/>
+          <a:p>
+            <a:pPr algn="ctr" indent="0" marL="0">
+              <a:buNone/>
+            </a:pPr>
+            <a:r>
+              <a:rPr lang="en-US" sz="1500" b="1" dirty="0">
+                <a:solidFill>
+                  <a:srgbClr val="003A63"/>
+                </a:solidFill>
+                <a:latin typeface="Aptos" pitchFamily="34" charset="0"/>
+                <a:ea typeface="Aptos" pitchFamily="34" charset="-122"/>
+                <a:cs typeface="Aptos" pitchFamily="34" charset="-120"/>
+              </a:rPr>
+              <a:t>Risk</a:t>
+            </a:r>
+            <a:endParaRPr lang="en-US" sz="1500" dirty="0"/>
+          </a:p>
+        </p:txBody>
+      </p:sp>
+      <p:sp>
+        <p:nvSpPr>
+          <p:cNvPr id="16" name="Shape 14"/>
+          <p:cNvSpPr/>
+          <p:nvPr/>
+        </p:nvSpPr>
+        <p:spPr>
+          <a:xfrm>
+            <a:off x="8366760" y="3639312"/>
+            <a:ext cx="2011680" cy="0"/>
+          </a:xfrm>
+          <a:prstGeom prst="line">
+            <a:avLst/>
+          </a:prstGeom>
+          <a:noFill/>
+          <a:ln w="63500">
+            <a:solidFill>
+              <a:srgbClr val="2F8A28"/>
+            </a:solidFill>
+            <a:prstDash val="solid"/>
+          </a:ln>
+        </p:spPr>
+      </p:sp>
+      <p:sp>
+        <p:nvSpPr>
+          <p:cNvPr id="17" name="Text 15"/>
+          <p:cNvSpPr/>
+          <p:nvPr/>
+        </p:nvSpPr>
+        <p:spPr>
+          <a:xfrm>
+            <a:off x="7909560" y="3849624"/>
+            <a:ext cx="2926080" cy="164592"/>
+          </a:xfrm>
+          <a:prstGeom prst="rect">
+            <a:avLst/>
+          </a:prstGeom>
+          <a:noFill/>
+          <a:ln/>
+        </p:spPr>
+        <p:txBody>
+          <a:bodyPr wrap="square" lIns="0" tIns="0" rIns="0" bIns="0" rtlCol="0" anchor="ctr"/>
+          <a:lstStyle/>
+          <a:p>
+            <a:pPr algn="ctr" indent="0" marL="0">
+              <a:buNone/>
+            </a:pPr>
+            <a:r>
+              <a:rPr lang="en-US" sz="900" dirty="0">
+                <a:solidFill>
+                  <a:srgbClr val="003A63"/>
+                </a:solidFill>
+                <a:latin typeface="Aptos" pitchFamily="34" charset="0"/>
+                <a:ea typeface="Aptos" pitchFamily="34" charset="-122"/>
+                <a:cs typeface="Aptos" pitchFamily="34" charset="-120"/>
+              </a:rPr>
+              <a:t>Human review</a:t>
+            </a:r>
+            <a:endParaRPr lang="en-US" sz="900" dirty="0"/>
+          </a:p>
+        </p:txBody>
+      </p:sp>
+      <p:sp>
+        <p:nvSpPr>
+          <p:cNvPr id="18" name="Shape 16"/>
+          <p:cNvSpPr/>
+          <p:nvPr/>
+        </p:nvSpPr>
+        <p:spPr>
+          <a:xfrm>
+            <a:off x="7635240" y="4498848"/>
+            <a:ext cx="3474720" cy="1143000"/>
+          </a:xfrm>
+          <a:prstGeom prst="roundRect">
+            <a:avLst>
+              <a:gd name="adj" fmla="val 9600"/>
             </a:avLst>
           </a:prstGeom>
           <a:solidFill>
@@ -4107,14 +4361,14 @@
       </p:sp>
       <p:sp>
         <p:nvSpPr>
-          <p:cNvPr id="16" name="Text 14"/>
-          <p:cNvSpPr/>
-          <p:nvPr/>
-        </p:nvSpPr>
-        <p:spPr>
-          <a:xfrm>
-            <a:off x="8074152" y="3666744"/>
-            <a:ext cx="2825496" cy="256032"/>
+          <p:cNvPr id="19" name="Text 17"/>
+          <p:cNvSpPr/>
+          <p:nvPr/>
+        </p:nvSpPr>
+        <p:spPr>
+          <a:xfrm>
+            <a:off x="7799832" y="4645152"/>
+            <a:ext cx="3145536" cy="256032"/>
           </a:xfrm>
           <a:prstGeom prst="rect">
             <a:avLst/>
@@ -4138,7 +4392,7 @@
                 <a:ea typeface="Aptos" pitchFamily="34" charset="-122"/>
                 <a:cs typeface="Aptos" pitchFamily="34" charset="-120"/>
               </a:rPr>
-              <a:t>Use this for</a:t>
+              <a:t>Safeguard to plan</a:t>
             </a:r>
             <a:endParaRPr lang="en-US" sz="1300" dirty="0"/>
           </a:p>
@@ -4146,14 +4400,14 @@
       </p:sp>
       <p:sp>
         <p:nvSpPr>
-          <p:cNvPr id="17" name="Text 15"/>
-          <p:cNvSpPr/>
-          <p:nvPr/>
-        </p:nvSpPr>
-        <p:spPr>
-          <a:xfrm>
-            <a:off x="8074152" y="4023360"/>
-            <a:ext cx="2825496" cy="1097280"/>
+          <p:cNvPr id="20" name="Text 18"/>
+          <p:cNvSpPr/>
+          <p:nvPr/>
+        </p:nvSpPr>
+        <p:spPr>
+          <a:xfrm>
+            <a:off x="7799832" y="5001768"/>
+            <a:ext cx="3145536" cy="502920"/>
           </a:xfrm>
           <a:prstGeom prst="rect">
             <a:avLst/>
@@ -4179,7 +4433,7 @@
                 <a:ea typeface="Aptos" pitchFamily="34" charset="-122"/>
                 <a:cs typeface="Aptos" pitchFamily="34" charset="-120"/>
               </a:rPr>
-              <a:t>Connect the concept to public health decisions, safeguards, documentation, or implementation work.</a:t>
+              <a:t>Identify what could go wrong, who could be affected, what safeguards are needed, and what evidence should be reviewed before use expands.</a:t>
             </a:r>
             <a:endParaRPr lang="en-US" sz="1550" dirty="0"/>
           </a:p>
@@ -4353,8 +4607,8 @@
         </p:nvSpPr>
         <p:spPr>
           <a:xfrm>
-            <a:off x="9966960" y="6537960"/>
-            <a:ext cx="1645920" cy="201168"/>
+            <a:off x="9646920" y="6537960"/>
+            <a:ext cx="1965960" cy="201168"/>
           </a:xfrm>
           <a:prstGeom prst="rect">
             <a:avLst/>
@@ -4378,7 +4632,7 @@
                 <a:ea typeface="Aptos" pitchFamily="34" charset="-122"/>
                 <a:cs typeface="Aptos" pitchFamily="34" charset="-120"/>
               </a:rPr>
-              <a:t>Â© Paula Soper</a:t>
+              <a:t>Copyright Paula Soper</a:t>
             </a:r>
             <a:endParaRPr lang="en-US" sz="800" dirty="0"/>
           </a:p>
@@ -4425,77 +4679,13 @@
       </p:sp>
       <p:sp>
         <p:nvSpPr>
-          <p:cNvPr id="8" name="Shape 6"/>
+          <p:cNvPr id="8" name="Text 6"/>
           <p:cNvSpPr/>
           <p:nvPr/>
         </p:nvSpPr>
         <p:spPr>
           <a:xfrm>
             <a:off x="640080" y="658368"/>
-            <a:ext cx="420624" cy="420624"/>
-          </a:xfrm>
-          <a:prstGeom prst="ellipse">
-            <a:avLst/>
-          </a:prstGeom>
-          <a:solidFill>
-            <a:srgbClr val="0068B7"/>
-          </a:solidFill>
-          <a:ln w="12700">
-            <a:solidFill>
-              <a:srgbClr val="0068B7"/>
-            </a:solidFill>
-            <a:prstDash val="solid"/>
-          </a:ln>
-        </p:spPr>
-      </p:sp>
-      <p:sp>
-        <p:nvSpPr>
-          <p:cNvPr id="9" name="Text 7"/>
-          <p:cNvSpPr/>
-          <p:nvPr/>
-        </p:nvSpPr>
-        <p:spPr>
-          <a:xfrm>
-            <a:off x="640080" y="731520"/>
-            <a:ext cx="420624" cy="164592"/>
-          </a:xfrm>
-          <a:prstGeom prst="rect">
-            <a:avLst/>
-          </a:prstGeom>
-          <a:noFill/>
-          <a:ln/>
-        </p:spPr>
-        <p:txBody>
-          <a:bodyPr wrap="square" lIns="0" tIns="0" rIns="0" bIns="0" rtlCol="0" anchor="ctr"/>
-          <a:lstStyle/>
-          <a:p>
-            <a:pPr algn="ctr" indent="0" marL="0">
-              <a:buNone/>
-            </a:pPr>
-            <a:r>
-              <a:rPr lang="en-US" sz="1100" b="1" dirty="0">
-                <a:solidFill>
-                  <a:srgbClr val="FFFFFF"/>
-                </a:solidFill>
-                <a:latin typeface="Aptos" pitchFamily="34" charset="0"/>
-                <a:ea typeface="Aptos" pitchFamily="34" charset="-122"/>
-                <a:cs typeface="Aptos" pitchFamily="34" charset="-120"/>
-              </a:rPr>
-              <a:t>8</a:t>
-            </a:r>
-            <a:endParaRPr lang="en-US" sz="1100" dirty="0"/>
-          </a:p>
-        </p:txBody>
-      </p:sp>
-      <p:sp>
-        <p:nvSpPr>
-          <p:cNvPr id="10" name="Text 8"/>
-          <p:cNvSpPr/>
-          <p:nvPr/>
-        </p:nvSpPr>
-        <p:spPr>
-          <a:xfrm>
-            <a:off x="640080" y="621792"/>
             <a:ext cx="10881360" cy="713232"/>
           </a:xfrm>
           <a:prstGeom prst="rect">
@@ -4530,14 +4720,14 @@
       </p:sp>
       <p:sp>
         <p:nvSpPr>
-          <p:cNvPr id="11" name="Text 9"/>
+          <p:cNvPr id="9" name="Text 7"/>
           <p:cNvSpPr/>
           <p:nvPr/>
         </p:nvSpPr>
         <p:spPr>
           <a:xfrm>
             <a:off x="868680" y="1508760"/>
-            <a:ext cx="6537960" cy="4160520"/>
+            <a:ext cx="6309360" cy="4160520"/>
           </a:xfrm>
           <a:prstGeom prst="rect">
             <a:avLst/>
@@ -4596,18 +4786,18 @@
       </p:sp>
       <p:sp>
         <p:nvSpPr>
-          <p:cNvPr id="12" name="Shape 10"/>
-          <p:cNvSpPr/>
-          <p:nvPr/>
-        </p:nvSpPr>
-        <p:spPr>
-          <a:xfrm>
-            <a:off x="7909560" y="1417320"/>
-            <a:ext cx="3154680" cy="1828800"/>
+          <p:cNvPr id="10" name="Shape 8"/>
+          <p:cNvSpPr/>
+          <p:nvPr/>
+        </p:nvSpPr>
+        <p:spPr>
+          <a:xfrm>
+            <a:off x="7635240" y="1325880"/>
+            <a:ext cx="3474720" cy="1325880"/>
           </a:xfrm>
           <a:prstGeom prst="roundRect">
             <a:avLst>
-              <a:gd name="adj" fmla="val 6000"/>
+              <a:gd name="adj" fmla="val 8276"/>
             </a:avLst>
           </a:prstGeom>
           <a:solidFill>
@@ -4623,14 +4813,14 @@
       </p:sp>
       <p:sp>
         <p:nvSpPr>
-          <p:cNvPr id="13" name="Text 11"/>
-          <p:cNvSpPr/>
-          <p:nvPr/>
-        </p:nvSpPr>
-        <p:spPr>
-          <a:xfrm>
-            <a:off x="8074152" y="1563624"/>
-            <a:ext cx="2825496" cy="256032"/>
+          <p:cNvPr id="11" name="Text 9"/>
+          <p:cNvSpPr/>
+          <p:nvPr/>
+        </p:nvSpPr>
+        <p:spPr>
+          <a:xfrm>
+            <a:off x="7799832" y="1472184"/>
+            <a:ext cx="3145536" cy="256032"/>
           </a:xfrm>
           <a:prstGeom prst="rect">
             <a:avLst/>
@@ -4654,7 +4844,7 @@
                 <a:ea typeface="Aptos" pitchFamily="34" charset="-122"/>
                 <a:cs typeface="Aptos" pitchFamily="34" charset="-120"/>
               </a:rPr>
-              <a:t>Key idea</a:t>
+              <a:t>Risk check</a:t>
             </a:r>
             <a:endParaRPr lang="en-US" sz="1300" dirty="0"/>
           </a:p>
@@ -4662,14 +4852,14 @@
       </p:sp>
       <p:sp>
         <p:nvSpPr>
-          <p:cNvPr id="14" name="Text 12"/>
-          <p:cNvSpPr/>
-          <p:nvPr/>
-        </p:nvSpPr>
-        <p:spPr>
-          <a:xfrm>
-            <a:off x="8074152" y="1920240"/>
-            <a:ext cx="2825496" cy="1188720"/>
+          <p:cNvPr id="12" name="Text 10"/>
+          <p:cNvSpPr/>
+          <p:nvPr/>
+        </p:nvSpPr>
+        <p:spPr>
+          <a:xfrm>
+            <a:off x="7799832" y="1828800"/>
+            <a:ext cx="3145536" cy="685800"/>
           </a:xfrm>
           <a:prstGeom prst="rect">
             <a:avLst/>
@@ -4703,18 +4893,171 @@
       </p:sp>
       <p:sp>
         <p:nvSpPr>
-          <p:cNvPr id="15" name="Shape 13"/>
-          <p:cNvSpPr/>
-          <p:nvPr/>
-        </p:nvSpPr>
-        <p:spPr>
-          <a:xfrm>
-            <a:off x="7909560" y="3520440"/>
-            <a:ext cx="3154680" cy="1737360"/>
+          <p:cNvPr id="13" name="Shape 11"/>
+          <p:cNvSpPr/>
+          <p:nvPr/>
+        </p:nvSpPr>
+        <p:spPr>
+          <a:xfrm>
+            <a:off x="7635240" y="2788920"/>
+            <a:ext cx="3474720" cy="1536192"/>
           </a:xfrm>
           <a:prstGeom prst="roundRect">
             <a:avLst>
-              <a:gd name="adj" fmla="val 6316"/>
+              <a:gd name="adj" fmla="val 7143"/>
+            </a:avLst>
+          </a:prstGeom>
+          <a:solidFill>
+            <a:srgbClr val="FFFFFF">
+              <a:alpha val="88000"/>
+            </a:srgbClr>
+          </a:solidFill>
+          <a:ln w="12700">
+            <a:solidFill>
+              <a:srgbClr val="D6E8F2"/>
+            </a:solidFill>
+            <a:prstDash val="solid"/>
+          </a:ln>
+        </p:spPr>
+      </p:sp>
+      <p:sp>
+        <p:nvSpPr>
+          <p:cNvPr id="14" name="Shape 12"/>
+          <p:cNvSpPr/>
+          <p:nvPr/>
+        </p:nvSpPr>
+        <p:spPr>
+          <a:xfrm>
+            <a:off x="8046720" y="3108960"/>
+            <a:ext cx="2651760" cy="896112"/>
+          </a:xfrm>
+          <a:prstGeom prst="arc">
+            <a:avLst/>
+          </a:prstGeom>
+          <a:noFill/>
+          <a:ln w="25400">
+            <a:solidFill>
+              <a:srgbClr val="0068B7"/>
+            </a:solidFill>
+            <a:prstDash val="solid"/>
+          </a:ln>
+        </p:spPr>
+      </p:sp>
+      <p:sp>
+        <p:nvSpPr>
+          <p:cNvPr id="15" name="Text 13"/>
+          <p:cNvSpPr/>
+          <p:nvPr/>
+        </p:nvSpPr>
+        <p:spPr>
+          <a:xfrm>
+            <a:off x="7909560" y="3099816"/>
+            <a:ext cx="2926080" cy="256032"/>
+          </a:xfrm>
+          <a:prstGeom prst="rect">
+            <a:avLst/>
+          </a:prstGeom>
+          <a:noFill/>
+          <a:ln/>
+        </p:spPr>
+        <p:txBody>
+          <a:bodyPr wrap="square" lIns="0" tIns="0" rIns="0" bIns="0" rtlCol="0" anchor="ctr"/>
+          <a:lstStyle/>
+          <a:p>
+            <a:pPr algn="ctr" indent="0" marL="0">
+              <a:buNone/>
+            </a:pPr>
+            <a:r>
+              <a:rPr lang="en-US" sz="1500" b="1" dirty="0">
+                <a:solidFill>
+                  <a:srgbClr val="003A63"/>
+                </a:solidFill>
+                <a:latin typeface="Aptos" pitchFamily="34" charset="0"/>
+                <a:ea typeface="Aptos" pitchFamily="34" charset="-122"/>
+                <a:cs typeface="Aptos" pitchFamily="34" charset="-120"/>
+              </a:rPr>
+              <a:t>Risk</a:t>
+            </a:r>
+            <a:endParaRPr lang="en-US" sz="1500" dirty="0"/>
+          </a:p>
+        </p:txBody>
+      </p:sp>
+      <p:sp>
+        <p:nvSpPr>
+          <p:cNvPr id="16" name="Shape 14"/>
+          <p:cNvSpPr/>
+          <p:nvPr/>
+        </p:nvSpPr>
+        <p:spPr>
+          <a:xfrm>
+            <a:off x="8366760" y="3639312"/>
+            <a:ext cx="2011680" cy="0"/>
+          </a:xfrm>
+          <a:prstGeom prst="line">
+            <a:avLst/>
+          </a:prstGeom>
+          <a:noFill/>
+          <a:ln w="63500">
+            <a:solidFill>
+              <a:srgbClr val="2F8A28"/>
+            </a:solidFill>
+            <a:prstDash val="solid"/>
+          </a:ln>
+        </p:spPr>
+      </p:sp>
+      <p:sp>
+        <p:nvSpPr>
+          <p:cNvPr id="17" name="Text 15"/>
+          <p:cNvSpPr/>
+          <p:nvPr/>
+        </p:nvSpPr>
+        <p:spPr>
+          <a:xfrm>
+            <a:off x="7909560" y="3849624"/>
+            <a:ext cx="2926080" cy="164592"/>
+          </a:xfrm>
+          <a:prstGeom prst="rect">
+            <a:avLst/>
+          </a:prstGeom>
+          <a:noFill/>
+          <a:ln/>
+        </p:spPr>
+        <p:txBody>
+          <a:bodyPr wrap="square" lIns="0" tIns="0" rIns="0" bIns="0" rtlCol="0" anchor="ctr"/>
+          <a:lstStyle/>
+          <a:p>
+            <a:pPr algn="ctr" indent="0" marL="0">
+              <a:buNone/>
+            </a:pPr>
+            <a:r>
+              <a:rPr lang="en-US" sz="900" dirty="0">
+                <a:solidFill>
+                  <a:srgbClr val="003A63"/>
+                </a:solidFill>
+                <a:latin typeface="Aptos" pitchFamily="34" charset="0"/>
+                <a:ea typeface="Aptos" pitchFamily="34" charset="-122"/>
+                <a:cs typeface="Aptos" pitchFamily="34" charset="-120"/>
+              </a:rPr>
+              <a:t>Human review</a:t>
+            </a:r>
+            <a:endParaRPr lang="en-US" sz="900" dirty="0"/>
+          </a:p>
+        </p:txBody>
+      </p:sp>
+      <p:sp>
+        <p:nvSpPr>
+          <p:cNvPr id="18" name="Shape 16"/>
+          <p:cNvSpPr/>
+          <p:nvPr/>
+        </p:nvSpPr>
+        <p:spPr>
+          <a:xfrm>
+            <a:off x="7635240" y="4498848"/>
+            <a:ext cx="3474720" cy="1143000"/>
+          </a:xfrm>
+          <a:prstGeom prst="roundRect">
+            <a:avLst>
+              <a:gd name="adj" fmla="val 9600"/>
             </a:avLst>
           </a:prstGeom>
           <a:solidFill>
@@ -4730,14 +5073,14 @@
       </p:sp>
       <p:sp>
         <p:nvSpPr>
-          <p:cNvPr id="16" name="Text 14"/>
-          <p:cNvSpPr/>
-          <p:nvPr/>
-        </p:nvSpPr>
-        <p:spPr>
-          <a:xfrm>
-            <a:off x="8074152" y="3666744"/>
-            <a:ext cx="2825496" cy="256032"/>
+          <p:cNvPr id="19" name="Text 17"/>
+          <p:cNvSpPr/>
+          <p:nvPr/>
+        </p:nvSpPr>
+        <p:spPr>
+          <a:xfrm>
+            <a:off x="7799832" y="4645152"/>
+            <a:ext cx="3145536" cy="256032"/>
           </a:xfrm>
           <a:prstGeom prst="rect">
             <a:avLst/>
@@ -4761,7 +5104,7 @@
                 <a:ea typeface="Aptos" pitchFamily="34" charset="-122"/>
                 <a:cs typeface="Aptos" pitchFamily="34" charset="-120"/>
               </a:rPr>
-              <a:t>Use this for</a:t>
+              <a:t>Safeguard to plan</a:t>
             </a:r>
             <a:endParaRPr lang="en-US" sz="1300" dirty="0"/>
           </a:p>
@@ -4769,14 +5112,14 @@
       </p:sp>
       <p:sp>
         <p:nvSpPr>
-          <p:cNvPr id="17" name="Text 15"/>
-          <p:cNvSpPr/>
-          <p:nvPr/>
-        </p:nvSpPr>
-        <p:spPr>
-          <a:xfrm>
-            <a:off x="8074152" y="4023360"/>
-            <a:ext cx="2825496" cy="1097280"/>
+          <p:cNvPr id="20" name="Text 18"/>
+          <p:cNvSpPr/>
+          <p:nvPr/>
+        </p:nvSpPr>
+        <p:spPr>
+          <a:xfrm>
+            <a:off x="7799832" y="5001768"/>
+            <a:ext cx="3145536" cy="502920"/>
           </a:xfrm>
           <a:prstGeom prst="rect">
             <a:avLst/>
@@ -4802,7 +5145,7 @@
                 <a:ea typeface="Aptos" pitchFamily="34" charset="-122"/>
                 <a:cs typeface="Aptos" pitchFamily="34" charset="-120"/>
               </a:rPr>
-              <a:t>Connect the concept to public health decisions, safeguards, documentation, or implementation work.</a:t>
+              <a:t>Identify what could go wrong, who could be affected, what safeguards are needed, and what evidence should be reviewed before use expands.</a:t>
             </a:r>
             <a:endParaRPr lang="en-US" sz="1550" dirty="0"/>
           </a:p>
@@ -4976,8 +5319,8 @@
         </p:nvSpPr>
         <p:spPr>
           <a:xfrm>
-            <a:off x="9966960" y="6537960"/>
-            <a:ext cx="1645920" cy="201168"/>
+            <a:off x="9646920" y="6537960"/>
+            <a:ext cx="1965960" cy="201168"/>
           </a:xfrm>
           <a:prstGeom prst="rect">
             <a:avLst/>
@@ -5001,7 +5344,7 @@
                 <a:ea typeface="Aptos" pitchFamily="34" charset="-122"/>
                 <a:cs typeface="Aptos" pitchFamily="34" charset="-120"/>
               </a:rPr>
-              <a:t>Â© Paula Soper</a:t>
+              <a:t>Copyright Paula Soper</a:t>
             </a:r>
             <a:endParaRPr lang="en-US" sz="800" dirty="0"/>
           </a:p>
@@ -5048,77 +5391,13 @@
       </p:sp>
       <p:sp>
         <p:nvSpPr>
-          <p:cNvPr id="8" name="Shape 6"/>
+          <p:cNvPr id="8" name="Text 6"/>
           <p:cNvSpPr/>
           <p:nvPr/>
         </p:nvSpPr>
         <p:spPr>
           <a:xfrm>
             <a:off x="640080" y="658368"/>
-            <a:ext cx="420624" cy="420624"/>
-          </a:xfrm>
-          <a:prstGeom prst="ellipse">
-            <a:avLst/>
-          </a:prstGeom>
-          <a:solidFill>
-            <a:srgbClr val="0068B7"/>
-          </a:solidFill>
-          <a:ln w="12700">
-            <a:solidFill>
-              <a:srgbClr val="0068B7"/>
-            </a:solidFill>
-            <a:prstDash val="solid"/>
-          </a:ln>
-        </p:spPr>
-      </p:sp>
-      <p:sp>
-        <p:nvSpPr>
-          <p:cNvPr id="9" name="Text 7"/>
-          <p:cNvSpPr/>
-          <p:nvPr/>
-        </p:nvSpPr>
-        <p:spPr>
-          <a:xfrm>
-            <a:off x="640080" y="731520"/>
-            <a:ext cx="420624" cy="164592"/>
-          </a:xfrm>
-          <a:prstGeom prst="rect">
-            <a:avLst/>
-          </a:prstGeom>
-          <a:noFill/>
-          <a:ln/>
-        </p:spPr>
-        <p:txBody>
-          <a:bodyPr wrap="square" lIns="0" tIns="0" rIns="0" bIns="0" rtlCol="0" anchor="ctr"/>
-          <a:lstStyle/>
-          <a:p>
-            <a:pPr algn="ctr" indent="0" marL="0">
-              <a:buNone/>
-            </a:pPr>
-            <a:r>
-              <a:rPr lang="en-US" sz="1100" b="1" dirty="0">
-                <a:solidFill>
-                  <a:srgbClr val="FFFFFF"/>
-                </a:solidFill>
-                <a:latin typeface="Aptos" pitchFamily="34" charset="0"/>
-                <a:ea typeface="Aptos" pitchFamily="34" charset="-122"/>
-                <a:cs typeface="Aptos" pitchFamily="34" charset="-120"/>
-              </a:rPr>
-              <a:t>9</a:t>
-            </a:r>
-            <a:endParaRPr lang="en-US" sz="1100" dirty="0"/>
-          </a:p>
-        </p:txBody>
-      </p:sp>
-      <p:sp>
-        <p:nvSpPr>
-          <p:cNvPr id="10" name="Text 8"/>
-          <p:cNvSpPr/>
-          <p:nvPr/>
-        </p:nvSpPr>
-        <p:spPr>
-          <a:xfrm>
-            <a:off x="640080" y="621792"/>
             <a:ext cx="10881360" cy="713232"/>
           </a:xfrm>
           <a:prstGeom prst="rect">
@@ -5153,14 +5432,14 @@
       </p:sp>
       <p:sp>
         <p:nvSpPr>
-          <p:cNvPr id="11" name="Text 9"/>
+          <p:cNvPr id="9" name="Text 7"/>
           <p:cNvSpPr/>
           <p:nvPr/>
         </p:nvSpPr>
         <p:spPr>
           <a:xfrm>
             <a:off x="868680" y="1508760"/>
-            <a:ext cx="6537960" cy="4160520"/>
+            <a:ext cx="6309360" cy="4160520"/>
           </a:xfrm>
           <a:prstGeom prst="rect">
             <a:avLst/>
@@ -5219,18 +5498,18 @@
       </p:sp>
       <p:sp>
         <p:nvSpPr>
-          <p:cNvPr id="12" name="Shape 10"/>
-          <p:cNvSpPr/>
-          <p:nvPr/>
-        </p:nvSpPr>
-        <p:spPr>
-          <a:xfrm>
-            <a:off x="7909560" y="1417320"/>
-            <a:ext cx="3154680" cy="1828800"/>
+          <p:cNvPr id="10" name="Shape 8"/>
+          <p:cNvSpPr/>
+          <p:nvPr/>
+        </p:nvSpPr>
+        <p:spPr>
+          <a:xfrm>
+            <a:off x="7635240" y="1325880"/>
+            <a:ext cx="3474720" cy="1325880"/>
           </a:xfrm>
           <a:prstGeom prst="roundRect">
             <a:avLst>
-              <a:gd name="adj" fmla="val 6000"/>
+              <a:gd name="adj" fmla="val 8276"/>
             </a:avLst>
           </a:prstGeom>
           <a:solidFill>
@@ -5246,14 +5525,14 @@
       </p:sp>
       <p:sp>
         <p:nvSpPr>
-          <p:cNvPr id="13" name="Text 11"/>
-          <p:cNvSpPr/>
-          <p:nvPr/>
-        </p:nvSpPr>
-        <p:spPr>
-          <a:xfrm>
-            <a:off x="8074152" y="1563624"/>
-            <a:ext cx="2825496" cy="256032"/>
+          <p:cNvPr id="11" name="Text 9"/>
+          <p:cNvSpPr/>
+          <p:nvPr/>
+        </p:nvSpPr>
+        <p:spPr>
+          <a:xfrm>
+            <a:off x="7799832" y="1472184"/>
+            <a:ext cx="3145536" cy="256032"/>
           </a:xfrm>
           <a:prstGeom prst="rect">
             <a:avLst/>
@@ -5277,7 +5556,7 @@
                 <a:ea typeface="Aptos" pitchFamily="34" charset="-122"/>
                 <a:cs typeface="Aptos" pitchFamily="34" charset="-120"/>
               </a:rPr>
-              <a:t>Key idea</a:t>
+              <a:t>Risk check</a:t>
             </a:r>
             <a:endParaRPr lang="en-US" sz="1300" dirty="0"/>
           </a:p>
@@ -5285,14 +5564,14 @@
       </p:sp>
       <p:sp>
         <p:nvSpPr>
-          <p:cNvPr id="14" name="Text 12"/>
-          <p:cNvSpPr/>
-          <p:nvPr/>
-        </p:nvSpPr>
-        <p:spPr>
-          <a:xfrm>
-            <a:off x="8074152" y="1920240"/>
-            <a:ext cx="2825496" cy="1188720"/>
+          <p:cNvPr id="12" name="Text 10"/>
+          <p:cNvSpPr/>
+          <p:nvPr/>
+        </p:nvSpPr>
+        <p:spPr>
+          <a:xfrm>
+            <a:off x="7799832" y="1828800"/>
+            <a:ext cx="3145536" cy="685800"/>
           </a:xfrm>
           <a:prstGeom prst="rect">
             <a:avLst/>
@@ -5326,18 +5605,171 @@
       </p:sp>
       <p:sp>
         <p:nvSpPr>
-          <p:cNvPr id="15" name="Shape 13"/>
-          <p:cNvSpPr/>
-          <p:nvPr/>
-        </p:nvSpPr>
-        <p:spPr>
-          <a:xfrm>
-            <a:off x="7909560" y="3520440"/>
-            <a:ext cx="3154680" cy="1737360"/>
+          <p:cNvPr id="13" name="Shape 11"/>
+          <p:cNvSpPr/>
+          <p:nvPr/>
+        </p:nvSpPr>
+        <p:spPr>
+          <a:xfrm>
+            <a:off x="7635240" y="2788920"/>
+            <a:ext cx="3474720" cy="1536192"/>
           </a:xfrm>
           <a:prstGeom prst="roundRect">
             <a:avLst>
-              <a:gd name="adj" fmla="val 6316"/>
+              <a:gd name="adj" fmla="val 7143"/>
+            </a:avLst>
+          </a:prstGeom>
+          <a:solidFill>
+            <a:srgbClr val="FFFFFF">
+              <a:alpha val="88000"/>
+            </a:srgbClr>
+          </a:solidFill>
+          <a:ln w="12700">
+            <a:solidFill>
+              <a:srgbClr val="D6E8F2"/>
+            </a:solidFill>
+            <a:prstDash val="solid"/>
+          </a:ln>
+        </p:spPr>
+      </p:sp>
+      <p:sp>
+        <p:nvSpPr>
+          <p:cNvPr id="14" name="Shape 12"/>
+          <p:cNvSpPr/>
+          <p:nvPr/>
+        </p:nvSpPr>
+        <p:spPr>
+          <a:xfrm>
+            <a:off x="8046720" y="3108960"/>
+            <a:ext cx="2651760" cy="896112"/>
+          </a:xfrm>
+          <a:prstGeom prst="arc">
+            <a:avLst/>
+          </a:prstGeom>
+          <a:noFill/>
+          <a:ln w="25400">
+            <a:solidFill>
+              <a:srgbClr val="0068B7"/>
+            </a:solidFill>
+            <a:prstDash val="solid"/>
+          </a:ln>
+        </p:spPr>
+      </p:sp>
+      <p:sp>
+        <p:nvSpPr>
+          <p:cNvPr id="15" name="Text 13"/>
+          <p:cNvSpPr/>
+          <p:nvPr/>
+        </p:nvSpPr>
+        <p:spPr>
+          <a:xfrm>
+            <a:off x="7909560" y="3099816"/>
+            <a:ext cx="2926080" cy="256032"/>
+          </a:xfrm>
+          <a:prstGeom prst="rect">
+            <a:avLst/>
+          </a:prstGeom>
+          <a:noFill/>
+          <a:ln/>
+        </p:spPr>
+        <p:txBody>
+          <a:bodyPr wrap="square" lIns="0" tIns="0" rIns="0" bIns="0" rtlCol="0" anchor="ctr"/>
+          <a:lstStyle/>
+          <a:p>
+            <a:pPr algn="ctr" indent="0" marL="0">
+              <a:buNone/>
+            </a:pPr>
+            <a:r>
+              <a:rPr lang="en-US" sz="1500" b="1" dirty="0">
+                <a:solidFill>
+                  <a:srgbClr val="003A63"/>
+                </a:solidFill>
+                <a:latin typeface="Aptos" pitchFamily="34" charset="0"/>
+                <a:ea typeface="Aptos" pitchFamily="34" charset="-122"/>
+                <a:cs typeface="Aptos" pitchFamily="34" charset="-120"/>
+              </a:rPr>
+              <a:t>Risk</a:t>
+            </a:r>
+            <a:endParaRPr lang="en-US" sz="1500" dirty="0"/>
+          </a:p>
+        </p:txBody>
+      </p:sp>
+      <p:sp>
+        <p:nvSpPr>
+          <p:cNvPr id="16" name="Shape 14"/>
+          <p:cNvSpPr/>
+          <p:nvPr/>
+        </p:nvSpPr>
+        <p:spPr>
+          <a:xfrm>
+            <a:off x="8366760" y="3639312"/>
+            <a:ext cx="2011680" cy="0"/>
+          </a:xfrm>
+          <a:prstGeom prst="line">
+            <a:avLst/>
+          </a:prstGeom>
+          <a:noFill/>
+          <a:ln w="63500">
+            <a:solidFill>
+              <a:srgbClr val="2F8A28"/>
+            </a:solidFill>
+            <a:prstDash val="solid"/>
+          </a:ln>
+        </p:spPr>
+      </p:sp>
+      <p:sp>
+        <p:nvSpPr>
+          <p:cNvPr id="17" name="Text 15"/>
+          <p:cNvSpPr/>
+          <p:nvPr/>
+        </p:nvSpPr>
+        <p:spPr>
+          <a:xfrm>
+            <a:off x="7909560" y="3849624"/>
+            <a:ext cx="2926080" cy="164592"/>
+          </a:xfrm>
+          <a:prstGeom prst="rect">
+            <a:avLst/>
+          </a:prstGeom>
+          <a:noFill/>
+          <a:ln/>
+        </p:spPr>
+        <p:txBody>
+          <a:bodyPr wrap="square" lIns="0" tIns="0" rIns="0" bIns="0" rtlCol="0" anchor="ctr"/>
+          <a:lstStyle/>
+          <a:p>
+            <a:pPr algn="ctr" indent="0" marL="0">
+              <a:buNone/>
+            </a:pPr>
+            <a:r>
+              <a:rPr lang="en-US" sz="900" dirty="0">
+                <a:solidFill>
+                  <a:srgbClr val="003A63"/>
+                </a:solidFill>
+                <a:latin typeface="Aptos" pitchFamily="34" charset="0"/>
+                <a:ea typeface="Aptos" pitchFamily="34" charset="-122"/>
+                <a:cs typeface="Aptos" pitchFamily="34" charset="-120"/>
+              </a:rPr>
+              <a:t>Human review</a:t>
+            </a:r>
+            <a:endParaRPr lang="en-US" sz="900" dirty="0"/>
+          </a:p>
+        </p:txBody>
+      </p:sp>
+      <p:sp>
+        <p:nvSpPr>
+          <p:cNvPr id="18" name="Shape 16"/>
+          <p:cNvSpPr/>
+          <p:nvPr/>
+        </p:nvSpPr>
+        <p:spPr>
+          <a:xfrm>
+            <a:off x="7635240" y="4498848"/>
+            <a:ext cx="3474720" cy="1143000"/>
+          </a:xfrm>
+          <a:prstGeom prst="roundRect">
+            <a:avLst>
+              <a:gd name="adj" fmla="val 9600"/>
             </a:avLst>
           </a:prstGeom>
           <a:solidFill>
@@ -5353,14 +5785,14 @@
       </p:sp>
       <p:sp>
         <p:nvSpPr>
-          <p:cNvPr id="16" name="Text 14"/>
-          <p:cNvSpPr/>
-          <p:nvPr/>
-        </p:nvSpPr>
-        <p:spPr>
-          <a:xfrm>
-            <a:off x="8074152" y="3666744"/>
-            <a:ext cx="2825496" cy="256032"/>
+          <p:cNvPr id="19" name="Text 17"/>
+          <p:cNvSpPr/>
+          <p:nvPr/>
+        </p:nvSpPr>
+        <p:spPr>
+          <a:xfrm>
+            <a:off x="7799832" y="4645152"/>
+            <a:ext cx="3145536" cy="256032"/>
           </a:xfrm>
           <a:prstGeom prst="rect">
             <a:avLst/>
@@ -5384,7 +5816,7 @@
                 <a:ea typeface="Aptos" pitchFamily="34" charset="-122"/>
                 <a:cs typeface="Aptos" pitchFamily="34" charset="-120"/>
               </a:rPr>
-              <a:t>Use this for</a:t>
+              <a:t>Safeguard to plan</a:t>
             </a:r>
             <a:endParaRPr lang="en-US" sz="1300" dirty="0"/>
           </a:p>
@@ -5392,14 +5824,14 @@
       </p:sp>
       <p:sp>
         <p:nvSpPr>
-          <p:cNvPr id="17" name="Text 15"/>
-          <p:cNvSpPr/>
-          <p:nvPr/>
-        </p:nvSpPr>
-        <p:spPr>
-          <a:xfrm>
-            <a:off x="8074152" y="4023360"/>
-            <a:ext cx="2825496" cy="1097280"/>
+          <p:cNvPr id="20" name="Text 18"/>
+          <p:cNvSpPr/>
+          <p:nvPr/>
+        </p:nvSpPr>
+        <p:spPr>
+          <a:xfrm>
+            <a:off x="7799832" y="5001768"/>
+            <a:ext cx="3145536" cy="502920"/>
           </a:xfrm>
           <a:prstGeom prst="rect">
             <a:avLst/>
@@ -5425,7 +5857,7 @@
                 <a:ea typeface="Aptos" pitchFamily="34" charset="-122"/>
                 <a:cs typeface="Aptos" pitchFamily="34" charset="-120"/>
               </a:rPr>
-              <a:t>Connect the concept to public health decisions, safeguards, documentation, or implementation work.</a:t>
+              <a:t>Identify what could go wrong, who could be affected, what safeguards are needed, and what evidence should be reviewed before use expands.</a:t>
             </a:r>
             <a:endParaRPr lang="en-US" sz="1550" dirty="0"/>
           </a:p>
@@ -5599,8 +6031,8 @@
         </p:nvSpPr>
         <p:spPr>
           <a:xfrm>
-            <a:off x="9966960" y="6537960"/>
-            <a:ext cx="1645920" cy="201168"/>
+            <a:off x="9646920" y="6537960"/>
+            <a:ext cx="1965960" cy="201168"/>
           </a:xfrm>
           <a:prstGeom prst="rect">
             <a:avLst/>
@@ -5624,7 +6056,7 @@
                 <a:ea typeface="Aptos" pitchFamily="34" charset="-122"/>
                 <a:cs typeface="Aptos" pitchFamily="34" charset="-120"/>
               </a:rPr>
-              <a:t>Â© Paula Soper</a:t>
+              <a:t>Copyright Paula Soper</a:t>
             </a:r>
             <a:endParaRPr lang="en-US" sz="800" dirty="0"/>
           </a:p>
@@ -5719,7 +6151,7 @@
         <p:spPr>
           <a:xfrm>
             <a:off x="868680" y="1508760"/>
-            <a:ext cx="6537960" cy="4160520"/>
+            <a:ext cx="6309360" cy="4160520"/>
           </a:xfrm>
           <a:prstGeom prst="rect">
             <a:avLst/>
@@ -5770,12 +6202,12 @@
         </p:nvSpPr>
         <p:spPr>
           <a:xfrm>
-            <a:off x="7909560" y="1417320"/>
-            <a:ext cx="3154680" cy="1828800"/>
+            <a:off x="7635240" y="1325880"/>
+            <a:ext cx="3474720" cy="1325880"/>
           </a:xfrm>
           <a:prstGeom prst="roundRect">
             <a:avLst>
-              <a:gd name="adj" fmla="val 6000"/>
+              <a:gd name="adj" fmla="val 8276"/>
             </a:avLst>
           </a:prstGeom>
           <a:solidFill>
@@ -5797,8 +6229,8 @@
         </p:nvSpPr>
         <p:spPr>
           <a:xfrm>
-            <a:off x="8074152" y="1563624"/>
-            <a:ext cx="2825496" cy="256032"/>
+            <a:off x="7799832" y="1472184"/>
+            <a:ext cx="3145536" cy="256032"/>
           </a:xfrm>
           <a:prstGeom prst="rect">
             <a:avLst/>
@@ -5822,7 +6254,7 @@
                 <a:ea typeface="Aptos" pitchFamily="34" charset="-122"/>
                 <a:cs typeface="Aptos" pitchFamily="34" charset="-120"/>
               </a:rPr>
-              <a:t>Key idea</a:t>
+              <a:t>Risk check</a:t>
             </a:r>
             <a:endParaRPr lang="en-US" sz="1300" dirty="0"/>
           </a:p>
@@ -5836,8 +6268,8 @@
         </p:nvSpPr>
         <p:spPr>
           <a:xfrm>
-            <a:off x="8074152" y="1920240"/>
-            <a:ext cx="2825496" cy="1188720"/>
+            <a:off x="7799832" y="1828800"/>
+            <a:ext cx="3145536" cy="685800"/>
           </a:xfrm>
           <a:prstGeom prst="rect">
             <a:avLst/>
@@ -5877,12 +6309,165 @@
         </p:nvSpPr>
         <p:spPr>
           <a:xfrm>
-            <a:off x="7909560" y="3520440"/>
-            <a:ext cx="3154680" cy="1737360"/>
+            <a:off x="7635240" y="2788920"/>
+            <a:ext cx="3474720" cy="1536192"/>
           </a:xfrm>
           <a:prstGeom prst="roundRect">
             <a:avLst>
-              <a:gd name="adj" fmla="val 6316"/>
+              <a:gd name="adj" fmla="val 7143"/>
+            </a:avLst>
+          </a:prstGeom>
+          <a:solidFill>
+            <a:srgbClr val="FFFFFF">
+              <a:alpha val="88000"/>
+            </a:srgbClr>
+          </a:solidFill>
+          <a:ln w="12700">
+            <a:solidFill>
+              <a:srgbClr val="D6E8F2"/>
+            </a:solidFill>
+            <a:prstDash val="solid"/>
+          </a:ln>
+        </p:spPr>
+      </p:sp>
+      <p:sp>
+        <p:nvSpPr>
+          <p:cNvPr id="14" name="Shape 12"/>
+          <p:cNvSpPr/>
+          <p:nvPr/>
+        </p:nvSpPr>
+        <p:spPr>
+          <a:xfrm>
+            <a:off x="8046720" y="3108960"/>
+            <a:ext cx="2651760" cy="896112"/>
+          </a:xfrm>
+          <a:prstGeom prst="arc">
+            <a:avLst/>
+          </a:prstGeom>
+          <a:noFill/>
+          <a:ln w="25400">
+            <a:solidFill>
+              <a:srgbClr val="0068B7"/>
+            </a:solidFill>
+            <a:prstDash val="solid"/>
+          </a:ln>
+        </p:spPr>
+      </p:sp>
+      <p:sp>
+        <p:nvSpPr>
+          <p:cNvPr id="15" name="Text 13"/>
+          <p:cNvSpPr/>
+          <p:nvPr/>
+        </p:nvSpPr>
+        <p:spPr>
+          <a:xfrm>
+            <a:off x="7909560" y="3099816"/>
+            <a:ext cx="2926080" cy="256032"/>
+          </a:xfrm>
+          <a:prstGeom prst="rect">
+            <a:avLst/>
+          </a:prstGeom>
+          <a:noFill/>
+          <a:ln/>
+        </p:spPr>
+        <p:txBody>
+          <a:bodyPr wrap="square" lIns="0" tIns="0" rIns="0" bIns="0" rtlCol="0" anchor="ctr"/>
+          <a:lstStyle/>
+          <a:p>
+            <a:pPr algn="ctr" indent="0" marL="0">
+              <a:buNone/>
+            </a:pPr>
+            <a:r>
+              <a:rPr lang="en-US" sz="1500" b="1" dirty="0">
+                <a:solidFill>
+                  <a:srgbClr val="003A63"/>
+                </a:solidFill>
+                <a:latin typeface="Aptos" pitchFamily="34" charset="0"/>
+                <a:ea typeface="Aptos" pitchFamily="34" charset="-122"/>
+                <a:cs typeface="Aptos" pitchFamily="34" charset="-120"/>
+              </a:rPr>
+              <a:t>Risk</a:t>
+            </a:r>
+            <a:endParaRPr lang="en-US" sz="1500" dirty="0"/>
+          </a:p>
+        </p:txBody>
+      </p:sp>
+      <p:sp>
+        <p:nvSpPr>
+          <p:cNvPr id="16" name="Shape 14"/>
+          <p:cNvSpPr/>
+          <p:nvPr/>
+        </p:nvSpPr>
+        <p:spPr>
+          <a:xfrm>
+            <a:off x="8366760" y="3639312"/>
+            <a:ext cx="2011680" cy="0"/>
+          </a:xfrm>
+          <a:prstGeom prst="line">
+            <a:avLst/>
+          </a:prstGeom>
+          <a:noFill/>
+          <a:ln w="63500">
+            <a:solidFill>
+              <a:srgbClr val="2F8A28"/>
+            </a:solidFill>
+            <a:prstDash val="solid"/>
+          </a:ln>
+        </p:spPr>
+      </p:sp>
+      <p:sp>
+        <p:nvSpPr>
+          <p:cNvPr id="17" name="Text 15"/>
+          <p:cNvSpPr/>
+          <p:nvPr/>
+        </p:nvSpPr>
+        <p:spPr>
+          <a:xfrm>
+            <a:off x="7909560" y="3849624"/>
+            <a:ext cx="2926080" cy="164592"/>
+          </a:xfrm>
+          <a:prstGeom prst="rect">
+            <a:avLst/>
+          </a:prstGeom>
+          <a:noFill/>
+          <a:ln/>
+        </p:spPr>
+        <p:txBody>
+          <a:bodyPr wrap="square" lIns="0" tIns="0" rIns="0" bIns="0" rtlCol="0" anchor="ctr"/>
+          <a:lstStyle/>
+          <a:p>
+            <a:pPr algn="ctr" indent="0" marL="0">
+              <a:buNone/>
+            </a:pPr>
+            <a:r>
+              <a:rPr lang="en-US" sz="900" dirty="0">
+                <a:solidFill>
+                  <a:srgbClr val="003A63"/>
+                </a:solidFill>
+                <a:latin typeface="Aptos" pitchFamily="34" charset="0"/>
+                <a:ea typeface="Aptos" pitchFamily="34" charset="-122"/>
+                <a:cs typeface="Aptos" pitchFamily="34" charset="-120"/>
+              </a:rPr>
+              <a:t>Human review</a:t>
+            </a:r>
+            <a:endParaRPr lang="en-US" sz="900" dirty="0"/>
+          </a:p>
+        </p:txBody>
+      </p:sp>
+      <p:sp>
+        <p:nvSpPr>
+          <p:cNvPr id="18" name="Shape 16"/>
+          <p:cNvSpPr/>
+          <p:nvPr/>
+        </p:nvSpPr>
+        <p:spPr>
+          <a:xfrm>
+            <a:off x="7635240" y="4498848"/>
+            <a:ext cx="3474720" cy="1143000"/>
+          </a:xfrm>
+          <a:prstGeom prst="roundRect">
+            <a:avLst>
+              <a:gd name="adj" fmla="val 9600"/>
             </a:avLst>
           </a:prstGeom>
           <a:solidFill>
@@ -5898,14 +6483,14 @@
       </p:sp>
       <p:sp>
         <p:nvSpPr>
-          <p:cNvPr id="14" name="Text 12"/>
-          <p:cNvSpPr/>
-          <p:nvPr/>
-        </p:nvSpPr>
-        <p:spPr>
-          <a:xfrm>
-            <a:off x="8074152" y="3666744"/>
-            <a:ext cx="2825496" cy="256032"/>
+          <p:cNvPr id="19" name="Text 17"/>
+          <p:cNvSpPr/>
+          <p:nvPr/>
+        </p:nvSpPr>
+        <p:spPr>
+          <a:xfrm>
+            <a:off x="7799832" y="4645152"/>
+            <a:ext cx="3145536" cy="256032"/>
           </a:xfrm>
           <a:prstGeom prst="rect">
             <a:avLst/>
@@ -5929,7 +6514,7 @@
                 <a:ea typeface="Aptos" pitchFamily="34" charset="-122"/>
                 <a:cs typeface="Aptos" pitchFamily="34" charset="-120"/>
               </a:rPr>
-              <a:t>Use this for</a:t>
+              <a:t>Safeguard to plan</a:t>
             </a:r>
             <a:endParaRPr lang="en-US" sz="1300" dirty="0"/>
           </a:p>
@@ -5937,14 +6522,14 @@
       </p:sp>
       <p:sp>
         <p:nvSpPr>
-          <p:cNvPr id="15" name="Text 13"/>
-          <p:cNvSpPr/>
-          <p:nvPr/>
-        </p:nvSpPr>
-        <p:spPr>
-          <a:xfrm>
-            <a:off x="8074152" y="4023360"/>
-            <a:ext cx="2825496" cy="1097280"/>
+          <p:cNvPr id="20" name="Text 18"/>
+          <p:cNvSpPr/>
+          <p:nvPr/>
+        </p:nvSpPr>
+        <p:spPr>
+          <a:xfrm>
+            <a:off x="7799832" y="5001768"/>
+            <a:ext cx="3145536" cy="502920"/>
           </a:xfrm>
           <a:prstGeom prst="rect">
             <a:avLst/>
@@ -5970,7 +6555,7 @@
                 <a:ea typeface="Aptos" pitchFamily="34" charset="-122"/>
                 <a:cs typeface="Aptos" pitchFamily="34" charset="-120"/>
               </a:rPr>
-              <a:t>Connect the concept to public health decisions, safeguards, documentation, or implementation work.</a:t>
+              <a:t>Identify what could go wrong, who could be affected, what safeguards are needed, and what evidence should be reviewed before use expands.</a:t>
             </a:r>
             <a:endParaRPr lang="en-US" sz="1550" dirty="0"/>
           </a:p>
@@ -6144,8 +6729,8 @@
         </p:nvSpPr>
         <p:spPr>
           <a:xfrm>
-            <a:off x="9966960" y="6537960"/>
-            <a:ext cx="1645920" cy="201168"/>
+            <a:off x="9646920" y="6537960"/>
+            <a:ext cx="1965960" cy="201168"/>
           </a:xfrm>
           <a:prstGeom prst="rect">
             <a:avLst/>
@@ -6169,7 +6754,7 @@
                 <a:ea typeface="Aptos" pitchFamily="34" charset="-122"/>
                 <a:cs typeface="Aptos" pitchFamily="34" charset="-120"/>
               </a:rPr>
-              <a:t>Â© Paula Soper</a:t>
+              <a:t>Copyright Paula Soper</a:t>
             </a:r>
             <a:endParaRPr lang="en-US" sz="800" dirty="0"/>
           </a:p>
@@ -6216,77 +6801,13 @@
       </p:sp>
       <p:sp>
         <p:nvSpPr>
-          <p:cNvPr id="8" name="Shape 6"/>
+          <p:cNvPr id="8" name="Text 6"/>
           <p:cNvSpPr/>
           <p:nvPr/>
         </p:nvSpPr>
         <p:spPr>
           <a:xfrm>
             <a:off x="640080" y="658368"/>
-            <a:ext cx="420624" cy="420624"/>
-          </a:xfrm>
-          <a:prstGeom prst="ellipse">
-            <a:avLst/>
-          </a:prstGeom>
-          <a:solidFill>
-            <a:srgbClr val="0068B7"/>
-          </a:solidFill>
-          <a:ln w="12700">
-            <a:solidFill>
-              <a:srgbClr val="0068B7"/>
-            </a:solidFill>
-            <a:prstDash val="solid"/>
-          </a:ln>
-        </p:spPr>
-      </p:sp>
-      <p:sp>
-        <p:nvSpPr>
-          <p:cNvPr id="9" name="Text 7"/>
-          <p:cNvSpPr/>
-          <p:nvPr/>
-        </p:nvSpPr>
-        <p:spPr>
-          <a:xfrm>
-            <a:off x="640080" y="731520"/>
-            <a:ext cx="420624" cy="164592"/>
-          </a:xfrm>
-          <a:prstGeom prst="rect">
-            <a:avLst/>
-          </a:prstGeom>
-          <a:noFill/>
-          <a:ln/>
-        </p:spPr>
-        <p:txBody>
-          <a:bodyPr wrap="square" lIns="0" tIns="0" rIns="0" bIns="0" rtlCol="0" anchor="ctr"/>
-          <a:lstStyle/>
-          <a:p>
-            <a:pPr algn="ctr" indent="0" marL="0">
-              <a:buNone/>
-            </a:pPr>
-            <a:r>
-              <a:rPr lang="en-US" sz="1100" b="1" dirty="0">
-                <a:solidFill>
-                  <a:srgbClr val="FFFFFF"/>
-                </a:solidFill>
-                <a:latin typeface="Aptos" pitchFamily="34" charset="0"/>
-                <a:ea typeface="Aptos" pitchFamily="34" charset="-122"/>
-                <a:cs typeface="Aptos" pitchFamily="34" charset="-120"/>
-              </a:rPr>
-              <a:t>10</a:t>
-            </a:r>
-            <a:endParaRPr lang="en-US" sz="1100" dirty="0"/>
-          </a:p>
-        </p:txBody>
-      </p:sp>
-      <p:sp>
-        <p:nvSpPr>
-          <p:cNvPr id="10" name="Text 8"/>
-          <p:cNvSpPr/>
-          <p:nvPr/>
-        </p:nvSpPr>
-        <p:spPr>
-          <a:xfrm>
-            <a:off x="640080" y="621792"/>
             <a:ext cx="10881360" cy="713232"/>
           </a:xfrm>
           <a:prstGeom prst="rect">
@@ -6321,14 +6842,14 @@
       </p:sp>
       <p:sp>
         <p:nvSpPr>
-          <p:cNvPr id="11" name="Text 9"/>
+          <p:cNvPr id="9" name="Text 7"/>
           <p:cNvSpPr/>
           <p:nvPr/>
         </p:nvSpPr>
         <p:spPr>
           <a:xfrm>
             <a:off x="868680" y="1508760"/>
-            <a:ext cx="6537960" cy="4160520"/>
+            <a:ext cx="6309360" cy="4160520"/>
           </a:xfrm>
           <a:prstGeom prst="rect">
             <a:avLst/>
@@ -6359,18 +6880,18 @@
       </p:sp>
       <p:sp>
         <p:nvSpPr>
-          <p:cNvPr id="12" name="Shape 10"/>
-          <p:cNvSpPr/>
-          <p:nvPr/>
-        </p:nvSpPr>
-        <p:spPr>
-          <a:xfrm>
-            <a:off x="7909560" y="1417320"/>
-            <a:ext cx="3154680" cy="1828800"/>
+          <p:cNvPr id="10" name="Shape 8"/>
+          <p:cNvSpPr/>
+          <p:nvPr/>
+        </p:nvSpPr>
+        <p:spPr>
+          <a:xfrm>
+            <a:off x="7635240" y="1325880"/>
+            <a:ext cx="3474720" cy="1325880"/>
           </a:xfrm>
           <a:prstGeom prst="roundRect">
             <a:avLst>
-              <a:gd name="adj" fmla="val 6000"/>
+              <a:gd name="adj" fmla="val 8276"/>
             </a:avLst>
           </a:prstGeom>
           <a:solidFill>
@@ -6386,14 +6907,14 @@
       </p:sp>
       <p:sp>
         <p:nvSpPr>
-          <p:cNvPr id="13" name="Text 11"/>
-          <p:cNvSpPr/>
-          <p:nvPr/>
-        </p:nvSpPr>
-        <p:spPr>
-          <a:xfrm>
-            <a:off x="8074152" y="1563624"/>
-            <a:ext cx="2825496" cy="256032"/>
+          <p:cNvPr id="11" name="Text 9"/>
+          <p:cNvSpPr/>
+          <p:nvPr/>
+        </p:nvSpPr>
+        <p:spPr>
+          <a:xfrm>
+            <a:off x="7799832" y="1472184"/>
+            <a:ext cx="3145536" cy="256032"/>
           </a:xfrm>
           <a:prstGeom prst="rect">
             <a:avLst/>
@@ -6417,7 +6938,7 @@
                 <a:ea typeface="Aptos" pitchFamily="34" charset="-122"/>
                 <a:cs typeface="Aptos" pitchFamily="34" charset="-120"/>
               </a:rPr>
-              <a:t>Key idea</a:t>
+              <a:t>Risk check</a:t>
             </a:r>
             <a:endParaRPr lang="en-US" sz="1300" dirty="0"/>
           </a:p>
@@ -6425,14 +6946,14 @@
       </p:sp>
       <p:sp>
         <p:nvSpPr>
-          <p:cNvPr id="14" name="Text 12"/>
-          <p:cNvSpPr/>
-          <p:nvPr/>
-        </p:nvSpPr>
-        <p:spPr>
-          <a:xfrm>
-            <a:off x="8074152" y="1920240"/>
-            <a:ext cx="2825496" cy="1188720"/>
+          <p:cNvPr id="12" name="Text 10"/>
+          <p:cNvSpPr/>
+          <p:nvPr/>
+        </p:nvSpPr>
+        <p:spPr>
+          <a:xfrm>
+            <a:off x="7799832" y="1828800"/>
+            <a:ext cx="3145536" cy="685800"/>
           </a:xfrm>
           <a:prstGeom prst="rect">
             <a:avLst/>
@@ -6466,18 +6987,171 @@
       </p:sp>
       <p:sp>
         <p:nvSpPr>
-          <p:cNvPr id="15" name="Shape 13"/>
-          <p:cNvSpPr/>
-          <p:nvPr/>
-        </p:nvSpPr>
-        <p:spPr>
-          <a:xfrm>
-            <a:off x="7909560" y="3520440"/>
-            <a:ext cx="3154680" cy="1737360"/>
+          <p:cNvPr id="13" name="Shape 11"/>
+          <p:cNvSpPr/>
+          <p:nvPr/>
+        </p:nvSpPr>
+        <p:spPr>
+          <a:xfrm>
+            <a:off x="7635240" y="2788920"/>
+            <a:ext cx="3474720" cy="1536192"/>
           </a:xfrm>
           <a:prstGeom prst="roundRect">
             <a:avLst>
-              <a:gd name="adj" fmla="val 6316"/>
+              <a:gd name="adj" fmla="val 7143"/>
+            </a:avLst>
+          </a:prstGeom>
+          <a:solidFill>
+            <a:srgbClr val="FFFFFF">
+              <a:alpha val="88000"/>
+            </a:srgbClr>
+          </a:solidFill>
+          <a:ln w="12700">
+            <a:solidFill>
+              <a:srgbClr val="D6E8F2"/>
+            </a:solidFill>
+            <a:prstDash val="solid"/>
+          </a:ln>
+        </p:spPr>
+      </p:sp>
+      <p:sp>
+        <p:nvSpPr>
+          <p:cNvPr id="14" name="Shape 12"/>
+          <p:cNvSpPr/>
+          <p:nvPr/>
+        </p:nvSpPr>
+        <p:spPr>
+          <a:xfrm>
+            <a:off x="8046720" y="3108960"/>
+            <a:ext cx="2651760" cy="896112"/>
+          </a:xfrm>
+          <a:prstGeom prst="arc">
+            <a:avLst/>
+          </a:prstGeom>
+          <a:noFill/>
+          <a:ln w="25400">
+            <a:solidFill>
+              <a:srgbClr val="0068B7"/>
+            </a:solidFill>
+            <a:prstDash val="solid"/>
+          </a:ln>
+        </p:spPr>
+      </p:sp>
+      <p:sp>
+        <p:nvSpPr>
+          <p:cNvPr id="15" name="Text 13"/>
+          <p:cNvSpPr/>
+          <p:nvPr/>
+        </p:nvSpPr>
+        <p:spPr>
+          <a:xfrm>
+            <a:off x="7909560" y="3099816"/>
+            <a:ext cx="2926080" cy="256032"/>
+          </a:xfrm>
+          <a:prstGeom prst="rect">
+            <a:avLst/>
+          </a:prstGeom>
+          <a:noFill/>
+          <a:ln/>
+        </p:spPr>
+        <p:txBody>
+          <a:bodyPr wrap="square" lIns="0" tIns="0" rIns="0" bIns="0" rtlCol="0" anchor="ctr"/>
+          <a:lstStyle/>
+          <a:p>
+            <a:pPr algn="ctr" indent="0" marL="0">
+              <a:buNone/>
+            </a:pPr>
+            <a:r>
+              <a:rPr lang="en-US" sz="1500" b="1" dirty="0">
+                <a:solidFill>
+                  <a:srgbClr val="003A63"/>
+                </a:solidFill>
+                <a:latin typeface="Aptos" pitchFamily="34" charset="0"/>
+                <a:ea typeface="Aptos" pitchFamily="34" charset="-122"/>
+                <a:cs typeface="Aptos" pitchFamily="34" charset="-120"/>
+              </a:rPr>
+              <a:t>Risk</a:t>
+            </a:r>
+            <a:endParaRPr lang="en-US" sz="1500" dirty="0"/>
+          </a:p>
+        </p:txBody>
+      </p:sp>
+      <p:sp>
+        <p:nvSpPr>
+          <p:cNvPr id="16" name="Shape 14"/>
+          <p:cNvSpPr/>
+          <p:nvPr/>
+        </p:nvSpPr>
+        <p:spPr>
+          <a:xfrm>
+            <a:off x="8366760" y="3639312"/>
+            <a:ext cx="2011680" cy="0"/>
+          </a:xfrm>
+          <a:prstGeom prst="line">
+            <a:avLst/>
+          </a:prstGeom>
+          <a:noFill/>
+          <a:ln w="63500">
+            <a:solidFill>
+              <a:srgbClr val="2F8A28"/>
+            </a:solidFill>
+            <a:prstDash val="solid"/>
+          </a:ln>
+        </p:spPr>
+      </p:sp>
+      <p:sp>
+        <p:nvSpPr>
+          <p:cNvPr id="17" name="Text 15"/>
+          <p:cNvSpPr/>
+          <p:nvPr/>
+        </p:nvSpPr>
+        <p:spPr>
+          <a:xfrm>
+            <a:off x="7909560" y="3849624"/>
+            <a:ext cx="2926080" cy="164592"/>
+          </a:xfrm>
+          <a:prstGeom prst="rect">
+            <a:avLst/>
+          </a:prstGeom>
+          <a:noFill/>
+          <a:ln/>
+        </p:spPr>
+        <p:txBody>
+          <a:bodyPr wrap="square" lIns="0" tIns="0" rIns="0" bIns="0" rtlCol="0" anchor="ctr"/>
+          <a:lstStyle/>
+          <a:p>
+            <a:pPr algn="ctr" indent="0" marL="0">
+              <a:buNone/>
+            </a:pPr>
+            <a:r>
+              <a:rPr lang="en-US" sz="900" dirty="0">
+                <a:solidFill>
+                  <a:srgbClr val="003A63"/>
+                </a:solidFill>
+                <a:latin typeface="Aptos" pitchFamily="34" charset="0"/>
+                <a:ea typeface="Aptos" pitchFamily="34" charset="-122"/>
+                <a:cs typeface="Aptos" pitchFamily="34" charset="-120"/>
+              </a:rPr>
+              <a:t>Human review</a:t>
+            </a:r>
+            <a:endParaRPr lang="en-US" sz="900" dirty="0"/>
+          </a:p>
+        </p:txBody>
+      </p:sp>
+      <p:sp>
+        <p:nvSpPr>
+          <p:cNvPr id="18" name="Shape 16"/>
+          <p:cNvSpPr/>
+          <p:nvPr/>
+        </p:nvSpPr>
+        <p:spPr>
+          <a:xfrm>
+            <a:off x="7635240" y="4498848"/>
+            <a:ext cx="3474720" cy="1143000"/>
+          </a:xfrm>
+          <a:prstGeom prst="roundRect">
+            <a:avLst>
+              <a:gd name="adj" fmla="val 9600"/>
             </a:avLst>
           </a:prstGeom>
           <a:solidFill>
@@ -6493,14 +7167,14 @@
       </p:sp>
       <p:sp>
         <p:nvSpPr>
-          <p:cNvPr id="16" name="Text 14"/>
-          <p:cNvSpPr/>
-          <p:nvPr/>
-        </p:nvSpPr>
-        <p:spPr>
-          <a:xfrm>
-            <a:off x="8074152" y="3666744"/>
-            <a:ext cx="2825496" cy="256032"/>
+          <p:cNvPr id="19" name="Text 17"/>
+          <p:cNvSpPr/>
+          <p:nvPr/>
+        </p:nvSpPr>
+        <p:spPr>
+          <a:xfrm>
+            <a:off x="7799832" y="4645152"/>
+            <a:ext cx="3145536" cy="256032"/>
           </a:xfrm>
           <a:prstGeom prst="rect">
             <a:avLst/>
@@ -6524,7 +7198,7 @@
                 <a:ea typeface="Aptos" pitchFamily="34" charset="-122"/>
                 <a:cs typeface="Aptos" pitchFamily="34" charset="-120"/>
               </a:rPr>
-              <a:t>Use this for</a:t>
+              <a:t>Safeguard to plan</a:t>
             </a:r>
             <a:endParaRPr lang="en-US" sz="1300" dirty="0"/>
           </a:p>
@@ -6532,14 +7206,14 @@
       </p:sp>
       <p:sp>
         <p:nvSpPr>
-          <p:cNvPr id="17" name="Text 15"/>
-          <p:cNvSpPr/>
-          <p:nvPr/>
-        </p:nvSpPr>
-        <p:spPr>
-          <a:xfrm>
-            <a:off x="8074152" y="4023360"/>
-            <a:ext cx="2825496" cy="1097280"/>
+          <p:cNvPr id="20" name="Text 18"/>
+          <p:cNvSpPr/>
+          <p:nvPr/>
+        </p:nvSpPr>
+        <p:spPr>
+          <a:xfrm>
+            <a:off x="7799832" y="5001768"/>
+            <a:ext cx="3145536" cy="502920"/>
           </a:xfrm>
           <a:prstGeom prst="rect">
             <a:avLst/>
@@ -6565,7 +7239,7 @@
                 <a:ea typeface="Aptos" pitchFamily="34" charset="-122"/>
                 <a:cs typeface="Aptos" pitchFamily="34" charset="-120"/>
               </a:rPr>
-              <a:t>Connect the concept to public health decisions, safeguards, documentation, or implementation work.</a:t>
+              <a:t>Use the assignment to test whether you can explain the concept, apply it to a realistic public health situation, and identify what would need review before the work moves forward.</a:t>
             </a:r>
             <a:endParaRPr lang="en-US" sz="1550" dirty="0"/>
           </a:p>
@@ -6739,8 +7413,8 @@
         </p:nvSpPr>
         <p:spPr>
           <a:xfrm>
-            <a:off x="9966960" y="6537960"/>
-            <a:ext cx="1645920" cy="201168"/>
+            <a:off x="9646920" y="6537960"/>
+            <a:ext cx="1965960" cy="201168"/>
           </a:xfrm>
           <a:prstGeom prst="rect">
             <a:avLst/>
@@ -6764,7 +7438,7 @@
                 <a:ea typeface="Aptos" pitchFamily="34" charset="-122"/>
                 <a:cs typeface="Aptos" pitchFamily="34" charset="-120"/>
               </a:rPr>
-              <a:t>Â© Paula Soper</a:t>
+              <a:t>Copyright Paula Soper</a:t>
             </a:r>
             <a:endParaRPr lang="en-US" sz="800" dirty="0"/>
           </a:p>
@@ -6811,77 +7485,13 @@
       </p:sp>
       <p:sp>
         <p:nvSpPr>
-          <p:cNvPr id="8" name="Shape 6"/>
+          <p:cNvPr id="8" name="Text 6"/>
           <p:cNvSpPr/>
           <p:nvPr/>
         </p:nvSpPr>
         <p:spPr>
           <a:xfrm>
             <a:off x="640080" y="658368"/>
-            <a:ext cx="420624" cy="420624"/>
-          </a:xfrm>
-          <a:prstGeom prst="ellipse">
-            <a:avLst/>
-          </a:prstGeom>
-          <a:solidFill>
-            <a:srgbClr val="0068B7"/>
-          </a:solidFill>
-          <a:ln w="12700">
-            <a:solidFill>
-              <a:srgbClr val="0068B7"/>
-            </a:solidFill>
-            <a:prstDash val="solid"/>
-          </a:ln>
-        </p:spPr>
-      </p:sp>
-      <p:sp>
-        <p:nvSpPr>
-          <p:cNvPr id="9" name="Text 7"/>
-          <p:cNvSpPr/>
-          <p:nvPr/>
-        </p:nvSpPr>
-        <p:spPr>
-          <a:xfrm>
-            <a:off x="640080" y="731520"/>
-            <a:ext cx="420624" cy="164592"/>
-          </a:xfrm>
-          <a:prstGeom prst="rect">
-            <a:avLst/>
-          </a:prstGeom>
-          <a:noFill/>
-          <a:ln/>
-        </p:spPr>
-        <p:txBody>
-          <a:bodyPr wrap="square" lIns="0" tIns="0" rIns="0" bIns="0" rtlCol="0" anchor="ctr"/>
-          <a:lstStyle/>
-          <a:p>
-            <a:pPr algn="ctr" indent="0" marL="0">
-              <a:buNone/>
-            </a:pPr>
-            <a:r>
-              <a:rPr lang="en-US" sz="1100" b="1" dirty="0">
-                <a:solidFill>
-                  <a:srgbClr val="FFFFFF"/>
-                </a:solidFill>
-                <a:latin typeface="Aptos" pitchFamily="34" charset="0"/>
-                <a:ea typeface="Aptos" pitchFamily="34" charset="-122"/>
-                <a:cs typeface="Aptos" pitchFamily="34" charset="-120"/>
-              </a:rPr>
-              <a:t>11</a:t>
-            </a:r>
-            <a:endParaRPr lang="en-US" sz="1100" dirty="0"/>
-          </a:p>
-        </p:txBody>
-      </p:sp>
-      <p:sp>
-        <p:nvSpPr>
-          <p:cNvPr id="10" name="Text 8"/>
-          <p:cNvSpPr/>
-          <p:nvPr/>
-        </p:nvSpPr>
-        <p:spPr>
-          <a:xfrm>
-            <a:off x="640080" y="621792"/>
             <a:ext cx="10881360" cy="713232"/>
           </a:xfrm>
           <a:prstGeom prst="rect">
@@ -6916,14 +7526,14 @@
       </p:sp>
       <p:sp>
         <p:nvSpPr>
-          <p:cNvPr id="11" name="Text 9"/>
+          <p:cNvPr id="9" name="Text 7"/>
           <p:cNvSpPr/>
           <p:nvPr/>
         </p:nvSpPr>
         <p:spPr>
           <a:xfrm>
             <a:off x="868680" y="1508760"/>
-            <a:ext cx="6537960" cy="4160520"/>
+            <a:ext cx="6309360" cy="4160520"/>
           </a:xfrm>
           <a:prstGeom prst="rect">
             <a:avLst/>
@@ -6982,18 +7592,18 @@
       </p:sp>
       <p:sp>
         <p:nvSpPr>
-          <p:cNvPr id="12" name="Shape 10"/>
-          <p:cNvSpPr/>
-          <p:nvPr/>
-        </p:nvSpPr>
-        <p:spPr>
-          <a:xfrm>
-            <a:off x="7909560" y="1417320"/>
-            <a:ext cx="3154680" cy="1828800"/>
+          <p:cNvPr id="10" name="Shape 8"/>
+          <p:cNvSpPr/>
+          <p:nvPr/>
+        </p:nvSpPr>
+        <p:spPr>
+          <a:xfrm>
+            <a:off x="7635240" y="1325880"/>
+            <a:ext cx="3474720" cy="1325880"/>
           </a:xfrm>
           <a:prstGeom prst="roundRect">
             <a:avLst>
-              <a:gd name="adj" fmla="val 6000"/>
+              <a:gd name="adj" fmla="val 8276"/>
             </a:avLst>
           </a:prstGeom>
           <a:solidFill>
@@ -7009,14 +7619,14 @@
       </p:sp>
       <p:sp>
         <p:nvSpPr>
-          <p:cNvPr id="13" name="Text 11"/>
-          <p:cNvSpPr/>
-          <p:nvPr/>
-        </p:nvSpPr>
-        <p:spPr>
-          <a:xfrm>
-            <a:off x="8074152" y="1563624"/>
-            <a:ext cx="2825496" cy="256032"/>
+          <p:cNvPr id="11" name="Text 9"/>
+          <p:cNvSpPr/>
+          <p:nvPr/>
+        </p:nvSpPr>
+        <p:spPr>
+          <a:xfrm>
+            <a:off x="7799832" y="1472184"/>
+            <a:ext cx="3145536" cy="256032"/>
           </a:xfrm>
           <a:prstGeom prst="rect">
             <a:avLst/>
@@ -7040,7 +7650,7 @@
                 <a:ea typeface="Aptos" pitchFamily="34" charset="-122"/>
                 <a:cs typeface="Aptos" pitchFamily="34" charset="-120"/>
               </a:rPr>
-              <a:t>Key idea</a:t>
+              <a:t>Risk check</a:t>
             </a:r>
             <a:endParaRPr lang="en-US" sz="1300" dirty="0"/>
           </a:p>
@@ -7048,14 +7658,14 @@
       </p:sp>
       <p:sp>
         <p:nvSpPr>
-          <p:cNvPr id="14" name="Text 12"/>
-          <p:cNvSpPr/>
-          <p:nvPr/>
-        </p:nvSpPr>
-        <p:spPr>
-          <a:xfrm>
-            <a:off x="8074152" y="1920240"/>
-            <a:ext cx="2825496" cy="1188720"/>
+          <p:cNvPr id="12" name="Text 10"/>
+          <p:cNvSpPr/>
+          <p:nvPr/>
+        </p:nvSpPr>
+        <p:spPr>
+          <a:xfrm>
+            <a:off x="7799832" y="1828800"/>
+            <a:ext cx="3145536" cy="685800"/>
           </a:xfrm>
           <a:prstGeom prst="rect">
             <a:avLst/>
@@ -7089,18 +7699,171 @@
       </p:sp>
       <p:sp>
         <p:nvSpPr>
-          <p:cNvPr id="15" name="Shape 13"/>
-          <p:cNvSpPr/>
-          <p:nvPr/>
-        </p:nvSpPr>
-        <p:spPr>
-          <a:xfrm>
-            <a:off x="7909560" y="3520440"/>
-            <a:ext cx="3154680" cy="1737360"/>
+          <p:cNvPr id="13" name="Shape 11"/>
+          <p:cNvSpPr/>
+          <p:nvPr/>
+        </p:nvSpPr>
+        <p:spPr>
+          <a:xfrm>
+            <a:off x="7635240" y="2788920"/>
+            <a:ext cx="3474720" cy="1536192"/>
           </a:xfrm>
           <a:prstGeom prst="roundRect">
             <a:avLst>
-              <a:gd name="adj" fmla="val 6316"/>
+              <a:gd name="adj" fmla="val 7143"/>
+            </a:avLst>
+          </a:prstGeom>
+          <a:solidFill>
+            <a:srgbClr val="FFFFFF">
+              <a:alpha val="88000"/>
+            </a:srgbClr>
+          </a:solidFill>
+          <a:ln w="12700">
+            <a:solidFill>
+              <a:srgbClr val="D6E8F2"/>
+            </a:solidFill>
+            <a:prstDash val="solid"/>
+          </a:ln>
+        </p:spPr>
+      </p:sp>
+      <p:sp>
+        <p:nvSpPr>
+          <p:cNvPr id="14" name="Shape 12"/>
+          <p:cNvSpPr/>
+          <p:nvPr/>
+        </p:nvSpPr>
+        <p:spPr>
+          <a:xfrm>
+            <a:off x="8046720" y="3108960"/>
+            <a:ext cx="2651760" cy="896112"/>
+          </a:xfrm>
+          <a:prstGeom prst="arc">
+            <a:avLst/>
+          </a:prstGeom>
+          <a:noFill/>
+          <a:ln w="25400">
+            <a:solidFill>
+              <a:srgbClr val="0068B7"/>
+            </a:solidFill>
+            <a:prstDash val="solid"/>
+          </a:ln>
+        </p:spPr>
+      </p:sp>
+      <p:sp>
+        <p:nvSpPr>
+          <p:cNvPr id="15" name="Text 13"/>
+          <p:cNvSpPr/>
+          <p:nvPr/>
+        </p:nvSpPr>
+        <p:spPr>
+          <a:xfrm>
+            <a:off x="7909560" y="3099816"/>
+            <a:ext cx="2926080" cy="256032"/>
+          </a:xfrm>
+          <a:prstGeom prst="rect">
+            <a:avLst/>
+          </a:prstGeom>
+          <a:noFill/>
+          <a:ln/>
+        </p:spPr>
+        <p:txBody>
+          <a:bodyPr wrap="square" lIns="0" tIns="0" rIns="0" bIns="0" rtlCol="0" anchor="ctr"/>
+          <a:lstStyle/>
+          <a:p>
+            <a:pPr algn="ctr" indent="0" marL="0">
+              <a:buNone/>
+            </a:pPr>
+            <a:r>
+              <a:rPr lang="en-US" sz="1500" b="1" dirty="0">
+                <a:solidFill>
+                  <a:srgbClr val="003A63"/>
+                </a:solidFill>
+                <a:latin typeface="Aptos" pitchFamily="34" charset="0"/>
+                <a:ea typeface="Aptos" pitchFamily="34" charset="-122"/>
+                <a:cs typeface="Aptos" pitchFamily="34" charset="-120"/>
+              </a:rPr>
+              <a:t>Risk</a:t>
+            </a:r>
+            <a:endParaRPr lang="en-US" sz="1500" dirty="0"/>
+          </a:p>
+        </p:txBody>
+      </p:sp>
+      <p:sp>
+        <p:nvSpPr>
+          <p:cNvPr id="16" name="Shape 14"/>
+          <p:cNvSpPr/>
+          <p:nvPr/>
+        </p:nvSpPr>
+        <p:spPr>
+          <a:xfrm>
+            <a:off x="8366760" y="3639312"/>
+            <a:ext cx="2011680" cy="0"/>
+          </a:xfrm>
+          <a:prstGeom prst="line">
+            <a:avLst/>
+          </a:prstGeom>
+          <a:noFill/>
+          <a:ln w="63500">
+            <a:solidFill>
+              <a:srgbClr val="2F8A28"/>
+            </a:solidFill>
+            <a:prstDash val="solid"/>
+          </a:ln>
+        </p:spPr>
+      </p:sp>
+      <p:sp>
+        <p:nvSpPr>
+          <p:cNvPr id="17" name="Text 15"/>
+          <p:cNvSpPr/>
+          <p:nvPr/>
+        </p:nvSpPr>
+        <p:spPr>
+          <a:xfrm>
+            <a:off x="7909560" y="3849624"/>
+            <a:ext cx="2926080" cy="164592"/>
+          </a:xfrm>
+          <a:prstGeom prst="rect">
+            <a:avLst/>
+          </a:prstGeom>
+          <a:noFill/>
+          <a:ln/>
+        </p:spPr>
+        <p:txBody>
+          <a:bodyPr wrap="square" lIns="0" tIns="0" rIns="0" bIns="0" rtlCol="0" anchor="ctr"/>
+          <a:lstStyle/>
+          <a:p>
+            <a:pPr algn="ctr" indent="0" marL="0">
+              <a:buNone/>
+            </a:pPr>
+            <a:r>
+              <a:rPr lang="en-US" sz="900" dirty="0">
+                <a:solidFill>
+                  <a:srgbClr val="003A63"/>
+                </a:solidFill>
+                <a:latin typeface="Aptos" pitchFamily="34" charset="0"/>
+                <a:ea typeface="Aptos" pitchFamily="34" charset="-122"/>
+                <a:cs typeface="Aptos" pitchFamily="34" charset="-120"/>
+              </a:rPr>
+              <a:t>Human review</a:t>
+            </a:r>
+            <a:endParaRPr lang="en-US" sz="900" dirty="0"/>
+          </a:p>
+        </p:txBody>
+      </p:sp>
+      <p:sp>
+        <p:nvSpPr>
+          <p:cNvPr id="18" name="Shape 16"/>
+          <p:cNvSpPr/>
+          <p:nvPr/>
+        </p:nvSpPr>
+        <p:spPr>
+          <a:xfrm>
+            <a:off x="7635240" y="4498848"/>
+            <a:ext cx="3474720" cy="1143000"/>
+          </a:xfrm>
+          <a:prstGeom prst="roundRect">
+            <a:avLst>
+              <a:gd name="adj" fmla="val 9600"/>
             </a:avLst>
           </a:prstGeom>
           <a:solidFill>
@@ -7116,14 +7879,14 @@
       </p:sp>
       <p:sp>
         <p:nvSpPr>
-          <p:cNvPr id="16" name="Text 14"/>
-          <p:cNvSpPr/>
-          <p:nvPr/>
-        </p:nvSpPr>
-        <p:spPr>
-          <a:xfrm>
-            <a:off x="8074152" y="3666744"/>
-            <a:ext cx="2825496" cy="256032"/>
+          <p:cNvPr id="19" name="Text 17"/>
+          <p:cNvSpPr/>
+          <p:nvPr/>
+        </p:nvSpPr>
+        <p:spPr>
+          <a:xfrm>
+            <a:off x="7799832" y="4645152"/>
+            <a:ext cx="3145536" cy="256032"/>
           </a:xfrm>
           <a:prstGeom prst="rect">
             <a:avLst/>
@@ -7147,7 +7910,7 @@
                 <a:ea typeface="Aptos" pitchFamily="34" charset="-122"/>
                 <a:cs typeface="Aptos" pitchFamily="34" charset="-120"/>
               </a:rPr>
-              <a:t>Use this for</a:t>
+              <a:t>Safeguard to plan</a:t>
             </a:r>
             <a:endParaRPr lang="en-US" sz="1300" dirty="0"/>
           </a:p>
@@ -7155,14 +7918,14 @@
       </p:sp>
       <p:sp>
         <p:nvSpPr>
-          <p:cNvPr id="17" name="Text 15"/>
-          <p:cNvSpPr/>
-          <p:nvPr/>
-        </p:nvSpPr>
-        <p:spPr>
-          <a:xfrm>
-            <a:off x="8074152" y="4023360"/>
-            <a:ext cx="2825496" cy="1097280"/>
+          <p:cNvPr id="20" name="Text 18"/>
+          <p:cNvSpPr/>
+          <p:nvPr/>
+        </p:nvSpPr>
+        <p:spPr>
+          <a:xfrm>
+            <a:off x="7799832" y="5001768"/>
+            <a:ext cx="3145536" cy="502920"/>
           </a:xfrm>
           <a:prstGeom prst="rect">
             <a:avLst/>
@@ -7188,7 +7951,7 @@
                 <a:ea typeface="Aptos" pitchFamily="34" charset="-122"/>
                 <a:cs typeface="Aptos" pitchFamily="34" charset="-120"/>
               </a:rPr>
-              <a:t>Connect the concept to public health decisions, safeguards, documentation, or implementation work.</a:t>
+              <a:t>Identify what could go wrong, who could be affected, what safeguards are needed, and what evidence should be reviewed before use expands.</a:t>
             </a:r>
             <a:endParaRPr lang="en-US" sz="1550" dirty="0"/>
           </a:p>
@@ -7362,8 +8125,8 @@
         </p:nvSpPr>
         <p:spPr>
           <a:xfrm>
-            <a:off x="9966960" y="6537960"/>
-            <a:ext cx="1645920" cy="201168"/>
+            <a:off x="9646920" y="6537960"/>
+            <a:ext cx="1965960" cy="201168"/>
           </a:xfrm>
           <a:prstGeom prst="rect">
             <a:avLst/>
@@ -7387,7 +8150,7 @@
                 <a:ea typeface="Aptos" pitchFamily="34" charset="-122"/>
                 <a:cs typeface="Aptos" pitchFamily="34" charset="-120"/>
               </a:rPr>
-              <a:t>Â© Paula Soper</a:t>
+              <a:t>Copyright Paula Soper</a:t>
             </a:r>
             <a:endParaRPr lang="en-US" sz="800" dirty="0"/>
           </a:p>
@@ -7434,77 +8197,13 @@
       </p:sp>
       <p:sp>
         <p:nvSpPr>
-          <p:cNvPr id="8" name="Shape 6"/>
+          <p:cNvPr id="8" name="Text 6"/>
           <p:cNvSpPr/>
           <p:nvPr/>
         </p:nvSpPr>
         <p:spPr>
           <a:xfrm>
             <a:off x="640080" y="658368"/>
-            <a:ext cx="420624" cy="420624"/>
-          </a:xfrm>
-          <a:prstGeom prst="ellipse">
-            <a:avLst/>
-          </a:prstGeom>
-          <a:solidFill>
-            <a:srgbClr val="0068B7"/>
-          </a:solidFill>
-          <a:ln w="12700">
-            <a:solidFill>
-              <a:srgbClr val="0068B7"/>
-            </a:solidFill>
-            <a:prstDash val="solid"/>
-          </a:ln>
-        </p:spPr>
-      </p:sp>
-      <p:sp>
-        <p:nvSpPr>
-          <p:cNvPr id="9" name="Text 7"/>
-          <p:cNvSpPr/>
-          <p:nvPr/>
-        </p:nvSpPr>
-        <p:spPr>
-          <a:xfrm>
-            <a:off x="640080" y="731520"/>
-            <a:ext cx="420624" cy="164592"/>
-          </a:xfrm>
-          <a:prstGeom prst="rect">
-            <a:avLst/>
-          </a:prstGeom>
-          <a:noFill/>
-          <a:ln/>
-        </p:spPr>
-        <p:txBody>
-          <a:bodyPr wrap="square" lIns="0" tIns="0" rIns="0" bIns="0" rtlCol="0" anchor="ctr"/>
-          <a:lstStyle/>
-          <a:p>
-            <a:pPr algn="ctr" indent="0" marL="0">
-              <a:buNone/>
-            </a:pPr>
-            <a:r>
-              <a:rPr lang="en-US" sz="1100" b="1" dirty="0">
-                <a:solidFill>
-                  <a:srgbClr val="FFFFFF"/>
-                </a:solidFill>
-                <a:latin typeface="Aptos" pitchFamily="34" charset="0"/>
-                <a:ea typeface="Aptos" pitchFamily="34" charset="-122"/>
-                <a:cs typeface="Aptos" pitchFamily="34" charset="-120"/>
-              </a:rPr>
-              <a:t>12</a:t>
-            </a:r>
-            <a:endParaRPr lang="en-US" sz="1100" dirty="0"/>
-          </a:p>
-        </p:txBody>
-      </p:sp>
-      <p:sp>
-        <p:nvSpPr>
-          <p:cNvPr id="10" name="Text 8"/>
-          <p:cNvSpPr/>
-          <p:nvPr/>
-        </p:nvSpPr>
-        <p:spPr>
-          <a:xfrm>
-            <a:off x="640080" y="621792"/>
             <a:ext cx="10881360" cy="713232"/>
           </a:xfrm>
           <a:prstGeom prst="rect">
@@ -7539,14 +8238,14 @@
       </p:sp>
       <p:sp>
         <p:nvSpPr>
-          <p:cNvPr id="11" name="Text 9"/>
+          <p:cNvPr id="9" name="Text 7"/>
           <p:cNvSpPr/>
           <p:nvPr/>
         </p:nvSpPr>
         <p:spPr>
           <a:xfrm>
             <a:off x="868680" y="1508760"/>
-            <a:ext cx="6537960" cy="4160520"/>
+            <a:ext cx="6309360" cy="4160520"/>
           </a:xfrm>
           <a:prstGeom prst="rect">
             <a:avLst/>
@@ -7577,18 +8276,18 @@
       </p:sp>
       <p:sp>
         <p:nvSpPr>
-          <p:cNvPr id="12" name="Shape 10"/>
-          <p:cNvSpPr/>
-          <p:nvPr/>
-        </p:nvSpPr>
-        <p:spPr>
-          <a:xfrm>
-            <a:off x="7909560" y="1417320"/>
-            <a:ext cx="3154680" cy="1828800"/>
+          <p:cNvPr id="10" name="Shape 8"/>
+          <p:cNvSpPr/>
+          <p:nvPr/>
+        </p:nvSpPr>
+        <p:spPr>
+          <a:xfrm>
+            <a:off x="7635240" y="1325880"/>
+            <a:ext cx="3474720" cy="1325880"/>
           </a:xfrm>
           <a:prstGeom prst="roundRect">
             <a:avLst>
-              <a:gd name="adj" fmla="val 6000"/>
+              <a:gd name="adj" fmla="val 8276"/>
             </a:avLst>
           </a:prstGeom>
           <a:solidFill>
@@ -7604,14 +8303,14 @@
       </p:sp>
       <p:sp>
         <p:nvSpPr>
-          <p:cNvPr id="13" name="Text 11"/>
-          <p:cNvSpPr/>
-          <p:nvPr/>
-        </p:nvSpPr>
-        <p:spPr>
-          <a:xfrm>
-            <a:off x="8074152" y="1563624"/>
-            <a:ext cx="2825496" cy="256032"/>
+          <p:cNvPr id="11" name="Text 9"/>
+          <p:cNvSpPr/>
+          <p:nvPr/>
+        </p:nvSpPr>
+        <p:spPr>
+          <a:xfrm>
+            <a:off x="7799832" y="1472184"/>
+            <a:ext cx="3145536" cy="256032"/>
           </a:xfrm>
           <a:prstGeom prst="rect">
             <a:avLst/>
@@ -7635,7 +8334,7 @@
                 <a:ea typeface="Aptos" pitchFamily="34" charset="-122"/>
                 <a:cs typeface="Aptos" pitchFamily="34" charset="-120"/>
               </a:rPr>
-              <a:t>Key idea</a:t>
+              <a:t>Risk check</a:t>
             </a:r>
             <a:endParaRPr lang="en-US" sz="1300" dirty="0"/>
           </a:p>
@@ -7643,14 +8342,14 @@
       </p:sp>
       <p:sp>
         <p:nvSpPr>
-          <p:cNvPr id="14" name="Text 12"/>
-          <p:cNvSpPr/>
-          <p:nvPr/>
-        </p:nvSpPr>
-        <p:spPr>
-          <a:xfrm>
-            <a:off x="8074152" y="1920240"/>
-            <a:ext cx="2825496" cy="1188720"/>
+          <p:cNvPr id="12" name="Text 10"/>
+          <p:cNvSpPr/>
+          <p:nvPr/>
+        </p:nvSpPr>
+        <p:spPr>
+          <a:xfrm>
+            <a:off x="7799832" y="1828800"/>
+            <a:ext cx="3145536" cy="685800"/>
           </a:xfrm>
           <a:prstGeom prst="rect">
             <a:avLst/>
@@ -7684,18 +8383,171 @@
       </p:sp>
       <p:sp>
         <p:nvSpPr>
-          <p:cNvPr id="15" name="Shape 13"/>
-          <p:cNvSpPr/>
-          <p:nvPr/>
-        </p:nvSpPr>
-        <p:spPr>
-          <a:xfrm>
-            <a:off x="7909560" y="3520440"/>
-            <a:ext cx="3154680" cy="1737360"/>
+          <p:cNvPr id="13" name="Shape 11"/>
+          <p:cNvSpPr/>
+          <p:nvPr/>
+        </p:nvSpPr>
+        <p:spPr>
+          <a:xfrm>
+            <a:off x="7635240" y="2788920"/>
+            <a:ext cx="3474720" cy="1536192"/>
           </a:xfrm>
           <a:prstGeom prst="roundRect">
             <a:avLst>
-              <a:gd name="adj" fmla="val 6316"/>
+              <a:gd name="adj" fmla="val 7143"/>
+            </a:avLst>
+          </a:prstGeom>
+          <a:solidFill>
+            <a:srgbClr val="FFFFFF">
+              <a:alpha val="88000"/>
+            </a:srgbClr>
+          </a:solidFill>
+          <a:ln w="12700">
+            <a:solidFill>
+              <a:srgbClr val="D6E8F2"/>
+            </a:solidFill>
+            <a:prstDash val="solid"/>
+          </a:ln>
+        </p:spPr>
+      </p:sp>
+      <p:sp>
+        <p:nvSpPr>
+          <p:cNvPr id="14" name="Shape 12"/>
+          <p:cNvSpPr/>
+          <p:nvPr/>
+        </p:nvSpPr>
+        <p:spPr>
+          <a:xfrm>
+            <a:off x="8046720" y="3108960"/>
+            <a:ext cx="2651760" cy="896112"/>
+          </a:xfrm>
+          <a:prstGeom prst="arc">
+            <a:avLst/>
+          </a:prstGeom>
+          <a:noFill/>
+          <a:ln w="25400">
+            <a:solidFill>
+              <a:srgbClr val="0068B7"/>
+            </a:solidFill>
+            <a:prstDash val="solid"/>
+          </a:ln>
+        </p:spPr>
+      </p:sp>
+      <p:sp>
+        <p:nvSpPr>
+          <p:cNvPr id="15" name="Text 13"/>
+          <p:cNvSpPr/>
+          <p:nvPr/>
+        </p:nvSpPr>
+        <p:spPr>
+          <a:xfrm>
+            <a:off x="7909560" y="3099816"/>
+            <a:ext cx="2926080" cy="256032"/>
+          </a:xfrm>
+          <a:prstGeom prst="rect">
+            <a:avLst/>
+          </a:prstGeom>
+          <a:noFill/>
+          <a:ln/>
+        </p:spPr>
+        <p:txBody>
+          <a:bodyPr wrap="square" lIns="0" tIns="0" rIns="0" bIns="0" rtlCol="0" anchor="ctr"/>
+          <a:lstStyle/>
+          <a:p>
+            <a:pPr algn="ctr" indent="0" marL="0">
+              <a:buNone/>
+            </a:pPr>
+            <a:r>
+              <a:rPr lang="en-US" sz="1500" b="1" dirty="0">
+                <a:solidFill>
+                  <a:srgbClr val="003A63"/>
+                </a:solidFill>
+                <a:latin typeface="Aptos" pitchFamily="34" charset="0"/>
+                <a:ea typeface="Aptos" pitchFamily="34" charset="-122"/>
+                <a:cs typeface="Aptos" pitchFamily="34" charset="-120"/>
+              </a:rPr>
+              <a:t>Risk</a:t>
+            </a:r>
+            <a:endParaRPr lang="en-US" sz="1500" dirty="0"/>
+          </a:p>
+        </p:txBody>
+      </p:sp>
+      <p:sp>
+        <p:nvSpPr>
+          <p:cNvPr id="16" name="Shape 14"/>
+          <p:cNvSpPr/>
+          <p:nvPr/>
+        </p:nvSpPr>
+        <p:spPr>
+          <a:xfrm>
+            <a:off x="8366760" y="3639312"/>
+            <a:ext cx="2011680" cy="0"/>
+          </a:xfrm>
+          <a:prstGeom prst="line">
+            <a:avLst/>
+          </a:prstGeom>
+          <a:noFill/>
+          <a:ln w="63500">
+            <a:solidFill>
+              <a:srgbClr val="2F8A28"/>
+            </a:solidFill>
+            <a:prstDash val="solid"/>
+          </a:ln>
+        </p:spPr>
+      </p:sp>
+      <p:sp>
+        <p:nvSpPr>
+          <p:cNvPr id="17" name="Text 15"/>
+          <p:cNvSpPr/>
+          <p:nvPr/>
+        </p:nvSpPr>
+        <p:spPr>
+          <a:xfrm>
+            <a:off x="7909560" y="3849624"/>
+            <a:ext cx="2926080" cy="164592"/>
+          </a:xfrm>
+          <a:prstGeom prst="rect">
+            <a:avLst/>
+          </a:prstGeom>
+          <a:noFill/>
+          <a:ln/>
+        </p:spPr>
+        <p:txBody>
+          <a:bodyPr wrap="square" lIns="0" tIns="0" rIns="0" bIns="0" rtlCol="0" anchor="ctr"/>
+          <a:lstStyle/>
+          <a:p>
+            <a:pPr algn="ctr" indent="0" marL="0">
+              <a:buNone/>
+            </a:pPr>
+            <a:r>
+              <a:rPr lang="en-US" sz="900" dirty="0">
+                <a:solidFill>
+                  <a:srgbClr val="003A63"/>
+                </a:solidFill>
+                <a:latin typeface="Aptos" pitchFamily="34" charset="0"/>
+                <a:ea typeface="Aptos" pitchFamily="34" charset="-122"/>
+                <a:cs typeface="Aptos" pitchFamily="34" charset="-120"/>
+              </a:rPr>
+              <a:t>Human review</a:t>
+            </a:r>
+            <a:endParaRPr lang="en-US" sz="900" dirty="0"/>
+          </a:p>
+        </p:txBody>
+      </p:sp>
+      <p:sp>
+        <p:nvSpPr>
+          <p:cNvPr id="18" name="Shape 16"/>
+          <p:cNvSpPr/>
+          <p:nvPr/>
+        </p:nvSpPr>
+        <p:spPr>
+          <a:xfrm>
+            <a:off x="7635240" y="4498848"/>
+            <a:ext cx="3474720" cy="1143000"/>
+          </a:xfrm>
+          <a:prstGeom prst="roundRect">
+            <a:avLst>
+              <a:gd name="adj" fmla="val 9600"/>
             </a:avLst>
           </a:prstGeom>
           <a:solidFill>
@@ -7711,14 +8563,14 @@
       </p:sp>
       <p:sp>
         <p:nvSpPr>
-          <p:cNvPr id="16" name="Text 14"/>
-          <p:cNvSpPr/>
-          <p:nvPr/>
-        </p:nvSpPr>
-        <p:spPr>
-          <a:xfrm>
-            <a:off x="8074152" y="3666744"/>
-            <a:ext cx="2825496" cy="256032"/>
+          <p:cNvPr id="19" name="Text 17"/>
+          <p:cNvSpPr/>
+          <p:nvPr/>
+        </p:nvSpPr>
+        <p:spPr>
+          <a:xfrm>
+            <a:off x="7799832" y="4645152"/>
+            <a:ext cx="3145536" cy="256032"/>
           </a:xfrm>
           <a:prstGeom prst="rect">
             <a:avLst/>
@@ -7742,7 +8594,7 @@
                 <a:ea typeface="Aptos" pitchFamily="34" charset="-122"/>
                 <a:cs typeface="Aptos" pitchFamily="34" charset="-120"/>
               </a:rPr>
-              <a:t>Use this for</a:t>
+              <a:t>Safeguard to plan</a:t>
             </a:r>
             <a:endParaRPr lang="en-US" sz="1300" dirty="0"/>
           </a:p>
@@ -7750,14 +8602,14 @@
       </p:sp>
       <p:sp>
         <p:nvSpPr>
-          <p:cNvPr id="17" name="Text 15"/>
-          <p:cNvSpPr/>
-          <p:nvPr/>
-        </p:nvSpPr>
-        <p:spPr>
-          <a:xfrm>
-            <a:off x="8074152" y="4023360"/>
-            <a:ext cx="2825496" cy="1097280"/>
+          <p:cNvPr id="20" name="Text 18"/>
+          <p:cNvSpPr/>
+          <p:nvPr/>
+        </p:nvSpPr>
+        <p:spPr>
+          <a:xfrm>
+            <a:off x="7799832" y="5001768"/>
+            <a:ext cx="3145536" cy="502920"/>
           </a:xfrm>
           <a:prstGeom prst="rect">
             <a:avLst/>
@@ -7783,7 +8635,7 @@
                 <a:ea typeface="Aptos" pitchFamily="34" charset="-122"/>
                 <a:cs typeface="Aptos" pitchFamily="34" charset="-120"/>
               </a:rPr>
-              <a:t>Connect the concept to public health decisions, safeguards, documentation, or implementation work.</a:t>
+              <a:t>Identify what could go wrong, who could be affected, what safeguards are needed, and what evidence should be reviewed before use expands.</a:t>
             </a:r>
             <a:endParaRPr lang="en-US" sz="1550" dirty="0"/>
           </a:p>
@@ -7957,8 +8809,8 @@
         </p:nvSpPr>
         <p:spPr>
           <a:xfrm>
-            <a:off x="9966960" y="6537960"/>
-            <a:ext cx="1645920" cy="201168"/>
+            <a:off x="9646920" y="6537960"/>
+            <a:ext cx="1965960" cy="201168"/>
           </a:xfrm>
           <a:prstGeom prst="rect">
             <a:avLst/>
@@ -7982,7 +8834,7 @@
                 <a:ea typeface="Aptos" pitchFamily="34" charset="-122"/>
                 <a:cs typeface="Aptos" pitchFamily="34" charset="-120"/>
               </a:rPr>
-              <a:t>Â© Paula Soper</a:t>
+              <a:t>Copyright Paula Soper</a:t>
             </a:r>
             <a:endParaRPr lang="en-US" sz="800" dirty="0"/>
           </a:p>
@@ -8029,77 +8881,13 @@
       </p:sp>
       <p:sp>
         <p:nvSpPr>
-          <p:cNvPr id="8" name="Shape 6"/>
+          <p:cNvPr id="8" name="Text 6"/>
           <p:cNvSpPr/>
           <p:nvPr/>
         </p:nvSpPr>
         <p:spPr>
           <a:xfrm>
             <a:off x="640080" y="658368"/>
-            <a:ext cx="420624" cy="420624"/>
-          </a:xfrm>
-          <a:prstGeom prst="ellipse">
-            <a:avLst/>
-          </a:prstGeom>
-          <a:solidFill>
-            <a:srgbClr val="0068B7"/>
-          </a:solidFill>
-          <a:ln w="12700">
-            <a:solidFill>
-              <a:srgbClr val="0068B7"/>
-            </a:solidFill>
-            <a:prstDash val="solid"/>
-          </a:ln>
-        </p:spPr>
-      </p:sp>
-      <p:sp>
-        <p:nvSpPr>
-          <p:cNvPr id="9" name="Text 7"/>
-          <p:cNvSpPr/>
-          <p:nvPr/>
-        </p:nvSpPr>
-        <p:spPr>
-          <a:xfrm>
-            <a:off x="640080" y="731520"/>
-            <a:ext cx="420624" cy="164592"/>
-          </a:xfrm>
-          <a:prstGeom prst="rect">
-            <a:avLst/>
-          </a:prstGeom>
-          <a:noFill/>
-          <a:ln/>
-        </p:spPr>
-        <p:txBody>
-          <a:bodyPr wrap="square" lIns="0" tIns="0" rIns="0" bIns="0" rtlCol="0" anchor="ctr"/>
-          <a:lstStyle/>
-          <a:p>
-            <a:pPr algn="ctr" indent="0" marL="0">
-              <a:buNone/>
-            </a:pPr>
-            <a:r>
-              <a:rPr lang="en-US" sz="1100" b="1" dirty="0">
-                <a:solidFill>
-                  <a:srgbClr val="FFFFFF"/>
-                </a:solidFill>
-                <a:latin typeface="Aptos" pitchFamily="34" charset="0"/>
-                <a:ea typeface="Aptos" pitchFamily="34" charset="-122"/>
-                <a:cs typeface="Aptos" pitchFamily="34" charset="-120"/>
-              </a:rPr>
-              <a:t>13</a:t>
-            </a:r>
-            <a:endParaRPr lang="en-US" sz="1100" dirty="0"/>
-          </a:p>
-        </p:txBody>
-      </p:sp>
-      <p:sp>
-        <p:nvSpPr>
-          <p:cNvPr id="10" name="Text 8"/>
-          <p:cNvSpPr/>
-          <p:nvPr/>
-        </p:nvSpPr>
-        <p:spPr>
-          <a:xfrm>
-            <a:off x="640080" y="621792"/>
             <a:ext cx="10881360" cy="713232"/>
           </a:xfrm>
           <a:prstGeom prst="rect">
@@ -8134,14 +8922,14 @@
       </p:sp>
       <p:sp>
         <p:nvSpPr>
-          <p:cNvPr id="11" name="Text 9"/>
+          <p:cNvPr id="9" name="Text 7"/>
           <p:cNvSpPr/>
           <p:nvPr/>
         </p:nvSpPr>
         <p:spPr>
           <a:xfrm>
             <a:off x="868680" y="1508760"/>
-            <a:ext cx="6537960" cy="4160520"/>
+            <a:ext cx="6309360" cy="4160520"/>
           </a:xfrm>
           <a:prstGeom prst="rect">
             <a:avLst/>
@@ -8172,18 +8960,18 @@
       </p:sp>
       <p:sp>
         <p:nvSpPr>
-          <p:cNvPr id="12" name="Shape 10"/>
-          <p:cNvSpPr/>
-          <p:nvPr/>
-        </p:nvSpPr>
-        <p:spPr>
-          <a:xfrm>
-            <a:off x="7909560" y="1417320"/>
-            <a:ext cx="3154680" cy="1828800"/>
+          <p:cNvPr id="10" name="Shape 8"/>
+          <p:cNvSpPr/>
+          <p:nvPr/>
+        </p:nvSpPr>
+        <p:spPr>
+          <a:xfrm>
+            <a:off x="7635240" y="1325880"/>
+            <a:ext cx="3474720" cy="1325880"/>
           </a:xfrm>
           <a:prstGeom prst="roundRect">
             <a:avLst>
-              <a:gd name="adj" fmla="val 6000"/>
+              <a:gd name="adj" fmla="val 8276"/>
             </a:avLst>
           </a:prstGeom>
           <a:solidFill>
@@ -8199,14 +8987,14 @@
       </p:sp>
       <p:sp>
         <p:nvSpPr>
-          <p:cNvPr id="13" name="Text 11"/>
-          <p:cNvSpPr/>
-          <p:nvPr/>
-        </p:nvSpPr>
-        <p:spPr>
-          <a:xfrm>
-            <a:off x="8074152" y="1563624"/>
-            <a:ext cx="2825496" cy="256032"/>
+          <p:cNvPr id="11" name="Text 9"/>
+          <p:cNvSpPr/>
+          <p:nvPr/>
+        </p:nvSpPr>
+        <p:spPr>
+          <a:xfrm>
+            <a:off x="7799832" y="1472184"/>
+            <a:ext cx="3145536" cy="256032"/>
           </a:xfrm>
           <a:prstGeom prst="rect">
             <a:avLst/>
@@ -8230,7 +9018,7 @@
                 <a:ea typeface="Aptos" pitchFamily="34" charset="-122"/>
                 <a:cs typeface="Aptos" pitchFamily="34" charset="-120"/>
               </a:rPr>
-              <a:t>Key idea</a:t>
+              <a:t>Risk check</a:t>
             </a:r>
             <a:endParaRPr lang="en-US" sz="1300" dirty="0"/>
           </a:p>
@@ -8238,14 +9026,14 @@
       </p:sp>
       <p:sp>
         <p:nvSpPr>
-          <p:cNvPr id="14" name="Text 12"/>
-          <p:cNvSpPr/>
-          <p:nvPr/>
-        </p:nvSpPr>
-        <p:spPr>
-          <a:xfrm>
-            <a:off x="8074152" y="1920240"/>
-            <a:ext cx="2825496" cy="1188720"/>
+          <p:cNvPr id="12" name="Text 10"/>
+          <p:cNvSpPr/>
+          <p:nvPr/>
+        </p:nvSpPr>
+        <p:spPr>
+          <a:xfrm>
+            <a:off x="7799832" y="1828800"/>
+            <a:ext cx="3145536" cy="685800"/>
           </a:xfrm>
           <a:prstGeom prst="rect">
             <a:avLst/>
@@ -8279,18 +9067,171 @@
       </p:sp>
       <p:sp>
         <p:nvSpPr>
-          <p:cNvPr id="15" name="Shape 13"/>
-          <p:cNvSpPr/>
-          <p:nvPr/>
-        </p:nvSpPr>
-        <p:spPr>
-          <a:xfrm>
-            <a:off x="7909560" y="3520440"/>
-            <a:ext cx="3154680" cy="1737360"/>
+          <p:cNvPr id="13" name="Shape 11"/>
+          <p:cNvSpPr/>
+          <p:nvPr/>
+        </p:nvSpPr>
+        <p:spPr>
+          <a:xfrm>
+            <a:off x="7635240" y="2788920"/>
+            <a:ext cx="3474720" cy="1536192"/>
           </a:xfrm>
           <a:prstGeom prst="roundRect">
             <a:avLst>
-              <a:gd name="adj" fmla="val 6316"/>
+              <a:gd name="adj" fmla="val 7143"/>
+            </a:avLst>
+          </a:prstGeom>
+          <a:solidFill>
+            <a:srgbClr val="FFFFFF">
+              <a:alpha val="88000"/>
+            </a:srgbClr>
+          </a:solidFill>
+          <a:ln w="12700">
+            <a:solidFill>
+              <a:srgbClr val="D6E8F2"/>
+            </a:solidFill>
+            <a:prstDash val="solid"/>
+          </a:ln>
+        </p:spPr>
+      </p:sp>
+      <p:sp>
+        <p:nvSpPr>
+          <p:cNvPr id="14" name="Shape 12"/>
+          <p:cNvSpPr/>
+          <p:nvPr/>
+        </p:nvSpPr>
+        <p:spPr>
+          <a:xfrm>
+            <a:off x="8046720" y="3108960"/>
+            <a:ext cx="2651760" cy="896112"/>
+          </a:xfrm>
+          <a:prstGeom prst="arc">
+            <a:avLst/>
+          </a:prstGeom>
+          <a:noFill/>
+          <a:ln w="25400">
+            <a:solidFill>
+              <a:srgbClr val="0068B7"/>
+            </a:solidFill>
+            <a:prstDash val="solid"/>
+          </a:ln>
+        </p:spPr>
+      </p:sp>
+      <p:sp>
+        <p:nvSpPr>
+          <p:cNvPr id="15" name="Text 13"/>
+          <p:cNvSpPr/>
+          <p:nvPr/>
+        </p:nvSpPr>
+        <p:spPr>
+          <a:xfrm>
+            <a:off x="7909560" y="3099816"/>
+            <a:ext cx="2926080" cy="256032"/>
+          </a:xfrm>
+          <a:prstGeom prst="rect">
+            <a:avLst/>
+          </a:prstGeom>
+          <a:noFill/>
+          <a:ln/>
+        </p:spPr>
+        <p:txBody>
+          <a:bodyPr wrap="square" lIns="0" tIns="0" rIns="0" bIns="0" rtlCol="0" anchor="ctr"/>
+          <a:lstStyle/>
+          <a:p>
+            <a:pPr algn="ctr" indent="0" marL="0">
+              <a:buNone/>
+            </a:pPr>
+            <a:r>
+              <a:rPr lang="en-US" sz="1500" b="1" dirty="0">
+                <a:solidFill>
+                  <a:srgbClr val="003A63"/>
+                </a:solidFill>
+                <a:latin typeface="Aptos" pitchFamily="34" charset="0"/>
+                <a:ea typeface="Aptos" pitchFamily="34" charset="-122"/>
+                <a:cs typeface="Aptos" pitchFamily="34" charset="-120"/>
+              </a:rPr>
+              <a:t>Risk</a:t>
+            </a:r>
+            <a:endParaRPr lang="en-US" sz="1500" dirty="0"/>
+          </a:p>
+        </p:txBody>
+      </p:sp>
+      <p:sp>
+        <p:nvSpPr>
+          <p:cNvPr id="16" name="Shape 14"/>
+          <p:cNvSpPr/>
+          <p:nvPr/>
+        </p:nvSpPr>
+        <p:spPr>
+          <a:xfrm>
+            <a:off x="8366760" y="3639312"/>
+            <a:ext cx="2011680" cy="0"/>
+          </a:xfrm>
+          <a:prstGeom prst="line">
+            <a:avLst/>
+          </a:prstGeom>
+          <a:noFill/>
+          <a:ln w="63500">
+            <a:solidFill>
+              <a:srgbClr val="2F8A28"/>
+            </a:solidFill>
+            <a:prstDash val="solid"/>
+          </a:ln>
+        </p:spPr>
+      </p:sp>
+      <p:sp>
+        <p:nvSpPr>
+          <p:cNvPr id="17" name="Text 15"/>
+          <p:cNvSpPr/>
+          <p:nvPr/>
+        </p:nvSpPr>
+        <p:spPr>
+          <a:xfrm>
+            <a:off x="7909560" y="3849624"/>
+            <a:ext cx="2926080" cy="164592"/>
+          </a:xfrm>
+          <a:prstGeom prst="rect">
+            <a:avLst/>
+          </a:prstGeom>
+          <a:noFill/>
+          <a:ln/>
+        </p:spPr>
+        <p:txBody>
+          <a:bodyPr wrap="square" lIns="0" tIns="0" rIns="0" bIns="0" rtlCol="0" anchor="ctr"/>
+          <a:lstStyle/>
+          <a:p>
+            <a:pPr algn="ctr" indent="0" marL="0">
+              <a:buNone/>
+            </a:pPr>
+            <a:r>
+              <a:rPr lang="en-US" sz="900" dirty="0">
+                <a:solidFill>
+                  <a:srgbClr val="003A63"/>
+                </a:solidFill>
+                <a:latin typeface="Aptos" pitchFamily="34" charset="0"/>
+                <a:ea typeface="Aptos" pitchFamily="34" charset="-122"/>
+                <a:cs typeface="Aptos" pitchFamily="34" charset="-120"/>
+              </a:rPr>
+              <a:t>Human review</a:t>
+            </a:r>
+            <a:endParaRPr lang="en-US" sz="900" dirty="0"/>
+          </a:p>
+        </p:txBody>
+      </p:sp>
+      <p:sp>
+        <p:nvSpPr>
+          <p:cNvPr id="18" name="Shape 16"/>
+          <p:cNvSpPr/>
+          <p:nvPr/>
+        </p:nvSpPr>
+        <p:spPr>
+          <a:xfrm>
+            <a:off x="7635240" y="4498848"/>
+            <a:ext cx="3474720" cy="1143000"/>
+          </a:xfrm>
+          <a:prstGeom prst="roundRect">
+            <a:avLst>
+              <a:gd name="adj" fmla="val 9600"/>
             </a:avLst>
           </a:prstGeom>
           <a:solidFill>
@@ -8306,14 +9247,14 @@
       </p:sp>
       <p:sp>
         <p:nvSpPr>
-          <p:cNvPr id="16" name="Text 14"/>
-          <p:cNvSpPr/>
-          <p:nvPr/>
-        </p:nvSpPr>
-        <p:spPr>
-          <a:xfrm>
-            <a:off x="8074152" y="3666744"/>
-            <a:ext cx="2825496" cy="256032"/>
+          <p:cNvPr id="19" name="Text 17"/>
+          <p:cNvSpPr/>
+          <p:nvPr/>
+        </p:nvSpPr>
+        <p:spPr>
+          <a:xfrm>
+            <a:off x="7799832" y="4645152"/>
+            <a:ext cx="3145536" cy="256032"/>
           </a:xfrm>
           <a:prstGeom prst="rect">
             <a:avLst/>
@@ -8337,7 +9278,7 @@
                 <a:ea typeface="Aptos" pitchFamily="34" charset="-122"/>
                 <a:cs typeface="Aptos" pitchFamily="34" charset="-120"/>
               </a:rPr>
-              <a:t>Use this for</a:t>
+              <a:t>Safeguard to plan</a:t>
             </a:r>
             <a:endParaRPr lang="en-US" sz="1300" dirty="0"/>
           </a:p>
@@ -8345,14 +9286,14 @@
       </p:sp>
       <p:sp>
         <p:nvSpPr>
-          <p:cNvPr id="17" name="Text 15"/>
-          <p:cNvSpPr/>
-          <p:nvPr/>
-        </p:nvSpPr>
-        <p:spPr>
-          <a:xfrm>
-            <a:off x="8074152" y="4023360"/>
-            <a:ext cx="2825496" cy="1097280"/>
+          <p:cNvPr id="20" name="Text 18"/>
+          <p:cNvSpPr/>
+          <p:nvPr/>
+        </p:nvSpPr>
+        <p:spPr>
+          <a:xfrm>
+            <a:off x="7799832" y="5001768"/>
+            <a:ext cx="3145536" cy="502920"/>
           </a:xfrm>
           <a:prstGeom prst="rect">
             <a:avLst/>
@@ -8378,7 +9319,7 @@
                 <a:ea typeface="Aptos" pitchFamily="34" charset="-122"/>
                 <a:cs typeface="Aptos" pitchFamily="34" charset="-120"/>
               </a:rPr>
-              <a:t>Connect the concept to public health decisions, safeguards, documentation, or implementation work.</a:t>
+              <a:t>Use the assignment to test whether you can explain the concept, apply it to a realistic public health situation, and identify what would need review before the work moves forward.</a:t>
             </a:r>
             <a:endParaRPr lang="en-US" sz="1550" dirty="0"/>
           </a:p>
@@ -8552,8 +9493,8 @@
         </p:nvSpPr>
         <p:spPr>
           <a:xfrm>
-            <a:off x="9966960" y="6537960"/>
-            <a:ext cx="1645920" cy="201168"/>
+            <a:off x="9646920" y="6537960"/>
+            <a:ext cx="1965960" cy="201168"/>
           </a:xfrm>
           <a:prstGeom prst="rect">
             <a:avLst/>
@@ -8577,7 +9518,7 @@
                 <a:ea typeface="Aptos" pitchFamily="34" charset="-122"/>
                 <a:cs typeface="Aptos" pitchFamily="34" charset="-120"/>
               </a:rPr>
-              <a:t>Â© Paula Soper</a:t>
+              <a:t>Copyright Paula Soper</a:t>
             </a:r>
             <a:endParaRPr lang="en-US" sz="800" dirty="0"/>
           </a:p>
@@ -8624,77 +9565,13 @@
       </p:sp>
       <p:sp>
         <p:nvSpPr>
-          <p:cNvPr id="8" name="Shape 6"/>
+          <p:cNvPr id="8" name="Text 6"/>
           <p:cNvSpPr/>
           <p:nvPr/>
         </p:nvSpPr>
         <p:spPr>
           <a:xfrm>
             <a:off x="640080" y="658368"/>
-            <a:ext cx="420624" cy="420624"/>
-          </a:xfrm>
-          <a:prstGeom prst="ellipse">
-            <a:avLst/>
-          </a:prstGeom>
-          <a:solidFill>
-            <a:srgbClr val="0068B7"/>
-          </a:solidFill>
-          <a:ln w="12700">
-            <a:solidFill>
-              <a:srgbClr val="0068B7"/>
-            </a:solidFill>
-            <a:prstDash val="solid"/>
-          </a:ln>
-        </p:spPr>
-      </p:sp>
-      <p:sp>
-        <p:nvSpPr>
-          <p:cNvPr id="9" name="Text 7"/>
-          <p:cNvSpPr/>
-          <p:nvPr/>
-        </p:nvSpPr>
-        <p:spPr>
-          <a:xfrm>
-            <a:off x="640080" y="731520"/>
-            <a:ext cx="420624" cy="164592"/>
-          </a:xfrm>
-          <a:prstGeom prst="rect">
-            <a:avLst/>
-          </a:prstGeom>
-          <a:noFill/>
-          <a:ln/>
-        </p:spPr>
-        <p:txBody>
-          <a:bodyPr wrap="square" lIns="0" tIns="0" rIns="0" bIns="0" rtlCol="0" anchor="ctr"/>
-          <a:lstStyle/>
-          <a:p>
-            <a:pPr algn="ctr" indent="0" marL="0">
-              <a:buNone/>
-            </a:pPr>
-            <a:r>
-              <a:rPr lang="en-US" sz="1100" b="1" dirty="0">
-                <a:solidFill>
-                  <a:srgbClr val="FFFFFF"/>
-                </a:solidFill>
-                <a:latin typeface="Aptos" pitchFamily="34" charset="0"/>
-                <a:ea typeface="Aptos" pitchFamily="34" charset="-122"/>
-                <a:cs typeface="Aptos" pitchFamily="34" charset="-120"/>
-              </a:rPr>
-              <a:t>14</a:t>
-            </a:r>
-            <a:endParaRPr lang="en-US" sz="1100" dirty="0"/>
-          </a:p>
-        </p:txBody>
-      </p:sp>
-      <p:sp>
-        <p:nvSpPr>
-          <p:cNvPr id="10" name="Text 8"/>
-          <p:cNvSpPr/>
-          <p:nvPr/>
-        </p:nvSpPr>
-        <p:spPr>
-          <a:xfrm>
-            <a:off x="640080" y="621792"/>
             <a:ext cx="10881360" cy="713232"/>
           </a:xfrm>
           <a:prstGeom prst="rect">
@@ -8729,14 +9606,14 @@
       </p:sp>
       <p:sp>
         <p:nvSpPr>
-          <p:cNvPr id="11" name="Text 9"/>
+          <p:cNvPr id="9" name="Text 7"/>
           <p:cNvSpPr/>
           <p:nvPr/>
         </p:nvSpPr>
         <p:spPr>
           <a:xfrm>
             <a:off x="868680" y="1508760"/>
-            <a:ext cx="6537960" cy="4160520"/>
+            <a:ext cx="6309360" cy="4160520"/>
           </a:xfrm>
           <a:prstGeom prst="rect">
             <a:avLst/>
@@ -8795,18 +9672,18 @@
       </p:sp>
       <p:sp>
         <p:nvSpPr>
-          <p:cNvPr id="12" name="Shape 10"/>
-          <p:cNvSpPr/>
-          <p:nvPr/>
-        </p:nvSpPr>
-        <p:spPr>
-          <a:xfrm>
-            <a:off x="7909560" y="1417320"/>
-            <a:ext cx="3154680" cy="1828800"/>
+          <p:cNvPr id="10" name="Shape 8"/>
+          <p:cNvSpPr/>
+          <p:nvPr/>
+        </p:nvSpPr>
+        <p:spPr>
+          <a:xfrm>
+            <a:off x="7635240" y="1325880"/>
+            <a:ext cx="3474720" cy="1325880"/>
           </a:xfrm>
           <a:prstGeom prst="roundRect">
             <a:avLst>
-              <a:gd name="adj" fmla="val 6000"/>
+              <a:gd name="adj" fmla="val 8276"/>
             </a:avLst>
           </a:prstGeom>
           <a:solidFill>
@@ -8822,14 +9699,14 @@
       </p:sp>
       <p:sp>
         <p:nvSpPr>
-          <p:cNvPr id="13" name="Text 11"/>
-          <p:cNvSpPr/>
-          <p:nvPr/>
-        </p:nvSpPr>
-        <p:spPr>
-          <a:xfrm>
-            <a:off x="8074152" y="1563624"/>
-            <a:ext cx="2825496" cy="256032"/>
+          <p:cNvPr id="11" name="Text 9"/>
+          <p:cNvSpPr/>
+          <p:nvPr/>
+        </p:nvSpPr>
+        <p:spPr>
+          <a:xfrm>
+            <a:off x="7799832" y="1472184"/>
+            <a:ext cx="3145536" cy="256032"/>
           </a:xfrm>
           <a:prstGeom prst="rect">
             <a:avLst/>
@@ -8853,7 +9730,7 @@
                 <a:ea typeface="Aptos" pitchFamily="34" charset="-122"/>
                 <a:cs typeface="Aptos" pitchFamily="34" charset="-120"/>
               </a:rPr>
-              <a:t>Key idea</a:t>
+              <a:t>Risk check</a:t>
             </a:r>
             <a:endParaRPr lang="en-US" sz="1300" dirty="0"/>
           </a:p>
@@ -8861,14 +9738,14 @@
       </p:sp>
       <p:sp>
         <p:nvSpPr>
-          <p:cNvPr id="14" name="Text 12"/>
-          <p:cNvSpPr/>
-          <p:nvPr/>
-        </p:nvSpPr>
-        <p:spPr>
-          <a:xfrm>
-            <a:off x="8074152" y="1920240"/>
-            <a:ext cx="2825496" cy="1188720"/>
+          <p:cNvPr id="12" name="Text 10"/>
+          <p:cNvSpPr/>
+          <p:nvPr/>
+        </p:nvSpPr>
+        <p:spPr>
+          <a:xfrm>
+            <a:off x="7799832" y="1828800"/>
+            <a:ext cx="3145536" cy="685800"/>
           </a:xfrm>
           <a:prstGeom prst="rect">
             <a:avLst/>
@@ -8902,18 +9779,171 @@
       </p:sp>
       <p:sp>
         <p:nvSpPr>
-          <p:cNvPr id="15" name="Shape 13"/>
-          <p:cNvSpPr/>
-          <p:nvPr/>
-        </p:nvSpPr>
-        <p:spPr>
-          <a:xfrm>
-            <a:off x="7909560" y="3520440"/>
-            <a:ext cx="3154680" cy="1737360"/>
+          <p:cNvPr id="13" name="Shape 11"/>
+          <p:cNvSpPr/>
+          <p:nvPr/>
+        </p:nvSpPr>
+        <p:spPr>
+          <a:xfrm>
+            <a:off x="7635240" y="2788920"/>
+            <a:ext cx="3474720" cy="1536192"/>
           </a:xfrm>
           <a:prstGeom prst="roundRect">
             <a:avLst>
-              <a:gd name="adj" fmla="val 6316"/>
+              <a:gd name="adj" fmla="val 7143"/>
+            </a:avLst>
+          </a:prstGeom>
+          <a:solidFill>
+            <a:srgbClr val="FFFFFF">
+              <a:alpha val="88000"/>
+            </a:srgbClr>
+          </a:solidFill>
+          <a:ln w="12700">
+            <a:solidFill>
+              <a:srgbClr val="D6E8F2"/>
+            </a:solidFill>
+            <a:prstDash val="solid"/>
+          </a:ln>
+        </p:spPr>
+      </p:sp>
+      <p:sp>
+        <p:nvSpPr>
+          <p:cNvPr id="14" name="Shape 12"/>
+          <p:cNvSpPr/>
+          <p:nvPr/>
+        </p:nvSpPr>
+        <p:spPr>
+          <a:xfrm>
+            <a:off x="8046720" y="3108960"/>
+            <a:ext cx="2651760" cy="896112"/>
+          </a:xfrm>
+          <a:prstGeom prst="arc">
+            <a:avLst/>
+          </a:prstGeom>
+          <a:noFill/>
+          <a:ln w="25400">
+            <a:solidFill>
+              <a:srgbClr val="0068B7"/>
+            </a:solidFill>
+            <a:prstDash val="solid"/>
+          </a:ln>
+        </p:spPr>
+      </p:sp>
+      <p:sp>
+        <p:nvSpPr>
+          <p:cNvPr id="15" name="Text 13"/>
+          <p:cNvSpPr/>
+          <p:nvPr/>
+        </p:nvSpPr>
+        <p:spPr>
+          <a:xfrm>
+            <a:off x="7909560" y="3099816"/>
+            <a:ext cx="2926080" cy="256032"/>
+          </a:xfrm>
+          <a:prstGeom prst="rect">
+            <a:avLst/>
+          </a:prstGeom>
+          <a:noFill/>
+          <a:ln/>
+        </p:spPr>
+        <p:txBody>
+          <a:bodyPr wrap="square" lIns="0" tIns="0" rIns="0" bIns="0" rtlCol="0" anchor="ctr"/>
+          <a:lstStyle/>
+          <a:p>
+            <a:pPr algn="ctr" indent="0" marL="0">
+              <a:buNone/>
+            </a:pPr>
+            <a:r>
+              <a:rPr lang="en-US" sz="1500" b="1" dirty="0">
+                <a:solidFill>
+                  <a:srgbClr val="003A63"/>
+                </a:solidFill>
+                <a:latin typeface="Aptos" pitchFamily="34" charset="0"/>
+                <a:ea typeface="Aptos" pitchFamily="34" charset="-122"/>
+                <a:cs typeface="Aptos" pitchFamily="34" charset="-120"/>
+              </a:rPr>
+              <a:t>Risk</a:t>
+            </a:r>
+            <a:endParaRPr lang="en-US" sz="1500" dirty="0"/>
+          </a:p>
+        </p:txBody>
+      </p:sp>
+      <p:sp>
+        <p:nvSpPr>
+          <p:cNvPr id="16" name="Shape 14"/>
+          <p:cNvSpPr/>
+          <p:nvPr/>
+        </p:nvSpPr>
+        <p:spPr>
+          <a:xfrm>
+            <a:off x="8366760" y="3639312"/>
+            <a:ext cx="2011680" cy="0"/>
+          </a:xfrm>
+          <a:prstGeom prst="line">
+            <a:avLst/>
+          </a:prstGeom>
+          <a:noFill/>
+          <a:ln w="63500">
+            <a:solidFill>
+              <a:srgbClr val="2F8A28"/>
+            </a:solidFill>
+            <a:prstDash val="solid"/>
+          </a:ln>
+        </p:spPr>
+      </p:sp>
+      <p:sp>
+        <p:nvSpPr>
+          <p:cNvPr id="17" name="Text 15"/>
+          <p:cNvSpPr/>
+          <p:nvPr/>
+        </p:nvSpPr>
+        <p:spPr>
+          <a:xfrm>
+            <a:off x="7909560" y="3849624"/>
+            <a:ext cx="2926080" cy="164592"/>
+          </a:xfrm>
+          <a:prstGeom prst="rect">
+            <a:avLst/>
+          </a:prstGeom>
+          <a:noFill/>
+          <a:ln/>
+        </p:spPr>
+        <p:txBody>
+          <a:bodyPr wrap="square" lIns="0" tIns="0" rIns="0" bIns="0" rtlCol="0" anchor="ctr"/>
+          <a:lstStyle/>
+          <a:p>
+            <a:pPr algn="ctr" indent="0" marL="0">
+              <a:buNone/>
+            </a:pPr>
+            <a:r>
+              <a:rPr lang="en-US" sz="900" dirty="0">
+                <a:solidFill>
+                  <a:srgbClr val="003A63"/>
+                </a:solidFill>
+                <a:latin typeface="Aptos" pitchFamily="34" charset="0"/>
+                <a:ea typeface="Aptos" pitchFamily="34" charset="-122"/>
+                <a:cs typeface="Aptos" pitchFamily="34" charset="-120"/>
+              </a:rPr>
+              <a:t>Human review</a:t>
+            </a:r>
+            <a:endParaRPr lang="en-US" sz="900" dirty="0"/>
+          </a:p>
+        </p:txBody>
+      </p:sp>
+      <p:sp>
+        <p:nvSpPr>
+          <p:cNvPr id="18" name="Shape 16"/>
+          <p:cNvSpPr/>
+          <p:nvPr/>
+        </p:nvSpPr>
+        <p:spPr>
+          <a:xfrm>
+            <a:off x="7635240" y="4498848"/>
+            <a:ext cx="3474720" cy="1143000"/>
+          </a:xfrm>
+          <a:prstGeom prst="roundRect">
+            <a:avLst>
+              <a:gd name="adj" fmla="val 9600"/>
             </a:avLst>
           </a:prstGeom>
           <a:solidFill>
@@ -8929,14 +9959,14 @@
       </p:sp>
       <p:sp>
         <p:nvSpPr>
-          <p:cNvPr id="16" name="Text 14"/>
-          <p:cNvSpPr/>
-          <p:nvPr/>
-        </p:nvSpPr>
-        <p:spPr>
-          <a:xfrm>
-            <a:off x="8074152" y="3666744"/>
-            <a:ext cx="2825496" cy="256032"/>
+          <p:cNvPr id="19" name="Text 17"/>
+          <p:cNvSpPr/>
+          <p:nvPr/>
+        </p:nvSpPr>
+        <p:spPr>
+          <a:xfrm>
+            <a:off x="7799832" y="4645152"/>
+            <a:ext cx="3145536" cy="256032"/>
           </a:xfrm>
           <a:prstGeom prst="rect">
             <a:avLst/>
@@ -8960,7 +9990,7 @@
                 <a:ea typeface="Aptos" pitchFamily="34" charset="-122"/>
                 <a:cs typeface="Aptos" pitchFamily="34" charset="-120"/>
               </a:rPr>
-              <a:t>Use this for</a:t>
+              <a:t>Safeguard to plan</a:t>
             </a:r>
             <a:endParaRPr lang="en-US" sz="1300" dirty="0"/>
           </a:p>
@@ -8968,14 +9998,14 @@
       </p:sp>
       <p:sp>
         <p:nvSpPr>
-          <p:cNvPr id="17" name="Text 15"/>
-          <p:cNvSpPr/>
-          <p:nvPr/>
-        </p:nvSpPr>
-        <p:spPr>
-          <a:xfrm>
-            <a:off x="8074152" y="4023360"/>
-            <a:ext cx="2825496" cy="1097280"/>
+          <p:cNvPr id="20" name="Text 18"/>
+          <p:cNvSpPr/>
+          <p:nvPr/>
+        </p:nvSpPr>
+        <p:spPr>
+          <a:xfrm>
+            <a:off x="7799832" y="5001768"/>
+            <a:ext cx="3145536" cy="502920"/>
           </a:xfrm>
           <a:prstGeom prst="rect">
             <a:avLst/>
@@ -9001,7 +10031,7 @@
                 <a:ea typeface="Aptos" pitchFamily="34" charset="-122"/>
                 <a:cs typeface="Aptos" pitchFamily="34" charset="-120"/>
               </a:rPr>
-              <a:t>Connect the concept to public health decisions, safeguards, documentation, or implementation work.</a:t>
+              <a:t>Use the assignment to test whether you can explain the concept, apply it to a realistic public health situation, and identify what would need review before the work moves forward.</a:t>
             </a:r>
             <a:endParaRPr lang="en-US" sz="1550" dirty="0"/>
           </a:p>
@@ -9175,8 +10205,8 @@
         </p:nvSpPr>
         <p:spPr>
           <a:xfrm>
-            <a:off x="9966960" y="6537960"/>
-            <a:ext cx="1645920" cy="201168"/>
+            <a:off x="9646920" y="6537960"/>
+            <a:ext cx="1965960" cy="201168"/>
           </a:xfrm>
           <a:prstGeom prst="rect">
             <a:avLst/>
@@ -9200,7 +10230,7 @@
                 <a:ea typeface="Aptos" pitchFamily="34" charset="-122"/>
                 <a:cs typeface="Aptos" pitchFamily="34" charset="-120"/>
               </a:rPr>
-              <a:t>Â© Paula Soper</a:t>
+              <a:t>Copyright Paula Soper</a:t>
             </a:r>
             <a:endParaRPr lang="en-US" sz="800" dirty="0"/>
           </a:p>
@@ -9563,46 +10593,7 @@
       </p:sp>
       <p:sp>
         <p:nvSpPr>
-          <p:cNvPr id="15" name="Text 13"/>
-          <p:cNvSpPr/>
-          <p:nvPr/>
-        </p:nvSpPr>
-        <p:spPr>
-          <a:xfrm>
-            <a:off x="8695944" y="3941064"/>
-            <a:ext cx="201168" cy="256032"/>
-          </a:xfrm>
-          <a:prstGeom prst="rect">
-            <a:avLst/>
-          </a:prstGeom>
-          <a:noFill/>
-          <a:ln/>
-        </p:spPr>
-        <p:txBody>
-          <a:bodyPr wrap="square" lIns="0" tIns="0" rIns="0" bIns="0" rtlCol="0" anchor="ctr"/>
-          <a:lstStyle/>
-          <a:p>
-            <a:pPr algn="ctr" indent="0" marL="0">
-              <a:buNone/>
-            </a:pPr>
-            <a:r>
-              <a:rPr lang="en-US" sz="1800" b="1" dirty="0">
-                <a:solidFill>
-                  <a:srgbClr val="0068B7"/>
-                </a:solidFill>
-                <a:latin typeface="Aptos" pitchFamily="34" charset="0"/>
-                <a:ea typeface="Aptos" pitchFamily="34" charset="-122"/>
-                <a:cs typeface="Aptos" pitchFamily="34" charset="-120"/>
-              </a:rPr>
-              <a:t>â†’</a:t>
-            </a:r>
-            <a:endParaRPr lang="en-US" sz="1800" dirty="0"/>
-          </a:p>
-        </p:txBody>
-      </p:sp>
-      <p:sp>
-        <p:nvSpPr>
-          <p:cNvPr id="16" name="Shape 14"/>
+          <p:cNvPr id="15" name="Shape 13"/>
           <p:cNvSpPr/>
           <p:nvPr/>
         </p:nvSpPr>
@@ -9629,7 +10620,7 @@
       </p:sp>
       <p:sp>
         <p:nvSpPr>
-          <p:cNvPr id="17" name="Text 15"/>
+          <p:cNvPr id="16" name="Text 14"/>
           <p:cNvSpPr/>
           <p:nvPr/>
         </p:nvSpPr>
@@ -9670,46 +10661,7 @@
       </p:sp>
       <p:sp>
         <p:nvSpPr>
-          <p:cNvPr id="18" name="Text 16"/>
-          <p:cNvSpPr/>
-          <p:nvPr/>
-        </p:nvSpPr>
-        <p:spPr>
-          <a:xfrm>
-            <a:off x="9985248" y="3941064"/>
-            <a:ext cx="201168" cy="256032"/>
-          </a:xfrm>
-          <a:prstGeom prst="rect">
-            <a:avLst/>
-          </a:prstGeom>
-          <a:noFill/>
-          <a:ln/>
-        </p:spPr>
-        <p:txBody>
-          <a:bodyPr wrap="square" lIns="0" tIns="0" rIns="0" bIns="0" rtlCol="0" anchor="ctr"/>
-          <a:lstStyle/>
-          <a:p>
-            <a:pPr algn="ctr" indent="0" marL="0">
-              <a:buNone/>
-            </a:pPr>
-            <a:r>
-              <a:rPr lang="en-US" sz="1800" b="1" dirty="0">
-                <a:solidFill>
-                  <a:srgbClr val="0068B7"/>
-                </a:solidFill>
-                <a:latin typeface="Aptos" pitchFamily="34" charset="0"/>
-                <a:ea typeface="Aptos" pitchFamily="34" charset="-122"/>
-                <a:cs typeface="Aptos" pitchFamily="34" charset="-120"/>
-              </a:rPr>
-              <a:t>â†’</a:t>
-            </a:r>
-            <a:endParaRPr lang="en-US" sz="1800" dirty="0"/>
-          </a:p>
-        </p:txBody>
-      </p:sp>
-      <p:sp>
-        <p:nvSpPr>
-          <p:cNvPr id="19" name="Shape 17"/>
+          <p:cNvPr id="17" name="Shape 15"/>
           <p:cNvSpPr/>
           <p:nvPr/>
         </p:nvSpPr>
@@ -9736,7 +10688,7 @@
       </p:sp>
       <p:sp>
         <p:nvSpPr>
-          <p:cNvPr id="20" name="Text 18"/>
+          <p:cNvPr id="18" name="Text 16"/>
           <p:cNvSpPr/>
           <p:nvPr/>
         </p:nvSpPr>
@@ -9943,8 +10895,8 @@
         </p:nvSpPr>
         <p:spPr>
           <a:xfrm>
-            <a:off x="9966960" y="6537960"/>
-            <a:ext cx="1645920" cy="201168"/>
+            <a:off x="9646920" y="6537960"/>
+            <a:ext cx="1965960" cy="201168"/>
           </a:xfrm>
           <a:prstGeom prst="rect">
             <a:avLst/>
@@ -9968,7 +10920,7 @@
                 <a:ea typeface="Aptos" pitchFamily="34" charset="-122"/>
                 <a:cs typeface="Aptos" pitchFamily="34" charset="-120"/>
               </a:rPr>
-              <a:t>Â© Paula Soper</a:t>
+              <a:t>Copyright Paula Soper</a:t>
             </a:r>
             <a:endParaRPr lang="en-US" sz="800" dirty="0"/>
           </a:p>
@@ -10015,77 +10967,13 @@
       </p:sp>
       <p:sp>
         <p:nvSpPr>
-          <p:cNvPr id="8" name="Shape 6"/>
+          <p:cNvPr id="8" name="Text 6"/>
           <p:cNvSpPr/>
           <p:nvPr/>
         </p:nvSpPr>
         <p:spPr>
           <a:xfrm>
             <a:off x="640080" y="658368"/>
-            <a:ext cx="420624" cy="420624"/>
-          </a:xfrm>
-          <a:prstGeom prst="ellipse">
-            <a:avLst/>
-          </a:prstGeom>
-          <a:solidFill>
-            <a:srgbClr val="0068B7"/>
-          </a:solidFill>
-          <a:ln w="12700">
-            <a:solidFill>
-              <a:srgbClr val="0068B7"/>
-            </a:solidFill>
-            <a:prstDash val="solid"/>
-          </a:ln>
-        </p:spPr>
-      </p:sp>
-      <p:sp>
-        <p:nvSpPr>
-          <p:cNvPr id="9" name="Text 7"/>
-          <p:cNvSpPr/>
-          <p:nvPr/>
-        </p:nvSpPr>
-        <p:spPr>
-          <a:xfrm>
-            <a:off x="640080" y="731520"/>
-            <a:ext cx="420624" cy="164592"/>
-          </a:xfrm>
-          <a:prstGeom prst="rect">
-            <a:avLst/>
-          </a:prstGeom>
-          <a:noFill/>
-          <a:ln/>
-        </p:spPr>
-        <p:txBody>
-          <a:bodyPr wrap="square" lIns="0" tIns="0" rIns="0" bIns="0" rtlCol="0" anchor="ctr"/>
-          <a:lstStyle/>
-          <a:p>
-            <a:pPr algn="ctr" indent="0" marL="0">
-              <a:buNone/>
-            </a:pPr>
-            <a:r>
-              <a:rPr lang="en-US" sz="1100" b="1" dirty="0">
-                <a:solidFill>
-                  <a:srgbClr val="FFFFFF"/>
-                </a:solidFill>
-                <a:latin typeface="Aptos" pitchFamily="34" charset="0"/>
-                <a:ea typeface="Aptos" pitchFamily="34" charset="-122"/>
-                <a:cs typeface="Aptos" pitchFamily="34" charset="-120"/>
-              </a:rPr>
-              <a:t>15</a:t>
-            </a:r>
-            <a:endParaRPr lang="en-US" sz="1100" dirty="0"/>
-          </a:p>
-        </p:txBody>
-      </p:sp>
-      <p:sp>
-        <p:nvSpPr>
-          <p:cNvPr id="10" name="Text 8"/>
-          <p:cNvSpPr/>
-          <p:nvPr/>
-        </p:nvSpPr>
-        <p:spPr>
-          <a:xfrm>
-            <a:off x="640080" y="621792"/>
             <a:ext cx="10881360" cy="713232"/>
           </a:xfrm>
           <a:prstGeom prst="rect">
@@ -10120,14 +11008,14 @@
       </p:sp>
       <p:sp>
         <p:nvSpPr>
-          <p:cNvPr id="11" name="Text 9"/>
+          <p:cNvPr id="9" name="Text 7"/>
           <p:cNvSpPr/>
           <p:nvPr/>
         </p:nvSpPr>
         <p:spPr>
           <a:xfrm>
             <a:off x="868680" y="1508760"/>
-            <a:ext cx="6537960" cy="4160520"/>
+            <a:ext cx="6309360" cy="4160520"/>
           </a:xfrm>
           <a:prstGeom prst="rect">
             <a:avLst/>
@@ -10186,18 +11074,18 @@
       </p:sp>
       <p:sp>
         <p:nvSpPr>
-          <p:cNvPr id="12" name="Shape 10"/>
-          <p:cNvSpPr/>
-          <p:nvPr/>
-        </p:nvSpPr>
-        <p:spPr>
-          <a:xfrm>
-            <a:off x="7909560" y="1417320"/>
-            <a:ext cx="3154680" cy="1828800"/>
+          <p:cNvPr id="10" name="Shape 8"/>
+          <p:cNvSpPr/>
+          <p:nvPr/>
+        </p:nvSpPr>
+        <p:spPr>
+          <a:xfrm>
+            <a:off x="7635240" y="1325880"/>
+            <a:ext cx="3474720" cy="1325880"/>
           </a:xfrm>
           <a:prstGeom prst="roundRect">
             <a:avLst>
-              <a:gd name="adj" fmla="val 6000"/>
+              <a:gd name="adj" fmla="val 8276"/>
             </a:avLst>
           </a:prstGeom>
           <a:solidFill>
@@ -10213,14 +11101,14 @@
       </p:sp>
       <p:sp>
         <p:nvSpPr>
-          <p:cNvPr id="13" name="Text 11"/>
-          <p:cNvSpPr/>
-          <p:nvPr/>
-        </p:nvSpPr>
-        <p:spPr>
-          <a:xfrm>
-            <a:off x="8074152" y="1563624"/>
-            <a:ext cx="2825496" cy="256032"/>
+          <p:cNvPr id="11" name="Text 9"/>
+          <p:cNvSpPr/>
+          <p:nvPr/>
+        </p:nvSpPr>
+        <p:spPr>
+          <a:xfrm>
+            <a:off x="7799832" y="1472184"/>
+            <a:ext cx="3145536" cy="256032"/>
           </a:xfrm>
           <a:prstGeom prst="rect">
             <a:avLst/>
@@ -10244,7 +11132,7 @@
                 <a:ea typeface="Aptos" pitchFamily="34" charset="-122"/>
                 <a:cs typeface="Aptos" pitchFamily="34" charset="-120"/>
               </a:rPr>
-              <a:t>Key idea</a:t>
+              <a:t>Risk check</a:t>
             </a:r>
             <a:endParaRPr lang="en-US" sz="1300" dirty="0"/>
           </a:p>
@@ -10252,14 +11140,14 @@
       </p:sp>
       <p:sp>
         <p:nvSpPr>
-          <p:cNvPr id="14" name="Text 12"/>
-          <p:cNvSpPr/>
-          <p:nvPr/>
-        </p:nvSpPr>
-        <p:spPr>
-          <a:xfrm>
-            <a:off x="8074152" y="1920240"/>
-            <a:ext cx="2825496" cy="1188720"/>
+          <p:cNvPr id="12" name="Text 10"/>
+          <p:cNvSpPr/>
+          <p:nvPr/>
+        </p:nvSpPr>
+        <p:spPr>
+          <a:xfrm>
+            <a:off x="7799832" y="1828800"/>
+            <a:ext cx="3145536" cy="685800"/>
           </a:xfrm>
           <a:prstGeom prst="rect">
             <a:avLst/>
@@ -10293,18 +11181,171 @@
       </p:sp>
       <p:sp>
         <p:nvSpPr>
-          <p:cNvPr id="15" name="Shape 13"/>
-          <p:cNvSpPr/>
-          <p:nvPr/>
-        </p:nvSpPr>
-        <p:spPr>
-          <a:xfrm>
-            <a:off x="7909560" y="3520440"/>
-            <a:ext cx="3154680" cy="1737360"/>
+          <p:cNvPr id="13" name="Shape 11"/>
+          <p:cNvSpPr/>
+          <p:nvPr/>
+        </p:nvSpPr>
+        <p:spPr>
+          <a:xfrm>
+            <a:off x="7635240" y="2788920"/>
+            <a:ext cx="3474720" cy="1536192"/>
           </a:xfrm>
           <a:prstGeom prst="roundRect">
             <a:avLst>
-              <a:gd name="adj" fmla="val 6316"/>
+              <a:gd name="adj" fmla="val 7143"/>
+            </a:avLst>
+          </a:prstGeom>
+          <a:solidFill>
+            <a:srgbClr val="FFFFFF">
+              <a:alpha val="88000"/>
+            </a:srgbClr>
+          </a:solidFill>
+          <a:ln w="12700">
+            <a:solidFill>
+              <a:srgbClr val="D6E8F2"/>
+            </a:solidFill>
+            <a:prstDash val="solid"/>
+          </a:ln>
+        </p:spPr>
+      </p:sp>
+      <p:sp>
+        <p:nvSpPr>
+          <p:cNvPr id="14" name="Shape 12"/>
+          <p:cNvSpPr/>
+          <p:nvPr/>
+        </p:nvSpPr>
+        <p:spPr>
+          <a:xfrm>
+            <a:off x="8046720" y="3108960"/>
+            <a:ext cx="2651760" cy="896112"/>
+          </a:xfrm>
+          <a:prstGeom prst="arc">
+            <a:avLst/>
+          </a:prstGeom>
+          <a:noFill/>
+          <a:ln w="25400">
+            <a:solidFill>
+              <a:srgbClr val="0068B7"/>
+            </a:solidFill>
+            <a:prstDash val="solid"/>
+          </a:ln>
+        </p:spPr>
+      </p:sp>
+      <p:sp>
+        <p:nvSpPr>
+          <p:cNvPr id="15" name="Text 13"/>
+          <p:cNvSpPr/>
+          <p:nvPr/>
+        </p:nvSpPr>
+        <p:spPr>
+          <a:xfrm>
+            <a:off x="7909560" y="3099816"/>
+            <a:ext cx="2926080" cy="256032"/>
+          </a:xfrm>
+          <a:prstGeom prst="rect">
+            <a:avLst/>
+          </a:prstGeom>
+          <a:noFill/>
+          <a:ln/>
+        </p:spPr>
+        <p:txBody>
+          <a:bodyPr wrap="square" lIns="0" tIns="0" rIns="0" bIns="0" rtlCol="0" anchor="ctr"/>
+          <a:lstStyle/>
+          <a:p>
+            <a:pPr algn="ctr" indent="0" marL="0">
+              <a:buNone/>
+            </a:pPr>
+            <a:r>
+              <a:rPr lang="en-US" sz="1500" b="1" dirty="0">
+                <a:solidFill>
+                  <a:srgbClr val="003A63"/>
+                </a:solidFill>
+                <a:latin typeface="Aptos" pitchFamily="34" charset="0"/>
+                <a:ea typeface="Aptos" pitchFamily="34" charset="-122"/>
+                <a:cs typeface="Aptos" pitchFamily="34" charset="-120"/>
+              </a:rPr>
+              <a:t>Risk</a:t>
+            </a:r>
+            <a:endParaRPr lang="en-US" sz="1500" dirty="0"/>
+          </a:p>
+        </p:txBody>
+      </p:sp>
+      <p:sp>
+        <p:nvSpPr>
+          <p:cNvPr id="16" name="Shape 14"/>
+          <p:cNvSpPr/>
+          <p:nvPr/>
+        </p:nvSpPr>
+        <p:spPr>
+          <a:xfrm>
+            <a:off x="8366760" y="3639312"/>
+            <a:ext cx="2011680" cy="0"/>
+          </a:xfrm>
+          <a:prstGeom prst="line">
+            <a:avLst/>
+          </a:prstGeom>
+          <a:noFill/>
+          <a:ln w="63500">
+            <a:solidFill>
+              <a:srgbClr val="2F8A28"/>
+            </a:solidFill>
+            <a:prstDash val="solid"/>
+          </a:ln>
+        </p:spPr>
+      </p:sp>
+      <p:sp>
+        <p:nvSpPr>
+          <p:cNvPr id="17" name="Text 15"/>
+          <p:cNvSpPr/>
+          <p:nvPr/>
+        </p:nvSpPr>
+        <p:spPr>
+          <a:xfrm>
+            <a:off x="7909560" y="3849624"/>
+            <a:ext cx="2926080" cy="164592"/>
+          </a:xfrm>
+          <a:prstGeom prst="rect">
+            <a:avLst/>
+          </a:prstGeom>
+          <a:noFill/>
+          <a:ln/>
+        </p:spPr>
+        <p:txBody>
+          <a:bodyPr wrap="square" lIns="0" tIns="0" rIns="0" bIns="0" rtlCol="0" anchor="ctr"/>
+          <a:lstStyle/>
+          <a:p>
+            <a:pPr algn="ctr" indent="0" marL="0">
+              <a:buNone/>
+            </a:pPr>
+            <a:r>
+              <a:rPr lang="en-US" sz="900" dirty="0">
+                <a:solidFill>
+                  <a:srgbClr val="003A63"/>
+                </a:solidFill>
+                <a:latin typeface="Aptos" pitchFamily="34" charset="0"/>
+                <a:ea typeface="Aptos" pitchFamily="34" charset="-122"/>
+                <a:cs typeface="Aptos" pitchFamily="34" charset="-120"/>
+              </a:rPr>
+              <a:t>Human review</a:t>
+            </a:r>
+            <a:endParaRPr lang="en-US" sz="900" dirty="0"/>
+          </a:p>
+        </p:txBody>
+      </p:sp>
+      <p:sp>
+        <p:nvSpPr>
+          <p:cNvPr id="18" name="Shape 16"/>
+          <p:cNvSpPr/>
+          <p:nvPr/>
+        </p:nvSpPr>
+        <p:spPr>
+          <a:xfrm>
+            <a:off x="7635240" y="4498848"/>
+            <a:ext cx="3474720" cy="1143000"/>
+          </a:xfrm>
+          <a:prstGeom prst="roundRect">
+            <a:avLst>
+              <a:gd name="adj" fmla="val 9600"/>
             </a:avLst>
           </a:prstGeom>
           <a:solidFill>
@@ -10320,14 +11361,14 @@
       </p:sp>
       <p:sp>
         <p:nvSpPr>
-          <p:cNvPr id="16" name="Text 14"/>
-          <p:cNvSpPr/>
-          <p:nvPr/>
-        </p:nvSpPr>
-        <p:spPr>
-          <a:xfrm>
-            <a:off x="8074152" y="3666744"/>
-            <a:ext cx="2825496" cy="256032"/>
+          <p:cNvPr id="19" name="Text 17"/>
+          <p:cNvSpPr/>
+          <p:nvPr/>
+        </p:nvSpPr>
+        <p:spPr>
+          <a:xfrm>
+            <a:off x="7799832" y="4645152"/>
+            <a:ext cx="3145536" cy="256032"/>
           </a:xfrm>
           <a:prstGeom prst="rect">
             <a:avLst/>
@@ -10351,7 +11392,7 @@
                 <a:ea typeface="Aptos" pitchFamily="34" charset="-122"/>
                 <a:cs typeface="Aptos" pitchFamily="34" charset="-120"/>
               </a:rPr>
-              <a:t>Use this for</a:t>
+              <a:t>Safeguard to plan</a:t>
             </a:r>
             <a:endParaRPr lang="en-US" sz="1300" dirty="0"/>
           </a:p>
@@ -10359,14 +11400,14 @@
       </p:sp>
       <p:sp>
         <p:nvSpPr>
-          <p:cNvPr id="17" name="Text 15"/>
-          <p:cNvSpPr/>
-          <p:nvPr/>
-        </p:nvSpPr>
-        <p:spPr>
-          <a:xfrm>
-            <a:off x="8074152" y="4023360"/>
-            <a:ext cx="2825496" cy="1097280"/>
+          <p:cNvPr id="20" name="Text 18"/>
+          <p:cNvSpPr/>
+          <p:nvPr/>
+        </p:nvSpPr>
+        <p:spPr>
+          <a:xfrm>
+            <a:off x="7799832" y="5001768"/>
+            <a:ext cx="3145536" cy="502920"/>
           </a:xfrm>
           <a:prstGeom prst="rect">
             <a:avLst/>
@@ -10392,7 +11433,7 @@
                 <a:ea typeface="Aptos" pitchFamily="34" charset="-122"/>
                 <a:cs typeface="Aptos" pitchFamily="34" charset="-120"/>
               </a:rPr>
-              <a:t>Connect the concept to public health decisions, safeguards, documentation, or implementation work.</a:t>
+              <a:t>Identify what could go wrong, who could be affected, what safeguards are needed, and what evidence should be reviewed before use expands.</a:t>
             </a:r>
             <a:endParaRPr lang="en-US" sz="1550" dirty="0"/>
           </a:p>
@@ -10566,8 +11607,8 @@
         </p:nvSpPr>
         <p:spPr>
           <a:xfrm>
-            <a:off x="9966960" y="6537960"/>
-            <a:ext cx="1645920" cy="201168"/>
+            <a:off x="9646920" y="6537960"/>
+            <a:ext cx="1965960" cy="201168"/>
           </a:xfrm>
           <a:prstGeom prst="rect">
             <a:avLst/>
@@ -10591,7 +11632,7 @@
                 <a:ea typeface="Aptos" pitchFamily="34" charset="-122"/>
                 <a:cs typeface="Aptos" pitchFamily="34" charset="-120"/>
               </a:rPr>
-              <a:t>Â© Paula Soper</a:t>
+              <a:t>Copyright Paula Soper</a:t>
             </a:r>
             <a:endParaRPr lang="en-US" sz="800" dirty="0"/>
           </a:p>
@@ -10686,7 +11727,7 @@
         <p:spPr>
           <a:xfrm>
             <a:off x="868680" y="1508760"/>
-            <a:ext cx="6537960" cy="4160520"/>
+            <a:ext cx="6309360" cy="4160520"/>
           </a:xfrm>
           <a:prstGeom prst="rect">
             <a:avLst/>
@@ -10737,12 +11778,12 @@
         </p:nvSpPr>
         <p:spPr>
           <a:xfrm>
-            <a:off x="7909560" y="1417320"/>
-            <a:ext cx="3154680" cy="1828800"/>
+            <a:off x="7635240" y="1325880"/>
+            <a:ext cx="3474720" cy="1325880"/>
           </a:xfrm>
           <a:prstGeom prst="roundRect">
             <a:avLst>
-              <a:gd name="adj" fmla="val 6000"/>
+              <a:gd name="adj" fmla="val 8276"/>
             </a:avLst>
           </a:prstGeom>
           <a:solidFill>
@@ -10764,8 +11805,8 @@
         </p:nvSpPr>
         <p:spPr>
           <a:xfrm>
-            <a:off x="8074152" y="1563624"/>
-            <a:ext cx="2825496" cy="256032"/>
+            <a:off x="7799832" y="1472184"/>
+            <a:ext cx="3145536" cy="256032"/>
           </a:xfrm>
           <a:prstGeom prst="rect">
             <a:avLst/>
@@ -10789,7 +11830,7 @@
                 <a:ea typeface="Aptos" pitchFamily="34" charset="-122"/>
                 <a:cs typeface="Aptos" pitchFamily="34" charset="-120"/>
               </a:rPr>
-              <a:t>Key idea</a:t>
+              <a:t>Risk check</a:t>
             </a:r>
             <a:endParaRPr lang="en-US" sz="1300" dirty="0"/>
           </a:p>
@@ -10803,8 +11844,8 @@
         </p:nvSpPr>
         <p:spPr>
           <a:xfrm>
-            <a:off x="8074152" y="1920240"/>
-            <a:ext cx="2825496" cy="1188720"/>
+            <a:off x="7799832" y="1828800"/>
+            <a:ext cx="3145536" cy="685800"/>
           </a:xfrm>
           <a:prstGeom prst="rect">
             <a:avLst/>
@@ -10844,12 +11885,165 @@
         </p:nvSpPr>
         <p:spPr>
           <a:xfrm>
-            <a:off x="7909560" y="3520440"/>
-            <a:ext cx="3154680" cy="1737360"/>
+            <a:off x="7635240" y="2788920"/>
+            <a:ext cx="3474720" cy="1536192"/>
           </a:xfrm>
           <a:prstGeom prst="roundRect">
             <a:avLst>
-              <a:gd name="adj" fmla="val 6316"/>
+              <a:gd name="adj" fmla="val 7143"/>
+            </a:avLst>
+          </a:prstGeom>
+          <a:solidFill>
+            <a:srgbClr val="FFFFFF">
+              <a:alpha val="88000"/>
+            </a:srgbClr>
+          </a:solidFill>
+          <a:ln w="12700">
+            <a:solidFill>
+              <a:srgbClr val="D6E8F2"/>
+            </a:solidFill>
+            <a:prstDash val="solid"/>
+          </a:ln>
+        </p:spPr>
+      </p:sp>
+      <p:sp>
+        <p:nvSpPr>
+          <p:cNvPr id="14" name="Shape 12"/>
+          <p:cNvSpPr/>
+          <p:nvPr/>
+        </p:nvSpPr>
+        <p:spPr>
+          <a:xfrm>
+            <a:off x="8046720" y="3108960"/>
+            <a:ext cx="2651760" cy="896112"/>
+          </a:xfrm>
+          <a:prstGeom prst="arc">
+            <a:avLst/>
+          </a:prstGeom>
+          <a:noFill/>
+          <a:ln w="25400">
+            <a:solidFill>
+              <a:srgbClr val="0068B7"/>
+            </a:solidFill>
+            <a:prstDash val="solid"/>
+          </a:ln>
+        </p:spPr>
+      </p:sp>
+      <p:sp>
+        <p:nvSpPr>
+          <p:cNvPr id="15" name="Text 13"/>
+          <p:cNvSpPr/>
+          <p:nvPr/>
+        </p:nvSpPr>
+        <p:spPr>
+          <a:xfrm>
+            <a:off x="7909560" y="3099816"/>
+            <a:ext cx="2926080" cy="256032"/>
+          </a:xfrm>
+          <a:prstGeom prst="rect">
+            <a:avLst/>
+          </a:prstGeom>
+          <a:noFill/>
+          <a:ln/>
+        </p:spPr>
+        <p:txBody>
+          <a:bodyPr wrap="square" lIns="0" tIns="0" rIns="0" bIns="0" rtlCol="0" anchor="ctr"/>
+          <a:lstStyle/>
+          <a:p>
+            <a:pPr algn="ctr" indent="0" marL="0">
+              <a:buNone/>
+            </a:pPr>
+            <a:r>
+              <a:rPr lang="en-US" sz="1500" b="1" dirty="0">
+                <a:solidFill>
+                  <a:srgbClr val="003A63"/>
+                </a:solidFill>
+                <a:latin typeface="Aptos" pitchFamily="34" charset="0"/>
+                <a:ea typeface="Aptos" pitchFamily="34" charset="-122"/>
+                <a:cs typeface="Aptos" pitchFamily="34" charset="-120"/>
+              </a:rPr>
+              <a:t>Risk</a:t>
+            </a:r>
+            <a:endParaRPr lang="en-US" sz="1500" dirty="0"/>
+          </a:p>
+        </p:txBody>
+      </p:sp>
+      <p:sp>
+        <p:nvSpPr>
+          <p:cNvPr id="16" name="Shape 14"/>
+          <p:cNvSpPr/>
+          <p:nvPr/>
+        </p:nvSpPr>
+        <p:spPr>
+          <a:xfrm>
+            <a:off x="8366760" y="3639312"/>
+            <a:ext cx="2011680" cy="0"/>
+          </a:xfrm>
+          <a:prstGeom prst="line">
+            <a:avLst/>
+          </a:prstGeom>
+          <a:noFill/>
+          <a:ln w="63500">
+            <a:solidFill>
+              <a:srgbClr val="2F8A28"/>
+            </a:solidFill>
+            <a:prstDash val="solid"/>
+          </a:ln>
+        </p:spPr>
+      </p:sp>
+      <p:sp>
+        <p:nvSpPr>
+          <p:cNvPr id="17" name="Text 15"/>
+          <p:cNvSpPr/>
+          <p:nvPr/>
+        </p:nvSpPr>
+        <p:spPr>
+          <a:xfrm>
+            <a:off x="7909560" y="3849624"/>
+            <a:ext cx="2926080" cy="164592"/>
+          </a:xfrm>
+          <a:prstGeom prst="rect">
+            <a:avLst/>
+          </a:prstGeom>
+          <a:noFill/>
+          <a:ln/>
+        </p:spPr>
+        <p:txBody>
+          <a:bodyPr wrap="square" lIns="0" tIns="0" rIns="0" bIns="0" rtlCol="0" anchor="ctr"/>
+          <a:lstStyle/>
+          <a:p>
+            <a:pPr algn="ctr" indent="0" marL="0">
+              <a:buNone/>
+            </a:pPr>
+            <a:r>
+              <a:rPr lang="en-US" sz="900" dirty="0">
+                <a:solidFill>
+                  <a:srgbClr val="003A63"/>
+                </a:solidFill>
+                <a:latin typeface="Aptos" pitchFamily="34" charset="0"/>
+                <a:ea typeface="Aptos" pitchFamily="34" charset="-122"/>
+                <a:cs typeface="Aptos" pitchFamily="34" charset="-120"/>
+              </a:rPr>
+              <a:t>Human review</a:t>
+            </a:r>
+            <a:endParaRPr lang="en-US" sz="900" dirty="0"/>
+          </a:p>
+        </p:txBody>
+      </p:sp>
+      <p:sp>
+        <p:nvSpPr>
+          <p:cNvPr id="18" name="Shape 16"/>
+          <p:cNvSpPr/>
+          <p:nvPr/>
+        </p:nvSpPr>
+        <p:spPr>
+          <a:xfrm>
+            <a:off x="7635240" y="4498848"/>
+            <a:ext cx="3474720" cy="1143000"/>
+          </a:xfrm>
+          <a:prstGeom prst="roundRect">
+            <a:avLst>
+              <a:gd name="adj" fmla="val 9600"/>
             </a:avLst>
           </a:prstGeom>
           <a:solidFill>
@@ -10865,14 +12059,14 @@
       </p:sp>
       <p:sp>
         <p:nvSpPr>
-          <p:cNvPr id="14" name="Text 12"/>
-          <p:cNvSpPr/>
-          <p:nvPr/>
-        </p:nvSpPr>
-        <p:spPr>
-          <a:xfrm>
-            <a:off x="8074152" y="3666744"/>
-            <a:ext cx="2825496" cy="256032"/>
+          <p:cNvPr id="19" name="Text 17"/>
+          <p:cNvSpPr/>
+          <p:nvPr/>
+        </p:nvSpPr>
+        <p:spPr>
+          <a:xfrm>
+            <a:off x="7799832" y="4645152"/>
+            <a:ext cx="3145536" cy="256032"/>
           </a:xfrm>
           <a:prstGeom prst="rect">
             <a:avLst/>
@@ -10896,7 +12090,7 @@
                 <a:ea typeface="Aptos" pitchFamily="34" charset="-122"/>
                 <a:cs typeface="Aptos" pitchFamily="34" charset="-120"/>
               </a:rPr>
-              <a:t>Use this for</a:t>
+              <a:t>Safeguard to plan</a:t>
             </a:r>
             <a:endParaRPr lang="en-US" sz="1300" dirty="0"/>
           </a:p>
@@ -10904,14 +12098,14 @@
       </p:sp>
       <p:sp>
         <p:nvSpPr>
-          <p:cNvPr id="15" name="Text 13"/>
-          <p:cNvSpPr/>
-          <p:nvPr/>
-        </p:nvSpPr>
-        <p:spPr>
-          <a:xfrm>
-            <a:off x="8074152" y="4023360"/>
-            <a:ext cx="2825496" cy="1097280"/>
+          <p:cNvPr id="20" name="Text 18"/>
+          <p:cNvSpPr/>
+          <p:nvPr/>
+        </p:nvSpPr>
+        <p:spPr>
+          <a:xfrm>
+            <a:off x="7799832" y="5001768"/>
+            <a:ext cx="3145536" cy="502920"/>
           </a:xfrm>
           <a:prstGeom prst="rect">
             <a:avLst/>
@@ -10937,7 +12131,7 @@
                 <a:ea typeface="Aptos" pitchFamily="34" charset="-122"/>
                 <a:cs typeface="Aptos" pitchFamily="34" charset="-120"/>
               </a:rPr>
-              <a:t>Connect the concept to public health decisions, safeguards, documentation, or implementation work.</a:t>
+              <a:t>Identify what could go wrong, who could be affected, what safeguards are needed, and what evidence should be reviewed before use expands.</a:t>
             </a:r>
             <a:endParaRPr lang="en-US" sz="1550" dirty="0"/>
           </a:p>
@@ -11111,8 +12305,8 @@
         </p:nvSpPr>
         <p:spPr>
           <a:xfrm>
-            <a:off x="9966960" y="6537960"/>
-            <a:ext cx="1645920" cy="201168"/>
+            <a:off x="9646920" y="6537960"/>
+            <a:ext cx="1965960" cy="201168"/>
           </a:xfrm>
           <a:prstGeom prst="rect">
             <a:avLst/>
@@ -11136,7 +12330,7 @@
                 <a:ea typeface="Aptos" pitchFamily="34" charset="-122"/>
                 <a:cs typeface="Aptos" pitchFamily="34" charset="-120"/>
               </a:rPr>
-              <a:t>Â© Paula Soper</a:t>
+              <a:t>Copyright Paula Soper</a:t>
             </a:r>
             <a:endParaRPr lang="en-US" sz="800" dirty="0"/>
           </a:p>
@@ -11479,46 +12673,7 @@
       </p:sp>
       <p:sp>
         <p:nvSpPr>
-          <p:cNvPr id="15" name="Text 13"/>
-          <p:cNvSpPr/>
-          <p:nvPr/>
-        </p:nvSpPr>
-        <p:spPr>
-          <a:xfrm>
-            <a:off x="8817864" y="4187952"/>
-            <a:ext cx="201168" cy="256032"/>
-          </a:xfrm>
-          <a:prstGeom prst="rect">
-            <a:avLst/>
-          </a:prstGeom>
-          <a:noFill/>
-          <a:ln/>
-        </p:spPr>
-        <p:txBody>
-          <a:bodyPr wrap="square" lIns="0" tIns="0" rIns="0" bIns="0" rtlCol="0" anchor="ctr"/>
-          <a:lstStyle/>
-          <a:p>
-            <a:pPr algn="ctr" indent="0" marL="0">
-              <a:buNone/>
-            </a:pPr>
-            <a:r>
-              <a:rPr lang="en-US" sz="1800" b="1" dirty="0">
-                <a:solidFill>
-                  <a:srgbClr val="0068B7"/>
-                </a:solidFill>
-                <a:latin typeface="Aptos" pitchFamily="34" charset="0"/>
-                <a:ea typeface="Aptos" pitchFamily="34" charset="-122"/>
-                <a:cs typeface="Aptos" pitchFamily="34" charset="-120"/>
-              </a:rPr>
-              <a:t>â†’</a:t>
-            </a:r>
-            <a:endParaRPr lang="en-US" sz="1800" dirty="0"/>
-          </a:p>
-        </p:txBody>
-      </p:sp>
-      <p:sp>
-        <p:nvSpPr>
-          <p:cNvPr id="16" name="Shape 14"/>
+          <p:cNvPr id="15" name="Shape 13"/>
           <p:cNvSpPr/>
           <p:nvPr/>
         </p:nvSpPr>
@@ -11545,7 +12700,7 @@
       </p:sp>
       <p:sp>
         <p:nvSpPr>
-          <p:cNvPr id="17" name="Text 15"/>
+          <p:cNvPr id="16" name="Text 14"/>
           <p:cNvSpPr/>
           <p:nvPr/>
         </p:nvSpPr>
@@ -11586,46 +12741,7 @@
       </p:sp>
       <p:sp>
         <p:nvSpPr>
-          <p:cNvPr id="18" name="Text 16"/>
-          <p:cNvSpPr/>
-          <p:nvPr/>
-        </p:nvSpPr>
-        <p:spPr>
-          <a:xfrm>
-            <a:off x="10046208" y="4187952"/>
-            <a:ext cx="201168" cy="256032"/>
-          </a:xfrm>
-          <a:prstGeom prst="rect">
-            <a:avLst/>
-          </a:prstGeom>
-          <a:noFill/>
-          <a:ln/>
-        </p:spPr>
-        <p:txBody>
-          <a:bodyPr wrap="square" lIns="0" tIns="0" rIns="0" bIns="0" rtlCol="0" anchor="ctr"/>
-          <a:lstStyle/>
-          <a:p>
-            <a:pPr algn="ctr" indent="0" marL="0">
-              <a:buNone/>
-            </a:pPr>
-            <a:r>
-              <a:rPr lang="en-US" sz="1800" b="1" dirty="0">
-                <a:solidFill>
-                  <a:srgbClr val="0068B7"/>
-                </a:solidFill>
-                <a:latin typeface="Aptos" pitchFamily="34" charset="0"/>
-                <a:ea typeface="Aptos" pitchFamily="34" charset="-122"/>
-                <a:cs typeface="Aptos" pitchFamily="34" charset="-120"/>
-              </a:rPr>
-              <a:t>â†’</a:t>
-            </a:r>
-            <a:endParaRPr lang="en-US" sz="1800" dirty="0"/>
-          </a:p>
-        </p:txBody>
-      </p:sp>
-      <p:sp>
-        <p:nvSpPr>
-          <p:cNvPr id="19" name="Shape 17"/>
+          <p:cNvPr id="17" name="Shape 15"/>
           <p:cNvSpPr/>
           <p:nvPr/>
         </p:nvSpPr>
@@ -11652,7 +12768,7 @@
       </p:sp>
       <p:sp>
         <p:nvSpPr>
-          <p:cNvPr id="20" name="Text 18"/>
+          <p:cNvPr id="18" name="Text 16"/>
           <p:cNvSpPr/>
           <p:nvPr/>
         </p:nvSpPr>
@@ -11859,8 +12975,8 @@
         </p:nvSpPr>
         <p:spPr>
           <a:xfrm>
-            <a:off x="9966960" y="6537960"/>
-            <a:ext cx="1645920" cy="201168"/>
+            <a:off x="9646920" y="6537960"/>
+            <a:ext cx="1965960" cy="201168"/>
           </a:xfrm>
           <a:prstGeom prst="rect">
             <a:avLst/>
@@ -11884,7 +13000,7 @@
                 <a:ea typeface="Aptos" pitchFamily="34" charset="-122"/>
                 <a:cs typeface="Aptos" pitchFamily="34" charset="-120"/>
               </a:rPr>
-              <a:t>Â© Paula Soper</a:t>
+              <a:t>Copyright Paula Soper</a:t>
             </a:r>
             <a:endParaRPr lang="en-US" sz="800" dirty="0"/>
           </a:p>
@@ -12227,46 +13343,7 @@
       </p:sp>
       <p:sp>
         <p:nvSpPr>
-          <p:cNvPr id="15" name="Text 13"/>
-          <p:cNvSpPr/>
-          <p:nvPr/>
-        </p:nvSpPr>
-        <p:spPr>
-          <a:xfrm>
-            <a:off x="8817864" y="4187952"/>
-            <a:ext cx="201168" cy="256032"/>
-          </a:xfrm>
-          <a:prstGeom prst="rect">
-            <a:avLst/>
-          </a:prstGeom>
-          <a:noFill/>
-          <a:ln/>
-        </p:spPr>
-        <p:txBody>
-          <a:bodyPr wrap="square" lIns="0" tIns="0" rIns="0" bIns="0" rtlCol="0" anchor="ctr"/>
-          <a:lstStyle/>
-          <a:p>
-            <a:pPr algn="ctr" indent="0" marL="0">
-              <a:buNone/>
-            </a:pPr>
-            <a:r>
-              <a:rPr lang="en-US" sz="1800" b="1" dirty="0">
-                <a:solidFill>
-                  <a:srgbClr val="0068B7"/>
-                </a:solidFill>
-                <a:latin typeface="Aptos" pitchFamily="34" charset="0"/>
-                <a:ea typeface="Aptos" pitchFamily="34" charset="-122"/>
-                <a:cs typeface="Aptos" pitchFamily="34" charset="-120"/>
-              </a:rPr>
-              <a:t>â†’</a:t>
-            </a:r>
-            <a:endParaRPr lang="en-US" sz="1800" dirty="0"/>
-          </a:p>
-        </p:txBody>
-      </p:sp>
-      <p:sp>
-        <p:nvSpPr>
-          <p:cNvPr id="16" name="Shape 14"/>
+          <p:cNvPr id="15" name="Shape 13"/>
           <p:cNvSpPr/>
           <p:nvPr/>
         </p:nvSpPr>
@@ -12293,7 +13370,7 @@
       </p:sp>
       <p:sp>
         <p:nvSpPr>
-          <p:cNvPr id="17" name="Text 15"/>
+          <p:cNvPr id="16" name="Text 14"/>
           <p:cNvSpPr/>
           <p:nvPr/>
         </p:nvSpPr>
@@ -12334,46 +13411,7 @@
       </p:sp>
       <p:sp>
         <p:nvSpPr>
-          <p:cNvPr id="18" name="Text 16"/>
-          <p:cNvSpPr/>
-          <p:nvPr/>
-        </p:nvSpPr>
-        <p:spPr>
-          <a:xfrm>
-            <a:off x="10046208" y="4187952"/>
-            <a:ext cx="201168" cy="256032"/>
-          </a:xfrm>
-          <a:prstGeom prst="rect">
-            <a:avLst/>
-          </a:prstGeom>
-          <a:noFill/>
-          <a:ln/>
-        </p:spPr>
-        <p:txBody>
-          <a:bodyPr wrap="square" lIns="0" tIns="0" rIns="0" bIns="0" rtlCol="0" anchor="ctr"/>
-          <a:lstStyle/>
-          <a:p>
-            <a:pPr algn="ctr" indent="0" marL="0">
-              <a:buNone/>
-            </a:pPr>
-            <a:r>
-              <a:rPr lang="en-US" sz="1800" b="1" dirty="0">
-                <a:solidFill>
-                  <a:srgbClr val="0068B7"/>
-                </a:solidFill>
-                <a:latin typeface="Aptos" pitchFamily="34" charset="0"/>
-                <a:ea typeface="Aptos" pitchFamily="34" charset="-122"/>
-                <a:cs typeface="Aptos" pitchFamily="34" charset="-120"/>
-              </a:rPr>
-              <a:t>â†’</a:t>
-            </a:r>
-            <a:endParaRPr lang="en-US" sz="1800" dirty="0"/>
-          </a:p>
-        </p:txBody>
-      </p:sp>
-      <p:sp>
-        <p:nvSpPr>
-          <p:cNvPr id="19" name="Shape 17"/>
+          <p:cNvPr id="17" name="Shape 15"/>
           <p:cNvSpPr/>
           <p:nvPr/>
         </p:nvSpPr>
@@ -12400,7 +13438,7 @@
       </p:sp>
       <p:sp>
         <p:nvSpPr>
-          <p:cNvPr id="20" name="Text 18"/>
+          <p:cNvPr id="18" name="Text 16"/>
           <p:cNvSpPr/>
           <p:nvPr/>
         </p:nvSpPr>
@@ -12607,8 +13645,8 @@
         </p:nvSpPr>
         <p:spPr>
           <a:xfrm>
-            <a:off x="9966960" y="6537960"/>
-            <a:ext cx="1645920" cy="201168"/>
+            <a:off x="9646920" y="6537960"/>
+            <a:ext cx="1965960" cy="201168"/>
           </a:xfrm>
           <a:prstGeom prst="rect">
             <a:avLst/>
@@ -12632,7 +13670,7 @@
                 <a:ea typeface="Aptos" pitchFamily="34" charset="-122"/>
                 <a:cs typeface="Aptos" pitchFamily="34" charset="-120"/>
               </a:rPr>
-              <a:t>Â© Paula Soper</a:t>
+              <a:t>Copyright Paula Soper</a:t>
             </a:r>
             <a:endParaRPr lang="en-US" sz="800" dirty="0"/>
           </a:p>
@@ -12679,77 +13717,13 @@
       </p:sp>
       <p:sp>
         <p:nvSpPr>
-          <p:cNvPr id="8" name="Shape 6"/>
+          <p:cNvPr id="8" name="Text 6"/>
           <p:cNvSpPr/>
           <p:nvPr/>
         </p:nvSpPr>
         <p:spPr>
           <a:xfrm>
             <a:off x="640080" y="658368"/>
-            <a:ext cx="420624" cy="420624"/>
-          </a:xfrm>
-          <a:prstGeom prst="ellipse">
-            <a:avLst/>
-          </a:prstGeom>
-          <a:solidFill>
-            <a:srgbClr val="0068B7"/>
-          </a:solidFill>
-          <a:ln w="12700">
-            <a:solidFill>
-              <a:srgbClr val="0068B7"/>
-            </a:solidFill>
-            <a:prstDash val="solid"/>
-          </a:ln>
-        </p:spPr>
-      </p:sp>
-      <p:sp>
-        <p:nvSpPr>
-          <p:cNvPr id="9" name="Text 7"/>
-          <p:cNvSpPr/>
-          <p:nvPr/>
-        </p:nvSpPr>
-        <p:spPr>
-          <a:xfrm>
-            <a:off x="640080" y="731520"/>
-            <a:ext cx="420624" cy="164592"/>
-          </a:xfrm>
-          <a:prstGeom prst="rect">
-            <a:avLst/>
-          </a:prstGeom>
-          <a:noFill/>
-          <a:ln/>
-        </p:spPr>
-        <p:txBody>
-          <a:bodyPr wrap="square" lIns="0" tIns="0" rIns="0" bIns="0" rtlCol="0" anchor="ctr"/>
-          <a:lstStyle/>
-          <a:p>
-            <a:pPr algn="ctr" indent="0" marL="0">
-              <a:buNone/>
-            </a:pPr>
-            <a:r>
-              <a:rPr lang="en-US" sz="1100" b="1" dirty="0">
-                <a:solidFill>
-                  <a:srgbClr val="FFFFFF"/>
-                </a:solidFill>
-                <a:latin typeface="Aptos" pitchFamily="34" charset="0"/>
-                <a:ea typeface="Aptos" pitchFamily="34" charset="-122"/>
-                <a:cs typeface="Aptos" pitchFamily="34" charset="-120"/>
-              </a:rPr>
-              <a:t>1</a:t>
-            </a:r>
-            <a:endParaRPr lang="en-US" sz="1100" dirty="0"/>
-          </a:p>
-        </p:txBody>
-      </p:sp>
-      <p:sp>
-        <p:nvSpPr>
-          <p:cNvPr id="10" name="Text 8"/>
-          <p:cNvSpPr/>
-          <p:nvPr/>
-        </p:nvSpPr>
-        <p:spPr>
-          <a:xfrm>
-            <a:off x="640080" y="621792"/>
             <a:ext cx="10881360" cy="713232"/>
           </a:xfrm>
           <a:prstGeom prst="rect">
@@ -12784,14 +13758,14 @@
       </p:sp>
       <p:sp>
         <p:nvSpPr>
-          <p:cNvPr id="11" name="Text 9"/>
+          <p:cNvPr id="9" name="Text 7"/>
           <p:cNvSpPr/>
           <p:nvPr/>
         </p:nvSpPr>
         <p:spPr>
           <a:xfrm>
             <a:off x="868680" y="1508760"/>
-            <a:ext cx="6537960" cy="4160520"/>
+            <a:ext cx="6309360" cy="4160520"/>
           </a:xfrm>
           <a:prstGeom prst="rect">
             <a:avLst/>
@@ -12850,18 +13824,18 @@
       </p:sp>
       <p:sp>
         <p:nvSpPr>
-          <p:cNvPr id="12" name="Shape 10"/>
-          <p:cNvSpPr/>
-          <p:nvPr/>
-        </p:nvSpPr>
-        <p:spPr>
-          <a:xfrm>
-            <a:off x="7909560" y="1417320"/>
-            <a:ext cx="3154680" cy="1828800"/>
+          <p:cNvPr id="10" name="Shape 8"/>
+          <p:cNvSpPr/>
+          <p:nvPr/>
+        </p:nvSpPr>
+        <p:spPr>
+          <a:xfrm>
+            <a:off x="7635240" y="1325880"/>
+            <a:ext cx="3474720" cy="1325880"/>
           </a:xfrm>
           <a:prstGeom prst="roundRect">
             <a:avLst>
-              <a:gd name="adj" fmla="val 6000"/>
+              <a:gd name="adj" fmla="val 8276"/>
             </a:avLst>
           </a:prstGeom>
           <a:solidFill>
@@ -12877,14 +13851,14 @@
       </p:sp>
       <p:sp>
         <p:nvSpPr>
-          <p:cNvPr id="13" name="Text 11"/>
-          <p:cNvSpPr/>
-          <p:nvPr/>
-        </p:nvSpPr>
-        <p:spPr>
-          <a:xfrm>
-            <a:off x="8074152" y="1563624"/>
-            <a:ext cx="2825496" cy="256032"/>
+          <p:cNvPr id="11" name="Text 9"/>
+          <p:cNvSpPr/>
+          <p:nvPr/>
+        </p:nvSpPr>
+        <p:spPr>
+          <a:xfrm>
+            <a:off x="7799832" y="1472184"/>
+            <a:ext cx="3145536" cy="256032"/>
           </a:xfrm>
           <a:prstGeom prst="rect">
             <a:avLst/>
@@ -12908,7 +13882,7 @@
                 <a:ea typeface="Aptos" pitchFamily="34" charset="-122"/>
                 <a:cs typeface="Aptos" pitchFamily="34" charset="-120"/>
               </a:rPr>
-              <a:t>Key idea</a:t>
+              <a:t>Risk check</a:t>
             </a:r>
             <a:endParaRPr lang="en-US" sz="1300" dirty="0"/>
           </a:p>
@@ -12916,14 +13890,14 @@
       </p:sp>
       <p:sp>
         <p:nvSpPr>
-          <p:cNvPr id="14" name="Text 12"/>
-          <p:cNvSpPr/>
-          <p:nvPr/>
-        </p:nvSpPr>
-        <p:spPr>
-          <a:xfrm>
-            <a:off x="8074152" y="1920240"/>
-            <a:ext cx="2825496" cy="1188720"/>
+          <p:cNvPr id="12" name="Text 10"/>
+          <p:cNvSpPr/>
+          <p:nvPr/>
+        </p:nvSpPr>
+        <p:spPr>
+          <a:xfrm>
+            <a:off x="7799832" y="1828800"/>
+            <a:ext cx="3145536" cy="685800"/>
           </a:xfrm>
           <a:prstGeom prst="rect">
             <a:avLst/>
@@ -12957,18 +13931,171 @@
       </p:sp>
       <p:sp>
         <p:nvSpPr>
-          <p:cNvPr id="15" name="Shape 13"/>
-          <p:cNvSpPr/>
-          <p:nvPr/>
-        </p:nvSpPr>
-        <p:spPr>
-          <a:xfrm>
-            <a:off x="7909560" y="3520440"/>
-            <a:ext cx="3154680" cy="1737360"/>
+          <p:cNvPr id="13" name="Shape 11"/>
+          <p:cNvSpPr/>
+          <p:nvPr/>
+        </p:nvSpPr>
+        <p:spPr>
+          <a:xfrm>
+            <a:off x="7635240" y="2788920"/>
+            <a:ext cx="3474720" cy="1536192"/>
           </a:xfrm>
           <a:prstGeom prst="roundRect">
             <a:avLst>
-              <a:gd name="adj" fmla="val 6316"/>
+              <a:gd name="adj" fmla="val 7143"/>
+            </a:avLst>
+          </a:prstGeom>
+          <a:solidFill>
+            <a:srgbClr val="FFFFFF">
+              <a:alpha val="88000"/>
+            </a:srgbClr>
+          </a:solidFill>
+          <a:ln w="12700">
+            <a:solidFill>
+              <a:srgbClr val="D6E8F2"/>
+            </a:solidFill>
+            <a:prstDash val="solid"/>
+          </a:ln>
+        </p:spPr>
+      </p:sp>
+      <p:sp>
+        <p:nvSpPr>
+          <p:cNvPr id="14" name="Shape 12"/>
+          <p:cNvSpPr/>
+          <p:nvPr/>
+        </p:nvSpPr>
+        <p:spPr>
+          <a:xfrm>
+            <a:off x="8046720" y="3108960"/>
+            <a:ext cx="2651760" cy="896112"/>
+          </a:xfrm>
+          <a:prstGeom prst="arc">
+            <a:avLst/>
+          </a:prstGeom>
+          <a:noFill/>
+          <a:ln w="25400">
+            <a:solidFill>
+              <a:srgbClr val="0068B7"/>
+            </a:solidFill>
+            <a:prstDash val="solid"/>
+          </a:ln>
+        </p:spPr>
+      </p:sp>
+      <p:sp>
+        <p:nvSpPr>
+          <p:cNvPr id="15" name="Text 13"/>
+          <p:cNvSpPr/>
+          <p:nvPr/>
+        </p:nvSpPr>
+        <p:spPr>
+          <a:xfrm>
+            <a:off x="7909560" y="3099816"/>
+            <a:ext cx="2926080" cy="256032"/>
+          </a:xfrm>
+          <a:prstGeom prst="rect">
+            <a:avLst/>
+          </a:prstGeom>
+          <a:noFill/>
+          <a:ln/>
+        </p:spPr>
+        <p:txBody>
+          <a:bodyPr wrap="square" lIns="0" tIns="0" rIns="0" bIns="0" rtlCol="0" anchor="ctr"/>
+          <a:lstStyle/>
+          <a:p>
+            <a:pPr algn="ctr" indent="0" marL="0">
+              <a:buNone/>
+            </a:pPr>
+            <a:r>
+              <a:rPr lang="en-US" sz="1500" b="1" dirty="0">
+                <a:solidFill>
+                  <a:srgbClr val="003A63"/>
+                </a:solidFill>
+                <a:latin typeface="Aptos" pitchFamily="34" charset="0"/>
+                <a:ea typeface="Aptos" pitchFamily="34" charset="-122"/>
+                <a:cs typeface="Aptos" pitchFamily="34" charset="-120"/>
+              </a:rPr>
+              <a:t>Risk</a:t>
+            </a:r>
+            <a:endParaRPr lang="en-US" sz="1500" dirty="0"/>
+          </a:p>
+        </p:txBody>
+      </p:sp>
+      <p:sp>
+        <p:nvSpPr>
+          <p:cNvPr id="16" name="Shape 14"/>
+          <p:cNvSpPr/>
+          <p:nvPr/>
+        </p:nvSpPr>
+        <p:spPr>
+          <a:xfrm>
+            <a:off x="8366760" y="3639312"/>
+            <a:ext cx="2011680" cy="0"/>
+          </a:xfrm>
+          <a:prstGeom prst="line">
+            <a:avLst/>
+          </a:prstGeom>
+          <a:noFill/>
+          <a:ln w="63500">
+            <a:solidFill>
+              <a:srgbClr val="2F8A28"/>
+            </a:solidFill>
+            <a:prstDash val="solid"/>
+          </a:ln>
+        </p:spPr>
+      </p:sp>
+      <p:sp>
+        <p:nvSpPr>
+          <p:cNvPr id="17" name="Text 15"/>
+          <p:cNvSpPr/>
+          <p:nvPr/>
+        </p:nvSpPr>
+        <p:spPr>
+          <a:xfrm>
+            <a:off x="7909560" y="3849624"/>
+            <a:ext cx="2926080" cy="164592"/>
+          </a:xfrm>
+          <a:prstGeom prst="rect">
+            <a:avLst/>
+          </a:prstGeom>
+          <a:noFill/>
+          <a:ln/>
+        </p:spPr>
+        <p:txBody>
+          <a:bodyPr wrap="square" lIns="0" tIns="0" rIns="0" bIns="0" rtlCol="0" anchor="ctr"/>
+          <a:lstStyle/>
+          <a:p>
+            <a:pPr algn="ctr" indent="0" marL="0">
+              <a:buNone/>
+            </a:pPr>
+            <a:r>
+              <a:rPr lang="en-US" sz="900" dirty="0">
+                <a:solidFill>
+                  <a:srgbClr val="003A63"/>
+                </a:solidFill>
+                <a:latin typeface="Aptos" pitchFamily="34" charset="0"/>
+                <a:ea typeface="Aptos" pitchFamily="34" charset="-122"/>
+                <a:cs typeface="Aptos" pitchFamily="34" charset="-120"/>
+              </a:rPr>
+              <a:t>Human review</a:t>
+            </a:r>
+            <a:endParaRPr lang="en-US" sz="900" dirty="0"/>
+          </a:p>
+        </p:txBody>
+      </p:sp>
+      <p:sp>
+        <p:nvSpPr>
+          <p:cNvPr id="18" name="Shape 16"/>
+          <p:cNvSpPr/>
+          <p:nvPr/>
+        </p:nvSpPr>
+        <p:spPr>
+          <a:xfrm>
+            <a:off x="7635240" y="4498848"/>
+            <a:ext cx="3474720" cy="1143000"/>
+          </a:xfrm>
+          <a:prstGeom prst="roundRect">
+            <a:avLst>
+              <a:gd name="adj" fmla="val 9600"/>
             </a:avLst>
           </a:prstGeom>
           <a:solidFill>
@@ -12984,14 +14111,14 @@
       </p:sp>
       <p:sp>
         <p:nvSpPr>
-          <p:cNvPr id="16" name="Text 14"/>
-          <p:cNvSpPr/>
-          <p:nvPr/>
-        </p:nvSpPr>
-        <p:spPr>
-          <a:xfrm>
-            <a:off x="8074152" y="3666744"/>
-            <a:ext cx="2825496" cy="256032"/>
+          <p:cNvPr id="19" name="Text 17"/>
+          <p:cNvSpPr/>
+          <p:nvPr/>
+        </p:nvSpPr>
+        <p:spPr>
+          <a:xfrm>
+            <a:off x="7799832" y="4645152"/>
+            <a:ext cx="3145536" cy="256032"/>
           </a:xfrm>
           <a:prstGeom prst="rect">
             <a:avLst/>
@@ -13015,7 +14142,7 @@
                 <a:ea typeface="Aptos" pitchFamily="34" charset="-122"/>
                 <a:cs typeface="Aptos" pitchFamily="34" charset="-120"/>
               </a:rPr>
-              <a:t>Use this for</a:t>
+              <a:t>Safeguard to plan</a:t>
             </a:r>
             <a:endParaRPr lang="en-US" sz="1300" dirty="0"/>
           </a:p>
@@ -13023,14 +14150,14 @@
       </p:sp>
       <p:sp>
         <p:nvSpPr>
-          <p:cNvPr id="17" name="Text 15"/>
-          <p:cNvSpPr/>
-          <p:nvPr/>
-        </p:nvSpPr>
-        <p:spPr>
-          <a:xfrm>
-            <a:off x="8074152" y="4023360"/>
-            <a:ext cx="2825496" cy="1097280"/>
+          <p:cNvPr id="20" name="Text 18"/>
+          <p:cNvSpPr/>
+          <p:nvPr/>
+        </p:nvSpPr>
+        <p:spPr>
+          <a:xfrm>
+            <a:off x="7799832" y="5001768"/>
+            <a:ext cx="3145536" cy="502920"/>
           </a:xfrm>
           <a:prstGeom prst="rect">
             <a:avLst/>
@@ -13056,7 +14183,7 @@
                 <a:ea typeface="Aptos" pitchFamily="34" charset="-122"/>
                 <a:cs typeface="Aptos" pitchFamily="34" charset="-120"/>
               </a:rPr>
-              <a:t>Connect the concept to public health decisions, safeguards, documentation, or implementation work.</a:t>
+              <a:t>Use the assignment to test whether you can explain the concept, apply it to a realistic public health situation, and identify what would need review before the work moves forward.</a:t>
             </a:r>
             <a:endParaRPr lang="en-US" sz="1550" dirty="0"/>
           </a:p>
@@ -13230,8 +14357,8 @@
         </p:nvSpPr>
         <p:spPr>
           <a:xfrm>
-            <a:off x="9966960" y="6537960"/>
-            <a:ext cx="1645920" cy="201168"/>
+            <a:off x="9646920" y="6537960"/>
+            <a:ext cx="1965960" cy="201168"/>
           </a:xfrm>
           <a:prstGeom prst="rect">
             <a:avLst/>
@@ -13255,7 +14382,7 @@
                 <a:ea typeface="Aptos" pitchFamily="34" charset="-122"/>
                 <a:cs typeface="Aptos" pitchFamily="34" charset="-120"/>
               </a:rPr>
-              <a:t>Â© Paula Soper</a:t>
+              <a:t>Copyright Paula Soper</a:t>
             </a:r>
             <a:endParaRPr lang="en-US" sz="800" dirty="0"/>
           </a:p>
@@ -13302,77 +14429,13 @@
       </p:sp>
       <p:sp>
         <p:nvSpPr>
-          <p:cNvPr id="8" name="Shape 6"/>
+          <p:cNvPr id="8" name="Text 6"/>
           <p:cNvSpPr/>
           <p:nvPr/>
         </p:nvSpPr>
         <p:spPr>
           <a:xfrm>
             <a:off x="640080" y="658368"/>
-            <a:ext cx="420624" cy="420624"/>
-          </a:xfrm>
-          <a:prstGeom prst="ellipse">
-            <a:avLst/>
-          </a:prstGeom>
-          <a:solidFill>
-            <a:srgbClr val="0068B7"/>
-          </a:solidFill>
-          <a:ln w="12700">
-            <a:solidFill>
-              <a:srgbClr val="0068B7"/>
-            </a:solidFill>
-            <a:prstDash val="solid"/>
-          </a:ln>
-        </p:spPr>
-      </p:sp>
-      <p:sp>
-        <p:nvSpPr>
-          <p:cNvPr id="9" name="Text 7"/>
-          <p:cNvSpPr/>
-          <p:nvPr/>
-        </p:nvSpPr>
-        <p:spPr>
-          <a:xfrm>
-            <a:off x="640080" y="731520"/>
-            <a:ext cx="420624" cy="164592"/>
-          </a:xfrm>
-          <a:prstGeom prst="rect">
-            <a:avLst/>
-          </a:prstGeom>
-          <a:noFill/>
-          <a:ln/>
-        </p:spPr>
-        <p:txBody>
-          <a:bodyPr wrap="square" lIns="0" tIns="0" rIns="0" bIns="0" rtlCol="0" anchor="ctr"/>
-          <a:lstStyle/>
-          <a:p>
-            <a:pPr algn="ctr" indent="0" marL="0">
-              <a:buNone/>
-            </a:pPr>
-            <a:r>
-              <a:rPr lang="en-US" sz="1100" b="1" dirty="0">
-                <a:solidFill>
-                  <a:srgbClr val="FFFFFF"/>
-                </a:solidFill>
-                <a:latin typeface="Aptos" pitchFamily="34" charset="0"/>
-                <a:ea typeface="Aptos" pitchFamily="34" charset="-122"/>
-                <a:cs typeface="Aptos" pitchFamily="34" charset="-120"/>
-              </a:rPr>
-              <a:t>2</a:t>
-            </a:r>
-            <a:endParaRPr lang="en-US" sz="1100" dirty="0"/>
-          </a:p>
-        </p:txBody>
-      </p:sp>
-      <p:sp>
-        <p:nvSpPr>
-          <p:cNvPr id="10" name="Text 8"/>
-          <p:cNvSpPr/>
-          <p:nvPr/>
-        </p:nvSpPr>
-        <p:spPr>
-          <a:xfrm>
-            <a:off x="640080" y="621792"/>
             <a:ext cx="10881360" cy="713232"/>
           </a:xfrm>
           <a:prstGeom prst="rect">
@@ -13407,14 +14470,14 @@
       </p:sp>
       <p:sp>
         <p:nvSpPr>
-          <p:cNvPr id="11" name="Text 9"/>
+          <p:cNvPr id="9" name="Text 7"/>
           <p:cNvSpPr/>
           <p:nvPr/>
         </p:nvSpPr>
         <p:spPr>
           <a:xfrm>
             <a:off x="868680" y="1508760"/>
-            <a:ext cx="6537960" cy="4160520"/>
+            <a:ext cx="6309360" cy="4160520"/>
           </a:xfrm>
           <a:prstGeom prst="rect">
             <a:avLst/>
@@ -13473,18 +14536,18 @@
       </p:sp>
       <p:sp>
         <p:nvSpPr>
-          <p:cNvPr id="12" name="Shape 10"/>
-          <p:cNvSpPr/>
-          <p:nvPr/>
-        </p:nvSpPr>
-        <p:spPr>
-          <a:xfrm>
-            <a:off x="7909560" y="1417320"/>
-            <a:ext cx="3154680" cy="1828800"/>
+          <p:cNvPr id="10" name="Shape 8"/>
+          <p:cNvSpPr/>
+          <p:nvPr/>
+        </p:nvSpPr>
+        <p:spPr>
+          <a:xfrm>
+            <a:off x="7635240" y="1325880"/>
+            <a:ext cx="3474720" cy="1325880"/>
           </a:xfrm>
           <a:prstGeom prst="roundRect">
             <a:avLst>
-              <a:gd name="adj" fmla="val 6000"/>
+              <a:gd name="adj" fmla="val 8276"/>
             </a:avLst>
           </a:prstGeom>
           <a:solidFill>
@@ -13500,14 +14563,14 @@
       </p:sp>
       <p:sp>
         <p:nvSpPr>
-          <p:cNvPr id="13" name="Text 11"/>
-          <p:cNvSpPr/>
-          <p:nvPr/>
-        </p:nvSpPr>
-        <p:spPr>
-          <a:xfrm>
-            <a:off x="8074152" y="1563624"/>
-            <a:ext cx="2825496" cy="256032"/>
+          <p:cNvPr id="11" name="Text 9"/>
+          <p:cNvSpPr/>
+          <p:nvPr/>
+        </p:nvSpPr>
+        <p:spPr>
+          <a:xfrm>
+            <a:off x="7799832" y="1472184"/>
+            <a:ext cx="3145536" cy="256032"/>
           </a:xfrm>
           <a:prstGeom prst="rect">
             <a:avLst/>
@@ -13531,7 +14594,7 @@
                 <a:ea typeface="Aptos" pitchFamily="34" charset="-122"/>
                 <a:cs typeface="Aptos" pitchFamily="34" charset="-120"/>
               </a:rPr>
-              <a:t>Key idea</a:t>
+              <a:t>Risk check</a:t>
             </a:r>
             <a:endParaRPr lang="en-US" sz="1300" dirty="0"/>
           </a:p>
@@ -13539,14 +14602,14 @@
       </p:sp>
       <p:sp>
         <p:nvSpPr>
-          <p:cNvPr id="14" name="Text 12"/>
-          <p:cNvSpPr/>
-          <p:nvPr/>
-        </p:nvSpPr>
-        <p:spPr>
-          <a:xfrm>
-            <a:off x="8074152" y="1920240"/>
-            <a:ext cx="2825496" cy="1188720"/>
+          <p:cNvPr id="12" name="Text 10"/>
+          <p:cNvSpPr/>
+          <p:nvPr/>
+        </p:nvSpPr>
+        <p:spPr>
+          <a:xfrm>
+            <a:off x="7799832" y="1828800"/>
+            <a:ext cx="3145536" cy="685800"/>
           </a:xfrm>
           <a:prstGeom prst="rect">
             <a:avLst/>
@@ -13580,18 +14643,171 @@
       </p:sp>
       <p:sp>
         <p:nvSpPr>
-          <p:cNvPr id="15" name="Shape 13"/>
-          <p:cNvSpPr/>
-          <p:nvPr/>
-        </p:nvSpPr>
-        <p:spPr>
-          <a:xfrm>
-            <a:off x="7909560" y="3520440"/>
-            <a:ext cx="3154680" cy="1737360"/>
+          <p:cNvPr id="13" name="Shape 11"/>
+          <p:cNvSpPr/>
+          <p:nvPr/>
+        </p:nvSpPr>
+        <p:spPr>
+          <a:xfrm>
+            <a:off x="7635240" y="2788920"/>
+            <a:ext cx="3474720" cy="1536192"/>
           </a:xfrm>
           <a:prstGeom prst="roundRect">
             <a:avLst>
-              <a:gd name="adj" fmla="val 6316"/>
+              <a:gd name="adj" fmla="val 7143"/>
+            </a:avLst>
+          </a:prstGeom>
+          <a:solidFill>
+            <a:srgbClr val="FFFFFF">
+              <a:alpha val="88000"/>
+            </a:srgbClr>
+          </a:solidFill>
+          <a:ln w="12700">
+            <a:solidFill>
+              <a:srgbClr val="D6E8F2"/>
+            </a:solidFill>
+            <a:prstDash val="solid"/>
+          </a:ln>
+        </p:spPr>
+      </p:sp>
+      <p:sp>
+        <p:nvSpPr>
+          <p:cNvPr id="14" name="Shape 12"/>
+          <p:cNvSpPr/>
+          <p:nvPr/>
+        </p:nvSpPr>
+        <p:spPr>
+          <a:xfrm>
+            <a:off x="8046720" y="3108960"/>
+            <a:ext cx="2651760" cy="896112"/>
+          </a:xfrm>
+          <a:prstGeom prst="arc">
+            <a:avLst/>
+          </a:prstGeom>
+          <a:noFill/>
+          <a:ln w="25400">
+            <a:solidFill>
+              <a:srgbClr val="0068B7"/>
+            </a:solidFill>
+            <a:prstDash val="solid"/>
+          </a:ln>
+        </p:spPr>
+      </p:sp>
+      <p:sp>
+        <p:nvSpPr>
+          <p:cNvPr id="15" name="Text 13"/>
+          <p:cNvSpPr/>
+          <p:nvPr/>
+        </p:nvSpPr>
+        <p:spPr>
+          <a:xfrm>
+            <a:off x="7909560" y="3099816"/>
+            <a:ext cx="2926080" cy="256032"/>
+          </a:xfrm>
+          <a:prstGeom prst="rect">
+            <a:avLst/>
+          </a:prstGeom>
+          <a:noFill/>
+          <a:ln/>
+        </p:spPr>
+        <p:txBody>
+          <a:bodyPr wrap="square" lIns="0" tIns="0" rIns="0" bIns="0" rtlCol="0" anchor="ctr"/>
+          <a:lstStyle/>
+          <a:p>
+            <a:pPr algn="ctr" indent="0" marL="0">
+              <a:buNone/>
+            </a:pPr>
+            <a:r>
+              <a:rPr lang="en-US" sz="1500" b="1" dirty="0">
+                <a:solidFill>
+                  <a:srgbClr val="003A63"/>
+                </a:solidFill>
+                <a:latin typeface="Aptos" pitchFamily="34" charset="0"/>
+                <a:ea typeface="Aptos" pitchFamily="34" charset="-122"/>
+                <a:cs typeface="Aptos" pitchFamily="34" charset="-120"/>
+              </a:rPr>
+              <a:t>Risk</a:t>
+            </a:r>
+            <a:endParaRPr lang="en-US" sz="1500" dirty="0"/>
+          </a:p>
+        </p:txBody>
+      </p:sp>
+      <p:sp>
+        <p:nvSpPr>
+          <p:cNvPr id="16" name="Shape 14"/>
+          <p:cNvSpPr/>
+          <p:nvPr/>
+        </p:nvSpPr>
+        <p:spPr>
+          <a:xfrm>
+            <a:off x="8366760" y="3639312"/>
+            <a:ext cx="2011680" cy="0"/>
+          </a:xfrm>
+          <a:prstGeom prst="line">
+            <a:avLst/>
+          </a:prstGeom>
+          <a:noFill/>
+          <a:ln w="63500">
+            <a:solidFill>
+              <a:srgbClr val="2F8A28"/>
+            </a:solidFill>
+            <a:prstDash val="solid"/>
+          </a:ln>
+        </p:spPr>
+      </p:sp>
+      <p:sp>
+        <p:nvSpPr>
+          <p:cNvPr id="17" name="Text 15"/>
+          <p:cNvSpPr/>
+          <p:nvPr/>
+        </p:nvSpPr>
+        <p:spPr>
+          <a:xfrm>
+            <a:off x="7909560" y="3849624"/>
+            <a:ext cx="2926080" cy="164592"/>
+          </a:xfrm>
+          <a:prstGeom prst="rect">
+            <a:avLst/>
+          </a:prstGeom>
+          <a:noFill/>
+          <a:ln/>
+        </p:spPr>
+        <p:txBody>
+          <a:bodyPr wrap="square" lIns="0" tIns="0" rIns="0" bIns="0" rtlCol="0" anchor="ctr"/>
+          <a:lstStyle/>
+          <a:p>
+            <a:pPr algn="ctr" indent="0" marL="0">
+              <a:buNone/>
+            </a:pPr>
+            <a:r>
+              <a:rPr lang="en-US" sz="900" dirty="0">
+                <a:solidFill>
+                  <a:srgbClr val="003A63"/>
+                </a:solidFill>
+                <a:latin typeface="Aptos" pitchFamily="34" charset="0"/>
+                <a:ea typeface="Aptos" pitchFamily="34" charset="-122"/>
+                <a:cs typeface="Aptos" pitchFamily="34" charset="-120"/>
+              </a:rPr>
+              <a:t>Human review</a:t>
+            </a:r>
+            <a:endParaRPr lang="en-US" sz="900" dirty="0"/>
+          </a:p>
+        </p:txBody>
+      </p:sp>
+      <p:sp>
+        <p:nvSpPr>
+          <p:cNvPr id="18" name="Shape 16"/>
+          <p:cNvSpPr/>
+          <p:nvPr/>
+        </p:nvSpPr>
+        <p:spPr>
+          <a:xfrm>
+            <a:off x="7635240" y="4498848"/>
+            <a:ext cx="3474720" cy="1143000"/>
+          </a:xfrm>
+          <a:prstGeom prst="roundRect">
+            <a:avLst>
+              <a:gd name="adj" fmla="val 9600"/>
             </a:avLst>
           </a:prstGeom>
           <a:solidFill>
@@ -13607,14 +14823,14 @@
       </p:sp>
       <p:sp>
         <p:nvSpPr>
-          <p:cNvPr id="16" name="Text 14"/>
-          <p:cNvSpPr/>
-          <p:nvPr/>
-        </p:nvSpPr>
-        <p:spPr>
-          <a:xfrm>
-            <a:off x="8074152" y="3666744"/>
-            <a:ext cx="2825496" cy="256032"/>
+          <p:cNvPr id="19" name="Text 17"/>
+          <p:cNvSpPr/>
+          <p:nvPr/>
+        </p:nvSpPr>
+        <p:spPr>
+          <a:xfrm>
+            <a:off x="7799832" y="4645152"/>
+            <a:ext cx="3145536" cy="256032"/>
           </a:xfrm>
           <a:prstGeom prst="rect">
             <a:avLst/>
@@ -13638,7 +14854,7 @@
                 <a:ea typeface="Aptos" pitchFamily="34" charset="-122"/>
                 <a:cs typeface="Aptos" pitchFamily="34" charset="-120"/>
               </a:rPr>
-              <a:t>Use this for</a:t>
+              <a:t>Safeguard to plan</a:t>
             </a:r>
             <a:endParaRPr lang="en-US" sz="1300" dirty="0"/>
           </a:p>
@@ -13646,14 +14862,14 @@
       </p:sp>
       <p:sp>
         <p:nvSpPr>
-          <p:cNvPr id="17" name="Text 15"/>
-          <p:cNvSpPr/>
-          <p:nvPr/>
-        </p:nvSpPr>
-        <p:spPr>
-          <a:xfrm>
-            <a:off x="8074152" y="4023360"/>
-            <a:ext cx="2825496" cy="1097280"/>
+          <p:cNvPr id="20" name="Text 18"/>
+          <p:cNvSpPr/>
+          <p:nvPr/>
+        </p:nvSpPr>
+        <p:spPr>
+          <a:xfrm>
+            <a:off x="7799832" y="5001768"/>
+            <a:ext cx="3145536" cy="502920"/>
           </a:xfrm>
           <a:prstGeom prst="rect">
             <a:avLst/>
@@ -13679,7 +14895,7 @@
                 <a:ea typeface="Aptos" pitchFamily="34" charset="-122"/>
                 <a:cs typeface="Aptos" pitchFamily="34" charset="-120"/>
               </a:rPr>
-              <a:t>Connect the concept to public health decisions, safeguards, documentation, or implementation work.</a:t>
+              <a:t>Identify what could go wrong, who could be affected, what safeguards are needed, and what evidence should be reviewed before use expands.</a:t>
             </a:r>
             <a:endParaRPr lang="en-US" sz="1550" dirty="0"/>
           </a:p>
@@ -13853,8 +15069,8 @@
         </p:nvSpPr>
         <p:spPr>
           <a:xfrm>
-            <a:off x="9966960" y="6537960"/>
-            <a:ext cx="1645920" cy="201168"/>
+            <a:off x="9646920" y="6537960"/>
+            <a:ext cx="1965960" cy="201168"/>
           </a:xfrm>
           <a:prstGeom prst="rect">
             <a:avLst/>
@@ -13878,7 +15094,7 @@
                 <a:ea typeface="Aptos" pitchFamily="34" charset="-122"/>
                 <a:cs typeface="Aptos" pitchFamily="34" charset="-120"/>
               </a:rPr>
-              <a:t>Â© Paula Soper</a:t>
+              <a:t>Copyright Paula Soper</a:t>
             </a:r>
             <a:endParaRPr lang="en-US" sz="800" dirty="0"/>
           </a:p>
@@ -13925,14 +15141,257 @@
       </p:sp>
       <p:sp>
         <p:nvSpPr>
-          <p:cNvPr id="8" name="Shape 6"/>
+          <p:cNvPr id="8" name="Text 6"/>
           <p:cNvSpPr/>
           <p:nvPr/>
         </p:nvSpPr>
         <p:spPr>
           <a:xfrm>
             <a:off x="640080" y="658368"/>
-            <a:ext cx="420624" cy="420624"/>
+            <a:ext cx="10881360" cy="713232"/>
+          </a:xfrm>
+          <a:prstGeom prst="rect">
+            <a:avLst/>
+          </a:prstGeom>
+          <a:noFill/>
+          <a:ln/>
+        </p:spPr>
+        <p:txBody>
+          <a:bodyPr wrap="square" lIns="0" tIns="0" rIns="0" bIns="0" rtlCol="0" anchor="ctr">
+            <a:normAutofit/>
+          </a:bodyPr>
+          <a:lstStyle/>
+          <a:p>
+            <a:pPr indent="0" marL="0">
+              <a:buNone/>
+            </a:pPr>
+            <a:r>
+              <a:rPr lang="en-US" sz="3400" b="1" dirty="0">
+                <a:solidFill>
+                  <a:srgbClr val="003A63"/>
+                </a:solidFill>
+                <a:latin typeface="Aptos Display" pitchFamily="34" charset="0"/>
+                <a:ea typeface="Aptos Display" pitchFamily="34" charset="-122"/>
+                <a:cs typeface="Aptos Display" pitchFamily="34" charset="-120"/>
+              </a:rPr>
+              <a:t>Jurisdiction and Agency Policy Note</a:t>
+            </a:r>
+            <a:endParaRPr lang="en-US" sz="3400" dirty="0"/>
+          </a:p>
+        </p:txBody>
+      </p:sp>
+      <p:sp>
+        <p:nvSpPr>
+          <p:cNvPr id="9" name="Text 7"/>
+          <p:cNvSpPr/>
+          <p:nvPr/>
+        </p:nvSpPr>
+        <p:spPr>
+          <a:xfrm>
+            <a:off x="868680" y="1508760"/>
+            <a:ext cx="6309360" cy="4160520"/>
+          </a:xfrm>
+          <a:prstGeom prst="rect">
+            <a:avLst/>
+          </a:prstGeom>
+          <a:noFill/>
+          <a:ln/>
+        </p:spPr>
+        <p:txBody>
+          <a:bodyPr wrap="square" lIns="635" tIns="635" rIns="635" bIns="635" rtlCol="0" anchor="t">
+            <a:normAutofit/>
+          </a:bodyPr>
+          <a:lstStyle/>
+          <a:p>
+            <a:r>
+              <a:rPr lang="en-US" sz="2100" dirty="0">
+                <a:solidFill>
+                  <a:srgbClr val="17364A"/>
+                </a:solidFill>
+                <a:latin typeface="Aptos" pitchFamily="34" charset="0"/>
+                <a:ea typeface="Aptos" pitchFamily="34" charset="-122"/>
+                <a:cs typeface="Aptos" pitchFamily="34" charset="-120"/>
+              </a:rPr>
+              <a:t>This module provides national-level training guidance for public health agencies and partners.</a:t>
+            </a:r>
+            <a:endParaRPr lang="en-US" sz="2100" dirty="0"/>
+          </a:p>
+          <a:p>
+            <a:r>
+              <a:rPr lang="en-US" sz="2100" dirty="0">
+                <a:solidFill>
+                  <a:srgbClr val="17364A"/>
+                </a:solidFill>
+                <a:latin typeface="Aptos" pitchFamily="34" charset="0"/>
+                <a:ea typeface="Aptos" pitchFamily="34" charset="-122"/>
+                <a:cs typeface="Aptos" pitchFamily="34" charset="-120"/>
+              </a:rPr>
+              <a:t>It is not legal advice and does not replace review by agency legal counsel, privacy officers,.</a:t>
+            </a:r>
+            <a:endParaRPr lang="en-US" sz="2100" dirty="0"/>
+          </a:p>
+          <a:p>
+            <a:r>
+              <a:rPr lang="en-US" sz="2100" dirty="0">
+                <a:solidFill>
+                  <a:srgbClr val="17364A"/>
+                </a:solidFill>
+                <a:latin typeface="Aptos" pitchFamily="34" charset="0"/>
+                <a:ea typeface="Aptos" pitchFamily="34" charset="-122"/>
+                <a:cs typeface="Aptos" pitchFamily="34" charset="-120"/>
+              </a:rPr>
+              <a:t>Requirements may vary by state, locality, territory, Tribe, agency, funding source, data-sharing.</a:t>
+            </a:r>
+            <a:endParaRPr lang="en-US" sz="2100" dirty="0"/>
+          </a:p>
+        </p:txBody>
+      </p:sp>
+      <p:sp>
+        <p:nvSpPr>
+          <p:cNvPr id="10" name="Shape 8"/>
+          <p:cNvSpPr/>
+          <p:nvPr/>
+        </p:nvSpPr>
+        <p:spPr>
+          <a:xfrm>
+            <a:off x="7635240" y="1325880"/>
+            <a:ext cx="3474720" cy="1325880"/>
+          </a:xfrm>
+          <a:prstGeom prst="roundRect">
+            <a:avLst>
+              <a:gd name="adj" fmla="val 8276"/>
+            </a:avLst>
+          </a:prstGeom>
+          <a:solidFill>
+            <a:srgbClr val="EEF8ED"/>
+          </a:solidFill>
+          <a:ln w="12700">
+            <a:solidFill>
+              <a:srgbClr val="B9D7E6"/>
+            </a:solidFill>
+            <a:prstDash val="solid"/>
+          </a:ln>
+        </p:spPr>
+      </p:sp>
+      <p:sp>
+        <p:nvSpPr>
+          <p:cNvPr id="11" name="Text 9"/>
+          <p:cNvSpPr/>
+          <p:nvPr/>
+        </p:nvSpPr>
+        <p:spPr>
+          <a:xfrm>
+            <a:off x="7799832" y="1472184"/>
+            <a:ext cx="3145536" cy="256032"/>
+          </a:xfrm>
+          <a:prstGeom prst="rect">
+            <a:avLst/>
+          </a:prstGeom>
+          <a:noFill/>
+          <a:ln/>
+        </p:spPr>
+        <p:txBody>
+          <a:bodyPr wrap="square" lIns="0" tIns="0" rIns="0" bIns="0" rtlCol="0" anchor="ctr"/>
+          <a:lstStyle/>
+          <a:p>
+            <a:pPr indent="0" marL="0">
+              <a:buNone/>
+            </a:pPr>
+            <a:r>
+              <a:rPr lang="en-US" sz="1300" b="1" dirty="0">
+                <a:solidFill>
+                  <a:srgbClr val="0068B7"/>
+                </a:solidFill>
+                <a:latin typeface="Aptos" pitchFamily="34" charset="0"/>
+                <a:ea typeface="Aptos" pitchFamily="34" charset="-122"/>
+                <a:cs typeface="Aptos" pitchFamily="34" charset="-120"/>
+              </a:rPr>
+              <a:t>Governance lens</a:t>
+            </a:r>
+            <a:endParaRPr lang="en-US" sz="1300" dirty="0"/>
+          </a:p>
+        </p:txBody>
+      </p:sp>
+      <p:sp>
+        <p:nvSpPr>
+          <p:cNvPr id="12" name="Text 10"/>
+          <p:cNvSpPr/>
+          <p:nvPr/>
+        </p:nvSpPr>
+        <p:spPr>
+          <a:xfrm>
+            <a:off x="7799832" y="1828800"/>
+            <a:ext cx="3145536" cy="685800"/>
+          </a:xfrm>
+          <a:prstGeom prst="rect">
+            <a:avLst/>
+          </a:prstGeom>
+          <a:noFill/>
+          <a:ln/>
+        </p:spPr>
+        <p:txBody>
+          <a:bodyPr wrap="square" lIns="0" tIns="0" rIns="0" bIns="0" rtlCol="0" anchor="t">
+            <a:normAutofit/>
+          </a:bodyPr>
+          <a:lstStyle/>
+          <a:p>
+            <a:pPr indent="0" marL="0">
+              <a:buNone/>
+            </a:pPr>
+            <a:r>
+              <a:rPr lang="en-US" sz="1550" dirty="0">
+                <a:solidFill>
+                  <a:srgbClr val="17364A"/>
+                </a:solidFill>
+                <a:latin typeface="Aptos" pitchFamily="34" charset="0"/>
+                <a:ea typeface="Aptos" pitchFamily="34" charset="-122"/>
+                <a:cs typeface="Aptos" pitchFamily="34" charset="-120"/>
+              </a:rPr>
+              <a:t>This module provides national-level training guidance for public health agencies and partners.</a:t>
+            </a:r>
+            <a:endParaRPr lang="en-US" sz="1550" dirty="0"/>
+          </a:p>
+        </p:txBody>
+      </p:sp>
+      <p:sp>
+        <p:nvSpPr>
+          <p:cNvPr id="13" name="Shape 11"/>
+          <p:cNvSpPr/>
+          <p:nvPr/>
+        </p:nvSpPr>
+        <p:spPr>
+          <a:xfrm>
+            <a:off x="7635240" y="2788920"/>
+            <a:ext cx="3474720" cy="1536192"/>
+          </a:xfrm>
+          <a:prstGeom prst="roundRect">
+            <a:avLst>
+              <a:gd name="adj" fmla="val 7143"/>
+            </a:avLst>
+          </a:prstGeom>
+          <a:solidFill>
+            <a:srgbClr val="FFFFFF">
+              <a:alpha val="88000"/>
+            </a:srgbClr>
+          </a:solidFill>
+          <a:ln w="12700">
+            <a:solidFill>
+              <a:srgbClr val="D6E8F2"/>
+            </a:solidFill>
+            <a:prstDash val="solid"/>
+          </a:ln>
+        </p:spPr>
+      </p:sp>
+      <p:sp>
+        <p:nvSpPr>
+          <p:cNvPr id="14" name="Shape 12"/>
+          <p:cNvSpPr/>
+          <p:nvPr/>
+        </p:nvSpPr>
+        <p:spPr>
+          <a:xfrm>
+            <a:off x="7891272" y="3108960"/>
+            <a:ext cx="566928" cy="566928"/>
           </a:xfrm>
           <a:prstGeom prst="ellipse">
             <a:avLst/>
@@ -13950,172 +15409,24 @@
       </p:sp>
       <p:sp>
         <p:nvSpPr>
-          <p:cNvPr id="9" name="Text 7"/>
-          <p:cNvSpPr/>
-          <p:nvPr/>
-        </p:nvSpPr>
-        <p:spPr>
-          <a:xfrm>
-            <a:off x="640080" y="731520"/>
-            <a:ext cx="420624" cy="164592"/>
-          </a:xfrm>
-          <a:prstGeom prst="rect">
-            <a:avLst/>
-          </a:prstGeom>
-          <a:noFill/>
-          <a:ln/>
-        </p:spPr>
-        <p:txBody>
-          <a:bodyPr wrap="square" lIns="0" tIns="0" rIns="0" bIns="0" rtlCol="0" anchor="ctr"/>
-          <a:lstStyle/>
-          <a:p>
-            <a:pPr algn="ctr" indent="0" marL="0">
-              <a:buNone/>
-            </a:pPr>
-            <a:r>
-              <a:rPr lang="en-US" sz="1100" b="1" dirty="0">
-                <a:solidFill>
-                  <a:srgbClr val="FFFFFF"/>
-                </a:solidFill>
-                <a:latin typeface="Aptos" pitchFamily="34" charset="0"/>
-                <a:ea typeface="Aptos" pitchFamily="34" charset="-122"/>
-                <a:cs typeface="Aptos" pitchFamily="34" charset="-120"/>
-              </a:rPr>
-              <a:t>3</a:t>
-            </a:r>
-            <a:endParaRPr lang="en-US" sz="1100" dirty="0"/>
-          </a:p>
-        </p:txBody>
-      </p:sp>
-      <p:sp>
-        <p:nvSpPr>
-          <p:cNvPr id="10" name="Text 8"/>
-          <p:cNvSpPr/>
-          <p:nvPr/>
-        </p:nvSpPr>
-        <p:spPr>
-          <a:xfrm>
-            <a:off x="640080" y="621792"/>
-            <a:ext cx="10881360" cy="713232"/>
-          </a:xfrm>
-          <a:prstGeom prst="rect">
-            <a:avLst/>
-          </a:prstGeom>
-          <a:noFill/>
-          <a:ln/>
-        </p:spPr>
-        <p:txBody>
-          <a:bodyPr wrap="square" lIns="0" tIns="0" rIns="0" bIns="0" rtlCol="0" anchor="ctr">
-            <a:normAutofit/>
-          </a:bodyPr>
-          <a:lstStyle/>
-          <a:p>
-            <a:pPr indent="0" marL="0">
-              <a:buNone/>
-            </a:pPr>
-            <a:r>
-              <a:rPr lang="en-US" sz="3400" b="1" dirty="0">
-                <a:solidFill>
-                  <a:srgbClr val="003A63"/>
-                </a:solidFill>
-                <a:latin typeface="Aptos Display" pitchFamily="34" charset="0"/>
-                <a:ea typeface="Aptos Display" pitchFamily="34" charset="-122"/>
-                <a:cs typeface="Aptos Display" pitchFamily="34" charset="-120"/>
-              </a:rPr>
-              <a:t>Jurisdiction and Agency Policy Note</a:t>
-            </a:r>
-            <a:endParaRPr lang="en-US" sz="3400" dirty="0"/>
-          </a:p>
-        </p:txBody>
-      </p:sp>
-      <p:sp>
-        <p:nvSpPr>
-          <p:cNvPr id="11" name="Text 9"/>
-          <p:cNvSpPr/>
-          <p:nvPr/>
-        </p:nvSpPr>
-        <p:spPr>
-          <a:xfrm>
-            <a:off x="868680" y="1508760"/>
-            <a:ext cx="6537960" cy="4160520"/>
-          </a:xfrm>
-          <a:prstGeom prst="rect">
-            <a:avLst/>
-          </a:prstGeom>
-          <a:noFill/>
-          <a:ln/>
-        </p:spPr>
-        <p:txBody>
-          <a:bodyPr wrap="square" lIns="635" tIns="635" rIns="635" bIns="635" rtlCol="0" anchor="t">
-            <a:normAutofit/>
-          </a:bodyPr>
-          <a:lstStyle/>
-          <a:p>
-            <a:r>
-              <a:rPr lang="en-US" sz="2100" dirty="0">
-                <a:solidFill>
-                  <a:srgbClr val="17364A"/>
-                </a:solidFill>
-                <a:latin typeface="Aptos" pitchFamily="34" charset="0"/>
-                <a:ea typeface="Aptos" pitchFamily="34" charset="-122"/>
-                <a:cs typeface="Aptos" pitchFamily="34" charset="-120"/>
-              </a:rPr>
-              <a:t>This module provides national-level training guidance for public health agencies and partners.</a:t>
-            </a:r>
-            <a:endParaRPr lang="en-US" sz="2100" dirty="0"/>
-          </a:p>
-          <a:p>
-            <a:r>
-              <a:rPr lang="en-US" sz="2100" dirty="0">
-                <a:solidFill>
-                  <a:srgbClr val="17364A"/>
-                </a:solidFill>
-                <a:latin typeface="Aptos" pitchFamily="34" charset="0"/>
-                <a:ea typeface="Aptos" pitchFamily="34" charset="-122"/>
-                <a:cs typeface="Aptos" pitchFamily="34" charset="-120"/>
-              </a:rPr>
-              <a:t>It is not legal advice and does not replace review by agency legal counsel, privacy officers,.</a:t>
-            </a:r>
-            <a:endParaRPr lang="en-US" sz="2100" dirty="0"/>
-          </a:p>
-          <a:p>
-            <a:r>
-              <a:rPr lang="en-US" sz="2100" dirty="0">
-                <a:solidFill>
-                  <a:srgbClr val="17364A"/>
-                </a:solidFill>
-                <a:latin typeface="Aptos" pitchFamily="34" charset="0"/>
-                <a:ea typeface="Aptos" pitchFamily="34" charset="-122"/>
-                <a:cs typeface="Aptos" pitchFamily="34" charset="-120"/>
-              </a:rPr>
-              <a:t>Requirements may vary by state, locality, territory, Tribe, agency, funding source, data-sharing.</a:t>
-            </a:r>
-            <a:endParaRPr lang="en-US" sz="2100" dirty="0"/>
-          </a:p>
-        </p:txBody>
-      </p:sp>
-      <p:sp>
-        <p:nvSpPr>
-          <p:cNvPr id="12" name="Shape 10"/>
-          <p:cNvSpPr/>
-          <p:nvPr/>
-        </p:nvSpPr>
-        <p:spPr>
-          <a:xfrm>
-            <a:off x="7909560" y="1417320"/>
-            <a:ext cx="3154680" cy="1828800"/>
-          </a:xfrm>
-          <a:prstGeom prst="roundRect">
-            <a:avLst>
-              <a:gd name="adj" fmla="val 6000"/>
-            </a:avLst>
+          <p:cNvPr id="15" name="Shape 13"/>
+          <p:cNvSpPr/>
+          <p:nvPr/>
+        </p:nvSpPr>
+        <p:spPr>
+          <a:xfrm>
+            <a:off x="10287000" y="3108960"/>
+            <a:ext cx="566928" cy="566928"/>
+          </a:xfrm>
+          <a:prstGeom prst="ellipse">
+            <a:avLst/>
           </a:prstGeom>
           <a:solidFill>
-            <a:srgbClr val="EEF8ED"/>
+            <a:srgbClr val="2F8A28"/>
           </a:solidFill>
           <a:ln w="12700">
             <a:solidFill>
-              <a:srgbClr val="B9D7E6"/>
+              <a:srgbClr val="2F8A28"/>
             </a:solidFill>
             <a:prstDash val="solid"/>
           </a:ln>
@@ -14123,14 +15434,108 @@
       </p:sp>
       <p:sp>
         <p:nvSpPr>
-          <p:cNvPr id="13" name="Text 11"/>
-          <p:cNvSpPr/>
-          <p:nvPr/>
-        </p:nvSpPr>
-        <p:spPr>
-          <a:xfrm>
-            <a:off x="8074152" y="1563624"/>
-            <a:ext cx="2825496" cy="256032"/>
+          <p:cNvPr id="16" name="Shape 14"/>
+          <p:cNvSpPr/>
+          <p:nvPr/>
+        </p:nvSpPr>
+        <p:spPr>
+          <a:xfrm>
+            <a:off x="9089136" y="3456432"/>
+            <a:ext cx="566928" cy="566928"/>
+          </a:xfrm>
+          <a:prstGeom prst="ellipse">
+            <a:avLst/>
+          </a:prstGeom>
+          <a:solidFill>
+            <a:srgbClr val="6A4CA3"/>
+          </a:solidFill>
+          <a:ln w="12700">
+            <a:solidFill>
+              <a:srgbClr val="6A4CA3"/>
+            </a:solidFill>
+            <a:prstDash val="solid"/>
+          </a:ln>
+        </p:spPr>
+      </p:sp>
+      <p:sp>
+        <p:nvSpPr>
+          <p:cNvPr id="17" name="Shape 15"/>
+          <p:cNvSpPr/>
+          <p:nvPr/>
+        </p:nvSpPr>
+        <p:spPr>
+          <a:xfrm>
+            <a:off x="8385048" y="3419856"/>
+            <a:ext cx="1975104" cy="0"/>
+          </a:xfrm>
+          <a:prstGeom prst="line">
+            <a:avLst/>
+          </a:prstGeom>
+          <a:noFill/>
+          <a:ln w="25400">
+            <a:solidFill>
+              <a:srgbClr val="8ABBD8"/>
+            </a:solidFill>
+            <a:prstDash val="solid"/>
+          </a:ln>
+        </p:spPr>
+      </p:sp>
+      <p:sp>
+        <p:nvSpPr>
+          <p:cNvPr id="18" name="Shape 16"/>
+          <p:cNvSpPr/>
+          <p:nvPr/>
+        </p:nvSpPr>
+        <p:spPr>
+          <a:xfrm>
+            <a:off x="8202168" y="3630168"/>
+            <a:ext cx="1170432" cy="118872"/>
+          </a:xfrm>
+          <a:prstGeom prst="line">
+            <a:avLst/>
+          </a:prstGeom>
+          <a:noFill/>
+          <a:ln w="25400">
+            <a:solidFill>
+              <a:srgbClr val="8ABBD8"/>
+            </a:solidFill>
+            <a:prstDash val="solid"/>
+          </a:ln>
+        </p:spPr>
+      </p:sp>
+      <p:sp>
+        <p:nvSpPr>
+          <p:cNvPr id="19" name="Shape 17"/>
+          <p:cNvSpPr/>
+          <p:nvPr/>
+        </p:nvSpPr>
+        <p:spPr>
+          <a:xfrm>
+            <a:off x="10543032" y="3630168"/>
+            <a:ext cx="-1170432" cy="118872"/>
+          </a:xfrm>
+          <a:prstGeom prst="line">
+            <a:avLst/>
+          </a:prstGeom>
+          <a:noFill/>
+          <a:ln w="25400">
+            <a:solidFill>
+              <a:srgbClr val="8ABBD8"/>
+            </a:solidFill>
+            <a:prstDash val="solid"/>
+          </a:ln>
+        </p:spPr>
+      </p:sp>
+      <p:sp>
+        <p:nvSpPr>
+          <p:cNvPr id="20" name="Text 18"/>
+          <p:cNvSpPr/>
+          <p:nvPr/>
+        </p:nvSpPr>
+        <p:spPr>
+          <a:xfrm>
+            <a:off x="7863840" y="4069080"/>
+            <a:ext cx="3017520" cy="164592"/>
           </a:xfrm>
           <a:prstGeom prst="rect">
             <a:avLst/>
@@ -14142,79 +15547,38 @@
           <a:bodyPr wrap="square" lIns="0" tIns="0" rIns="0" bIns="0" rtlCol="0" anchor="ctr"/>
           <a:lstStyle/>
           <a:p>
-            <a:pPr indent="0" marL="0">
-              <a:buNone/>
-            </a:pPr>
-            <a:r>
-              <a:rPr lang="en-US" sz="1300" b="1" dirty="0">
-                <a:solidFill>
-                  <a:srgbClr val="0068B7"/>
-                </a:solidFill>
-                <a:latin typeface="Aptos" pitchFamily="34" charset="0"/>
-                <a:ea typeface="Aptos" pitchFamily="34" charset="-122"/>
-                <a:cs typeface="Aptos" pitchFamily="34" charset="-120"/>
-              </a:rPr>
-              <a:t>Key idea</a:t>
-            </a:r>
-            <a:endParaRPr lang="en-US" sz="1300" dirty="0"/>
-          </a:p>
-        </p:txBody>
-      </p:sp>
-      <p:sp>
-        <p:nvSpPr>
-          <p:cNvPr id="14" name="Text 12"/>
-          <p:cNvSpPr/>
-          <p:nvPr/>
-        </p:nvSpPr>
-        <p:spPr>
-          <a:xfrm>
-            <a:off x="8074152" y="1920240"/>
-            <a:ext cx="2825496" cy="1188720"/>
-          </a:xfrm>
-          <a:prstGeom prst="rect">
-            <a:avLst/>
-          </a:prstGeom>
-          <a:noFill/>
-          <a:ln/>
-        </p:spPr>
-        <p:txBody>
-          <a:bodyPr wrap="square" lIns="0" tIns="0" rIns="0" bIns="0" rtlCol="0" anchor="t">
-            <a:normAutofit/>
-          </a:bodyPr>
-          <a:lstStyle/>
-          <a:p>
-            <a:pPr indent="0" marL="0">
-              <a:buNone/>
-            </a:pPr>
-            <a:r>
-              <a:rPr lang="en-US" sz="1550" dirty="0">
-                <a:solidFill>
-                  <a:srgbClr val="17364A"/>
-                </a:solidFill>
-                <a:latin typeface="Aptos" pitchFamily="34" charset="0"/>
-                <a:ea typeface="Aptos" pitchFamily="34" charset="-122"/>
-                <a:cs typeface="Aptos" pitchFamily="34" charset="-120"/>
-              </a:rPr>
-              <a:t>This module provides national-level training guidance for public health agencies and partners.</a:t>
-            </a:r>
-            <a:endParaRPr lang="en-US" sz="1550" dirty="0"/>
-          </a:p>
-        </p:txBody>
-      </p:sp>
-      <p:sp>
-        <p:nvSpPr>
-          <p:cNvPr id="15" name="Shape 13"/>
-          <p:cNvSpPr/>
-          <p:nvPr/>
-        </p:nvSpPr>
-        <p:spPr>
-          <a:xfrm>
-            <a:off x="7909560" y="3520440"/>
-            <a:ext cx="3154680" cy="1737360"/>
+            <a:pPr algn="ctr" indent="0" marL="0">
+              <a:buNone/>
+            </a:pPr>
+            <a:r>
+              <a:rPr lang="en-US" sz="900" b="1" dirty="0">
+                <a:solidFill>
+                  <a:srgbClr val="003A63"/>
+                </a:solidFill>
+                <a:latin typeface="Aptos" pitchFamily="34" charset="0"/>
+                <a:ea typeface="Aptos" pitchFamily="34" charset="-122"/>
+                <a:cs typeface="Aptos" pitchFamily="34" charset="-120"/>
+              </a:rPr>
+              <a:t>Decision rights</a:t>
+            </a:r>
+            <a:endParaRPr lang="en-US" sz="900" dirty="0"/>
+          </a:p>
+        </p:txBody>
+      </p:sp>
+      <p:sp>
+        <p:nvSpPr>
+          <p:cNvPr id="21" name="Shape 19"/>
+          <p:cNvSpPr/>
+          <p:nvPr/>
+        </p:nvSpPr>
+        <p:spPr>
+          <a:xfrm>
+            <a:off x="7635240" y="4498848"/>
+            <a:ext cx="3474720" cy="1143000"/>
           </a:xfrm>
           <a:prstGeom prst="roundRect">
             <a:avLst>
-              <a:gd name="adj" fmla="val 6316"/>
+              <a:gd name="adj" fmla="val 9600"/>
             </a:avLst>
           </a:prstGeom>
           <a:solidFill>
@@ -14230,14 +15594,14 @@
       </p:sp>
       <p:sp>
         <p:nvSpPr>
-          <p:cNvPr id="16" name="Text 14"/>
-          <p:cNvSpPr/>
-          <p:nvPr/>
-        </p:nvSpPr>
-        <p:spPr>
-          <a:xfrm>
-            <a:off x="8074152" y="3666744"/>
-            <a:ext cx="2825496" cy="256032"/>
+          <p:cNvPr id="22" name="Text 20"/>
+          <p:cNvSpPr/>
+          <p:nvPr/>
+        </p:nvSpPr>
+        <p:spPr>
+          <a:xfrm>
+            <a:off x="7799832" y="4645152"/>
+            <a:ext cx="3145536" cy="256032"/>
           </a:xfrm>
           <a:prstGeom prst="rect">
             <a:avLst/>
@@ -14261,7 +15625,7 @@
                 <a:ea typeface="Aptos" pitchFamily="34" charset="-122"/>
                 <a:cs typeface="Aptos" pitchFamily="34" charset="-120"/>
               </a:rPr>
-              <a:t>Use this for</a:t>
+              <a:t>What to document</a:t>
             </a:r>
             <a:endParaRPr lang="en-US" sz="1300" dirty="0"/>
           </a:p>
@@ -14269,14 +15633,14 @@
       </p:sp>
       <p:sp>
         <p:nvSpPr>
-          <p:cNvPr id="17" name="Text 15"/>
-          <p:cNvSpPr/>
-          <p:nvPr/>
-        </p:nvSpPr>
-        <p:spPr>
-          <a:xfrm>
-            <a:off x="8074152" y="4023360"/>
-            <a:ext cx="2825496" cy="1097280"/>
+          <p:cNvPr id="23" name="Text 21"/>
+          <p:cNvSpPr/>
+          <p:nvPr/>
+        </p:nvSpPr>
+        <p:spPr>
+          <a:xfrm>
+            <a:off x="7799832" y="5001768"/>
+            <a:ext cx="3145536" cy="502920"/>
           </a:xfrm>
           <a:prstGeom prst="rect">
             <a:avLst/>
@@ -14302,7 +15666,7 @@
                 <a:ea typeface="Aptos" pitchFamily="34" charset="-122"/>
                 <a:cs typeface="Aptos" pitchFamily="34" charset="-120"/>
               </a:rPr>
-              <a:t>Connect the concept to public health decisions, safeguards, documentation, or implementation work.</a:t>
+              <a:t>Translate this concept into clear decision rights, review steps, documentation expectations, and escalation paths before an AI-supported workflow is approved.</a:t>
             </a:r>
             <a:endParaRPr lang="en-US" sz="1550" dirty="0"/>
           </a:p>
@@ -14476,8 +15840,8 @@
         </p:nvSpPr>
         <p:spPr>
           <a:xfrm>
-            <a:off x="9966960" y="6537960"/>
-            <a:ext cx="1645920" cy="201168"/>
+            <a:off x="9646920" y="6537960"/>
+            <a:ext cx="1965960" cy="201168"/>
           </a:xfrm>
           <a:prstGeom prst="rect">
             <a:avLst/>
@@ -14501,7 +15865,7 @@
                 <a:ea typeface="Aptos" pitchFamily="34" charset="-122"/>
                 <a:cs typeface="Aptos" pitchFamily="34" charset="-120"/>
               </a:rPr>
-              <a:t>Â© Paula Soper</a:t>
+              <a:t>Copyright Paula Soper</a:t>
             </a:r>
             <a:endParaRPr lang="en-US" sz="800" dirty="0"/>
           </a:p>
@@ -14548,77 +15912,13 @@
       </p:sp>
       <p:sp>
         <p:nvSpPr>
-          <p:cNvPr id="8" name="Shape 6"/>
+          <p:cNvPr id="8" name="Text 6"/>
           <p:cNvSpPr/>
           <p:nvPr/>
         </p:nvSpPr>
         <p:spPr>
           <a:xfrm>
             <a:off x="640080" y="658368"/>
-            <a:ext cx="420624" cy="420624"/>
-          </a:xfrm>
-          <a:prstGeom prst="ellipse">
-            <a:avLst/>
-          </a:prstGeom>
-          <a:solidFill>
-            <a:srgbClr val="0068B7"/>
-          </a:solidFill>
-          <a:ln w="12700">
-            <a:solidFill>
-              <a:srgbClr val="0068B7"/>
-            </a:solidFill>
-            <a:prstDash val="solid"/>
-          </a:ln>
-        </p:spPr>
-      </p:sp>
-      <p:sp>
-        <p:nvSpPr>
-          <p:cNvPr id="9" name="Text 7"/>
-          <p:cNvSpPr/>
-          <p:nvPr/>
-        </p:nvSpPr>
-        <p:spPr>
-          <a:xfrm>
-            <a:off x="640080" y="731520"/>
-            <a:ext cx="420624" cy="164592"/>
-          </a:xfrm>
-          <a:prstGeom prst="rect">
-            <a:avLst/>
-          </a:prstGeom>
-          <a:noFill/>
-          <a:ln/>
-        </p:spPr>
-        <p:txBody>
-          <a:bodyPr wrap="square" lIns="0" tIns="0" rIns="0" bIns="0" rtlCol="0" anchor="ctr"/>
-          <a:lstStyle/>
-          <a:p>
-            <a:pPr algn="ctr" indent="0" marL="0">
-              <a:buNone/>
-            </a:pPr>
-            <a:r>
-              <a:rPr lang="en-US" sz="1100" b="1" dirty="0">
-                <a:solidFill>
-                  <a:srgbClr val="FFFFFF"/>
-                </a:solidFill>
-                <a:latin typeface="Aptos" pitchFamily="34" charset="0"/>
-                <a:ea typeface="Aptos" pitchFamily="34" charset="-122"/>
-                <a:cs typeface="Aptos" pitchFamily="34" charset="-120"/>
-              </a:rPr>
-              <a:t>4</a:t>
-            </a:r>
-            <a:endParaRPr lang="en-US" sz="1100" dirty="0"/>
-          </a:p>
-        </p:txBody>
-      </p:sp>
-      <p:sp>
-        <p:nvSpPr>
-          <p:cNvPr id="10" name="Text 8"/>
-          <p:cNvSpPr/>
-          <p:nvPr/>
-        </p:nvSpPr>
-        <p:spPr>
-          <a:xfrm>
-            <a:off x="640080" y="621792"/>
             <a:ext cx="10881360" cy="713232"/>
           </a:xfrm>
           <a:prstGeom prst="rect">
@@ -14653,14 +15953,14 @@
       </p:sp>
       <p:sp>
         <p:nvSpPr>
-          <p:cNvPr id="11" name="Text 9"/>
+          <p:cNvPr id="9" name="Text 7"/>
           <p:cNvSpPr/>
           <p:nvPr/>
         </p:nvSpPr>
         <p:spPr>
           <a:xfrm>
             <a:off x="868680" y="1508760"/>
-            <a:ext cx="6537960" cy="4160520"/>
+            <a:ext cx="6309360" cy="4160520"/>
           </a:xfrm>
           <a:prstGeom prst="rect">
             <a:avLst/>
@@ -14719,18 +16019,18 @@
       </p:sp>
       <p:sp>
         <p:nvSpPr>
-          <p:cNvPr id="12" name="Shape 10"/>
-          <p:cNvSpPr/>
-          <p:nvPr/>
-        </p:nvSpPr>
-        <p:spPr>
-          <a:xfrm>
-            <a:off x="7909560" y="1417320"/>
-            <a:ext cx="3154680" cy="1828800"/>
+          <p:cNvPr id="10" name="Shape 8"/>
+          <p:cNvSpPr/>
+          <p:nvPr/>
+        </p:nvSpPr>
+        <p:spPr>
+          <a:xfrm>
+            <a:off x="7635240" y="1325880"/>
+            <a:ext cx="3474720" cy="1325880"/>
           </a:xfrm>
           <a:prstGeom prst="roundRect">
             <a:avLst>
-              <a:gd name="adj" fmla="val 6000"/>
+              <a:gd name="adj" fmla="val 8276"/>
             </a:avLst>
           </a:prstGeom>
           <a:solidFill>
@@ -14746,14 +16046,14 @@
       </p:sp>
       <p:sp>
         <p:nvSpPr>
-          <p:cNvPr id="13" name="Text 11"/>
-          <p:cNvSpPr/>
-          <p:nvPr/>
-        </p:nvSpPr>
-        <p:spPr>
-          <a:xfrm>
-            <a:off x="8074152" y="1563624"/>
-            <a:ext cx="2825496" cy="256032"/>
+          <p:cNvPr id="11" name="Text 9"/>
+          <p:cNvSpPr/>
+          <p:nvPr/>
+        </p:nvSpPr>
+        <p:spPr>
+          <a:xfrm>
+            <a:off x="7799832" y="1472184"/>
+            <a:ext cx="3145536" cy="256032"/>
           </a:xfrm>
           <a:prstGeom prst="rect">
             <a:avLst/>
@@ -14777,7 +16077,7 @@
                 <a:ea typeface="Aptos" pitchFamily="34" charset="-122"/>
                 <a:cs typeface="Aptos" pitchFamily="34" charset="-120"/>
               </a:rPr>
-              <a:t>Key idea</a:t>
+              <a:t>Risk check</a:t>
             </a:r>
             <a:endParaRPr lang="en-US" sz="1300" dirty="0"/>
           </a:p>
@@ -14785,14 +16085,14 @@
       </p:sp>
       <p:sp>
         <p:nvSpPr>
-          <p:cNvPr id="14" name="Text 12"/>
-          <p:cNvSpPr/>
-          <p:nvPr/>
-        </p:nvSpPr>
-        <p:spPr>
-          <a:xfrm>
-            <a:off x="8074152" y="1920240"/>
-            <a:ext cx="2825496" cy="1188720"/>
+          <p:cNvPr id="12" name="Text 10"/>
+          <p:cNvSpPr/>
+          <p:nvPr/>
+        </p:nvSpPr>
+        <p:spPr>
+          <a:xfrm>
+            <a:off x="7799832" y="1828800"/>
+            <a:ext cx="3145536" cy="685800"/>
           </a:xfrm>
           <a:prstGeom prst="rect">
             <a:avLst/>
@@ -14826,18 +16126,171 @@
       </p:sp>
       <p:sp>
         <p:nvSpPr>
-          <p:cNvPr id="15" name="Shape 13"/>
-          <p:cNvSpPr/>
-          <p:nvPr/>
-        </p:nvSpPr>
-        <p:spPr>
-          <a:xfrm>
-            <a:off x="7909560" y="3520440"/>
-            <a:ext cx="3154680" cy="1737360"/>
+          <p:cNvPr id="13" name="Shape 11"/>
+          <p:cNvSpPr/>
+          <p:nvPr/>
+        </p:nvSpPr>
+        <p:spPr>
+          <a:xfrm>
+            <a:off x="7635240" y="2788920"/>
+            <a:ext cx="3474720" cy="1536192"/>
           </a:xfrm>
           <a:prstGeom prst="roundRect">
             <a:avLst>
-              <a:gd name="adj" fmla="val 6316"/>
+              <a:gd name="adj" fmla="val 7143"/>
+            </a:avLst>
+          </a:prstGeom>
+          <a:solidFill>
+            <a:srgbClr val="FFFFFF">
+              <a:alpha val="88000"/>
+            </a:srgbClr>
+          </a:solidFill>
+          <a:ln w="12700">
+            <a:solidFill>
+              <a:srgbClr val="D6E8F2"/>
+            </a:solidFill>
+            <a:prstDash val="solid"/>
+          </a:ln>
+        </p:spPr>
+      </p:sp>
+      <p:sp>
+        <p:nvSpPr>
+          <p:cNvPr id="14" name="Shape 12"/>
+          <p:cNvSpPr/>
+          <p:nvPr/>
+        </p:nvSpPr>
+        <p:spPr>
+          <a:xfrm>
+            <a:off x="8046720" y="3108960"/>
+            <a:ext cx="2651760" cy="896112"/>
+          </a:xfrm>
+          <a:prstGeom prst="arc">
+            <a:avLst/>
+          </a:prstGeom>
+          <a:noFill/>
+          <a:ln w="25400">
+            <a:solidFill>
+              <a:srgbClr val="0068B7"/>
+            </a:solidFill>
+            <a:prstDash val="solid"/>
+          </a:ln>
+        </p:spPr>
+      </p:sp>
+      <p:sp>
+        <p:nvSpPr>
+          <p:cNvPr id="15" name="Text 13"/>
+          <p:cNvSpPr/>
+          <p:nvPr/>
+        </p:nvSpPr>
+        <p:spPr>
+          <a:xfrm>
+            <a:off x="7909560" y="3099816"/>
+            <a:ext cx="2926080" cy="256032"/>
+          </a:xfrm>
+          <a:prstGeom prst="rect">
+            <a:avLst/>
+          </a:prstGeom>
+          <a:noFill/>
+          <a:ln/>
+        </p:spPr>
+        <p:txBody>
+          <a:bodyPr wrap="square" lIns="0" tIns="0" rIns="0" bIns="0" rtlCol="0" anchor="ctr"/>
+          <a:lstStyle/>
+          <a:p>
+            <a:pPr algn="ctr" indent="0" marL="0">
+              <a:buNone/>
+            </a:pPr>
+            <a:r>
+              <a:rPr lang="en-US" sz="1500" b="1" dirty="0">
+                <a:solidFill>
+                  <a:srgbClr val="003A63"/>
+                </a:solidFill>
+                <a:latin typeface="Aptos" pitchFamily="34" charset="0"/>
+                <a:ea typeface="Aptos" pitchFamily="34" charset="-122"/>
+                <a:cs typeface="Aptos" pitchFamily="34" charset="-120"/>
+              </a:rPr>
+              <a:t>Risk</a:t>
+            </a:r>
+            <a:endParaRPr lang="en-US" sz="1500" dirty="0"/>
+          </a:p>
+        </p:txBody>
+      </p:sp>
+      <p:sp>
+        <p:nvSpPr>
+          <p:cNvPr id="16" name="Shape 14"/>
+          <p:cNvSpPr/>
+          <p:nvPr/>
+        </p:nvSpPr>
+        <p:spPr>
+          <a:xfrm>
+            <a:off x="8366760" y="3639312"/>
+            <a:ext cx="2011680" cy="0"/>
+          </a:xfrm>
+          <a:prstGeom prst="line">
+            <a:avLst/>
+          </a:prstGeom>
+          <a:noFill/>
+          <a:ln w="63500">
+            <a:solidFill>
+              <a:srgbClr val="2F8A28"/>
+            </a:solidFill>
+            <a:prstDash val="solid"/>
+          </a:ln>
+        </p:spPr>
+      </p:sp>
+      <p:sp>
+        <p:nvSpPr>
+          <p:cNvPr id="17" name="Text 15"/>
+          <p:cNvSpPr/>
+          <p:nvPr/>
+        </p:nvSpPr>
+        <p:spPr>
+          <a:xfrm>
+            <a:off x="7909560" y="3849624"/>
+            <a:ext cx="2926080" cy="164592"/>
+          </a:xfrm>
+          <a:prstGeom prst="rect">
+            <a:avLst/>
+          </a:prstGeom>
+          <a:noFill/>
+          <a:ln/>
+        </p:spPr>
+        <p:txBody>
+          <a:bodyPr wrap="square" lIns="0" tIns="0" rIns="0" bIns="0" rtlCol="0" anchor="ctr"/>
+          <a:lstStyle/>
+          <a:p>
+            <a:pPr algn="ctr" indent="0" marL="0">
+              <a:buNone/>
+            </a:pPr>
+            <a:r>
+              <a:rPr lang="en-US" sz="900" dirty="0">
+                <a:solidFill>
+                  <a:srgbClr val="003A63"/>
+                </a:solidFill>
+                <a:latin typeface="Aptos" pitchFamily="34" charset="0"/>
+                <a:ea typeface="Aptos" pitchFamily="34" charset="-122"/>
+                <a:cs typeface="Aptos" pitchFamily="34" charset="-120"/>
+              </a:rPr>
+              <a:t>Human review</a:t>
+            </a:r>
+            <a:endParaRPr lang="en-US" sz="900" dirty="0"/>
+          </a:p>
+        </p:txBody>
+      </p:sp>
+      <p:sp>
+        <p:nvSpPr>
+          <p:cNvPr id="18" name="Shape 16"/>
+          <p:cNvSpPr/>
+          <p:nvPr/>
+        </p:nvSpPr>
+        <p:spPr>
+          <a:xfrm>
+            <a:off x="7635240" y="4498848"/>
+            <a:ext cx="3474720" cy="1143000"/>
+          </a:xfrm>
+          <a:prstGeom prst="roundRect">
+            <a:avLst>
+              <a:gd name="adj" fmla="val 9600"/>
             </a:avLst>
           </a:prstGeom>
           <a:solidFill>
@@ -14853,14 +16306,14 @@
       </p:sp>
       <p:sp>
         <p:nvSpPr>
-          <p:cNvPr id="16" name="Text 14"/>
-          <p:cNvSpPr/>
-          <p:nvPr/>
-        </p:nvSpPr>
-        <p:spPr>
-          <a:xfrm>
-            <a:off x="8074152" y="3666744"/>
-            <a:ext cx="2825496" cy="256032"/>
+          <p:cNvPr id="19" name="Text 17"/>
+          <p:cNvSpPr/>
+          <p:nvPr/>
+        </p:nvSpPr>
+        <p:spPr>
+          <a:xfrm>
+            <a:off x="7799832" y="4645152"/>
+            <a:ext cx="3145536" cy="256032"/>
           </a:xfrm>
           <a:prstGeom prst="rect">
             <a:avLst/>
@@ -14884,7 +16337,7 @@
                 <a:ea typeface="Aptos" pitchFamily="34" charset="-122"/>
                 <a:cs typeface="Aptos" pitchFamily="34" charset="-120"/>
               </a:rPr>
-              <a:t>Use this for</a:t>
+              <a:t>Safeguard to plan</a:t>
             </a:r>
             <a:endParaRPr lang="en-US" sz="1300" dirty="0"/>
           </a:p>
@@ -14892,14 +16345,14 @@
       </p:sp>
       <p:sp>
         <p:nvSpPr>
-          <p:cNvPr id="17" name="Text 15"/>
-          <p:cNvSpPr/>
-          <p:nvPr/>
-        </p:nvSpPr>
-        <p:spPr>
-          <a:xfrm>
-            <a:off x="8074152" y="4023360"/>
-            <a:ext cx="2825496" cy="1097280"/>
+          <p:cNvPr id="20" name="Text 18"/>
+          <p:cNvSpPr/>
+          <p:nvPr/>
+        </p:nvSpPr>
+        <p:spPr>
+          <a:xfrm>
+            <a:off x="7799832" y="5001768"/>
+            <a:ext cx="3145536" cy="502920"/>
           </a:xfrm>
           <a:prstGeom prst="rect">
             <a:avLst/>
@@ -14925,7 +16378,7 @@
                 <a:ea typeface="Aptos" pitchFamily="34" charset="-122"/>
                 <a:cs typeface="Aptos" pitchFamily="34" charset="-120"/>
               </a:rPr>
-              <a:t>Connect the concept to public health decisions, safeguards, documentation, or implementation work.</a:t>
+              <a:t>Identify what could go wrong, who could be affected, what safeguards are needed, and what evidence should be reviewed before use expands.</a:t>
             </a:r>
             <a:endParaRPr lang="en-US" sz="1550" dirty="0"/>
           </a:p>
@@ -15099,8 +16552,8 @@
         </p:nvSpPr>
         <p:spPr>
           <a:xfrm>
-            <a:off x="9966960" y="6537960"/>
-            <a:ext cx="1645920" cy="201168"/>
+            <a:off x="9646920" y="6537960"/>
+            <a:ext cx="1965960" cy="201168"/>
           </a:xfrm>
           <a:prstGeom prst="rect">
             <a:avLst/>
@@ -15124,7 +16577,7 @@
                 <a:ea typeface="Aptos" pitchFamily="34" charset="-122"/>
                 <a:cs typeface="Aptos" pitchFamily="34" charset="-120"/>
               </a:rPr>
-              <a:t>Â© Paula Soper</a:t>
+              <a:t>Copyright Paula Soper</a:t>
             </a:r>
             <a:endParaRPr lang="en-US" sz="800" dirty="0"/>
           </a:p>
@@ -15171,77 +16624,13 @@
       </p:sp>
       <p:sp>
         <p:nvSpPr>
-          <p:cNvPr id="8" name="Shape 6"/>
+          <p:cNvPr id="8" name="Text 6"/>
           <p:cNvSpPr/>
           <p:nvPr/>
         </p:nvSpPr>
         <p:spPr>
           <a:xfrm>
             <a:off x="640080" y="658368"/>
-            <a:ext cx="420624" cy="420624"/>
-          </a:xfrm>
-          <a:prstGeom prst="ellipse">
-            <a:avLst/>
-          </a:prstGeom>
-          <a:solidFill>
-            <a:srgbClr val="0068B7"/>
-          </a:solidFill>
-          <a:ln w="12700">
-            <a:solidFill>
-              <a:srgbClr val="0068B7"/>
-            </a:solidFill>
-            <a:prstDash val="solid"/>
-          </a:ln>
-        </p:spPr>
-      </p:sp>
-      <p:sp>
-        <p:nvSpPr>
-          <p:cNvPr id="9" name="Text 7"/>
-          <p:cNvSpPr/>
-          <p:nvPr/>
-        </p:nvSpPr>
-        <p:spPr>
-          <a:xfrm>
-            <a:off x="640080" y="731520"/>
-            <a:ext cx="420624" cy="164592"/>
-          </a:xfrm>
-          <a:prstGeom prst="rect">
-            <a:avLst/>
-          </a:prstGeom>
-          <a:noFill/>
-          <a:ln/>
-        </p:spPr>
-        <p:txBody>
-          <a:bodyPr wrap="square" lIns="0" tIns="0" rIns="0" bIns="0" rtlCol="0" anchor="ctr"/>
-          <a:lstStyle/>
-          <a:p>
-            <a:pPr algn="ctr" indent="0" marL="0">
-              <a:buNone/>
-            </a:pPr>
-            <a:r>
-              <a:rPr lang="en-US" sz="1100" b="1" dirty="0">
-                <a:solidFill>
-                  <a:srgbClr val="FFFFFF"/>
-                </a:solidFill>
-                <a:latin typeface="Aptos" pitchFamily="34" charset="0"/>
-                <a:ea typeface="Aptos" pitchFamily="34" charset="-122"/>
-                <a:cs typeface="Aptos" pitchFamily="34" charset="-120"/>
-              </a:rPr>
-              <a:t>5</a:t>
-            </a:r>
-            <a:endParaRPr lang="en-US" sz="1100" dirty="0"/>
-          </a:p>
-        </p:txBody>
-      </p:sp>
-      <p:sp>
-        <p:nvSpPr>
-          <p:cNvPr id="10" name="Text 8"/>
-          <p:cNvSpPr/>
-          <p:nvPr/>
-        </p:nvSpPr>
-        <p:spPr>
-          <a:xfrm>
-            <a:off x="640080" y="621792"/>
             <a:ext cx="10881360" cy="713232"/>
           </a:xfrm>
           <a:prstGeom prst="rect">
@@ -15276,14 +16665,14 @@
       </p:sp>
       <p:sp>
         <p:nvSpPr>
-          <p:cNvPr id="11" name="Text 9"/>
+          <p:cNvPr id="9" name="Text 7"/>
           <p:cNvSpPr/>
           <p:nvPr/>
         </p:nvSpPr>
         <p:spPr>
           <a:xfrm>
             <a:off x="868680" y="1508760"/>
-            <a:ext cx="6537960" cy="4160520"/>
+            <a:ext cx="6309360" cy="4160520"/>
           </a:xfrm>
           <a:prstGeom prst="rect">
             <a:avLst/>
@@ -15342,18 +16731,18 @@
       </p:sp>
       <p:sp>
         <p:nvSpPr>
-          <p:cNvPr id="12" name="Shape 10"/>
-          <p:cNvSpPr/>
-          <p:nvPr/>
-        </p:nvSpPr>
-        <p:spPr>
-          <a:xfrm>
-            <a:off x="7909560" y="1417320"/>
-            <a:ext cx="3154680" cy="1828800"/>
+          <p:cNvPr id="10" name="Shape 8"/>
+          <p:cNvSpPr/>
+          <p:nvPr/>
+        </p:nvSpPr>
+        <p:spPr>
+          <a:xfrm>
+            <a:off x="7635240" y="1325880"/>
+            <a:ext cx="3474720" cy="1325880"/>
           </a:xfrm>
           <a:prstGeom prst="roundRect">
             <a:avLst>
-              <a:gd name="adj" fmla="val 6000"/>
+              <a:gd name="adj" fmla="val 8276"/>
             </a:avLst>
           </a:prstGeom>
           <a:solidFill>
@@ -15369,14 +16758,14 @@
       </p:sp>
       <p:sp>
         <p:nvSpPr>
-          <p:cNvPr id="13" name="Text 11"/>
-          <p:cNvSpPr/>
-          <p:nvPr/>
-        </p:nvSpPr>
-        <p:spPr>
-          <a:xfrm>
-            <a:off x="8074152" y="1563624"/>
-            <a:ext cx="2825496" cy="256032"/>
+          <p:cNvPr id="11" name="Text 9"/>
+          <p:cNvSpPr/>
+          <p:nvPr/>
+        </p:nvSpPr>
+        <p:spPr>
+          <a:xfrm>
+            <a:off x="7799832" y="1472184"/>
+            <a:ext cx="3145536" cy="256032"/>
           </a:xfrm>
           <a:prstGeom prst="rect">
             <a:avLst/>
@@ -15400,7 +16789,7 @@
                 <a:ea typeface="Aptos" pitchFamily="34" charset="-122"/>
                 <a:cs typeface="Aptos" pitchFamily="34" charset="-120"/>
               </a:rPr>
-              <a:t>Key idea</a:t>
+              <a:t>Risk check</a:t>
             </a:r>
             <a:endParaRPr lang="en-US" sz="1300" dirty="0"/>
           </a:p>
@@ -15408,14 +16797,14 @@
       </p:sp>
       <p:sp>
         <p:nvSpPr>
-          <p:cNvPr id="14" name="Text 12"/>
-          <p:cNvSpPr/>
-          <p:nvPr/>
-        </p:nvSpPr>
-        <p:spPr>
-          <a:xfrm>
-            <a:off x="8074152" y="1920240"/>
-            <a:ext cx="2825496" cy="1188720"/>
+          <p:cNvPr id="12" name="Text 10"/>
+          <p:cNvSpPr/>
+          <p:nvPr/>
+        </p:nvSpPr>
+        <p:spPr>
+          <a:xfrm>
+            <a:off x="7799832" y="1828800"/>
+            <a:ext cx="3145536" cy="685800"/>
           </a:xfrm>
           <a:prstGeom prst="rect">
             <a:avLst/>
@@ -15449,18 +16838,171 @@
       </p:sp>
       <p:sp>
         <p:nvSpPr>
-          <p:cNvPr id="15" name="Shape 13"/>
-          <p:cNvSpPr/>
-          <p:nvPr/>
-        </p:nvSpPr>
-        <p:spPr>
-          <a:xfrm>
-            <a:off x="7909560" y="3520440"/>
-            <a:ext cx="3154680" cy="1737360"/>
+          <p:cNvPr id="13" name="Shape 11"/>
+          <p:cNvSpPr/>
+          <p:nvPr/>
+        </p:nvSpPr>
+        <p:spPr>
+          <a:xfrm>
+            <a:off x="7635240" y="2788920"/>
+            <a:ext cx="3474720" cy="1536192"/>
           </a:xfrm>
           <a:prstGeom prst="roundRect">
             <a:avLst>
-              <a:gd name="adj" fmla="val 6316"/>
+              <a:gd name="adj" fmla="val 7143"/>
+            </a:avLst>
+          </a:prstGeom>
+          <a:solidFill>
+            <a:srgbClr val="FFFFFF">
+              <a:alpha val="88000"/>
+            </a:srgbClr>
+          </a:solidFill>
+          <a:ln w="12700">
+            <a:solidFill>
+              <a:srgbClr val="D6E8F2"/>
+            </a:solidFill>
+            <a:prstDash val="solid"/>
+          </a:ln>
+        </p:spPr>
+      </p:sp>
+      <p:sp>
+        <p:nvSpPr>
+          <p:cNvPr id="14" name="Shape 12"/>
+          <p:cNvSpPr/>
+          <p:nvPr/>
+        </p:nvSpPr>
+        <p:spPr>
+          <a:xfrm>
+            <a:off x="8046720" y="3108960"/>
+            <a:ext cx="2651760" cy="896112"/>
+          </a:xfrm>
+          <a:prstGeom prst="arc">
+            <a:avLst/>
+          </a:prstGeom>
+          <a:noFill/>
+          <a:ln w="25400">
+            <a:solidFill>
+              <a:srgbClr val="0068B7"/>
+            </a:solidFill>
+            <a:prstDash val="solid"/>
+          </a:ln>
+        </p:spPr>
+      </p:sp>
+      <p:sp>
+        <p:nvSpPr>
+          <p:cNvPr id="15" name="Text 13"/>
+          <p:cNvSpPr/>
+          <p:nvPr/>
+        </p:nvSpPr>
+        <p:spPr>
+          <a:xfrm>
+            <a:off x="7909560" y="3099816"/>
+            <a:ext cx="2926080" cy="256032"/>
+          </a:xfrm>
+          <a:prstGeom prst="rect">
+            <a:avLst/>
+          </a:prstGeom>
+          <a:noFill/>
+          <a:ln/>
+        </p:spPr>
+        <p:txBody>
+          <a:bodyPr wrap="square" lIns="0" tIns="0" rIns="0" bIns="0" rtlCol="0" anchor="ctr"/>
+          <a:lstStyle/>
+          <a:p>
+            <a:pPr algn="ctr" indent="0" marL="0">
+              <a:buNone/>
+            </a:pPr>
+            <a:r>
+              <a:rPr lang="en-US" sz="1500" b="1" dirty="0">
+                <a:solidFill>
+                  <a:srgbClr val="003A63"/>
+                </a:solidFill>
+                <a:latin typeface="Aptos" pitchFamily="34" charset="0"/>
+                <a:ea typeface="Aptos" pitchFamily="34" charset="-122"/>
+                <a:cs typeface="Aptos" pitchFamily="34" charset="-120"/>
+              </a:rPr>
+              <a:t>Risk</a:t>
+            </a:r>
+            <a:endParaRPr lang="en-US" sz="1500" dirty="0"/>
+          </a:p>
+        </p:txBody>
+      </p:sp>
+      <p:sp>
+        <p:nvSpPr>
+          <p:cNvPr id="16" name="Shape 14"/>
+          <p:cNvSpPr/>
+          <p:nvPr/>
+        </p:nvSpPr>
+        <p:spPr>
+          <a:xfrm>
+            <a:off x="8366760" y="3639312"/>
+            <a:ext cx="2011680" cy="0"/>
+          </a:xfrm>
+          <a:prstGeom prst="line">
+            <a:avLst/>
+          </a:prstGeom>
+          <a:noFill/>
+          <a:ln w="63500">
+            <a:solidFill>
+              <a:srgbClr val="2F8A28"/>
+            </a:solidFill>
+            <a:prstDash val="solid"/>
+          </a:ln>
+        </p:spPr>
+      </p:sp>
+      <p:sp>
+        <p:nvSpPr>
+          <p:cNvPr id="17" name="Text 15"/>
+          <p:cNvSpPr/>
+          <p:nvPr/>
+        </p:nvSpPr>
+        <p:spPr>
+          <a:xfrm>
+            <a:off x="7909560" y="3849624"/>
+            <a:ext cx="2926080" cy="164592"/>
+          </a:xfrm>
+          <a:prstGeom prst="rect">
+            <a:avLst/>
+          </a:prstGeom>
+          <a:noFill/>
+          <a:ln/>
+        </p:spPr>
+        <p:txBody>
+          <a:bodyPr wrap="square" lIns="0" tIns="0" rIns="0" bIns="0" rtlCol="0" anchor="ctr"/>
+          <a:lstStyle/>
+          <a:p>
+            <a:pPr algn="ctr" indent="0" marL="0">
+              <a:buNone/>
+            </a:pPr>
+            <a:r>
+              <a:rPr lang="en-US" sz="900" dirty="0">
+                <a:solidFill>
+                  <a:srgbClr val="003A63"/>
+                </a:solidFill>
+                <a:latin typeface="Aptos" pitchFamily="34" charset="0"/>
+                <a:ea typeface="Aptos" pitchFamily="34" charset="-122"/>
+                <a:cs typeface="Aptos" pitchFamily="34" charset="-120"/>
+              </a:rPr>
+              <a:t>Human review</a:t>
+            </a:r>
+            <a:endParaRPr lang="en-US" sz="900" dirty="0"/>
+          </a:p>
+        </p:txBody>
+      </p:sp>
+      <p:sp>
+        <p:nvSpPr>
+          <p:cNvPr id="18" name="Shape 16"/>
+          <p:cNvSpPr/>
+          <p:nvPr/>
+        </p:nvSpPr>
+        <p:spPr>
+          <a:xfrm>
+            <a:off x="7635240" y="4498848"/>
+            <a:ext cx="3474720" cy="1143000"/>
+          </a:xfrm>
+          <a:prstGeom prst="roundRect">
+            <a:avLst>
+              <a:gd name="adj" fmla="val 9600"/>
             </a:avLst>
           </a:prstGeom>
           <a:solidFill>
@@ -15476,14 +17018,14 @@
       </p:sp>
       <p:sp>
         <p:nvSpPr>
-          <p:cNvPr id="16" name="Text 14"/>
-          <p:cNvSpPr/>
-          <p:nvPr/>
-        </p:nvSpPr>
-        <p:spPr>
-          <a:xfrm>
-            <a:off x="8074152" y="3666744"/>
-            <a:ext cx="2825496" cy="256032"/>
+          <p:cNvPr id="19" name="Text 17"/>
+          <p:cNvSpPr/>
+          <p:nvPr/>
+        </p:nvSpPr>
+        <p:spPr>
+          <a:xfrm>
+            <a:off x="7799832" y="4645152"/>
+            <a:ext cx="3145536" cy="256032"/>
           </a:xfrm>
           <a:prstGeom prst="rect">
             <a:avLst/>
@@ -15507,7 +17049,7 @@
                 <a:ea typeface="Aptos" pitchFamily="34" charset="-122"/>
                 <a:cs typeface="Aptos" pitchFamily="34" charset="-120"/>
               </a:rPr>
-              <a:t>Use this for</a:t>
+              <a:t>Safeguard to plan</a:t>
             </a:r>
             <a:endParaRPr lang="en-US" sz="1300" dirty="0"/>
           </a:p>
@@ -15515,14 +17057,14 @@
       </p:sp>
       <p:sp>
         <p:nvSpPr>
-          <p:cNvPr id="17" name="Text 15"/>
-          <p:cNvSpPr/>
-          <p:nvPr/>
-        </p:nvSpPr>
-        <p:spPr>
-          <a:xfrm>
-            <a:off x="8074152" y="4023360"/>
-            <a:ext cx="2825496" cy="1097280"/>
+          <p:cNvPr id="20" name="Text 18"/>
+          <p:cNvSpPr/>
+          <p:nvPr/>
+        </p:nvSpPr>
+        <p:spPr>
+          <a:xfrm>
+            <a:off x="7799832" y="5001768"/>
+            <a:ext cx="3145536" cy="502920"/>
           </a:xfrm>
           <a:prstGeom prst="rect">
             <a:avLst/>
@@ -15548,7 +17090,7 @@
                 <a:ea typeface="Aptos" pitchFamily="34" charset="-122"/>
                 <a:cs typeface="Aptos" pitchFamily="34" charset="-120"/>
               </a:rPr>
-              <a:t>Connect the concept to public health decisions, safeguards, documentation, or implementation work.</a:t>
+              <a:t>Identify what could go wrong, who could be affected, what safeguards are needed, and what evidence should be reviewed before use expands.</a:t>
             </a:r>
             <a:endParaRPr lang="en-US" sz="1550" dirty="0"/>
           </a:p>

--- a/downloads/presentations/modules/gov-410.pptx
+++ b/downloads/presentations/modules/gov-410.pptx
@@ -3425,13 +3425,11 @@
             </a:avLst>
           </a:prstGeom>
           <a:solidFill>
-            <a:srgbClr val="FFFFFF">
-              <a:alpha val="88000"/>
-            </a:srgbClr>
+            <a:srgbClr val="FFFFFF"/>
           </a:solidFill>
           <a:ln w="12700">
             <a:solidFill>
-              <a:srgbClr val="D6E8F2"/>
+              <a:srgbClr val="B9D7E6"/>
             </a:solidFill>
             <a:prstDash val="solid"/>
           </a:ln>
@@ -3439,190 +3437,112 @@
       </p:sp>
       <p:sp>
         <p:nvSpPr>
-          <p:cNvPr id="14" name="Shape 12"/>
-          <p:cNvSpPr/>
-          <p:nvPr/>
-        </p:nvSpPr>
-        <p:spPr>
-          <a:xfrm>
-            <a:off x="7891272" y="3108960"/>
-            <a:ext cx="566928" cy="566928"/>
-          </a:xfrm>
-          <a:prstGeom prst="ellipse">
-            <a:avLst/>
-          </a:prstGeom>
-          <a:solidFill>
-            <a:srgbClr val="0068B7"/>
-          </a:solidFill>
-          <a:ln w="12700">
-            <a:solidFill>
-              <a:srgbClr val="0068B7"/>
-            </a:solidFill>
-            <a:prstDash val="solid"/>
-          </a:ln>
-        </p:spPr>
-      </p:sp>
-      <p:sp>
-        <p:nvSpPr>
-          <p:cNvPr id="15" name="Shape 13"/>
-          <p:cNvSpPr/>
-          <p:nvPr/>
-        </p:nvSpPr>
-        <p:spPr>
-          <a:xfrm>
-            <a:off x="10287000" y="3108960"/>
-            <a:ext cx="566928" cy="566928"/>
-          </a:xfrm>
-          <a:prstGeom prst="ellipse">
-            <a:avLst/>
-          </a:prstGeom>
-          <a:solidFill>
-            <a:srgbClr val="2F8A28"/>
-          </a:solidFill>
-          <a:ln w="12700">
-            <a:solidFill>
-              <a:srgbClr val="2F8A28"/>
-            </a:solidFill>
-            <a:prstDash val="solid"/>
-          </a:ln>
-        </p:spPr>
+          <p:cNvPr id="14" name="Text 12"/>
+          <p:cNvSpPr/>
+          <p:nvPr/>
+        </p:nvSpPr>
+        <p:spPr>
+          <a:xfrm>
+            <a:off x="7799832" y="2935224"/>
+            <a:ext cx="3145536" cy="256032"/>
+          </a:xfrm>
+          <a:prstGeom prst="rect">
+            <a:avLst/>
+          </a:prstGeom>
+          <a:noFill/>
+          <a:ln/>
+        </p:spPr>
+        <p:txBody>
+          <a:bodyPr wrap="square" lIns="0" tIns="0" rIns="0" bIns="0" rtlCol="0" anchor="ctr"/>
+          <a:lstStyle/>
+          <a:p>
+            <a:pPr indent="0" marL="0">
+              <a:buNone/>
+            </a:pPr>
+            <a:r>
+              <a:rPr lang="en-US" sz="1300" b="1" dirty="0">
+                <a:solidFill>
+                  <a:srgbClr val="0068B7"/>
+                </a:solidFill>
+                <a:latin typeface="Aptos" pitchFamily="34" charset="0"/>
+                <a:ea typeface="Aptos" pitchFamily="34" charset="-122"/>
+                <a:cs typeface="Aptos" pitchFamily="34" charset="-120"/>
+              </a:rPr>
+              <a:t>Concept checkpoints</a:t>
+            </a:r>
+            <a:endParaRPr lang="en-US" sz="1300" dirty="0"/>
+          </a:p>
+        </p:txBody>
+      </p:sp>
+      <p:sp>
+        <p:nvSpPr>
+          <p:cNvPr id="15" name="Text 13"/>
+          <p:cNvSpPr/>
+          <p:nvPr/>
+        </p:nvSpPr>
+        <p:spPr>
+          <a:xfrm>
+            <a:off x="7818120" y="3300984"/>
+            <a:ext cx="3090672" cy="877824"/>
+          </a:xfrm>
+          <a:prstGeom prst="rect">
+            <a:avLst/>
+          </a:prstGeom>
+          <a:noFill/>
+          <a:ln/>
+        </p:spPr>
+        <p:txBody>
+          <a:bodyPr wrap="square" lIns="254" tIns="254" rIns="254" bIns="254" rtlCol="0" anchor="t">
+            <a:normAutofit/>
+          </a:bodyPr>
+          <a:lstStyle/>
+          <a:p>
+            <a:r>
+              <a:rPr lang="en-US" sz="1380" dirty="0">
+                <a:solidFill>
+                  <a:srgbClr val="17364A"/>
+                </a:solidFill>
+                <a:latin typeface="Aptos" pitchFamily="34" charset="0"/>
+                <a:ea typeface="Aptos" pitchFamily="34" charset="-122"/>
+                <a:cs typeface="Aptos" pitchFamily="34" charset="-120"/>
+              </a:rPr>
+              <a:t>For example, an agency might state that it encourages low-risk AI uses that reduce.</a:t>
+            </a:r>
+            <a:endParaRPr lang="en-US" sz="1380" dirty="0"/>
+          </a:p>
+          <a:p>
+            <a:r>
+              <a:rPr lang="en-US" sz="1380" dirty="0">
+                <a:solidFill>
+                  <a:srgbClr val="17364A"/>
+                </a:solidFill>
+                <a:latin typeface="Aptos" pitchFamily="34" charset="0"/>
+                <a:ea typeface="Aptos" pitchFamily="34" charset="-122"/>
+                <a:cs typeface="Aptos" pitchFamily="34" charset="-120"/>
+              </a:rPr>
+              <a:t>It might state that it will consider moderate-risk uses involving operational data only.</a:t>
+            </a:r>
+            <a:endParaRPr lang="en-US" sz="1380" dirty="0"/>
+          </a:p>
+          <a:p>
+            <a:r>
+              <a:rPr lang="en-US" sz="1380" dirty="0">
+                <a:solidFill>
+                  <a:srgbClr val="17364A"/>
+                </a:solidFill>
+                <a:latin typeface="Aptos" pitchFamily="34" charset="0"/>
+                <a:ea typeface="Aptos" pitchFamily="34" charset="-122"/>
+                <a:cs typeface="Aptos" pitchFamily="34" charset="-120"/>
+              </a:rPr>
+              <a:t>It might state that it does not permit AI to make final public health enforcement,.</a:t>
+            </a:r>
+            <a:endParaRPr lang="en-US" sz="1380" dirty="0"/>
+          </a:p>
+        </p:txBody>
       </p:sp>
       <p:sp>
         <p:nvSpPr>
           <p:cNvPr id="16" name="Shape 14"/>
-          <p:cNvSpPr/>
-          <p:nvPr/>
-        </p:nvSpPr>
-        <p:spPr>
-          <a:xfrm>
-            <a:off x="9089136" y="3456432"/>
-            <a:ext cx="566928" cy="566928"/>
-          </a:xfrm>
-          <a:prstGeom prst="ellipse">
-            <a:avLst/>
-          </a:prstGeom>
-          <a:solidFill>
-            <a:srgbClr val="6A4CA3"/>
-          </a:solidFill>
-          <a:ln w="12700">
-            <a:solidFill>
-              <a:srgbClr val="6A4CA3"/>
-            </a:solidFill>
-            <a:prstDash val="solid"/>
-          </a:ln>
-        </p:spPr>
-      </p:sp>
-      <p:sp>
-        <p:nvSpPr>
-          <p:cNvPr id="17" name="Shape 15"/>
-          <p:cNvSpPr/>
-          <p:nvPr/>
-        </p:nvSpPr>
-        <p:spPr>
-          <a:xfrm>
-            <a:off x="8385048" y="3419856"/>
-            <a:ext cx="1975104" cy="0"/>
-          </a:xfrm>
-          <a:prstGeom prst="line">
-            <a:avLst/>
-          </a:prstGeom>
-          <a:noFill/>
-          <a:ln w="25400">
-            <a:solidFill>
-              <a:srgbClr val="8ABBD8"/>
-            </a:solidFill>
-            <a:prstDash val="solid"/>
-          </a:ln>
-        </p:spPr>
-      </p:sp>
-      <p:sp>
-        <p:nvSpPr>
-          <p:cNvPr id="18" name="Shape 16"/>
-          <p:cNvSpPr/>
-          <p:nvPr/>
-        </p:nvSpPr>
-        <p:spPr>
-          <a:xfrm>
-            <a:off x="8202168" y="3630168"/>
-            <a:ext cx="1170432" cy="118872"/>
-          </a:xfrm>
-          <a:prstGeom prst="line">
-            <a:avLst/>
-          </a:prstGeom>
-          <a:noFill/>
-          <a:ln w="25400">
-            <a:solidFill>
-              <a:srgbClr val="8ABBD8"/>
-            </a:solidFill>
-            <a:prstDash val="solid"/>
-          </a:ln>
-        </p:spPr>
-      </p:sp>
-      <p:sp>
-        <p:nvSpPr>
-          <p:cNvPr id="19" name="Shape 17"/>
-          <p:cNvSpPr/>
-          <p:nvPr/>
-        </p:nvSpPr>
-        <p:spPr>
-          <a:xfrm>
-            <a:off x="10543032" y="3630168"/>
-            <a:ext cx="-1170432" cy="118872"/>
-          </a:xfrm>
-          <a:prstGeom prst="line">
-            <a:avLst/>
-          </a:prstGeom>
-          <a:noFill/>
-          <a:ln w="25400">
-            <a:solidFill>
-              <a:srgbClr val="8ABBD8"/>
-            </a:solidFill>
-            <a:prstDash val="solid"/>
-          </a:ln>
-        </p:spPr>
-      </p:sp>
-      <p:sp>
-        <p:nvSpPr>
-          <p:cNvPr id="20" name="Text 18"/>
-          <p:cNvSpPr/>
-          <p:nvPr/>
-        </p:nvSpPr>
-        <p:spPr>
-          <a:xfrm>
-            <a:off x="7863840" y="4069080"/>
-            <a:ext cx="3017520" cy="164592"/>
-          </a:xfrm>
-          <a:prstGeom prst="rect">
-            <a:avLst/>
-          </a:prstGeom>
-          <a:noFill/>
-          <a:ln/>
-        </p:spPr>
-        <p:txBody>
-          <a:bodyPr wrap="square" lIns="0" tIns="0" rIns="0" bIns="0" rtlCol="0" anchor="ctr"/>
-          <a:lstStyle/>
-          <a:p>
-            <a:pPr algn="ctr" indent="0" marL="0">
-              <a:buNone/>
-            </a:pPr>
-            <a:r>
-              <a:rPr lang="en-US" sz="900" b="1" dirty="0">
-                <a:solidFill>
-                  <a:srgbClr val="003A63"/>
-                </a:solidFill>
-                <a:latin typeface="Aptos" pitchFamily="34" charset="0"/>
-                <a:ea typeface="Aptos" pitchFamily="34" charset="-122"/>
-                <a:cs typeface="Aptos" pitchFamily="34" charset="-120"/>
-              </a:rPr>
-              <a:t>Decision rights</a:t>
-            </a:r>
-            <a:endParaRPr lang="en-US" sz="900" dirty="0"/>
-          </a:p>
-        </p:txBody>
-      </p:sp>
-      <p:sp>
-        <p:nvSpPr>
-          <p:cNvPr id="21" name="Shape 19"/>
           <p:cNvSpPr/>
           <p:nvPr/>
         </p:nvSpPr>
@@ -3649,7 +3569,7 @@
       </p:sp>
       <p:sp>
         <p:nvSpPr>
-          <p:cNvPr id="22" name="Text 20"/>
+          <p:cNvPr id="17" name="Text 15"/>
           <p:cNvSpPr/>
           <p:nvPr/>
         </p:nvSpPr>
@@ -3688,7 +3608,7 @@
       </p:sp>
       <p:sp>
         <p:nvSpPr>
-          <p:cNvPr id="23" name="Text 21"/>
+          <p:cNvPr id="18" name="Text 16"/>
           <p:cNvSpPr/>
           <p:nvPr/>
         </p:nvSpPr>
@@ -4196,13 +4116,11 @@
             </a:avLst>
           </a:prstGeom>
           <a:solidFill>
-            <a:srgbClr val="FFFFFF">
-              <a:alpha val="88000"/>
-            </a:srgbClr>
+            <a:srgbClr val="FFFFFF"/>
           </a:solidFill>
           <a:ln w="12700">
             <a:solidFill>
-              <a:srgbClr val="D6E8F2"/>
+              <a:srgbClr val="B9D7E6"/>
             </a:solidFill>
             <a:prstDash val="solid"/>
           </a:ln>
@@ -4210,26 +4128,42 @@
       </p:sp>
       <p:sp>
         <p:nvSpPr>
-          <p:cNvPr id="14" name="Shape 12"/>
-          <p:cNvSpPr/>
-          <p:nvPr/>
-        </p:nvSpPr>
-        <p:spPr>
-          <a:xfrm>
-            <a:off x="8046720" y="3108960"/>
-            <a:ext cx="2651760" cy="896112"/>
-          </a:xfrm>
-          <a:prstGeom prst="arc">
-            <a:avLst/>
-          </a:prstGeom>
-          <a:noFill/>
-          <a:ln w="25400">
-            <a:solidFill>
-              <a:srgbClr val="0068B7"/>
-            </a:solidFill>
-            <a:prstDash val="solid"/>
-          </a:ln>
-        </p:spPr>
+          <p:cNvPr id="14" name="Text 12"/>
+          <p:cNvSpPr/>
+          <p:nvPr/>
+        </p:nvSpPr>
+        <p:spPr>
+          <a:xfrm>
+            <a:off x="7799832" y="2935224"/>
+            <a:ext cx="3145536" cy="256032"/>
+          </a:xfrm>
+          <a:prstGeom prst="rect">
+            <a:avLst/>
+          </a:prstGeom>
+          <a:noFill/>
+          <a:ln/>
+        </p:spPr>
+        <p:txBody>
+          <a:bodyPr wrap="square" lIns="0" tIns="0" rIns="0" bIns="0" rtlCol="0" anchor="ctr"/>
+          <a:lstStyle/>
+          <a:p>
+            <a:pPr indent="0" marL="0">
+              <a:buNone/>
+            </a:pPr>
+            <a:r>
+              <a:rPr lang="en-US" sz="1300" b="1" dirty="0">
+                <a:solidFill>
+                  <a:srgbClr val="0068B7"/>
+                </a:solidFill>
+                <a:latin typeface="Aptos" pitchFamily="34" charset="0"/>
+                <a:ea typeface="Aptos" pitchFamily="34" charset="-122"/>
+                <a:cs typeface="Aptos" pitchFamily="34" charset="-120"/>
+              </a:rPr>
+              <a:t>Concept checkpoints</a:t>
+            </a:r>
+            <a:endParaRPr lang="en-US" sz="1300" dirty="0"/>
+          </a:p>
+        </p:txBody>
       </p:sp>
       <p:sp>
         <p:nvSpPr>
@@ -4239,102 +4173,67 @@
         </p:nvSpPr>
         <p:spPr>
           <a:xfrm>
-            <a:off x="7909560" y="3099816"/>
-            <a:ext cx="2926080" cy="256032"/>
-          </a:xfrm>
-          <a:prstGeom prst="rect">
-            <a:avLst/>
-          </a:prstGeom>
-          <a:noFill/>
-          <a:ln/>
-        </p:spPr>
-        <p:txBody>
-          <a:bodyPr wrap="square" lIns="0" tIns="0" rIns="0" bIns="0" rtlCol="0" anchor="ctr"/>
-          <a:lstStyle/>
-          <a:p>
-            <a:pPr algn="ctr" indent="0" marL="0">
-              <a:buNone/>
-            </a:pPr>
-            <a:r>
-              <a:rPr lang="en-US" sz="1500" b="1" dirty="0">
-                <a:solidFill>
-                  <a:srgbClr val="003A63"/>
-                </a:solidFill>
-                <a:latin typeface="Aptos" pitchFamily="34" charset="0"/>
-                <a:ea typeface="Aptos" pitchFamily="34" charset="-122"/>
-                <a:cs typeface="Aptos" pitchFamily="34" charset="-120"/>
-              </a:rPr>
-              <a:t>Risk</a:t>
-            </a:r>
-            <a:endParaRPr lang="en-US" sz="1500" dirty="0"/>
+            <a:off x="7818120" y="3300984"/>
+            <a:ext cx="3090672" cy="877824"/>
+          </a:xfrm>
+          <a:prstGeom prst="rect">
+            <a:avLst/>
+          </a:prstGeom>
+          <a:noFill/>
+          <a:ln/>
+        </p:spPr>
+        <p:txBody>
+          <a:bodyPr wrap="square" lIns="254" tIns="254" rIns="254" bIns="254" rtlCol="0" anchor="t">
+            <a:normAutofit/>
+          </a:bodyPr>
+          <a:lstStyle/>
+          <a:p>
+            <a:r>
+              <a:rPr lang="en-US" sz="1380" dirty="0">
+                <a:solidFill>
+                  <a:srgbClr val="17364A"/>
+                </a:solidFill>
+                <a:latin typeface="Aptos" pitchFamily="34" charset="0"/>
+                <a:ea typeface="Aptos" pitchFamily="34" charset="-122"/>
+                <a:cs typeface="Aptos" pitchFamily="34" charset="-120"/>
+              </a:rPr>
+              <a:t>Another risk is risk appetite that ignores equity.</a:t>
+            </a:r>
+            <a:endParaRPr lang="en-US" sz="1380" dirty="0"/>
+          </a:p>
+          <a:p>
+            <a:r>
+              <a:rPr lang="en-US" sz="1380" dirty="0">
+                <a:solidFill>
+                  <a:srgbClr val="17364A"/>
+                </a:solidFill>
+                <a:latin typeface="Aptos" pitchFamily="34" charset="0"/>
+                <a:ea typeface="Aptos" pitchFamily="34" charset="-122"/>
+                <a:cs typeface="Aptos" pitchFamily="34" charset="-120"/>
+              </a:rPr>
+              <a:t>A tool may appear operationally useful while shifting burden to communities that are.</a:t>
+            </a:r>
+            <a:endParaRPr lang="en-US" sz="1380" dirty="0"/>
+          </a:p>
+          <a:p>
+            <a:r>
+              <a:rPr lang="en-US" sz="1380" dirty="0">
+                <a:solidFill>
+                  <a:srgbClr val="17364A"/>
+                </a:solidFill>
+                <a:latin typeface="Aptos" pitchFamily="34" charset="0"/>
+                <a:ea typeface="Aptos" pitchFamily="34" charset="-122"/>
+                <a:cs typeface="Aptos" pitchFamily="34" charset="-120"/>
+              </a:rPr>
+              <a:t>A guardrail is to require equity impact review for uses that affect prioritization,.</a:t>
+            </a:r>
+            <a:endParaRPr lang="en-US" sz="1380" dirty="0"/>
           </a:p>
         </p:txBody>
       </p:sp>
       <p:sp>
         <p:nvSpPr>
           <p:cNvPr id="16" name="Shape 14"/>
-          <p:cNvSpPr/>
-          <p:nvPr/>
-        </p:nvSpPr>
-        <p:spPr>
-          <a:xfrm>
-            <a:off x="8366760" y="3639312"/>
-            <a:ext cx="2011680" cy="0"/>
-          </a:xfrm>
-          <a:prstGeom prst="line">
-            <a:avLst/>
-          </a:prstGeom>
-          <a:noFill/>
-          <a:ln w="63500">
-            <a:solidFill>
-              <a:srgbClr val="2F8A28"/>
-            </a:solidFill>
-            <a:prstDash val="solid"/>
-          </a:ln>
-        </p:spPr>
-      </p:sp>
-      <p:sp>
-        <p:nvSpPr>
-          <p:cNvPr id="17" name="Text 15"/>
-          <p:cNvSpPr/>
-          <p:nvPr/>
-        </p:nvSpPr>
-        <p:spPr>
-          <a:xfrm>
-            <a:off x="7909560" y="3849624"/>
-            <a:ext cx="2926080" cy="164592"/>
-          </a:xfrm>
-          <a:prstGeom prst="rect">
-            <a:avLst/>
-          </a:prstGeom>
-          <a:noFill/>
-          <a:ln/>
-        </p:spPr>
-        <p:txBody>
-          <a:bodyPr wrap="square" lIns="0" tIns="0" rIns="0" bIns="0" rtlCol="0" anchor="ctr"/>
-          <a:lstStyle/>
-          <a:p>
-            <a:pPr algn="ctr" indent="0" marL="0">
-              <a:buNone/>
-            </a:pPr>
-            <a:r>
-              <a:rPr lang="en-US" sz="900" dirty="0">
-                <a:solidFill>
-                  <a:srgbClr val="003A63"/>
-                </a:solidFill>
-                <a:latin typeface="Aptos" pitchFamily="34" charset="0"/>
-                <a:ea typeface="Aptos" pitchFamily="34" charset="-122"/>
-                <a:cs typeface="Aptos" pitchFamily="34" charset="-120"/>
-              </a:rPr>
-              <a:t>Human review</a:t>
-            </a:r>
-            <a:endParaRPr lang="en-US" sz="900" dirty="0"/>
-          </a:p>
-        </p:txBody>
-      </p:sp>
-      <p:sp>
-        <p:nvSpPr>
-          <p:cNvPr id="18" name="Shape 16"/>
           <p:cNvSpPr/>
           <p:nvPr/>
         </p:nvSpPr>
@@ -4361,7 +4260,7 @@
       </p:sp>
       <p:sp>
         <p:nvSpPr>
-          <p:cNvPr id="19" name="Text 17"/>
+          <p:cNvPr id="17" name="Text 15"/>
           <p:cNvSpPr/>
           <p:nvPr/>
         </p:nvSpPr>
@@ -4400,7 +4299,7 @@
       </p:sp>
       <p:sp>
         <p:nvSpPr>
-          <p:cNvPr id="20" name="Text 18"/>
+          <p:cNvPr id="18" name="Text 16"/>
           <p:cNvSpPr/>
           <p:nvPr/>
         </p:nvSpPr>
@@ -4908,13 +4807,11 @@
             </a:avLst>
           </a:prstGeom>
           <a:solidFill>
-            <a:srgbClr val="FFFFFF">
-              <a:alpha val="88000"/>
-            </a:srgbClr>
+            <a:srgbClr val="FFFFFF"/>
           </a:solidFill>
           <a:ln w="12700">
             <a:solidFill>
-              <a:srgbClr val="D6E8F2"/>
+              <a:srgbClr val="B9D7E6"/>
             </a:solidFill>
             <a:prstDash val="solid"/>
           </a:ln>
@@ -4922,26 +4819,42 @@
       </p:sp>
       <p:sp>
         <p:nvSpPr>
-          <p:cNvPr id="14" name="Shape 12"/>
-          <p:cNvSpPr/>
-          <p:nvPr/>
-        </p:nvSpPr>
-        <p:spPr>
-          <a:xfrm>
-            <a:off x="8046720" y="3108960"/>
-            <a:ext cx="2651760" cy="896112"/>
-          </a:xfrm>
-          <a:prstGeom prst="arc">
-            <a:avLst/>
-          </a:prstGeom>
-          <a:noFill/>
-          <a:ln w="25400">
-            <a:solidFill>
-              <a:srgbClr val="0068B7"/>
-            </a:solidFill>
-            <a:prstDash val="solid"/>
-          </a:ln>
-        </p:spPr>
+          <p:cNvPr id="14" name="Text 12"/>
+          <p:cNvSpPr/>
+          <p:nvPr/>
+        </p:nvSpPr>
+        <p:spPr>
+          <a:xfrm>
+            <a:off x="7799832" y="2935224"/>
+            <a:ext cx="3145536" cy="256032"/>
+          </a:xfrm>
+          <a:prstGeom prst="rect">
+            <a:avLst/>
+          </a:prstGeom>
+          <a:noFill/>
+          <a:ln/>
+        </p:spPr>
+        <p:txBody>
+          <a:bodyPr wrap="square" lIns="0" tIns="0" rIns="0" bIns="0" rtlCol="0" anchor="ctr"/>
+          <a:lstStyle/>
+          <a:p>
+            <a:pPr indent="0" marL="0">
+              <a:buNone/>
+            </a:pPr>
+            <a:r>
+              <a:rPr lang="en-US" sz="1300" b="1" dirty="0">
+                <a:solidFill>
+                  <a:srgbClr val="0068B7"/>
+                </a:solidFill>
+                <a:latin typeface="Aptos" pitchFamily="34" charset="0"/>
+                <a:ea typeface="Aptos" pitchFamily="34" charset="-122"/>
+                <a:cs typeface="Aptos" pitchFamily="34" charset="-120"/>
+              </a:rPr>
+              <a:t>Concept checkpoints</a:t>
+            </a:r>
+            <a:endParaRPr lang="en-US" sz="1300" dirty="0"/>
+          </a:p>
+        </p:txBody>
       </p:sp>
       <p:sp>
         <p:nvSpPr>
@@ -4951,102 +4864,53 @@
         </p:nvSpPr>
         <p:spPr>
           <a:xfrm>
-            <a:off x="7909560" y="3099816"/>
-            <a:ext cx="2926080" cy="256032"/>
-          </a:xfrm>
-          <a:prstGeom prst="rect">
-            <a:avLst/>
-          </a:prstGeom>
-          <a:noFill/>
-          <a:ln/>
-        </p:spPr>
-        <p:txBody>
-          <a:bodyPr wrap="square" lIns="0" tIns="0" rIns="0" bIns="0" rtlCol="0" anchor="ctr"/>
-          <a:lstStyle/>
-          <a:p>
-            <a:pPr algn="ctr" indent="0" marL="0">
-              <a:buNone/>
-            </a:pPr>
-            <a:r>
-              <a:rPr lang="en-US" sz="1500" b="1" dirty="0">
-                <a:solidFill>
-                  <a:srgbClr val="003A63"/>
-                </a:solidFill>
-                <a:latin typeface="Aptos" pitchFamily="34" charset="0"/>
-                <a:ea typeface="Aptos" pitchFamily="34" charset="-122"/>
-                <a:cs typeface="Aptos" pitchFamily="34" charset="-120"/>
-              </a:rPr>
-              <a:t>Risk</a:t>
-            </a:r>
-            <a:endParaRPr lang="en-US" sz="1500" dirty="0"/>
+            <a:off x="7818120" y="3300984"/>
+            <a:ext cx="3090672" cy="877824"/>
+          </a:xfrm>
+          <a:prstGeom prst="rect">
+            <a:avLst/>
+          </a:prstGeom>
+          <a:noFill/>
+          <a:ln/>
+        </p:spPr>
+        <p:txBody>
+          <a:bodyPr wrap="square" lIns="254" tIns="254" rIns="254" bIns="254" rtlCol="0" anchor="t">
+            <a:normAutofit/>
+          </a:bodyPr>
+          <a:lstStyle/>
+          <a:p>
+            <a:r>
+              <a:rPr lang="en-US" sz="1380" dirty="0">
+                <a:solidFill>
+                  <a:srgbClr val="17364A"/>
+                </a:solidFill>
+                <a:latin typeface="Aptos" pitchFamily="34" charset="0"/>
+                <a:ea typeface="Aptos" pitchFamily="34" charset="-122"/>
+                <a:cs typeface="Aptos" pitchFamily="34" charset="-120"/>
+              </a:rPr>
+              <a:t>Agentic tools that can take system actions require strict limits, stop authority, and.</a:t>
+            </a:r>
+            <a:endParaRPr lang="en-US" sz="1380" dirty="0"/>
+          </a:p>
+          <a:p>
+            <a:r>
+              <a:rPr lang="en-US" sz="1380" dirty="0">
+                <a:solidFill>
+                  <a:srgbClr val="17364A"/>
+                </a:solidFill>
+                <a:latin typeface="Aptos" pitchFamily="34" charset="0"/>
+                <a:ea typeface="Aptos" pitchFamily="34" charset="-122"/>
+                <a:cs typeface="Aptos" pitchFamily="34" charset="-120"/>
+              </a:rPr>
+              <a:t>Risk appetite helps define these boundaries in advance.</a:t>
+            </a:r>
+            <a:endParaRPr lang="en-US" sz="1380" dirty="0"/>
           </a:p>
         </p:txBody>
       </p:sp>
       <p:sp>
         <p:nvSpPr>
           <p:cNvPr id="16" name="Shape 14"/>
-          <p:cNvSpPr/>
-          <p:nvPr/>
-        </p:nvSpPr>
-        <p:spPr>
-          <a:xfrm>
-            <a:off x="8366760" y="3639312"/>
-            <a:ext cx="2011680" cy="0"/>
-          </a:xfrm>
-          <a:prstGeom prst="line">
-            <a:avLst/>
-          </a:prstGeom>
-          <a:noFill/>
-          <a:ln w="63500">
-            <a:solidFill>
-              <a:srgbClr val="2F8A28"/>
-            </a:solidFill>
-            <a:prstDash val="solid"/>
-          </a:ln>
-        </p:spPr>
-      </p:sp>
-      <p:sp>
-        <p:nvSpPr>
-          <p:cNvPr id="17" name="Text 15"/>
-          <p:cNvSpPr/>
-          <p:nvPr/>
-        </p:nvSpPr>
-        <p:spPr>
-          <a:xfrm>
-            <a:off x="7909560" y="3849624"/>
-            <a:ext cx="2926080" cy="164592"/>
-          </a:xfrm>
-          <a:prstGeom prst="rect">
-            <a:avLst/>
-          </a:prstGeom>
-          <a:noFill/>
-          <a:ln/>
-        </p:spPr>
-        <p:txBody>
-          <a:bodyPr wrap="square" lIns="0" tIns="0" rIns="0" bIns="0" rtlCol="0" anchor="ctr"/>
-          <a:lstStyle/>
-          <a:p>
-            <a:pPr algn="ctr" indent="0" marL="0">
-              <a:buNone/>
-            </a:pPr>
-            <a:r>
-              <a:rPr lang="en-US" sz="900" dirty="0">
-                <a:solidFill>
-                  <a:srgbClr val="003A63"/>
-                </a:solidFill>
-                <a:latin typeface="Aptos" pitchFamily="34" charset="0"/>
-                <a:ea typeface="Aptos" pitchFamily="34" charset="-122"/>
-                <a:cs typeface="Aptos" pitchFamily="34" charset="-120"/>
-              </a:rPr>
-              <a:t>Human review</a:t>
-            </a:r>
-            <a:endParaRPr lang="en-US" sz="900" dirty="0"/>
-          </a:p>
-        </p:txBody>
-      </p:sp>
-      <p:sp>
-        <p:nvSpPr>
-          <p:cNvPr id="18" name="Shape 16"/>
           <p:cNvSpPr/>
           <p:nvPr/>
         </p:nvSpPr>
@@ -5073,7 +4937,7 @@
       </p:sp>
       <p:sp>
         <p:nvSpPr>
-          <p:cNvPr id="19" name="Text 17"/>
+          <p:cNvPr id="17" name="Text 15"/>
           <p:cNvSpPr/>
           <p:nvPr/>
         </p:nvSpPr>
@@ -5112,7 +4976,7 @@
       </p:sp>
       <p:sp>
         <p:nvSpPr>
-          <p:cNvPr id="20" name="Text 18"/>
+          <p:cNvPr id="18" name="Text 16"/>
           <p:cNvSpPr/>
           <p:nvPr/>
         </p:nvSpPr>
@@ -5620,13 +5484,11 @@
             </a:avLst>
           </a:prstGeom>
           <a:solidFill>
-            <a:srgbClr val="FFFFFF">
-              <a:alpha val="88000"/>
-            </a:srgbClr>
+            <a:srgbClr val="FFFFFF"/>
           </a:solidFill>
           <a:ln w="12700">
             <a:solidFill>
-              <a:srgbClr val="D6E8F2"/>
+              <a:srgbClr val="B9D7E6"/>
             </a:solidFill>
             <a:prstDash val="solid"/>
           </a:ln>
@@ -5634,26 +5496,42 @@
       </p:sp>
       <p:sp>
         <p:nvSpPr>
-          <p:cNvPr id="14" name="Shape 12"/>
-          <p:cNvSpPr/>
-          <p:nvPr/>
-        </p:nvSpPr>
-        <p:spPr>
-          <a:xfrm>
-            <a:off x="8046720" y="3108960"/>
-            <a:ext cx="2651760" cy="896112"/>
-          </a:xfrm>
-          <a:prstGeom prst="arc">
-            <a:avLst/>
-          </a:prstGeom>
-          <a:noFill/>
-          <a:ln w="25400">
-            <a:solidFill>
-              <a:srgbClr val="0068B7"/>
-            </a:solidFill>
-            <a:prstDash val="solid"/>
-          </a:ln>
-        </p:spPr>
+          <p:cNvPr id="14" name="Text 12"/>
+          <p:cNvSpPr/>
+          <p:nvPr/>
+        </p:nvSpPr>
+        <p:spPr>
+          <a:xfrm>
+            <a:off x="7799832" y="2935224"/>
+            <a:ext cx="3145536" cy="256032"/>
+          </a:xfrm>
+          <a:prstGeom prst="rect">
+            <a:avLst/>
+          </a:prstGeom>
+          <a:noFill/>
+          <a:ln/>
+        </p:spPr>
+        <p:txBody>
+          <a:bodyPr wrap="square" lIns="0" tIns="0" rIns="0" bIns="0" rtlCol="0" anchor="ctr"/>
+          <a:lstStyle/>
+          <a:p>
+            <a:pPr indent="0" marL="0">
+              <a:buNone/>
+            </a:pPr>
+            <a:r>
+              <a:rPr lang="en-US" sz="1300" b="1" dirty="0">
+                <a:solidFill>
+                  <a:srgbClr val="0068B7"/>
+                </a:solidFill>
+                <a:latin typeface="Aptos" pitchFamily="34" charset="0"/>
+                <a:ea typeface="Aptos" pitchFamily="34" charset="-122"/>
+                <a:cs typeface="Aptos" pitchFamily="34" charset="-120"/>
+              </a:rPr>
+              <a:t>Concept checkpoints</a:t>
+            </a:r>
+            <a:endParaRPr lang="en-US" sz="1300" dirty="0"/>
+          </a:p>
+        </p:txBody>
       </p:sp>
       <p:sp>
         <p:nvSpPr>
@@ -5663,102 +5541,67 @@
         </p:nvSpPr>
         <p:spPr>
           <a:xfrm>
-            <a:off x="7909560" y="3099816"/>
-            <a:ext cx="2926080" cy="256032"/>
-          </a:xfrm>
-          <a:prstGeom prst="rect">
-            <a:avLst/>
-          </a:prstGeom>
-          <a:noFill/>
-          <a:ln/>
-        </p:spPr>
-        <p:txBody>
-          <a:bodyPr wrap="square" lIns="0" tIns="0" rIns="0" bIns="0" rtlCol="0" anchor="ctr"/>
-          <a:lstStyle/>
-          <a:p>
-            <a:pPr algn="ctr" indent="0" marL="0">
-              <a:buNone/>
-            </a:pPr>
-            <a:r>
-              <a:rPr lang="en-US" sz="1500" b="1" dirty="0">
-                <a:solidFill>
-                  <a:srgbClr val="003A63"/>
-                </a:solidFill>
-                <a:latin typeface="Aptos" pitchFamily="34" charset="0"/>
-                <a:ea typeface="Aptos" pitchFamily="34" charset="-122"/>
-                <a:cs typeface="Aptos" pitchFamily="34" charset="-120"/>
-              </a:rPr>
-              <a:t>Risk</a:t>
-            </a:r>
-            <a:endParaRPr lang="en-US" sz="1500" dirty="0"/>
+            <a:off x="7818120" y="3300984"/>
+            <a:ext cx="3090672" cy="877824"/>
+          </a:xfrm>
+          <a:prstGeom prst="rect">
+            <a:avLst/>
+          </a:prstGeom>
+          <a:noFill/>
+          <a:ln/>
+        </p:spPr>
+        <p:txBody>
+          <a:bodyPr wrap="square" lIns="254" tIns="254" rIns="254" bIns="254" rtlCol="0" anchor="t">
+            <a:normAutofit/>
+          </a:bodyPr>
+          <a:lstStyle/>
+          <a:p>
+            <a:r>
+              <a:rPr lang="en-US" sz="1380" dirty="0">
+                <a:solidFill>
+                  <a:srgbClr val="17364A"/>
+                </a:solidFill>
+                <a:latin typeface="Aptos" pitchFamily="34" charset="0"/>
+                <a:ea typeface="Aptos" pitchFamily="34" charset="-122"/>
+                <a:cs typeface="Aptos" pitchFamily="34" charset="-120"/>
+              </a:rPr>
+              <a:t>Which current or proposed AI use case in your agency raises this leadership or governance.</a:t>
+            </a:r>
+            <a:endParaRPr lang="en-US" sz="1380" dirty="0"/>
+          </a:p>
+          <a:p>
+            <a:r>
+              <a:rPr lang="en-US" sz="1380" dirty="0">
+                <a:solidFill>
+                  <a:srgbClr val="17364A"/>
+                </a:solidFill>
+                <a:latin typeface="Aptos" pitchFamily="34" charset="0"/>
+                <a:ea typeface="Aptos" pitchFamily="34" charset="-122"/>
+                <a:cs typeface="Aptos" pitchFamily="34" charset="-120"/>
+              </a:rPr>
+              <a:t>Who currently has authority to make decisions about this issue, and is that authority.</a:t>
+            </a:r>
+            <a:endParaRPr lang="en-US" sz="1380" dirty="0"/>
+          </a:p>
+          <a:p>
+            <a:r>
+              <a:rPr lang="en-US" sz="1380" dirty="0">
+                <a:solidFill>
+                  <a:srgbClr val="17364A"/>
+                </a:solidFill>
+                <a:latin typeface="Aptos" pitchFamily="34" charset="0"/>
+                <a:ea typeface="Aptos" pitchFamily="34" charset="-122"/>
+                <a:cs typeface="Aptos" pitchFamily="34" charset="-120"/>
+              </a:rPr>
+              <a:t>What evidence would governance or leadership need before approving the use case?</a:t>
+            </a:r>
+            <a:endParaRPr lang="en-US" sz="1380" dirty="0"/>
           </a:p>
         </p:txBody>
       </p:sp>
       <p:sp>
         <p:nvSpPr>
           <p:cNvPr id="16" name="Shape 14"/>
-          <p:cNvSpPr/>
-          <p:nvPr/>
-        </p:nvSpPr>
-        <p:spPr>
-          <a:xfrm>
-            <a:off x="8366760" y="3639312"/>
-            <a:ext cx="2011680" cy="0"/>
-          </a:xfrm>
-          <a:prstGeom prst="line">
-            <a:avLst/>
-          </a:prstGeom>
-          <a:noFill/>
-          <a:ln w="63500">
-            <a:solidFill>
-              <a:srgbClr val="2F8A28"/>
-            </a:solidFill>
-            <a:prstDash val="solid"/>
-          </a:ln>
-        </p:spPr>
-      </p:sp>
-      <p:sp>
-        <p:nvSpPr>
-          <p:cNvPr id="17" name="Text 15"/>
-          <p:cNvSpPr/>
-          <p:nvPr/>
-        </p:nvSpPr>
-        <p:spPr>
-          <a:xfrm>
-            <a:off x="7909560" y="3849624"/>
-            <a:ext cx="2926080" cy="164592"/>
-          </a:xfrm>
-          <a:prstGeom prst="rect">
-            <a:avLst/>
-          </a:prstGeom>
-          <a:noFill/>
-          <a:ln/>
-        </p:spPr>
-        <p:txBody>
-          <a:bodyPr wrap="square" lIns="0" tIns="0" rIns="0" bIns="0" rtlCol="0" anchor="ctr"/>
-          <a:lstStyle/>
-          <a:p>
-            <a:pPr algn="ctr" indent="0" marL="0">
-              <a:buNone/>
-            </a:pPr>
-            <a:r>
-              <a:rPr lang="en-US" sz="900" dirty="0">
-                <a:solidFill>
-                  <a:srgbClr val="003A63"/>
-                </a:solidFill>
-                <a:latin typeface="Aptos" pitchFamily="34" charset="0"/>
-                <a:ea typeface="Aptos" pitchFamily="34" charset="-122"/>
-                <a:cs typeface="Aptos" pitchFamily="34" charset="-120"/>
-              </a:rPr>
-              <a:t>Human review</a:t>
-            </a:r>
-            <a:endParaRPr lang="en-US" sz="900" dirty="0"/>
-          </a:p>
-        </p:txBody>
-      </p:sp>
-      <p:sp>
-        <p:nvSpPr>
-          <p:cNvPr id="18" name="Shape 16"/>
           <p:cNvSpPr/>
           <p:nvPr/>
         </p:nvSpPr>
@@ -5785,7 +5628,7 @@
       </p:sp>
       <p:sp>
         <p:nvSpPr>
-          <p:cNvPr id="19" name="Text 17"/>
+          <p:cNvPr id="17" name="Text 15"/>
           <p:cNvSpPr/>
           <p:nvPr/>
         </p:nvSpPr>
@@ -5824,7 +5667,7 @@
       </p:sp>
       <p:sp>
         <p:nvSpPr>
-          <p:cNvPr id="20" name="Text 18"/>
+          <p:cNvPr id="18" name="Text 16"/>
           <p:cNvSpPr/>
           <p:nvPr/>
         </p:nvSpPr>
@@ -6318,13 +6161,11 @@
             </a:avLst>
           </a:prstGeom>
           <a:solidFill>
-            <a:srgbClr val="FFFFFF">
-              <a:alpha val="88000"/>
-            </a:srgbClr>
+            <a:srgbClr val="FFFFFF"/>
           </a:solidFill>
           <a:ln w="12700">
             <a:solidFill>
-              <a:srgbClr val="D6E8F2"/>
+              <a:srgbClr val="B9D7E6"/>
             </a:solidFill>
             <a:prstDash val="solid"/>
           </a:ln>
@@ -6332,26 +6173,42 @@
       </p:sp>
       <p:sp>
         <p:nvSpPr>
-          <p:cNvPr id="14" name="Shape 12"/>
-          <p:cNvSpPr/>
-          <p:nvPr/>
-        </p:nvSpPr>
-        <p:spPr>
-          <a:xfrm>
-            <a:off x="8046720" y="3108960"/>
-            <a:ext cx="2651760" cy="896112"/>
-          </a:xfrm>
-          <a:prstGeom prst="arc">
-            <a:avLst/>
-          </a:prstGeom>
-          <a:noFill/>
-          <a:ln w="25400">
-            <a:solidFill>
-              <a:srgbClr val="0068B7"/>
-            </a:solidFill>
-            <a:prstDash val="solid"/>
-          </a:ln>
-        </p:spPr>
+          <p:cNvPr id="14" name="Text 12"/>
+          <p:cNvSpPr/>
+          <p:nvPr/>
+        </p:nvSpPr>
+        <p:spPr>
+          <a:xfrm>
+            <a:off x="7799832" y="2935224"/>
+            <a:ext cx="3145536" cy="256032"/>
+          </a:xfrm>
+          <a:prstGeom prst="rect">
+            <a:avLst/>
+          </a:prstGeom>
+          <a:noFill/>
+          <a:ln/>
+        </p:spPr>
+        <p:txBody>
+          <a:bodyPr wrap="square" lIns="0" tIns="0" rIns="0" bIns="0" rtlCol="0" anchor="ctr"/>
+          <a:lstStyle/>
+          <a:p>
+            <a:pPr indent="0" marL="0">
+              <a:buNone/>
+            </a:pPr>
+            <a:r>
+              <a:rPr lang="en-US" sz="1300" b="1" dirty="0">
+                <a:solidFill>
+                  <a:srgbClr val="0068B7"/>
+                </a:solidFill>
+                <a:latin typeface="Aptos" pitchFamily="34" charset="0"/>
+                <a:ea typeface="Aptos" pitchFamily="34" charset="-122"/>
+                <a:cs typeface="Aptos" pitchFamily="34" charset="-120"/>
+              </a:rPr>
+              <a:t>Concept checkpoints</a:t>
+            </a:r>
+            <a:endParaRPr lang="en-US" sz="1300" dirty="0"/>
+          </a:p>
+        </p:txBody>
       </p:sp>
       <p:sp>
         <p:nvSpPr>
@@ -6361,102 +6218,53 @@
         </p:nvSpPr>
         <p:spPr>
           <a:xfrm>
-            <a:off x="7909560" y="3099816"/>
-            <a:ext cx="2926080" cy="256032"/>
-          </a:xfrm>
-          <a:prstGeom prst="rect">
-            <a:avLst/>
-          </a:prstGeom>
-          <a:noFill/>
-          <a:ln/>
-        </p:spPr>
-        <p:txBody>
-          <a:bodyPr wrap="square" lIns="0" tIns="0" rIns="0" bIns="0" rtlCol="0" anchor="ctr"/>
-          <a:lstStyle/>
-          <a:p>
-            <a:pPr algn="ctr" indent="0" marL="0">
-              <a:buNone/>
-            </a:pPr>
-            <a:r>
-              <a:rPr lang="en-US" sz="1500" b="1" dirty="0">
-                <a:solidFill>
-                  <a:srgbClr val="003A63"/>
-                </a:solidFill>
-                <a:latin typeface="Aptos" pitchFamily="34" charset="0"/>
-                <a:ea typeface="Aptos" pitchFamily="34" charset="-122"/>
-                <a:cs typeface="Aptos" pitchFamily="34" charset="-120"/>
-              </a:rPr>
-              <a:t>Risk</a:t>
-            </a:r>
-            <a:endParaRPr lang="en-US" sz="1500" dirty="0"/>
+            <a:off x="7818120" y="3300984"/>
+            <a:ext cx="3090672" cy="877824"/>
+          </a:xfrm>
+          <a:prstGeom prst="rect">
+            <a:avLst/>
+          </a:prstGeom>
+          <a:noFill/>
+          <a:ln/>
+        </p:spPr>
+        <p:txBody>
+          <a:bodyPr wrap="square" lIns="254" tIns="254" rIns="254" bIns="254" rtlCol="0" anchor="t">
+            <a:normAutofit/>
+          </a:bodyPr>
+          <a:lstStyle/>
+          <a:p>
+            <a:r>
+              <a:rPr lang="en-US" sz="1380" dirty="0">
+                <a:solidFill>
+                  <a:srgbClr val="17364A"/>
+                </a:solidFill>
+                <a:latin typeface="Aptos" pitchFamily="34" charset="0"/>
+                <a:ea typeface="Aptos" pitchFamily="34" charset="-122"/>
+                <a:cs typeface="Aptos" pitchFamily="34" charset="-120"/>
+              </a:rPr>
+              <a:t>Which staff, partners, or communities would be affected if this issue were handled poorly?</a:t>
+            </a:r>
+            <a:endParaRPr lang="en-US" sz="1380" dirty="0"/>
+          </a:p>
+          <a:p>
+            <a:r>
+              <a:rPr lang="en-US" sz="1380" dirty="0">
+                <a:solidFill>
+                  <a:srgbClr val="17364A"/>
+                </a:solidFill>
+                <a:latin typeface="Aptos" pitchFamily="34" charset="0"/>
+                <a:ea typeface="Aptos" pitchFamily="34" charset="-122"/>
+                <a:cs typeface="Aptos" pitchFamily="34" charset="-120"/>
+              </a:rPr>
+              <a:t>What policy, process, or artifact should be created or updated after this module?</a:t>
+            </a:r>
+            <a:endParaRPr lang="en-US" sz="1380" dirty="0"/>
           </a:p>
         </p:txBody>
       </p:sp>
       <p:sp>
         <p:nvSpPr>
           <p:cNvPr id="16" name="Shape 14"/>
-          <p:cNvSpPr/>
-          <p:nvPr/>
-        </p:nvSpPr>
-        <p:spPr>
-          <a:xfrm>
-            <a:off x="8366760" y="3639312"/>
-            <a:ext cx="2011680" cy="0"/>
-          </a:xfrm>
-          <a:prstGeom prst="line">
-            <a:avLst/>
-          </a:prstGeom>
-          <a:noFill/>
-          <a:ln w="63500">
-            <a:solidFill>
-              <a:srgbClr val="2F8A28"/>
-            </a:solidFill>
-            <a:prstDash val="solid"/>
-          </a:ln>
-        </p:spPr>
-      </p:sp>
-      <p:sp>
-        <p:nvSpPr>
-          <p:cNvPr id="17" name="Text 15"/>
-          <p:cNvSpPr/>
-          <p:nvPr/>
-        </p:nvSpPr>
-        <p:spPr>
-          <a:xfrm>
-            <a:off x="7909560" y="3849624"/>
-            <a:ext cx="2926080" cy="164592"/>
-          </a:xfrm>
-          <a:prstGeom prst="rect">
-            <a:avLst/>
-          </a:prstGeom>
-          <a:noFill/>
-          <a:ln/>
-        </p:spPr>
-        <p:txBody>
-          <a:bodyPr wrap="square" lIns="0" tIns="0" rIns="0" bIns="0" rtlCol="0" anchor="ctr"/>
-          <a:lstStyle/>
-          <a:p>
-            <a:pPr algn="ctr" indent="0" marL="0">
-              <a:buNone/>
-            </a:pPr>
-            <a:r>
-              <a:rPr lang="en-US" sz="900" dirty="0">
-                <a:solidFill>
-                  <a:srgbClr val="003A63"/>
-                </a:solidFill>
-                <a:latin typeface="Aptos" pitchFamily="34" charset="0"/>
-                <a:ea typeface="Aptos" pitchFamily="34" charset="-122"/>
-                <a:cs typeface="Aptos" pitchFamily="34" charset="-120"/>
-              </a:rPr>
-              <a:t>Human review</a:t>
-            </a:r>
-            <a:endParaRPr lang="en-US" sz="900" dirty="0"/>
-          </a:p>
-        </p:txBody>
-      </p:sp>
-      <p:sp>
-        <p:nvSpPr>
-          <p:cNvPr id="18" name="Shape 16"/>
           <p:cNvSpPr/>
           <p:nvPr/>
         </p:nvSpPr>
@@ -6483,7 +6291,7 @@
       </p:sp>
       <p:sp>
         <p:nvSpPr>
-          <p:cNvPr id="19" name="Text 17"/>
+          <p:cNvPr id="17" name="Text 15"/>
           <p:cNvSpPr/>
           <p:nvPr/>
         </p:nvSpPr>
@@ -6522,7 +6330,7 @@
       </p:sp>
       <p:sp>
         <p:nvSpPr>
-          <p:cNvPr id="20" name="Text 18"/>
+          <p:cNvPr id="18" name="Text 16"/>
           <p:cNvSpPr/>
           <p:nvPr/>
         </p:nvSpPr>
@@ -7002,13 +6810,11 @@
             </a:avLst>
           </a:prstGeom>
           <a:solidFill>
-            <a:srgbClr val="FFFFFF">
-              <a:alpha val="88000"/>
-            </a:srgbClr>
+            <a:srgbClr val="FFFFFF"/>
           </a:solidFill>
           <a:ln w="12700">
             <a:solidFill>
-              <a:srgbClr val="D6E8F2"/>
+              <a:srgbClr val="B9D7E6"/>
             </a:solidFill>
             <a:prstDash val="solid"/>
           </a:ln>
@@ -7016,26 +6822,42 @@
       </p:sp>
       <p:sp>
         <p:nvSpPr>
-          <p:cNvPr id="14" name="Shape 12"/>
-          <p:cNvSpPr/>
-          <p:nvPr/>
-        </p:nvSpPr>
-        <p:spPr>
-          <a:xfrm>
-            <a:off x="8046720" y="3108960"/>
-            <a:ext cx="2651760" cy="896112"/>
-          </a:xfrm>
-          <a:prstGeom prst="arc">
-            <a:avLst/>
-          </a:prstGeom>
-          <a:noFill/>
-          <a:ln w="25400">
-            <a:solidFill>
-              <a:srgbClr val="0068B7"/>
-            </a:solidFill>
-            <a:prstDash val="solid"/>
-          </a:ln>
-        </p:spPr>
+          <p:cNvPr id="14" name="Text 12"/>
+          <p:cNvSpPr/>
+          <p:nvPr/>
+        </p:nvSpPr>
+        <p:spPr>
+          <a:xfrm>
+            <a:off x="7799832" y="2935224"/>
+            <a:ext cx="3145536" cy="256032"/>
+          </a:xfrm>
+          <a:prstGeom prst="rect">
+            <a:avLst/>
+          </a:prstGeom>
+          <a:noFill/>
+          <a:ln/>
+        </p:spPr>
+        <p:txBody>
+          <a:bodyPr wrap="square" lIns="0" tIns="0" rIns="0" bIns="0" rtlCol="0" anchor="ctr"/>
+          <a:lstStyle/>
+          <a:p>
+            <a:pPr indent="0" marL="0">
+              <a:buNone/>
+            </a:pPr>
+            <a:r>
+              <a:rPr lang="en-US" sz="1300" b="1" dirty="0">
+                <a:solidFill>
+                  <a:srgbClr val="0068B7"/>
+                </a:solidFill>
+                <a:latin typeface="Aptos" pitchFamily="34" charset="0"/>
+                <a:ea typeface="Aptos" pitchFamily="34" charset="-122"/>
+                <a:cs typeface="Aptos" pitchFamily="34" charset="-120"/>
+              </a:rPr>
+              <a:t>Concept checkpoints</a:t>
+            </a:r>
+            <a:endParaRPr lang="en-US" sz="1300" dirty="0"/>
+          </a:p>
+        </p:txBody>
       </p:sp>
       <p:sp>
         <p:nvSpPr>
@@ -7045,102 +6867,39 @@
         </p:nvSpPr>
         <p:spPr>
           <a:xfrm>
-            <a:off x="7909560" y="3099816"/>
-            <a:ext cx="2926080" cy="256032"/>
-          </a:xfrm>
-          <a:prstGeom prst="rect">
-            <a:avLst/>
-          </a:prstGeom>
-          <a:noFill/>
-          <a:ln/>
-        </p:spPr>
-        <p:txBody>
-          <a:bodyPr wrap="square" lIns="0" tIns="0" rIns="0" bIns="0" rtlCol="0" anchor="ctr"/>
-          <a:lstStyle/>
-          <a:p>
-            <a:pPr algn="ctr" indent="0" marL="0">
-              <a:buNone/>
-            </a:pPr>
-            <a:r>
-              <a:rPr lang="en-US" sz="1500" b="1" dirty="0">
-                <a:solidFill>
-                  <a:srgbClr val="003A63"/>
-                </a:solidFill>
-                <a:latin typeface="Aptos" pitchFamily="34" charset="0"/>
-                <a:ea typeface="Aptos" pitchFamily="34" charset="-122"/>
-                <a:cs typeface="Aptos" pitchFamily="34" charset="-120"/>
-              </a:rPr>
-              <a:t>Risk</a:t>
-            </a:r>
-            <a:endParaRPr lang="en-US" sz="1500" dirty="0"/>
+            <a:off x="7818120" y="3300984"/>
+            <a:ext cx="3090672" cy="877824"/>
+          </a:xfrm>
+          <a:prstGeom prst="rect">
+            <a:avLst/>
+          </a:prstGeom>
+          <a:noFill/>
+          <a:ln/>
+        </p:spPr>
+        <p:txBody>
+          <a:bodyPr wrap="square" lIns="254" tIns="254" rIns="254" bIns="254" rtlCol="0" anchor="t">
+            <a:normAutofit/>
+          </a:bodyPr>
+          <a:lstStyle/>
+          <a:p>
+            <a:r>
+              <a:rPr lang="en-US" sz="1380" dirty="0">
+                <a:solidFill>
+                  <a:srgbClr val="17364A"/>
+                </a:solidFill>
+                <a:latin typeface="Aptos" pitchFamily="34" charset="0"/>
+                <a:ea typeface="Aptos" pitchFamily="34" charset="-122"/>
+                <a:cs typeface="Aptos" pitchFamily="34" charset="-120"/>
+              </a:rPr>
+              <a:t>Draft a risk appetite statement and a risk tolerance table for at least four AI use.</a:t>
+            </a:r>
+            <a:endParaRPr lang="en-US" sz="1380" dirty="0"/>
           </a:p>
         </p:txBody>
       </p:sp>
       <p:sp>
         <p:nvSpPr>
           <p:cNvPr id="16" name="Shape 14"/>
-          <p:cNvSpPr/>
-          <p:nvPr/>
-        </p:nvSpPr>
-        <p:spPr>
-          <a:xfrm>
-            <a:off x="8366760" y="3639312"/>
-            <a:ext cx="2011680" cy="0"/>
-          </a:xfrm>
-          <a:prstGeom prst="line">
-            <a:avLst/>
-          </a:prstGeom>
-          <a:noFill/>
-          <a:ln w="63500">
-            <a:solidFill>
-              <a:srgbClr val="2F8A28"/>
-            </a:solidFill>
-            <a:prstDash val="solid"/>
-          </a:ln>
-        </p:spPr>
-      </p:sp>
-      <p:sp>
-        <p:nvSpPr>
-          <p:cNvPr id="17" name="Text 15"/>
-          <p:cNvSpPr/>
-          <p:nvPr/>
-        </p:nvSpPr>
-        <p:spPr>
-          <a:xfrm>
-            <a:off x="7909560" y="3849624"/>
-            <a:ext cx="2926080" cy="164592"/>
-          </a:xfrm>
-          <a:prstGeom prst="rect">
-            <a:avLst/>
-          </a:prstGeom>
-          <a:noFill/>
-          <a:ln/>
-        </p:spPr>
-        <p:txBody>
-          <a:bodyPr wrap="square" lIns="0" tIns="0" rIns="0" bIns="0" rtlCol="0" anchor="ctr"/>
-          <a:lstStyle/>
-          <a:p>
-            <a:pPr algn="ctr" indent="0" marL="0">
-              <a:buNone/>
-            </a:pPr>
-            <a:r>
-              <a:rPr lang="en-US" sz="900" dirty="0">
-                <a:solidFill>
-                  <a:srgbClr val="003A63"/>
-                </a:solidFill>
-                <a:latin typeface="Aptos" pitchFamily="34" charset="0"/>
-                <a:ea typeface="Aptos" pitchFamily="34" charset="-122"/>
-                <a:cs typeface="Aptos" pitchFamily="34" charset="-120"/>
-              </a:rPr>
-              <a:t>Human review</a:t>
-            </a:r>
-            <a:endParaRPr lang="en-US" sz="900" dirty="0"/>
-          </a:p>
-        </p:txBody>
-      </p:sp>
-      <p:sp>
-        <p:nvSpPr>
-          <p:cNvPr id="18" name="Shape 16"/>
           <p:cNvSpPr/>
           <p:nvPr/>
         </p:nvSpPr>
@@ -7167,7 +6926,7 @@
       </p:sp>
       <p:sp>
         <p:nvSpPr>
-          <p:cNvPr id="19" name="Text 17"/>
+          <p:cNvPr id="17" name="Text 15"/>
           <p:cNvSpPr/>
           <p:nvPr/>
         </p:nvSpPr>
@@ -7206,7 +6965,7 @@
       </p:sp>
       <p:sp>
         <p:nvSpPr>
-          <p:cNvPr id="20" name="Text 18"/>
+          <p:cNvPr id="18" name="Text 16"/>
           <p:cNvSpPr/>
           <p:nvPr/>
         </p:nvSpPr>
@@ -7714,13 +7473,11 @@
             </a:avLst>
           </a:prstGeom>
           <a:solidFill>
-            <a:srgbClr val="FFFFFF">
-              <a:alpha val="88000"/>
-            </a:srgbClr>
+            <a:srgbClr val="FFFFFF"/>
           </a:solidFill>
           <a:ln w="12700">
             <a:solidFill>
-              <a:srgbClr val="D6E8F2"/>
+              <a:srgbClr val="B9D7E6"/>
             </a:solidFill>
             <a:prstDash val="solid"/>
           </a:ln>
@@ -7728,26 +7485,42 @@
       </p:sp>
       <p:sp>
         <p:nvSpPr>
-          <p:cNvPr id="14" name="Shape 12"/>
-          <p:cNvSpPr/>
-          <p:nvPr/>
-        </p:nvSpPr>
-        <p:spPr>
-          <a:xfrm>
-            <a:off x="8046720" y="3108960"/>
-            <a:ext cx="2651760" cy="896112"/>
-          </a:xfrm>
-          <a:prstGeom prst="arc">
-            <a:avLst/>
-          </a:prstGeom>
-          <a:noFill/>
-          <a:ln w="25400">
-            <a:solidFill>
-              <a:srgbClr val="0068B7"/>
-            </a:solidFill>
-            <a:prstDash val="solid"/>
-          </a:ln>
-        </p:spPr>
+          <p:cNvPr id="14" name="Text 12"/>
+          <p:cNvSpPr/>
+          <p:nvPr/>
+        </p:nvSpPr>
+        <p:spPr>
+          <a:xfrm>
+            <a:off x="7799832" y="2935224"/>
+            <a:ext cx="3145536" cy="256032"/>
+          </a:xfrm>
+          <a:prstGeom prst="rect">
+            <a:avLst/>
+          </a:prstGeom>
+          <a:noFill/>
+          <a:ln/>
+        </p:spPr>
+        <p:txBody>
+          <a:bodyPr wrap="square" lIns="0" tIns="0" rIns="0" bIns="0" rtlCol="0" anchor="ctr"/>
+          <a:lstStyle/>
+          <a:p>
+            <a:pPr indent="0" marL="0">
+              <a:buNone/>
+            </a:pPr>
+            <a:r>
+              <a:rPr lang="en-US" sz="1300" b="1" dirty="0">
+                <a:solidFill>
+                  <a:srgbClr val="0068B7"/>
+                </a:solidFill>
+                <a:latin typeface="Aptos" pitchFamily="34" charset="0"/>
+                <a:ea typeface="Aptos" pitchFamily="34" charset="-122"/>
+                <a:cs typeface="Aptos" pitchFamily="34" charset="-120"/>
+              </a:rPr>
+              <a:t>Concept checkpoints</a:t>
+            </a:r>
+            <a:endParaRPr lang="en-US" sz="1300" dirty="0"/>
+          </a:p>
+        </p:txBody>
       </p:sp>
       <p:sp>
         <p:nvSpPr>
@@ -7757,102 +7530,53 @@
         </p:nvSpPr>
         <p:spPr>
           <a:xfrm>
-            <a:off x="7909560" y="3099816"/>
-            <a:ext cx="2926080" cy="256032"/>
-          </a:xfrm>
-          <a:prstGeom prst="rect">
-            <a:avLst/>
-          </a:prstGeom>
-          <a:noFill/>
-          <a:ln/>
-        </p:spPr>
-        <p:txBody>
-          <a:bodyPr wrap="square" lIns="0" tIns="0" rIns="0" bIns="0" rtlCol="0" anchor="ctr"/>
-          <a:lstStyle/>
-          <a:p>
-            <a:pPr algn="ctr" indent="0" marL="0">
-              <a:buNone/>
-            </a:pPr>
-            <a:r>
-              <a:rPr lang="en-US" sz="1500" b="1" dirty="0">
-                <a:solidFill>
-                  <a:srgbClr val="003A63"/>
-                </a:solidFill>
-                <a:latin typeface="Aptos" pitchFamily="34" charset="0"/>
-                <a:ea typeface="Aptos" pitchFamily="34" charset="-122"/>
-                <a:cs typeface="Aptos" pitchFamily="34" charset="-120"/>
-              </a:rPr>
-              <a:t>Risk</a:t>
-            </a:r>
-            <a:endParaRPr lang="en-US" sz="1500" dirty="0"/>
+            <a:off x="7818120" y="3300984"/>
+            <a:ext cx="3090672" cy="877824"/>
+          </a:xfrm>
+          <a:prstGeom prst="rect">
+            <a:avLst/>
+          </a:prstGeom>
+          <a:noFill/>
+          <a:ln/>
+        </p:spPr>
+        <p:txBody>
+          <a:bodyPr wrap="square" lIns="254" tIns="254" rIns="254" bIns="254" rtlCol="0" anchor="t">
+            <a:normAutofit/>
+          </a:bodyPr>
+          <a:lstStyle/>
+          <a:p>
+            <a:r>
+              <a:rPr lang="en-US" sz="1380" dirty="0">
+                <a:solidFill>
+                  <a:srgbClr val="17364A"/>
+                </a:solidFill>
+                <a:latin typeface="Aptos" pitchFamily="34" charset="0"/>
+                <a:ea typeface="Aptos" pitchFamily="34" charset="-122"/>
+                <a:cs typeface="Aptos" pitchFamily="34" charset="-120"/>
+              </a:rPr>
+              <a:t>Document assumptions, unresolved questions, and which agency roles would need to review.</a:t>
+            </a:r>
+            <a:endParaRPr lang="en-US" sz="1380" dirty="0"/>
+          </a:p>
+          <a:p>
+            <a:r>
+              <a:rPr lang="en-US" sz="1380" dirty="0">
+                <a:solidFill>
+                  <a:srgbClr val="17364A"/>
+                </a:solidFill>
+                <a:latin typeface="Aptos" pitchFamily="34" charset="0"/>
+                <a:ea typeface="Aptos" pitchFamily="34" charset="-122"/>
+                <a:cs typeface="Aptos" pitchFamily="34" charset="-120"/>
+              </a:rPr>
+              <a:t>The exercise should produce a work product that could support governance review,.</a:t>
+            </a:r>
+            <a:endParaRPr lang="en-US" sz="1380" dirty="0"/>
           </a:p>
         </p:txBody>
       </p:sp>
       <p:sp>
         <p:nvSpPr>
           <p:cNvPr id="16" name="Shape 14"/>
-          <p:cNvSpPr/>
-          <p:nvPr/>
-        </p:nvSpPr>
-        <p:spPr>
-          <a:xfrm>
-            <a:off x="8366760" y="3639312"/>
-            <a:ext cx="2011680" cy="0"/>
-          </a:xfrm>
-          <a:prstGeom prst="line">
-            <a:avLst/>
-          </a:prstGeom>
-          <a:noFill/>
-          <a:ln w="63500">
-            <a:solidFill>
-              <a:srgbClr val="2F8A28"/>
-            </a:solidFill>
-            <a:prstDash val="solid"/>
-          </a:ln>
-        </p:spPr>
-      </p:sp>
-      <p:sp>
-        <p:nvSpPr>
-          <p:cNvPr id="17" name="Text 15"/>
-          <p:cNvSpPr/>
-          <p:nvPr/>
-        </p:nvSpPr>
-        <p:spPr>
-          <a:xfrm>
-            <a:off x="7909560" y="3849624"/>
-            <a:ext cx="2926080" cy="164592"/>
-          </a:xfrm>
-          <a:prstGeom prst="rect">
-            <a:avLst/>
-          </a:prstGeom>
-          <a:noFill/>
-          <a:ln/>
-        </p:spPr>
-        <p:txBody>
-          <a:bodyPr wrap="square" lIns="0" tIns="0" rIns="0" bIns="0" rtlCol="0" anchor="ctr"/>
-          <a:lstStyle/>
-          <a:p>
-            <a:pPr algn="ctr" indent="0" marL="0">
-              <a:buNone/>
-            </a:pPr>
-            <a:r>
-              <a:rPr lang="en-US" sz="900" dirty="0">
-                <a:solidFill>
-                  <a:srgbClr val="003A63"/>
-                </a:solidFill>
-                <a:latin typeface="Aptos" pitchFamily="34" charset="0"/>
-                <a:ea typeface="Aptos" pitchFamily="34" charset="-122"/>
-                <a:cs typeface="Aptos" pitchFamily="34" charset="-120"/>
-              </a:rPr>
-              <a:t>Human review</a:t>
-            </a:r>
-            <a:endParaRPr lang="en-US" sz="900" dirty="0"/>
-          </a:p>
-        </p:txBody>
-      </p:sp>
-      <p:sp>
-        <p:nvSpPr>
-          <p:cNvPr id="18" name="Shape 16"/>
           <p:cNvSpPr/>
           <p:nvPr/>
         </p:nvSpPr>
@@ -7879,7 +7603,7 @@
       </p:sp>
       <p:sp>
         <p:nvSpPr>
-          <p:cNvPr id="19" name="Text 17"/>
+          <p:cNvPr id="17" name="Text 15"/>
           <p:cNvSpPr/>
           <p:nvPr/>
         </p:nvSpPr>
@@ -7918,7 +7642,7 @@
       </p:sp>
       <p:sp>
         <p:nvSpPr>
-          <p:cNvPr id="20" name="Text 18"/>
+          <p:cNvPr id="18" name="Text 16"/>
           <p:cNvSpPr/>
           <p:nvPr/>
         </p:nvSpPr>
@@ -8398,13 +8122,11 @@
             </a:avLst>
           </a:prstGeom>
           <a:solidFill>
-            <a:srgbClr val="FFFFFF">
-              <a:alpha val="88000"/>
-            </a:srgbClr>
+            <a:srgbClr val="FFFFFF"/>
           </a:solidFill>
           <a:ln w="12700">
             <a:solidFill>
-              <a:srgbClr val="D6E8F2"/>
+              <a:srgbClr val="B9D7E6"/>
             </a:solidFill>
             <a:prstDash val="solid"/>
           </a:ln>
@@ -8412,26 +8134,42 @@
       </p:sp>
       <p:sp>
         <p:nvSpPr>
-          <p:cNvPr id="14" name="Shape 12"/>
-          <p:cNvSpPr/>
-          <p:nvPr/>
-        </p:nvSpPr>
-        <p:spPr>
-          <a:xfrm>
-            <a:off x="8046720" y="3108960"/>
-            <a:ext cx="2651760" cy="896112"/>
-          </a:xfrm>
-          <a:prstGeom prst="arc">
-            <a:avLst/>
-          </a:prstGeom>
-          <a:noFill/>
-          <a:ln w="25400">
-            <a:solidFill>
-              <a:srgbClr val="0068B7"/>
-            </a:solidFill>
-            <a:prstDash val="solid"/>
-          </a:ln>
-        </p:spPr>
+          <p:cNvPr id="14" name="Text 12"/>
+          <p:cNvSpPr/>
+          <p:nvPr/>
+        </p:nvSpPr>
+        <p:spPr>
+          <a:xfrm>
+            <a:off x="7799832" y="2935224"/>
+            <a:ext cx="3145536" cy="256032"/>
+          </a:xfrm>
+          <a:prstGeom prst="rect">
+            <a:avLst/>
+          </a:prstGeom>
+          <a:noFill/>
+          <a:ln/>
+        </p:spPr>
+        <p:txBody>
+          <a:bodyPr wrap="square" lIns="0" tIns="0" rIns="0" bIns="0" rtlCol="0" anchor="ctr"/>
+          <a:lstStyle/>
+          <a:p>
+            <a:pPr indent="0" marL="0">
+              <a:buNone/>
+            </a:pPr>
+            <a:r>
+              <a:rPr lang="en-US" sz="1300" b="1" dirty="0">
+                <a:solidFill>
+                  <a:srgbClr val="0068B7"/>
+                </a:solidFill>
+                <a:latin typeface="Aptos" pitchFamily="34" charset="0"/>
+                <a:ea typeface="Aptos" pitchFamily="34" charset="-122"/>
+                <a:cs typeface="Aptos" pitchFamily="34" charset="-120"/>
+              </a:rPr>
+              <a:t>Concept checkpoints</a:t>
+            </a:r>
+            <a:endParaRPr lang="en-US" sz="1300" dirty="0"/>
+          </a:p>
+        </p:txBody>
       </p:sp>
       <p:sp>
         <p:nvSpPr>
@@ -8441,102 +8179,39 @@
         </p:nvSpPr>
         <p:spPr>
           <a:xfrm>
-            <a:off x="7909560" y="3099816"/>
-            <a:ext cx="2926080" cy="256032"/>
-          </a:xfrm>
-          <a:prstGeom prst="rect">
-            <a:avLst/>
-          </a:prstGeom>
-          <a:noFill/>
-          <a:ln/>
-        </p:spPr>
-        <p:txBody>
-          <a:bodyPr wrap="square" lIns="0" tIns="0" rIns="0" bIns="0" rtlCol="0" anchor="ctr"/>
-          <a:lstStyle/>
-          <a:p>
-            <a:pPr algn="ctr" indent="0" marL="0">
-              <a:buNone/>
-            </a:pPr>
-            <a:r>
-              <a:rPr lang="en-US" sz="1500" b="1" dirty="0">
-                <a:solidFill>
-                  <a:srgbClr val="003A63"/>
-                </a:solidFill>
-                <a:latin typeface="Aptos" pitchFamily="34" charset="0"/>
-                <a:ea typeface="Aptos" pitchFamily="34" charset="-122"/>
-                <a:cs typeface="Aptos" pitchFamily="34" charset="-120"/>
-              </a:rPr>
-              <a:t>Risk</a:t>
-            </a:r>
-            <a:endParaRPr lang="en-US" sz="1500" dirty="0"/>
+            <a:off x="7818120" y="3300984"/>
+            <a:ext cx="3090672" cy="877824"/>
+          </a:xfrm>
+          <a:prstGeom prst="rect">
+            <a:avLst/>
+          </a:prstGeom>
+          <a:noFill/>
+          <a:ln/>
+        </p:spPr>
+        <p:txBody>
+          <a:bodyPr wrap="square" lIns="254" tIns="254" rIns="254" bIns="254" rtlCol="0" anchor="t">
+            <a:normAutofit/>
+          </a:bodyPr>
+          <a:lstStyle/>
+          <a:p>
+            <a:r>
+              <a:rPr lang="en-US" sz="1380" dirty="0">
+                <a:solidFill>
+                  <a:srgbClr val="17364A"/>
+                </a:solidFill>
+                <a:latin typeface="Aptos" pitchFamily="34" charset="0"/>
+                <a:ea typeface="Aptos" pitchFamily="34" charset="-122"/>
+                <a:cs typeface="Aptos" pitchFamily="34" charset="-120"/>
+              </a:rPr>
+              <a:t>AI risk appetite statement; risk tolerance table; prohibited-use examples; mitigation and.</a:t>
+            </a:r>
+            <a:endParaRPr lang="en-US" sz="1380" dirty="0"/>
           </a:p>
         </p:txBody>
       </p:sp>
       <p:sp>
         <p:nvSpPr>
           <p:cNvPr id="16" name="Shape 14"/>
-          <p:cNvSpPr/>
-          <p:nvPr/>
-        </p:nvSpPr>
-        <p:spPr>
-          <a:xfrm>
-            <a:off x="8366760" y="3639312"/>
-            <a:ext cx="2011680" cy="0"/>
-          </a:xfrm>
-          <a:prstGeom prst="line">
-            <a:avLst/>
-          </a:prstGeom>
-          <a:noFill/>
-          <a:ln w="63500">
-            <a:solidFill>
-              <a:srgbClr val="2F8A28"/>
-            </a:solidFill>
-            <a:prstDash val="solid"/>
-          </a:ln>
-        </p:spPr>
-      </p:sp>
-      <p:sp>
-        <p:nvSpPr>
-          <p:cNvPr id="17" name="Text 15"/>
-          <p:cNvSpPr/>
-          <p:nvPr/>
-        </p:nvSpPr>
-        <p:spPr>
-          <a:xfrm>
-            <a:off x="7909560" y="3849624"/>
-            <a:ext cx="2926080" cy="164592"/>
-          </a:xfrm>
-          <a:prstGeom prst="rect">
-            <a:avLst/>
-          </a:prstGeom>
-          <a:noFill/>
-          <a:ln/>
-        </p:spPr>
-        <p:txBody>
-          <a:bodyPr wrap="square" lIns="0" tIns="0" rIns="0" bIns="0" rtlCol="0" anchor="ctr"/>
-          <a:lstStyle/>
-          <a:p>
-            <a:pPr algn="ctr" indent="0" marL="0">
-              <a:buNone/>
-            </a:pPr>
-            <a:r>
-              <a:rPr lang="en-US" sz="900" dirty="0">
-                <a:solidFill>
-                  <a:srgbClr val="003A63"/>
-                </a:solidFill>
-                <a:latin typeface="Aptos" pitchFamily="34" charset="0"/>
-                <a:ea typeface="Aptos" pitchFamily="34" charset="-122"/>
-                <a:cs typeface="Aptos" pitchFamily="34" charset="-120"/>
-              </a:rPr>
-              <a:t>Human review</a:t>
-            </a:r>
-            <a:endParaRPr lang="en-US" sz="900" dirty="0"/>
-          </a:p>
-        </p:txBody>
-      </p:sp>
-      <p:sp>
-        <p:nvSpPr>
-          <p:cNvPr id="18" name="Shape 16"/>
           <p:cNvSpPr/>
           <p:nvPr/>
         </p:nvSpPr>
@@ -8563,7 +8238,7 @@
       </p:sp>
       <p:sp>
         <p:nvSpPr>
-          <p:cNvPr id="19" name="Text 17"/>
+          <p:cNvPr id="17" name="Text 15"/>
           <p:cNvSpPr/>
           <p:nvPr/>
         </p:nvSpPr>
@@ -8602,7 +8277,7 @@
       </p:sp>
       <p:sp>
         <p:nvSpPr>
-          <p:cNvPr id="20" name="Text 18"/>
+          <p:cNvPr id="18" name="Text 16"/>
           <p:cNvSpPr/>
           <p:nvPr/>
         </p:nvSpPr>
@@ -9082,13 +8757,11 @@
             </a:avLst>
           </a:prstGeom>
           <a:solidFill>
-            <a:srgbClr val="FFFFFF">
-              <a:alpha val="88000"/>
-            </a:srgbClr>
+            <a:srgbClr val="FFFFFF"/>
           </a:solidFill>
           <a:ln w="12700">
             <a:solidFill>
-              <a:srgbClr val="D6E8F2"/>
+              <a:srgbClr val="B9D7E6"/>
             </a:solidFill>
             <a:prstDash val="solid"/>
           </a:ln>
@@ -9096,26 +8769,42 @@
       </p:sp>
       <p:sp>
         <p:nvSpPr>
-          <p:cNvPr id="14" name="Shape 12"/>
-          <p:cNvSpPr/>
-          <p:nvPr/>
-        </p:nvSpPr>
-        <p:spPr>
-          <a:xfrm>
-            <a:off x="8046720" y="3108960"/>
-            <a:ext cx="2651760" cy="896112"/>
-          </a:xfrm>
-          <a:prstGeom prst="arc">
-            <a:avLst/>
-          </a:prstGeom>
-          <a:noFill/>
-          <a:ln w="25400">
-            <a:solidFill>
-              <a:srgbClr val="0068B7"/>
-            </a:solidFill>
-            <a:prstDash val="solid"/>
-          </a:ln>
-        </p:spPr>
+          <p:cNvPr id="14" name="Text 12"/>
+          <p:cNvSpPr/>
+          <p:nvPr/>
+        </p:nvSpPr>
+        <p:spPr>
+          <a:xfrm>
+            <a:off x="7799832" y="2935224"/>
+            <a:ext cx="3145536" cy="256032"/>
+          </a:xfrm>
+          <a:prstGeom prst="rect">
+            <a:avLst/>
+          </a:prstGeom>
+          <a:noFill/>
+          <a:ln/>
+        </p:spPr>
+        <p:txBody>
+          <a:bodyPr wrap="square" lIns="0" tIns="0" rIns="0" bIns="0" rtlCol="0" anchor="ctr"/>
+          <a:lstStyle/>
+          <a:p>
+            <a:pPr indent="0" marL="0">
+              <a:buNone/>
+            </a:pPr>
+            <a:r>
+              <a:rPr lang="en-US" sz="1300" b="1" dirty="0">
+                <a:solidFill>
+                  <a:srgbClr val="0068B7"/>
+                </a:solidFill>
+                <a:latin typeface="Aptos" pitchFamily="34" charset="0"/>
+                <a:ea typeface="Aptos" pitchFamily="34" charset="-122"/>
+                <a:cs typeface="Aptos" pitchFamily="34" charset="-120"/>
+              </a:rPr>
+              <a:t>Concept checkpoints</a:t>
+            </a:r>
+            <a:endParaRPr lang="en-US" sz="1300" dirty="0"/>
+          </a:p>
+        </p:txBody>
       </p:sp>
       <p:sp>
         <p:nvSpPr>
@@ -9125,102 +8814,39 @@
         </p:nvSpPr>
         <p:spPr>
           <a:xfrm>
-            <a:off x="7909560" y="3099816"/>
-            <a:ext cx="2926080" cy="256032"/>
-          </a:xfrm>
-          <a:prstGeom prst="rect">
-            <a:avLst/>
-          </a:prstGeom>
-          <a:noFill/>
-          <a:ln/>
-        </p:spPr>
-        <p:txBody>
-          <a:bodyPr wrap="square" lIns="0" tIns="0" rIns="0" bIns="0" rtlCol="0" anchor="ctr"/>
-          <a:lstStyle/>
-          <a:p>
-            <a:pPr algn="ctr" indent="0" marL="0">
-              <a:buNone/>
-            </a:pPr>
-            <a:r>
-              <a:rPr lang="en-US" sz="1500" b="1" dirty="0">
-                <a:solidFill>
-                  <a:srgbClr val="003A63"/>
-                </a:solidFill>
-                <a:latin typeface="Aptos" pitchFamily="34" charset="0"/>
-                <a:ea typeface="Aptos" pitchFamily="34" charset="-122"/>
-                <a:cs typeface="Aptos" pitchFamily="34" charset="-120"/>
-              </a:rPr>
-              <a:t>Risk</a:t>
-            </a:r>
-            <a:endParaRPr lang="en-US" sz="1500" dirty="0"/>
+            <a:off x="7818120" y="3300984"/>
+            <a:ext cx="3090672" cy="877824"/>
+          </a:xfrm>
+          <a:prstGeom prst="rect">
+            <a:avLst/>
+          </a:prstGeom>
+          <a:noFill/>
+          <a:ln/>
+        </p:spPr>
+        <p:txBody>
+          <a:bodyPr wrap="square" lIns="254" tIns="254" rIns="254" bIns="254" rtlCol="0" anchor="t">
+            <a:normAutofit/>
+          </a:bodyPr>
+          <a:lstStyle/>
+          <a:p>
+            <a:r>
+              <a:rPr lang="en-US" sz="1380" dirty="0">
+                <a:solidFill>
+                  <a:srgbClr val="17364A"/>
+                </a:solidFill>
+                <a:latin typeface="Aptos" pitchFamily="34" charset="0"/>
+                <a:ea typeface="Aptos" pitchFamily="34" charset="-122"/>
+                <a:cs typeface="Aptos" pitchFamily="34" charset="-120"/>
+              </a:rPr>
+              <a:t>AI risk appetite statement; risk tolerance table; prohibited-use examples; mitigation and.</a:t>
+            </a:r>
+            <a:endParaRPr lang="en-US" sz="1380" dirty="0"/>
           </a:p>
         </p:txBody>
       </p:sp>
       <p:sp>
         <p:nvSpPr>
           <p:cNvPr id="16" name="Shape 14"/>
-          <p:cNvSpPr/>
-          <p:nvPr/>
-        </p:nvSpPr>
-        <p:spPr>
-          <a:xfrm>
-            <a:off x="8366760" y="3639312"/>
-            <a:ext cx="2011680" cy="0"/>
-          </a:xfrm>
-          <a:prstGeom prst="line">
-            <a:avLst/>
-          </a:prstGeom>
-          <a:noFill/>
-          <a:ln w="63500">
-            <a:solidFill>
-              <a:srgbClr val="2F8A28"/>
-            </a:solidFill>
-            <a:prstDash val="solid"/>
-          </a:ln>
-        </p:spPr>
-      </p:sp>
-      <p:sp>
-        <p:nvSpPr>
-          <p:cNvPr id="17" name="Text 15"/>
-          <p:cNvSpPr/>
-          <p:nvPr/>
-        </p:nvSpPr>
-        <p:spPr>
-          <a:xfrm>
-            <a:off x="7909560" y="3849624"/>
-            <a:ext cx="2926080" cy="164592"/>
-          </a:xfrm>
-          <a:prstGeom prst="rect">
-            <a:avLst/>
-          </a:prstGeom>
-          <a:noFill/>
-          <a:ln/>
-        </p:spPr>
-        <p:txBody>
-          <a:bodyPr wrap="square" lIns="0" tIns="0" rIns="0" bIns="0" rtlCol="0" anchor="ctr"/>
-          <a:lstStyle/>
-          <a:p>
-            <a:pPr algn="ctr" indent="0" marL="0">
-              <a:buNone/>
-            </a:pPr>
-            <a:r>
-              <a:rPr lang="en-US" sz="900" dirty="0">
-                <a:solidFill>
-                  <a:srgbClr val="003A63"/>
-                </a:solidFill>
-                <a:latin typeface="Aptos" pitchFamily="34" charset="0"/>
-                <a:ea typeface="Aptos" pitchFamily="34" charset="-122"/>
-                <a:cs typeface="Aptos" pitchFamily="34" charset="-120"/>
-              </a:rPr>
-              <a:t>Human review</a:t>
-            </a:r>
-            <a:endParaRPr lang="en-US" sz="900" dirty="0"/>
-          </a:p>
-        </p:txBody>
-      </p:sp>
-      <p:sp>
-        <p:nvSpPr>
-          <p:cNvPr id="18" name="Shape 16"/>
           <p:cNvSpPr/>
           <p:nvPr/>
         </p:nvSpPr>
@@ -9247,7 +8873,7 @@
       </p:sp>
       <p:sp>
         <p:nvSpPr>
-          <p:cNvPr id="19" name="Text 17"/>
+          <p:cNvPr id="17" name="Text 15"/>
           <p:cNvSpPr/>
           <p:nvPr/>
         </p:nvSpPr>
@@ -9286,7 +8912,7 @@
       </p:sp>
       <p:sp>
         <p:nvSpPr>
-          <p:cNvPr id="20" name="Text 18"/>
+          <p:cNvPr id="18" name="Text 16"/>
           <p:cNvSpPr/>
           <p:nvPr/>
         </p:nvSpPr>
@@ -9794,13 +9420,11 @@
             </a:avLst>
           </a:prstGeom>
           <a:solidFill>
-            <a:srgbClr val="FFFFFF">
-              <a:alpha val="88000"/>
-            </a:srgbClr>
+            <a:srgbClr val="FFFFFF"/>
           </a:solidFill>
           <a:ln w="12700">
             <a:solidFill>
-              <a:srgbClr val="D6E8F2"/>
+              <a:srgbClr val="B9D7E6"/>
             </a:solidFill>
             <a:prstDash val="solid"/>
           </a:ln>
@@ -9808,26 +9432,42 @@
       </p:sp>
       <p:sp>
         <p:nvSpPr>
-          <p:cNvPr id="14" name="Shape 12"/>
-          <p:cNvSpPr/>
-          <p:nvPr/>
-        </p:nvSpPr>
-        <p:spPr>
-          <a:xfrm>
-            <a:off x="8046720" y="3108960"/>
-            <a:ext cx="2651760" cy="896112"/>
-          </a:xfrm>
-          <a:prstGeom prst="arc">
-            <a:avLst/>
-          </a:prstGeom>
-          <a:noFill/>
-          <a:ln w="25400">
-            <a:solidFill>
-              <a:srgbClr val="0068B7"/>
-            </a:solidFill>
-            <a:prstDash val="solid"/>
-          </a:ln>
-        </p:spPr>
+          <p:cNvPr id="14" name="Text 12"/>
+          <p:cNvSpPr/>
+          <p:nvPr/>
+        </p:nvSpPr>
+        <p:spPr>
+          <a:xfrm>
+            <a:off x="7799832" y="2935224"/>
+            <a:ext cx="3145536" cy="256032"/>
+          </a:xfrm>
+          <a:prstGeom prst="rect">
+            <a:avLst/>
+          </a:prstGeom>
+          <a:noFill/>
+          <a:ln/>
+        </p:spPr>
+        <p:txBody>
+          <a:bodyPr wrap="square" lIns="0" tIns="0" rIns="0" bIns="0" rtlCol="0" anchor="ctr"/>
+          <a:lstStyle/>
+          <a:p>
+            <a:pPr indent="0" marL="0">
+              <a:buNone/>
+            </a:pPr>
+            <a:r>
+              <a:rPr lang="en-US" sz="1300" b="1" dirty="0">
+                <a:solidFill>
+                  <a:srgbClr val="0068B7"/>
+                </a:solidFill>
+                <a:latin typeface="Aptos" pitchFamily="34" charset="0"/>
+                <a:ea typeface="Aptos" pitchFamily="34" charset="-122"/>
+                <a:cs typeface="Aptos" pitchFamily="34" charset="-120"/>
+              </a:rPr>
+              <a:t>Concept checkpoints</a:t>
+            </a:r>
+            <a:endParaRPr lang="en-US" sz="1300" dirty="0"/>
+          </a:p>
+        </p:txBody>
       </p:sp>
       <p:sp>
         <p:nvSpPr>
@@ -9837,102 +9477,67 @@
         </p:nvSpPr>
         <p:spPr>
           <a:xfrm>
-            <a:off x="7909560" y="3099816"/>
-            <a:ext cx="2926080" cy="256032"/>
-          </a:xfrm>
-          <a:prstGeom prst="rect">
-            <a:avLst/>
-          </a:prstGeom>
-          <a:noFill/>
-          <a:ln/>
-        </p:spPr>
-        <p:txBody>
-          <a:bodyPr wrap="square" lIns="0" tIns="0" rIns="0" bIns="0" rtlCol="0" anchor="ctr"/>
-          <a:lstStyle/>
-          <a:p>
-            <a:pPr algn="ctr" indent="0" marL="0">
-              <a:buNone/>
-            </a:pPr>
-            <a:r>
-              <a:rPr lang="en-US" sz="1500" b="1" dirty="0">
-                <a:solidFill>
-                  <a:srgbClr val="003A63"/>
-                </a:solidFill>
-                <a:latin typeface="Aptos" pitchFamily="34" charset="0"/>
-                <a:ea typeface="Aptos" pitchFamily="34" charset="-122"/>
-                <a:cs typeface="Aptos" pitchFamily="34" charset="-120"/>
-              </a:rPr>
-              <a:t>Risk</a:t>
-            </a:r>
-            <a:endParaRPr lang="en-US" sz="1500" dirty="0"/>
+            <a:off x="7818120" y="3300984"/>
+            <a:ext cx="3090672" cy="877824"/>
+          </a:xfrm>
+          <a:prstGeom prst="rect">
+            <a:avLst/>
+          </a:prstGeom>
+          <a:noFill/>
+          <a:ln/>
+        </p:spPr>
+        <p:txBody>
+          <a:bodyPr wrap="square" lIns="254" tIns="254" rIns="254" bIns="254" rtlCol="0" anchor="t">
+            <a:normAutofit/>
+          </a:bodyPr>
+          <a:lstStyle/>
+          <a:p>
+            <a:r>
+              <a:rPr lang="en-US" sz="1380" dirty="0">
+                <a:solidFill>
+                  <a:srgbClr val="17364A"/>
+                </a:solidFill>
+                <a:latin typeface="Aptos" pitchFamily="34" charset="0"/>
+                <a:ea typeface="Aptos" pitchFamily="34" charset="-122"/>
+                <a:cs typeface="Aptos" pitchFamily="34" charset="-120"/>
+              </a:rPr>
+              <a:t>1.</a:t>
+            </a:r>
+            <a:endParaRPr lang="en-US" sz="1380" dirty="0"/>
+          </a:p>
+          <a:p>
+            <a:r>
+              <a:rPr lang="en-US" sz="1380" dirty="0">
+                <a:solidFill>
+                  <a:srgbClr val="17364A"/>
+                </a:solidFill>
+                <a:latin typeface="Aptos" pitchFamily="34" charset="0"/>
+                <a:ea typeface="Aptos" pitchFamily="34" charset="-122"/>
+                <a:cs typeface="Aptos" pitchFamily="34" charset="-120"/>
+              </a:rPr>
+              <a:t>What is the strongest reason this module topic belongs in AI leadership and governance.</a:t>
+            </a:r>
+            <a:endParaRPr lang="en-US" sz="1380" dirty="0"/>
+          </a:p>
+          <a:p>
+            <a:r>
+              <a:rPr lang="en-US" sz="1380" dirty="0">
+                <a:solidFill>
+                  <a:srgbClr val="17364A"/>
+                </a:solidFill>
+                <a:latin typeface="Aptos" pitchFamily="34" charset="0"/>
+                <a:ea typeface="Aptos" pitchFamily="34" charset="-122"/>
+                <a:cs typeface="Aptos" pitchFamily="34" charset="-120"/>
+              </a:rPr>
+              <a:t>2.</a:t>
+            </a:r>
+            <a:endParaRPr lang="en-US" sz="1380" dirty="0"/>
           </a:p>
         </p:txBody>
       </p:sp>
       <p:sp>
         <p:nvSpPr>
           <p:cNvPr id="16" name="Shape 14"/>
-          <p:cNvSpPr/>
-          <p:nvPr/>
-        </p:nvSpPr>
-        <p:spPr>
-          <a:xfrm>
-            <a:off x="8366760" y="3639312"/>
-            <a:ext cx="2011680" cy="0"/>
-          </a:xfrm>
-          <a:prstGeom prst="line">
-            <a:avLst/>
-          </a:prstGeom>
-          <a:noFill/>
-          <a:ln w="63500">
-            <a:solidFill>
-              <a:srgbClr val="2F8A28"/>
-            </a:solidFill>
-            <a:prstDash val="solid"/>
-          </a:ln>
-        </p:spPr>
-      </p:sp>
-      <p:sp>
-        <p:nvSpPr>
-          <p:cNvPr id="17" name="Text 15"/>
-          <p:cNvSpPr/>
-          <p:nvPr/>
-        </p:nvSpPr>
-        <p:spPr>
-          <a:xfrm>
-            <a:off x="7909560" y="3849624"/>
-            <a:ext cx="2926080" cy="164592"/>
-          </a:xfrm>
-          <a:prstGeom prst="rect">
-            <a:avLst/>
-          </a:prstGeom>
-          <a:noFill/>
-          <a:ln/>
-        </p:spPr>
-        <p:txBody>
-          <a:bodyPr wrap="square" lIns="0" tIns="0" rIns="0" bIns="0" rtlCol="0" anchor="ctr"/>
-          <a:lstStyle/>
-          <a:p>
-            <a:pPr algn="ctr" indent="0" marL="0">
-              <a:buNone/>
-            </a:pPr>
-            <a:r>
-              <a:rPr lang="en-US" sz="900" dirty="0">
-                <a:solidFill>
-                  <a:srgbClr val="003A63"/>
-                </a:solidFill>
-                <a:latin typeface="Aptos" pitchFamily="34" charset="0"/>
-                <a:ea typeface="Aptos" pitchFamily="34" charset="-122"/>
-                <a:cs typeface="Aptos" pitchFamily="34" charset="-120"/>
-              </a:rPr>
-              <a:t>Human review</a:t>
-            </a:r>
-            <a:endParaRPr lang="en-US" sz="900" dirty="0"/>
-          </a:p>
-        </p:txBody>
-      </p:sp>
-      <p:sp>
-        <p:nvSpPr>
-          <p:cNvPr id="18" name="Shape 16"/>
           <p:cNvSpPr/>
           <p:nvPr/>
         </p:nvSpPr>
@@ -9959,7 +9564,7 @@
       </p:sp>
       <p:sp>
         <p:nvSpPr>
-          <p:cNvPr id="19" name="Text 17"/>
+          <p:cNvPr id="17" name="Text 15"/>
           <p:cNvSpPr/>
           <p:nvPr/>
         </p:nvSpPr>
@@ -9998,7 +9603,7 @@
       </p:sp>
       <p:sp>
         <p:nvSpPr>
-          <p:cNvPr id="20" name="Text 18"/>
+          <p:cNvPr id="18" name="Text 16"/>
           <p:cNvSpPr/>
           <p:nvPr/>
         </p:nvSpPr>
@@ -10531,20 +10136,20 @@
         </p:nvSpPr>
         <p:spPr>
           <a:xfrm>
-            <a:off x="7635240" y="3730752"/>
-            <a:ext cx="1033272" cy="749808"/>
+            <a:off x="7909560" y="3675888"/>
+            <a:ext cx="3154680" cy="1691640"/>
           </a:xfrm>
           <a:prstGeom prst="roundRect">
             <a:avLst>
-              <a:gd name="adj" fmla="val 14634"/>
+              <a:gd name="adj" fmla="val 6486"/>
             </a:avLst>
           </a:prstGeom>
           <a:solidFill>
-            <a:srgbClr val="0068B7"/>
+            <a:srgbClr val="FFFFFF"/>
           </a:solidFill>
           <a:ln w="12700">
             <a:solidFill>
-              <a:srgbClr val="0068B7"/>
+              <a:srgbClr val="B9D7E6"/>
             </a:solidFill>
             <a:prstDash val="solid"/>
           </a:ln>
@@ -10558,172 +10163,100 @@
         </p:nvSpPr>
         <p:spPr>
           <a:xfrm>
-            <a:off x="7708392" y="3922776"/>
-            <a:ext cx="886968" cy="310896"/>
-          </a:xfrm>
-          <a:prstGeom prst="rect">
-            <a:avLst/>
-          </a:prstGeom>
-          <a:noFill/>
-          <a:ln/>
-        </p:spPr>
-        <p:txBody>
-          <a:bodyPr wrap="square" lIns="0" tIns="0" rIns="0" bIns="0" rtlCol="0" anchor="ctr">
+            <a:off x="8074152" y="3822192"/>
+            <a:ext cx="2825496" cy="256032"/>
+          </a:xfrm>
+          <a:prstGeom prst="rect">
+            <a:avLst/>
+          </a:prstGeom>
+          <a:noFill/>
+          <a:ln/>
+        </p:spPr>
+        <p:txBody>
+          <a:bodyPr wrap="square" lIns="0" tIns="0" rIns="0" bIns="0" rtlCol="0" anchor="ctr"/>
+          <a:lstStyle/>
+          <a:p>
+            <a:pPr indent="0" marL="0">
+              <a:buNone/>
+            </a:pPr>
+            <a:r>
+              <a:rPr lang="en-US" sz="1300" b="1" dirty="0">
+                <a:solidFill>
+                  <a:srgbClr val="0068B7"/>
+                </a:solidFill>
+                <a:latin typeface="Aptos" pitchFamily="34" charset="0"/>
+                <a:ea typeface="Aptos" pitchFamily="34" charset="-122"/>
+                <a:cs typeface="Aptos" pitchFamily="34" charset="-120"/>
+              </a:rPr>
+              <a:t>Learning sequence</a:t>
+            </a:r>
+            <a:endParaRPr lang="en-US" sz="1300" dirty="0"/>
+          </a:p>
+        </p:txBody>
+      </p:sp>
+      <p:sp>
+        <p:nvSpPr>
+          <p:cNvPr id="15" name="Text 13"/>
+          <p:cNvSpPr/>
+          <p:nvPr/>
+        </p:nvSpPr>
+        <p:spPr>
+          <a:xfrm>
+            <a:off x="8092440" y="4187952"/>
+            <a:ext cx="2770632" cy="1033272"/>
+          </a:xfrm>
+          <a:prstGeom prst="rect">
+            <a:avLst/>
+          </a:prstGeom>
+          <a:noFill/>
+          <a:ln/>
+        </p:spPr>
+        <p:txBody>
+          <a:bodyPr wrap="square" lIns="254" tIns="254" rIns="254" bIns="254" rtlCol="0" anchor="t">
             <a:normAutofit/>
           </a:bodyPr>
           <a:lstStyle/>
           <a:p>
-            <a:pPr algn="ctr" indent="0" marL="0">
-              <a:buNone/>
-            </a:pPr>
-            <a:r>
-              <a:rPr lang="en-US" sz="1500" b="1" dirty="0">
-                <a:solidFill>
-                  <a:srgbClr val="FFFFFF"/>
-                </a:solidFill>
-                <a:latin typeface="Aptos" pitchFamily="34" charset="0"/>
-                <a:ea typeface="Aptos" pitchFamily="34" charset="-122"/>
-                <a:cs typeface="Aptos" pitchFamily="34" charset="-120"/>
-              </a:rPr>
-              <a:t>Learn</a:t>
-            </a:r>
-            <a:endParaRPr lang="en-US" sz="1500" dirty="0"/>
-          </a:p>
-        </p:txBody>
-      </p:sp>
-      <p:sp>
-        <p:nvSpPr>
-          <p:cNvPr id="15" name="Shape 13"/>
-          <p:cNvSpPr/>
-          <p:nvPr/>
-        </p:nvSpPr>
-        <p:spPr>
-          <a:xfrm>
-            <a:off x="8924544" y="3730752"/>
-            <a:ext cx="1033272" cy="749808"/>
-          </a:xfrm>
-          <a:prstGeom prst="roundRect">
-            <a:avLst>
-              <a:gd name="adj" fmla="val 14634"/>
-            </a:avLst>
-          </a:prstGeom>
-          <a:solidFill>
-            <a:srgbClr val="2F8A28"/>
-          </a:solidFill>
-          <a:ln w="12700">
-            <a:solidFill>
-              <a:srgbClr val="2F8A28"/>
-            </a:solidFill>
-            <a:prstDash val="solid"/>
-          </a:ln>
-        </p:spPr>
-      </p:sp>
-      <p:sp>
-        <p:nvSpPr>
-          <p:cNvPr id="16" name="Text 14"/>
-          <p:cNvSpPr/>
-          <p:nvPr/>
-        </p:nvSpPr>
-        <p:spPr>
-          <a:xfrm>
-            <a:off x="8997696" y="3922776"/>
-            <a:ext cx="886968" cy="310896"/>
-          </a:xfrm>
-          <a:prstGeom prst="rect">
-            <a:avLst/>
-          </a:prstGeom>
-          <a:noFill/>
-          <a:ln/>
-        </p:spPr>
-        <p:txBody>
-          <a:bodyPr wrap="square" lIns="0" tIns="0" rIns="0" bIns="0" rtlCol="0" anchor="ctr">
-            <a:normAutofit/>
-          </a:bodyPr>
-          <a:lstStyle/>
-          <a:p>
-            <a:pPr algn="ctr" indent="0" marL="0">
-              <a:buNone/>
-            </a:pPr>
-            <a:r>
-              <a:rPr lang="en-US" sz="1500" b="1" dirty="0">
-                <a:solidFill>
-                  <a:srgbClr val="FFFFFF"/>
-                </a:solidFill>
-                <a:latin typeface="Aptos" pitchFamily="34" charset="0"/>
-                <a:ea typeface="Aptos" pitchFamily="34" charset="-122"/>
-                <a:cs typeface="Aptos" pitchFamily="34" charset="-120"/>
-              </a:rPr>
-              <a:t>Apply</a:t>
-            </a:r>
-            <a:endParaRPr lang="en-US" sz="1500" dirty="0"/>
-          </a:p>
-        </p:txBody>
-      </p:sp>
-      <p:sp>
-        <p:nvSpPr>
-          <p:cNvPr id="17" name="Shape 15"/>
-          <p:cNvSpPr/>
-          <p:nvPr/>
-        </p:nvSpPr>
-        <p:spPr>
-          <a:xfrm>
-            <a:off x="10213848" y="3730752"/>
-            <a:ext cx="1033272" cy="749808"/>
-          </a:xfrm>
-          <a:prstGeom prst="roundRect">
-            <a:avLst>
-              <a:gd name="adj" fmla="val 14634"/>
-            </a:avLst>
-          </a:prstGeom>
-          <a:solidFill>
-            <a:srgbClr val="6A4CA3"/>
-          </a:solidFill>
-          <a:ln w="12700">
-            <a:solidFill>
-              <a:srgbClr val="6A4CA3"/>
-            </a:solidFill>
-            <a:prstDash val="solid"/>
-          </a:ln>
-        </p:spPr>
-      </p:sp>
-      <p:sp>
-        <p:nvSpPr>
-          <p:cNvPr id="18" name="Text 16"/>
-          <p:cNvSpPr/>
-          <p:nvPr/>
-        </p:nvSpPr>
-        <p:spPr>
-          <a:xfrm>
-            <a:off x="10287000" y="3922776"/>
-            <a:ext cx="886968" cy="310896"/>
-          </a:xfrm>
-          <a:prstGeom prst="rect">
-            <a:avLst/>
-          </a:prstGeom>
-          <a:noFill/>
-          <a:ln/>
-        </p:spPr>
-        <p:txBody>
-          <a:bodyPr wrap="square" lIns="0" tIns="0" rIns="0" bIns="0" rtlCol="0" anchor="ctr">
-            <a:normAutofit/>
-          </a:bodyPr>
-          <a:lstStyle/>
-          <a:p>
-            <a:pPr algn="ctr" indent="0" marL="0">
-              <a:buNone/>
-            </a:pPr>
-            <a:r>
-              <a:rPr lang="en-US" sz="1500" b="1" dirty="0">
-                <a:solidFill>
-                  <a:srgbClr val="FFFFFF"/>
-                </a:solidFill>
-                <a:latin typeface="Aptos" pitchFamily="34" charset="0"/>
-                <a:ea typeface="Aptos" pitchFamily="34" charset="-122"/>
-                <a:cs typeface="Aptos" pitchFamily="34" charset="-120"/>
-              </a:rPr>
-              <a:t>Document</a:t>
-            </a:r>
-            <a:endParaRPr lang="en-US" sz="1500" dirty="0"/>
+            <a:r>
+              <a:rPr lang="en-US" sz="1380" dirty="0">
+                <a:solidFill>
+                  <a:srgbClr val="17364A"/>
+                </a:solidFill>
+                <a:latin typeface="Aptos" pitchFamily="34" charset="0"/>
+                <a:ea typeface="Aptos" pitchFamily="34" charset="-122"/>
+                <a:cs typeface="Aptos" pitchFamily="34" charset="-120"/>
+              </a:rPr>
+              <a:t>Read the module for shared vocabulary and context.</a:t>
+            </a:r>
+            <a:endParaRPr lang="en-US" sz="1380" dirty="0"/>
+          </a:p>
+          <a:p>
+            <a:r>
+              <a:rPr lang="en-US" sz="1380" dirty="0">
+                <a:solidFill>
+                  <a:srgbClr val="17364A"/>
+                </a:solidFill>
+                <a:latin typeface="Aptos" pitchFamily="34" charset="0"/>
+                <a:ea typeface="Aptos" pitchFamily="34" charset="-122"/>
+                <a:cs typeface="Aptos" pitchFamily="34" charset="-120"/>
+              </a:rPr>
+              <a:t>Complete the practical exercise to apply the concept.</a:t>
+            </a:r>
+            <a:endParaRPr lang="en-US" sz="1380" dirty="0"/>
+          </a:p>
+          <a:p>
+            <a:r>
+              <a:rPr lang="en-US" sz="1380" dirty="0">
+                <a:solidFill>
+                  <a:srgbClr val="17364A"/>
+                </a:solidFill>
+                <a:latin typeface="Aptos" pitchFamily="34" charset="0"/>
+                <a:ea typeface="Aptos" pitchFamily="34" charset="-122"/>
+                <a:cs typeface="Aptos" pitchFamily="34" charset="-120"/>
+              </a:rPr>
+              <a:t>Use the notes and references for deeper review.</a:t>
+            </a:r>
+            <a:endParaRPr lang="en-US" sz="1380" dirty="0"/>
           </a:p>
         </p:txBody>
       </p:sp>
@@ -11196,13 +10729,11 @@
             </a:avLst>
           </a:prstGeom>
           <a:solidFill>
-            <a:srgbClr val="FFFFFF">
-              <a:alpha val="88000"/>
-            </a:srgbClr>
+            <a:srgbClr val="FFFFFF"/>
           </a:solidFill>
           <a:ln w="12700">
             <a:solidFill>
-              <a:srgbClr val="D6E8F2"/>
+              <a:srgbClr val="B9D7E6"/>
             </a:solidFill>
             <a:prstDash val="solid"/>
           </a:ln>
@@ -11210,26 +10741,42 @@
       </p:sp>
       <p:sp>
         <p:nvSpPr>
-          <p:cNvPr id="14" name="Shape 12"/>
-          <p:cNvSpPr/>
-          <p:nvPr/>
-        </p:nvSpPr>
-        <p:spPr>
-          <a:xfrm>
-            <a:off x="8046720" y="3108960"/>
-            <a:ext cx="2651760" cy="896112"/>
-          </a:xfrm>
-          <a:prstGeom prst="arc">
-            <a:avLst/>
-          </a:prstGeom>
-          <a:noFill/>
-          <a:ln w="25400">
-            <a:solidFill>
-              <a:srgbClr val="0068B7"/>
-            </a:solidFill>
-            <a:prstDash val="solid"/>
-          </a:ln>
-        </p:spPr>
+          <p:cNvPr id="14" name="Text 12"/>
+          <p:cNvSpPr/>
+          <p:nvPr/>
+        </p:nvSpPr>
+        <p:spPr>
+          <a:xfrm>
+            <a:off x="7799832" y="2935224"/>
+            <a:ext cx="3145536" cy="256032"/>
+          </a:xfrm>
+          <a:prstGeom prst="rect">
+            <a:avLst/>
+          </a:prstGeom>
+          <a:noFill/>
+          <a:ln/>
+        </p:spPr>
+        <p:txBody>
+          <a:bodyPr wrap="square" lIns="0" tIns="0" rIns="0" bIns="0" rtlCol="0" anchor="ctr"/>
+          <a:lstStyle/>
+          <a:p>
+            <a:pPr indent="0" marL="0">
+              <a:buNone/>
+            </a:pPr>
+            <a:r>
+              <a:rPr lang="en-US" sz="1300" b="1" dirty="0">
+                <a:solidFill>
+                  <a:srgbClr val="0068B7"/>
+                </a:solidFill>
+                <a:latin typeface="Aptos" pitchFamily="34" charset="0"/>
+                <a:ea typeface="Aptos" pitchFamily="34" charset="-122"/>
+                <a:cs typeface="Aptos" pitchFamily="34" charset="-120"/>
+              </a:rPr>
+              <a:t>Concept checkpoints</a:t>
+            </a:r>
+            <a:endParaRPr lang="en-US" sz="1300" dirty="0"/>
+          </a:p>
+        </p:txBody>
       </p:sp>
       <p:sp>
         <p:nvSpPr>
@@ -11239,102 +10786,67 @@
         </p:nvSpPr>
         <p:spPr>
           <a:xfrm>
-            <a:off x="7909560" y="3099816"/>
-            <a:ext cx="2926080" cy="256032"/>
-          </a:xfrm>
-          <a:prstGeom prst="rect">
-            <a:avLst/>
-          </a:prstGeom>
-          <a:noFill/>
-          <a:ln/>
-        </p:spPr>
-        <p:txBody>
-          <a:bodyPr wrap="square" lIns="0" tIns="0" rIns="0" bIns="0" rtlCol="0" anchor="ctr"/>
-          <a:lstStyle/>
-          <a:p>
-            <a:pPr algn="ctr" indent="0" marL="0">
-              <a:buNone/>
-            </a:pPr>
-            <a:r>
-              <a:rPr lang="en-US" sz="1500" b="1" dirty="0">
-                <a:solidFill>
-                  <a:srgbClr val="003A63"/>
-                </a:solidFill>
-                <a:latin typeface="Aptos" pitchFamily="34" charset="0"/>
-                <a:ea typeface="Aptos" pitchFamily="34" charset="-122"/>
-                <a:cs typeface="Aptos" pitchFamily="34" charset="-120"/>
-              </a:rPr>
-              <a:t>Risk</a:t>
-            </a:r>
-            <a:endParaRPr lang="en-US" sz="1500" dirty="0"/>
+            <a:off x="7818120" y="3300984"/>
+            <a:ext cx="3090672" cy="877824"/>
+          </a:xfrm>
+          <a:prstGeom prst="rect">
+            <a:avLst/>
+          </a:prstGeom>
+          <a:noFill/>
+          <a:ln/>
+        </p:spPr>
+        <p:txBody>
+          <a:bodyPr wrap="square" lIns="254" tIns="254" rIns="254" bIns="254" rtlCol="0" anchor="t">
+            <a:normAutofit/>
+          </a:bodyPr>
+          <a:lstStyle/>
+          <a:p>
+            <a:r>
+              <a:rPr lang="en-US" sz="1380" dirty="0">
+                <a:solidFill>
+                  <a:srgbClr val="17364A"/>
+                </a:solidFill>
+                <a:latin typeface="Aptos" pitchFamily="34" charset="0"/>
+                <a:ea typeface="Aptos" pitchFamily="34" charset="-122"/>
+                <a:cs typeface="Aptos" pitchFamily="34" charset="-120"/>
+              </a:rPr>
+              <a:t>NIST Artificial Intelligence Risk Management Framework (AI RMF 1.0):.</a:t>
+            </a:r>
+            <a:endParaRPr lang="en-US" sz="1380" dirty="0"/>
+          </a:p>
+          <a:p>
+            <a:r>
+              <a:rPr lang="en-US" sz="1380" dirty="0">
+                <a:solidFill>
+                  <a:srgbClr val="17364A"/>
+                </a:solidFill>
+                <a:latin typeface="Aptos" pitchFamily="34" charset="0"/>
+                <a:ea typeface="Aptos" pitchFamily="34" charset="-122"/>
+                <a:cs typeface="Aptos" pitchFamily="34" charset="-120"/>
+              </a:rPr>
+              <a:t>CDC Public Health Data Strategy and Data Modernization resources:.</a:t>
+            </a:r>
+            <a:endParaRPr lang="en-US" sz="1380" dirty="0"/>
+          </a:p>
+          <a:p>
+            <a:r>
+              <a:rPr lang="en-US" sz="1380" dirty="0">
+                <a:solidFill>
+                  <a:srgbClr val="17364A"/>
+                </a:solidFill>
+                <a:latin typeface="Aptos" pitchFamily="34" charset="0"/>
+                <a:ea typeface="Aptos" pitchFamily="34" charset="-122"/>
+                <a:cs typeface="Aptos" pitchFamily="34" charset="-120"/>
+              </a:rPr>
+              <a:t>WHO Ethics and Governance of Artificial Intelligence for Health:.</a:t>
+            </a:r>
+            <a:endParaRPr lang="en-US" sz="1380" dirty="0"/>
           </a:p>
         </p:txBody>
       </p:sp>
       <p:sp>
         <p:nvSpPr>
           <p:cNvPr id="16" name="Shape 14"/>
-          <p:cNvSpPr/>
-          <p:nvPr/>
-        </p:nvSpPr>
-        <p:spPr>
-          <a:xfrm>
-            <a:off x="8366760" y="3639312"/>
-            <a:ext cx="2011680" cy="0"/>
-          </a:xfrm>
-          <a:prstGeom prst="line">
-            <a:avLst/>
-          </a:prstGeom>
-          <a:noFill/>
-          <a:ln w="63500">
-            <a:solidFill>
-              <a:srgbClr val="2F8A28"/>
-            </a:solidFill>
-            <a:prstDash val="solid"/>
-          </a:ln>
-        </p:spPr>
-      </p:sp>
-      <p:sp>
-        <p:nvSpPr>
-          <p:cNvPr id="17" name="Text 15"/>
-          <p:cNvSpPr/>
-          <p:nvPr/>
-        </p:nvSpPr>
-        <p:spPr>
-          <a:xfrm>
-            <a:off x="7909560" y="3849624"/>
-            <a:ext cx="2926080" cy="164592"/>
-          </a:xfrm>
-          <a:prstGeom prst="rect">
-            <a:avLst/>
-          </a:prstGeom>
-          <a:noFill/>
-          <a:ln/>
-        </p:spPr>
-        <p:txBody>
-          <a:bodyPr wrap="square" lIns="0" tIns="0" rIns="0" bIns="0" rtlCol="0" anchor="ctr"/>
-          <a:lstStyle/>
-          <a:p>
-            <a:pPr algn="ctr" indent="0" marL="0">
-              <a:buNone/>
-            </a:pPr>
-            <a:r>
-              <a:rPr lang="en-US" sz="900" dirty="0">
-                <a:solidFill>
-                  <a:srgbClr val="003A63"/>
-                </a:solidFill>
-                <a:latin typeface="Aptos" pitchFamily="34" charset="0"/>
-                <a:ea typeface="Aptos" pitchFamily="34" charset="-122"/>
-                <a:cs typeface="Aptos" pitchFamily="34" charset="-120"/>
-              </a:rPr>
-              <a:t>Human review</a:t>
-            </a:r>
-            <a:endParaRPr lang="en-US" sz="900" dirty="0"/>
-          </a:p>
-        </p:txBody>
-      </p:sp>
-      <p:sp>
-        <p:nvSpPr>
-          <p:cNvPr id="18" name="Shape 16"/>
           <p:cNvSpPr/>
           <p:nvPr/>
         </p:nvSpPr>
@@ -11361,7 +10873,7 @@
       </p:sp>
       <p:sp>
         <p:nvSpPr>
-          <p:cNvPr id="19" name="Text 17"/>
+          <p:cNvPr id="17" name="Text 15"/>
           <p:cNvSpPr/>
           <p:nvPr/>
         </p:nvSpPr>
@@ -11400,7 +10912,7 @@
       </p:sp>
       <p:sp>
         <p:nvSpPr>
-          <p:cNvPr id="20" name="Text 18"/>
+          <p:cNvPr id="18" name="Text 16"/>
           <p:cNvSpPr/>
           <p:nvPr/>
         </p:nvSpPr>
@@ -11894,13 +11406,11 @@
             </a:avLst>
           </a:prstGeom>
           <a:solidFill>
-            <a:srgbClr val="FFFFFF">
-              <a:alpha val="88000"/>
-            </a:srgbClr>
+            <a:srgbClr val="FFFFFF"/>
           </a:solidFill>
           <a:ln w="12700">
             <a:solidFill>
-              <a:srgbClr val="D6E8F2"/>
+              <a:srgbClr val="B9D7E6"/>
             </a:solidFill>
             <a:prstDash val="solid"/>
           </a:ln>
@@ -11908,26 +11418,42 @@
       </p:sp>
       <p:sp>
         <p:nvSpPr>
-          <p:cNvPr id="14" name="Shape 12"/>
-          <p:cNvSpPr/>
-          <p:nvPr/>
-        </p:nvSpPr>
-        <p:spPr>
-          <a:xfrm>
-            <a:off x="8046720" y="3108960"/>
-            <a:ext cx="2651760" cy="896112"/>
-          </a:xfrm>
-          <a:prstGeom prst="arc">
-            <a:avLst/>
-          </a:prstGeom>
-          <a:noFill/>
-          <a:ln w="25400">
-            <a:solidFill>
-              <a:srgbClr val="0068B7"/>
-            </a:solidFill>
-            <a:prstDash val="solid"/>
-          </a:ln>
-        </p:spPr>
+          <p:cNvPr id="14" name="Text 12"/>
+          <p:cNvSpPr/>
+          <p:nvPr/>
+        </p:nvSpPr>
+        <p:spPr>
+          <a:xfrm>
+            <a:off x="7799832" y="2935224"/>
+            <a:ext cx="3145536" cy="256032"/>
+          </a:xfrm>
+          <a:prstGeom prst="rect">
+            <a:avLst/>
+          </a:prstGeom>
+          <a:noFill/>
+          <a:ln/>
+        </p:spPr>
+        <p:txBody>
+          <a:bodyPr wrap="square" lIns="0" tIns="0" rIns="0" bIns="0" rtlCol="0" anchor="ctr"/>
+          <a:lstStyle/>
+          <a:p>
+            <a:pPr indent="0" marL="0">
+              <a:buNone/>
+            </a:pPr>
+            <a:r>
+              <a:rPr lang="en-US" sz="1300" b="1" dirty="0">
+                <a:solidFill>
+                  <a:srgbClr val="0068B7"/>
+                </a:solidFill>
+                <a:latin typeface="Aptos" pitchFamily="34" charset="0"/>
+                <a:ea typeface="Aptos" pitchFamily="34" charset="-122"/>
+                <a:cs typeface="Aptos" pitchFamily="34" charset="-120"/>
+              </a:rPr>
+              <a:t>Concept checkpoints</a:t>
+            </a:r>
+            <a:endParaRPr lang="en-US" sz="1300" dirty="0"/>
+          </a:p>
+        </p:txBody>
       </p:sp>
       <p:sp>
         <p:nvSpPr>
@@ -11937,102 +11463,53 @@
         </p:nvSpPr>
         <p:spPr>
           <a:xfrm>
-            <a:off x="7909560" y="3099816"/>
-            <a:ext cx="2926080" cy="256032"/>
-          </a:xfrm>
-          <a:prstGeom prst="rect">
-            <a:avLst/>
-          </a:prstGeom>
-          <a:noFill/>
-          <a:ln/>
-        </p:spPr>
-        <p:txBody>
-          <a:bodyPr wrap="square" lIns="0" tIns="0" rIns="0" bIns="0" rtlCol="0" anchor="ctr"/>
-          <a:lstStyle/>
-          <a:p>
-            <a:pPr algn="ctr" indent="0" marL="0">
-              <a:buNone/>
-            </a:pPr>
-            <a:r>
-              <a:rPr lang="en-US" sz="1500" b="1" dirty="0">
-                <a:solidFill>
-                  <a:srgbClr val="003A63"/>
-                </a:solidFill>
-                <a:latin typeface="Aptos" pitchFamily="34" charset="0"/>
-                <a:ea typeface="Aptos" pitchFamily="34" charset="-122"/>
-                <a:cs typeface="Aptos" pitchFamily="34" charset="-120"/>
-              </a:rPr>
-              <a:t>Risk</a:t>
-            </a:r>
-            <a:endParaRPr lang="en-US" sz="1500" dirty="0"/>
+            <a:off x="7818120" y="3300984"/>
+            <a:ext cx="3090672" cy="877824"/>
+          </a:xfrm>
+          <a:prstGeom prst="rect">
+            <a:avLst/>
+          </a:prstGeom>
+          <a:noFill/>
+          <a:ln/>
+        </p:spPr>
+        <p:txBody>
+          <a:bodyPr wrap="square" lIns="254" tIns="254" rIns="254" bIns="254" rtlCol="0" anchor="t">
+            <a:normAutofit/>
+          </a:bodyPr>
+          <a:lstStyle/>
+          <a:p>
+            <a:r>
+              <a:rPr lang="en-US" sz="1380" dirty="0">
+                <a:solidFill>
+                  <a:srgbClr val="17364A"/>
+                </a:solidFill>
+                <a:latin typeface="Aptos" pitchFamily="34" charset="0"/>
+                <a:ea typeface="Aptos" pitchFamily="34" charset="-122"/>
+                <a:cs typeface="Aptos" pitchFamily="34" charset="-120"/>
+              </a:rPr>
+              <a:t>OMB Memorandum M-24-10 on federal AI governance, risk management, and innovation, where.</a:t>
+            </a:r>
+            <a:endParaRPr lang="en-US" sz="1380" dirty="0"/>
+          </a:p>
+          <a:p>
+            <a:r>
+              <a:rPr lang="en-US" sz="1380" dirty="0">
+                <a:solidFill>
+                  <a:srgbClr val="17364A"/>
+                </a:solidFill>
+                <a:latin typeface="Aptos" pitchFamily="34" charset="0"/>
+                <a:ea typeface="Aptos" pitchFamily="34" charset="-122"/>
+                <a:cs typeface="Aptos" pitchFamily="34" charset="-120"/>
+              </a:rPr>
+              <a:t>Agency strategic plans, procurement policies, privacy policies, cybersecurity policies,.</a:t>
+            </a:r>
+            <a:endParaRPr lang="en-US" sz="1380" dirty="0"/>
           </a:p>
         </p:txBody>
       </p:sp>
       <p:sp>
         <p:nvSpPr>
           <p:cNvPr id="16" name="Shape 14"/>
-          <p:cNvSpPr/>
-          <p:nvPr/>
-        </p:nvSpPr>
-        <p:spPr>
-          <a:xfrm>
-            <a:off x="8366760" y="3639312"/>
-            <a:ext cx="2011680" cy="0"/>
-          </a:xfrm>
-          <a:prstGeom prst="line">
-            <a:avLst/>
-          </a:prstGeom>
-          <a:noFill/>
-          <a:ln w="63500">
-            <a:solidFill>
-              <a:srgbClr val="2F8A28"/>
-            </a:solidFill>
-            <a:prstDash val="solid"/>
-          </a:ln>
-        </p:spPr>
-      </p:sp>
-      <p:sp>
-        <p:nvSpPr>
-          <p:cNvPr id="17" name="Text 15"/>
-          <p:cNvSpPr/>
-          <p:nvPr/>
-        </p:nvSpPr>
-        <p:spPr>
-          <a:xfrm>
-            <a:off x="7909560" y="3849624"/>
-            <a:ext cx="2926080" cy="164592"/>
-          </a:xfrm>
-          <a:prstGeom prst="rect">
-            <a:avLst/>
-          </a:prstGeom>
-          <a:noFill/>
-          <a:ln/>
-        </p:spPr>
-        <p:txBody>
-          <a:bodyPr wrap="square" lIns="0" tIns="0" rIns="0" bIns="0" rtlCol="0" anchor="ctr"/>
-          <a:lstStyle/>
-          <a:p>
-            <a:pPr algn="ctr" indent="0" marL="0">
-              <a:buNone/>
-            </a:pPr>
-            <a:r>
-              <a:rPr lang="en-US" sz="900" dirty="0">
-                <a:solidFill>
-                  <a:srgbClr val="003A63"/>
-                </a:solidFill>
-                <a:latin typeface="Aptos" pitchFamily="34" charset="0"/>
-                <a:ea typeface="Aptos" pitchFamily="34" charset="-122"/>
-                <a:cs typeface="Aptos" pitchFamily="34" charset="-120"/>
-              </a:rPr>
-              <a:t>Human review</a:t>
-            </a:r>
-            <a:endParaRPr lang="en-US" sz="900" dirty="0"/>
-          </a:p>
-        </p:txBody>
-      </p:sp>
-      <p:sp>
-        <p:nvSpPr>
-          <p:cNvPr id="18" name="Shape 16"/>
           <p:cNvSpPr/>
           <p:nvPr/>
         </p:nvSpPr>
@@ -12059,7 +11536,7 @@
       </p:sp>
       <p:sp>
         <p:nvSpPr>
-          <p:cNvPr id="19" name="Text 17"/>
+          <p:cNvPr id="17" name="Text 15"/>
           <p:cNvSpPr/>
           <p:nvPr/>
         </p:nvSpPr>
@@ -12098,7 +11575,7 @@
       </p:sp>
       <p:sp>
         <p:nvSpPr>
-          <p:cNvPr id="20" name="Text 18"/>
+          <p:cNvPr id="18" name="Text 16"/>
           <p:cNvSpPr/>
           <p:nvPr/>
         </p:nvSpPr>
@@ -12611,20 +12088,20 @@
         </p:nvSpPr>
         <p:spPr>
           <a:xfrm>
-            <a:off x="7818120" y="3977640"/>
-            <a:ext cx="972312" cy="749808"/>
+            <a:off x="8046720" y="3794760"/>
+            <a:ext cx="3063240" cy="1600200"/>
           </a:xfrm>
           <a:prstGeom prst="roundRect">
             <a:avLst>
-              <a:gd name="adj" fmla="val 14634"/>
+              <a:gd name="adj" fmla="val 6857"/>
             </a:avLst>
           </a:prstGeom>
           <a:solidFill>
-            <a:srgbClr val="0068B7"/>
+            <a:srgbClr val="FFFFFF"/>
           </a:solidFill>
           <a:ln w="12700">
             <a:solidFill>
-              <a:srgbClr val="0068B7"/>
+              <a:srgbClr val="B9D7E6"/>
             </a:solidFill>
             <a:prstDash val="solid"/>
           </a:ln>
@@ -12638,172 +12115,100 @@
         </p:nvSpPr>
         <p:spPr>
           <a:xfrm>
-            <a:off x="7891272" y="4169664"/>
-            <a:ext cx="826008" cy="310896"/>
-          </a:xfrm>
-          <a:prstGeom prst="rect">
-            <a:avLst/>
-          </a:prstGeom>
-          <a:noFill/>
-          <a:ln/>
-        </p:spPr>
-        <p:txBody>
-          <a:bodyPr wrap="square" lIns="0" tIns="0" rIns="0" bIns="0" rtlCol="0" anchor="ctr">
+            <a:off x="8211312" y="3941064"/>
+            <a:ext cx="2734056" cy="256032"/>
+          </a:xfrm>
+          <a:prstGeom prst="rect">
+            <a:avLst/>
+          </a:prstGeom>
+          <a:noFill/>
+          <a:ln/>
+        </p:spPr>
+        <p:txBody>
+          <a:bodyPr wrap="square" lIns="0" tIns="0" rIns="0" bIns="0" rtlCol="0" anchor="ctr"/>
+          <a:lstStyle/>
+          <a:p>
+            <a:pPr indent="0" marL="0">
+              <a:buNone/>
+            </a:pPr>
+            <a:r>
+              <a:rPr lang="en-US" sz="1300" b="1" dirty="0">
+                <a:solidFill>
+                  <a:srgbClr val="0068B7"/>
+                </a:solidFill>
+                <a:latin typeface="Aptos" pitchFamily="34" charset="0"/>
+                <a:ea typeface="Aptos" pitchFamily="34" charset="-122"/>
+                <a:cs typeface="Aptos" pitchFamily="34" charset="-120"/>
+              </a:rPr>
+              <a:t>Use the play links to</a:t>
+            </a:r>
+            <a:endParaRPr lang="en-US" sz="1300" dirty="0"/>
+          </a:p>
+        </p:txBody>
+      </p:sp>
+      <p:sp>
+        <p:nvSpPr>
+          <p:cNvPr id="15" name="Text 13"/>
+          <p:cNvSpPr/>
+          <p:nvPr/>
+        </p:nvSpPr>
+        <p:spPr>
+          <a:xfrm>
+            <a:off x="8229600" y="4306824"/>
+            <a:ext cx="2679192" cy="941832"/>
+          </a:xfrm>
+          <a:prstGeom prst="rect">
+            <a:avLst/>
+          </a:prstGeom>
+          <a:noFill/>
+          <a:ln/>
+        </p:spPr>
+        <p:txBody>
+          <a:bodyPr wrap="square" lIns="254" tIns="254" rIns="254" bIns="254" rtlCol="0" anchor="t">
             <a:normAutofit/>
           </a:bodyPr>
           <a:lstStyle/>
           <a:p>
-            <a:pPr algn="ctr" indent="0" marL="0">
-              <a:buNone/>
-            </a:pPr>
-            <a:r>
-              <a:rPr lang="en-US" sz="1500" b="1" dirty="0">
-                <a:solidFill>
-                  <a:srgbClr val="FFFFFF"/>
-                </a:solidFill>
-                <a:latin typeface="Aptos" pitchFamily="34" charset="0"/>
-                <a:ea typeface="Aptos" pitchFamily="34" charset="-122"/>
-                <a:cs typeface="Aptos" pitchFamily="34" charset="-120"/>
-              </a:rPr>
-              <a:t>Lesson</a:t>
-            </a:r>
-            <a:endParaRPr lang="en-US" sz="1500" dirty="0"/>
-          </a:p>
-        </p:txBody>
-      </p:sp>
-      <p:sp>
-        <p:nvSpPr>
-          <p:cNvPr id="15" name="Shape 13"/>
-          <p:cNvSpPr/>
-          <p:nvPr/>
-        </p:nvSpPr>
-        <p:spPr>
-          <a:xfrm>
-            <a:off x="9046464" y="3977640"/>
-            <a:ext cx="972312" cy="749808"/>
-          </a:xfrm>
-          <a:prstGeom prst="roundRect">
-            <a:avLst>
-              <a:gd name="adj" fmla="val 14634"/>
-            </a:avLst>
-          </a:prstGeom>
-          <a:solidFill>
-            <a:srgbClr val="2F8A28"/>
-          </a:solidFill>
-          <a:ln w="12700">
-            <a:solidFill>
-              <a:srgbClr val="2F8A28"/>
-            </a:solidFill>
-            <a:prstDash val="solid"/>
-          </a:ln>
-        </p:spPr>
-      </p:sp>
-      <p:sp>
-        <p:nvSpPr>
-          <p:cNvPr id="16" name="Text 14"/>
-          <p:cNvSpPr/>
-          <p:nvPr/>
-        </p:nvSpPr>
-        <p:spPr>
-          <a:xfrm>
-            <a:off x="9119616" y="4169664"/>
-            <a:ext cx="826008" cy="310896"/>
-          </a:xfrm>
-          <a:prstGeom prst="rect">
-            <a:avLst/>
-          </a:prstGeom>
-          <a:noFill/>
-          <a:ln/>
-        </p:spPr>
-        <p:txBody>
-          <a:bodyPr wrap="square" lIns="0" tIns="0" rIns="0" bIns="0" rtlCol="0" anchor="ctr">
-            <a:normAutofit/>
-          </a:bodyPr>
-          <a:lstStyle/>
-          <a:p>
-            <a:pPr algn="ctr" indent="0" marL="0">
-              <a:buNone/>
-            </a:pPr>
-            <a:r>
-              <a:rPr lang="en-US" sz="1500" b="1" dirty="0">
-                <a:solidFill>
-                  <a:srgbClr val="FFFFFF"/>
-                </a:solidFill>
-                <a:latin typeface="Aptos" pitchFamily="34" charset="0"/>
-                <a:ea typeface="Aptos" pitchFamily="34" charset="-122"/>
-                <a:cs typeface="Aptos" pitchFamily="34" charset="-120"/>
-              </a:rPr>
-              <a:t>Plays</a:t>
-            </a:r>
-            <a:endParaRPr lang="en-US" sz="1500" dirty="0"/>
-          </a:p>
-        </p:txBody>
-      </p:sp>
-      <p:sp>
-        <p:nvSpPr>
-          <p:cNvPr id="17" name="Shape 15"/>
-          <p:cNvSpPr/>
-          <p:nvPr/>
-        </p:nvSpPr>
-        <p:spPr>
-          <a:xfrm>
-            <a:off x="10274808" y="3977640"/>
-            <a:ext cx="972312" cy="749808"/>
-          </a:xfrm>
-          <a:prstGeom prst="roundRect">
-            <a:avLst>
-              <a:gd name="adj" fmla="val 14634"/>
-            </a:avLst>
-          </a:prstGeom>
-          <a:solidFill>
-            <a:srgbClr val="6A4CA3"/>
-          </a:solidFill>
-          <a:ln w="12700">
-            <a:solidFill>
-              <a:srgbClr val="6A4CA3"/>
-            </a:solidFill>
-            <a:prstDash val="solid"/>
-          </a:ln>
-        </p:spPr>
-      </p:sp>
-      <p:sp>
-        <p:nvSpPr>
-          <p:cNvPr id="18" name="Text 16"/>
-          <p:cNvSpPr/>
-          <p:nvPr/>
-        </p:nvSpPr>
-        <p:spPr>
-          <a:xfrm>
-            <a:off x="10347960" y="4169664"/>
-            <a:ext cx="826008" cy="310896"/>
-          </a:xfrm>
-          <a:prstGeom prst="rect">
-            <a:avLst/>
-          </a:prstGeom>
-          <a:noFill/>
-          <a:ln/>
-        </p:spPr>
-        <p:txBody>
-          <a:bodyPr wrap="square" lIns="0" tIns="0" rIns="0" bIns="0" rtlCol="0" anchor="ctr">
-            <a:normAutofit/>
-          </a:bodyPr>
-          <a:lstStyle/>
-          <a:p>
-            <a:pPr algn="ctr" indent="0" marL="0">
-              <a:buNone/>
-            </a:pPr>
-            <a:r>
-              <a:rPr lang="en-US" sz="1500" b="1" dirty="0">
-                <a:solidFill>
-                  <a:srgbClr val="FFFFFF"/>
-                </a:solidFill>
-                <a:latin typeface="Aptos" pitchFamily="34" charset="0"/>
-                <a:ea typeface="Aptos" pitchFamily="34" charset="-122"/>
-                <a:cs typeface="Aptos" pitchFamily="34" charset="-120"/>
-              </a:rPr>
-              <a:t>Action</a:t>
-            </a:r>
-            <a:endParaRPr lang="en-US" sz="1500" dirty="0"/>
+            <a:r>
+              <a:rPr lang="en-US" sz="1380" dirty="0">
+                <a:solidFill>
+                  <a:srgbClr val="17364A"/>
+                </a:solidFill>
+                <a:latin typeface="Aptos" pitchFamily="34" charset="0"/>
+                <a:ea typeface="Aptos" pitchFamily="34" charset="-122"/>
+                <a:cs typeface="Aptos" pitchFamily="34" charset="-120"/>
+              </a:rPr>
+              <a:t>Locate the decision point in the playbook sequence.</a:t>
+            </a:r>
+            <a:endParaRPr lang="en-US" sz="1380" dirty="0"/>
+          </a:p>
+          <a:p>
+            <a:r>
+              <a:rPr lang="en-US" sz="1380" dirty="0">
+                <a:solidFill>
+                  <a:srgbClr val="17364A"/>
+                </a:solidFill>
+                <a:latin typeface="Aptos" pitchFamily="34" charset="0"/>
+                <a:ea typeface="Aptos" pitchFamily="34" charset="-122"/>
+                <a:cs typeface="Aptos" pitchFamily="34" charset="-120"/>
+              </a:rPr>
+              <a:t>Identify who should participate in the work.</a:t>
+            </a:r>
+            <a:endParaRPr lang="en-US" sz="1380" dirty="0"/>
+          </a:p>
+          <a:p>
+            <a:r>
+              <a:rPr lang="en-US" sz="1380" dirty="0">
+                <a:solidFill>
+                  <a:srgbClr val="17364A"/>
+                </a:solidFill>
+                <a:latin typeface="Aptos" pitchFamily="34" charset="0"/>
+                <a:ea typeface="Aptos" pitchFamily="34" charset="-122"/>
+                <a:cs typeface="Aptos" pitchFamily="34" charset="-120"/>
+              </a:rPr>
+              <a:t>Document the review, approval, or implementation step.</a:t>
+            </a:r>
+            <a:endParaRPr lang="en-US" sz="1380" dirty="0"/>
           </a:p>
         </p:txBody>
       </p:sp>
@@ -13281,20 +12686,20 @@
         </p:nvSpPr>
         <p:spPr>
           <a:xfrm>
-            <a:off x="7818120" y="3977640"/>
-            <a:ext cx="972312" cy="749808"/>
+            <a:off x="8046720" y="3794760"/>
+            <a:ext cx="3063240" cy="1600200"/>
           </a:xfrm>
           <a:prstGeom prst="roundRect">
             <a:avLst>
-              <a:gd name="adj" fmla="val 14634"/>
+              <a:gd name="adj" fmla="val 6857"/>
             </a:avLst>
           </a:prstGeom>
           <a:solidFill>
-            <a:srgbClr val="0068B7"/>
+            <a:srgbClr val="FFFFFF"/>
           </a:solidFill>
           <a:ln w="12700">
             <a:solidFill>
-              <a:srgbClr val="0068B7"/>
+              <a:srgbClr val="B9D7E6"/>
             </a:solidFill>
             <a:prstDash val="solid"/>
           </a:ln>
@@ -13308,172 +12713,100 @@
         </p:nvSpPr>
         <p:spPr>
           <a:xfrm>
-            <a:off x="7891272" y="4169664"/>
-            <a:ext cx="826008" cy="310896"/>
-          </a:xfrm>
-          <a:prstGeom prst="rect">
-            <a:avLst/>
-          </a:prstGeom>
-          <a:noFill/>
-          <a:ln/>
-        </p:spPr>
-        <p:txBody>
-          <a:bodyPr wrap="square" lIns="0" tIns="0" rIns="0" bIns="0" rtlCol="0" anchor="ctr">
+            <a:off x="8211312" y="3941064"/>
+            <a:ext cx="2734056" cy="256032"/>
+          </a:xfrm>
+          <a:prstGeom prst="rect">
+            <a:avLst/>
+          </a:prstGeom>
+          <a:noFill/>
+          <a:ln/>
+        </p:spPr>
+        <p:txBody>
+          <a:bodyPr wrap="square" lIns="0" tIns="0" rIns="0" bIns="0" rtlCol="0" anchor="ctr"/>
+          <a:lstStyle/>
+          <a:p>
+            <a:pPr indent="0" marL="0">
+              <a:buNone/>
+            </a:pPr>
+            <a:r>
+              <a:rPr lang="en-US" sz="1300" b="1" dirty="0">
+                <a:solidFill>
+                  <a:srgbClr val="0068B7"/>
+                </a:solidFill>
+                <a:latin typeface="Aptos" pitchFamily="34" charset="0"/>
+                <a:ea typeface="Aptos" pitchFamily="34" charset="-122"/>
+                <a:cs typeface="Aptos" pitchFamily="34" charset="-120"/>
+              </a:rPr>
+              <a:t>Tool selection cues</a:t>
+            </a:r>
+            <a:endParaRPr lang="en-US" sz="1300" dirty="0"/>
+          </a:p>
+        </p:txBody>
+      </p:sp>
+      <p:sp>
+        <p:nvSpPr>
+          <p:cNvPr id="15" name="Text 13"/>
+          <p:cNvSpPr/>
+          <p:nvPr/>
+        </p:nvSpPr>
+        <p:spPr>
+          <a:xfrm>
+            <a:off x="8229600" y="4306824"/>
+            <a:ext cx="2679192" cy="941832"/>
+          </a:xfrm>
+          <a:prstGeom prst="rect">
+            <a:avLst/>
+          </a:prstGeom>
+          <a:noFill/>
+          <a:ln/>
+        </p:spPr>
+        <p:txBody>
+          <a:bodyPr wrap="square" lIns="254" tIns="254" rIns="254" bIns="254" rtlCol="0" anchor="t">
             <a:normAutofit/>
           </a:bodyPr>
           <a:lstStyle/>
           <a:p>
-            <a:pPr algn="ctr" indent="0" marL="0">
-              <a:buNone/>
-            </a:pPr>
-            <a:r>
-              <a:rPr lang="en-US" sz="1500" b="1" dirty="0">
-                <a:solidFill>
-                  <a:srgbClr val="FFFFFF"/>
-                </a:solidFill>
-                <a:latin typeface="Aptos" pitchFamily="34" charset="0"/>
-                <a:ea typeface="Aptos" pitchFamily="34" charset="-122"/>
-                <a:cs typeface="Aptos" pitchFamily="34" charset="-120"/>
-              </a:rPr>
-              <a:t>Concept</a:t>
-            </a:r>
-            <a:endParaRPr lang="en-US" sz="1500" dirty="0"/>
-          </a:p>
-        </p:txBody>
-      </p:sp>
-      <p:sp>
-        <p:nvSpPr>
-          <p:cNvPr id="15" name="Shape 13"/>
-          <p:cNvSpPr/>
-          <p:nvPr/>
-        </p:nvSpPr>
-        <p:spPr>
-          <a:xfrm>
-            <a:off x="9046464" y="3977640"/>
-            <a:ext cx="972312" cy="749808"/>
-          </a:xfrm>
-          <a:prstGeom prst="roundRect">
-            <a:avLst>
-              <a:gd name="adj" fmla="val 14634"/>
-            </a:avLst>
-          </a:prstGeom>
-          <a:solidFill>
-            <a:srgbClr val="2F8A28"/>
-          </a:solidFill>
-          <a:ln w="12700">
-            <a:solidFill>
-              <a:srgbClr val="2F8A28"/>
-            </a:solidFill>
-            <a:prstDash val="solid"/>
-          </a:ln>
-        </p:spPr>
-      </p:sp>
-      <p:sp>
-        <p:nvSpPr>
-          <p:cNvPr id="16" name="Text 14"/>
-          <p:cNvSpPr/>
-          <p:nvPr/>
-        </p:nvSpPr>
-        <p:spPr>
-          <a:xfrm>
-            <a:off x="9119616" y="4169664"/>
-            <a:ext cx="826008" cy="310896"/>
-          </a:xfrm>
-          <a:prstGeom prst="rect">
-            <a:avLst/>
-          </a:prstGeom>
-          <a:noFill/>
-          <a:ln/>
-        </p:spPr>
-        <p:txBody>
-          <a:bodyPr wrap="square" lIns="0" tIns="0" rIns="0" bIns="0" rtlCol="0" anchor="ctr">
-            <a:normAutofit/>
-          </a:bodyPr>
-          <a:lstStyle/>
-          <a:p>
-            <a:pPr algn="ctr" indent="0" marL="0">
-              <a:buNone/>
-            </a:pPr>
-            <a:r>
-              <a:rPr lang="en-US" sz="1500" b="1" dirty="0">
-                <a:solidFill>
-                  <a:srgbClr val="FFFFFF"/>
-                </a:solidFill>
-                <a:latin typeface="Aptos" pitchFamily="34" charset="0"/>
-                <a:ea typeface="Aptos" pitchFamily="34" charset="-122"/>
-                <a:cs typeface="Aptos" pitchFamily="34" charset="-120"/>
-              </a:rPr>
-              <a:t>Tool</a:t>
-            </a:r>
-            <a:endParaRPr lang="en-US" sz="1500" dirty="0"/>
-          </a:p>
-        </p:txBody>
-      </p:sp>
-      <p:sp>
-        <p:nvSpPr>
-          <p:cNvPr id="17" name="Shape 15"/>
-          <p:cNvSpPr/>
-          <p:nvPr/>
-        </p:nvSpPr>
-        <p:spPr>
-          <a:xfrm>
-            <a:off x="10274808" y="3977640"/>
-            <a:ext cx="972312" cy="749808"/>
-          </a:xfrm>
-          <a:prstGeom prst="roundRect">
-            <a:avLst>
-              <a:gd name="adj" fmla="val 14634"/>
-            </a:avLst>
-          </a:prstGeom>
-          <a:solidFill>
-            <a:srgbClr val="D69A2D"/>
-          </a:solidFill>
-          <a:ln w="12700">
-            <a:solidFill>
-              <a:srgbClr val="D69A2D"/>
-            </a:solidFill>
-            <a:prstDash val="solid"/>
-          </a:ln>
-        </p:spPr>
-      </p:sp>
-      <p:sp>
-        <p:nvSpPr>
-          <p:cNvPr id="18" name="Text 16"/>
-          <p:cNvSpPr/>
-          <p:nvPr/>
-        </p:nvSpPr>
-        <p:spPr>
-          <a:xfrm>
-            <a:off x="10347960" y="4169664"/>
-            <a:ext cx="826008" cy="310896"/>
-          </a:xfrm>
-          <a:prstGeom prst="rect">
-            <a:avLst/>
-          </a:prstGeom>
-          <a:noFill/>
-          <a:ln/>
-        </p:spPr>
-        <p:txBody>
-          <a:bodyPr wrap="square" lIns="0" tIns="0" rIns="0" bIns="0" rtlCol="0" anchor="ctr">
-            <a:normAutofit/>
-          </a:bodyPr>
-          <a:lstStyle/>
-          <a:p>
-            <a:pPr algn="ctr" indent="0" marL="0">
-              <a:buNone/>
-            </a:pPr>
-            <a:r>
-              <a:rPr lang="en-US" sz="1500" b="1" dirty="0">
-                <a:solidFill>
-                  <a:srgbClr val="FFFFFF"/>
-                </a:solidFill>
-                <a:latin typeface="Aptos" pitchFamily="34" charset="0"/>
-                <a:ea typeface="Aptos" pitchFamily="34" charset="-122"/>
-                <a:cs typeface="Aptos" pitchFamily="34" charset="-120"/>
-              </a:rPr>
-              <a:t>Artifact</a:t>
-            </a:r>
-            <a:endParaRPr lang="en-US" sz="1500" dirty="0"/>
+            <a:r>
+              <a:rPr lang="en-US" sz="1380" dirty="0">
+                <a:solidFill>
+                  <a:srgbClr val="17364A"/>
+                </a:solidFill>
+                <a:latin typeface="Aptos" pitchFamily="34" charset="0"/>
+                <a:ea typeface="Aptos" pitchFamily="34" charset="-122"/>
+                <a:cs typeface="Aptos" pitchFamily="34" charset="-120"/>
+              </a:rPr>
+              <a:t>Use a tool when no comparable local process exists.</a:t>
+            </a:r>
+            <a:endParaRPr lang="en-US" sz="1380" dirty="0"/>
+          </a:p>
+          <a:p>
+            <a:r>
+              <a:rPr lang="en-US" sz="1380" dirty="0">
+                <a:solidFill>
+                  <a:srgbClr val="17364A"/>
+                </a:solidFill>
+                <a:latin typeface="Aptos" pitchFamily="34" charset="0"/>
+                <a:ea typeface="Aptos" pitchFamily="34" charset="-122"/>
+                <a:cs typeface="Aptos" pitchFamily="34" charset="-120"/>
+              </a:rPr>
+              <a:t>Adapt existing department templates when they already fit the purpose.</a:t>
+            </a:r>
+            <a:endParaRPr lang="en-US" sz="1380" dirty="0"/>
+          </a:p>
+          <a:p>
+            <a:r>
+              <a:rPr lang="en-US" sz="1380" dirty="0">
+                <a:solidFill>
+                  <a:srgbClr val="17364A"/>
+                </a:solidFill>
+                <a:latin typeface="Aptos" pitchFamily="34" charset="0"/>
+                <a:ea typeface="Aptos" pitchFamily="34" charset="-122"/>
+                <a:cs typeface="Aptos" pitchFamily="34" charset="-120"/>
+              </a:rPr>
+              <a:t>Save the completed artifact as evidence of the decision.</a:t>
+            </a:r>
+            <a:endParaRPr lang="en-US" sz="1380" dirty="0"/>
           </a:p>
         </p:txBody>
       </p:sp>
@@ -13946,13 +13279,11 @@
             </a:avLst>
           </a:prstGeom>
           <a:solidFill>
-            <a:srgbClr val="FFFFFF">
-              <a:alpha val="88000"/>
-            </a:srgbClr>
+            <a:srgbClr val="FFFFFF"/>
           </a:solidFill>
           <a:ln w="12700">
             <a:solidFill>
-              <a:srgbClr val="D6E8F2"/>
+              <a:srgbClr val="B9D7E6"/>
             </a:solidFill>
             <a:prstDash val="solid"/>
           </a:ln>
@@ -13960,26 +13291,42 @@
       </p:sp>
       <p:sp>
         <p:nvSpPr>
-          <p:cNvPr id="14" name="Shape 12"/>
-          <p:cNvSpPr/>
-          <p:nvPr/>
-        </p:nvSpPr>
-        <p:spPr>
-          <a:xfrm>
-            <a:off x="8046720" y="3108960"/>
-            <a:ext cx="2651760" cy="896112"/>
-          </a:xfrm>
-          <a:prstGeom prst="arc">
-            <a:avLst/>
-          </a:prstGeom>
-          <a:noFill/>
-          <a:ln w="25400">
-            <a:solidFill>
-              <a:srgbClr val="0068B7"/>
-            </a:solidFill>
-            <a:prstDash val="solid"/>
-          </a:ln>
-        </p:spPr>
+          <p:cNvPr id="14" name="Text 12"/>
+          <p:cNvSpPr/>
+          <p:nvPr/>
+        </p:nvSpPr>
+        <p:spPr>
+          <a:xfrm>
+            <a:off x="7799832" y="2935224"/>
+            <a:ext cx="3145536" cy="256032"/>
+          </a:xfrm>
+          <a:prstGeom prst="rect">
+            <a:avLst/>
+          </a:prstGeom>
+          <a:noFill/>
+          <a:ln/>
+        </p:spPr>
+        <p:txBody>
+          <a:bodyPr wrap="square" lIns="0" tIns="0" rIns="0" bIns="0" rtlCol="0" anchor="ctr"/>
+          <a:lstStyle/>
+          <a:p>
+            <a:pPr indent="0" marL="0">
+              <a:buNone/>
+            </a:pPr>
+            <a:r>
+              <a:rPr lang="en-US" sz="1300" b="1" dirty="0">
+                <a:solidFill>
+                  <a:srgbClr val="0068B7"/>
+                </a:solidFill>
+                <a:latin typeface="Aptos" pitchFamily="34" charset="0"/>
+                <a:ea typeface="Aptos" pitchFamily="34" charset="-122"/>
+                <a:cs typeface="Aptos" pitchFamily="34" charset="-120"/>
+              </a:rPr>
+              <a:t>Concept checkpoints</a:t>
+            </a:r>
+            <a:endParaRPr lang="en-US" sz="1300" dirty="0"/>
+          </a:p>
+        </p:txBody>
       </p:sp>
       <p:sp>
         <p:nvSpPr>
@@ -13989,102 +13336,53 @@
         </p:nvSpPr>
         <p:spPr>
           <a:xfrm>
-            <a:off x="7909560" y="3099816"/>
-            <a:ext cx="2926080" cy="256032"/>
-          </a:xfrm>
-          <a:prstGeom prst="rect">
-            <a:avLst/>
-          </a:prstGeom>
-          <a:noFill/>
-          <a:ln/>
-        </p:spPr>
-        <p:txBody>
-          <a:bodyPr wrap="square" lIns="0" tIns="0" rIns="0" bIns="0" rtlCol="0" anchor="ctr"/>
-          <a:lstStyle/>
-          <a:p>
-            <a:pPr algn="ctr" indent="0" marL="0">
-              <a:buNone/>
-            </a:pPr>
-            <a:r>
-              <a:rPr lang="en-US" sz="1500" b="1" dirty="0">
-                <a:solidFill>
-                  <a:srgbClr val="003A63"/>
-                </a:solidFill>
-                <a:latin typeface="Aptos" pitchFamily="34" charset="0"/>
-                <a:ea typeface="Aptos" pitchFamily="34" charset="-122"/>
-                <a:cs typeface="Aptos" pitchFamily="34" charset="-120"/>
-              </a:rPr>
-              <a:t>Risk</a:t>
-            </a:r>
-            <a:endParaRPr lang="en-US" sz="1500" dirty="0"/>
+            <a:off x="7818120" y="3300984"/>
+            <a:ext cx="3090672" cy="877824"/>
+          </a:xfrm>
+          <a:prstGeom prst="rect">
+            <a:avLst/>
+          </a:prstGeom>
+          <a:noFill/>
+          <a:ln/>
+        </p:spPr>
+        <p:txBody>
+          <a:bodyPr wrap="square" lIns="254" tIns="254" rIns="254" bIns="254" rtlCol="0" anchor="t">
+            <a:normAutofit/>
+          </a:bodyPr>
+          <a:lstStyle/>
+          <a:p>
+            <a:r>
+              <a:rPr lang="en-US" sz="1380" dirty="0">
+                <a:solidFill>
+                  <a:srgbClr val="17364A"/>
+                </a:solidFill>
+                <a:latin typeface="Aptos" pitchFamily="34" charset="0"/>
+                <a:ea typeface="Aptos" pitchFamily="34" charset="-122"/>
+                <a:cs typeface="Aptos" pitchFamily="34" charset="-120"/>
+              </a:rPr>
+              <a:t>Connect risk tolerance to review level, safeguards, monitoring, and escalation.</a:t>
+            </a:r>
+            <a:endParaRPr lang="en-US" sz="1380" dirty="0"/>
+          </a:p>
+          <a:p>
+            <a:r>
+              <a:rPr lang="en-US" sz="1380" dirty="0">
+                <a:solidFill>
+                  <a:srgbClr val="17364A"/>
+                </a:solidFill>
+                <a:latin typeface="Aptos" pitchFamily="34" charset="0"/>
+                <a:ea typeface="Aptos" pitchFamily="34" charset="-122"/>
+                <a:cs typeface="Aptos" pitchFamily="34" charset="-120"/>
+              </a:rPr>
+              <a:t>Produce a draft AI risk appetite statement for leadership or governance discussion.</a:t>
+            </a:r>
+            <a:endParaRPr lang="en-US" sz="1380" dirty="0"/>
           </a:p>
         </p:txBody>
       </p:sp>
       <p:sp>
         <p:nvSpPr>
           <p:cNvPr id="16" name="Shape 14"/>
-          <p:cNvSpPr/>
-          <p:nvPr/>
-        </p:nvSpPr>
-        <p:spPr>
-          <a:xfrm>
-            <a:off x="8366760" y="3639312"/>
-            <a:ext cx="2011680" cy="0"/>
-          </a:xfrm>
-          <a:prstGeom prst="line">
-            <a:avLst/>
-          </a:prstGeom>
-          <a:noFill/>
-          <a:ln w="63500">
-            <a:solidFill>
-              <a:srgbClr val="2F8A28"/>
-            </a:solidFill>
-            <a:prstDash val="solid"/>
-          </a:ln>
-        </p:spPr>
-      </p:sp>
-      <p:sp>
-        <p:nvSpPr>
-          <p:cNvPr id="17" name="Text 15"/>
-          <p:cNvSpPr/>
-          <p:nvPr/>
-        </p:nvSpPr>
-        <p:spPr>
-          <a:xfrm>
-            <a:off x="7909560" y="3849624"/>
-            <a:ext cx="2926080" cy="164592"/>
-          </a:xfrm>
-          <a:prstGeom prst="rect">
-            <a:avLst/>
-          </a:prstGeom>
-          <a:noFill/>
-          <a:ln/>
-        </p:spPr>
-        <p:txBody>
-          <a:bodyPr wrap="square" lIns="0" tIns="0" rIns="0" bIns="0" rtlCol="0" anchor="ctr"/>
-          <a:lstStyle/>
-          <a:p>
-            <a:pPr algn="ctr" indent="0" marL="0">
-              <a:buNone/>
-            </a:pPr>
-            <a:r>
-              <a:rPr lang="en-US" sz="900" dirty="0">
-                <a:solidFill>
-                  <a:srgbClr val="003A63"/>
-                </a:solidFill>
-                <a:latin typeface="Aptos" pitchFamily="34" charset="0"/>
-                <a:ea typeface="Aptos" pitchFamily="34" charset="-122"/>
-                <a:cs typeface="Aptos" pitchFamily="34" charset="-120"/>
-              </a:rPr>
-              <a:t>Human review</a:t>
-            </a:r>
-            <a:endParaRPr lang="en-US" sz="900" dirty="0"/>
-          </a:p>
-        </p:txBody>
-      </p:sp>
-      <p:sp>
-        <p:nvSpPr>
-          <p:cNvPr id="18" name="Shape 16"/>
           <p:cNvSpPr/>
           <p:nvPr/>
         </p:nvSpPr>
@@ -14111,7 +13409,7 @@
       </p:sp>
       <p:sp>
         <p:nvSpPr>
-          <p:cNvPr id="19" name="Text 17"/>
+          <p:cNvPr id="17" name="Text 15"/>
           <p:cNvSpPr/>
           <p:nvPr/>
         </p:nvSpPr>
@@ -14150,7 +13448,7 @@
       </p:sp>
       <p:sp>
         <p:nvSpPr>
-          <p:cNvPr id="20" name="Text 18"/>
+          <p:cNvPr id="18" name="Text 16"/>
           <p:cNvSpPr/>
           <p:nvPr/>
         </p:nvSpPr>
@@ -14658,13 +13956,11 @@
             </a:avLst>
           </a:prstGeom>
           <a:solidFill>
-            <a:srgbClr val="FFFFFF">
-              <a:alpha val="88000"/>
-            </a:srgbClr>
+            <a:srgbClr val="FFFFFF"/>
           </a:solidFill>
           <a:ln w="12700">
             <a:solidFill>
-              <a:srgbClr val="D6E8F2"/>
+              <a:srgbClr val="B9D7E6"/>
             </a:solidFill>
             <a:prstDash val="solid"/>
           </a:ln>
@@ -14672,26 +13968,42 @@
       </p:sp>
       <p:sp>
         <p:nvSpPr>
-          <p:cNvPr id="14" name="Shape 12"/>
-          <p:cNvSpPr/>
-          <p:nvPr/>
-        </p:nvSpPr>
-        <p:spPr>
-          <a:xfrm>
-            <a:off x="8046720" y="3108960"/>
-            <a:ext cx="2651760" cy="896112"/>
-          </a:xfrm>
-          <a:prstGeom prst="arc">
-            <a:avLst/>
-          </a:prstGeom>
-          <a:noFill/>
-          <a:ln w="25400">
-            <a:solidFill>
-              <a:srgbClr val="0068B7"/>
-            </a:solidFill>
-            <a:prstDash val="solid"/>
-          </a:ln>
-        </p:spPr>
+          <p:cNvPr id="14" name="Text 12"/>
+          <p:cNvSpPr/>
+          <p:nvPr/>
+        </p:nvSpPr>
+        <p:spPr>
+          <a:xfrm>
+            <a:off x="7799832" y="2935224"/>
+            <a:ext cx="3145536" cy="256032"/>
+          </a:xfrm>
+          <a:prstGeom prst="rect">
+            <a:avLst/>
+          </a:prstGeom>
+          <a:noFill/>
+          <a:ln/>
+        </p:spPr>
+        <p:txBody>
+          <a:bodyPr wrap="square" lIns="0" tIns="0" rIns="0" bIns="0" rtlCol="0" anchor="ctr"/>
+          <a:lstStyle/>
+          <a:p>
+            <a:pPr indent="0" marL="0">
+              <a:buNone/>
+            </a:pPr>
+            <a:r>
+              <a:rPr lang="en-US" sz="1300" b="1" dirty="0">
+                <a:solidFill>
+                  <a:srgbClr val="0068B7"/>
+                </a:solidFill>
+                <a:latin typeface="Aptos" pitchFamily="34" charset="0"/>
+                <a:ea typeface="Aptos" pitchFamily="34" charset="-122"/>
+                <a:cs typeface="Aptos" pitchFamily="34" charset="-120"/>
+              </a:rPr>
+              <a:t>Concept checkpoints</a:t>
+            </a:r>
+            <a:endParaRPr lang="en-US" sz="1300" dirty="0"/>
+          </a:p>
+        </p:txBody>
       </p:sp>
       <p:sp>
         <p:nvSpPr>
@@ -14701,102 +14013,67 @@
         </p:nvSpPr>
         <p:spPr>
           <a:xfrm>
-            <a:off x="7909560" y="3099816"/>
-            <a:ext cx="2926080" cy="256032"/>
-          </a:xfrm>
-          <a:prstGeom prst="rect">
-            <a:avLst/>
-          </a:prstGeom>
-          <a:noFill/>
-          <a:ln/>
-        </p:spPr>
-        <p:txBody>
-          <a:bodyPr wrap="square" lIns="0" tIns="0" rIns="0" bIns="0" rtlCol="0" anchor="ctr"/>
-          <a:lstStyle/>
-          <a:p>
-            <a:pPr algn="ctr" indent="0" marL="0">
-              <a:buNone/>
-            </a:pPr>
-            <a:r>
-              <a:rPr lang="en-US" sz="1500" b="1" dirty="0">
-                <a:solidFill>
-                  <a:srgbClr val="003A63"/>
-                </a:solidFill>
-                <a:latin typeface="Aptos" pitchFamily="34" charset="0"/>
-                <a:ea typeface="Aptos" pitchFamily="34" charset="-122"/>
-                <a:cs typeface="Aptos" pitchFamily="34" charset="-120"/>
-              </a:rPr>
-              <a:t>Risk</a:t>
-            </a:r>
-            <a:endParaRPr lang="en-US" sz="1500" dirty="0"/>
+            <a:off x="7818120" y="3300984"/>
+            <a:ext cx="3090672" cy="877824"/>
+          </a:xfrm>
+          <a:prstGeom prst="rect">
+            <a:avLst/>
+          </a:prstGeom>
+          <a:noFill/>
+          <a:ln/>
+        </p:spPr>
+        <p:txBody>
+          <a:bodyPr wrap="square" lIns="254" tIns="254" rIns="254" bIns="254" rtlCol="0" anchor="t">
+            <a:normAutofit/>
+          </a:bodyPr>
+          <a:lstStyle/>
+          <a:p>
+            <a:r>
+              <a:rPr lang="en-US" sz="1380" dirty="0">
+                <a:solidFill>
+                  <a:srgbClr val="17364A"/>
+                </a:solidFill>
+                <a:latin typeface="Aptos" pitchFamily="34" charset="0"/>
+                <a:ea typeface="Aptos" pitchFamily="34" charset="-122"/>
+                <a:cs typeface="Aptos" pitchFamily="34" charset="-120"/>
+              </a:rPr>
+              <a:t>Leaders cannot manage AI risk effectively unless they define how much risk the agency is.</a:t>
+            </a:r>
+            <a:endParaRPr lang="en-US" sz="1380" dirty="0"/>
+          </a:p>
+          <a:p>
+            <a:r>
+              <a:rPr lang="en-US" sz="1380" dirty="0">
+                <a:solidFill>
+                  <a:srgbClr val="17364A"/>
+                </a:solidFill>
+                <a:latin typeface="Aptos" pitchFamily="34" charset="0"/>
+                <a:ea typeface="Aptos" pitchFamily="34" charset="-122"/>
+                <a:cs typeface="Aptos" pitchFamily="34" charset="-120"/>
+              </a:rPr>
+              <a:t>Risk appetite describes the broad level of risk an organization is willing to take in.</a:t>
+            </a:r>
+            <a:endParaRPr lang="en-US" sz="1380" dirty="0"/>
+          </a:p>
+          <a:p>
+            <a:r>
+              <a:rPr lang="en-US" sz="1380" dirty="0">
+                <a:solidFill>
+                  <a:srgbClr val="17364A"/>
+                </a:solidFill>
+                <a:latin typeface="Aptos" pitchFamily="34" charset="0"/>
+                <a:ea typeface="Aptos" pitchFamily="34" charset="-122"/>
+                <a:cs typeface="Aptos" pitchFamily="34" charset="-120"/>
+              </a:rPr>
+              <a:t>Risk tolerance translates that appetite into practical thresholds, conditions, and limits.</a:t>
+            </a:r>
+            <a:endParaRPr lang="en-US" sz="1380" dirty="0"/>
           </a:p>
         </p:txBody>
       </p:sp>
       <p:sp>
         <p:nvSpPr>
           <p:cNvPr id="16" name="Shape 14"/>
-          <p:cNvSpPr/>
-          <p:nvPr/>
-        </p:nvSpPr>
-        <p:spPr>
-          <a:xfrm>
-            <a:off x="8366760" y="3639312"/>
-            <a:ext cx="2011680" cy="0"/>
-          </a:xfrm>
-          <a:prstGeom prst="line">
-            <a:avLst/>
-          </a:prstGeom>
-          <a:noFill/>
-          <a:ln w="63500">
-            <a:solidFill>
-              <a:srgbClr val="2F8A28"/>
-            </a:solidFill>
-            <a:prstDash val="solid"/>
-          </a:ln>
-        </p:spPr>
-      </p:sp>
-      <p:sp>
-        <p:nvSpPr>
-          <p:cNvPr id="17" name="Text 15"/>
-          <p:cNvSpPr/>
-          <p:nvPr/>
-        </p:nvSpPr>
-        <p:spPr>
-          <a:xfrm>
-            <a:off x="7909560" y="3849624"/>
-            <a:ext cx="2926080" cy="164592"/>
-          </a:xfrm>
-          <a:prstGeom prst="rect">
-            <a:avLst/>
-          </a:prstGeom>
-          <a:noFill/>
-          <a:ln/>
-        </p:spPr>
-        <p:txBody>
-          <a:bodyPr wrap="square" lIns="0" tIns="0" rIns="0" bIns="0" rtlCol="0" anchor="ctr"/>
-          <a:lstStyle/>
-          <a:p>
-            <a:pPr algn="ctr" indent="0" marL="0">
-              <a:buNone/>
-            </a:pPr>
-            <a:r>
-              <a:rPr lang="en-US" sz="900" dirty="0">
-                <a:solidFill>
-                  <a:srgbClr val="003A63"/>
-                </a:solidFill>
-                <a:latin typeface="Aptos" pitchFamily="34" charset="0"/>
-                <a:ea typeface="Aptos" pitchFamily="34" charset="-122"/>
-                <a:cs typeface="Aptos" pitchFamily="34" charset="-120"/>
-              </a:rPr>
-              <a:t>Human review</a:t>
-            </a:r>
-            <a:endParaRPr lang="en-US" sz="900" dirty="0"/>
-          </a:p>
-        </p:txBody>
-      </p:sp>
-      <p:sp>
-        <p:nvSpPr>
-          <p:cNvPr id="18" name="Shape 16"/>
           <p:cNvSpPr/>
           <p:nvPr/>
         </p:nvSpPr>
@@ -14823,7 +14100,7 @@
       </p:sp>
       <p:sp>
         <p:nvSpPr>
-          <p:cNvPr id="19" name="Text 17"/>
+          <p:cNvPr id="17" name="Text 15"/>
           <p:cNvSpPr/>
           <p:nvPr/>
         </p:nvSpPr>
@@ -14862,7 +14139,7 @@
       </p:sp>
       <p:sp>
         <p:nvSpPr>
-          <p:cNvPr id="20" name="Text 18"/>
+          <p:cNvPr id="18" name="Text 16"/>
           <p:cNvSpPr/>
           <p:nvPr/>
         </p:nvSpPr>
@@ -15370,13 +14647,11 @@
             </a:avLst>
           </a:prstGeom>
           <a:solidFill>
-            <a:srgbClr val="FFFFFF">
-              <a:alpha val="88000"/>
-            </a:srgbClr>
+            <a:srgbClr val="FFFFFF"/>
           </a:solidFill>
           <a:ln w="12700">
             <a:solidFill>
-              <a:srgbClr val="D6E8F2"/>
+              <a:srgbClr val="B9D7E6"/>
             </a:solidFill>
             <a:prstDash val="solid"/>
           </a:ln>
@@ -15384,190 +14659,112 @@
       </p:sp>
       <p:sp>
         <p:nvSpPr>
-          <p:cNvPr id="14" name="Shape 12"/>
-          <p:cNvSpPr/>
-          <p:nvPr/>
-        </p:nvSpPr>
-        <p:spPr>
-          <a:xfrm>
-            <a:off x="7891272" y="3108960"/>
-            <a:ext cx="566928" cy="566928"/>
-          </a:xfrm>
-          <a:prstGeom prst="ellipse">
-            <a:avLst/>
-          </a:prstGeom>
-          <a:solidFill>
-            <a:srgbClr val="0068B7"/>
-          </a:solidFill>
-          <a:ln w="12700">
-            <a:solidFill>
-              <a:srgbClr val="0068B7"/>
-            </a:solidFill>
-            <a:prstDash val="solid"/>
-          </a:ln>
-        </p:spPr>
-      </p:sp>
-      <p:sp>
-        <p:nvSpPr>
-          <p:cNvPr id="15" name="Shape 13"/>
-          <p:cNvSpPr/>
-          <p:nvPr/>
-        </p:nvSpPr>
-        <p:spPr>
-          <a:xfrm>
-            <a:off x="10287000" y="3108960"/>
-            <a:ext cx="566928" cy="566928"/>
-          </a:xfrm>
-          <a:prstGeom prst="ellipse">
-            <a:avLst/>
-          </a:prstGeom>
-          <a:solidFill>
-            <a:srgbClr val="2F8A28"/>
-          </a:solidFill>
-          <a:ln w="12700">
-            <a:solidFill>
-              <a:srgbClr val="2F8A28"/>
-            </a:solidFill>
-            <a:prstDash val="solid"/>
-          </a:ln>
-        </p:spPr>
+          <p:cNvPr id="14" name="Text 12"/>
+          <p:cNvSpPr/>
+          <p:nvPr/>
+        </p:nvSpPr>
+        <p:spPr>
+          <a:xfrm>
+            <a:off x="7799832" y="2935224"/>
+            <a:ext cx="3145536" cy="256032"/>
+          </a:xfrm>
+          <a:prstGeom prst="rect">
+            <a:avLst/>
+          </a:prstGeom>
+          <a:noFill/>
+          <a:ln/>
+        </p:spPr>
+        <p:txBody>
+          <a:bodyPr wrap="square" lIns="0" tIns="0" rIns="0" bIns="0" rtlCol="0" anchor="ctr"/>
+          <a:lstStyle/>
+          <a:p>
+            <a:pPr indent="0" marL="0">
+              <a:buNone/>
+            </a:pPr>
+            <a:r>
+              <a:rPr lang="en-US" sz="1300" b="1" dirty="0">
+                <a:solidFill>
+                  <a:srgbClr val="0068B7"/>
+                </a:solidFill>
+                <a:latin typeface="Aptos" pitchFamily="34" charset="0"/>
+                <a:ea typeface="Aptos" pitchFamily="34" charset="-122"/>
+                <a:cs typeface="Aptos" pitchFamily="34" charset="-120"/>
+              </a:rPr>
+              <a:t>Concept checkpoints</a:t>
+            </a:r>
+            <a:endParaRPr lang="en-US" sz="1300" dirty="0"/>
+          </a:p>
+        </p:txBody>
+      </p:sp>
+      <p:sp>
+        <p:nvSpPr>
+          <p:cNvPr id="15" name="Text 13"/>
+          <p:cNvSpPr/>
+          <p:nvPr/>
+        </p:nvSpPr>
+        <p:spPr>
+          <a:xfrm>
+            <a:off x="7818120" y="3300984"/>
+            <a:ext cx="3090672" cy="877824"/>
+          </a:xfrm>
+          <a:prstGeom prst="rect">
+            <a:avLst/>
+          </a:prstGeom>
+          <a:noFill/>
+          <a:ln/>
+        </p:spPr>
+        <p:txBody>
+          <a:bodyPr wrap="square" lIns="254" tIns="254" rIns="254" bIns="254" rtlCol="0" anchor="t">
+            <a:normAutofit/>
+          </a:bodyPr>
+          <a:lstStyle/>
+          <a:p>
+            <a:r>
+              <a:rPr lang="en-US" sz="1380" dirty="0">
+                <a:solidFill>
+                  <a:srgbClr val="17364A"/>
+                </a:solidFill>
+                <a:latin typeface="Aptos" pitchFamily="34" charset="0"/>
+                <a:ea typeface="Aptos" pitchFamily="34" charset="-122"/>
+                <a:cs typeface="Aptos" pitchFamily="34" charset="-120"/>
+              </a:rPr>
+              <a:t>It is not legal advice and does not replace review by agency legal counsel, privacy.</a:t>
+            </a:r>
+            <a:endParaRPr lang="en-US" sz="1380" dirty="0"/>
+          </a:p>
+          <a:p>
+            <a:r>
+              <a:rPr lang="en-US" sz="1380" dirty="0">
+                <a:solidFill>
+                  <a:srgbClr val="17364A"/>
+                </a:solidFill>
+                <a:latin typeface="Aptos" pitchFamily="34" charset="0"/>
+                <a:ea typeface="Aptos" pitchFamily="34" charset="-122"/>
+                <a:cs typeface="Aptos" pitchFamily="34" charset="-120"/>
+              </a:rPr>
+              <a:t>Requirements may vary by state, locality, territory, Tribe, agency, funding source,.</a:t>
+            </a:r>
+            <a:endParaRPr lang="en-US" sz="1380" dirty="0"/>
+          </a:p>
+          <a:p>
+            <a:r>
+              <a:rPr lang="en-US" sz="1380" dirty="0">
+                <a:solidFill>
+                  <a:srgbClr val="17364A"/>
+                </a:solidFill>
+                <a:latin typeface="Aptos" pitchFamily="34" charset="0"/>
+                <a:ea typeface="Aptos" pitchFamily="34" charset="-122"/>
+                <a:cs typeface="Aptos" pitchFamily="34" charset="-120"/>
+              </a:rPr>
+              <a:t>Learners should use this module to identify the issues that require review and should.</a:t>
+            </a:r>
+            <a:endParaRPr lang="en-US" sz="1380" dirty="0"/>
+          </a:p>
+        </p:txBody>
       </p:sp>
       <p:sp>
         <p:nvSpPr>
           <p:cNvPr id="16" name="Shape 14"/>
-          <p:cNvSpPr/>
-          <p:nvPr/>
-        </p:nvSpPr>
-        <p:spPr>
-          <a:xfrm>
-            <a:off x="9089136" y="3456432"/>
-            <a:ext cx="566928" cy="566928"/>
-          </a:xfrm>
-          <a:prstGeom prst="ellipse">
-            <a:avLst/>
-          </a:prstGeom>
-          <a:solidFill>
-            <a:srgbClr val="6A4CA3"/>
-          </a:solidFill>
-          <a:ln w="12700">
-            <a:solidFill>
-              <a:srgbClr val="6A4CA3"/>
-            </a:solidFill>
-            <a:prstDash val="solid"/>
-          </a:ln>
-        </p:spPr>
-      </p:sp>
-      <p:sp>
-        <p:nvSpPr>
-          <p:cNvPr id="17" name="Shape 15"/>
-          <p:cNvSpPr/>
-          <p:nvPr/>
-        </p:nvSpPr>
-        <p:spPr>
-          <a:xfrm>
-            <a:off x="8385048" y="3419856"/>
-            <a:ext cx="1975104" cy="0"/>
-          </a:xfrm>
-          <a:prstGeom prst="line">
-            <a:avLst/>
-          </a:prstGeom>
-          <a:noFill/>
-          <a:ln w="25400">
-            <a:solidFill>
-              <a:srgbClr val="8ABBD8"/>
-            </a:solidFill>
-            <a:prstDash val="solid"/>
-          </a:ln>
-        </p:spPr>
-      </p:sp>
-      <p:sp>
-        <p:nvSpPr>
-          <p:cNvPr id="18" name="Shape 16"/>
-          <p:cNvSpPr/>
-          <p:nvPr/>
-        </p:nvSpPr>
-        <p:spPr>
-          <a:xfrm>
-            <a:off x="8202168" y="3630168"/>
-            <a:ext cx="1170432" cy="118872"/>
-          </a:xfrm>
-          <a:prstGeom prst="line">
-            <a:avLst/>
-          </a:prstGeom>
-          <a:noFill/>
-          <a:ln w="25400">
-            <a:solidFill>
-              <a:srgbClr val="8ABBD8"/>
-            </a:solidFill>
-            <a:prstDash val="solid"/>
-          </a:ln>
-        </p:spPr>
-      </p:sp>
-      <p:sp>
-        <p:nvSpPr>
-          <p:cNvPr id="19" name="Shape 17"/>
-          <p:cNvSpPr/>
-          <p:nvPr/>
-        </p:nvSpPr>
-        <p:spPr>
-          <a:xfrm>
-            <a:off x="10543032" y="3630168"/>
-            <a:ext cx="-1170432" cy="118872"/>
-          </a:xfrm>
-          <a:prstGeom prst="line">
-            <a:avLst/>
-          </a:prstGeom>
-          <a:noFill/>
-          <a:ln w="25400">
-            <a:solidFill>
-              <a:srgbClr val="8ABBD8"/>
-            </a:solidFill>
-            <a:prstDash val="solid"/>
-          </a:ln>
-        </p:spPr>
-      </p:sp>
-      <p:sp>
-        <p:nvSpPr>
-          <p:cNvPr id="20" name="Text 18"/>
-          <p:cNvSpPr/>
-          <p:nvPr/>
-        </p:nvSpPr>
-        <p:spPr>
-          <a:xfrm>
-            <a:off x="7863840" y="4069080"/>
-            <a:ext cx="3017520" cy="164592"/>
-          </a:xfrm>
-          <a:prstGeom prst="rect">
-            <a:avLst/>
-          </a:prstGeom>
-          <a:noFill/>
-          <a:ln/>
-        </p:spPr>
-        <p:txBody>
-          <a:bodyPr wrap="square" lIns="0" tIns="0" rIns="0" bIns="0" rtlCol="0" anchor="ctr"/>
-          <a:lstStyle/>
-          <a:p>
-            <a:pPr algn="ctr" indent="0" marL="0">
-              <a:buNone/>
-            </a:pPr>
-            <a:r>
-              <a:rPr lang="en-US" sz="900" b="1" dirty="0">
-                <a:solidFill>
-                  <a:srgbClr val="003A63"/>
-                </a:solidFill>
-                <a:latin typeface="Aptos" pitchFamily="34" charset="0"/>
-                <a:ea typeface="Aptos" pitchFamily="34" charset="-122"/>
-                <a:cs typeface="Aptos" pitchFamily="34" charset="-120"/>
-              </a:rPr>
-              <a:t>Decision rights</a:t>
-            </a:r>
-            <a:endParaRPr lang="en-US" sz="900" dirty="0"/>
-          </a:p>
-        </p:txBody>
-      </p:sp>
-      <p:sp>
-        <p:nvSpPr>
-          <p:cNvPr id="21" name="Shape 19"/>
           <p:cNvSpPr/>
           <p:nvPr/>
         </p:nvSpPr>
@@ -15594,7 +14791,7 @@
       </p:sp>
       <p:sp>
         <p:nvSpPr>
-          <p:cNvPr id="22" name="Text 20"/>
+          <p:cNvPr id="17" name="Text 15"/>
           <p:cNvSpPr/>
           <p:nvPr/>
         </p:nvSpPr>
@@ -15633,7 +14830,7 @@
       </p:sp>
       <p:sp>
         <p:nvSpPr>
-          <p:cNvPr id="23" name="Text 21"/>
+          <p:cNvPr id="18" name="Text 16"/>
           <p:cNvSpPr/>
           <p:nvPr/>
         </p:nvSpPr>
@@ -16141,13 +15338,11 @@
             </a:avLst>
           </a:prstGeom>
           <a:solidFill>
-            <a:srgbClr val="FFFFFF">
-              <a:alpha val="88000"/>
-            </a:srgbClr>
+            <a:srgbClr val="FFFFFF"/>
           </a:solidFill>
           <a:ln w="12700">
             <a:solidFill>
-              <a:srgbClr val="D6E8F2"/>
+              <a:srgbClr val="B9D7E6"/>
             </a:solidFill>
             <a:prstDash val="solid"/>
           </a:ln>
@@ -16155,26 +15350,42 @@
       </p:sp>
       <p:sp>
         <p:nvSpPr>
-          <p:cNvPr id="14" name="Shape 12"/>
-          <p:cNvSpPr/>
-          <p:nvPr/>
-        </p:nvSpPr>
-        <p:spPr>
-          <a:xfrm>
-            <a:off x="8046720" y="3108960"/>
-            <a:ext cx="2651760" cy="896112"/>
-          </a:xfrm>
-          <a:prstGeom prst="arc">
-            <a:avLst/>
-          </a:prstGeom>
-          <a:noFill/>
-          <a:ln w="25400">
-            <a:solidFill>
-              <a:srgbClr val="0068B7"/>
-            </a:solidFill>
-            <a:prstDash val="solid"/>
-          </a:ln>
-        </p:spPr>
+          <p:cNvPr id="14" name="Text 12"/>
+          <p:cNvSpPr/>
+          <p:nvPr/>
+        </p:nvSpPr>
+        <p:spPr>
+          <a:xfrm>
+            <a:off x="7799832" y="2935224"/>
+            <a:ext cx="3145536" cy="256032"/>
+          </a:xfrm>
+          <a:prstGeom prst="rect">
+            <a:avLst/>
+          </a:prstGeom>
+          <a:noFill/>
+          <a:ln/>
+        </p:spPr>
+        <p:txBody>
+          <a:bodyPr wrap="square" lIns="0" tIns="0" rIns="0" bIns="0" rtlCol="0" anchor="ctr"/>
+          <a:lstStyle/>
+          <a:p>
+            <a:pPr indent="0" marL="0">
+              <a:buNone/>
+            </a:pPr>
+            <a:r>
+              <a:rPr lang="en-US" sz="1300" b="1" dirty="0">
+                <a:solidFill>
+                  <a:srgbClr val="0068B7"/>
+                </a:solidFill>
+                <a:latin typeface="Aptos" pitchFamily="34" charset="0"/>
+                <a:ea typeface="Aptos" pitchFamily="34" charset="-122"/>
+                <a:cs typeface="Aptos" pitchFamily="34" charset="-120"/>
+              </a:rPr>
+              <a:t>Concept checkpoints</a:t>
+            </a:r>
+            <a:endParaRPr lang="en-US" sz="1300" dirty="0"/>
+          </a:p>
+        </p:txBody>
       </p:sp>
       <p:sp>
         <p:nvSpPr>
@@ -16184,102 +15395,67 @@
         </p:nvSpPr>
         <p:spPr>
           <a:xfrm>
-            <a:off x="7909560" y="3099816"/>
-            <a:ext cx="2926080" cy="256032"/>
-          </a:xfrm>
-          <a:prstGeom prst="rect">
-            <a:avLst/>
-          </a:prstGeom>
-          <a:noFill/>
-          <a:ln/>
-        </p:spPr>
-        <p:txBody>
-          <a:bodyPr wrap="square" lIns="0" tIns="0" rIns="0" bIns="0" rtlCol="0" anchor="ctr"/>
-          <a:lstStyle/>
-          <a:p>
-            <a:pPr algn="ctr" indent="0" marL="0">
-              <a:buNone/>
-            </a:pPr>
-            <a:r>
-              <a:rPr lang="en-US" sz="1500" b="1" dirty="0">
-                <a:solidFill>
-                  <a:srgbClr val="003A63"/>
-                </a:solidFill>
-                <a:latin typeface="Aptos" pitchFamily="34" charset="0"/>
-                <a:ea typeface="Aptos" pitchFamily="34" charset="-122"/>
-                <a:cs typeface="Aptos" pitchFamily="34" charset="-120"/>
-              </a:rPr>
-              <a:t>Risk</a:t>
-            </a:r>
-            <a:endParaRPr lang="en-US" sz="1500" dirty="0"/>
+            <a:off x="7818120" y="3300984"/>
+            <a:ext cx="3090672" cy="877824"/>
+          </a:xfrm>
+          <a:prstGeom prst="rect">
+            <a:avLst/>
+          </a:prstGeom>
+          <a:noFill/>
+          <a:ln/>
+        </p:spPr>
+        <p:txBody>
+          <a:bodyPr wrap="square" lIns="254" tIns="254" rIns="254" bIns="254" rtlCol="0" anchor="t">
+            <a:normAutofit/>
+          </a:bodyPr>
+          <a:lstStyle/>
+          <a:p>
+            <a:r>
+              <a:rPr lang="en-US" sz="1380" dirty="0">
+                <a:solidFill>
+                  <a:srgbClr val="17364A"/>
+                </a:solidFill>
+                <a:latin typeface="Aptos" pitchFamily="34" charset="0"/>
+                <a:ea typeface="Aptos" pitchFamily="34" charset="-122"/>
+                <a:cs typeface="Aptos" pitchFamily="34" charset="-120"/>
+              </a:rPr>
+              <a:t>A generative AI tool might be acceptable for drafting internal meeting notes but not for.</a:t>
+            </a:r>
+            <a:endParaRPr lang="en-US" sz="1380" dirty="0"/>
+          </a:p>
+          <a:p>
+            <a:r>
+              <a:rPr lang="en-US" sz="1380" dirty="0">
+                <a:solidFill>
+                  <a:srgbClr val="17364A"/>
+                </a:solidFill>
+                <a:latin typeface="Aptos" pitchFamily="34" charset="0"/>
+                <a:ea typeface="Aptos" pitchFamily="34" charset="-122"/>
+                <a:cs typeface="Aptos" pitchFamily="34" charset="-120"/>
+              </a:rPr>
+              <a:t>An agentic workflow might be acceptable for creating a draft task but not for sending an.</a:t>
+            </a:r>
+            <a:endParaRPr lang="en-US" sz="1380" dirty="0"/>
+          </a:p>
+          <a:p>
+            <a:r>
+              <a:rPr lang="en-US" sz="1380" dirty="0">
+                <a:solidFill>
+                  <a:srgbClr val="17364A"/>
+                </a:solidFill>
+                <a:latin typeface="Aptos" pitchFamily="34" charset="0"/>
+                <a:ea typeface="Aptos" pitchFamily="34" charset="-122"/>
+                <a:cs typeface="Aptos" pitchFamily="34" charset="-120"/>
+              </a:rPr>
+              <a:t>Risk appetite helps agencies explain these distinctions.</a:t>
+            </a:r>
+            <a:endParaRPr lang="en-US" sz="1380" dirty="0"/>
           </a:p>
         </p:txBody>
       </p:sp>
       <p:sp>
         <p:nvSpPr>
           <p:cNvPr id="16" name="Shape 14"/>
-          <p:cNvSpPr/>
-          <p:nvPr/>
-        </p:nvSpPr>
-        <p:spPr>
-          <a:xfrm>
-            <a:off x="8366760" y="3639312"/>
-            <a:ext cx="2011680" cy="0"/>
-          </a:xfrm>
-          <a:prstGeom prst="line">
-            <a:avLst/>
-          </a:prstGeom>
-          <a:noFill/>
-          <a:ln w="63500">
-            <a:solidFill>
-              <a:srgbClr val="2F8A28"/>
-            </a:solidFill>
-            <a:prstDash val="solid"/>
-          </a:ln>
-        </p:spPr>
-      </p:sp>
-      <p:sp>
-        <p:nvSpPr>
-          <p:cNvPr id="17" name="Text 15"/>
-          <p:cNvSpPr/>
-          <p:nvPr/>
-        </p:nvSpPr>
-        <p:spPr>
-          <a:xfrm>
-            <a:off x="7909560" y="3849624"/>
-            <a:ext cx="2926080" cy="164592"/>
-          </a:xfrm>
-          <a:prstGeom prst="rect">
-            <a:avLst/>
-          </a:prstGeom>
-          <a:noFill/>
-          <a:ln/>
-        </p:spPr>
-        <p:txBody>
-          <a:bodyPr wrap="square" lIns="0" tIns="0" rIns="0" bIns="0" rtlCol="0" anchor="ctr"/>
-          <a:lstStyle/>
-          <a:p>
-            <a:pPr algn="ctr" indent="0" marL="0">
-              <a:buNone/>
-            </a:pPr>
-            <a:r>
-              <a:rPr lang="en-US" sz="900" dirty="0">
-                <a:solidFill>
-                  <a:srgbClr val="003A63"/>
-                </a:solidFill>
-                <a:latin typeface="Aptos" pitchFamily="34" charset="0"/>
-                <a:ea typeface="Aptos" pitchFamily="34" charset="-122"/>
-                <a:cs typeface="Aptos" pitchFamily="34" charset="-120"/>
-              </a:rPr>
-              <a:t>Human review</a:t>
-            </a:r>
-            <a:endParaRPr lang="en-US" sz="900" dirty="0"/>
-          </a:p>
-        </p:txBody>
-      </p:sp>
-      <p:sp>
-        <p:nvSpPr>
-          <p:cNvPr id="18" name="Shape 16"/>
           <p:cNvSpPr/>
           <p:nvPr/>
         </p:nvSpPr>
@@ -16306,7 +15482,7 @@
       </p:sp>
       <p:sp>
         <p:nvSpPr>
-          <p:cNvPr id="19" name="Text 17"/>
+          <p:cNvPr id="17" name="Text 15"/>
           <p:cNvSpPr/>
           <p:nvPr/>
         </p:nvSpPr>
@@ -16345,7 +15521,7 @@
       </p:sp>
       <p:sp>
         <p:nvSpPr>
-          <p:cNvPr id="20" name="Text 18"/>
+          <p:cNvPr id="18" name="Text 16"/>
           <p:cNvSpPr/>
           <p:nvPr/>
         </p:nvSpPr>
@@ -16853,13 +16029,11 @@
             </a:avLst>
           </a:prstGeom>
           <a:solidFill>
-            <a:srgbClr val="FFFFFF">
-              <a:alpha val="88000"/>
-            </a:srgbClr>
+            <a:srgbClr val="FFFFFF"/>
           </a:solidFill>
           <a:ln w="12700">
             <a:solidFill>
-              <a:srgbClr val="D6E8F2"/>
+              <a:srgbClr val="B9D7E6"/>
             </a:solidFill>
             <a:prstDash val="solid"/>
           </a:ln>
@@ -16867,26 +16041,42 @@
       </p:sp>
       <p:sp>
         <p:nvSpPr>
-          <p:cNvPr id="14" name="Shape 12"/>
-          <p:cNvSpPr/>
-          <p:nvPr/>
-        </p:nvSpPr>
-        <p:spPr>
-          <a:xfrm>
-            <a:off x="8046720" y="3108960"/>
-            <a:ext cx="2651760" cy="896112"/>
-          </a:xfrm>
-          <a:prstGeom prst="arc">
-            <a:avLst/>
-          </a:prstGeom>
-          <a:noFill/>
-          <a:ln w="25400">
-            <a:solidFill>
-              <a:srgbClr val="0068B7"/>
-            </a:solidFill>
-            <a:prstDash val="solid"/>
-          </a:ln>
-        </p:spPr>
+          <p:cNvPr id="14" name="Text 12"/>
+          <p:cNvSpPr/>
+          <p:nvPr/>
+        </p:nvSpPr>
+        <p:spPr>
+          <a:xfrm>
+            <a:off x="7799832" y="2935224"/>
+            <a:ext cx="3145536" cy="256032"/>
+          </a:xfrm>
+          <a:prstGeom prst="rect">
+            <a:avLst/>
+          </a:prstGeom>
+          <a:noFill/>
+          <a:ln/>
+        </p:spPr>
+        <p:txBody>
+          <a:bodyPr wrap="square" lIns="0" tIns="0" rIns="0" bIns="0" rtlCol="0" anchor="ctr"/>
+          <a:lstStyle/>
+          <a:p>
+            <a:pPr indent="0" marL="0">
+              <a:buNone/>
+            </a:pPr>
+            <a:r>
+              <a:rPr lang="en-US" sz="1300" b="1" dirty="0">
+                <a:solidFill>
+                  <a:srgbClr val="0068B7"/>
+                </a:solidFill>
+                <a:latin typeface="Aptos" pitchFamily="34" charset="0"/>
+                <a:ea typeface="Aptos" pitchFamily="34" charset="-122"/>
+                <a:cs typeface="Aptos" pitchFamily="34" charset="-120"/>
+              </a:rPr>
+              <a:t>Concept checkpoints</a:t>
+            </a:r>
+            <a:endParaRPr lang="en-US" sz="1300" dirty="0"/>
+          </a:p>
+        </p:txBody>
       </p:sp>
       <p:sp>
         <p:nvSpPr>
@@ -16896,102 +16086,67 @@
         </p:nvSpPr>
         <p:spPr>
           <a:xfrm>
-            <a:off x="7909560" y="3099816"/>
-            <a:ext cx="2926080" cy="256032"/>
-          </a:xfrm>
-          <a:prstGeom prst="rect">
-            <a:avLst/>
-          </a:prstGeom>
-          <a:noFill/>
-          <a:ln/>
-        </p:spPr>
-        <p:txBody>
-          <a:bodyPr wrap="square" lIns="0" tIns="0" rIns="0" bIns="0" rtlCol="0" anchor="ctr"/>
-          <a:lstStyle/>
-          <a:p>
-            <a:pPr algn="ctr" indent="0" marL="0">
-              <a:buNone/>
-            </a:pPr>
-            <a:r>
-              <a:rPr lang="en-US" sz="1500" b="1" dirty="0">
-                <a:solidFill>
-                  <a:srgbClr val="003A63"/>
-                </a:solidFill>
-                <a:latin typeface="Aptos" pitchFamily="34" charset="0"/>
-                <a:ea typeface="Aptos" pitchFamily="34" charset="-122"/>
-                <a:cs typeface="Aptos" pitchFamily="34" charset="-120"/>
-              </a:rPr>
-              <a:t>Risk</a:t>
-            </a:r>
-            <a:endParaRPr lang="en-US" sz="1500" dirty="0"/>
+            <a:off x="7818120" y="3300984"/>
+            <a:ext cx="3090672" cy="877824"/>
+          </a:xfrm>
+          <a:prstGeom prst="rect">
+            <a:avLst/>
+          </a:prstGeom>
+          <a:noFill/>
+          <a:ln/>
+        </p:spPr>
+        <p:txBody>
+          <a:bodyPr wrap="square" lIns="254" tIns="254" rIns="254" bIns="254" rtlCol="0" anchor="t">
+            <a:normAutofit/>
+          </a:bodyPr>
+          <a:lstStyle/>
+          <a:p>
+            <a:r>
+              <a:rPr lang="en-US" sz="1380" dirty="0">
+                <a:solidFill>
+                  <a:srgbClr val="17364A"/>
+                </a:solidFill>
+                <a:latin typeface="Aptos" pitchFamily="34" charset="0"/>
+                <a:ea typeface="Aptos" pitchFamily="34" charset="-122"/>
+                <a:cs typeface="Aptos" pitchFamily="34" charset="-120"/>
+              </a:rPr>
+              <a:t>An agency may define a higher risk appetite for internal administrative uses that do not.</a:t>
+            </a:r>
+            <a:endParaRPr lang="en-US" sz="1380" dirty="0"/>
+          </a:p>
+          <a:p>
+            <a:r>
+              <a:rPr lang="en-US" sz="1380" dirty="0">
+                <a:solidFill>
+                  <a:srgbClr val="17364A"/>
+                </a:solidFill>
+                <a:latin typeface="Aptos" pitchFamily="34" charset="0"/>
+                <a:ea typeface="Aptos" pitchFamily="34" charset="-122"/>
+                <a:cs typeface="Aptos" pitchFamily="34" charset="-120"/>
+              </a:rPr>
+              <a:t>It may define a moderate appetite for staff-facing decision support when human review,.</a:t>
+            </a:r>
+            <a:endParaRPr lang="en-US" sz="1380" dirty="0"/>
+          </a:p>
+          <a:p>
+            <a:r>
+              <a:rPr lang="en-US" sz="1380" dirty="0">
+                <a:solidFill>
+                  <a:srgbClr val="17364A"/>
+                </a:solidFill>
+                <a:latin typeface="Aptos" pitchFamily="34" charset="0"/>
+                <a:ea typeface="Aptos" pitchFamily="34" charset="-122"/>
+                <a:cs typeface="Aptos" pitchFamily="34" charset="-120"/>
+              </a:rPr>
+              <a:t>It may define a very low appetite for unsupervised public-facing advice, automated.</a:t>
+            </a:r>
+            <a:endParaRPr lang="en-US" sz="1380" dirty="0"/>
           </a:p>
         </p:txBody>
       </p:sp>
       <p:sp>
         <p:nvSpPr>
           <p:cNvPr id="16" name="Shape 14"/>
-          <p:cNvSpPr/>
-          <p:nvPr/>
-        </p:nvSpPr>
-        <p:spPr>
-          <a:xfrm>
-            <a:off x="8366760" y="3639312"/>
-            <a:ext cx="2011680" cy="0"/>
-          </a:xfrm>
-          <a:prstGeom prst="line">
-            <a:avLst/>
-          </a:prstGeom>
-          <a:noFill/>
-          <a:ln w="63500">
-            <a:solidFill>
-              <a:srgbClr val="2F8A28"/>
-            </a:solidFill>
-            <a:prstDash val="solid"/>
-          </a:ln>
-        </p:spPr>
-      </p:sp>
-      <p:sp>
-        <p:nvSpPr>
-          <p:cNvPr id="17" name="Text 15"/>
-          <p:cNvSpPr/>
-          <p:nvPr/>
-        </p:nvSpPr>
-        <p:spPr>
-          <a:xfrm>
-            <a:off x="7909560" y="3849624"/>
-            <a:ext cx="2926080" cy="164592"/>
-          </a:xfrm>
-          <a:prstGeom prst="rect">
-            <a:avLst/>
-          </a:prstGeom>
-          <a:noFill/>
-          <a:ln/>
-        </p:spPr>
-        <p:txBody>
-          <a:bodyPr wrap="square" lIns="0" tIns="0" rIns="0" bIns="0" rtlCol="0" anchor="ctr"/>
-          <a:lstStyle/>
-          <a:p>
-            <a:pPr algn="ctr" indent="0" marL="0">
-              <a:buNone/>
-            </a:pPr>
-            <a:r>
-              <a:rPr lang="en-US" sz="900" dirty="0">
-                <a:solidFill>
-                  <a:srgbClr val="003A63"/>
-                </a:solidFill>
-                <a:latin typeface="Aptos" pitchFamily="34" charset="0"/>
-                <a:ea typeface="Aptos" pitchFamily="34" charset="-122"/>
-                <a:cs typeface="Aptos" pitchFamily="34" charset="-120"/>
-              </a:rPr>
-              <a:t>Human review</a:t>
-            </a:r>
-            <a:endParaRPr lang="en-US" sz="900" dirty="0"/>
-          </a:p>
-        </p:txBody>
-      </p:sp>
-      <p:sp>
-        <p:nvSpPr>
-          <p:cNvPr id="18" name="Shape 16"/>
           <p:cNvSpPr/>
           <p:nvPr/>
         </p:nvSpPr>
@@ -17018,7 +16173,7 @@
       </p:sp>
       <p:sp>
         <p:nvSpPr>
-          <p:cNvPr id="19" name="Text 17"/>
+          <p:cNvPr id="17" name="Text 15"/>
           <p:cNvSpPr/>
           <p:nvPr/>
         </p:nvSpPr>
@@ -17057,7 +16212,7 @@
       </p:sp>
       <p:sp>
         <p:nvSpPr>
-          <p:cNvPr id="20" name="Text 18"/>
+          <p:cNvPr id="18" name="Text 16"/>
           <p:cNvSpPr/>
           <p:nvPr/>
         </p:nvSpPr>

--- a/downloads/presentations/modules/gov-410.pptx
+++ b/downloads/presentations/modules/gov-410.pptx
@@ -3253,49 +3253,58 @@
           <a:ln/>
         </p:spPr>
         <p:txBody>
-          <a:bodyPr wrap="square" lIns="635" tIns="635" rIns="635" bIns="635" rtlCol="0" anchor="t">
+          <a:bodyPr wrap="square" lIns="1016" tIns="1016" rIns="1016" bIns="1016" rtlCol="0" anchor="t">
             <a:normAutofit/>
           </a:bodyPr>
           <a:lstStyle/>
           <a:p>
+            <a:pPr indent="0" marL="0">
+              <a:buNone/>
+            </a:pPr>
             <a:r>
               <a:rPr lang="en-US" sz="2100" dirty="0">
                 <a:solidFill>
-                  <a:srgbClr val="17364A"/>
-                </a:solidFill>
-                <a:latin typeface="Aptos" pitchFamily="34" charset="0"/>
-                <a:ea typeface="Aptos" pitchFamily="34" charset="-122"/>
-                <a:cs typeface="Aptos" pitchFamily="34" charset="-120"/>
-              </a:rPr>
-              <a:t>Risk appetite should be expressed in plain language and translated into operating rules.</a:t>
+                  <a:srgbClr val="003A63"/>
+                </a:solidFill>
+                <a:latin typeface="Aptos" pitchFamily="34" charset="0"/>
+                <a:ea typeface="Aptos" pitchFamily="34" charset="-122"/>
+                <a:cs typeface="Aptos" pitchFamily="34" charset="-120"/>
+              </a:rPr>
+              <a:t>• Risk appetite should be expressed in plain language and translated into operating rules.</a:t>
             </a:r>
             <a:endParaRPr lang="en-US" sz="2100" dirty="0"/>
           </a:p>
           <a:p>
+            <a:pPr indent="0" marL="0">
+              <a:buNone/>
+            </a:pPr>
             <a:r>
               <a:rPr lang="en-US" sz="2100" dirty="0">
                 <a:solidFill>
-                  <a:srgbClr val="17364A"/>
-                </a:solidFill>
-                <a:latin typeface="Aptos" pitchFamily="34" charset="0"/>
-                <a:ea typeface="Aptos" pitchFamily="34" charset="-122"/>
-                <a:cs typeface="Aptos" pitchFamily="34" charset="-120"/>
-              </a:rPr>
-              <a:t>For example, an agency might state that it encourages low-risk AI uses that reduce internal.</a:t>
+                  <a:srgbClr val="003A63"/>
+                </a:solidFill>
+                <a:latin typeface="Aptos" pitchFamily="34" charset="0"/>
+                <a:ea typeface="Aptos" pitchFamily="34" charset="-122"/>
+                <a:cs typeface="Aptos" pitchFamily="34" charset="-120"/>
+              </a:rPr>
+              <a:t>• For example, an agency might state that it encourages low-risk AI uses that reduce internal.</a:t>
             </a:r>
             <a:endParaRPr lang="en-US" sz="2100" dirty="0"/>
           </a:p>
           <a:p>
+            <a:pPr indent="0" marL="0">
+              <a:buNone/>
+            </a:pPr>
             <a:r>
               <a:rPr lang="en-US" sz="2100" dirty="0">
                 <a:solidFill>
-                  <a:srgbClr val="17364A"/>
-                </a:solidFill>
-                <a:latin typeface="Aptos" pitchFamily="34" charset="0"/>
-                <a:ea typeface="Aptos" pitchFamily="34" charset="-122"/>
-                <a:cs typeface="Aptos" pitchFamily="34" charset="-120"/>
-              </a:rPr>
-              <a:t>It might state that it will consider moderate-risk uses involving operational data only with documented.</a:t>
+                  <a:srgbClr val="003A63"/>
+                </a:solidFill>
+                <a:latin typeface="Aptos" pitchFamily="34" charset="0"/>
+                <a:ea typeface="Aptos" pitchFamily="34" charset="-122"/>
+                <a:cs typeface="Aptos" pitchFamily="34" charset="-120"/>
+              </a:rPr>
+              <a:t>• It might state that it will consider moderate-risk uses involving operational data only with.</a:t>
             </a:r>
             <a:endParaRPr lang="en-US" sz="2100" dirty="0"/>
           </a:p>
@@ -3375,17 +3384,17 @@
         </p:nvSpPr>
         <p:spPr>
           <a:xfrm>
-            <a:off x="7799832" y="1828800"/>
-            <a:ext cx="3145536" cy="685800"/>
-          </a:xfrm>
-          <a:prstGeom prst="rect">
-            <a:avLst/>
-          </a:prstGeom>
-          <a:noFill/>
-          <a:ln/>
-        </p:spPr>
-        <p:txBody>
-          <a:bodyPr wrap="square" lIns="0" tIns="0" rIns="0" bIns="0" rtlCol="0" anchor="t">
+            <a:off x="7799832" y="1801368"/>
+            <a:ext cx="3145536" cy="758952"/>
+          </a:xfrm>
+          <a:prstGeom prst="rect">
+            <a:avLst/>
+          </a:prstGeom>
+          <a:noFill/>
+          <a:ln/>
+        </p:spPr>
+        <p:txBody>
+          <a:bodyPr wrap="square" lIns="254" tIns="254" rIns="254" bIns="254" rtlCol="0" anchor="t">
             <a:normAutofit/>
           </a:bodyPr>
           <a:lstStyle/>
@@ -3394,7 +3403,7 @@
               <a:buNone/>
             </a:pPr>
             <a:r>
-              <a:rPr lang="en-US" sz="1550" dirty="0">
+              <a:rPr lang="en-US" sz="1320" dirty="0">
                 <a:solidFill>
                   <a:srgbClr val="17364A"/>
                 </a:solidFill>
@@ -3404,7 +3413,7 @@
               </a:rPr>
               <a:t>Risk appetite should be expressed in plain language and translated into operating rules.</a:t>
             </a:r>
-            <a:endParaRPr lang="en-US" sz="1550" dirty="0"/>
+            <a:endParaRPr lang="en-US" sz="1320" dirty="0"/>
           </a:p>
         </p:txBody>
       </p:sp>
@@ -3492,13 +3501,16 @@
           <a:ln/>
         </p:spPr>
         <p:txBody>
-          <a:bodyPr wrap="square" lIns="254" tIns="254" rIns="254" bIns="254" rtlCol="0" anchor="t">
+          <a:bodyPr wrap="square" lIns="508" tIns="508" rIns="508" bIns="508" rtlCol="0" anchor="t">
             <a:normAutofit/>
           </a:bodyPr>
           <a:lstStyle/>
           <a:p>
-            <a:r>
-              <a:rPr lang="en-US" sz="1380" dirty="0">
+            <a:pPr indent="0" marL="0">
+              <a:buNone/>
+            </a:pPr>
+            <a:r>
+              <a:rPr lang="en-US" sz="1220" dirty="0">
                 <a:solidFill>
                   <a:srgbClr val="17364A"/>
                 </a:solidFill>
@@ -3506,13 +3518,16 @@
                 <a:ea typeface="Aptos" pitchFamily="34" charset="-122"/>
                 <a:cs typeface="Aptos" pitchFamily="34" charset="-120"/>
               </a:rPr>
-              <a:t>For example, an agency might state that it encourages low-risk AI uses that reduce.</a:t>
-            </a:r>
-            <a:endParaRPr lang="en-US" sz="1380" dirty="0"/>
-          </a:p>
-          <a:p>
-            <a:r>
-              <a:rPr lang="en-US" sz="1380" dirty="0">
+              <a:t>For example, an agency might state that it encourages low-risk AI.</a:t>
+            </a:r>
+            <a:endParaRPr lang="en-US" sz="1220" dirty="0"/>
+          </a:p>
+          <a:p>
+            <a:pPr indent="0" marL="0">
+              <a:buNone/>
+            </a:pPr>
+            <a:r>
+              <a:rPr lang="en-US" sz="1220" dirty="0">
                 <a:solidFill>
                   <a:srgbClr val="17364A"/>
                 </a:solidFill>
@@ -3520,13 +3535,16 @@
                 <a:ea typeface="Aptos" pitchFamily="34" charset="-122"/>
                 <a:cs typeface="Aptos" pitchFamily="34" charset="-120"/>
               </a:rPr>
-              <a:t>It might state that it will consider moderate-risk uses involving operational data only.</a:t>
-            </a:r>
-            <a:endParaRPr lang="en-US" sz="1380" dirty="0"/>
-          </a:p>
-          <a:p>
-            <a:r>
-              <a:rPr lang="en-US" sz="1380" dirty="0">
+              <a:t>It might state that it will consider moderate-risk uses involving.</a:t>
+            </a:r>
+            <a:endParaRPr lang="en-US" sz="1220" dirty="0"/>
+          </a:p>
+          <a:p>
+            <a:pPr indent="0" marL="0">
+              <a:buNone/>
+            </a:pPr>
+            <a:r>
+              <a:rPr lang="en-US" sz="1220" dirty="0">
                 <a:solidFill>
                   <a:srgbClr val="17364A"/>
                 </a:solidFill>
@@ -3534,9 +3552,9 @@
                 <a:ea typeface="Aptos" pitchFamily="34" charset="-122"/>
                 <a:cs typeface="Aptos" pitchFamily="34" charset="-120"/>
               </a:rPr>
-              <a:t>It might state that it does not permit AI to make final public health enforcement,.</a:t>
-            </a:r>
-            <a:endParaRPr lang="en-US" sz="1380" dirty="0"/>
+              <a:t>It might state that it does not permit AI to make final public.</a:t>
+            </a:r>
+            <a:endParaRPr lang="en-US" sz="1220" dirty="0"/>
           </a:p>
         </p:txBody>
       </p:sp>
@@ -3614,17 +3632,17 @@
         </p:nvSpPr>
         <p:spPr>
           <a:xfrm>
-            <a:off x="7799832" y="5001768"/>
-            <a:ext cx="3145536" cy="502920"/>
-          </a:xfrm>
-          <a:prstGeom prst="rect">
-            <a:avLst/>
-          </a:prstGeom>
-          <a:noFill/>
-          <a:ln/>
-        </p:spPr>
-        <p:txBody>
-          <a:bodyPr wrap="square" lIns="0" tIns="0" rIns="0" bIns="0" rtlCol="0" anchor="t">
+            <a:off x="7799832" y="4974336"/>
+            <a:ext cx="3145536" cy="576072"/>
+          </a:xfrm>
+          <a:prstGeom prst="rect">
+            <a:avLst/>
+          </a:prstGeom>
+          <a:noFill/>
+          <a:ln/>
+        </p:spPr>
+        <p:txBody>
+          <a:bodyPr wrap="square" lIns="254" tIns="254" rIns="254" bIns="254" rtlCol="0" anchor="t">
             <a:normAutofit/>
           </a:bodyPr>
           <a:lstStyle/>
@@ -3633,7 +3651,7 @@
               <a:buNone/>
             </a:pPr>
             <a:r>
-              <a:rPr lang="en-US" sz="1550" dirty="0">
+              <a:rPr lang="en-US" sz="1320" dirty="0">
                 <a:solidFill>
                   <a:srgbClr val="17364A"/>
                 </a:solidFill>
@@ -3641,9 +3659,9 @@
                 <a:ea typeface="Aptos" pitchFamily="34" charset="-122"/>
                 <a:cs typeface="Aptos" pitchFamily="34" charset="-120"/>
               </a:rPr>
-              <a:t>Translate this concept into clear decision rights, review steps, documentation expectations, and escalation paths before an AI-supported workflow is approved.</a:t>
-            </a:r>
-            <a:endParaRPr lang="en-US" sz="1550" dirty="0"/>
+              <a:t>Translate this concept into clear decision rights, review steps, documentation expectations, and escalation paths before.</a:t>
+            </a:r>
+            <a:endParaRPr lang="en-US" sz="1320" dirty="0"/>
           </a:p>
         </p:txBody>
       </p:sp>
@@ -3944,49 +3962,58 @@
           <a:ln/>
         </p:spPr>
         <p:txBody>
-          <a:bodyPr wrap="square" lIns="635" tIns="635" rIns="635" bIns="635" rtlCol="0" anchor="t">
+          <a:bodyPr wrap="square" lIns="1016" tIns="1016" rIns="1016" bIns="1016" rtlCol="0" anchor="t">
             <a:normAutofit/>
           </a:bodyPr>
           <a:lstStyle/>
           <a:p>
+            <a:pPr indent="0" marL="0">
+              <a:buNone/>
+            </a:pPr>
             <a:r>
               <a:rPr lang="en-US" sz="2100" dirty="0">
                 <a:solidFill>
-                  <a:srgbClr val="17364A"/>
-                </a:solidFill>
-                <a:latin typeface="Aptos" pitchFamily="34" charset="0"/>
-                <a:ea typeface="Aptos" pitchFamily="34" charset="-122"/>
-                <a:cs typeface="Aptos" pitchFamily="34" charset="-120"/>
-              </a:rPr>
-              <a:t>A common failure mode is vague risk language.</a:t>
+                  <a:srgbClr val="003A63"/>
+                </a:solidFill>
+                <a:latin typeface="Aptos" pitchFamily="34" charset="0"/>
+                <a:ea typeface="Aptos" pitchFamily="34" charset="-122"/>
+                <a:cs typeface="Aptos" pitchFamily="34" charset="-120"/>
+              </a:rPr>
+              <a:t>• A common failure mode is vague risk language.</a:t>
             </a:r>
             <a:endParaRPr lang="en-US" sz="2100" dirty="0"/>
           </a:p>
           <a:p>
+            <a:pPr indent="0" marL="0">
+              <a:buNone/>
+            </a:pPr>
             <a:r>
               <a:rPr lang="en-US" sz="2100" dirty="0">
                 <a:solidFill>
-                  <a:srgbClr val="17364A"/>
-                </a:solidFill>
-                <a:latin typeface="Aptos" pitchFamily="34" charset="0"/>
-                <a:ea typeface="Aptos" pitchFamily="34" charset="-122"/>
-                <a:cs typeface="Aptos" pitchFamily="34" charset="-120"/>
-              </a:rPr>
-              <a:t>Phrases like 'use AI responsibly' do not help staff decide what is allowed.</a:t>
+                  <a:srgbClr val="003A63"/>
+                </a:solidFill>
+                <a:latin typeface="Aptos" pitchFamily="34" charset="0"/>
+                <a:ea typeface="Aptos" pitchFamily="34" charset="-122"/>
+                <a:cs typeface="Aptos" pitchFamily="34" charset="-120"/>
+              </a:rPr>
+              <a:t>• Phrases like 'use AI responsibly' do not help staff decide what is allowed.</a:t>
             </a:r>
             <a:endParaRPr lang="en-US" sz="2100" dirty="0"/>
           </a:p>
           <a:p>
+            <a:pPr indent="0" marL="0">
+              <a:buNone/>
+            </a:pPr>
             <a:r>
               <a:rPr lang="en-US" sz="2100" dirty="0">
                 <a:solidFill>
-                  <a:srgbClr val="17364A"/>
-                </a:solidFill>
-                <a:latin typeface="Aptos" pitchFamily="34" charset="0"/>
-                <a:ea typeface="Aptos" pitchFamily="34" charset="-122"/>
-                <a:cs typeface="Aptos" pitchFamily="34" charset="-120"/>
-              </a:rPr>
-              <a:t>A guardrail is to define concrete examples of encouraged, conditional, restricted, and prohibited uses.</a:t>
+                  <a:srgbClr val="003A63"/>
+                </a:solidFill>
+                <a:latin typeface="Aptos" pitchFamily="34" charset="0"/>
+                <a:ea typeface="Aptos" pitchFamily="34" charset="-122"/>
+                <a:cs typeface="Aptos" pitchFamily="34" charset="-120"/>
+              </a:rPr>
+              <a:t>• A guardrail is to define concrete examples of encouraged, conditional, restricted, and.</a:t>
             </a:r>
             <a:endParaRPr lang="en-US" sz="2100" dirty="0"/>
           </a:p>
@@ -4066,17 +4093,17 @@
         </p:nvSpPr>
         <p:spPr>
           <a:xfrm>
-            <a:off x="7799832" y="1828800"/>
-            <a:ext cx="3145536" cy="685800"/>
-          </a:xfrm>
-          <a:prstGeom prst="rect">
-            <a:avLst/>
-          </a:prstGeom>
-          <a:noFill/>
-          <a:ln/>
-        </p:spPr>
-        <p:txBody>
-          <a:bodyPr wrap="square" lIns="0" tIns="0" rIns="0" bIns="0" rtlCol="0" anchor="t">
+            <a:off x="7799832" y="1801368"/>
+            <a:ext cx="3145536" cy="758952"/>
+          </a:xfrm>
+          <a:prstGeom prst="rect">
+            <a:avLst/>
+          </a:prstGeom>
+          <a:noFill/>
+          <a:ln/>
+        </p:spPr>
+        <p:txBody>
+          <a:bodyPr wrap="square" lIns="254" tIns="254" rIns="254" bIns="254" rtlCol="0" anchor="t">
             <a:normAutofit/>
           </a:bodyPr>
           <a:lstStyle/>
@@ -4085,7 +4112,7 @@
               <a:buNone/>
             </a:pPr>
             <a:r>
-              <a:rPr lang="en-US" sz="1550" dirty="0">
+              <a:rPr lang="en-US" sz="1320" dirty="0">
                 <a:solidFill>
                   <a:srgbClr val="17364A"/>
                 </a:solidFill>
@@ -4095,7 +4122,7 @@
               </a:rPr>
               <a:t>A common failure mode is vague risk language.</a:t>
             </a:r>
-            <a:endParaRPr lang="en-US" sz="1550" dirty="0"/>
+            <a:endParaRPr lang="en-US" sz="1320" dirty="0"/>
           </a:p>
         </p:txBody>
       </p:sp>
@@ -4183,13 +4210,16 @@
           <a:ln/>
         </p:spPr>
         <p:txBody>
-          <a:bodyPr wrap="square" lIns="254" tIns="254" rIns="254" bIns="254" rtlCol="0" anchor="t">
+          <a:bodyPr wrap="square" lIns="508" tIns="508" rIns="508" bIns="508" rtlCol="0" anchor="t">
             <a:normAutofit/>
           </a:bodyPr>
           <a:lstStyle/>
           <a:p>
-            <a:r>
-              <a:rPr lang="en-US" sz="1380" dirty="0">
+            <a:pPr indent="0" marL="0">
+              <a:buNone/>
+            </a:pPr>
+            <a:r>
+              <a:rPr lang="en-US" sz="1220" dirty="0">
                 <a:solidFill>
                   <a:srgbClr val="17364A"/>
                 </a:solidFill>
@@ -4199,11 +4229,14 @@
               </a:rPr>
               <a:t>Another risk is risk appetite that ignores equity.</a:t>
             </a:r>
-            <a:endParaRPr lang="en-US" sz="1380" dirty="0"/>
-          </a:p>
-          <a:p>
-            <a:r>
-              <a:rPr lang="en-US" sz="1380" dirty="0">
+            <a:endParaRPr lang="en-US" sz="1220" dirty="0"/>
+          </a:p>
+          <a:p>
+            <a:pPr indent="0" marL="0">
+              <a:buNone/>
+            </a:pPr>
+            <a:r>
+              <a:rPr lang="en-US" sz="1220" dirty="0">
                 <a:solidFill>
                   <a:srgbClr val="17364A"/>
                 </a:solidFill>
@@ -4211,13 +4244,16 @@
                 <a:ea typeface="Aptos" pitchFamily="34" charset="-122"/>
                 <a:cs typeface="Aptos" pitchFamily="34" charset="-120"/>
               </a:rPr>
-              <a:t>A tool may appear operationally useful while shifting burden to communities that are.</a:t>
-            </a:r>
-            <a:endParaRPr lang="en-US" sz="1380" dirty="0"/>
-          </a:p>
-          <a:p>
-            <a:r>
-              <a:rPr lang="en-US" sz="1380" dirty="0">
+              <a:t>A tool may appear operationally useful while shifting burden to.</a:t>
+            </a:r>
+            <a:endParaRPr lang="en-US" sz="1220" dirty="0"/>
+          </a:p>
+          <a:p>
+            <a:pPr indent="0" marL="0">
+              <a:buNone/>
+            </a:pPr>
+            <a:r>
+              <a:rPr lang="en-US" sz="1220" dirty="0">
                 <a:solidFill>
                   <a:srgbClr val="17364A"/>
                 </a:solidFill>
@@ -4225,9 +4261,9 @@
                 <a:ea typeface="Aptos" pitchFamily="34" charset="-122"/>
                 <a:cs typeface="Aptos" pitchFamily="34" charset="-120"/>
               </a:rPr>
-              <a:t>A guardrail is to require equity impact review for uses that affect prioritization,.</a:t>
-            </a:r>
-            <a:endParaRPr lang="en-US" sz="1380" dirty="0"/>
+              <a:t>A guardrail is to require equity impact review for uses that.</a:t>
+            </a:r>
+            <a:endParaRPr lang="en-US" sz="1220" dirty="0"/>
           </a:p>
         </p:txBody>
       </p:sp>
@@ -4305,17 +4341,17 @@
         </p:nvSpPr>
         <p:spPr>
           <a:xfrm>
-            <a:off x="7799832" y="5001768"/>
-            <a:ext cx="3145536" cy="502920"/>
-          </a:xfrm>
-          <a:prstGeom prst="rect">
-            <a:avLst/>
-          </a:prstGeom>
-          <a:noFill/>
-          <a:ln/>
-        </p:spPr>
-        <p:txBody>
-          <a:bodyPr wrap="square" lIns="0" tIns="0" rIns="0" bIns="0" rtlCol="0" anchor="t">
+            <a:off x="7799832" y="4974336"/>
+            <a:ext cx="3145536" cy="576072"/>
+          </a:xfrm>
+          <a:prstGeom prst="rect">
+            <a:avLst/>
+          </a:prstGeom>
+          <a:noFill/>
+          <a:ln/>
+        </p:spPr>
+        <p:txBody>
+          <a:bodyPr wrap="square" lIns="254" tIns="254" rIns="254" bIns="254" rtlCol="0" anchor="t">
             <a:normAutofit/>
           </a:bodyPr>
           <a:lstStyle/>
@@ -4324,7 +4360,7 @@
               <a:buNone/>
             </a:pPr>
             <a:r>
-              <a:rPr lang="en-US" sz="1550" dirty="0">
+              <a:rPr lang="en-US" sz="1320" dirty="0">
                 <a:solidFill>
                   <a:srgbClr val="17364A"/>
                 </a:solidFill>
@@ -4332,9 +4368,9 @@
                 <a:ea typeface="Aptos" pitchFamily="34" charset="-122"/>
                 <a:cs typeface="Aptos" pitchFamily="34" charset="-120"/>
               </a:rPr>
-              <a:t>Identify what could go wrong, who could be affected, what safeguards are needed, and what evidence should be reviewed before use expands.</a:t>
-            </a:r>
-            <a:endParaRPr lang="en-US" sz="1550" dirty="0"/>
+              <a:t>Identify what could go wrong, who could be affected, what safeguards are needed, and what evidence should be reviewed.</a:t>
+            </a:r>
+            <a:endParaRPr lang="en-US" sz="1320" dirty="0"/>
           </a:p>
         </p:txBody>
       </p:sp>
@@ -4635,49 +4671,58 @@
           <a:ln/>
         </p:spPr>
         <p:txBody>
-          <a:bodyPr wrap="square" lIns="635" tIns="635" rIns="635" bIns="635" rtlCol="0" anchor="t">
+          <a:bodyPr wrap="square" lIns="1016" tIns="1016" rIns="1016" bIns="1016" rtlCol="0" anchor="t">
             <a:normAutofit/>
           </a:bodyPr>
           <a:lstStyle/>
           <a:p>
+            <a:pPr indent="0" marL="0">
+              <a:buNone/>
+            </a:pPr>
             <a:r>
               <a:rPr lang="en-US" sz="2100" dirty="0">
                 <a:solidFill>
-                  <a:srgbClr val="17364A"/>
-                </a:solidFill>
-                <a:latin typeface="Aptos" pitchFamily="34" charset="0"/>
-                <a:ea typeface="Aptos" pitchFamily="34" charset="-122"/>
-                <a:cs typeface="Aptos" pitchFamily="34" charset="-120"/>
-              </a:rPr>
-              <a:t>Risk appetite applies differently across AI types.</a:t>
+                  <a:srgbClr val="003A63"/>
+                </a:solidFill>
+                <a:latin typeface="Aptos" pitchFamily="34" charset="0"/>
+                <a:ea typeface="Aptos" pitchFamily="34" charset="-122"/>
+                <a:cs typeface="Aptos" pitchFamily="34" charset="-120"/>
+              </a:rPr>
+              <a:t>• Risk appetite applies differently across AI types.</a:t>
             </a:r>
             <a:endParaRPr lang="en-US" sz="2100" dirty="0"/>
           </a:p>
           <a:p>
+            <a:pPr indent="0" marL="0">
+              <a:buNone/>
+            </a:pPr>
             <a:r>
               <a:rPr lang="en-US" sz="2100" dirty="0">
                 <a:solidFill>
-                  <a:srgbClr val="17364A"/>
-                </a:solidFill>
-                <a:latin typeface="Aptos" pitchFamily="34" charset="0"/>
-                <a:ea typeface="Aptos" pitchFamily="34" charset="-122"/>
-                <a:cs typeface="Aptos" pitchFamily="34" charset="-120"/>
-              </a:rPr>
-              <a:t>Generative AI for internal drafting may fall into a lower-risk category when reviewed by humans.</a:t>
+                  <a:srgbClr val="003A63"/>
+                </a:solidFill>
+                <a:latin typeface="Aptos" pitchFamily="34" charset="0"/>
+                <a:ea typeface="Aptos" pitchFamily="34" charset="-122"/>
+                <a:cs typeface="Aptos" pitchFamily="34" charset="-120"/>
+              </a:rPr>
+              <a:t>• Generative AI for internal drafting may fall into a lower-risk category when reviewed by humans.</a:t>
             </a:r>
             <a:endParaRPr lang="en-US" sz="2100" dirty="0"/>
           </a:p>
           <a:p>
+            <a:pPr indent="0" marL="0">
+              <a:buNone/>
+            </a:pPr>
             <a:r>
               <a:rPr lang="en-US" sz="2100" dirty="0">
                 <a:solidFill>
-                  <a:srgbClr val="17364A"/>
-                </a:solidFill>
-                <a:latin typeface="Aptos" pitchFamily="34" charset="0"/>
-                <a:ea typeface="Aptos" pitchFamily="34" charset="-122"/>
-                <a:cs typeface="Aptos" pitchFamily="34" charset="-120"/>
-              </a:rPr>
-              <a:t>Predictive models used for prioritization require stronger validation and monitoring.</a:t>
+                  <a:srgbClr val="003A63"/>
+                </a:solidFill>
+                <a:latin typeface="Aptos" pitchFamily="34" charset="0"/>
+                <a:ea typeface="Aptos" pitchFamily="34" charset="-122"/>
+                <a:cs typeface="Aptos" pitchFamily="34" charset="-120"/>
+              </a:rPr>
+              <a:t>• Predictive models used for prioritization require stronger validation and monitoring.</a:t>
             </a:r>
             <a:endParaRPr lang="en-US" sz="2100" dirty="0"/>
           </a:p>
@@ -4757,17 +4802,17 @@
         </p:nvSpPr>
         <p:spPr>
           <a:xfrm>
-            <a:off x="7799832" y="1828800"/>
-            <a:ext cx="3145536" cy="685800"/>
-          </a:xfrm>
-          <a:prstGeom prst="rect">
-            <a:avLst/>
-          </a:prstGeom>
-          <a:noFill/>
-          <a:ln/>
-        </p:spPr>
-        <p:txBody>
-          <a:bodyPr wrap="square" lIns="0" tIns="0" rIns="0" bIns="0" rtlCol="0" anchor="t">
+            <a:off x="7799832" y="1801368"/>
+            <a:ext cx="3145536" cy="758952"/>
+          </a:xfrm>
+          <a:prstGeom prst="rect">
+            <a:avLst/>
+          </a:prstGeom>
+          <a:noFill/>
+          <a:ln/>
+        </p:spPr>
+        <p:txBody>
+          <a:bodyPr wrap="square" lIns="254" tIns="254" rIns="254" bIns="254" rtlCol="0" anchor="t">
             <a:normAutofit/>
           </a:bodyPr>
           <a:lstStyle/>
@@ -4776,7 +4821,7 @@
               <a:buNone/>
             </a:pPr>
             <a:r>
-              <a:rPr lang="en-US" sz="1550" dirty="0">
+              <a:rPr lang="en-US" sz="1320" dirty="0">
                 <a:solidFill>
                   <a:srgbClr val="17364A"/>
                 </a:solidFill>
@@ -4786,7 +4831,7 @@
               </a:rPr>
               <a:t>Risk appetite applies differently across AI types.</a:t>
             </a:r>
-            <a:endParaRPr lang="en-US" sz="1550" dirty="0"/>
+            <a:endParaRPr lang="en-US" sz="1320" dirty="0"/>
           </a:p>
         </p:txBody>
       </p:sp>
@@ -4874,13 +4919,16 @@
           <a:ln/>
         </p:spPr>
         <p:txBody>
-          <a:bodyPr wrap="square" lIns="254" tIns="254" rIns="254" bIns="254" rtlCol="0" anchor="t">
+          <a:bodyPr wrap="square" lIns="508" tIns="508" rIns="508" bIns="508" rtlCol="0" anchor="t">
             <a:normAutofit/>
           </a:bodyPr>
           <a:lstStyle/>
           <a:p>
-            <a:r>
-              <a:rPr lang="en-US" sz="1380" dirty="0">
+            <a:pPr indent="0" marL="0">
+              <a:buNone/>
+            </a:pPr>
+            <a:r>
+              <a:rPr lang="en-US" sz="1220" dirty="0">
                 <a:solidFill>
                   <a:srgbClr val="17364A"/>
                 </a:solidFill>
@@ -4888,13 +4936,16 @@
                 <a:ea typeface="Aptos" pitchFamily="34" charset="-122"/>
                 <a:cs typeface="Aptos" pitchFamily="34" charset="-120"/>
               </a:rPr>
-              <a:t>Agentic tools that can take system actions require strict limits, stop authority, and.</a:t>
-            </a:r>
-            <a:endParaRPr lang="en-US" sz="1380" dirty="0"/>
-          </a:p>
-          <a:p>
-            <a:r>
-              <a:rPr lang="en-US" sz="1380" dirty="0">
+              <a:t>Agentic tools that can take system actions require strict limits,.</a:t>
+            </a:r>
+            <a:endParaRPr lang="en-US" sz="1220" dirty="0"/>
+          </a:p>
+          <a:p>
+            <a:pPr indent="0" marL="0">
+              <a:buNone/>
+            </a:pPr>
+            <a:r>
+              <a:rPr lang="en-US" sz="1220" dirty="0">
                 <a:solidFill>
                   <a:srgbClr val="17364A"/>
                 </a:solidFill>
@@ -4904,7 +4955,7 @@
               </a:rPr>
               <a:t>Risk appetite helps define these boundaries in advance.</a:t>
             </a:r>
-            <a:endParaRPr lang="en-US" sz="1380" dirty="0"/>
+            <a:endParaRPr lang="en-US" sz="1220" dirty="0"/>
           </a:p>
         </p:txBody>
       </p:sp>
@@ -4982,17 +5033,17 @@
         </p:nvSpPr>
         <p:spPr>
           <a:xfrm>
-            <a:off x="7799832" y="5001768"/>
-            <a:ext cx="3145536" cy="502920"/>
-          </a:xfrm>
-          <a:prstGeom prst="rect">
-            <a:avLst/>
-          </a:prstGeom>
-          <a:noFill/>
-          <a:ln/>
-        </p:spPr>
-        <p:txBody>
-          <a:bodyPr wrap="square" lIns="0" tIns="0" rIns="0" bIns="0" rtlCol="0" anchor="t">
+            <a:off x="7799832" y="4974336"/>
+            <a:ext cx="3145536" cy="576072"/>
+          </a:xfrm>
+          <a:prstGeom prst="rect">
+            <a:avLst/>
+          </a:prstGeom>
+          <a:noFill/>
+          <a:ln/>
+        </p:spPr>
+        <p:txBody>
+          <a:bodyPr wrap="square" lIns="254" tIns="254" rIns="254" bIns="254" rtlCol="0" anchor="t">
             <a:normAutofit/>
           </a:bodyPr>
           <a:lstStyle/>
@@ -5001,7 +5052,7 @@
               <a:buNone/>
             </a:pPr>
             <a:r>
-              <a:rPr lang="en-US" sz="1550" dirty="0">
+              <a:rPr lang="en-US" sz="1320" dirty="0">
                 <a:solidFill>
                   <a:srgbClr val="17364A"/>
                 </a:solidFill>
@@ -5009,9 +5060,9 @@
                 <a:ea typeface="Aptos" pitchFamily="34" charset="-122"/>
                 <a:cs typeface="Aptos" pitchFamily="34" charset="-120"/>
               </a:rPr>
-              <a:t>Identify what could go wrong, who could be affected, what safeguards are needed, and what evidence should be reviewed before use expands.</a:t>
-            </a:r>
-            <a:endParaRPr lang="en-US" sz="1550" dirty="0"/>
+              <a:t>Identify what could go wrong, who could be affected, what safeguards are needed, and what evidence should be reviewed.</a:t>
+            </a:r>
+            <a:endParaRPr lang="en-US" sz="1320" dirty="0"/>
           </a:p>
         </p:txBody>
       </p:sp>
@@ -5312,49 +5363,58 @@
           <a:ln/>
         </p:spPr>
         <p:txBody>
-          <a:bodyPr wrap="square" lIns="635" tIns="635" rIns="635" bIns="635" rtlCol="0" anchor="t">
+          <a:bodyPr wrap="square" lIns="1016" tIns="1016" rIns="1016" bIns="1016" rtlCol="0" anchor="t">
             <a:normAutofit/>
           </a:bodyPr>
           <a:lstStyle/>
           <a:p>
+            <a:pPr indent="0" marL="0">
+              <a:buNone/>
+            </a:pPr>
             <a:r>
               <a:rPr lang="en-US" sz="2100" dirty="0">
                 <a:solidFill>
-                  <a:srgbClr val="17364A"/>
-                </a:solidFill>
-                <a:latin typeface="Aptos" pitchFamily="34" charset="0"/>
-                <a:ea typeface="Aptos" pitchFamily="34" charset="-122"/>
-                <a:cs typeface="Aptos" pitchFamily="34" charset="-120"/>
-              </a:rPr>
-              <a:t>Which current or proposed AI use case in your agency raises this leadership or governance issue most.</a:t>
+                  <a:srgbClr val="003A63"/>
+                </a:solidFill>
+                <a:latin typeface="Aptos" pitchFamily="34" charset="0"/>
+                <a:ea typeface="Aptos" pitchFamily="34" charset="-122"/>
+                <a:cs typeface="Aptos" pitchFamily="34" charset="-120"/>
+              </a:rPr>
+              <a:t>• Which current or proposed AI use case in your agency raises this leadership or governance.</a:t>
             </a:r>
             <a:endParaRPr lang="en-US" sz="2100" dirty="0"/>
           </a:p>
           <a:p>
+            <a:pPr indent="0" marL="0">
+              <a:buNone/>
+            </a:pPr>
             <a:r>
               <a:rPr lang="en-US" sz="2100" dirty="0">
                 <a:solidFill>
-                  <a:srgbClr val="17364A"/>
-                </a:solidFill>
-                <a:latin typeface="Aptos" pitchFamily="34" charset="0"/>
-                <a:ea typeface="Aptos" pitchFamily="34" charset="-122"/>
-                <a:cs typeface="Aptos" pitchFamily="34" charset="-120"/>
-              </a:rPr>
-              <a:t>Who currently has authority to make decisions about this issue, and is that authority documented?</a:t>
+                  <a:srgbClr val="003A63"/>
+                </a:solidFill>
+                <a:latin typeface="Aptos" pitchFamily="34" charset="0"/>
+                <a:ea typeface="Aptos" pitchFamily="34" charset="-122"/>
+                <a:cs typeface="Aptos" pitchFamily="34" charset="-120"/>
+              </a:rPr>
+              <a:t>• Who currently has authority to make decisions about this issue, and is that authority.</a:t>
             </a:r>
             <a:endParaRPr lang="en-US" sz="2100" dirty="0"/>
           </a:p>
           <a:p>
+            <a:pPr indent="0" marL="0">
+              <a:buNone/>
+            </a:pPr>
             <a:r>
               <a:rPr lang="en-US" sz="2100" dirty="0">
                 <a:solidFill>
-                  <a:srgbClr val="17364A"/>
-                </a:solidFill>
-                <a:latin typeface="Aptos" pitchFamily="34" charset="0"/>
-                <a:ea typeface="Aptos" pitchFamily="34" charset="-122"/>
-                <a:cs typeface="Aptos" pitchFamily="34" charset="-120"/>
-              </a:rPr>
-              <a:t>What evidence would governance or leadership need before approving the use case?</a:t>
+                  <a:srgbClr val="003A63"/>
+                </a:solidFill>
+                <a:latin typeface="Aptos" pitchFamily="34" charset="0"/>
+                <a:ea typeface="Aptos" pitchFamily="34" charset="-122"/>
+                <a:cs typeface="Aptos" pitchFamily="34" charset="-120"/>
+              </a:rPr>
+              <a:t>• What evidence would governance or leadership need before approving the use case?</a:t>
             </a:r>
             <a:endParaRPr lang="en-US" sz="2100" dirty="0"/>
           </a:p>
@@ -5434,17 +5494,17 @@
         </p:nvSpPr>
         <p:spPr>
           <a:xfrm>
-            <a:off x="7799832" y="1828800"/>
-            <a:ext cx="3145536" cy="685800"/>
-          </a:xfrm>
-          <a:prstGeom prst="rect">
-            <a:avLst/>
-          </a:prstGeom>
-          <a:noFill/>
-          <a:ln/>
-        </p:spPr>
-        <p:txBody>
-          <a:bodyPr wrap="square" lIns="0" tIns="0" rIns="0" bIns="0" rtlCol="0" anchor="t">
+            <a:off x="7799832" y="1801368"/>
+            <a:ext cx="3145536" cy="758952"/>
+          </a:xfrm>
+          <a:prstGeom prst="rect">
+            <a:avLst/>
+          </a:prstGeom>
+          <a:noFill/>
+          <a:ln/>
+        </p:spPr>
+        <p:txBody>
+          <a:bodyPr wrap="square" lIns="254" tIns="254" rIns="254" bIns="254" rtlCol="0" anchor="t">
             <a:normAutofit/>
           </a:bodyPr>
           <a:lstStyle/>
@@ -5453,7 +5513,7 @@
               <a:buNone/>
             </a:pPr>
             <a:r>
-              <a:rPr lang="en-US" sz="1550" dirty="0">
+              <a:rPr lang="en-US" sz="1320" dirty="0">
                 <a:solidFill>
                   <a:srgbClr val="17364A"/>
                 </a:solidFill>
@@ -5463,7 +5523,7 @@
               </a:rPr>
               <a:t>Which current or proposed AI use case in your agency raises this leadership or governance issue most.</a:t>
             </a:r>
-            <a:endParaRPr lang="en-US" sz="1550" dirty="0"/>
+            <a:endParaRPr lang="en-US" sz="1320" dirty="0"/>
           </a:p>
         </p:txBody>
       </p:sp>
@@ -5551,13 +5611,16 @@
           <a:ln/>
         </p:spPr>
         <p:txBody>
-          <a:bodyPr wrap="square" lIns="254" tIns="254" rIns="254" bIns="254" rtlCol="0" anchor="t">
+          <a:bodyPr wrap="square" lIns="508" tIns="508" rIns="508" bIns="508" rtlCol="0" anchor="t">
             <a:normAutofit/>
           </a:bodyPr>
           <a:lstStyle/>
           <a:p>
-            <a:r>
-              <a:rPr lang="en-US" sz="1380" dirty="0">
+            <a:pPr indent="0" marL="0">
+              <a:buNone/>
+            </a:pPr>
+            <a:r>
+              <a:rPr lang="en-US" sz="1220" dirty="0">
                 <a:solidFill>
                   <a:srgbClr val="17364A"/>
                 </a:solidFill>
@@ -5565,13 +5628,16 @@
                 <a:ea typeface="Aptos" pitchFamily="34" charset="-122"/>
                 <a:cs typeface="Aptos" pitchFamily="34" charset="-120"/>
               </a:rPr>
-              <a:t>Which current or proposed AI use case in your agency raises this leadership or governance.</a:t>
-            </a:r>
-            <a:endParaRPr lang="en-US" sz="1380" dirty="0"/>
-          </a:p>
-          <a:p>
-            <a:r>
-              <a:rPr lang="en-US" sz="1380" dirty="0">
+              <a:t>Which current or proposed AI use case in your agency raises this.</a:t>
+            </a:r>
+            <a:endParaRPr lang="en-US" sz="1220" dirty="0"/>
+          </a:p>
+          <a:p>
+            <a:pPr indent="0" marL="0">
+              <a:buNone/>
+            </a:pPr>
+            <a:r>
+              <a:rPr lang="en-US" sz="1220" dirty="0">
                 <a:solidFill>
                   <a:srgbClr val="17364A"/>
                 </a:solidFill>
@@ -5579,13 +5645,16 @@
                 <a:ea typeface="Aptos" pitchFamily="34" charset="-122"/>
                 <a:cs typeface="Aptos" pitchFamily="34" charset="-120"/>
               </a:rPr>
-              <a:t>Who currently has authority to make decisions about this issue, and is that authority.</a:t>
-            </a:r>
-            <a:endParaRPr lang="en-US" sz="1380" dirty="0"/>
-          </a:p>
-          <a:p>
-            <a:r>
-              <a:rPr lang="en-US" sz="1380" dirty="0">
+              <a:t>Who currently has authority to make decisions about this issue,.</a:t>
+            </a:r>
+            <a:endParaRPr lang="en-US" sz="1220" dirty="0"/>
+          </a:p>
+          <a:p>
+            <a:pPr indent="0" marL="0">
+              <a:buNone/>
+            </a:pPr>
+            <a:r>
+              <a:rPr lang="en-US" sz="1220" dirty="0">
                 <a:solidFill>
                   <a:srgbClr val="17364A"/>
                 </a:solidFill>
@@ -5593,9 +5662,9 @@
                 <a:ea typeface="Aptos" pitchFamily="34" charset="-122"/>
                 <a:cs typeface="Aptos" pitchFamily="34" charset="-120"/>
               </a:rPr>
-              <a:t>What evidence would governance or leadership need before approving the use case?</a:t>
-            </a:r>
-            <a:endParaRPr lang="en-US" sz="1380" dirty="0"/>
+              <a:t>What evidence would governance or leadership need before approving.</a:t>
+            </a:r>
+            <a:endParaRPr lang="en-US" sz="1220" dirty="0"/>
           </a:p>
         </p:txBody>
       </p:sp>
@@ -5673,17 +5742,17 @@
         </p:nvSpPr>
         <p:spPr>
           <a:xfrm>
-            <a:off x="7799832" y="5001768"/>
-            <a:ext cx="3145536" cy="502920"/>
-          </a:xfrm>
-          <a:prstGeom prst="rect">
-            <a:avLst/>
-          </a:prstGeom>
-          <a:noFill/>
-          <a:ln/>
-        </p:spPr>
-        <p:txBody>
-          <a:bodyPr wrap="square" lIns="0" tIns="0" rIns="0" bIns="0" rtlCol="0" anchor="t">
+            <a:off x="7799832" y="4974336"/>
+            <a:ext cx="3145536" cy="576072"/>
+          </a:xfrm>
+          <a:prstGeom prst="rect">
+            <a:avLst/>
+          </a:prstGeom>
+          <a:noFill/>
+          <a:ln/>
+        </p:spPr>
+        <p:txBody>
+          <a:bodyPr wrap="square" lIns="254" tIns="254" rIns="254" bIns="254" rtlCol="0" anchor="t">
             <a:normAutofit/>
           </a:bodyPr>
           <a:lstStyle/>
@@ -5692,7 +5761,7 @@
               <a:buNone/>
             </a:pPr>
             <a:r>
-              <a:rPr lang="en-US" sz="1550" dirty="0">
+              <a:rPr lang="en-US" sz="1320" dirty="0">
                 <a:solidFill>
                   <a:srgbClr val="17364A"/>
                 </a:solidFill>
@@ -5700,9 +5769,9 @@
                 <a:ea typeface="Aptos" pitchFamily="34" charset="-122"/>
                 <a:cs typeface="Aptos" pitchFamily="34" charset="-120"/>
               </a:rPr>
-              <a:t>Identify what could go wrong, who could be affected, what safeguards are needed, and what evidence should be reviewed before use expands.</a:t>
-            </a:r>
-            <a:endParaRPr lang="en-US" sz="1550" dirty="0"/>
+              <a:t>Identify what could go wrong, who could be affected, what safeguards are needed, and what evidence should be reviewed.</a:t>
+            </a:r>
+            <a:endParaRPr lang="en-US" sz="1320" dirty="0"/>
           </a:p>
         </p:txBody>
       </p:sp>
@@ -6003,35 +6072,41 @@
           <a:ln/>
         </p:spPr>
         <p:txBody>
-          <a:bodyPr wrap="square" lIns="635" tIns="635" rIns="635" bIns="635" rtlCol="0" anchor="t">
+          <a:bodyPr wrap="square" lIns="1016" tIns="1016" rIns="1016" bIns="1016" rtlCol="0" anchor="t">
             <a:normAutofit/>
           </a:bodyPr>
           <a:lstStyle/>
           <a:p>
+            <a:pPr indent="0" marL="0">
+              <a:buNone/>
+            </a:pPr>
             <a:r>
               <a:rPr lang="en-US" sz="2100" dirty="0">
                 <a:solidFill>
-                  <a:srgbClr val="17364A"/>
-                </a:solidFill>
-                <a:latin typeface="Aptos" pitchFamily="34" charset="0"/>
-                <a:ea typeface="Aptos" pitchFamily="34" charset="-122"/>
-                <a:cs typeface="Aptos" pitchFamily="34" charset="-120"/>
-              </a:rPr>
-              <a:t>Which staff, partners, or communities would be affected if this issue were handled poorly?</a:t>
+                  <a:srgbClr val="003A63"/>
+                </a:solidFill>
+                <a:latin typeface="Aptos" pitchFamily="34" charset="0"/>
+                <a:ea typeface="Aptos" pitchFamily="34" charset="-122"/>
+                <a:cs typeface="Aptos" pitchFamily="34" charset="-120"/>
+              </a:rPr>
+              <a:t>• Which staff, partners, or communities would be affected if this issue were handled poorly?</a:t>
             </a:r>
             <a:endParaRPr lang="en-US" sz="2100" dirty="0"/>
           </a:p>
           <a:p>
+            <a:pPr indent="0" marL="0">
+              <a:buNone/>
+            </a:pPr>
             <a:r>
               <a:rPr lang="en-US" sz="2100" dirty="0">
                 <a:solidFill>
-                  <a:srgbClr val="17364A"/>
-                </a:solidFill>
-                <a:latin typeface="Aptos" pitchFamily="34" charset="0"/>
-                <a:ea typeface="Aptos" pitchFamily="34" charset="-122"/>
-                <a:cs typeface="Aptos" pitchFamily="34" charset="-120"/>
-              </a:rPr>
-              <a:t>What policy, process, or artifact should be created or updated after this module?</a:t>
+                  <a:srgbClr val="003A63"/>
+                </a:solidFill>
+                <a:latin typeface="Aptos" pitchFamily="34" charset="0"/>
+                <a:ea typeface="Aptos" pitchFamily="34" charset="-122"/>
+                <a:cs typeface="Aptos" pitchFamily="34" charset="-120"/>
+              </a:rPr>
+              <a:t>• What policy, process, or artifact should be created or updated after this module?</a:t>
             </a:r>
             <a:endParaRPr lang="en-US" sz="2100" dirty="0"/>
           </a:p>
@@ -6111,17 +6186,17 @@
         </p:nvSpPr>
         <p:spPr>
           <a:xfrm>
-            <a:off x="7799832" y="1828800"/>
-            <a:ext cx="3145536" cy="685800"/>
-          </a:xfrm>
-          <a:prstGeom prst="rect">
-            <a:avLst/>
-          </a:prstGeom>
-          <a:noFill/>
-          <a:ln/>
-        </p:spPr>
-        <p:txBody>
-          <a:bodyPr wrap="square" lIns="0" tIns="0" rIns="0" bIns="0" rtlCol="0" anchor="t">
+            <a:off x="7799832" y="1801368"/>
+            <a:ext cx="3145536" cy="758952"/>
+          </a:xfrm>
+          <a:prstGeom prst="rect">
+            <a:avLst/>
+          </a:prstGeom>
+          <a:noFill/>
+          <a:ln/>
+        </p:spPr>
+        <p:txBody>
+          <a:bodyPr wrap="square" lIns="254" tIns="254" rIns="254" bIns="254" rtlCol="0" anchor="t">
             <a:normAutofit/>
           </a:bodyPr>
           <a:lstStyle/>
@@ -6130,7 +6205,7 @@
               <a:buNone/>
             </a:pPr>
             <a:r>
-              <a:rPr lang="en-US" sz="1550" dirty="0">
+              <a:rPr lang="en-US" sz="1320" dirty="0">
                 <a:solidFill>
                   <a:srgbClr val="17364A"/>
                 </a:solidFill>
@@ -6140,7 +6215,7 @@
               </a:rPr>
               <a:t>Which staff, partners, or communities would be affected if this issue were handled poorly?</a:t>
             </a:r>
-            <a:endParaRPr lang="en-US" sz="1550" dirty="0"/>
+            <a:endParaRPr lang="en-US" sz="1320" dirty="0"/>
           </a:p>
         </p:txBody>
       </p:sp>
@@ -6228,13 +6303,16 @@
           <a:ln/>
         </p:spPr>
         <p:txBody>
-          <a:bodyPr wrap="square" lIns="254" tIns="254" rIns="254" bIns="254" rtlCol="0" anchor="t">
+          <a:bodyPr wrap="square" lIns="508" tIns="508" rIns="508" bIns="508" rtlCol="0" anchor="t">
             <a:normAutofit/>
           </a:bodyPr>
           <a:lstStyle/>
           <a:p>
-            <a:r>
-              <a:rPr lang="en-US" sz="1380" dirty="0">
+            <a:pPr indent="0" marL="0">
+              <a:buNone/>
+            </a:pPr>
+            <a:r>
+              <a:rPr lang="en-US" sz="1220" dirty="0">
                 <a:solidFill>
                   <a:srgbClr val="17364A"/>
                 </a:solidFill>
@@ -6242,13 +6320,16 @@
                 <a:ea typeface="Aptos" pitchFamily="34" charset="-122"/>
                 <a:cs typeface="Aptos" pitchFamily="34" charset="-120"/>
               </a:rPr>
-              <a:t>Which staff, partners, or communities would be affected if this issue were handled poorly?</a:t>
-            </a:r>
-            <a:endParaRPr lang="en-US" sz="1380" dirty="0"/>
-          </a:p>
-          <a:p>
-            <a:r>
-              <a:rPr lang="en-US" sz="1380" dirty="0">
+              <a:t>Which staff, partners, or communities would be affected if this.</a:t>
+            </a:r>
+            <a:endParaRPr lang="en-US" sz="1220" dirty="0"/>
+          </a:p>
+          <a:p>
+            <a:pPr indent="0" marL="0">
+              <a:buNone/>
+            </a:pPr>
+            <a:r>
+              <a:rPr lang="en-US" sz="1220" dirty="0">
                 <a:solidFill>
                   <a:srgbClr val="17364A"/>
                 </a:solidFill>
@@ -6256,9 +6337,9 @@
                 <a:ea typeface="Aptos" pitchFamily="34" charset="-122"/>
                 <a:cs typeface="Aptos" pitchFamily="34" charset="-120"/>
               </a:rPr>
-              <a:t>What policy, process, or artifact should be created or updated after this module?</a:t>
-            </a:r>
-            <a:endParaRPr lang="en-US" sz="1380" dirty="0"/>
+              <a:t>What policy, process, or artifact should be created or updated.</a:t>
+            </a:r>
+            <a:endParaRPr lang="en-US" sz="1220" dirty="0"/>
           </a:p>
         </p:txBody>
       </p:sp>
@@ -6336,17 +6417,17 @@
         </p:nvSpPr>
         <p:spPr>
           <a:xfrm>
-            <a:off x="7799832" y="5001768"/>
-            <a:ext cx="3145536" cy="502920"/>
-          </a:xfrm>
-          <a:prstGeom prst="rect">
-            <a:avLst/>
-          </a:prstGeom>
-          <a:noFill/>
-          <a:ln/>
-        </p:spPr>
-        <p:txBody>
-          <a:bodyPr wrap="square" lIns="0" tIns="0" rIns="0" bIns="0" rtlCol="0" anchor="t">
+            <a:off x="7799832" y="4974336"/>
+            <a:ext cx="3145536" cy="576072"/>
+          </a:xfrm>
+          <a:prstGeom prst="rect">
+            <a:avLst/>
+          </a:prstGeom>
+          <a:noFill/>
+          <a:ln/>
+        </p:spPr>
+        <p:txBody>
+          <a:bodyPr wrap="square" lIns="254" tIns="254" rIns="254" bIns="254" rtlCol="0" anchor="t">
             <a:normAutofit/>
           </a:bodyPr>
           <a:lstStyle/>
@@ -6355,7 +6436,7 @@
               <a:buNone/>
             </a:pPr>
             <a:r>
-              <a:rPr lang="en-US" sz="1550" dirty="0">
+              <a:rPr lang="en-US" sz="1320" dirty="0">
                 <a:solidFill>
                   <a:srgbClr val="17364A"/>
                 </a:solidFill>
@@ -6363,9 +6444,9 @@
                 <a:ea typeface="Aptos" pitchFamily="34" charset="-122"/>
                 <a:cs typeface="Aptos" pitchFamily="34" charset="-120"/>
               </a:rPr>
-              <a:t>Identify what could go wrong, who could be affected, what safeguards are needed, and what evidence should be reviewed before use expands.</a:t>
-            </a:r>
-            <a:endParaRPr lang="en-US" sz="1550" dirty="0"/>
+              <a:t>Identify what could go wrong, who could be affected, what safeguards are needed, and what evidence should be reviewed.</a:t>
+            </a:r>
+            <a:endParaRPr lang="en-US" sz="1320" dirty="0"/>
           </a:p>
         </p:txBody>
       </p:sp>
@@ -6666,21 +6747,24 @@
           <a:ln/>
         </p:spPr>
         <p:txBody>
-          <a:bodyPr wrap="square" lIns="635" tIns="635" rIns="635" bIns="635" rtlCol="0" anchor="t">
+          <a:bodyPr wrap="square" lIns="1016" tIns="1016" rIns="1016" bIns="1016" rtlCol="0" anchor="t">
             <a:normAutofit/>
           </a:bodyPr>
           <a:lstStyle/>
           <a:p>
+            <a:pPr indent="0" marL="0">
+              <a:buNone/>
+            </a:pPr>
             <a:r>
               <a:rPr lang="en-US" sz="2100" dirty="0">
                 <a:solidFill>
-                  <a:srgbClr val="17364A"/>
-                </a:solidFill>
-                <a:latin typeface="Aptos" pitchFamily="34" charset="0"/>
-                <a:ea typeface="Aptos" pitchFamily="34" charset="-122"/>
-                <a:cs typeface="Aptos" pitchFamily="34" charset="-120"/>
-              </a:rPr>
-              <a:t>Draft a risk appetite statement and a risk tolerance table for at least four AI use categories:.</a:t>
+                  <a:srgbClr val="003A63"/>
+                </a:solidFill>
+                <a:latin typeface="Aptos" pitchFamily="34" charset="0"/>
+                <a:ea typeface="Aptos" pitchFamily="34" charset="-122"/>
+                <a:cs typeface="Aptos" pitchFamily="34" charset="-120"/>
+              </a:rPr>
+              <a:t>• Draft a risk appetite statement and a risk tolerance table for at least four AI use categories:.</a:t>
             </a:r>
             <a:endParaRPr lang="en-US" sz="2100" dirty="0"/>
           </a:p>
@@ -6760,17 +6844,17 @@
         </p:nvSpPr>
         <p:spPr>
           <a:xfrm>
-            <a:off x="7799832" y="1828800"/>
-            <a:ext cx="3145536" cy="685800"/>
-          </a:xfrm>
-          <a:prstGeom prst="rect">
-            <a:avLst/>
-          </a:prstGeom>
-          <a:noFill/>
-          <a:ln/>
-        </p:spPr>
-        <p:txBody>
-          <a:bodyPr wrap="square" lIns="0" tIns="0" rIns="0" bIns="0" rtlCol="0" anchor="t">
+            <a:off x="7799832" y="1801368"/>
+            <a:ext cx="3145536" cy="758952"/>
+          </a:xfrm>
+          <a:prstGeom prst="rect">
+            <a:avLst/>
+          </a:prstGeom>
+          <a:noFill/>
+          <a:ln/>
+        </p:spPr>
+        <p:txBody>
+          <a:bodyPr wrap="square" lIns="254" tIns="254" rIns="254" bIns="254" rtlCol="0" anchor="t">
             <a:normAutofit/>
           </a:bodyPr>
           <a:lstStyle/>
@@ -6779,7 +6863,7 @@
               <a:buNone/>
             </a:pPr>
             <a:r>
-              <a:rPr lang="en-US" sz="1550" dirty="0">
+              <a:rPr lang="en-US" sz="1320" dirty="0">
                 <a:solidFill>
                   <a:srgbClr val="17364A"/>
                 </a:solidFill>
@@ -6789,7 +6873,7 @@
               </a:rPr>
               <a:t>Draft a risk appetite statement and a risk tolerance table for at least four AI use categories:.</a:t>
             </a:r>
-            <a:endParaRPr lang="en-US" sz="1550" dirty="0"/>
+            <a:endParaRPr lang="en-US" sz="1320" dirty="0"/>
           </a:p>
         </p:txBody>
       </p:sp>
@@ -6877,13 +6961,16 @@
           <a:ln/>
         </p:spPr>
         <p:txBody>
-          <a:bodyPr wrap="square" lIns="254" tIns="254" rIns="254" bIns="254" rtlCol="0" anchor="t">
+          <a:bodyPr wrap="square" lIns="508" tIns="508" rIns="508" bIns="508" rtlCol="0" anchor="t">
             <a:normAutofit/>
           </a:bodyPr>
           <a:lstStyle/>
           <a:p>
-            <a:r>
-              <a:rPr lang="en-US" sz="1380" dirty="0">
+            <a:pPr indent="0" marL="0">
+              <a:buNone/>
+            </a:pPr>
+            <a:r>
+              <a:rPr lang="en-US" sz="1220" dirty="0">
                 <a:solidFill>
                   <a:srgbClr val="17364A"/>
                 </a:solidFill>
@@ -6891,9 +6978,9 @@
                 <a:ea typeface="Aptos" pitchFamily="34" charset="-122"/>
                 <a:cs typeface="Aptos" pitchFamily="34" charset="-120"/>
               </a:rPr>
-              <a:t>Draft a risk appetite statement and a risk tolerance table for at least four AI use.</a:t>
-            </a:r>
-            <a:endParaRPr lang="en-US" sz="1380" dirty="0"/>
+              <a:t>Draft a risk appetite statement and a risk tolerance table for at.</a:t>
+            </a:r>
+            <a:endParaRPr lang="en-US" sz="1220" dirty="0"/>
           </a:p>
         </p:txBody>
       </p:sp>
@@ -6971,17 +7058,17 @@
         </p:nvSpPr>
         <p:spPr>
           <a:xfrm>
-            <a:off x="7799832" y="5001768"/>
-            <a:ext cx="3145536" cy="502920"/>
-          </a:xfrm>
-          <a:prstGeom prst="rect">
-            <a:avLst/>
-          </a:prstGeom>
-          <a:noFill/>
-          <a:ln/>
-        </p:spPr>
-        <p:txBody>
-          <a:bodyPr wrap="square" lIns="0" tIns="0" rIns="0" bIns="0" rtlCol="0" anchor="t">
+            <a:off x="7799832" y="4974336"/>
+            <a:ext cx="3145536" cy="576072"/>
+          </a:xfrm>
+          <a:prstGeom prst="rect">
+            <a:avLst/>
+          </a:prstGeom>
+          <a:noFill/>
+          <a:ln/>
+        </p:spPr>
+        <p:txBody>
+          <a:bodyPr wrap="square" lIns="254" tIns="254" rIns="254" bIns="254" rtlCol="0" anchor="t">
             <a:normAutofit/>
           </a:bodyPr>
           <a:lstStyle/>
@@ -6990,7 +7077,7 @@
               <a:buNone/>
             </a:pPr>
             <a:r>
-              <a:rPr lang="en-US" sz="1550" dirty="0">
+              <a:rPr lang="en-US" sz="1320" dirty="0">
                 <a:solidFill>
                   <a:srgbClr val="17364A"/>
                 </a:solidFill>
@@ -6998,9 +7085,9 @@
                 <a:ea typeface="Aptos" pitchFamily="34" charset="-122"/>
                 <a:cs typeface="Aptos" pitchFamily="34" charset="-120"/>
               </a:rPr>
-              <a:t>Use the assignment to test whether you can explain the concept, apply it to a realistic public health situation, and identify what would need review before the work moves forward.</a:t>
-            </a:r>
-            <a:endParaRPr lang="en-US" sz="1550" dirty="0"/>
+              <a:t>Use the assignment to test whether you can explain the concept, apply it to a realistic public health situation, and.</a:t>
+            </a:r>
+            <a:endParaRPr lang="en-US" sz="1320" dirty="0"/>
           </a:p>
         </p:txBody>
       </p:sp>
@@ -7301,49 +7388,58 @@
           <a:ln/>
         </p:spPr>
         <p:txBody>
-          <a:bodyPr wrap="square" lIns="635" tIns="635" rIns="635" bIns="635" rtlCol="0" anchor="t">
+          <a:bodyPr wrap="square" lIns="1016" tIns="1016" rIns="1016" bIns="1016" rtlCol="0" anchor="t">
             <a:normAutofit/>
           </a:bodyPr>
           <a:lstStyle/>
           <a:p>
+            <a:pPr indent="0" marL="0">
+              <a:buNone/>
+            </a:pPr>
             <a:r>
               <a:rPr lang="en-US" sz="2100" dirty="0">
                 <a:solidFill>
-                  <a:srgbClr val="17364A"/>
-                </a:solidFill>
-                <a:latin typeface="Aptos" pitchFamily="34" charset="0"/>
-                <a:ea typeface="Aptos" pitchFamily="34" charset="-122"/>
-                <a:cs typeface="Aptos" pitchFamily="34" charset="-120"/>
-              </a:rPr>
-              <a:t>Choose a real or realistic public health AI use case.</a:t>
+                  <a:srgbClr val="003A63"/>
+                </a:solidFill>
+                <a:latin typeface="Aptos" pitchFamily="34" charset="0"/>
+                <a:ea typeface="Aptos" pitchFamily="34" charset="-122"/>
+                <a:cs typeface="Aptos" pitchFamily="34" charset="-120"/>
+              </a:rPr>
+              <a:t>• Choose a real or realistic public health AI use case.</a:t>
             </a:r>
             <a:endParaRPr lang="en-US" sz="2100" dirty="0"/>
           </a:p>
           <a:p>
+            <a:pPr indent="0" marL="0">
+              <a:buNone/>
+            </a:pPr>
             <a:r>
               <a:rPr lang="en-US" sz="2100" dirty="0">
                 <a:solidFill>
-                  <a:srgbClr val="17364A"/>
-                </a:solidFill>
-                <a:latin typeface="Aptos" pitchFamily="34" charset="0"/>
-                <a:ea typeface="Aptos" pitchFamily="34" charset="-122"/>
-                <a:cs typeface="Aptos" pitchFamily="34" charset="-120"/>
-              </a:rPr>
-              <a:t>Document assumptions, unresolved questions, and which agency roles would need to review the artifact.</a:t>
+                  <a:srgbClr val="003A63"/>
+                </a:solidFill>
+                <a:latin typeface="Aptos" pitchFamily="34" charset="0"/>
+                <a:ea typeface="Aptos" pitchFamily="34" charset="-122"/>
+                <a:cs typeface="Aptos" pitchFamily="34" charset="-120"/>
+              </a:rPr>
+              <a:t>• Document assumptions, unresolved questions, and which agency roles would need to review the.</a:t>
             </a:r>
             <a:endParaRPr lang="en-US" sz="2100" dirty="0"/>
           </a:p>
           <a:p>
+            <a:pPr indent="0" marL="0">
+              <a:buNone/>
+            </a:pPr>
             <a:r>
               <a:rPr lang="en-US" sz="2100" dirty="0">
                 <a:solidFill>
-                  <a:srgbClr val="17364A"/>
-                </a:solidFill>
-                <a:latin typeface="Aptos" pitchFamily="34" charset="0"/>
-                <a:ea typeface="Aptos" pitchFamily="34" charset="-122"/>
-                <a:cs typeface="Aptos" pitchFamily="34" charset="-120"/>
-              </a:rPr>
-              <a:t>The exercise should produce a work product that could support governance review, leadership discussion,.</a:t>
+                  <a:srgbClr val="003A63"/>
+                </a:solidFill>
+                <a:latin typeface="Aptos" pitchFamily="34" charset="0"/>
+                <a:ea typeface="Aptos" pitchFamily="34" charset="-122"/>
+                <a:cs typeface="Aptos" pitchFamily="34" charset="-120"/>
+              </a:rPr>
+              <a:t>• The exercise should produce a work product that could support governance review, leadership.</a:t>
             </a:r>
             <a:endParaRPr lang="en-US" sz="2100" dirty="0"/>
           </a:p>
@@ -7423,17 +7519,17 @@
         </p:nvSpPr>
         <p:spPr>
           <a:xfrm>
-            <a:off x="7799832" y="1828800"/>
-            <a:ext cx="3145536" cy="685800"/>
-          </a:xfrm>
-          <a:prstGeom prst="rect">
-            <a:avLst/>
-          </a:prstGeom>
-          <a:noFill/>
-          <a:ln/>
-        </p:spPr>
-        <p:txBody>
-          <a:bodyPr wrap="square" lIns="0" tIns="0" rIns="0" bIns="0" rtlCol="0" anchor="t">
+            <a:off x="7799832" y="1801368"/>
+            <a:ext cx="3145536" cy="758952"/>
+          </a:xfrm>
+          <a:prstGeom prst="rect">
+            <a:avLst/>
+          </a:prstGeom>
+          <a:noFill/>
+          <a:ln/>
+        </p:spPr>
+        <p:txBody>
+          <a:bodyPr wrap="square" lIns="254" tIns="254" rIns="254" bIns="254" rtlCol="0" anchor="t">
             <a:normAutofit/>
           </a:bodyPr>
           <a:lstStyle/>
@@ -7442,7 +7538,7 @@
               <a:buNone/>
             </a:pPr>
             <a:r>
-              <a:rPr lang="en-US" sz="1550" dirty="0">
+              <a:rPr lang="en-US" sz="1320" dirty="0">
                 <a:solidFill>
                   <a:srgbClr val="17364A"/>
                 </a:solidFill>
@@ -7452,7 +7548,7 @@
               </a:rPr>
               <a:t>Choose a real or realistic public health AI use case.</a:t>
             </a:r>
-            <a:endParaRPr lang="en-US" sz="1550" dirty="0"/>
+            <a:endParaRPr lang="en-US" sz="1320" dirty="0"/>
           </a:p>
         </p:txBody>
       </p:sp>
@@ -7540,13 +7636,16 @@
           <a:ln/>
         </p:spPr>
         <p:txBody>
-          <a:bodyPr wrap="square" lIns="254" tIns="254" rIns="254" bIns="254" rtlCol="0" anchor="t">
+          <a:bodyPr wrap="square" lIns="508" tIns="508" rIns="508" bIns="508" rtlCol="0" anchor="t">
             <a:normAutofit/>
           </a:bodyPr>
           <a:lstStyle/>
           <a:p>
-            <a:r>
-              <a:rPr lang="en-US" sz="1380" dirty="0">
+            <a:pPr indent="0" marL="0">
+              <a:buNone/>
+            </a:pPr>
+            <a:r>
+              <a:rPr lang="en-US" sz="1220" dirty="0">
                 <a:solidFill>
                   <a:srgbClr val="17364A"/>
                 </a:solidFill>
@@ -7554,13 +7653,16 @@
                 <a:ea typeface="Aptos" pitchFamily="34" charset="-122"/>
                 <a:cs typeface="Aptos" pitchFamily="34" charset="-120"/>
               </a:rPr>
-              <a:t>Document assumptions, unresolved questions, and which agency roles would need to review.</a:t>
-            </a:r>
-            <a:endParaRPr lang="en-US" sz="1380" dirty="0"/>
-          </a:p>
-          <a:p>
-            <a:r>
-              <a:rPr lang="en-US" sz="1380" dirty="0">
+              <a:t>Document assumptions, unresolved questions, and which agency roles.</a:t>
+            </a:r>
+            <a:endParaRPr lang="en-US" sz="1220" dirty="0"/>
+          </a:p>
+          <a:p>
+            <a:pPr indent="0" marL="0">
+              <a:buNone/>
+            </a:pPr>
+            <a:r>
+              <a:rPr lang="en-US" sz="1220" dirty="0">
                 <a:solidFill>
                   <a:srgbClr val="17364A"/>
                 </a:solidFill>
@@ -7568,9 +7670,9 @@
                 <a:ea typeface="Aptos" pitchFamily="34" charset="-122"/>
                 <a:cs typeface="Aptos" pitchFamily="34" charset="-120"/>
               </a:rPr>
-              <a:t>The exercise should produce a work product that could support governance review,.</a:t>
-            </a:r>
-            <a:endParaRPr lang="en-US" sz="1380" dirty="0"/>
+              <a:t>The exercise should produce a work product that could support.</a:t>
+            </a:r>
+            <a:endParaRPr lang="en-US" sz="1220" dirty="0"/>
           </a:p>
         </p:txBody>
       </p:sp>
@@ -7648,17 +7750,17 @@
         </p:nvSpPr>
         <p:spPr>
           <a:xfrm>
-            <a:off x="7799832" y="5001768"/>
-            <a:ext cx="3145536" cy="502920"/>
-          </a:xfrm>
-          <a:prstGeom prst="rect">
-            <a:avLst/>
-          </a:prstGeom>
-          <a:noFill/>
-          <a:ln/>
-        </p:spPr>
-        <p:txBody>
-          <a:bodyPr wrap="square" lIns="0" tIns="0" rIns="0" bIns="0" rtlCol="0" anchor="t">
+            <a:off x="7799832" y="4974336"/>
+            <a:ext cx="3145536" cy="576072"/>
+          </a:xfrm>
+          <a:prstGeom prst="rect">
+            <a:avLst/>
+          </a:prstGeom>
+          <a:noFill/>
+          <a:ln/>
+        </p:spPr>
+        <p:txBody>
+          <a:bodyPr wrap="square" lIns="254" tIns="254" rIns="254" bIns="254" rtlCol="0" anchor="t">
             <a:normAutofit/>
           </a:bodyPr>
           <a:lstStyle/>
@@ -7667,7 +7769,7 @@
               <a:buNone/>
             </a:pPr>
             <a:r>
-              <a:rPr lang="en-US" sz="1550" dirty="0">
+              <a:rPr lang="en-US" sz="1320" dirty="0">
                 <a:solidFill>
                   <a:srgbClr val="17364A"/>
                 </a:solidFill>
@@ -7675,9 +7777,9 @@
                 <a:ea typeface="Aptos" pitchFamily="34" charset="-122"/>
                 <a:cs typeface="Aptos" pitchFamily="34" charset="-120"/>
               </a:rPr>
-              <a:t>Identify what could go wrong, who could be affected, what safeguards are needed, and what evidence should be reviewed before use expands.</a:t>
-            </a:r>
-            <a:endParaRPr lang="en-US" sz="1550" dirty="0"/>
+              <a:t>Identify what could go wrong, who could be affected, what safeguards are needed, and what evidence should be reviewed.</a:t>
+            </a:r>
+            <a:endParaRPr lang="en-US" sz="1320" dirty="0"/>
           </a:p>
         </p:txBody>
       </p:sp>
@@ -7978,21 +8080,24 @@
           <a:ln/>
         </p:spPr>
         <p:txBody>
-          <a:bodyPr wrap="square" lIns="635" tIns="635" rIns="635" bIns="635" rtlCol="0" anchor="t">
+          <a:bodyPr wrap="square" lIns="1016" tIns="1016" rIns="1016" bIns="1016" rtlCol="0" anchor="t">
             <a:normAutofit/>
           </a:bodyPr>
           <a:lstStyle/>
           <a:p>
+            <a:pPr indent="0" marL="0">
+              <a:buNone/>
+            </a:pPr>
             <a:r>
               <a:rPr lang="en-US" sz="2100" dirty="0">
                 <a:solidFill>
-                  <a:srgbClr val="17364A"/>
-                </a:solidFill>
-                <a:latin typeface="Aptos" pitchFamily="34" charset="0"/>
-                <a:ea typeface="Aptos" pitchFamily="34" charset="-122"/>
-                <a:cs typeface="Aptos" pitchFamily="34" charset="-120"/>
-              </a:rPr>
-              <a:t>AI risk appetite statement; risk tolerance table; prohibited-use examples; mitigation and escalation.</a:t>
+                  <a:srgbClr val="003A63"/>
+                </a:solidFill>
+                <a:latin typeface="Aptos" pitchFamily="34" charset="0"/>
+                <a:ea typeface="Aptos" pitchFamily="34" charset="-122"/>
+                <a:cs typeface="Aptos" pitchFamily="34" charset="-120"/>
+              </a:rPr>
+              <a:t>• AI risk appetite statement; risk tolerance table; prohibited-use examples; mitigation and.</a:t>
             </a:r>
             <a:endParaRPr lang="en-US" sz="2100" dirty="0"/>
           </a:p>
@@ -8072,17 +8177,17 @@
         </p:nvSpPr>
         <p:spPr>
           <a:xfrm>
-            <a:off x="7799832" y="1828800"/>
-            <a:ext cx="3145536" cy="685800"/>
-          </a:xfrm>
-          <a:prstGeom prst="rect">
-            <a:avLst/>
-          </a:prstGeom>
-          <a:noFill/>
-          <a:ln/>
-        </p:spPr>
-        <p:txBody>
-          <a:bodyPr wrap="square" lIns="0" tIns="0" rIns="0" bIns="0" rtlCol="0" anchor="t">
+            <a:off x="7799832" y="1801368"/>
+            <a:ext cx="3145536" cy="758952"/>
+          </a:xfrm>
+          <a:prstGeom prst="rect">
+            <a:avLst/>
+          </a:prstGeom>
+          <a:noFill/>
+          <a:ln/>
+        </p:spPr>
+        <p:txBody>
+          <a:bodyPr wrap="square" lIns="254" tIns="254" rIns="254" bIns="254" rtlCol="0" anchor="t">
             <a:normAutofit/>
           </a:bodyPr>
           <a:lstStyle/>
@@ -8091,7 +8196,7 @@
               <a:buNone/>
             </a:pPr>
             <a:r>
-              <a:rPr lang="en-US" sz="1550" dirty="0">
+              <a:rPr lang="en-US" sz="1320" dirty="0">
                 <a:solidFill>
                   <a:srgbClr val="17364A"/>
                 </a:solidFill>
@@ -8101,7 +8206,7 @@
               </a:rPr>
               <a:t>AI risk appetite statement; risk tolerance table; prohibited-use examples; mitigation and escalation.</a:t>
             </a:r>
-            <a:endParaRPr lang="en-US" sz="1550" dirty="0"/>
+            <a:endParaRPr lang="en-US" sz="1320" dirty="0"/>
           </a:p>
         </p:txBody>
       </p:sp>
@@ -8189,13 +8294,16 @@
           <a:ln/>
         </p:spPr>
         <p:txBody>
-          <a:bodyPr wrap="square" lIns="254" tIns="254" rIns="254" bIns="254" rtlCol="0" anchor="t">
+          <a:bodyPr wrap="square" lIns="508" tIns="508" rIns="508" bIns="508" rtlCol="0" anchor="t">
             <a:normAutofit/>
           </a:bodyPr>
           <a:lstStyle/>
           <a:p>
-            <a:r>
-              <a:rPr lang="en-US" sz="1380" dirty="0">
+            <a:pPr indent="0" marL="0">
+              <a:buNone/>
+            </a:pPr>
+            <a:r>
+              <a:rPr lang="en-US" sz="1220" dirty="0">
                 <a:solidFill>
                   <a:srgbClr val="17364A"/>
                 </a:solidFill>
@@ -8203,9 +8311,9 @@
                 <a:ea typeface="Aptos" pitchFamily="34" charset="-122"/>
                 <a:cs typeface="Aptos" pitchFamily="34" charset="-120"/>
               </a:rPr>
-              <a:t>AI risk appetite statement; risk tolerance table; prohibited-use examples; mitigation and.</a:t>
-            </a:r>
-            <a:endParaRPr lang="en-US" sz="1380" dirty="0"/>
+              <a:t>AI risk appetite statement; risk tolerance table; prohibited-use.</a:t>
+            </a:r>
+            <a:endParaRPr lang="en-US" sz="1220" dirty="0"/>
           </a:p>
         </p:txBody>
       </p:sp>
@@ -8283,17 +8391,17 @@
         </p:nvSpPr>
         <p:spPr>
           <a:xfrm>
-            <a:off x="7799832" y="5001768"/>
-            <a:ext cx="3145536" cy="502920"/>
-          </a:xfrm>
-          <a:prstGeom prst="rect">
-            <a:avLst/>
-          </a:prstGeom>
-          <a:noFill/>
-          <a:ln/>
-        </p:spPr>
-        <p:txBody>
-          <a:bodyPr wrap="square" lIns="0" tIns="0" rIns="0" bIns="0" rtlCol="0" anchor="t">
+            <a:off x="7799832" y="4974336"/>
+            <a:ext cx="3145536" cy="576072"/>
+          </a:xfrm>
+          <a:prstGeom prst="rect">
+            <a:avLst/>
+          </a:prstGeom>
+          <a:noFill/>
+          <a:ln/>
+        </p:spPr>
+        <p:txBody>
+          <a:bodyPr wrap="square" lIns="254" tIns="254" rIns="254" bIns="254" rtlCol="0" anchor="t">
             <a:normAutofit/>
           </a:bodyPr>
           <a:lstStyle/>
@@ -8302,7 +8410,7 @@
               <a:buNone/>
             </a:pPr>
             <a:r>
-              <a:rPr lang="en-US" sz="1550" dirty="0">
+              <a:rPr lang="en-US" sz="1320" dirty="0">
                 <a:solidFill>
                   <a:srgbClr val="17364A"/>
                 </a:solidFill>
@@ -8310,9 +8418,9 @@
                 <a:ea typeface="Aptos" pitchFamily="34" charset="-122"/>
                 <a:cs typeface="Aptos" pitchFamily="34" charset="-120"/>
               </a:rPr>
-              <a:t>Identify what could go wrong, who could be affected, what safeguards are needed, and what evidence should be reviewed before use expands.</a:t>
-            </a:r>
-            <a:endParaRPr lang="en-US" sz="1550" dirty="0"/>
+              <a:t>Identify what could go wrong, who could be affected, what safeguards are needed, and what evidence should be reviewed.</a:t>
+            </a:r>
+            <a:endParaRPr lang="en-US" sz="1320" dirty="0"/>
           </a:p>
         </p:txBody>
       </p:sp>
@@ -8613,21 +8721,24 @@
           <a:ln/>
         </p:spPr>
         <p:txBody>
-          <a:bodyPr wrap="square" lIns="635" tIns="635" rIns="635" bIns="635" rtlCol="0" anchor="t">
+          <a:bodyPr wrap="square" lIns="1016" tIns="1016" rIns="1016" bIns="1016" rtlCol="0" anchor="t">
             <a:normAutofit/>
           </a:bodyPr>
           <a:lstStyle/>
           <a:p>
+            <a:pPr indent="0" marL="0">
+              <a:buNone/>
+            </a:pPr>
             <a:r>
               <a:rPr lang="en-US" sz="2100" dirty="0">
                 <a:solidFill>
-                  <a:srgbClr val="17364A"/>
-                </a:solidFill>
-                <a:latin typeface="Aptos" pitchFamily="34" charset="0"/>
-                <a:ea typeface="Aptos" pitchFamily="34" charset="-122"/>
-                <a:cs typeface="Aptos" pitchFamily="34" charset="-120"/>
-              </a:rPr>
-              <a:t>AI risk appetite statement; risk tolerance table; prohibited-use examples; mitigation and escalation.</a:t>
+                  <a:srgbClr val="003A63"/>
+                </a:solidFill>
+                <a:latin typeface="Aptos" pitchFamily="34" charset="0"/>
+                <a:ea typeface="Aptos" pitchFamily="34" charset="-122"/>
+                <a:cs typeface="Aptos" pitchFamily="34" charset="-120"/>
+              </a:rPr>
+              <a:t>• AI risk appetite statement; risk tolerance table; prohibited-use examples; mitigation and.</a:t>
             </a:r>
             <a:endParaRPr lang="en-US" sz="2100" dirty="0"/>
           </a:p>
@@ -8707,17 +8818,17 @@
         </p:nvSpPr>
         <p:spPr>
           <a:xfrm>
-            <a:off x="7799832" y="1828800"/>
-            <a:ext cx="3145536" cy="685800"/>
-          </a:xfrm>
-          <a:prstGeom prst="rect">
-            <a:avLst/>
-          </a:prstGeom>
-          <a:noFill/>
-          <a:ln/>
-        </p:spPr>
-        <p:txBody>
-          <a:bodyPr wrap="square" lIns="0" tIns="0" rIns="0" bIns="0" rtlCol="0" anchor="t">
+            <a:off x="7799832" y="1801368"/>
+            <a:ext cx="3145536" cy="758952"/>
+          </a:xfrm>
+          <a:prstGeom prst="rect">
+            <a:avLst/>
+          </a:prstGeom>
+          <a:noFill/>
+          <a:ln/>
+        </p:spPr>
+        <p:txBody>
+          <a:bodyPr wrap="square" lIns="254" tIns="254" rIns="254" bIns="254" rtlCol="0" anchor="t">
             <a:normAutofit/>
           </a:bodyPr>
           <a:lstStyle/>
@@ -8726,7 +8837,7 @@
               <a:buNone/>
             </a:pPr>
             <a:r>
-              <a:rPr lang="en-US" sz="1550" dirty="0">
+              <a:rPr lang="en-US" sz="1320" dirty="0">
                 <a:solidFill>
                   <a:srgbClr val="17364A"/>
                 </a:solidFill>
@@ -8736,7 +8847,7 @@
               </a:rPr>
               <a:t>AI risk appetite statement; risk tolerance table; prohibited-use examples; mitigation and escalation.</a:t>
             </a:r>
-            <a:endParaRPr lang="en-US" sz="1550" dirty="0"/>
+            <a:endParaRPr lang="en-US" sz="1320" dirty="0"/>
           </a:p>
         </p:txBody>
       </p:sp>
@@ -8824,13 +8935,16 @@
           <a:ln/>
         </p:spPr>
         <p:txBody>
-          <a:bodyPr wrap="square" lIns="254" tIns="254" rIns="254" bIns="254" rtlCol="0" anchor="t">
+          <a:bodyPr wrap="square" lIns="508" tIns="508" rIns="508" bIns="508" rtlCol="0" anchor="t">
             <a:normAutofit/>
           </a:bodyPr>
           <a:lstStyle/>
           <a:p>
-            <a:r>
-              <a:rPr lang="en-US" sz="1380" dirty="0">
+            <a:pPr indent="0" marL="0">
+              <a:buNone/>
+            </a:pPr>
+            <a:r>
+              <a:rPr lang="en-US" sz="1220" dirty="0">
                 <a:solidFill>
                   <a:srgbClr val="17364A"/>
                 </a:solidFill>
@@ -8838,9 +8952,9 @@
                 <a:ea typeface="Aptos" pitchFamily="34" charset="-122"/>
                 <a:cs typeface="Aptos" pitchFamily="34" charset="-120"/>
               </a:rPr>
-              <a:t>AI risk appetite statement; risk tolerance table; prohibited-use examples; mitigation and.</a:t>
-            </a:r>
-            <a:endParaRPr lang="en-US" sz="1380" dirty="0"/>
+              <a:t>AI risk appetite statement; risk tolerance table; prohibited-use.</a:t>
+            </a:r>
+            <a:endParaRPr lang="en-US" sz="1220" dirty="0"/>
           </a:p>
         </p:txBody>
       </p:sp>
@@ -8918,17 +9032,17 @@
         </p:nvSpPr>
         <p:spPr>
           <a:xfrm>
-            <a:off x="7799832" y="5001768"/>
-            <a:ext cx="3145536" cy="502920"/>
-          </a:xfrm>
-          <a:prstGeom prst="rect">
-            <a:avLst/>
-          </a:prstGeom>
-          <a:noFill/>
-          <a:ln/>
-        </p:spPr>
-        <p:txBody>
-          <a:bodyPr wrap="square" lIns="0" tIns="0" rIns="0" bIns="0" rtlCol="0" anchor="t">
+            <a:off x="7799832" y="4974336"/>
+            <a:ext cx="3145536" cy="576072"/>
+          </a:xfrm>
+          <a:prstGeom prst="rect">
+            <a:avLst/>
+          </a:prstGeom>
+          <a:noFill/>
+          <a:ln/>
+        </p:spPr>
+        <p:txBody>
+          <a:bodyPr wrap="square" lIns="254" tIns="254" rIns="254" bIns="254" rtlCol="0" anchor="t">
             <a:normAutofit/>
           </a:bodyPr>
           <a:lstStyle/>
@@ -8937,7 +9051,7 @@
               <a:buNone/>
             </a:pPr>
             <a:r>
-              <a:rPr lang="en-US" sz="1550" dirty="0">
+              <a:rPr lang="en-US" sz="1320" dirty="0">
                 <a:solidFill>
                   <a:srgbClr val="17364A"/>
                 </a:solidFill>
@@ -8945,9 +9059,9 @@
                 <a:ea typeface="Aptos" pitchFamily="34" charset="-122"/>
                 <a:cs typeface="Aptos" pitchFamily="34" charset="-120"/>
               </a:rPr>
-              <a:t>Use the assignment to test whether you can explain the concept, apply it to a realistic public health situation, and identify what would need review before the work moves forward.</a:t>
-            </a:r>
-            <a:endParaRPr lang="en-US" sz="1550" dirty="0"/>
+              <a:t>Use the assignment to test whether you can explain the concept, apply it to a realistic public health situation, and.</a:t>
+            </a:r>
+            <a:endParaRPr lang="en-US" sz="1320" dirty="0"/>
           </a:p>
         </p:txBody>
       </p:sp>
@@ -9248,49 +9362,58 @@
           <a:ln/>
         </p:spPr>
         <p:txBody>
-          <a:bodyPr wrap="square" lIns="635" tIns="635" rIns="635" bIns="635" rtlCol="0" anchor="t">
+          <a:bodyPr wrap="square" lIns="1016" tIns="1016" rIns="1016" bIns="1016" rtlCol="0" anchor="t">
             <a:normAutofit/>
           </a:bodyPr>
           <a:lstStyle/>
           <a:p>
+            <a:pPr indent="0" marL="0">
+              <a:buNone/>
+            </a:pPr>
             <a:r>
               <a:rPr lang="en-US" sz="2100" dirty="0">
                 <a:solidFill>
-                  <a:srgbClr val="17364A"/>
-                </a:solidFill>
-                <a:latin typeface="Aptos" pitchFamily="34" charset="0"/>
-                <a:ea typeface="Aptos" pitchFamily="34" charset="-122"/>
-                <a:cs typeface="Aptos" pitchFamily="34" charset="-120"/>
-              </a:rPr>
-              <a:t>1. What is the strongest reason this module topic belongs in AI leadership and governance training?</a:t>
+                  <a:srgbClr val="003A63"/>
+                </a:solidFill>
+                <a:latin typeface="Aptos" pitchFamily="34" charset="0"/>
+                <a:ea typeface="Aptos" pitchFamily="34" charset="-122"/>
+                <a:cs typeface="Aptos" pitchFamily="34" charset="-120"/>
+              </a:rPr>
+              <a:t>• 1. What is the strongest reason this module topic belongs in AI leadership and governance.</a:t>
             </a:r>
             <a:endParaRPr lang="en-US" sz="2100" dirty="0"/>
           </a:p>
           <a:p>
+            <a:pPr indent="0" marL="0">
+              <a:buNone/>
+            </a:pPr>
             <a:r>
               <a:rPr lang="en-US" sz="2100" dirty="0">
                 <a:solidFill>
-                  <a:srgbClr val="17364A"/>
-                </a:solidFill>
-                <a:latin typeface="Aptos" pitchFamily="34" charset="0"/>
-                <a:ea typeface="Aptos" pitchFamily="34" charset="-122"/>
-                <a:cs typeface="Aptos" pitchFamily="34" charset="-120"/>
-              </a:rPr>
-              <a:t>2. Which practice best supports accountable public health AI governance?</a:t>
+                  <a:srgbClr val="003A63"/>
+                </a:solidFill>
+                <a:latin typeface="Aptos" pitchFamily="34" charset="0"/>
+                <a:ea typeface="Aptos" pitchFamily="34" charset="-122"/>
+                <a:cs typeface="Aptos" pitchFamily="34" charset="-120"/>
+              </a:rPr>
+              <a:t>• 2. Which practice best supports accountable public health AI governance?</a:t>
             </a:r>
             <a:endParaRPr lang="en-US" sz="2100" dirty="0"/>
           </a:p>
           <a:p>
+            <a:pPr indent="0" marL="0">
+              <a:buNone/>
+            </a:pPr>
             <a:r>
               <a:rPr lang="en-US" sz="2100" dirty="0">
                 <a:solidFill>
-                  <a:srgbClr val="17364A"/>
-                </a:solidFill>
-                <a:latin typeface="Aptos" pitchFamily="34" charset="0"/>
-                <a:ea typeface="Aptos" pitchFamily="34" charset="-122"/>
-                <a:cs typeface="Aptos" pitchFamily="34" charset="-120"/>
-              </a:rPr>
-              <a:t>3. When should an AI use case be escalated for leadership or governance review?</a:t>
+                  <a:srgbClr val="003A63"/>
+                </a:solidFill>
+                <a:latin typeface="Aptos" pitchFamily="34" charset="0"/>
+                <a:ea typeface="Aptos" pitchFamily="34" charset="-122"/>
+                <a:cs typeface="Aptos" pitchFamily="34" charset="-120"/>
+              </a:rPr>
+              <a:t>• 3. When should an AI use case be escalated for leadership or governance review?</a:t>
             </a:r>
             <a:endParaRPr lang="en-US" sz="2100" dirty="0"/>
           </a:p>
@@ -9370,17 +9493,17 @@
         </p:nvSpPr>
         <p:spPr>
           <a:xfrm>
-            <a:off x="7799832" y="1828800"/>
-            <a:ext cx="3145536" cy="685800"/>
-          </a:xfrm>
-          <a:prstGeom prst="rect">
-            <a:avLst/>
-          </a:prstGeom>
-          <a:noFill/>
-          <a:ln/>
-        </p:spPr>
-        <p:txBody>
-          <a:bodyPr wrap="square" lIns="0" tIns="0" rIns="0" bIns="0" rtlCol="0" anchor="t">
+            <a:off x="7799832" y="1801368"/>
+            <a:ext cx="3145536" cy="758952"/>
+          </a:xfrm>
+          <a:prstGeom prst="rect">
+            <a:avLst/>
+          </a:prstGeom>
+          <a:noFill/>
+          <a:ln/>
+        </p:spPr>
+        <p:txBody>
+          <a:bodyPr wrap="square" lIns="254" tIns="254" rIns="254" bIns="254" rtlCol="0" anchor="t">
             <a:normAutofit/>
           </a:bodyPr>
           <a:lstStyle/>
@@ -9389,7 +9512,7 @@
               <a:buNone/>
             </a:pPr>
             <a:r>
-              <a:rPr lang="en-US" sz="1550" dirty="0">
+              <a:rPr lang="en-US" sz="1320" dirty="0">
                 <a:solidFill>
                   <a:srgbClr val="17364A"/>
                 </a:solidFill>
@@ -9399,7 +9522,7 @@
               </a:rPr>
               <a:t>1. What is the strongest reason this module topic belongs in AI leadership and governance training?</a:t>
             </a:r>
-            <a:endParaRPr lang="en-US" sz="1550" dirty="0"/>
+            <a:endParaRPr lang="en-US" sz="1320" dirty="0"/>
           </a:p>
         </p:txBody>
       </p:sp>
@@ -9487,13 +9610,16 @@
           <a:ln/>
         </p:spPr>
         <p:txBody>
-          <a:bodyPr wrap="square" lIns="254" tIns="254" rIns="254" bIns="254" rtlCol="0" anchor="t">
+          <a:bodyPr wrap="square" lIns="508" tIns="508" rIns="508" bIns="508" rtlCol="0" anchor="t">
             <a:normAutofit/>
           </a:bodyPr>
           <a:lstStyle/>
           <a:p>
-            <a:r>
-              <a:rPr lang="en-US" sz="1380" dirty="0">
+            <a:pPr indent="0" marL="0">
+              <a:buNone/>
+            </a:pPr>
+            <a:r>
+              <a:rPr lang="en-US" sz="1220" dirty="0">
                 <a:solidFill>
                   <a:srgbClr val="17364A"/>
                 </a:solidFill>
@@ -9503,11 +9629,14 @@
               </a:rPr>
               <a:t>1.</a:t>
             </a:r>
-            <a:endParaRPr lang="en-US" sz="1380" dirty="0"/>
-          </a:p>
-          <a:p>
-            <a:r>
-              <a:rPr lang="en-US" sz="1380" dirty="0">
+            <a:endParaRPr lang="en-US" sz="1220" dirty="0"/>
+          </a:p>
+          <a:p>
+            <a:pPr indent="0" marL="0">
+              <a:buNone/>
+            </a:pPr>
+            <a:r>
+              <a:rPr lang="en-US" sz="1220" dirty="0">
                 <a:solidFill>
                   <a:srgbClr val="17364A"/>
                 </a:solidFill>
@@ -9515,13 +9644,16 @@
                 <a:ea typeface="Aptos" pitchFamily="34" charset="-122"/>
                 <a:cs typeface="Aptos" pitchFamily="34" charset="-120"/>
               </a:rPr>
-              <a:t>What is the strongest reason this module topic belongs in AI leadership and governance.</a:t>
-            </a:r>
-            <a:endParaRPr lang="en-US" sz="1380" dirty="0"/>
-          </a:p>
-          <a:p>
-            <a:r>
-              <a:rPr lang="en-US" sz="1380" dirty="0">
+              <a:t>What is the strongest reason this module topic belongs in AI.</a:t>
+            </a:r>
+            <a:endParaRPr lang="en-US" sz="1220" dirty="0"/>
+          </a:p>
+          <a:p>
+            <a:pPr indent="0" marL="0">
+              <a:buNone/>
+            </a:pPr>
+            <a:r>
+              <a:rPr lang="en-US" sz="1220" dirty="0">
                 <a:solidFill>
                   <a:srgbClr val="17364A"/>
                 </a:solidFill>
@@ -9531,7 +9663,7 @@
               </a:rPr>
               <a:t>2.</a:t>
             </a:r>
-            <a:endParaRPr lang="en-US" sz="1380" dirty="0"/>
+            <a:endParaRPr lang="en-US" sz="1220" dirty="0"/>
           </a:p>
         </p:txBody>
       </p:sp>
@@ -9609,17 +9741,17 @@
         </p:nvSpPr>
         <p:spPr>
           <a:xfrm>
-            <a:off x="7799832" y="5001768"/>
-            <a:ext cx="3145536" cy="502920"/>
-          </a:xfrm>
-          <a:prstGeom prst="rect">
-            <a:avLst/>
-          </a:prstGeom>
-          <a:noFill/>
-          <a:ln/>
-        </p:spPr>
-        <p:txBody>
-          <a:bodyPr wrap="square" lIns="0" tIns="0" rIns="0" bIns="0" rtlCol="0" anchor="t">
+            <a:off x="7799832" y="4974336"/>
+            <a:ext cx="3145536" cy="576072"/>
+          </a:xfrm>
+          <a:prstGeom prst="rect">
+            <a:avLst/>
+          </a:prstGeom>
+          <a:noFill/>
+          <a:ln/>
+        </p:spPr>
+        <p:txBody>
+          <a:bodyPr wrap="square" lIns="254" tIns="254" rIns="254" bIns="254" rtlCol="0" anchor="t">
             <a:normAutofit/>
           </a:bodyPr>
           <a:lstStyle/>
@@ -9628,7 +9760,7 @@
               <a:buNone/>
             </a:pPr>
             <a:r>
-              <a:rPr lang="en-US" sz="1550" dirty="0">
+              <a:rPr lang="en-US" sz="1320" dirty="0">
                 <a:solidFill>
                   <a:srgbClr val="17364A"/>
                 </a:solidFill>
@@ -9636,9 +9768,9 @@
                 <a:ea typeface="Aptos" pitchFamily="34" charset="-122"/>
                 <a:cs typeface="Aptos" pitchFamily="34" charset="-120"/>
               </a:rPr>
-              <a:t>Use the assignment to test whether you can explain the concept, apply it to a realistic public health situation, and identify what would need review before the work moves forward.</a:t>
-            </a:r>
-            <a:endParaRPr lang="en-US" sz="1550" dirty="0"/>
+              <a:t>Use the assignment to test whether you can explain the concept, apply it to a realistic public health situation, and.</a:t>
+            </a:r>
+            <a:endParaRPr lang="en-US" sz="1320" dirty="0"/>
           </a:p>
         </p:txBody>
       </p:sp>
@@ -9939,49 +10071,58 @@
           <a:ln/>
         </p:spPr>
         <p:txBody>
-          <a:bodyPr wrap="square" lIns="635" tIns="635" rIns="635" bIns="635" rtlCol="0" anchor="t">
+          <a:bodyPr wrap="square" lIns="1016" tIns="1016" rIns="1016" bIns="1016" rtlCol="0" anchor="t">
             <a:normAutofit/>
           </a:bodyPr>
           <a:lstStyle/>
           <a:p>
+            <a:pPr indent="0" marL="0">
+              <a:buNone/>
+            </a:pPr>
             <a:r>
               <a:rPr lang="en-US" sz="2100" dirty="0">
                 <a:solidFill>
-                  <a:srgbClr val="17364A"/>
-                </a:solidFill>
-                <a:latin typeface="Aptos" pitchFamily="34" charset="0"/>
-                <a:ea typeface="Aptos" pitchFamily="34" charset="-122"/>
-                <a:cs typeface="Aptos" pitchFamily="34" charset="-120"/>
-              </a:rPr>
-              <a:t>Leaders cannot manage AI risk effectively unless they define how much risk the agency is willing to accept for.</a:t>
+                  <a:srgbClr val="003A63"/>
+                </a:solidFill>
+                <a:latin typeface="Aptos" pitchFamily="34" charset="0"/>
+                <a:ea typeface="Aptos" pitchFamily="34" charset="-122"/>
+                <a:cs typeface="Aptos" pitchFamily="34" charset="-120"/>
+              </a:rPr>
+              <a:t>• Leaders cannot manage AI risk effectively unless they define how much risk the agency is.</a:t>
             </a:r>
             <a:endParaRPr lang="en-US" sz="2100" dirty="0"/>
           </a:p>
           <a:p>
+            <a:pPr indent="0" marL="0">
+              <a:buNone/>
+            </a:pPr>
             <a:r>
               <a:rPr lang="en-US" sz="2100" dirty="0">
                 <a:solidFill>
-                  <a:srgbClr val="17364A"/>
-                </a:solidFill>
-                <a:latin typeface="Aptos" pitchFamily="34" charset="0"/>
-                <a:ea typeface="Aptos" pitchFamily="34" charset="-122"/>
-                <a:cs typeface="Aptos" pitchFamily="34" charset="-120"/>
-              </a:rPr>
-              <a:t>Risk appetite describes the broad level of risk an organization is willing to take in pursuit of its mission.</a:t>
+                  <a:srgbClr val="003A63"/>
+                </a:solidFill>
+                <a:latin typeface="Aptos" pitchFamily="34" charset="0"/>
+                <a:ea typeface="Aptos" pitchFamily="34" charset="-122"/>
+                <a:cs typeface="Aptos" pitchFamily="34" charset="-120"/>
+              </a:rPr>
+              <a:t>• Risk appetite describes the broad level of risk an organization is willing to take in pursuit.</a:t>
             </a:r>
             <a:endParaRPr lang="en-US" sz="2100" dirty="0"/>
           </a:p>
           <a:p>
+            <a:pPr indent="0" marL="0">
+              <a:buNone/>
+            </a:pPr>
             <a:r>
               <a:rPr lang="en-US" sz="2100" dirty="0">
                 <a:solidFill>
-                  <a:srgbClr val="17364A"/>
-                </a:solidFill>
-                <a:latin typeface="Aptos" pitchFamily="34" charset="0"/>
-                <a:ea typeface="Aptos" pitchFamily="34" charset="-122"/>
-                <a:cs typeface="Aptos" pitchFamily="34" charset="-120"/>
-              </a:rPr>
-              <a:t>Risk tolerance translates that appetite into practical thresholds, conditions, and limits for specific AI uses.</a:t>
+                  <a:srgbClr val="003A63"/>
+                </a:solidFill>
+                <a:latin typeface="Aptos" pitchFamily="34" charset="0"/>
+                <a:ea typeface="Aptos" pitchFamily="34" charset="-122"/>
+                <a:cs typeface="Aptos" pitchFamily="34" charset="-120"/>
+              </a:rPr>
+              <a:t>• Risk tolerance translates that appetite into practical thresholds, conditions, and limits for.</a:t>
             </a:r>
             <a:endParaRPr lang="en-US" sz="2100" dirty="0"/>
           </a:p>
@@ -10061,17 +10202,17 @@
         </p:nvSpPr>
         <p:spPr>
           <a:xfrm>
-            <a:off x="8074152" y="1920240"/>
-            <a:ext cx="2825496" cy="1280160"/>
-          </a:xfrm>
-          <a:prstGeom prst="rect">
-            <a:avLst/>
-          </a:prstGeom>
-          <a:noFill/>
-          <a:ln/>
-        </p:spPr>
-        <p:txBody>
-          <a:bodyPr wrap="square" lIns="0" tIns="0" rIns="0" bIns="0" rtlCol="0" anchor="t">
+            <a:off x="8074152" y="1892808"/>
+            <a:ext cx="2825496" cy="1353312"/>
+          </a:xfrm>
+          <a:prstGeom prst="rect">
+            <a:avLst/>
+          </a:prstGeom>
+          <a:noFill/>
+          <a:ln/>
+        </p:spPr>
+        <p:txBody>
+          <a:bodyPr wrap="square" lIns="254" tIns="254" rIns="254" bIns="254" rtlCol="0" anchor="t">
             <a:normAutofit/>
           </a:bodyPr>
           <a:lstStyle/>
@@ -10080,7 +10221,7 @@
               <a:buNone/>
             </a:pPr>
             <a:r>
-              <a:rPr lang="en-US" sz="1550" dirty="0">
+              <a:rPr lang="en-US" sz="1320" dirty="0">
                 <a:solidFill>
                   <a:srgbClr val="17364A"/>
                 </a:solidFill>
@@ -10088,43 +10229,9 @@
                 <a:ea typeface="Aptos" pitchFamily="34" charset="-122"/>
                 <a:cs typeface="Aptos" pitchFamily="34" charset="-120"/>
               </a:rPr>
-              <a:t>Level: advanced/leadership</a:t>
-            </a:r>
-            <a:endParaRPr lang="en-US" sz="1550" dirty="0"/>
-          </a:p>
-          <a:p>
-            <a:pPr indent="0" marL="0">
-              <a:buNone/>
-            </a:pPr>
-            <a:r>
-              <a:rPr lang="en-US" sz="1550" dirty="0">
-                <a:solidFill>
-                  <a:srgbClr val="17364A"/>
-                </a:solidFill>
-                <a:latin typeface="Aptos" pitchFamily="34" charset="0"/>
-                <a:ea typeface="Aptos" pitchFamily="34" charset="-122"/>
-                <a:cs typeface="Aptos" pitchFamily="34" charset="-120"/>
-              </a:rPr>
-              <a:t>Primary track: Governance and Security Track</a:t>
-            </a:r>
-            <a:endParaRPr lang="en-US" sz="1550" dirty="0"/>
-          </a:p>
-          <a:p>
-            <a:pPr indent="0" marL="0">
-              <a:buNone/>
-            </a:pPr>
-            <a:r>
-              <a:rPr lang="en-US" sz="1550" dirty="0">
-                <a:solidFill>
-                  <a:srgbClr val="17364A"/>
-                </a:solidFill>
-                <a:latin typeface="Aptos" pitchFamily="34" charset="0"/>
-                <a:ea typeface="Aptos" pitchFamily="34" charset="-122"/>
-                <a:cs typeface="Aptos" pitchFamily="34" charset="-120"/>
-              </a:rPr>
-              <a:t>Appears in tracks: governance-security</a:t>
-            </a:r>
-            <a:endParaRPr lang="en-US" sz="1550" dirty="0"/>
+              <a:t>Level: advanced/leadership Primary track: Governance and Security Track Appears in tracks: governance-security</a:t>
+            </a:r>
+            <a:endParaRPr lang="en-US" sz="1320" dirty="0"/>
           </a:p>
         </p:txBody>
       </p:sp>
@@ -10212,13 +10319,16 @@
           <a:ln/>
         </p:spPr>
         <p:txBody>
-          <a:bodyPr wrap="square" lIns="254" tIns="254" rIns="254" bIns="254" rtlCol="0" anchor="t">
+          <a:bodyPr wrap="square" lIns="508" tIns="508" rIns="508" bIns="508" rtlCol="0" anchor="t">
             <a:normAutofit/>
           </a:bodyPr>
           <a:lstStyle/>
           <a:p>
-            <a:r>
-              <a:rPr lang="en-US" sz="1380" dirty="0">
+            <a:pPr indent="0" marL="0">
+              <a:buNone/>
+            </a:pPr>
+            <a:r>
+              <a:rPr lang="en-US" sz="1220" dirty="0">
                 <a:solidFill>
                   <a:srgbClr val="17364A"/>
                 </a:solidFill>
@@ -10228,11 +10338,14 @@
               </a:rPr>
               <a:t>Read the module for shared vocabulary and context.</a:t>
             </a:r>
-            <a:endParaRPr lang="en-US" sz="1380" dirty="0"/>
-          </a:p>
-          <a:p>
-            <a:r>
-              <a:rPr lang="en-US" sz="1380" dirty="0">
+            <a:endParaRPr lang="en-US" sz="1220" dirty="0"/>
+          </a:p>
+          <a:p>
+            <a:pPr indent="0" marL="0">
+              <a:buNone/>
+            </a:pPr>
+            <a:r>
+              <a:rPr lang="en-US" sz="1220" dirty="0">
                 <a:solidFill>
                   <a:srgbClr val="17364A"/>
                 </a:solidFill>
@@ -10242,11 +10355,14 @@
               </a:rPr>
               <a:t>Complete the practical exercise to apply the concept.</a:t>
             </a:r>
-            <a:endParaRPr lang="en-US" sz="1380" dirty="0"/>
-          </a:p>
-          <a:p>
-            <a:r>
-              <a:rPr lang="en-US" sz="1380" dirty="0">
+            <a:endParaRPr lang="en-US" sz="1220" dirty="0"/>
+          </a:p>
+          <a:p>
+            <a:pPr indent="0" marL="0">
+              <a:buNone/>
+            </a:pPr>
+            <a:r>
+              <a:rPr lang="en-US" sz="1220" dirty="0">
                 <a:solidFill>
                   <a:srgbClr val="17364A"/>
                 </a:solidFill>
@@ -10256,7 +10372,7 @@
               </a:rPr>
               <a:t>Use the notes and references for deeper review.</a:t>
             </a:r>
-            <a:endParaRPr lang="en-US" sz="1380" dirty="0"/>
+            <a:endParaRPr lang="en-US" sz="1220" dirty="0"/>
           </a:p>
         </p:txBody>
       </p:sp>
@@ -10557,49 +10673,58 @@
           <a:ln/>
         </p:spPr>
         <p:txBody>
-          <a:bodyPr wrap="square" lIns="635" tIns="635" rIns="635" bIns="635" rtlCol="0" anchor="t">
+          <a:bodyPr wrap="square" lIns="1016" tIns="1016" rIns="1016" bIns="1016" rtlCol="0" anchor="t">
             <a:normAutofit/>
           </a:bodyPr>
           <a:lstStyle/>
           <a:p>
+            <a:pPr indent="0" marL="0">
+              <a:buNone/>
+            </a:pPr>
             <a:r>
               <a:rPr lang="en-US" sz="2100" dirty="0">
                 <a:solidFill>
-                  <a:srgbClr val="17364A"/>
-                </a:solidFill>
-                <a:latin typeface="Aptos" pitchFamily="34" charset="0"/>
-                <a:ea typeface="Aptos" pitchFamily="34" charset="-122"/>
-                <a:cs typeface="Aptos" pitchFamily="34" charset="-120"/>
-              </a:rPr>
-              <a:t>NIST Artificial Intelligence Risk Management Framework (AI RMF 1.0):.</a:t>
+                  <a:srgbClr val="003A63"/>
+                </a:solidFill>
+                <a:latin typeface="Aptos" pitchFamily="34" charset="0"/>
+                <a:ea typeface="Aptos" pitchFamily="34" charset="-122"/>
+                <a:cs typeface="Aptos" pitchFamily="34" charset="-120"/>
+              </a:rPr>
+              <a:t>• NIST Artificial Intelligence Risk Management Framework (AI RMF 1.0):.</a:t>
             </a:r>
             <a:endParaRPr lang="en-US" sz="2100" dirty="0"/>
           </a:p>
           <a:p>
+            <a:pPr indent="0" marL="0">
+              <a:buNone/>
+            </a:pPr>
             <a:r>
               <a:rPr lang="en-US" sz="2100" dirty="0">
                 <a:solidFill>
-                  <a:srgbClr val="17364A"/>
-                </a:solidFill>
-                <a:latin typeface="Aptos" pitchFamily="34" charset="0"/>
-                <a:ea typeface="Aptos" pitchFamily="34" charset="-122"/>
-                <a:cs typeface="Aptos" pitchFamily="34" charset="-120"/>
-              </a:rPr>
-              <a:t>NIST Generative AI Profile:.</a:t>
+                  <a:srgbClr val="003A63"/>
+                </a:solidFill>
+                <a:latin typeface="Aptos" pitchFamily="34" charset="0"/>
+                <a:ea typeface="Aptos" pitchFamily="34" charset="-122"/>
+                <a:cs typeface="Aptos" pitchFamily="34" charset="-120"/>
+              </a:rPr>
+              <a:t>• NIST Generative AI Profile:.</a:t>
             </a:r>
             <a:endParaRPr lang="en-US" sz="2100" dirty="0"/>
           </a:p>
           <a:p>
+            <a:pPr indent="0" marL="0">
+              <a:buNone/>
+            </a:pPr>
             <a:r>
               <a:rPr lang="en-US" sz="2100" dirty="0">
                 <a:solidFill>
-                  <a:srgbClr val="17364A"/>
-                </a:solidFill>
-                <a:latin typeface="Aptos" pitchFamily="34" charset="0"/>
-                <a:ea typeface="Aptos" pitchFamily="34" charset="-122"/>
-                <a:cs typeface="Aptos" pitchFamily="34" charset="-120"/>
-              </a:rPr>
-              <a:t>NIST Privacy Framework</a:t>
+                  <a:srgbClr val="003A63"/>
+                </a:solidFill>
+                <a:latin typeface="Aptos" pitchFamily="34" charset="0"/>
+                <a:ea typeface="Aptos" pitchFamily="34" charset="-122"/>
+                <a:cs typeface="Aptos" pitchFamily="34" charset="-120"/>
+              </a:rPr>
+              <a:t>• NIST Privacy Framework</a:t>
             </a:r>
             <a:endParaRPr lang="en-US" sz="2100" dirty="0"/>
           </a:p>
@@ -10679,17 +10804,17 @@
         </p:nvSpPr>
         <p:spPr>
           <a:xfrm>
-            <a:off x="7799832" y="1828800"/>
-            <a:ext cx="3145536" cy="685800"/>
-          </a:xfrm>
-          <a:prstGeom prst="rect">
-            <a:avLst/>
-          </a:prstGeom>
-          <a:noFill/>
-          <a:ln/>
-        </p:spPr>
-        <p:txBody>
-          <a:bodyPr wrap="square" lIns="0" tIns="0" rIns="0" bIns="0" rtlCol="0" anchor="t">
+            <a:off x="7799832" y="1801368"/>
+            <a:ext cx="3145536" cy="758952"/>
+          </a:xfrm>
+          <a:prstGeom prst="rect">
+            <a:avLst/>
+          </a:prstGeom>
+          <a:noFill/>
+          <a:ln/>
+        </p:spPr>
+        <p:txBody>
+          <a:bodyPr wrap="square" lIns="254" tIns="254" rIns="254" bIns="254" rtlCol="0" anchor="t">
             <a:normAutofit/>
           </a:bodyPr>
           <a:lstStyle/>
@@ -10698,7 +10823,7 @@
               <a:buNone/>
             </a:pPr>
             <a:r>
-              <a:rPr lang="en-US" sz="1550" dirty="0">
+              <a:rPr lang="en-US" sz="1320" dirty="0">
                 <a:solidFill>
                   <a:srgbClr val="17364A"/>
                 </a:solidFill>
@@ -10708,7 +10833,7 @@
               </a:rPr>
               <a:t>NIST Artificial Intelligence Risk Management Framework (AI RMF 1.0):.</a:t>
             </a:r>
-            <a:endParaRPr lang="en-US" sz="1550" dirty="0"/>
+            <a:endParaRPr lang="en-US" sz="1320" dirty="0"/>
           </a:p>
         </p:txBody>
       </p:sp>
@@ -10796,13 +10921,16 @@
           <a:ln/>
         </p:spPr>
         <p:txBody>
-          <a:bodyPr wrap="square" lIns="254" tIns="254" rIns="254" bIns="254" rtlCol="0" anchor="t">
+          <a:bodyPr wrap="square" lIns="508" tIns="508" rIns="508" bIns="508" rtlCol="0" anchor="t">
             <a:normAutofit/>
           </a:bodyPr>
           <a:lstStyle/>
           <a:p>
-            <a:r>
-              <a:rPr lang="en-US" sz="1380" dirty="0">
+            <a:pPr indent="0" marL="0">
+              <a:buNone/>
+            </a:pPr>
+            <a:r>
+              <a:rPr lang="en-US" sz="1220" dirty="0">
                 <a:solidFill>
                   <a:srgbClr val="17364A"/>
                 </a:solidFill>
@@ -10810,13 +10938,16 @@
                 <a:ea typeface="Aptos" pitchFamily="34" charset="-122"/>
                 <a:cs typeface="Aptos" pitchFamily="34" charset="-120"/>
               </a:rPr>
-              <a:t>NIST Artificial Intelligence Risk Management Framework (AI RMF 1.0):.</a:t>
-            </a:r>
-            <a:endParaRPr lang="en-US" sz="1380" dirty="0"/>
-          </a:p>
-          <a:p>
-            <a:r>
-              <a:rPr lang="en-US" sz="1380" dirty="0">
+              <a:t>NIST Artificial Intelligence Risk Management Framework (AI RMF.</a:t>
+            </a:r>
+            <a:endParaRPr lang="en-US" sz="1220" dirty="0"/>
+          </a:p>
+          <a:p>
+            <a:pPr indent="0" marL="0">
+              <a:buNone/>
+            </a:pPr>
+            <a:r>
+              <a:rPr lang="en-US" sz="1220" dirty="0">
                 <a:solidFill>
                   <a:srgbClr val="17364A"/>
                 </a:solidFill>
@@ -10826,11 +10957,14 @@
               </a:rPr>
               <a:t>CDC Public Health Data Strategy and Data Modernization resources:.</a:t>
             </a:r>
-            <a:endParaRPr lang="en-US" sz="1380" dirty="0"/>
-          </a:p>
-          <a:p>
-            <a:r>
-              <a:rPr lang="en-US" sz="1380" dirty="0">
+            <a:endParaRPr lang="en-US" sz="1220" dirty="0"/>
+          </a:p>
+          <a:p>
+            <a:pPr indent="0" marL="0">
+              <a:buNone/>
+            </a:pPr>
+            <a:r>
+              <a:rPr lang="en-US" sz="1220" dirty="0">
                 <a:solidFill>
                   <a:srgbClr val="17364A"/>
                 </a:solidFill>
@@ -10840,7 +10974,7 @@
               </a:rPr>
               <a:t>WHO Ethics and Governance of Artificial Intelligence for Health:.</a:t>
             </a:r>
-            <a:endParaRPr lang="en-US" sz="1380" dirty="0"/>
+            <a:endParaRPr lang="en-US" sz="1220" dirty="0"/>
           </a:p>
         </p:txBody>
       </p:sp>
@@ -10918,17 +11052,17 @@
         </p:nvSpPr>
         <p:spPr>
           <a:xfrm>
-            <a:off x="7799832" y="5001768"/>
-            <a:ext cx="3145536" cy="502920"/>
-          </a:xfrm>
-          <a:prstGeom prst="rect">
-            <a:avLst/>
-          </a:prstGeom>
-          <a:noFill/>
-          <a:ln/>
-        </p:spPr>
-        <p:txBody>
-          <a:bodyPr wrap="square" lIns="0" tIns="0" rIns="0" bIns="0" rtlCol="0" anchor="t">
+            <a:off x="7799832" y="4974336"/>
+            <a:ext cx="3145536" cy="576072"/>
+          </a:xfrm>
+          <a:prstGeom prst="rect">
+            <a:avLst/>
+          </a:prstGeom>
+          <a:noFill/>
+          <a:ln/>
+        </p:spPr>
+        <p:txBody>
+          <a:bodyPr wrap="square" lIns="254" tIns="254" rIns="254" bIns="254" rtlCol="0" anchor="t">
             <a:normAutofit/>
           </a:bodyPr>
           <a:lstStyle/>
@@ -10937,7 +11071,7 @@
               <a:buNone/>
             </a:pPr>
             <a:r>
-              <a:rPr lang="en-US" sz="1550" dirty="0">
+              <a:rPr lang="en-US" sz="1320" dirty="0">
                 <a:solidFill>
                   <a:srgbClr val="17364A"/>
                 </a:solidFill>
@@ -10945,9 +11079,9 @@
                 <a:ea typeface="Aptos" pitchFamily="34" charset="-122"/>
                 <a:cs typeface="Aptos" pitchFamily="34" charset="-120"/>
               </a:rPr>
-              <a:t>Identify what could go wrong, who could be affected, what safeguards are needed, and what evidence should be reviewed before use expands.</a:t>
-            </a:r>
-            <a:endParaRPr lang="en-US" sz="1550" dirty="0"/>
+              <a:t>Identify what could go wrong, who could be affected, what safeguards are needed, and what evidence should be reviewed.</a:t>
+            </a:r>
+            <a:endParaRPr lang="en-US" sz="1320" dirty="0"/>
           </a:p>
         </p:txBody>
       </p:sp>
@@ -11248,35 +11382,41 @@
           <a:ln/>
         </p:spPr>
         <p:txBody>
-          <a:bodyPr wrap="square" lIns="635" tIns="635" rIns="635" bIns="635" rtlCol="0" anchor="t">
+          <a:bodyPr wrap="square" lIns="1016" tIns="1016" rIns="1016" bIns="1016" rtlCol="0" anchor="t">
             <a:normAutofit/>
           </a:bodyPr>
           <a:lstStyle/>
           <a:p>
+            <a:pPr indent="0" marL="0">
+              <a:buNone/>
+            </a:pPr>
             <a:r>
               <a:rPr lang="en-US" sz="2100" dirty="0">
                 <a:solidFill>
-                  <a:srgbClr val="17364A"/>
-                </a:solidFill>
-                <a:latin typeface="Aptos" pitchFamily="34" charset="0"/>
-                <a:ea typeface="Aptos" pitchFamily="34" charset="-122"/>
-                <a:cs typeface="Aptos" pitchFamily="34" charset="-120"/>
-              </a:rPr>
-              <a:t>OMB Memorandum M-24-10 on federal AI governance, risk management, and innovation, where relevant to.</a:t>
+                  <a:srgbClr val="003A63"/>
+                </a:solidFill>
+                <a:latin typeface="Aptos" pitchFamily="34" charset="0"/>
+                <a:ea typeface="Aptos" pitchFamily="34" charset="-122"/>
+                <a:cs typeface="Aptos" pitchFamily="34" charset="-120"/>
+              </a:rPr>
+              <a:t>• OMB Memorandum M-24-10 on federal AI governance, risk management, and innovation, where.</a:t>
             </a:r>
             <a:endParaRPr lang="en-US" sz="2100" dirty="0"/>
           </a:p>
           <a:p>
+            <a:pPr indent="0" marL="0">
+              <a:buNone/>
+            </a:pPr>
             <a:r>
               <a:rPr lang="en-US" sz="2100" dirty="0">
                 <a:solidFill>
-                  <a:srgbClr val="17364A"/>
-                </a:solidFill>
-                <a:latin typeface="Aptos" pitchFamily="34" charset="0"/>
-                <a:ea typeface="Aptos" pitchFamily="34" charset="-122"/>
-                <a:cs typeface="Aptos" pitchFamily="34" charset="-120"/>
-              </a:rPr>
-              <a:t>Agency strategic plans, procurement policies, privacy policies, cybersecurity policies, records.</a:t>
+                  <a:srgbClr val="003A63"/>
+                </a:solidFill>
+                <a:latin typeface="Aptos" pitchFamily="34" charset="0"/>
+                <a:ea typeface="Aptos" pitchFamily="34" charset="-122"/>
+                <a:cs typeface="Aptos" pitchFamily="34" charset="-120"/>
+              </a:rPr>
+              <a:t>• Agency strategic plans, procurement policies, privacy policies, cybersecurity policies, records.</a:t>
             </a:r>
             <a:endParaRPr lang="en-US" sz="2100" dirty="0"/>
           </a:p>
@@ -11356,17 +11496,17 @@
         </p:nvSpPr>
         <p:spPr>
           <a:xfrm>
-            <a:off x="7799832" y="1828800"/>
-            <a:ext cx="3145536" cy="685800"/>
-          </a:xfrm>
-          <a:prstGeom prst="rect">
-            <a:avLst/>
-          </a:prstGeom>
-          <a:noFill/>
-          <a:ln/>
-        </p:spPr>
-        <p:txBody>
-          <a:bodyPr wrap="square" lIns="0" tIns="0" rIns="0" bIns="0" rtlCol="0" anchor="t">
+            <a:off x="7799832" y="1801368"/>
+            <a:ext cx="3145536" cy="758952"/>
+          </a:xfrm>
+          <a:prstGeom prst="rect">
+            <a:avLst/>
+          </a:prstGeom>
+          <a:noFill/>
+          <a:ln/>
+        </p:spPr>
+        <p:txBody>
+          <a:bodyPr wrap="square" lIns="254" tIns="254" rIns="254" bIns="254" rtlCol="0" anchor="t">
             <a:normAutofit/>
           </a:bodyPr>
           <a:lstStyle/>
@@ -11375,7 +11515,7 @@
               <a:buNone/>
             </a:pPr>
             <a:r>
-              <a:rPr lang="en-US" sz="1550" dirty="0">
+              <a:rPr lang="en-US" sz="1320" dirty="0">
                 <a:solidFill>
                   <a:srgbClr val="17364A"/>
                 </a:solidFill>
@@ -11385,7 +11525,7 @@
               </a:rPr>
               <a:t>OMB Memorandum M-24-10 on federal AI governance, risk management, and innovation, where relevant to.</a:t>
             </a:r>
-            <a:endParaRPr lang="en-US" sz="1550" dirty="0"/>
+            <a:endParaRPr lang="en-US" sz="1320" dirty="0"/>
           </a:p>
         </p:txBody>
       </p:sp>
@@ -11473,13 +11613,16 @@
           <a:ln/>
         </p:spPr>
         <p:txBody>
-          <a:bodyPr wrap="square" lIns="254" tIns="254" rIns="254" bIns="254" rtlCol="0" anchor="t">
+          <a:bodyPr wrap="square" lIns="508" tIns="508" rIns="508" bIns="508" rtlCol="0" anchor="t">
             <a:normAutofit/>
           </a:bodyPr>
           <a:lstStyle/>
           <a:p>
-            <a:r>
-              <a:rPr lang="en-US" sz="1380" dirty="0">
+            <a:pPr indent="0" marL="0">
+              <a:buNone/>
+            </a:pPr>
+            <a:r>
+              <a:rPr lang="en-US" sz="1220" dirty="0">
                 <a:solidFill>
                   <a:srgbClr val="17364A"/>
                 </a:solidFill>
@@ -11487,13 +11630,16 @@
                 <a:ea typeface="Aptos" pitchFamily="34" charset="-122"/>
                 <a:cs typeface="Aptos" pitchFamily="34" charset="-120"/>
               </a:rPr>
-              <a:t>OMB Memorandum M-24-10 on federal AI governance, risk management, and innovation, where.</a:t>
-            </a:r>
-            <a:endParaRPr lang="en-US" sz="1380" dirty="0"/>
-          </a:p>
-          <a:p>
-            <a:r>
-              <a:rPr lang="en-US" sz="1380" dirty="0">
+              <a:t>OMB Memorandum M-24-10 on federal AI governance, risk management,.</a:t>
+            </a:r>
+            <a:endParaRPr lang="en-US" sz="1220" dirty="0"/>
+          </a:p>
+          <a:p>
+            <a:pPr indent="0" marL="0">
+              <a:buNone/>
+            </a:pPr>
+            <a:r>
+              <a:rPr lang="en-US" sz="1220" dirty="0">
                 <a:solidFill>
                   <a:srgbClr val="17364A"/>
                 </a:solidFill>
@@ -11501,9 +11647,9 @@
                 <a:ea typeface="Aptos" pitchFamily="34" charset="-122"/>
                 <a:cs typeface="Aptos" pitchFamily="34" charset="-120"/>
               </a:rPr>
-              <a:t>Agency strategic plans, procurement policies, privacy policies, cybersecurity policies,.</a:t>
-            </a:r>
-            <a:endParaRPr lang="en-US" sz="1380" dirty="0"/>
+              <a:t>Agency strategic plans, procurement policies, privacy policies,.</a:t>
+            </a:r>
+            <a:endParaRPr lang="en-US" sz="1220" dirty="0"/>
           </a:p>
         </p:txBody>
       </p:sp>
@@ -11581,17 +11727,17 @@
         </p:nvSpPr>
         <p:spPr>
           <a:xfrm>
-            <a:off x="7799832" y="5001768"/>
-            <a:ext cx="3145536" cy="502920"/>
-          </a:xfrm>
-          <a:prstGeom prst="rect">
-            <a:avLst/>
-          </a:prstGeom>
-          <a:noFill/>
-          <a:ln/>
-        </p:spPr>
-        <p:txBody>
-          <a:bodyPr wrap="square" lIns="0" tIns="0" rIns="0" bIns="0" rtlCol="0" anchor="t">
+            <a:off x="7799832" y="4974336"/>
+            <a:ext cx="3145536" cy="576072"/>
+          </a:xfrm>
+          <a:prstGeom prst="rect">
+            <a:avLst/>
+          </a:prstGeom>
+          <a:noFill/>
+          <a:ln/>
+        </p:spPr>
+        <p:txBody>
+          <a:bodyPr wrap="square" lIns="254" tIns="254" rIns="254" bIns="254" rtlCol="0" anchor="t">
             <a:normAutofit/>
           </a:bodyPr>
           <a:lstStyle/>
@@ -11600,7 +11746,7 @@
               <a:buNone/>
             </a:pPr>
             <a:r>
-              <a:rPr lang="en-US" sz="1550" dirty="0">
+              <a:rPr lang="en-US" sz="1320" dirty="0">
                 <a:solidFill>
                   <a:srgbClr val="17364A"/>
                 </a:solidFill>
@@ -11608,9 +11754,9 @@
                 <a:ea typeface="Aptos" pitchFamily="34" charset="-122"/>
                 <a:cs typeface="Aptos" pitchFamily="34" charset="-120"/>
               </a:rPr>
-              <a:t>Identify what could go wrong, who could be affected, what safeguards are needed, and what evidence should be reviewed before use expands.</a:t>
-            </a:r>
-            <a:endParaRPr lang="en-US" sz="1550" dirty="0"/>
+              <a:t>Identify what could go wrong, who could be affected, what safeguards are needed, and what evidence should be reviewed.</a:t>
+            </a:r>
+            <a:endParaRPr lang="en-US" sz="1320" dirty="0"/>
           </a:p>
         </p:txBody>
       </p:sp>
@@ -11911,63 +12057,75 @@
           <a:ln/>
         </p:spPr>
         <p:txBody>
-          <a:bodyPr wrap="square" lIns="635" tIns="635" rIns="635" bIns="635" rtlCol="0" anchor="t">
+          <a:bodyPr wrap="square" lIns="1016" tIns="1016" rIns="1016" bIns="1016" rtlCol="0" anchor="t">
             <a:normAutofit/>
           </a:bodyPr>
           <a:lstStyle/>
           <a:p>
+            <a:pPr indent="0" marL="0">
+              <a:buNone/>
+            </a:pPr>
             <a:r>
               <a:rPr lang="en-US" sz="1900" dirty="0">
                 <a:solidFill>
-                  <a:srgbClr val="17364A"/>
-                </a:solidFill>
-                <a:latin typeface="Aptos" pitchFamily="34" charset="0"/>
-                <a:ea typeface="Aptos" pitchFamily="34" charset="-122"/>
-                <a:cs typeface="Aptos" pitchFamily="34" charset="-120"/>
-              </a:rPr>
-              <a:t>Play 11: Build and Deploy AI Solutions - This lesson informs Play 11 by helping learners connect the lesson.</a:t>
+                  <a:srgbClr val="003A63"/>
+                </a:solidFill>
+                <a:latin typeface="Aptos" pitchFamily="34" charset="0"/>
+                <a:ea typeface="Aptos" pitchFamily="34" charset="-122"/>
+                <a:cs typeface="Aptos" pitchFamily="34" charset="-120"/>
+              </a:rPr>
+              <a:t>• Play 11: Build and Deploy AI Solutions - This lesson informs Play 11 by helping learners.</a:t>
             </a:r>
             <a:endParaRPr lang="en-US" sz="1900" dirty="0"/>
           </a:p>
           <a:p>
+            <a:pPr indent="0" marL="0">
+              <a:buNone/>
+            </a:pPr>
             <a:r>
               <a:rPr lang="en-US" sz="1900" dirty="0">
                 <a:solidFill>
-                  <a:srgbClr val="17364A"/>
-                </a:solidFill>
-                <a:latin typeface="Aptos" pitchFamily="34" charset="0"/>
-                <a:ea typeface="Aptos" pitchFamily="34" charset="-122"/>
-                <a:cs typeface="Aptos" pitchFamily="34" charset="-120"/>
-              </a:rPr>
-              <a:t>Play 7: Prioritize Use Cases - This lesson informs Play 7 by helping learners connect the lesson topic to.</a:t>
+                  <a:srgbClr val="003A63"/>
+                </a:solidFill>
+                <a:latin typeface="Aptos" pitchFamily="34" charset="0"/>
+                <a:ea typeface="Aptos" pitchFamily="34" charset="-122"/>
+                <a:cs typeface="Aptos" pitchFamily="34" charset="-120"/>
+              </a:rPr>
+              <a:t>• Play 7: Prioritize Use Cases - This lesson informs Play 7 by helping learners connect the.</a:t>
             </a:r>
             <a:endParaRPr lang="en-US" sz="1900" dirty="0"/>
           </a:p>
           <a:p>
+            <a:pPr indent="0" marL="0">
+              <a:buNone/>
+            </a:pPr>
             <a:r>
               <a:rPr lang="en-US" sz="1900" dirty="0">
                 <a:solidFill>
-                  <a:srgbClr val="17364A"/>
-                </a:solidFill>
-                <a:latin typeface="Aptos" pitchFamily="34" charset="0"/>
-                <a:ea typeface="Aptos" pitchFamily="34" charset="-122"/>
-                <a:cs typeface="Aptos" pitchFamily="34" charset="-120"/>
-              </a:rPr>
-              <a:t>Play 1: Vision &amp; Guardrails - This lesson informs Play 1 by helping learners connect the lesson topic to.</a:t>
+                  <a:srgbClr val="003A63"/>
+                </a:solidFill>
+                <a:latin typeface="Aptos" pitchFamily="34" charset="0"/>
+                <a:ea typeface="Aptos" pitchFamily="34" charset="-122"/>
+                <a:cs typeface="Aptos" pitchFamily="34" charset="-120"/>
+              </a:rPr>
+              <a:t>• Play 1: Vision &amp; Guardrails - This lesson informs Play 1 by helping learners connect the.</a:t>
             </a:r>
             <a:endParaRPr lang="en-US" sz="1900" dirty="0"/>
           </a:p>
           <a:p>
+            <a:pPr indent="0" marL="0">
+              <a:buNone/>
+            </a:pPr>
             <a:r>
               <a:rPr lang="en-US" sz="1900" dirty="0">
                 <a:solidFill>
-                  <a:srgbClr val="17364A"/>
-                </a:solidFill>
-                <a:latin typeface="Aptos" pitchFamily="34" charset="0"/>
-                <a:ea typeface="Aptos" pitchFamily="34" charset="-122"/>
-                <a:cs typeface="Aptos" pitchFamily="34" charset="-120"/>
-              </a:rPr>
-              <a:t>Play 3: Establish AI Governance - This lesson informs Play 3 by helping learners connect the lesson topic to.</a:t>
+                  <a:srgbClr val="003A63"/>
+                </a:solidFill>
+                <a:latin typeface="Aptos" pitchFamily="34" charset="0"/>
+                <a:ea typeface="Aptos" pitchFamily="34" charset="-122"/>
+                <a:cs typeface="Aptos" pitchFamily="34" charset="-120"/>
+              </a:rPr>
+              <a:t>• Play 3: Establish AI Governance - This lesson informs Play 3 by helping learners connect the.</a:t>
             </a:r>
             <a:endParaRPr lang="en-US" sz="1900" dirty="0"/>
           </a:p>
@@ -12047,17 +12205,17 @@
         </p:nvSpPr>
         <p:spPr>
           <a:xfrm>
-            <a:off x="8211312" y="1920240"/>
-            <a:ext cx="2734056" cy="1463040"/>
-          </a:xfrm>
-          <a:prstGeom prst="rect">
-            <a:avLst/>
-          </a:prstGeom>
-          <a:noFill/>
-          <a:ln/>
-        </p:spPr>
-        <p:txBody>
-          <a:bodyPr wrap="square" lIns="0" tIns="0" rIns="0" bIns="0" rtlCol="0" anchor="t">
+            <a:off x="8211312" y="1892808"/>
+            <a:ext cx="2734056" cy="1536192"/>
+          </a:xfrm>
+          <a:prstGeom prst="rect">
+            <a:avLst/>
+          </a:prstGeom>
+          <a:noFill/>
+          <a:ln/>
+        </p:spPr>
+        <p:txBody>
+          <a:bodyPr wrap="square" lIns="254" tIns="254" rIns="254" bIns="254" rtlCol="0" anchor="t">
             <a:normAutofit/>
           </a:bodyPr>
           <a:lstStyle/>
@@ -12066,7 +12224,7 @@
               <a:buNone/>
             </a:pPr>
             <a:r>
-              <a:rPr lang="en-US" sz="1550" dirty="0">
+              <a:rPr lang="en-US" sz="1320" dirty="0">
                 <a:solidFill>
                   <a:srgbClr val="17364A"/>
                 </a:solidFill>
@@ -12074,9 +12232,9 @@
                 <a:ea typeface="Aptos" pitchFamily="34" charset="-122"/>
                 <a:cs typeface="Aptos" pitchFamily="34" charset="-120"/>
               </a:rPr>
-              <a:t>Use the related plays to identify decisions, participants, timing, approvals, and documentation needed for responsible implementation.</a:t>
-            </a:r>
-            <a:endParaRPr lang="en-US" sz="1550" dirty="0"/>
+              <a:t>Use the related plays to identify decisions, participants, timing, approvals, and documentation needed for responsible.</a:t>
+            </a:r>
+            <a:endParaRPr lang="en-US" sz="1320" dirty="0"/>
           </a:p>
         </p:txBody>
       </p:sp>
@@ -12164,13 +12322,16 @@
           <a:ln/>
         </p:spPr>
         <p:txBody>
-          <a:bodyPr wrap="square" lIns="254" tIns="254" rIns="254" bIns="254" rtlCol="0" anchor="t">
+          <a:bodyPr wrap="square" lIns="508" tIns="508" rIns="508" bIns="508" rtlCol="0" anchor="t">
             <a:normAutofit/>
           </a:bodyPr>
           <a:lstStyle/>
           <a:p>
-            <a:r>
-              <a:rPr lang="en-US" sz="1380" dirty="0">
+            <a:pPr indent="0" marL="0">
+              <a:buNone/>
+            </a:pPr>
+            <a:r>
+              <a:rPr lang="en-US" sz="1220" dirty="0">
                 <a:solidFill>
                   <a:srgbClr val="17364A"/>
                 </a:solidFill>
@@ -12180,11 +12341,14 @@
               </a:rPr>
               <a:t>Locate the decision point in the playbook sequence.</a:t>
             </a:r>
-            <a:endParaRPr lang="en-US" sz="1380" dirty="0"/>
-          </a:p>
-          <a:p>
-            <a:r>
-              <a:rPr lang="en-US" sz="1380" dirty="0">
+            <a:endParaRPr lang="en-US" sz="1220" dirty="0"/>
+          </a:p>
+          <a:p>
+            <a:pPr indent="0" marL="0">
+              <a:buNone/>
+            </a:pPr>
+            <a:r>
+              <a:rPr lang="en-US" sz="1220" dirty="0">
                 <a:solidFill>
                   <a:srgbClr val="17364A"/>
                 </a:solidFill>
@@ -12194,11 +12358,14 @@
               </a:rPr>
               <a:t>Identify who should participate in the work.</a:t>
             </a:r>
-            <a:endParaRPr lang="en-US" sz="1380" dirty="0"/>
-          </a:p>
-          <a:p>
-            <a:r>
-              <a:rPr lang="en-US" sz="1380" dirty="0">
+            <a:endParaRPr lang="en-US" sz="1220" dirty="0"/>
+          </a:p>
+          <a:p>
+            <a:pPr indent="0" marL="0">
+              <a:buNone/>
+            </a:pPr>
+            <a:r>
+              <a:rPr lang="en-US" sz="1220" dirty="0">
                 <a:solidFill>
                   <a:srgbClr val="17364A"/>
                 </a:solidFill>
@@ -12208,7 +12375,7 @@
               </a:rPr>
               <a:t>Document the review, approval, or implementation step.</a:t>
             </a:r>
-            <a:endParaRPr lang="en-US" sz="1380" dirty="0"/>
+            <a:endParaRPr lang="en-US" sz="1220" dirty="0"/>
           </a:p>
         </p:txBody>
       </p:sp>
@@ -12509,63 +12676,75 @@
           <a:ln/>
         </p:spPr>
         <p:txBody>
-          <a:bodyPr wrap="square" lIns="635" tIns="635" rIns="635" bIns="635" rtlCol="0" anchor="t">
+          <a:bodyPr wrap="square" lIns="1016" tIns="1016" rIns="1016" bIns="1016" rtlCol="0" anchor="t">
             <a:normAutofit/>
           </a:bodyPr>
           <a:lstStyle/>
           <a:p>
+            <a:pPr indent="0" marL="0">
+              <a:buNone/>
+            </a:pPr>
             <a:r>
               <a:rPr lang="en-US" sz="1850" dirty="0">
                 <a:solidFill>
-                  <a:srgbClr val="17364A"/>
-                </a:solidFill>
-                <a:latin typeface="Aptos" pitchFamily="34" charset="0"/>
-                <a:ea typeface="Aptos" pitchFamily="34" charset="-122"/>
-                <a:cs typeface="Aptos" pitchFamily="34" charset="-120"/>
-              </a:rPr>
-              <a:t>Tool 1: AI Vision &amp; Principles Workshop (Workshop) - Use AI Vision &amp; Principles Workshop to translate this.</a:t>
+                  <a:srgbClr val="003A63"/>
+                </a:solidFill>
+                <a:latin typeface="Aptos" pitchFamily="34" charset="0"/>
+                <a:ea typeface="Aptos" pitchFamily="34" charset="-122"/>
+                <a:cs typeface="Aptos" pitchFamily="34" charset="-120"/>
+              </a:rPr>
+              <a:t>• Tool 1: AI Vision &amp; Principles Workshop (Workshop) - Use AI Vision &amp; Principles Workshop to.</a:t>
             </a:r>
             <a:endParaRPr lang="en-US" sz="1850" dirty="0"/>
           </a:p>
           <a:p>
+            <a:pPr indent="0" marL="0">
+              <a:buNone/>
+            </a:pPr>
             <a:r>
               <a:rPr lang="en-US" sz="1850" dirty="0">
                 <a:solidFill>
-                  <a:srgbClr val="17364A"/>
-                </a:solidFill>
-                <a:latin typeface="Aptos" pitchFamily="34" charset="0"/>
-                <a:ea typeface="Aptos" pitchFamily="34" charset="-122"/>
-                <a:cs typeface="Aptos" pitchFamily="34" charset="-120"/>
-              </a:rPr>
-              <a:t>Tool 3: Equity Impact Assessment Checklist (Checklist) - Use this tool to complete or strengthen the.</a:t>
+                  <a:srgbClr val="003A63"/>
+                </a:solidFill>
+                <a:latin typeface="Aptos" pitchFamily="34" charset="0"/>
+                <a:ea typeface="Aptos" pitchFamily="34" charset="-122"/>
+                <a:cs typeface="Aptos" pitchFamily="34" charset="-120"/>
+              </a:rPr>
+              <a:t>• Tool 3: Equity Impact Assessment Checklist (Checklist) - Use this tool to complete or.</a:t>
             </a:r>
             <a:endParaRPr lang="en-US" sz="1850" dirty="0"/>
           </a:p>
           <a:p>
+            <a:pPr indent="0" marL="0">
+              <a:buNone/>
+            </a:pPr>
             <a:r>
               <a:rPr lang="en-US" sz="1850" dirty="0">
                 <a:solidFill>
-                  <a:srgbClr val="17364A"/>
-                </a:solidFill>
-                <a:latin typeface="Aptos" pitchFamily="34" charset="0"/>
-                <a:ea typeface="Aptos" pitchFamily="34" charset="-122"/>
-                <a:cs typeface="Aptos" pitchFamily="34" charset="-120"/>
-              </a:rPr>
-              <a:t>Tool 4: AI Policy Landscape Scan (Worksheet) - Use AI Policy Landscape Scan to translate this lesson into a.</a:t>
+                  <a:srgbClr val="003A63"/>
+                </a:solidFill>
+                <a:latin typeface="Aptos" pitchFamily="34" charset="0"/>
+                <a:ea typeface="Aptos" pitchFamily="34" charset="-122"/>
+                <a:cs typeface="Aptos" pitchFamily="34" charset="-120"/>
+              </a:rPr>
+              <a:t>• Tool 4: AI Policy Landscape Scan (Worksheet) - Use AI Policy Landscape Scan to translate this.</a:t>
             </a:r>
             <a:endParaRPr lang="en-US" sz="1850" dirty="0"/>
           </a:p>
           <a:p>
+            <a:pPr indent="0" marL="0">
+              <a:buNone/>
+            </a:pPr>
             <a:r>
               <a:rPr lang="en-US" sz="1850" dirty="0">
                 <a:solidFill>
-                  <a:srgbClr val="17364A"/>
-                </a:solidFill>
-                <a:latin typeface="Aptos" pitchFamily="34" charset="0"/>
-                <a:ea typeface="Aptos" pitchFamily="34" charset="-122"/>
-                <a:cs typeface="Aptos" pitchFamily="34" charset="-120"/>
-              </a:rPr>
-              <a:t>Tool 5: AI Environmental and Resource Impact Review (Checklist) - Use AI Environmental and Resource Impact.</a:t>
+                  <a:srgbClr val="003A63"/>
+                </a:solidFill>
+                <a:latin typeface="Aptos" pitchFamily="34" charset="0"/>
+                <a:ea typeface="Aptos" pitchFamily="34" charset="-122"/>
+                <a:cs typeface="Aptos" pitchFamily="34" charset="-120"/>
+              </a:rPr>
+              <a:t>• Tool 5: AI Environmental and Resource Impact Review (Checklist) - Use AI Environmental and.</a:t>
             </a:r>
             <a:endParaRPr lang="en-US" sz="1850" dirty="0"/>
           </a:p>
@@ -12645,17 +12824,17 @@
         </p:nvSpPr>
         <p:spPr>
           <a:xfrm>
-            <a:off x="8211312" y="1920240"/>
-            <a:ext cx="2734056" cy="1463040"/>
-          </a:xfrm>
-          <a:prstGeom prst="rect">
-            <a:avLst/>
-          </a:prstGeom>
-          <a:noFill/>
-          <a:ln/>
-        </p:spPr>
-        <p:txBody>
-          <a:bodyPr wrap="square" lIns="0" tIns="0" rIns="0" bIns="0" rtlCol="0" anchor="t">
+            <a:off x="8211312" y="1892808"/>
+            <a:ext cx="2734056" cy="1536192"/>
+          </a:xfrm>
+          <a:prstGeom prst="rect">
+            <a:avLst/>
+          </a:prstGeom>
+          <a:noFill/>
+          <a:ln/>
+        </p:spPr>
+        <p:txBody>
+          <a:bodyPr wrap="square" lIns="254" tIns="254" rIns="254" bIns="254" rtlCol="0" anchor="t">
             <a:normAutofit/>
           </a:bodyPr>
           <a:lstStyle/>
@@ -12664,7 +12843,7 @@
               <a:buNone/>
             </a:pPr>
             <a:r>
-              <a:rPr lang="en-US" sz="1550" dirty="0">
+              <a:rPr lang="en-US" sz="1320" dirty="0">
                 <a:solidFill>
                   <a:srgbClr val="17364A"/>
                 </a:solidFill>
@@ -12672,9 +12851,9 @@
                 <a:ea typeface="Aptos" pitchFamily="34" charset="-122"/>
                 <a:cs typeface="Aptos" pitchFamily="34" charset="-120"/>
               </a:rPr>
-              <a:t>Use linked tools when your department needs a structured worksheet, template, checklist, review process, or documentation artifact.</a:t>
-            </a:r>
-            <a:endParaRPr lang="en-US" sz="1550" dirty="0"/>
+              <a:t>Use linked tools when your department needs a structured worksheet, template, checklist, review process, or.</a:t>
+            </a:r>
+            <a:endParaRPr lang="en-US" sz="1320" dirty="0"/>
           </a:p>
         </p:txBody>
       </p:sp>
@@ -12762,13 +12941,16 @@
           <a:ln/>
         </p:spPr>
         <p:txBody>
-          <a:bodyPr wrap="square" lIns="254" tIns="254" rIns="254" bIns="254" rtlCol="0" anchor="t">
+          <a:bodyPr wrap="square" lIns="508" tIns="508" rIns="508" bIns="508" rtlCol="0" anchor="t">
             <a:normAutofit/>
           </a:bodyPr>
           <a:lstStyle/>
           <a:p>
-            <a:r>
-              <a:rPr lang="en-US" sz="1380" dirty="0">
+            <a:pPr indent="0" marL="0">
+              <a:buNone/>
+            </a:pPr>
+            <a:r>
+              <a:rPr lang="en-US" sz="1220" dirty="0">
                 <a:solidFill>
                   <a:srgbClr val="17364A"/>
                 </a:solidFill>
@@ -12778,11 +12960,14 @@
               </a:rPr>
               <a:t>Use a tool when no comparable local process exists.</a:t>
             </a:r>
-            <a:endParaRPr lang="en-US" sz="1380" dirty="0"/>
-          </a:p>
-          <a:p>
-            <a:r>
-              <a:rPr lang="en-US" sz="1380" dirty="0">
+            <a:endParaRPr lang="en-US" sz="1220" dirty="0"/>
+          </a:p>
+          <a:p>
+            <a:pPr indent="0" marL="0">
+              <a:buNone/>
+            </a:pPr>
+            <a:r>
+              <a:rPr lang="en-US" sz="1220" dirty="0">
                 <a:solidFill>
                   <a:srgbClr val="17364A"/>
                 </a:solidFill>
@@ -12790,13 +12975,16 @@
                 <a:ea typeface="Aptos" pitchFamily="34" charset="-122"/>
                 <a:cs typeface="Aptos" pitchFamily="34" charset="-120"/>
               </a:rPr>
-              <a:t>Adapt existing department templates when they already fit the purpose.</a:t>
-            </a:r>
-            <a:endParaRPr lang="en-US" sz="1380" dirty="0"/>
-          </a:p>
-          <a:p>
-            <a:r>
-              <a:rPr lang="en-US" sz="1380" dirty="0">
+              <a:t>Adapt existing department templates when they already fit the.</a:t>
+            </a:r>
+            <a:endParaRPr lang="en-US" sz="1220" dirty="0"/>
+          </a:p>
+          <a:p>
+            <a:pPr indent="0" marL="0">
+              <a:buNone/>
+            </a:pPr>
+            <a:r>
+              <a:rPr lang="en-US" sz="1220" dirty="0">
                 <a:solidFill>
                   <a:srgbClr val="17364A"/>
                 </a:solidFill>
@@ -12806,7 +12994,7 @@
               </a:rPr>
               <a:t>Save the completed artifact as evidence of the decision.</a:t>
             </a:r>
-            <a:endParaRPr lang="en-US" sz="1380" dirty="0"/>
+            <a:endParaRPr lang="en-US" sz="1220" dirty="0"/>
           </a:p>
         </p:txBody>
       </p:sp>
@@ -13107,49 +13295,58 @@
           <a:ln/>
         </p:spPr>
         <p:txBody>
-          <a:bodyPr wrap="square" lIns="635" tIns="635" rIns="635" bIns="635" rtlCol="0" anchor="t">
+          <a:bodyPr wrap="square" lIns="1016" tIns="1016" rIns="1016" bIns="1016" rtlCol="0" anchor="t">
             <a:normAutofit/>
           </a:bodyPr>
           <a:lstStyle/>
           <a:p>
+            <a:pPr indent="0" marL="0">
+              <a:buNone/>
+            </a:pPr>
             <a:r>
               <a:rPr lang="en-US" sz="2100" dirty="0">
                 <a:solidFill>
-                  <a:srgbClr val="17364A"/>
-                </a:solidFill>
-                <a:latin typeface="Aptos" pitchFamily="34" charset="0"/>
-                <a:ea typeface="Aptos" pitchFamily="34" charset="-122"/>
-                <a:cs typeface="Aptos" pitchFamily="34" charset="-120"/>
-              </a:rPr>
-              <a:t>Explain the difference between risk appetite, risk tolerance, and risk acceptance.</a:t>
+                  <a:srgbClr val="003A63"/>
+                </a:solidFill>
+                <a:latin typeface="Aptos" pitchFamily="34" charset="0"/>
+                <a:ea typeface="Aptos" pitchFamily="34" charset="-122"/>
+                <a:cs typeface="Aptos" pitchFamily="34" charset="-120"/>
+              </a:rPr>
+              <a:t>• Explain the difference between risk appetite, risk tolerance, and risk acceptance.</a:t>
             </a:r>
             <a:endParaRPr lang="en-US" sz="2100" dirty="0"/>
           </a:p>
           <a:p>
+            <a:pPr indent="0" marL="0">
+              <a:buNone/>
+            </a:pPr>
             <a:r>
               <a:rPr lang="en-US" sz="2100" dirty="0">
                 <a:solidFill>
-                  <a:srgbClr val="17364A"/>
-                </a:solidFill>
-                <a:latin typeface="Aptos" pitchFamily="34" charset="0"/>
-                <a:ea typeface="Aptos" pitchFamily="34" charset="-122"/>
-                <a:cs typeface="Aptos" pitchFamily="34" charset="-120"/>
-              </a:rPr>
-              <a:t>Identify AI uses that may be low, moderate, high, or unacceptable risk in a public health context.</a:t>
+                  <a:srgbClr val="003A63"/>
+                </a:solidFill>
+                <a:latin typeface="Aptos" pitchFamily="34" charset="0"/>
+                <a:ea typeface="Aptos" pitchFamily="34" charset="-122"/>
+                <a:cs typeface="Aptos" pitchFamily="34" charset="-120"/>
+              </a:rPr>
+              <a:t>• Identify AI uses that may be low, moderate, high, or unacceptable risk in a public health.</a:t>
             </a:r>
             <a:endParaRPr lang="en-US" sz="2100" dirty="0"/>
           </a:p>
           <a:p>
+            <a:pPr indent="0" marL="0">
+              <a:buNone/>
+            </a:pPr>
             <a:r>
               <a:rPr lang="en-US" sz="2100" dirty="0">
                 <a:solidFill>
-                  <a:srgbClr val="17364A"/>
-                </a:solidFill>
-                <a:latin typeface="Aptos" pitchFamily="34" charset="0"/>
-                <a:ea typeface="Aptos" pitchFamily="34" charset="-122"/>
-                <a:cs typeface="Aptos" pitchFamily="34" charset="-120"/>
-              </a:rPr>
-              <a:t>Develop risk tolerance statements for different AI use categories.</a:t>
+                  <a:srgbClr val="003A63"/>
+                </a:solidFill>
+                <a:latin typeface="Aptos" pitchFamily="34" charset="0"/>
+                <a:ea typeface="Aptos" pitchFamily="34" charset="-122"/>
+                <a:cs typeface="Aptos" pitchFamily="34" charset="-120"/>
+              </a:rPr>
+              <a:t>• Develop risk tolerance statements for different AI use categories.</a:t>
             </a:r>
             <a:endParaRPr lang="en-US" sz="2100" dirty="0"/>
           </a:p>
@@ -13229,17 +13426,17 @@
         </p:nvSpPr>
         <p:spPr>
           <a:xfrm>
-            <a:off x="7799832" y="1828800"/>
-            <a:ext cx="3145536" cy="685800"/>
-          </a:xfrm>
-          <a:prstGeom prst="rect">
-            <a:avLst/>
-          </a:prstGeom>
-          <a:noFill/>
-          <a:ln/>
-        </p:spPr>
-        <p:txBody>
-          <a:bodyPr wrap="square" lIns="0" tIns="0" rIns="0" bIns="0" rtlCol="0" anchor="t">
+            <a:off x="7799832" y="1801368"/>
+            <a:ext cx="3145536" cy="758952"/>
+          </a:xfrm>
+          <a:prstGeom prst="rect">
+            <a:avLst/>
+          </a:prstGeom>
+          <a:noFill/>
+          <a:ln/>
+        </p:spPr>
+        <p:txBody>
+          <a:bodyPr wrap="square" lIns="254" tIns="254" rIns="254" bIns="254" rtlCol="0" anchor="t">
             <a:normAutofit/>
           </a:bodyPr>
           <a:lstStyle/>
@@ -13248,7 +13445,7 @@
               <a:buNone/>
             </a:pPr>
             <a:r>
-              <a:rPr lang="en-US" sz="1550" dirty="0">
+              <a:rPr lang="en-US" sz="1320" dirty="0">
                 <a:solidFill>
                   <a:srgbClr val="17364A"/>
                 </a:solidFill>
@@ -13258,7 +13455,7 @@
               </a:rPr>
               <a:t>Explain the difference between risk appetite, risk tolerance, and risk acceptance.</a:t>
             </a:r>
-            <a:endParaRPr lang="en-US" sz="1550" dirty="0"/>
+            <a:endParaRPr lang="en-US" sz="1320" dirty="0"/>
           </a:p>
         </p:txBody>
       </p:sp>
@@ -13346,13 +13543,16 @@
           <a:ln/>
         </p:spPr>
         <p:txBody>
-          <a:bodyPr wrap="square" lIns="254" tIns="254" rIns="254" bIns="254" rtlCol="0" anchor="t">
+          <a:bodyPr wrap="square" lIns="508" tIns="508" rIns="508" bIns="508" rtlCol="0" anchor="t">
             <a:normAutofit/>
           </a:bodyPr>
           <a:lstStyle/>
           <a:p>
-            <a:r>
-              <a:rPr lang="en-US" sz="1380" dirty="0">
+            <a:pPr indent="0" marL="0">
+              <a:buNone/>
+            </a:pPr>
+            <a:r>
+              <a:rPr lang="en-US" sz="1220" dirty="0">
                 <a:solidFill>
                   <a:srgbClr val="17364A"/>
                 </a:solidFill>
@@ -13360,13 +13560,16 @@
                 <a:ea typeface="Aptos" pitchFamily="34" charset="-122"/>
                 <a:cs typeface="Aptos" pitchFamily="34" charset="-120"/>
               </a:rPr>
-              <a:t>Connect risk tolerance to review level, safeguards, monitoring, and escalation.</a:t>
-            </a:r>
-            <a:endParaRPr lang="en-US" sz="1380" dirty="0"/>
-          </a:p>
-          <a:p>
-            <a:r>
-              <a:rPr lang="en-US" sz="1380" dirty="0">
+              <a:t>Connect risk tolerance to review level, safeguards, monitoring,.</a:t>
+            </a:r>
+            <a:endParaRPr lang="en-US" sz="1220" dirty="0"/>
+          </a:p>
+          <a:p>
+            <a:pPr indent="0" marL="0">
+              <a:buNone/>
+            </a:pPr>
+            <a:r>
+              <a:rPr lang="en-US" sz="1220" dirty="0">
                 <a:solidFill>
                   <a:srgbClr val="17364A"/>
                 </a:solidFill>
@@ -13374,9 +13577,9 @@
                 <a:ea typeface="Aptos" pitchFamily="34" charset="-122"/>
                 <a:cs typeface="Aptos" pitchFamily="34" charset="-120"/>
               </a:rPr>
-              <a:t>Produce a draft AI risk appetite statement for leadership or governance discussion.</a:t>
-            </a:r>
-            <a:endParaRPr lang="en-US" sz="1380" dirty="0"/>
+              <a:t>Produce a draft AI risk appetite statement for leadership or.</a:t>
+            </a:r>
+            <a:endParaRPr lang="en-US" sz="1220" dirty="0"/>
           </a:p>
         </p:txBody>
       </p:sp>
@@ -13454,17 +13657,17 @@
         </p:nvSpPr>
         <p:spPr>
           <a:xfrm>
-            <a:off x="7799832" y="5001768"/>
-            <a:ext cx="3145536" cy="502920"/>
-          </a:xfrm>
-          <a:prstGeom prst="rect">
-            <a:avLst/>
-          </a:prstGeom>
-          <a:noFill/>
-          <a:ln/>
-        </p:spPr>
-        <p:txBody>
-          <a:bodyPr wrap="square" lIns="0" tIns="0" rIns="0" bIns="0" rtlCol="0" anchor="t">
+            <a:off x="7799832" y="4974336"/>
+            <a:ext cx="3145536" cy="576072"/>
+          </a:xfrm>
+          <a:prstGeom prst="rect">
+            <a:avLst/>
+          </a:prstGeom>
+          <a:noFill/>
+          <a:ln/>
+        </p:spPr>
+        <p:txBody>
+          <a:bodyPr wrap="square" lIns="254" tIns="254" rIns="254" bIns="254" rtlCol="0" anchor="t">
             <a:normAutofit/>
           </a:bodyPr>
           <a:lstStyle/>
@@ -13473,7 +13676,7 @@
               <a:buNone/>
             </a:pPr>
             <a:r>
-              <a:rPr lang="en-US" sz="1550" dirty="0">
+              <a:rPr lang="en-US" sz="1320" dirty="0">
                 <a:solidFill>
                   <a:srgbClr val="17364A"/>
                 </a:solidFill>
@@ -13481,9 +13684,9 @@
                 <a:ea typeface="Aptos" pitchFamily="34" charset="-122"/>
                 <a:cs typeface="Aptos" pitchFamily="34" charset="-120"/>
               </a:rPr>
-              <a:t>Use the assignment to test whether you can explain the concept, apply it to a realistic public health situation, and identify what would need review before the work moves forward.</a:t>
-            </a:r>
-            <a:endParaRPr lang="en-US" sz="1550" dirty="0"/>
+              <a:t>Use the assignment to test whether you can explain the concept, apply it to a realistic public health situation, and.</a:t>
+            </a:r>
+            <a:endParaRPr lang="en-US" sz="1320" dirty="0"/>
           </a:p>
         </p:txBody>
       </p:sp>
@@ -13784,49 +13987,58 @@
           <a:ln/>
         </p:spPr>
         <p:txBody>
-          <a:bodyPr wrap="square" lIns="635" tIns="635" rIns="635" bIns="635" rtlCol="0" anchor="t">
+          <a:bodyPr wrap="square" lIns="1016" tIns="1016" rIns="1016" bIns="1016" rtlCol="0" anchor="t">
             <a:normAutofit/>
           </a:bodyPr>
           <a:lstStyle/>
           <a:p>
+            <a:pPr indent="0" marL="0">
+              <a:buNone/>
+            </a:pPr>
             <a:r>
               <a:rPr lang="en-US" sz="2100" dirty="0">
                 <a:solidFill>
-                  <a:srgbClr val="17364A"/>
-                </a:solidFill>
-                <a:latin typeface="Aptos" pitchFamily="34" charset="0"/>
-                <a:ea typeface="Aptos" pitchFamily="34" charset="-122"/>
-                <a:cs typeface="Aptos" pitchFamily="34" charset="-120"/>
-              </a:rPr>
-              <a:t>Leaders cannot manage AI risk effectively unless they define how much risk the agency is willing to.</a:t>
+                  <a:srgbClr val="003A63"/>
+                </a:solidFill>
+                <a:latin typeface="Aptos" pitchFamily="34" charset="0"/>
+                <a:ea typeface="Aptos" pitchFamily="34" charset="-122"/>
+                <a:cs typeface="Aptos" pitchFamily="34" charset="-120"/>
+              </a:rPr>
+              <a:t>• Leaders cannot manage AI risk effectively unless they define how much risk the agency is.</a:t>
             </a:r>
             <a:endParaRPr lang="en-US" sz="2100" dirty="0"/>
           </a:p>
           <a:p>
+            <a:pPr indent="0" marL="0">
+              <a:buNone/>
+            </a:pPr>
             <a:r>
               <a:rPr lang="en-US" sz="2100" dirty="0">
                 <a:solidFill>
-                  <a:srgbClr val="17364A"/>
-                </a:solidFill>
-                <a:latin typeface="Aptos" pitchFamily="34" charset="0"/>
-                <a:ea typeface="Aptos" pitchFamily="34" charset="-122"/>
-                <a:cs typeface="Aptos" pitchFamily="34" charset="-120"/>
-              </a:rPr>
-              <a:t>Risk appetite describes the broad level of risk an organization is willing to take in pursuit of its.</a:t>
+                  <a:srgbClr val="003A63"/>
+                </a:solidFill>
+                <a:latin typeface="Aptos" pitchFamily="34" charset="0"/>
+                <a:ea typeface="Aptos" pitchFamily="34" charset="-122"/>
+                <a:cs typeface="Aptos" pitchFamily="34" charset="-120"/>
+              </a:rPr>
+              <a:t>• Risk appetite describes the broad level of risk an organization is willing to take in pursuit.</a:t>
             </a:r>
             <a:endParaRPr lang="en-US" sz="2100" dirty="0"/>
           </a:p>
           <a:p>
+            <a:pPr indent="0" marL="0">
+              <a:buNone/>
+            </a:pPr>
             <a:r>
               <a:rPr lang="en-US" sz="2100" dirty="0">
                 <a:solidFill>
-                  <a:srgbClr val="17364A"/>
-                </a:solidFill>
-                <a:latin typeface="Aptos" pitchFamily="34" charset="0"/>
-                <a:ea typeface="Aptos" pitchFamily="34" charset="-122"/>
-                <a:cs typeface="Aptos" pitchFamily="34" charset="-120"/>
-              </a:rPr>
-              <a:t>Risk tolerance translates that appetite into practical thresholds, conditions, and limits for specific.</a:t>
+                  <a:srgbClr val="003A63"/>
+                </a:solidFill>
+                <a:latin typeface="Aptos" pitchFamily="34" charset="0"/>
+                <a:ea typeface="Aptos" pitchFamily="34" charset="-122"/>
+                <a:cs typeface="Aptos" pitchFamily="34" charset="-120"/>
+              </a:rPr>
+              <a:t>• Risk tolerance translates that appetite into practical thresholds, conditions, and limits for.</a:t>
             </a:r>
             <a:endParaRPr lang="en-US" sz="2100" dirty="0"/>
           </a:p>
@@ -13906,17 +14118,17 @@
         </p:nvSpPr>
         <p:spPr>
           <a:xfrm>
-            <a:off x="7799832" y="1828800"/>
-            <a:ext cx="3145536" cy="685800"/>
-          </a:xfrm>
-          <a:prstGeom prst="rect">
-            <a:avLst/>
-          </a:prstGeom>
-          <a:noFill/>
-          <a:ln/>
-        </p:spPr>
-        <p:txBody>
-          <a:bodyPr wrap="square" lIns="0" tIns="0" rIns="0" bIns="0" rtlCol="0" anchor="t">
+            <a:off x="7799832" y="1801368"/>
+            <a:ext cx="3145536" cy="758952"/>
+          </a:xfrm>
+          <a:prstGeom prst="rect">
+            <a:avLst/>
+          </a:prstGeom>
+          <a:noFill/>
+          <a:ln/>
+        </p:spPr>
+        <p:txBody>
+          <a:bodyPr wrap="square" lIns="254" tIns="254" rIns="254" bIns="254" rtlCol="0" anchor="t">
             <a:normAutofit/>
           </a:bodyPr>
           <a:lstStyle/>
@@ -13925,7 +14137,7 @@
               <a:buNone/>
             </a:pPr>
             <a:r>
-              <a:rPr lang="en-US" sz="1550" dirty="0">
+              <a:rPr lang="en-US" sz="1320" dirty="0">
                 <a:solidFill>
                   <a:srgbClr val="17364A"/>
                 </a:solidFill>
@@ -13935,7 +14147,7 @@
               </a:rPr>
               <a:t>Leaders cannot manage AI risk effectively unless they define how much risk the agency is willing to.</a:t>
             </a:r>
-            <a:endParaRPr lang="en-US" sz="1550" dirty="0"/>
+            <a:endParaRPr lang="en-US" sz="1320" dirty="0"/>
           </a:p>
         </p:txBody>
       </p:sp>
@@ -14023,13 +14235,16 @@
           <a:ln/>
         </p:spPr>
         <p:txBody>
-          <a:bodyPr wrap="square" lIns="254" tIns="254" rIns="254" bIns="254" rtlCol="0" anchor="t">
+          <a:bodyPr wrap="square" lIns="508" tIns="508" rIns="508" bIns="508" rtlCol="0" anchor="t">
             <a:normAutofit/>
           </a:bodyPr>
           <a:lstStyle/>
           <a:p>
-            <a:r>
-              <a:rPr lang="en-US" sz="1380" dirty="0">
+            <a:pPr indent="0" marL="0">
+              <a:buNone/>
+            </a:pPr>
+            <a:r>
+              <a:rPr lang="en-US" sz="1220" dirty="0">
                 <a:solidFill>
                   <a:srgbClr val="17364A"/>
                 </a:solidFill>
@@ -14037,13 +14252,16 @@
                 <a:ea typeface="Aptos" pitchFamily="34" charset="-122"/>
                 <a:cs typeface="Aptos" pitchFamily="34" charset="-120"/>
               </a:rPr>
-              <a:t>Leaders cannot manage AI risk effectively unless they define how much risk the agency is.</a:t>
-            </a:r>
-            <a:endParaRPr lang="en-US" sz="1380" dirty="0"/>
-          </a:p>
-          <a:p>
-            <a:r>
-              <a:rPr lang="en-US" sz="1380" dirty="0">
+              <a:t>Leaders cannot manage AI risk effectively unless they define how.</a:t>
+            </a:r>
+            <a:endParaRPr lang="en-US" sz="1220" dirty="0"/>
+          </a:p>
+          <a:p>
+            <a:pPr indent="0" marL="0">
+              <a:buNone/>
+            </a:pPr>
+            <a:r>
+              <a:rPr lang="en-US" sz="1220" dirty="0">
                 <a:solidFill>
                   <a:srgbClr val="17364A"/>
                 </a:solidFill>
@@ -14051,13 +14269,16 @@
                 <a:ea typeface="Aptos" pitchFamily="34" charset="-122"/>
                 <a:cs typeface="Aptos" pitchFamily="34" charset="-120"/>
               </a:rPr>
-              <a:t>Risk appetite describes the broad level of risk an organization is willing to take in.</a:t>
-            </a:r>
-            <a:endParaRPr lang="en-US" sz="1380" dirty="0"/>
-          </a:p>
-          <a:p>
-            <a:r>
-              <a:rPr lang="en-US" sz="1380" dirty="0">
+              <a:t>Risk appetite describes the broad level of risk an organization is.</a:t>
+            </a:r>
+            <a:endParaRPr lang="en-US" sz="1220" dirty="0"/>
+          </a:p>
+          <a:p>
+            <a:pPr indent="0" marL="0">
+              <a:buNone/>
+            </a:pPr>
+            <a:r>
+              <a:rPr lang="en-US" sz="1220" dirty="0">
                 <a:solidFill>
                   <a:srgbClr val="17364A"/>
                 </a:solidFill>
@@ -14065,9 +14286,9 @@
                 <a:ea typeface="Aptos" pitchFamily="34" charset="-122"/>
                 <a:cs typeface="Aptos" pitchFamily="34" charset="-120"/>
               </a:rPr>
-              <a:t>Risk tolerance translates that appetite into practical thresholds, conditions, and limits.</a:t>
-            </a:r>
-            <a:endParaRPr lang="en-US" sz="1380" dirty="0"/>
+              <a:t>Risk tolerance translates that appetite into practical thresholds,.</a:t>
+            </a:r>
+            <a:endParaRPr lang="en-US" sz="1220" dirty="0"/>
           </a:p>
         </p:txBody>
       </p:sp>
@@ -14145,17 +14366,17 @@
         </p:nvSpPr>
         <p:spPr>
           <a:xfrm>
-            <a:off x="7799832" y="5001768"/>
-            <a:ext cx="3145536" cy="502920"/>
-          </a:xfrm>
-          <a:prstGeom prst="rect">
-            <a:avLst/>
-          </a:prstGeom>
-          <a:noFill/>
-          <a:ln/>
-        </p:spPr>
-        <p:txBody>
-          <a:bodyPr wrap="square" lIns="0" tIns="0" rIns="0" bIns="0" rtlCol="0" anchor="t">
+            <a:off x="7799832" y="4974336"/>
+            <a:ext cx="3145536" cy="576072"/>
+          </a:xfrm>
+          <a:prstGeom prst="rect">
+            <a:avLst/>
+          </a:prstGeom>
+          <a:noFill/>
+          <a:ln/>
+        </p:spPr>
+        <p:txBody>
+          <a:bodyPr wrap="square" lIns="254" tIns="254" rIns="254" bIns="254" rtlCol="0" anchor="t">
             <a:normAutofit/>
           </a:bodyPr>
           <a:lstStyle/>
@@ -14164,7 +14385,7 @@
               <a:buNone/>
             </a:pPr>
             <a:r>
-              <a:rPr lang="en-US" sz="1550" dirty="0">
+              <a:rPr lang="en-US" sz="1320" dirty="0">
                 <a:solidFill>
                   <a:srgbClr val="17364A"/>
                 </a:solidFill>
@@ -14172,9 +14393,9 @@
                 <a:ea typeface="Aptos" pitchFamily="34" charset="-122"/>
                 <a:cs typeface="Aptos" pitchFamily="34" charset="-120"/>
               </a:rPr>
-              <a:t>Identify what could go wrong, who could be affected, what safeguards are needed, and what evidence should be reviewed before use expands.</a:t>
-            </a:r>
-            <a:endParaRPr lang="en-US" sz="1550" dirty="0"/>
+              <a:t>Identify what could go wrong, who could be affected, what safeguards are needed, and what evidence should be reviewed.</a:t>
+            </a:r>
+            <a:endParaRPr lang="en-US" sz="1320" dirty="0"/>
           </a:p>
         </p:txBody>
       </p:sp>
@@ -14475,49 +14696,58 @@
           <a:ln/>
         </p:spPr>
         <p:txBody>
-          <a:bodyPr wrap="square" lIns="635" tIns="635" rIns="635" bIns="635" rtlCol="0" anchor="t">
+          <a:bodyPr wrap="square" lIns="1016" tIns="1016" rIns="1016" bIns="1016" rtlCol="0" anchor="t">
             <a:normAutofit/>
           </a:bodyPr>
           <a:lstStyle/>
           <a:p>
+            <a:pPr indent="0" marL="0">
+              <a:buNone/>
+            </a:pPr>
             <a:r>
               <a:rPr lang="en-US" sz="2100" dirty="0">
                 <a:solidFill>
-                  <a:srgbClr val="17364A"/>
-                </a:solidFill>
-                <a:latin typeface="Aptos" pitchFamily="34" charset="0"/>
-                <a:ea typeface="Aptos" pitchFamily="34" charset="-122"/>
-                <a:cs typeface="Aptos" pitchFamily="34" charset="-120"/>
-              </a:rPr>
-              <a:t>This module provides national-level training guidance for public health agencies and partners.</a:t>
+                  <a:srgbClr val="003A63"/>
+                </a:solidFill>
+                <a:latin typeface="Aptos" pitchFamily="34" charset="0"/>
+                <a:ea typeface="Aptos" pitchFamily="34" charset="-122"/>
+                <a:cs typeface="Aptos" pitchFamily="34" charset="-120"/>
+              </a:rPr>
+              <a:t>• This module provides national-level training guidance for public health agencies and partners.</a:t>
             </a:r>
             <a:endParaRPr lang="en-US" sz="2100" dirty="0"/>
           </a:p>
           <a:p>
+            <a:pPr indent="0" marL="0">
+              <a:buNone/>
+            </a:pPr>
             <a:r>
               <a:rPr lang="en-US" sz="2100" dirty="0">
                 <a:solidFill>
-                  <a:srgbClr val="17364A"/>
-                </a:solidFill>
-                <a:latin typeface="Aptos" pitchFamily="34" charset="0"/>
-                <a:ea typeface="Aptos" pitchFamily="34" charset="-122"/>
-                <a:cs typeface="Aptos" pitchFamily="34" charset="-120"/>
-              </a:rPr>
-              <a:t>It is not legal advice and does not replace review by agency legal counsel, privacy officers,.</a:t>
+                  <a:srgbClr val="003A63"/>
+                </a:solidFill>
+                <a:latin typeface="Aptos" pitchFamily="34" charset="0"/>
+                <a:ea typeface="Aptos" pitchFamily="34" charset="-122"/>
+                <a:cs typeface="Aptos" pitchFamily="34" charset="-120"/>
+              </a:rPr>
+              <a:t>• It is not legal advice and does not replace review by agency legal counsel, privacy officers,.</a:t>
             </a:r>
             <a:endParaRPr lang="en-US" sz="2100" dirty="0"/>
           </a:p>
           <a:p>
+            <a:pPr indent="0" marL="0">
+              <a:buNone/>
+            </a:pPr>
             <a:r>
               <a:rPr lang="en-US" sz="2100" dirty="0">
                 <a:solidFill>
-                  <a:srgbClr val="17364A"/>
-                </a:solidFill>
-                <a:latin typeface="Aptos" pitchFamily="34" charset="0"/>
-                <a:ea typeface="Aptos" pitchFamily="34" charset="-122"/>
-                <a:cs typeface="Aptos" pitchFamily="34" charset="-120"/>
-              </a:rPr>
-              <a:t>Requirements may vary by state, locality, territory, Tribe, agency, funding source, data-sharing.</a:t>
+                  <a:srgbClr val="003A63"/>
+                </a:solidFill>
+                <a:latin typeface="Aptos" pitchFamily="34" charset="0"/>
+                <a:ea typeface="Aptos" pitchFamily="34" charset="-122"/>
+                <a:cs typeface="Aptos" pitchFamily="34" charset="-120"/>
+              </a:rPr>
+              <a:t>• Requirements may vary by state, locality, territory, Tribe, agency, funding source,.</a:t>
             </a:r>
             <a:endParaRPr lang="en-US" sz="2100" dirty="0"/>
           </a:p>
@@ -14597,17 +14827,17 @@
         </p:nvSpPr>
         <p:spPr>
           <a:xfrm>
-            <a:off x="7799832" y="1828800"/>
-            <a:ext cx="3145536" cy="685800"/>
-          </a:xfrm>
-          <a:prstGeom prst="rect">
-            <a:avLst/>
-          </a:prstGeom>
-          <a:noFill/>
-          <a:ln/>
-        </p:spPr>
-        <p:txBody>
-          <a:bodyPr wrap="square" lIns="0" tIns="0" rIns="0" bIns="0" rtlCol="0" anchor="t">
+            <a:off x="7799832" y="1801368"/>
+            <a:ext cx="3145536" cy="758952"/>
+          </a:xfrm>
+          <a:prstGeom prst="rect">
+            <a:avLst/>
+          </a:prstGeom>
+          <a:noFill/>
+          <a:ln/>
+        </p:spPr>
+        <p:txBody>
+          <a:bodyPr wrap="square" lIns="254" tIns="254" rIns="254" bIns="254" rtlCol="0" anchor="t">
             <a:normAutofit/>
           </a:bodyPr>
           <a:lstStyle/>
@@ -14616,7 +14846,7 @@
               <a:buNone/>
             </a:pPr>
             <a:r>
-              <a:rPr lang="en-US" sz="1550" dirty="0">
+              <a:rPr lang="en-US" sz="1320" dirty="0">
                 <a:solidFill>
                   <a:srgbClr val="17364A"/>
                 </a:solidFill>
@@ -14626,7 +14856,7 @@
               </a:rPr>
               <a:t>This module provides national-level training guidance for public health agencies and partners.</a:t>
             </a:r>
-            <a:endParaRPr lang="en-US" sz="1550" dirty="0"/>
+            <a:endParaRPr lang="en-US" sz="1320" dirty="0"/>
           </a:p>
         </p:txBody>
       </p:sp>
@@ -14714,13 +14944,16 @@
           <a:ln/>
         </p:spPr>
         <p:txBody>
-          <a:bodyPr wrap="square" lIns="254" tIns="254" rIns="254" bIns="254" rtlCol="0" anchor="t">
+          <a:bodyPr wrap="square" lIns="508" tIns="508" rIns="508" bIns="508" rtlCol="0" anchor="t">
             <a:normAutofit/>
           </a:bodyPr>
           <a:lstStyle/>
           <a:p>
-            <a:r>
-              <a:rPr lang="en-US" sz="1380" dirty="0">
+            <a:pPr indent="0" marL="0">
+              <a:buNone/>
+            </a:pPr>
+            <a:r>
+              <a:rPr lang="en-US" sz="1220" dirty="0">
                 <a:solidFill>
                   <a:srgbClr val="17364A"/>
                 </a:solidFill>
@@ -14728,13 +14961,16 @@
                 <a:ea typeface="Aptos" pitchFamily="34" charset="-122"/>
                 <a:cs typeface="Aptos" pitchFamily="34" charset="-120"/>
               </a:rPr>
-              <a:t>It is not legal advice and does not replace review by agency legal counsel, privacy.</a:t>
-            </a:r>
-            <a:endParaRPr lang="en-US" sz="1380" dirty="0"/>
-          </a:p>
-          <a:p>
-            <a:r>
-              <a:rPr lang="en-US" sz="1380" dirty="0">
+              <a:t>It is not legal advice and does not replace review by agency legal.</a:t>
+            </a:r>
+            <a:endParaRPr lang="en-US" sz="1220" dirty="0"/>
+          </a:p>
+          <a:p>
+            <a:pPr indent="0" marL="0">
+              <a:buNone/>
+            </a:pPr>
+            <a:r>
+              <a:rPr lang="en-US" sz="1220" dirty="0">
                 <a:solidFill>
                   <a:srgbClr val="17364A"/>
                 </a:solidFill>
@@ -14742,13 +14978,16 @@
                 <a:ea typeface="Aptos" pitchFamily="34" charset="-122"/>
                 <a:cs typeface="Aptos" pitchFamily="34" charset="-120"/>
               </a:rPr>
-              <a:t>Requirements may vary by state, locality, territory, Tribe, agency, funding source,.</a:t>
-            </a:r>
-            <a:endParaRPr lang="en-US" sz="1380" dirty="0"/>
-          </a:p>
-          <a:p>
-            <a:r>
-              <a:rPr lang="en-US" sz="1380" dirty="0">
+              <a:t>Requirements may vary by state, locality, territory, Tribe,.</a:t>
+            </a:r>
+            <a:endParaRPr lang="en-US" sz="1220" dirty="0"/>
+          </a:p>
+          <a:p>
+            <a:pPr indent="0" marL="0">
+              <a:buNone/>
+            </a:pPr>
+            <a:r>
+              <a:rPr lang="en-US" sz="1220" dirty="0">
                 <a:solidFill>
                   <a:srgbClr val="17364A"/>
                 </a:solidFill>
@@ -14756,9 +14995,9 @@
                 <a:ea typeface="Aptos" pitchFamily="34" charset="-122"/>
                 <a:cs typeface="Aptos" pitchFamily="34" charset="-120"/>
               </a:rPr>
-              <a:t>Learners should use this module to identify the issues that require review and should.</a:t>
-            </a:r>
-            <a:endParaRPr lang="en-US" sz="1380" dirty="0"/>
+              <a:t>Learners should use this module to identify the issues that.</a:t>
+            </a:r>
+            <a:endParaRPr lang="en-US" sz="1220" dirty="0"/>
           </a:p>
         </p:txBody>
       </p:sp>
@@ -14836,17 +15075,17 @@
         </p:nvSpPr>
         <p:spPr>
           <a:xfrm>
-            <a:off x="7799832" y="5001768"/>
-            <a:ext cx="3145536" cy="502920"/>
-          </a:xfrm>
-          <a:prstGeom prst="rect">
-            <a:avLst/>
-          </a:prstGeom>
-          <a:noFill/>
-          <a:ln/>
-        </p:spPr>
-        <p:txBody>
-          <a:bodyPr wrap="square" lIns="0" tIns="0" rIns="0" bIns="0" rtlCol="0" anchor="t">
+            <a:off x="7799832" y="4974336"/>
+            <a:ext cx="3145536" cy="576072"/>
+          </a:xfrm>
+          <a:prstGeom prst="rect">
+            <a:avLst/>
+          </a:prstGeom>
+          <a:noFill/>
+          <a:ln/>
+        </p:spPr>
+        <p:txBody>
+          <a:bodyPr wrap="square" lIns="254" tIns="254" rIns="254" bIns="254" rtlCol="0" anchor="t">
             <a:normAutofit/>
           </a:bodyPr>
           <a:lstStyle/>
@@ -14855,7 +15094,7 @@
               <a:buNone/>
             </a:pPr>
             <a:r>
-              <a:rPr lang="en-US" sz="1550" dirty="0">
+              <a:rPr lang="en-US" sz="1320" dirty="0">
                 <a:solidFill>
                   <a:srgbClr val="17364A"/>
                 </a:solidFill>
@@ -14863,9 +15102,9 @@
                 <a:ea typeface="Aptos" pitchFamily="34" charset="-122"/>
                 <a:cs typeface="Aptos" pitchFamily="34" charset="-120"/>
               </a:rPr>
-              <a:t>Translate this concept into clear decision rights, review steps, documentation expectations, and escalation paths before an AI-supported workflow is approved.</a:t>
-            </a:r>
-            <a:endParaRPr lang="en-US" sz="1550" dirty="0"/>
+              <a:t>Translate this concept into clear decision rights, review steps, documentation expectations, and escalation paths before.</a:t>
+            </a:r>
+            <a:endParaRPr lang="en-US" sz="1320" dirty="0"/>
           </a:p>
         </p:txBody>
       </p:sp>
@@ -15166,49 +15405,58 @@
           <a:ln/>
         </p:spPr>
         <p:txBody>
-          <a:bodyPr wrap="square" lIns="635" tIns="635" rIns="635" bIns="635" rtlCol="0" anchor="t">
+          <a:bodyPr wrap="square" lIns="1016" tIns="1016" rIns="1016" bIns="1016" rtlCol="0" anchor="t">
             <a:normAutofit/>
           </a:bodyPr>
           <a:lstStyle/>
           <a:p>
+            <a:pPr indent="0" marL="0">
+              <a:buNone/>
+            </a:pPr>
             <a:r>
               <a:rPr lang="en-US" sz="2100" dirty="0">
                 <a:solidFill>
-                  <a:srgbClr val="17364A"/>
-                </a:solidFill>
-                <a:latin typeface="Aptos" pitchFamily="34" charset="0"/>
-                <a:ea typeface="Aptos" pitchFamily="34" charset="-122"/>
-                <a:cs typeface="Aptos" pitchFamily="34" charset="-120"/>
-              </a:rPr>
-              <a:t>Public health agencies make risk decisions every day, but AI can make those decisions less visible.</a:t>
+                  <a:srgbClr val="003A63"/>
+                </a:solidFill>
+                <a:latin typeface="Aptos" pitchFamily="34" charset="0"/>
+                <a:ea typeface="Aptos" pitchFamily="34" charset="-122"/>
+                <a:cs typeface="Aptos" pitchFamily="34" charset="-120"/>
+              </a:rPr>
+              <a:t>• Public health agencies make risk decisions every day, but AI can make those decisions less.</a:t>
             </a:r>
             <a:endParaRPr lang="en-US" sz="2100" dirty="0"/>
           </a:p>
           <a:p>
+            <a:pPr indent="0" marL="0">
+              <a:buNone/>
+            </a:pPr>
             <a:r>
               <a:rPr lang="en-US" sz="2100" dirty="0">
                 <a:solidFill>
-                  <a:srgbClr val="17364A"/>
-                </a:solidFill>
-                <a:latin typeface="Aptos" pitchFamily="34" charset="0"/>
-                <a:ea typeface="Aptos" pitchFamily="34" charset="-122"/>
-                <a:cs typeface="Aptos" pitchFamily="34" charset="-120"/>
-              </a:rPr>
-              <a:t>A generative AI tool might be acceptable for drafting internal meeting notes but not for producing.</a:t>
+                  <a:srgbClr val="003A63"/>
+                </a:solidFill>
+                <a:latin typeface="Aptos" pitchFamily="34" charset="0"/>
+                <a:ea typeface="Aptos" pitchFamily="34" charset="-122"/>
+                <a:cs typeface="Aptos" pitchFamily="34" charset="-120"/>
+              </a:rPr>
+              <a:t>• A generative AI tool might be acceptable for drafting internal meeting notes but not for.</a:t>
             </a:r>
             <a:endParaRPr lang="en-US" sz="2100" dirty="0"/>
           </a:p>
           <a:p>
+            <a:pPr indent="0" marL="0">
+              <a:buNone/>
+            </a:pPr>
             <a:r>
               <a:rPr lang="en-US" sz="2100" dirty="0">
                 <a:solidFill>
-                  <a:srgbClr val="17364A"/>
-                </a:solidFill>
-                <a:latin typeface="Aptos" pitchFamily="34" charset="0"/>
-                <a:ea typeface="Aptos" pitchFamily="34" charset="-122"/>
-                <a:cs typeface="Aptos" pitchFamily="34" charset="-120"/>
-              </a:rPr>
-              <a:t>A predictive model might be acceptable for planning staffing levels but not for denying services.</a:t>
+                  <a:srgbClr val="003A63"/>
+                </a:solidFill>
+                <a:latin typeface="Aptos" pitchFamily="34" charset="0"/>
+                <a:ea typeface="Aptos" pitchFamily="34" charset="-122"/>
+                <a:cs typeface="Aptos" pitchFamily="34" charset="-120"/>
+              </a:rPr>
+              <a:t>• A predictive model might be acceptable for planning staffing levels but not for denying.</a:t>
             </a:r>
             <a:endParaRPr lang="en-US" sz="2100" dirty="0"/>
           </a:p>
@@ -15288,17 +15536,17 @@
         </p:nvSpPr>
         <p:spPr>
           <a:xfrm>
-            <a:off x="7799832" y="1828800"/>
-            <a:ext cx="3145536" cy="685800"/>
-          </a:xfrm>
-          <a:prstGeom prst="rect">
-            <a:avLst/>
-          </a:prstGeom>
-          <a:noFill/>
-          <a:ln/>
-        </p:spPr>
-        <p:txBody>
-          <a:bodyPr wrap="square" lIns="0" tIns="0" rIns="0" bIns="0" rtlCol="0" anchor="t">
+            <a:off x="7799832" y="1801368"/>
+            <a:ext cx="3145536" cy="758952"/>
+          </a:xfrm>
+          <a:prstGeom prst="rect">
+            <a:avLst/>
+          </a:prstGeom>
+          <a:noFill/>
+          <a:ln/>
+        </p:spPr>
+        <p:txBody>
+          <a:bodyPr wrap="square" lIns="254" tIns="254" rIns="254" bIns="254" rtlCol="0" anchor="t">
             <a:normAutofit/>
           </a:bodyPr>
           <a:lstStyle/>
@@ -15307,7 +15555,7 @@
               <a:buNone/>
             </a:pPr>
             <a:r>
-              <a:rPr lang="en-US" sz="1550" dirty="0">
+              <a:rPr lang="en-US" sz="1320" dirty="0">
                 <a:solidFill>
                   <a:srgbClr val="17364A"/>
                 </a:solidFill>
@@ -15317,7 +15565,7 @@
               </a:rPr>
               <a:t>Public health agencies make risk decisions every day, but AI can make those decisions less visible.</a:t>
             </a:r>
-            <a:endParaRPr lang="en-US" sz="1550" dirty="0"/>
+            <a:endParaRPr lang="en-US" sz="1320" dirty="0"/>
           </a:p>
         </p:txBody>
       </p:sp>
@@ -15405,13 +15653,16 @@
           <a:ln/>
         </p:spPr>
         <p:txBody>
-          <a:bodyPr wrap="square" lIns="254" tIns="254" rIns="254" bIns="254" rtlCol="0" anchor="t">
+          <a:bodyPr wrap="square" lIns="508" tIns="508" rIns="508" bIns="508" rtlCol="0" anchor="t">
             <a:normAutofit/>
           </a:bodyPr>
           <a:lstStyle/>
           <a:p>
-            <a:r>
-              <a:rPr lang="en-US" sz="1380" dirty="0">
+            <a:pPr indent="0" marL="0">
+              <a:buNone/>
+            </a:pPr>
+            <a:r>
+              <a:rPr lang="en-US" sz="1220" dirty="0">
                 <a:solidFill>
                   <a:srgbClr val="17364A"/>
                 </a:solidFill>
@@ -15419,13 +15670,16 @@
                 <a:ea typeface="Aptos" pitchFamily="34" charset="-122"/>
                 <a:cs typeface="Aptos" pitchFamily="34" charset="-120"/>
               </a:rPr>
-              <a:t>A generative AI tool might be acceptable for drafting internal meeting notes but not for.</a:t>
-            </a:r>
-            <a:endParaRPr lang="en-US" sz="1380" dirty="0"/>
-          </a:p>
-          <a:p>
-            <a:r>
-              <a:rPr lang="en-US" sz="1380" dirty="0">
+              <a:t>A generative AI tool might be acceptable for drafting internal.</a:t>
+            </a:r>
+            <a:endParaRPr lang="en-US" sz="1220" dirty="0"/>
+          </a:p>
+          <a:p>
+            <a:pPr indent="0" marL="0">
+              <a:buNone/>
+            </a:pPr>
+            <a:r>
+              <a:rPr lang="en-US" sz="1220" dirty="0">
                 <a:solidFill>
                   <a:srgbClr val="17364A"/>
                 </a:solidFill>
@@ -15433,13 +15687,16 @@
                 <a:ea typeface="Aptos" pitchFamily="34" charset="-122"/>
                 <a:cs typeface="Aptos" pitchFamily="34" charset="-120"/>
               </a:rPr>
-              <a:t>An agentic workflow might be acceptable for creating a draft task but not for sending an.</a:t>
-            </a:r>
-            <a:endParaRPr lang="en-US" sz="1380" dirty="0"/>
-          </a:p>
-          <a:p>
-            <a:r>
-              <a:rPr lang="en-US" sz="1380" dirty="0">
+              <a:t>An agentic workflow might be acceptable for creating a draft task.</a:t>
+            </a:r>
+            <a:endParaRPr lang="en-US" sz="1220" dirty="0"/>
+          </a:p>
+          <a:p>
+            <a:pPr indent="0" marL="0">
+              <a:buNone/>
+            </a:pPr>
+            <a:r>
+              <a:rPr lang="en-US" sz="1220" dirty="0">
                 <a:solidFill>
                   <a:srgbClr val="17364A"/>
                 </a:solidFill>
@@ -15449,7 +15706,7 @@
               </a:rPr>
               <a:t>Risk appetite helps agencies explain these distinctions.</a:t>
             </a:r>
-            <a:endParaRPr lang="en-US" sz="1380" dirty="0"/>
+            <a:endParaRPr lang="en-US" sz="1220" dirty="0"/>
           </a:p>
         </p:txBody>
       </p:sp>
@@ -15527,17 +15784,17 @@
         </p:nvSpPr>
         <p:spPr>
           <a:xfrm>
-            <a:off x="7799832" y="5001768"/>
-            <a:ext cx="3145536" cy="502920"/>
-          </a:xfrm>
-          <a:prstGeom prst="rect">
-            <a:avLst/>
-          </a:prstGeom>
-          <a:noFill/>
-          <a:ln/>
-        </p:spPr>
-        <p:txBody>
-          <a:bodyPr wrap="square" lIns="0" tIns="0" rIns="0" bIns="0" rtlCol="0" anchor="t">
+            <a:off x="7799832" y="4974336"/>
+            <a:ext cx="3145536" cy="576072"/>
+          </a:xfrm>
+          <a:prstGeom prst="rect">
+            <a:avLst/>
+          </a:prstGeom>
+          <a:noFill/>
+          <a:ln/>
+        </p:spPr>
+        <p:txBody>
+          <a:bodyPr wrap="square" lIns="254" tIns="254" rIns="254" bIns="254" rtlCol="0" anchor="t">
             <a:normAutofit/>
           </a:bodyPr>
           <a:lstStyle/>
@@ -15546,7 +15803,7 @@
               <a:buNone/>
             </a:pPr>
             <a:r>
-              <a:rPr lang="en-US" sz="1550" dirty="0">
+              <a:rPr lang="en-US" sz="1320" dirty="0">
                 <a:solidFill>
                   <a:srgbClr val="17364A"/>
                 </a:solidFill>
@@ -15554,9 +15811,9 @@
                 <a:ea typeface="Aptos" pitchFamily="34" charset="-122"/>
                 <a:cs typeface="Aptos" pitchFamily="34" charset="-120"/>
               </a:rPr>
-              <a:t>Identify what could go wrong, who could be affected, what safeguards are needed, and what evidence should be reviewed before use expands.</a:t>
-            </a:r>
-            <a:endParaRPr lang="en-US" sz="1550" dirty="0"/>
+              <a:t>Identify what could go wrong, who could be affected, what safeguards are needed, and what evidence should be reviewed.</a:t>
+            </a:r>
+            <a:endParaRPr lang="en-US" sz="1320" dirty="0"/>
           </a:p>
         </p:txBody>
       </p:sp>
@@ -15857,49 +16114,58 @@
           <a:ln/>
         </p:spPr>
         <p:txBody>
-          <a:bodyPr wrap="square" lIns="635" tIns="635" rIns="635" bIns="635" rtlCol="0" anchor="t">
+          <a:bodyPr wrap="square" lIns="1016" tIns="1016" rIns="1016" bIns="1016" rtlCol="0" anchor="t">
             <a:normAutofit/>
           </a:bodyPr>
           <a:lstStyle/>
           <a:p>
+            <a:pPr indent="0" marL="0">
+              <a:buNone/>
+            </a:pPr>
             <a:r>
               <a:rPr lang="en-US" sz="2100" dirty="0">
                 <a:solidFill>
-                  <a:srgbClr val="17364A"/>
-                </a:solidFill>
-                <a:latin typeface="Aptos" pitchFamily="34" charset="0"/>
-                <a:ea typeface="Aptos" pitchFamily="34" charset="-122"/>
-                <a:cs typeface="Aptos" pitchFamily="34" charset="-120"/>
-              </a:rPr>
-              <a:t>An agency may define a higher risk appetite for internal administrative uses that do not involve.</a:t>
+                  <a:srgbClr val="003A63"/>
+                </a:solidFill>
+                <a:latin typeface="Aptos" pitchFamily="34" charset="0"/>
+                <a:ea typeface="Aptos" pitchFamily="34" charset="-122"/>
+                <a:cs typeface="Aptos" pitchFamily="34" charset="-120"/>
+              </a:rPr>
+              <a:t>• An agency may define a higher risk appetite for internal administrative uses that do not.</a:t>
             </a:r>
             <a:endParaRPr lang="en-US" sz="2100" dirty="0"/>
           </a:p>
           <a:p>
+            <a:pPr indent="0" marL="0">
+              <a:buNone/>
+            </a:pPr>
             <a:r>
               <a:rPr lang="en-US" sz="2100" dirty="0">
                 <a:solidFill>
-                  <a:srgbClr val="17364A"/>
-                </a:solidFill>
-                <a:latin typeface="Aptos" pitchFamily="34" charset="0"/>
-                <a:ea typeface="Aptos" pitchFamily="34" charset="-122"/>
-                <a:cs typeface="Aptos" pitchFamily="34" charset="-120"/>
-              </a:rPr>
-              <a:t>It may define a moderate appetite for staff-facing decision support when human review, validation, and.</a:t>
+                  <a:srgbClr val="003A63"/>
+                </a:solidFill>
+                <a:latin typeface="Aptos" pitchFamily="34" charset="0"/>
+                <a:ea typeface="Aptos" pitchFamily="34" charset="-122"/>
+                <a:cs typeface="Aptos" pitchFamily="34" charset="-120"/>
+              </a:rPr>
+              <a:t>• It may define a moderate appetite for staff-facing decision support when human review,.</a:t>
             </a:r>
             <a:endParaRPr lang="en-US" sz="2100" dirty="0"/>
           </a:p>
           <a:p>
+            <a:pPr indent="0" marL="0">
+              <a:buNone/>
+            </a:pPr>
             <a:r>
               <a:rPr lang="en-US" sz="2100" dirty="0">
                 <a:solidFill>
-                  <a:srgbClr val="17364A"/>
-                </a:solidFill>
-                <a:latin typeface="Aptos" pitchFamily="34" charset="0"/>
-                <a:ea typeface="Aptos" pitchFamily="34" charset="-122"/>
-                <a:cs typeface="Aptos" pitchFamily="34" charset="-120"/>
-              </a:rPr>
-              <a:t>It may define a very low appetite for unsupervised public-facing advice, automated eligibility.</a:t>
+                  <a:srgbClr val="003A63"/>
+                </a:solidFill>
+                <a:latin typeface="Aptos" pitchFamily="34" charset="0"/>
+                <a:ea typeface="Aptos" pitchFamily="34" charset="-122"/>
+                <a:cs typeface="Aptos" pitchFamily="34" charset="-120"/>
+              </a:rPr>
+              <a:t>• It may define a very low appetite for unsupervised public-facing advice, automated eligibility.</a:t>
             </a:r>
             <a:endParaRPr lang="en-US" sz="2100" dirty="0"/>
           </a:p>
@@ -15979,17 +16245,17 @@
         </p:nvSpPr>
         <p:spPr>
           <a:xfrm>
-            <a:off x="7799832" y="1828800"/>
-            <a:ext cx="3145536" cy="685800"/>
-          </a:xfrm>
-          <a:prstGeom prst="rect">
-            <a:avLst/>
-          </a:prstGeom>
-          <a:noFill/>
-          <a:ln/>
-        </p:spPr>
-        <p:txBody>
-          <a:bodyPr wrap="square" lIns="0" tIns="0" rIns="0" bIns="0" rtlCol="0" anchor="t">
+            <a:off x="7799832" y="1801368"/>
+            <a:ext cx="3145536" cy="758952"/>
+          </a:xfrm>
+          <a:prstGeom prst="rect">
+            <a:avLst/>
+          </a:prstGeom>
+          <a:noFill/>
+          <a:ln/>
+        </p:spPr>
+        <p:txBody>
+          <a:bodyPr wrap="square" lIns="254" tIns="254" rIns="254" bIns="254" rtlCol="0" anchor="t">
             <a:normAutofit/>
           </a:bodyPr>
           <a:lstStyle/>
@@ -15998,7 +16264,7 @@
               <a:buNone/>
             </a:pPr>
             <a:r>
-              <a:rPr lang="en-US" sz="1550" dirty="0">
+              <a:rPr lang="en-US" sz="1320" dirty="0">
                 <a:solidFill>
                   <a:srgbClr val="17364A"/>
                 </a:solidFill>
@@ -16008,7 +16274,7 @@
               </a:rPr>
               <a:t>An agency may define a higher risk appetite for internal administrative uses that do not involve.</a:t>
             </a:r>
-            <a:endParaRPr lang="en-US" sz="1550" dirty="0"/>
+            <a:endParaRPr lang="en-US" sz="1320" dirty="0"/>
           </a:p>
         </p:txBody>
       </p:sp>
@@ -16096,13 +16362,16 @@
           <a:ln/>
         </p:spPr>
         <p:txBody>
-          <a:bodyPr wrap="square" lIns="254" tIns="254" rIns="254" bIns="254" rtlCol="0" anchor="t">
+          <a:bodyPr wrap="square" lIns="508" tIns="508" rIns="508" bIns="508" rtlCol="0" anchor="t">
             <a:normAutofit/>
           </a:bodyPr>
           <a:lstStyle/>
           <a:p>
-            <a:r>
-              <a:rPr lang="en-US" sz="1380" dirty="0">
+            <a:pPr indent="0" marL="0">
+              <a:buNone/>
+            </a:pPr>
+            <a:r>
+              <a:rPr lang="en-US" sz="1220" dirty="0">
                 <a:solidFill>
                   <a:srgbClr val="17364A"/>
                 </a:solidFill>
@@ -16110,13 +16379,16 @@
                 <a:ea typeface="Aptos" pitchFamily="34" charset="-122"/>
                 <a:cs typeface="Aptos" pitchFamily="34" charset="-120"/>
               </a:rPr>
-              <a:t>An agency may define a higher risk appetite for internal administrative uses that do not.</a:t>
-            </a:r>
-            <a:endParaRPr lang="en-US" sz="1380" dirty="0"/>
-          </a:p>
-          <a:p>
-            <a:r>
-              <a:rPr lang="en-US" sz="1380" dirty="0">
+              <a:t>An agency may define a higher risk appetite for internal.</a:t>
+            </a:r>
+            <a:endParaRPr lang="en-US" sz="1220" dirty="0"/>
+          </a:p>
+          <a:p>
+            <a:pPr indent="0" marL="0">
+              <a:buNone/>
+            </a:pPr>
+            <a:r>
+              <a:rPr lang="en-US" sz="1220" dirty="0">
                 <a:solidFill>
                   <a:srgbClr val="17364A"/>
                 </a:solidFill>
@@ -16124,13 +16396,16 @@
                 <a:ea typeface="Aptos" pitchFamily="34" charset="-122"/>
                 <a:cs typeface="Aptos" pitchFamily="34" charset="-120"/>
               </a:rPr>
-              <a:t>It may define a moderate appetite for staff-facing decision support when human review,.</a:t>
-            </a:r>
-            <a:endParaRPr lang="en-US" sz="1380" dirty="0"/>
-          </a:p>
-          <a:p>
-            <a:r>
-              <a:rPr lang="en-US" sz="1380" dirty="0">
+              <a:t>It may define a moderate appetite for staff-facing decision.</a:t>
+            </a:r>
+            <a:endParaRPr lang="en-US" sz="1220" dirty="0"/>
+          </a:p>
+          <a:p>
+            <a:pPr indent="0" marL="0">
+              <a:buNone/>
+            </a:pPr>
+            <a:r>
+              <a:rPr lang="en-US" sz="1220" dirty="0">
                 <a:solidFill>
                   <a:srgbClr val="17364A"/>
                 </a:solidFill>
@@ -16138,9 +16413,9 @@
                 <a:ea typeface="Aptos" pitchFamily="34" charset="-122"/>
                 <a:cs typeface="Aptos" pitchFamily="34" charset="-120"/>
               </a:rPr>
-              <a:t>It may define a very low appetite for unsupervised public-facing advice, automated.</a:t>
-            </a:r>
-            <a:endParaRPr lang="en-US" sz="1380" dirty="0"/>
+              <a:t>It may define a very low appetite for unsupervised public-facing.</a:t>
+            </a:r>
+            <a:endParaRPr lang="en-US" sz="1220" dirty="0"/>
           </a:p>
         </p:txBody>
       </p:sp>
@@ -16218,17 +16493,17 @@
         </p:nvSpPr>
         <p:spPr>
           <a:xfrm>
-            <a:off x="7799832" y="5001768"/>
-            <a:ext cx="3145536" cy="502920"/>
-          </a:xfrm>
-          <a:prstGeom prst="rect">
-            <a:avLst/>
-          </a:prstGeom>
-          <a:noFill/>
-          <a:ln/>
-        </p:spPr>
-        <p:txBody>
-          <a:bodyPr wrap="square" lIns="0" tIns="0" rIns="0" bIns="0" rtlCol="0" anchor="t">
+            <a:off x="7799832" y="4974336"/>
+            <a:ext cx="3145536" cy="576072"/>
+          </a:xfrm>
+          <a:prstGeom prst="rect">
+            <a:avLst/>
+          </a:prstGeom>
+          <a:noFill/>
+          <a:ln/>
+        </p:spPr>
+        <p:txBody>
+          <a:bodyPr wrap="square" lIns="254" tIns="254" rIns="254" bIns="254" rtlCol="0" anchor="t">
             <a:normAutofit/>
           </a:bodyPr>
           <a:lstStyle/>
@@ -16237,7 +16512,7 @@
               <a:buNone/>
             </a:pPr>
             <a:r>
-              <a:rPr lang="en-US" sz="1550" dirty="0">
+              <a:rPr lang="en-US" sz="1320" dirty="0">
                 <a:solidFill>
                   <a:srgbClr val="17364A"/>
                 </a:solidFill>
@@ -16245,9 +16520,9 @@
                 <a:ea typeface="Aptos" pitchFamily="34" charset="-122"/>
                 <a:cs typeface="Aptos" pitchFamily="34" charset="-120"/>
               </a:rPr>
-              <a:t>Identify what could go wrong, who could be affected, what safeguards are needed, and what evidence should be reviewed before use expands.</a:t>
-            </a:r>
-            <a:endParaRPr lang="en-US" sz="1550" dirty="0"/>
+              <a:t>Identify what could go wrong, who could be affected, what safeguards are needed, and what evidence should be reviewed.</a:t>
+            </a:r>
+            <a:endParaRPr lang="en-US" sz="1320" dirty="0"/>
           </a:p>
         </p:txBody>
       </p:sp>

--- a/downloads/presentations/modules/gov-410.pptx
+++ b/downloads/presentations/modules/gov-410.pptx
@@ -3319,11 +3319,11 @@
         <p:spPr>
           <a:xfrm>
             <a:off x="7635240" y="1325880"/>
-            <a:ext cx="3474720" cy="1325880"/>
+            <a:ext cx="3474720" cy="1207008"/>
           </a:xfrm>
           <a:prstGeom prst="roundRect">
             <a:avLst>
-              <a:gd name="adj" fmla="val 8276"/>
+              <a:gd name="adj" fmla="val 9091"/>
             </a:avLst>
           </a:prstGeom>
           <a:solidFill>
@@ -3385,7 +3385,7 @@
         <p:spPr>
           <a:xfrm>
             <a:off x="7799832" y="1801368"/>
-            <a:ext cx="3145536" cy="758952"/>
+            <a:ext cx="3145536" cy="640080"/>
           </a:xfrm>
           <a:prstGeom prst="rect">
             <a:avLst/>
@@ -3425,12 +3425,12 @@
         </p:nvSpPr>
         <p:spPr>
           <a:xfrm>
-            <a:off x="7635240" y="2788920"/>
-            <a:ext cx="3474720" cy="1536192"/>
+            <a:off x="7635240" y="2670048"/>
+            <a:ext cx="3474720" cy="1377086"/>
           </a:xfrm>
           <a:prstGeom prst="roundRect">
             <a:avLst>
-              <a:gd name="adj" fmla="val 7143"/>
+              <a:gd name="adj" fmla="val 7968"/>
             </a:avLst>
           </a:prstGeom>
           <a:solidFill>
@@ -3452,7 +3452,7 @@
         </p:nvSpPr>
         <p:spPr>
           <a:xfrm>
-            <a:off x="7799832" y="2935224"/>
+            <a:off x="7799832" y="2816352"/>
             <a:ext cx="3145536" cy="256032"/>
           </a:xfrm>
           <a:prstGeom prst="rect">
@@ -3491,8 +3491,8 @@
         </p:nvSpPr>
         <p:spPr>
           <a:xfrm>
-            <a:off x="7818120" y="3300984"/>
-            <a:ext cx="3090672" cy="877824"/>
+            <a:off x="7818120" y="3182112"/>
+            <a:ext cx="3090672" cy="718718"/>
           </a:xfrm>
           <a:prstGeom prst="rect">
             <a:avLst/>
@@ -3566,12 +3566,12 @@
         </p:nvSpPr>
         <p:spPr>
           <a:xfrm>
-            <a:off x="7635240" y="4498848"/>
-            <a:ext cx="3474720" cy="1143000"/>
+            <a:off x="7635240" y="4184294"/>
+            <a:ext cx="3474720" cy="1466698"/>
           </a:xfrm>
           <a:prstGeom prst="roundRect">
             <a:avLst>
-              <a:gd name="adj" fmla="val 9600"/>
+              <a:gd name="adj" fmla="val 7481"/>
             </a:avLst>
           </a:prstGeom>
           <a:solidFill>
@@ -3593,7 +3593,7 @@
         </p:nvSpPr>
         <p:spPr>
           <a:xfrm>
-            <a:off x="7799832" y="4645152"/>
+            <a:off x="7799832" y="4330598"/>
             <a:ext cx="3145536" cy="256032"/>
           </a:xfrm>
           <a:prstGeom prst="rect">
@@ -3632,8 +3632,8 @@
         </p:nvSpPr>
         <p:spPr>
           <a:xfrm>
-            <a:off x="7799832" y="4974336"/>
-            <a:ext cx="3145536" cy="576072"/>
+            <a:off x="7799832" y="4659782"/>
+            <a:ext cx="3145536" cy="899770"/>
           </a:xfrm>
           <a:prstGeom prst="rect">
             <a:avLst/>
@@ -3659,7 +3659,7 @@
                 <a:ea typeface="Aptos" pitchFamily="34" charset="-122"/>
                 <a:cs typeface="Aptos" pitchFamily="34" charset="-120"/>
               </a:rPr>
-              <a:t>Translate this concept into clear decision rights, review steps, documentation expectations, and escalation paths before.</a:t>
+              <a:t>Translate this concept into clear decision rights, review steps, documentation expectations, and escalation paths before an AI-supported workflow is approved.</a:t>
             </a:r>
             <a:endParaRPr lang="en-US" sz="1320" dirty="0"/>
           </a:p>
@@ -4028,11 +4028,11 @@
         <p:spPr>
           <a:xfrm>
             <a:off x="7635240" y="1325880"/>
-            <a:ext cx="3474720" cy="1325880"/>
+            <a:ext cx="3474720" cy="1207008"/>
           </a:xfrm>
           <a:prstGeom prst="roundRect">
             <a:avLst>
-              <a:gd name="adj" fmla="val 8276"/>
+              <a:gd name="adj" fmla="val 9091"/>
             </a:avLst>
           </a:prstGeom>
           <a:solidFill>
@@ -4094,7 +4094,7 @@
         <p:spPr>
           <a:xfrm>
             <a:off x="7799832" y="1801368"/>
-            <a:ext cx="3145536" cy="758952"/>
+            <a:ext cx="3145536" cy="640080"/>
           </a:xfrm>
           <a:prstGeom prst="rect">
             <a:avLst/>
@@ -4134,7 +4134,7 @@
         </p:nvSpPr>
         <p:spPr>
           <a:xfrm>
-            <a:off x="7635240" y="2788920"/>
+            <a:off x="7635240" y="2670048"/>
             <a:ext cx="3474720" cy="1536192"/>
           </a:xfrm>
           <a:prstGeom prst="roundRect">
@@ -4161,7 +4161,7 @@
         </p:nvSpPr>
         <p:spPr>
           <a:xfrm>
-            <a:off x="7799832" y="2935224"/>
+            <a:off x="7799832" y="2816352"/>
             <a:ext cx="3145536" cy="256032"/>
           </a:xfrm>
           <a:prstGeom prst="rect">
@@ -4200,7 +4200,7 @@
         </p:nvSpPr>
         <p:spPr>
           <a:xfrm>
-            <a:off x="7818120" y="3300984"/>
+            <a:off x="7818120" y="3182112"/>
             <a:ext cx="3090672" cy="877824"/>
           </a:xfrm>
           <a:prstGeom prst="rect">
@@ -4275,12 +4275,12 @@
         </p:nvSpPr>
         <p:spPr>
           <a:xfrm>
-            <a:off x="7635240" y="4498848"/>
-            <a:ext cx="3474720" cy="1143000"/>
+            <a:off x="7635240" y="4343400"/>
+            <a:ext cx="3474720" cy="1255471"/>
           </a:xfrm>
           <a:prstGeom prst="roundRect">
             <a:avLst>
-              <a:gd name="adj" fmla="val 9600"/>
+              <a:gd name="adj" fmla="val 8740"/>
             </a:avLst>
           </a:prstGeom>
           <a:solidFill>
@@ -4302,7 +4302,7 @@
         </p:nvSpPr>
         <p:spPr>
           <a:xfrm>
-            <a:off x="7799832" y="4645152"/>
+            <a:off x="7799832" y="4489704"/>
             <a:ext cx="3145536" cy="256032"/>
           </a:xfrm>
           <a:prstGeom prst="rect">
@@ -4341,8 +4341,8 @@
         </p:nvSpPr>
         <p:spPr>
           <a:xfrm>
-            <a:off x="7799832" y="4974336"/>
-            <a:ext cx="3145536" cy="576072"/>
+            <a:off x="7799832" y="4818888"/>
+            <a:ext cx="3145536" cy="688543"/>
           </a:xfrm>
           <a:prstGeom prst="rect">
             <a:avLst/>
@@ -4368,7 +4368,7 @@
                 <a:ea typeface="Aptos" pitchFamily="34" charset="-122"/>
                 <a:cs typeface="Aptos" pitchFamily="34" charset="-120"/>
               </a:rPr>
-              <a:t>Identify what could go wrong, who could be affected, what safeguards are needed, and what evidence should be reviewed.</a:t>
+              <a:t>Identify what could go wrong, who could be affected, what safeguards are needed, and what evidence should be reviewed before use.</a:t>
             </a:r>
             <a:endParaRPr lang="en-US" sz="1320" dirty="0"/>
           </a:p>
@@ -4737,11 +4737,11 @@
         <p:spPr>
           <a:xfrm>
             <a:off x="7635240" y="1325880"/>
-            <a:ext cx="3474720" cy="1325880"/>
+            <a:ext cx="3474720" cy="1207008"/>
           </a:xfrm>
           <a:prstGeom prst="roundRect">
             <a:avLst>
-              <a:gd name="adj" fmla="val 8276"/>
+              <a:gd name="adj" fmla="val 9091"/>
             </a:avLst>
           </a:prstGeom>
           <a:solidFill>
@@ -4803,7 +4803,7 @@
         <p:spPr>
           <a:xfrm>
             <a:off x="7799832" y="1801368"/>
-            <a:ext cx="3145536" cy="758952"/>
+            <a:ext cx="3145536" cy="640080"/>
           </a:xfrm>
           <a:prstGeom prst="rect">
             <a:avLst/>
@@ -4843,7 +4843,7 @@
         </p:nvSpPr>
         <p:spPr>
           <a:xfrm>
-            <a:off x="7635240" y="2788920"/>
+            <a:off x="7635240" y="2670048"/>
             <a:ext cx="3474720" cy="1536192"/>
           </a:xfrm>
           <a:prstGeom prst="roundRect">
@@ -4870,7 +4870,7 @@
         </p:nvSpPr>
         <p:spPr>
           <a:xfrm>
-            <a:off x="7799832" y="2935224"/>
+            <a:off x="7799832" y="2816352"/>
             <a:ext cx="3145536" cy="256032"/>
           </a:xfrm>
           <a:prstGeom prst="rect">
@@ -4909,7 +4909,7 @@
         </p:nvSpPr>
         <p:spPr>
           <a:xfrm>
-            <a:off x="7818120" y="3300984"/>
+            <a:off x="7818120" y="3182112"/>
             <a:ext cx="3090672" cy="877824"/>
           </a:xfrm>
           <a:prstGeom prst="rect">
@@ -4967,12 +4967,12 @@
         </p:nvSpPr>
         <p:spPr>
           <a:xfrm>
-            <a:off x="7635240" y="4498848"/>
-            <a:ext cx="3474720" cy="1143000"/>
+            <a:off x="7635240" y="4343400"/>
+            <a:ext cx="3474720" cy="1255471"/>
           </a:xfrm>
           <a:prstGeom prst="roundRect">
             <a:avLst>
-              <a:gd name="adj" fmla="val 9600"/>
+              <a:gd name="adj" fmla="val 8740"/>
             </a:avLst>
           </a:prstGeom>
           <a:solidFill>
@@ -4994,7 +4994,7 @@
         </p:nvSpPr>
         <p:spPr>
           <a:xfrm>
-            <a:off x="7799832" y="4645152"/>
+            <a:off x="7799832" y="4489704"/>
             <a:ext cx="3145536" cy="256032"/>
           </a:xfrm>
           <a:prstGeom prst="rect">
@@ -5033,8 +5033,8 @@
         </p:nvSpPr>
         <p:spPr>
           <a:xfrm>
-            <a:off x="7799832" y="4974336"/>
-            <a:ext cx="3145536" cy="576072"/>
+            <a:off x="7799832" y="4818888"/>
+            <a:ext cx="3145536" cy="688543"/>
           </a:xfrm>
           <a:prstGeom prst="rect">
             <a:avLst/>
@@ -5060,7 +5060,7 @@
                 <a:ea typeface="Aptos" pitchFamily="34" charset="-122"/>
                 <a:cs typeface="Aptos" pitchFamily="34" charset="-120"/>
               </a:rPr>
-              <a:t>Identify what could go wrong, who could be affected, what safeguards are needed, and what evidence should be reviewed.</a:t>
+              <a:t>Identify what could go wrong, who could be affected, what safeguards are needed, and what evidence should be reviewed before use.</a:t>
             </a:r>
             <a:endParaRPr lang="en-US" sz="1320" dirty="0"/>
           </a:p>
@@ -5429,11 +5429,11 @@
         <p:spPr>
           <a:xfrm>
             <a:off x="7635240" y="1325880"/>
-            <a:ext cx="3474720" cy="1325880"/>
+            <a:ext cx="3474720" cy="1255471"/>
           </a:xfrm>
           <a:prstGeom prst="roundRect">
             <a:avLst>
-              <a:gd name="adj" fmla="val 8276"/>
+              <a:gd name="adj" fmla="val 8740"/>
             </a:avLst>
           </a:prstGeom>
           <a:solidFill>
@@ -5495,7 +5495,7 @@
         <p:spPr>
           <a:xfrm>
             <a:off x="7799832" y="1801368"/>
-            <a:ext cx="3145536" cy="758952"/>
+            <a:ext cx="3145536" cy="688543"/>
           </a:xfrm>
           <a:prstGeom prst="rect">
             <a:avLst/>
@@ -5535,7 +5535,7 @@
         </p:nvSpPr>
         <p:spPr>
           <a:xfrm>
-            <a:off x="7635240" y="2788920"/>
+            <a:off x="7635240" y="2718511"/>
             <a:ext cx="3474720" cy="1536192"/>
           </a:xfrm>
           <a:prstGeom prst="roundRect">
@@ -5562,7 +5562,7 @@
         </p:nvSpPr>
         <p:spPr>
           <a:xfrm>
-            <a:off x="7799832" y="2935224"/>
+            <a:off x="7799832" y="2864815"/>
             <a:ext cx="3145536" cy="256032"/>
           </a:xfrm>
           <a:prstGeom prst="rect">
@@ -5601,7 +5601,7 @@
         </p:nvSpPr>
         <p:spPr>
           <a:xfrm>
-            <a:off x="7818120" y="3300984"/>
+            <a:off x="7818120" y="3230575"/>
             <a:ext cx="3090672" cy="877824"/>
           </a:xfrm>
           <a:prstGeom prst="rect">
@@ -5676,12 +5676,12 @@
         </p:nvSpPr>
         <p:spPr>
           <a:xfrm>
-            <a:off x="7635240" y="4498848"/>
-            <a:ext cx="3474720" cy="1143000"/>
+            <a:off x="7635240" y="4391863"/>
+            <a:ext cx="3474720" cy="1255471"/>
           </a:xfrm>
           <a:prstGeom prst="roundRect">
             <a:avLst>
-              <a:gd name="adj" fmla="val 9600"/>
+              <a:gd name="adj" fmla="val 8740"/>
             </a:avLst>
           </a:prstGeom>
           <a:solidFill>
@@ -5703,7 +5703,7 @@
         </p:nvSpPr>
         <p:spPr>
           <a:xfrm>
-            <a:off x="7799832" y="4645152"/>
+            <a:off x="7799832" y="4538167"/>
             <a:ext cx="3145536" cy="256032"/>
           </a:xfrm>
           <a:prstGeom prst="rect">
@@ -5742,8 +5742,8 @@
         </p:nvSpPr>
         <p:spPr>
           <a:xfrm>
-            <a:off x="7799832" y="4974336"/>
-            <a:ext cx="3145536" cy="576072"/>
+            <a:off x="7799832" y="4867351"/>
+            <a:ext cx="3145536" cy="688543"/>
           </a:xfrm>
           <a:prstGeom prst="rect">
             <a:avLst/>
@@ -5769,7 +5769,7 @@
                 <a:ea typeface="Aptos" pitchFamily="34" charset="-122"/>
                 <a:cs typeface="Aptos" pitchFamily="34" charset="-120"/>
               </a:rPr>
-              <a:t>Identify what could go wrong, who could be affected, what safeguards are needed, and what evidence should be reviewed.</a:t>
+              <a:t>Identify what could go wrong, who could be affected, what safeguards are needed, and what evidence should be reviewed before use.</a:t>
             </a:r>
             <a:endParaRPr lang="en-US" sz="1320" dirty="0"/>
           </a:p>
@@ -6121,11 +6121,11 @@
         <p:spPr>
           <a:xfrm>
             <a:off x="7635240" y="1325880"/>
-            <a:ext cx="3474720" cy="1325880"/>
+            <a:ext cx="3474720" cy="1207008"/>
           </a:xfrm>
           <a:prstGeom prst="roundRect">
             <a:avLst>
-              <a:gd name="adj" fmla="val 8276"/>
+              <a:gd name="adj" fmla="val 9091"/>
             </a:avLst>
           </a:prstGeom>
           <a:solidFill>
@@ -6187,7 +6187,7 @@
         <p:spPr>
           <a:xfrm>
             <a:off x="7799832" y="1801368"/>
-            <a:ext cx="3145536" cy="758952"/>
+            <a:ext cx="3145536" cy="640080"/>
           </a:xfrm>
           <a:prstGeom prst="rect">
             <a:avLst/>
@@ -6213,7 +6213,7 @@
                 <a:ea typeface="Aptos" pitchFamily="34" charset="-122"/>
                 <a:cs typeface="Aptos" pitchFamily="34" charset="-120"/>
               </a:rPr>
-              <a:t>Which staff, partners, or communities would be affected if this issue were handled poorly?</a:t>
+              <a:t>Which staff, partners, or communities would be affected if this issue were handled.</a:t>
             </a:r>
             <a:endParaRPr lang="en-US" sz="1320" dirty="0"/>
           </a:p>
@@ -6227,7 +6227,7 @@
         </p:nvSpPr>
         <p:spPr>
           <a:xfrm>
-            <a:off x="7635240" y="2788920"/>
+            <a:off x="7635240" y="2670048"/>
             <a:ext cx="3474720" cy="1536192"/>
           </a:xfrm>
           <a:prstGeom prst="roundRect">
@@ -6254,7 +6254,7 @@
         </p:nvSpPr>
         <p:spPr>
           <a:xfrm>
-            <a:off x="7799832" y="2935224"/>
+            <a:off x="7799832" y="2816352"/>
             <a:ext cx="3145536" cy="256032"/>
           </a:xfrm>
           <a:prstGeom prst="rect">
@@ -6293,7 +6293,7 @@
         </p:nvSpPr>
         <p:spPr>
           <a:xfrm>
-            <a:off x="7818120" y="3300984"/>
+            <a:off x="7818120" y="3182112"/>
             <a:ext cx="3090672" cy="877824"/>
           </a:xfrm>
           <a:prstGeom prst="rect">
@@ -6351,12 +6351,12 @@
         </p:nvSpPr>
         <p:spPr>
           <a:xfrm>
-            <a:off x="7635240" y="4498848"/>
-            <a:ext cx="3474720" cy="1143000"/>
+            <a:off x="7635240" y="4343400"/>
+            <a:ext cx="3474720" cy="1255471"/>
           </a:xfrm>
           <a:prstGeom prst="roundRect">
             <a:avLst>
-              <a:gd name="adj" fmla="val 9600"/>
+              <a:gd name="adj" fmla="val 8740"/>
             </a:avLst>
           </a:prstGeom>
           <a:solidFill>
@@ -6378,7 +6378,7 @@
         </p:nvSpPr>
         <p:spPr>
           <a:xfrm>
-            <a:off x="7799832" y="4645152"/>
+            <a:off x="7799832" y="4489704"/>
             <a:ext cx="3145536" cy="256032"/>
           </a:xfrm>
           <a:prstGeom prst="rect">
@@ -6417,8 +6417,8 @@
         </p:nvSpPr>
         <p:spPr>
           <a:xfrm>
-            <a:off x="7799832" y="4974336"/>
-            <a:ext cx="3145536" cy="576072"/>
+            <a:off x="7799832" y="4818888"/>
+            <a:ext cx="3145536" cy="688543"/>
           </a:xfrm>
           <a:prstGeom prst="rect">
             <a:avLst/>
@@ -6444,7 +6444,7 @@
                 <a:ea typeface="Aptos" pitchFamily="34" charset="-122"/>
                 <a:cs typeface="Aptos" pitchFamily="34" charset="-120"/>
               </a:rPr>
-              <a:t>Identify what could go wrong, who could be affected, what safeguards are needed, and what evidence should be reviewed.</a:t>
+              <a:t>Identify what could go wrong, who could be affected, what safeguards are needed, and what evidence should be reviewed before use.</a:t>
             </a:r>
             <a:endParaRPr lang="en-US" sz="1320" dirty="0"/>
           </a:p>
@@ -6779,11 +6779,11 @@
         <p:spPr>
           <a:xfrm>
             <a:off x="7635240" y="1325880"/>
-            <a:ext cx="3474720" cy="1325880"/>
+            <a:ext cx="3474720" cy="1255471"/>
           </a:xfrm>
           <a:prstGeom prst="roundRect">
             <a:avLst>
-              <a:gd name="adj" fmla="val 8276"/>
+              <a:gd name="adj" fmla="val 8740"/>
             </a:avLst>
           </a:prstGeom>
           <a:solidFill>
@@ -6845,7 +6845,7 @@
         <p:spPr>
           <a:xfrm>
             <a:off x="7799832" y="1801368"/>
-            <a:ext cx="3145536" cy="758952"/>
+            <a:ext cx="3145536" cy="688543"/>
           </a:xfrm>
           <a:prstGeom prst="rect">
             <a:avLst/>
@@ -6885,12 +6885,12 @@
         </p:nvSpPr>
         <p:spPr>
           <a:xfrm>
-            <a:off x="7635240" y="2788920"/>
-            <a:ext cx="3474720" cy="1536192"/>
+            <a:off x="7635240" y="2718511"/>
+            <a:ext cx="3474720" cy="1328623"/>
           </a:xfrm>
           <a:prstGeom prst="roundRect">
             <a:avLst>
-              <a:gd name="adj" fmla="val 7143"/>
+              <a:gd name="adj" fmla="val 8259"/>
             </a:avLst>
           </a:prstGeom>
           <a:solidFill>
@@ -6912,7 +6912,7 @@
         </p:nvSpPr>
         <p:spPr>
           <a:xfrm>
-            <a:off x="7799832" y="2935224"/>
+            <a:off x="7799832" y="2864815"/>
             <a:ext cx="3145536" cy="256032"/>
           </a:xfrm>
           <a:prstGeom prst="rect">
@@ -6951,8 +6951,8 @@
         </p:nvSpPr>
         <p:spPr>
           <a:xfrm>
-            <a:off x="7818120" y="3300984"/>
-            <a:ext cx="3090672" cy="877824"/>
+            <a:off x="7818120" y="3230575"/>
+            <a:ext cx="3090672" cy="670255"/>
           </a:xfrm>
           <a:prstGeom prst="rect">
             <a:avLst/>
@@ -6992,12 +6992,12 @@
         </p:nvSpPr>
         <p:spPr>
           <a:xfrm>
-            <a:off x="7635240" y="4498848"/>
-            <a:ext cx="3474720" cy="1143000"/>
+            <a:off x="7635240" y="4184294"/>
+            <a:ext cx="3474720" cy="1466698"/>
           </a:xfrm>
           <a:prstGeom prst="roundRect">
             <a:avLst>
-              <a:gd name="adj" fmla="val 9600"/>
+              <a:gd name="adj" fmla="val 7481"/>
             </a:avLst>
           </a:prstGeom>
           <a:solidFill>
@@ -7019,7 +7019,7 @@
         </p:nvSpPr>
         <p:spPr>
           <a:xfrm>
-            <a:off x="7799832" y="4645152"/>
+            <a:off x="7799832" y="4330598"/>
             <a:ext cx="3145536" cy="256032"/>
           </a:xfrm>
           <a:prstGeom prst="rect">
@@ -7058,8 +7058,8 @@
         </p:nvSpPr>
         <p:spPr>
           <a:xfrm>
-            <a:off x="7799832" y="4974336"/>
-            <a:ext cx="3145536" cy="576072"/>
+            <a:off x="7799832" y="4659782"/>
+            <a:ext cx="3145536" cy="899770"/>
           </a:xfrm>
           <a:prstGeom prst="rect">
             <a:avLst/>
@@ -7085,7 +7085,7 @@
                 <a:ea typeface="Aptos" pitchFamily="34" charset="-122"/>
                 <a:cs typeface="Aptos" pitchFamily="34" charset="-120"/>
               </a:rPr>
-              <a:t>Use the assignment to test whether you can explain the concept, apply it to a realistic public health situation, and.</a:t>
+              <a:t>Use the assignment to test whether you can explain the concept, apply it to a realistic public health situation, and identify what would need review before the work moves forward.</a:t>
             </a:r>
             <a:endParaRPr lang="en-US" sz="1320" dirty="0"/>
           </a:p>
@@ -7454,11 +7454,11 @@
         <p:spPr>
           <a:xfrm>
             <a:off x="7635240" y="1325880"/>
-            <a:ext cx="3474720" cy="1325880"/>
+            <a:ext cx="3474720" cy="1207008"/>
           </a:xfrm>
           <a:prstGeom prst="roundRect">
             <a:avLst>
-              <a:gd name="adj" fmla="val 8276"/>
+              <a:gd name="adj" fmla="val 9091"/>
             </a:avLst>
           </a:prstGeom>
           <a:solidFill>
@@ -7520,7 +7520,7 @@
         <p:spPr>
           <a:xfrm>
             <a:off x="7799832" y="1801368"/>
-            <a:ext cx="3145536" cy="758952"/>
+            <a:ext cx="3145536" cy="640080"/>
           </a:xfrm>
           <a:prstGeom prst="rect">
             <a:avLst/>
@@ -7560,7 +7560,7 @@
         </p:nvSpPr>
         <p:spPr>
           <a:xfrm>
-            <a:off x="7635240" y="2788920"/>
+            <a:off x="7635240" y="2670048"/>
             <a:ext cx="3474720" cy="1536192"/>
           </a:xfrm>
           <a:prstGeom prst="roundRect">
@@ -7587,7 +7587,7 @@
         </p:nvSpPr>
         <p:spPr>
           <a:xfrm>
-            <a:off x="7799832" y="2935224"/>
+            <a:off x="7799832" y="2816352"/>
             <a:ext cx="3145536" cy="256032"/>
           </a:xfrm>
           <a:prstGeom prst="rect">
@@ -7626,7 +7626,7 @@
         </p:nvSpPr>
         <p:spPr>
           <a:xfrm>
-            <a:off x="7818120" y="3300984"/>
+            <a:off x="7818120" y="3182112"/>
             <a:ext cx="3090672" cy="877824"/>
           </a:xfrm>
           <a:prstGeom prst="rect">
@@ -7684,12 +7684,12 @@
         </p:nvSpPr>
         <p:spPr>
           <a:xfrm>
-            <a:off x="7635240" y="4498848"/>
-            <a:ext cx="3474720" cy="1143000"/>
+            <a:off x="7635240" y="4343400"/>
+            <a:ext cx="3474720" cy="1255471"/>
           </a:xfrm>
           <a:prstGeom prst="roundRect">
             <a:avLst>
-              <a:gd name="adj" fmla="val 9600"/>
+              <a:gd name="adj" fmla="val 8740"/>
             </a:avLst>
           </a:prstGeom>
           <a:solidFill>
@@ -7711,7 +7711,7 @@
         </p:nvSpPr>
         <p:spPr>
           <a:xfrm>
-            <a:off x="7799832" y="4645152"/>
+            <a:off x="7799832" y="4489704"/>
             <a:ext cx="3145536" cy="256032"/>
           </a:xfrm>
           <a:prstGeom prst="rect">
@@ -7750,8 +7750,8 @@
         </p:nvSpPr>
         <p:spPr>
           <a:xfrm>
-            <a:off x="7799832" y="4974336"/>
-            <a:ext cx="3145536" cy="576072"/>
+            <a:off x="7799832" y="4818888"/>
+            <a:ext cx="3145536" cy="688543"/>
           </a:xfrm>
           <a:prstGeom prst="rect">
             <a:avLst/>
@@ -7777,7 +7777,7 @@
                 <a:ea typeface="Aptos" pitchFamily="34" charset="-122"/>
                 <a:cs typeface="Aptos" pitchFamily="34" charset="-120"/>
               </a:rPr>
-              <a:t>Identify what could go wrong, who could be affected, what safeguards are needed, and what evidence should be reviewed.</a:t>
+              <a:t>Identify what could go wrong, who could be affected, what safeguards are needed, and what evidence should be reviewed before use.</a:t>
             </a:r>
             <a:endParaRPr lang="en-US" sz="1320" dirty="0"/>
           </a:p>
@@ -8112,11 +8112,11 @@
         <p:spPr>
           <a:xfrm>
             <a:off x="7635240" y="1325880"/>
-            <a:ext cx="3474720" cy="1325880"/>
+            <a:ext cx="3474720" cy="1255471"/>
           </a:xfrm>
           <a:prstGeom prst="roundRect">
             <a:avLst>
-              <a:gd name="adj" fmla="val 8276"/>
+              <a:gd name="adj" fmla="val 8740"/>
             </a:avLst>
           </a:prstGeom>
           <a:solidFill>
@@ -8178,7 +8178,7 @@
         <p:spPr>
           <a:xfrm>
             <a:off x="7799832" y="1801368"/>
-            <a:ext cx="3145536" cy="758952"/>
+            <a:ext cx="3145536" cy="688543"/>
           </a:xfrm>
           <a:prstGeom prst="rect">
             <a:avLst/>
@@ -8218,7 +8218,7 @@
         </p:nvSpPr>
         <p:spPr>
           <a:xfrm>
-            <a:off x="7635240" y="2788920"/>
+            <a:off x="7635240" y="2718511"/>
             <a:ext cx="3474720" cy="1536192"/>
           </a:xfrm>
           <a:prstGeom prst="roundRect">
@@ -8245,7 +8245,7 @@
         </p:nvSpPr>
         <p:spPr>
           <a:xfrm>
-            <a:off x="7799832" y="2935224"/>
+            <a:off x="7799832" y="2864815"/>
             <a:ext cx="3145536" cy="256032"/>
           </a:xfrm>
           <a:prstGeom prst="rect">
@@ -8284,7 +8284,7 @@
         </p:nvSpPr>
         <p:spPr>
           <a:xfrm>
-            <a:off x="7818120" y="3300984"/>
+            <a:off x="7818120" y="3230575"/>
             <a:ext cx="3090672" cy="877824"/>
           </a:xfrm>
           <a:prstGeom prst="rect">
@@ -8325,12 +8325,12 @@
         </p:nvSpPr>
         <p:spPr>
           <a:xfrm>
-            <a:off x="7635240" y="4498848"/>
-            <a:ext cx="3474720" cy="1143000"/>
+            <a:off x="7635240" y="4391863"/>
+            <a:ext cx="3474720" cy="1255471"/>
           </a:xfrm>
           <a:prstGeom prst="roundRect">
             <a:avLst>
-              <a:gd name="adj" fmla="val 9600"/>
+              <a:gd name="adj" fmla="val 8740"/>
             </a:avLst>
           </a:prstGeom>
           <a:solidFill>
@@ -8352,7 +8352,7 @@
         </p:nvSpPr>
         <p:spPr>
           <a:xfrm>
-            <a:off x="7799832" y="4645152"/>
+            <a:off x="7799832" y="4538167"/>
             <a:ext cx="3145536" cy="256032"/>
           </a:xfrm>
           <a:prstGeom prst="rect">
@@ -8391,8 +8391,8 @@
         </p:nvSpPr>
         <p:spPr>
           <a:xfrm>
-            <a:off x="7799832" y="4974336"/>
-            <a:ext cx="3145536" cy="576072"/>
+            <a:off x="7799832" y="4867351"/>
+            <a:ext cx="3145536" cy="688543"/>
           </a:xfrm>
           <a:prstGeom prst="rect">
             <a:avLst/>
@@ -8418,7 +8418,7 @@
                 <a:ea typeface="Aptos" pitchFamily="34" charset="-122"/>
                 <a:cs typeface="Aptos" pitchFamily="34" charset="-120"/>
               </a:rPr>
-              <a:t>Identify what could go wrong, who could be affected, what safeguards are needed, and what evidence should be reviewed.</a:t>
+              <a:t>Identify what could go wrong, who could be affected, what safeguards are needed, and what evidence should be reviewed before use.</a:t>
             </a:r>
             <a:endParaRPr lang="en-US" sz="1320" dirty="0"/>
           </a:p>
@@ -8753,11 +8753,11 @@
         <p:spPr>
           <a:xfrm>
             <a:off x="7635240" y="1325880"/>
-            <a:ext cx="3474720" cy="1325880"/>
+            <a:ext cx="3474720" cy="1255471"/>
           </a:xfrm>
           <a:prstGeom prst="roundRect">
             <a:avLst>
-              <a:gd name="adj" fmla="val 8276"/>
+              <a:gd name="adj" fmla="val 8740"/>
             </a:avLst>
           </a:prstGeom>
           <a:solidFill>
@@ -8819,7 +8819,7 @@
         <p:spPr>
           <a:xfrm>
             <a:off x="7799832" y="1801368"/>
-            <a:ext cx="3145536" cy="758952"/>
+            <a:ext cx="3145536" cy="688543"/>
           </a:xfrm>
           <a:prstGeom prst="rect">
             <a:avLst/>
@@ -8859,12 +8859,12 @@
         </p:nvSpPr>
         <p:spPr>
           <a:xfrm>
-            <a:off x="7635240" y="2788920"/>
-            <a:ext cx="3474720" cy="1536192"/>
+            <a:off x="7635240" y="2718511"/>
+            <a:ext cx="3474720" cy="1328623"/>
           </a:xfrm>
           <a:prstGeom prst="roundRect">
             <a:avLst>
-              <a:gd name="adj" fmla="val 7143"/>
+              <a:gd name="adj" fmla="val 8259"/>
             </a:avLst>
           </a:prstGeom>
           <a:solidFill>
@@ -8886,7 +8886,7 @@
         </p:nvSpPr>
         <p:spPr>
           <a:xfrm>
-            <a:off x="7799832" y="2935224"/>
+            <a:off x="7799832" y="2864815"/>
             <a:ext cx="3145536" cy="256032"/>
           </a:xfrm>
           <a:prstGeom prst="rect">
@@ -8925,8 +8925,8 @@
         </p:nvSpPr>
         <p:spPr>
           <a:xfrm>
-            <a:off x="7818120" y="3300984"/>
-            <a:ext cx="3090672" cy="877824"/>
+            <a:off x="7818120" y="3230575"/>
+            <a:ext cx="3090672" cy="670255"/>
           </a:xfrm>
           <a:prstGeom prst="rect">
             <a:avLst/>
@@ -8966,12 +8966,12 @@
         </p:nvSpPr>
         <p:spPr>
           <a:xfrm>
-            <a:off x="7635240" y="4498848"/>
-            <a:ext cx="3474720" cy="1143000"/>
+            <a:off x="7635240" y="4184294"/>
+            <a:ext cx="3474720" cy="1466698"/>
           </a:xfrm>
           <a:prstGeom prst="roundRect">
             <a:avLst>
-              <a:gd name="adj" fmla="val 9600"/>
+              <a:gd name="adj" fmla="val 7481"/>
             </a:avLst>
           </a:prstGeom>
           <a:solidFill>
@@ -8993,7 +8993,7 @@
         </p:nvSpPr>
         <p:spPr>
           <a:xfrm>
-            <a:off x="7799832" y="4645152"/>
+            <a:off x="7799832" y="4330598"/>
             <a:ext cx="3145536" cy="256032"/>
           </a:xfrm>
           <a:prstGeom prst="rect">
@@ -9032,8 +9032,8 @@
         </p:nvSpPr>
         <p:spPr>
           <a:xfrm>
-            <a:off x="7799832" y="4974336"/>
-            <a:ext cx="3145536" cy="576072"/>
+            <a:off x="7799832" y="4659782"/>
+            <a:ext cx="3145536" cy="899770"/>
           </a:xfrm>
           <a:prstGeom prst="rect">
             <a:avLst/>
@@ -9059,7 +9059,7 @@
                 <a:ea typeface="Aptos" pitchFamily="34" charset="-122"/>
                 <a:cs typeface="Aptos" pitchFamily="34" charset="-120"/>
               </a:rPr>
-              <a:t>Use the assignment to test whether you can explain the concept, apply it to a realistic public health situation, and.</a:t>
+              <a:t>Use the assignment to test whether you can explain the concept, apply it to a realistic public health situation, and identify what would need review before the work moves forward.</a:t>
             </a:r>
             <a:endParaRPr lang="en-US" sz="1320" dirty="0"/>
           </a:p>
@@ -9428,11 +9428,11 @@
         <p:spPr>
           <a:xfrm>
             <a:off x="7635240" y="1325880"/>
-            <a:ext cx="3474720" cy="1325880"/>
+            <a:ext cx="3474720" cy="1255471"/>
           </a:xfrm>
           <a:prstGeom prst="roundRect">
             <a:avLst>
-              <a:gd name="adj" fmla="val 8276"/>
+              <a:gd name="adj" fmla="val 8740"/>
             </a:avLst>
           </a:prstGeom>
           <a:solidFill>
@@ -9494,7 +9494,7 @@
         <p:spPr>
           <a:xfrm>
             <a:off x="7799832" y="1801368"/>
-            <a:ext cx="3145536" cy="758952"/>
+            <a:ext cx="3145536" cy="688543"/>
           </a:xfrm>
           <a:prstGeom prst="rect">
             <a:avLst/>
@@ -9534,12 +9534,12 @@
         </p:nvSpPr>
         <p:spPr>
           <a:xfrm>
-            <a:off x="7635240" y="2788920"/>
-            <a:ext cx="3474720" cy="1536192"/>
+            <a:off x="7635240" y="2718511"/>
+            <a:ext cx="3474720" cy="1328623"/>
           </a:xfrm>
           <a:prstGeom prst="roundRect">
             <a:avLst>
-              <a:gd name="adj" fmla="val 7143"/>
+              <a:gd name="adj" fmla="val 8259"/>
             </a:avLst>
           </a:prstGeom>
           <a:solidFill>
@@ -9561,7 +9561,7 @@
         </p:nvSpPr>
         <p:spPr>
           <a:xfrm>
-            <a:off x="7799832" y="2935224"/>
+            <a:off x="7799832" y="2864815"/>
             <a:ext cx="3145536" cy="256032"/>
           </a:xfrm>
           <a:prstGeom prst="rect">
@@ -9600,8 +9600,8 @@
         </p:nvSpPr>
         <p:spPr>
           <a:xfrm>
-            <a:off x="7818120" y="3300984"/>
-            <a:ext cx="3090672" cy="877824"/>
+            <a:off x="7818120" y="3230575"/>
+            <a:ext cx="3090672" cy="670255"/>
           </a:xfrm>
           <a:prstGeom prst="rect">
             <a:avLst/>
@@ -9675,12 +9675,12 @@
         </p:nvSpPr>
         <p:spPr>
           <a:xfrm>
-            <a:off x="7635240" y="4498848"/>
-            <a:ext cx="3474720" cy="1143000"/>
+            <a:off x="7635240" y="4184294"/>
+            <a:ext cx="3474720" cy="1466698"/>
           </a:xfrm>
           <a:prstGeom prst="roundRect">
             <a:avLst>
-              <a:gd name="adj" fmla="val 9600"/>
+              <a:gd name="adj" fmla="val 7481"/>
             </a:avLst>
           </a:prstGeom>
           <a:solidFill>
@@ -9702,7 +9702,7 @@
         </p:nvSpPr>
         <p:spPr>
           <a:xfrm>
-            <a:off x="7799832" y="4645152"/>
+            <a:off x="7799832" y="4330598"/>
             <a:ext cx="3145536" cy="256032"/>
           </a:xfrm>
           <a:prstGeom prst="rect">
@@ -9741,8 +9741,8 @@
         </p:nvSpPr>
         <p:spPr>
           <a:xfrm>
-            <a:off x="7799832" y="4974336"/>
-            <a:ext cx="3145536" cy="576072"/>
+            <a:off x="7799832" y="4659782"/>
+            <a:ext cx="3145536" cy="899770"/>
           </a:xfrm>
           <a:prstGeom prst="rect">
             <a:avLst/>
@@ -9768,7 +9768,7 @@
                 <a:ea typeface="Aptos" pitchFamily="34" charset="-122"/>
                 <a:cs typeface="Aptos" pitchFamily="34" charset="-120"/>
               </a:rPr>
-              <a:t>Use the assignment to test whether you can explain the concept, apply it to a realistic public health situation, and.</a:t>
+              <a:t>Use the assignment to test whether you can explain the concept, apply it to a realistic public health situation, and identify what would need review before the work moves forward.</a:t>
             </a:r>
             <a:endParaRPr lang="en-US" sz="1320" dirty="0"/>
           </a:p>
@@ -10739,11 +10739,11 @@
         <p:spPr>
           <a:xfrm>
             <a:off x="7635240" y="1325880"/>
-            <a:ext cx="3474720" cy="1325880"/>
+            <a:ext cx="3474720" cy="1207008"/>
           </a:xfrm>
           <a:prstGeom prst="roundRect">
             <a:avLst>
-              <a:gd name="adj" fmla="val 8276"/>
+              <a:gd name="adj" fmla="val 9091"/>
             </a:avLst>
           </a:prstGeom>
           <a:solidFill>
@@ -10805,7 +10805,7 @@
         <p:spPr>
           <a:xfrm>
             <a:off x="7799832" y="1801368"/>
-            <a:ext cx="3145536" cy="758952"/>
+            <a:ext cx="3145536" cy="640080"/>
           </a:xfrm>
           <a:prstGeom prst="rect">
             <a:avLst/>
@@ -10845,7 +10845,7 @@
         </p:nvSpPr>
         <p:spPr>
           <a:xfrm>
-            <a:off x="7635240" y="2788920"/>
+            <a:off x="7635240" y="2670048"/>
             <a:ext cx="3474720" cy="1536192"/>
           </a:xfrm>
           <a:prstGeom prst="roundRect">
@@ -10872,7 +10872,7 @@
         </p:nvSpPr>
         <p:spPr>
           <a:xfrm>
-            <a:off x="7799832" y="2935224"/>
+            <a:off x="7799832" y="2816352"/>
             <a:ext cx="3145536" cy="256032"/>
           </a:xfrm>
           <a:prstGeom prst="rect">
@@ -10911,7 +10911,7 @@
         </p:nvSpPr>
         <p:spPr>
           <a:xfrm>
-            <a:off x="7818120" y="3300984"/>
+            <a:off x="7818120" y="3182112"/>
             <a:ext cx="3090672" cy="877824"/>
           </a:xfrm>
           <a:prstGeom prst="rect">
@@ -10986,12 +10986,12 @@
         </p:nvSpPr>
         <p:spPr>
           <a:xfrm>
-            <a:off x="7635240" y="4498848"/>
-            <a:ext cx="3474720" cy="1143000"/>
+            <a:off x="7635240" y="4343400"/>
+            <a:ext cx="3474720" cy="1255471"/>
           </a:xfrm>
           <a:prstGeom prst="roundRect">
             <a:avLst>
-              <a:gd name="adj" fmla="val 9600"/>
+              <a:gd name="adj" fmla="val 8740"/>
             </a:avLst>
           </a:prstGeom>
           <a:solidFill>
@@ -11013,7 +11013,7 @@
         </p:nvSpPr>
         <p:spPr>
           <a:xfrm>
-            <a:off x="7799832" y="4645152"/>
+            <a:off x="7799832" y="4489704"/>
             <a:ext cx="3145536" cy="256032"/>
           </a:xfrm>
           <a:prstGeom prst="rect">
@@ -11052,8 +11052,8 @@
         </p:nvSpPr>
         <p:spPr>
           <a:xfrm>
-            <a:off x="7799832" y="4974336"/>
-            <a:ext cx="3145536" cy="576072"/>
+            <a:off x="7799832" y="4818888"/>
+            <a:ext cx="3145536" cy="688543"/>
           </a:xfrm>
           <a:prstGeom prst="rect">
             <a:avLst/>
@@ -11079,7 +11079,7 @@
                 <a:ea typeface="Aptos" pitchFamily="34" charset="-122"/>
                 <a:cs typeface="Aptos" pitchFamily="34" charset="-120"/>
               </a:rPr>
-              <a:t>Identify what could go wrong, who could be affected, what safeguards are needed, and what evidence should be reviewed.</a:t>
+              <a:t>Identify what could go wrong, who could be affected, what safeguards are needed, and what evidence should be reviewed before use.</a:t>
             </a:r>
             <a:endParaRPr lang="en-US" sz="1320" dirty="0"/>
           </a:p>
@@ -11431,11 +11431,11 @@
         <p:spPr>
           <a:xfrm>
             <a:off x="7635240" y="1325880"/>
-            <a:ext cx="3474720" cy="1325880"/>
+            <a:ext cx="3474720" cy="1255471"/>
           </a:xfrm>
           <a:prstGeom prst="roundRect">
             <a:avLst>
-              <a:gd name="adj" fmla="val 8276"/>
+              <a:gd name="adj" fmla="val 8740"/>
             </a:avLst>
           </a:prstGeom>
           <a:solidFill>
@@ -11497,7 +11497,7 @@
         <p:spPr>
           <a:xfrm>
             <a:off x="7799832" y="1801368"/>
-            <a:ext cx="3145536" cy="758952"/>
+            <a:ext cx="3145536" cy="688543"/>
           </a:xfrm>
           <a:prstGeom prst="rect">
             <a:avLst/>
@@ -11537,7 +11537,7 @@
         </p:nvSpPr>
         <p:spPr>
           <a:xfrm>
-            <a:off x="7635240" y="2788920"/>
+            <a:off x="7635240" y="2718511"/>
             <a:ext cx="3474720" cy="1536192"/>
           </a:xfrm>
           <a:prstGeom prst="roundRect">
@@ -11564,7 +11564,7 @@
         </p:nvSpPr>
         <p:spPr>
           <a:xfrm>
-            <a:off x="7799832" y="2935224"/>
+            <a:off x="7799832" y="2864815"/>
             <a:ext cx="3145536" cy="256032"/>
           </a:xfrm>
           <a:prstGeom prst="rect">
@@ -11603,7 +11603,7 @@
         </p:nvSpPr>
         <p:spPr>
           <a:xfrm>
-            <a:off x="7818120" y="3300984"/>
+            <a:off x="7818120" y="3230575"/>
             <a:ext cx="3090672" cy="877824"/>
           </a:xfrm>
           <a:prstGeom prst="rect">
@@ -11661,12 +11661,12 @@
         </p:nvSpPr>
         <p:spPr>
           <a:xfrm>
-            <a:off x="7635240" y="4498848"/>
-            <a:ext cx="3474720" cy="1143000"/>
+            <a:off x="7635240" y="4391863"/>
+            <a:ext cx="3474720" cy="1255471"/>
           </a:xfrm>
           <a:prstGeom prst="roundRect">
             <a:avLst>
-              <a:gd name="adj" fmla="val 9600"/>
+              <a:gd name="adj" fmla="val 8740"/>
             </a:avLst>
           </a:prstGeom>
           <a:solidFill>
@@ -11688,7 +11688,7 @@
         </p:nvSpPr>
         <p:spPr>
           <a:xfrm>
-            <a:off x="7799832" y="4645152"/>
+            <a:off x="7799832" y="4538167"/>
             <a:ext cx="3145536" cy="256032"/>
           </a:xfrm>
           <a:prstGeom prst="rect">
@@ -11727,8 +11727,8 @@
         </p:nvSpPr>
         <p:spPr>
           <a:xfrm>
-            <a:off x="7799832" y="4974336"/>
-            <a:ext cx="3145536" cy="576072"/>
+            <a:off x="7799832" y="4867351"/>
+            <a:ext cx="3145536" cy="688543"/>
           </a:xfrm>
           <a:prstGeom prst="rect">
             <a:avLst/>
@@ -11754,7 +11754,7 @@
                 <a:ea typeface="Aptos" pitchFamily="34" charset="-122"/>
                 <a:cs typeface="Aptos" pitchFamily="34" charset="-120"/>
               </a:rPr>
-              <a:t>Identify what could go wrong, who could be affected, what safeguards are needed, and what evidence should be reviewed.</a:t>
+              <a:t>Identify what could go wrong, who could be affected, what safeguards are needed, and what evidence should be reviewed before use.</a:t>
             </a:r>
             <a:endParaRPr lang="en-US" sz="1320" dirty="0"/>
           </a:p>
@@ -12232,7 +12232,7 @@
                 <a:ea typeface="Aptos" pitchFamily="34" charset="-122"/>
                 <a:cs typeface="Aptos" pitchFamily="34" charset="-120"/>
               </a:rPr>
-              <a:t>Use the related plays to identify decisions, participants, timing, approvals, and documentation needed for responsible.</a:t>
+              <a:t>Use the related plays to identify decisions, participants, timing, approvals, and documentation needed for responsible implementation.</a:t>
             </a:r>
             <a:endParaRPr lang="en-US" sz="1320" dirty="0"/>
           </a:p>
@@ -12851,7 +12851,7 @@
                 <a:ea typeface="Aptos" pitchFamily="34" charset="-122"/>
                 <a:cs typeface="Aptos" pitchFamily="34" charset="-120"/>
               </a:rPr>
-              <a:t>Use linked tools when your department needs a structured worksheet, template, checklist, review process, or.</a:t>
+              <a:t>Use linked tools when your department needs a structured worksheet, template, checklist, review process, or documentation artifact.</a:t>
             </a:r>
             <a:endParaRPr lang="en-US" sz="1320" dirty="0"/>
           </a:p>
@@ -13361,11 +13361,11 @@
         <p:spPr>
           <a:xfrm>
             <a:off x="7635240" y="1325880"/>
-            <a:ext cx="3474720" cy="1325880"/>
+            <a:ext cx="3474720" cy="1207008"/>
           </a:xfrm>
           <a:prstGeom prst="roundRect">
             <a:avLst>
-              <a:gd name="adj" fmla="val 8276"/>
+              <a:gd name="adj" fmla="val 9091"/>
             </a:avLst>
           </a:prstGeom>
           <a:solidFill>
@@ -13427,7 +13427,7 @@
         <p:spPr>
           <a:xfrm>
             <a:off x="7799832" y="1801368"/>
-            <a:ext cx="3145536" cy="758952"/>
+            <a:ext cx="3145536" cy="640080"/>
           </a:xfrm>
           <a:prstGeom prst="rect">
             <a:avLst/>
@@ -13467,12 +13467,12 @@
         </p:nvSpPr>
         <p:spPr>
           <a:xfrm>
-            <a:off x="7635240" y="2788920"/>
-            <a:ext cx="3474720" cy="1536192"/>
+            <a:off x="7635240" y="2670048"/>
+            <a:ext cx="3474720" cy="1377086"/>
           </a:xfrm>
           <a:prstGeom prst="roundRect">
             <a:avLst>
-              <a:gd name="adj" fmla="val 7143"/>
+              <a:gd name="adj" fmla="val 7968"/>
             </a:avLst>
           </a:prstGeom>
           <a:solidFill>
@@ -13494,7 +13494,7 @@
         </p:nvSpPr>
         <p:spPr>
           <a:xfrm>
-            <a:off x="7799832" y="2935224"/>
+            <a:off x="7799832" y="2816352"/>
             <a:ext cx="3145536" cy="256032"/>
           </a:xfrm>
           <a:prstGeom prst="rect">
@@ -13533,8 +13533,8 @@
         </p:nvSpPr>
         <p:spPr>
           <a:xfrm>
-            <a:off x="7818120" y="3300984"/>
-            <a:ext cx="3090672" cy="877824"/>
+            <a:off x="7818120" y="3182112"/>
+            <a:ext cx="3090672" cy="718718"/>
           </a:xfrm>
           <a:prstGeom prst="rect">
             <a:avLst/>
@@ -13591,12 +13591,12 @@
         </p:nvSpPr>
         <p:spPr>
           <a:xfrm>
-            <a:off x="7635240" y="4498848"/>
-            <a:ext cx="3474720" cy="1143000"/>
+            <a:off x="7635240" y="4184294"/>
+            <a:ext cx="3474720" cy="1466698"/>
           </a:xfrm>
           <a:prstGeom prst="roundRect">
             <a:avLst>
-              <a:gd name="adj" fmla="val 9600"/>
+              <a:gd name="adj" fmla="val 7481"/>
             </a:avLst>
           </a:prstGeom>
           <a:solidFill>
@@ -13618,7 +13618,7 @@
         </p:nvSpPr>
         <p:spPr>
           <a:xfrm>
-            <a:off x="7799832" y="4645152"/>
+            <a:off x="7799832" y="4330598"/>
             <a:ext cx="3145536" cy="256032"/>
           </a:xfrm>
           <a:prstGeom prst="rect">
@@ -13657,8 +13657,8 @@
         </p:nvSpPr>
         <p:spPr>
           <a:xfrm>
-            <a:off x="7799832" y="4974336"/>
-            <a:ext cx="3145536" cy="576072"/>
+            <a:off x="7799832" y="4659782"/>
+            <a:ext cx="3145536" cy="899770"/>
           </a:xfrm>
           <a:prstGeom prst="rect">
             <a:avLst/>
@@ -13684,7 +13684,7 @@
                 <a:ea typeface="Aptos" pitchFamily="34" charset="-122"/>
                 <a:cs typeface="Aptos" pitchFamily="34" charset="-120"/>
               </a:rPr>
-              <a:t>Use the assignment to test whether you can explain the concept, apply it to a realistic public health situation, and.</a:t>
+              <a:t>Use the assignment to test whether you can explain the concept, apply it to a realistic public health situation, and identify what would need review before the work moves forward.</a:t>
             </a:r>
             <a:endParaRPr lang="en-US" sz="1320" dirty="0"/>
           </a:p>
@@ -14053,11 +14053,11 @@
         <p:spPr>
           <a:xfrm>
             <a:off x="7635240" y="1325880"/>
-            <a:ext cx="3474720" cy="1325880"/>
+            <a:ext cx="3474720" cy="1255471"/>
           </a:xfrm>
           <a:prstGeom prst="roundRect">
             <a:avLst>
-              <a:gd name="adj" fmla="val 8276"/>
+              <a:gd name="adj" fmla="val 8740"/>
             </a:avLst>
           </a:prstGeom>
           <a:solidFill>
@@ -14119,7 +14119,7 @@
         <p:spPr>
           <a:xfrm>
             <a:off x="7799832" y="1801368"/>
-            <a:ext cx="3145536" cy="758952"/>
+            <a:ext cx="3145536" cy="688543"/>
           </a:xfrm>
           <a:prstGeom prst="rect">
             <a:avLst/>
@@ -14159,7 +14159,7 @@
         </p:nvSpPr>
         <p:spPr>
           <a:xfrm>
-            <a:off x="7635240" y="2788920"/>
+            <a:off x="7635240" y="2718511"/>
             <a:ext cx="3474720" cy="1536192"/>
           </a:xfrm>
           <a:prstGeom prst="roundRect">
@@ -14186,8 +14186,8 @@
         </p:nvSpPr>
         <p:spPr>
           <a:xfrm>
-            <a:off x="7799832" y="2935224"/>
-            <a:ext cx="3145536" cy="256032"/>
+            <a:off x="7799832" y="2846527"/>
+            <a:ext cx="3145536" cy="237744"/>
           </a:xfrm>
           <a:prstGeom prst="rect">
             <a:avLst/>
@@ -14203,7 +14203,7 @@
               <a:buNone/>
             </a:pPr>
             <a:r>
-              <a:rPr lang="en-US" sz="1300" b="1" dirty="0">
+              <a:rPr lang="en-US" sz="1250" b="1" dirty="0">
                 <a:solidFill>
                   <a:srgbClr val="0068B7"/>
                 </a:solidFill>
@@ -14211,101 +14211,317 @@
                 <a:ea typeface="Aptos" pitchFamily="34" charset="-122"/>
                 <a:cs typeface="Aptos" pitchFamily="34" charset="-120"/>
               </a:rPr>
-              <a:t>Concept checkpoints</a:t>
-            </a:r>
-            <a:endParaRPr lang="en-US" sz="1300" dirty="0"/>
-          </a:p>
-        </p:txBody>
-      </p:sp>
-      <p:sp>
-        <p:nvSpPr>
-          <p:cNvPr id="15" name="Text 13"/>
-          <p:cNvSpPr/>
-          <p:nvPr/>
-        </p:nvSpPr>
-        <p:spPr>
-          <a:xfrm>
-            <a:off x="7818120" y="3300984"/>
-            <a:ext cx="3090672" cy="877824"/>
-          </a:xfrm>
-          <a:prstGeom prst="rect">
-            <a:avLst/>
-          </a:prstGeom>
-          <a:noFill/>
-          <a:ln/>
-        </p:spPr>
-        <p:txBody>
-          <a:bodyPr wrap="square" lIns="508" tIns="508" rIns="508" bIns="508" rtlCol="0" anchor="t">
+              <a:t>Risk control loop</a:t>
+            </a:r>
+            <a:endParaRPr lang="en-US" sz="1250" dirty="0"/>
+          </a:p>
+        </p:txBody>
+      </p:sp>
+      <p:sp>
+        <p:nvSpPr>
+          <p:cNvPr id="15" name="Shape 13"/>
+          <p:cNvSpPr/>
+          <p:nvPr/>
+        </p:nvSpPr>
+        <p:spPr>
+          <a:xfrm>
+            <a:off x="8763000" y="3399739"/>
+            <a:ext cx="164592" cy="0"/>
+          </a:xfrm>
+          <a:prstGeom prst="line">
+            <a:avLst/>
+          </a:prstGeom>
+          <a:noFill/>
+          <a:ln w="15240">
+            <a:solidFill>
+              <a:srgbClr val="8ABBD8"/>
+            </a:solidFill>
+            <a:prstDash val="solid"/>
+          </a:ln>
+        </p:spPr>
+      </p:sp>
+      <p:sp>
+        <p:nvSpPr>
+          <p:cNvPr id="16" name="Shape 14"/>
+          <p:cNvSpPr/>
+          <p:nvPr/>
+        </p:nvSpPr>
+        <p:spPr>
+          <a:xfrm>
+            <a:off x="7872984" y="3248863"/>
+            <a:ext cx="890016" cy="301752"/>
+          </a:xfrm>
+          <a:prstGeom prst="roundRect">
+            <a:avLst>
+              <a:gd name="adj" fmla="val 24242"/>
+            </a:avLst>
+          </a:prstGeom>
+          <a:solidFill>
+            <a:srgbClr val="0068B7"/>
+          </a:solidFill>
+          <a:ln w="12700">
+            <a:solidFill>
+              <a:srgbClr val="0068B7"/>
+            </a:solidFill>
+            <a:prstDash val="solid"/>
+          </a:ln>
+        </p:spPr>
+      </p:sp>
+      <p:sp>
+        <p:nvSpPr>
+          <p:cNvPr id="17" name="Text 15"/>
+          <p:cNvSpPr/>
+          <p:nvPr/>
+        </p:nvSpPr>
+        <p:spPr>
+          <a:xfrm>
+            <a:off x="7909560" y="3322015"/>
+            <a:ext cx="816864" cy="146304"/>
+          </a:xfrm>
+          <a:prstGeom prst="rect">
+            <a:avLst/>
+          </a:prstGeom>
+          <a:noFill/>
+          <a:ln/>
+        </p:spPr>
+        <p:txBody>
+          <a:bodyPr wrap="square" lIns="0" tIns="0" rIns="0" bIns="0" rtlCol="0" anchor="ctr">
             <a:normAutofit/>
           </a:bodyPr>
           <a:lstStyle/>
           <a:p>
-            <a:pPr indent="0" marL="0">
-              <a:buNone/>
-            </a:pPr>
-            <a:r>
-              <a:rPr lang="en-US" sz="1220" dirty="0">
-                <a:solidFill>
-                  <a:srgbClr val="17364A"/>
-                </a:solidFill>
-                <a:latin typeface="Aptos" pitchFamily="34" charset="0"/>
-                <a:ea typeface="Aptos" pitchFamily="34" charset="-122"/>
-                <a:cs typeface="Aptos" pitchFamily="34" charset="-120"/>
-              </a:rPr>
-              <a:t>Leaders cannot manage AI risk effectively unless they define how.</a:t>
-            </a:r>
-            <a:endParaRPr lang="en-US" sz="1220" dirty="0"/>
-          </a:p>
-          <a:p>
-            <a:pPr indent="0" marL="0">
-              <a:buNone/>
-            </a:pPr>
-            <a:r>
-              <a:rPr lang="en-US" sz="1220" dirty="0">
-                <a:solidFill>
-                  <a:srgbClr val="17364A"/>
-                </a:solidFill>
-                <a:latin typeface="Aptos" pitchFamily="34" charset="0"/>
-                <a:ea typeface="Aptos" pitchFamily="34" charset="-122"/>
-                <a:cs typeface="Aptos" pitchFamily="34" charset="-120"/>
-              </a:rPr>
-              <a:t>Risk appetite describes the broad level of risk an organization is.</a:t>
-            </a:r>
-            <a:endParaRPr lang="en-US" sz="1220" dirty="0"/>
-          </a:p>
-          <a:p>
-            <a:pPr indent="0" marL="0">
-              <a:buNone/>
-            </a:pPr>
-            <a:r>
-              <a:rPr lang="en-US" sz="1220" dirty="0">
-                <a:solidFill>
-                  <a:srgbClr val="17364A"/>
-                </a:solidFill>
-                <a:latin typeface="Aptos" pitchFamily="34" charset="0"/>
-                <a:ea typeface="Aptos" pitchFamily="34" charset="-122"/>
-                <a:cs typeface="Aptos" pitchFamily="34" charset="-120"/>
-              </a:rPr>
-              <a:t>Risk tolerance translates that appetite into practical thresholds,.</a:t>
-            </a:r>
-            <a:endParaRPr lang="en-US" sz="1220" dirty="0"/>
-          </a:p>
-        </p:txBody>
-      </p:sp>
-      <p:sp>
-        <p:nvSpPr>
-          <p:cNvPr id="16" name="Shape 14"/>
-          <p:cNvSpPr/>
-          <p:nvPr/>
-        </p:nvSpPr>
-        <p:spPr>
-          <a:xfrm>
-            <a:off x="7635240" y="4498848"/>
-            <a:ext cx="3474720" cy="1143000"/>
+            <a:pPr algn="ctr" indent="0" marL="0">
+              <a:buNone/>
+            </a:pPr>
+            <a:r>
+              <a:rPr lang="en-US" sz="880" b="1" dirty="0">
+                <a:solidFill>
+                  <a:srgbClr val="FFFFFF"/>
+                </a:solidFill>
+                <a:latin typeface="Aptos" pitchFamily="34" charset="0"/>
+                <a:ea typeface="Aptos" pitchFamily="34" charset="-122"/>
+                <a:cs typeface="Aptos" pitchFamily="34" charset="-120"/>
+              </a:rPr>
+              <a:t>Identify</a:t>
+            </a:r>
+            <a:endParaRPr lang="en-US" sz="880" dirty="0"/>
+          </a:p>
+        </p:txBody>
+      </p:sp>
+      <p:sp>
+        <p:nvSpPr>
+          <p:cNvPr id="18" name="Shape 16"/>
+          <p:cNvSpPr/>
+          <p:nvPr/>
+        </p:nvSpPr>
+        <p:spPr>
+          <a:xfrm>
+            <a:off x="9817608" y="3399739"/>
+            <a:ext cx="164592" cy="0"/>
+          </a:xfrm>
+          <a:prstGeom prst="line">
+            <a:avLst/>
+          </a:prstGeom>
+          <a:noFill/>
+          <a:ln w="15240">
+            <a:solidFill>
+              <a:srgbClr val="8ABBD8"/>
+            </a:solidFill>
+            <a:prstDash val="solid"/>
+          </a:ln>
+        </p:spPr>
+      </p:sp>
+      <p:sp>
+        <p:nvSpPr>
+          <p:cNvPr id="19" name="Shape 17"/>
+          <p:cNvSpPr/>
+          <p:nvPr/>
+        </p:nvSpPr>
+        <p:spPr>
+          <a:xfrm>
+            <a:off x="8927592" y="3248863"/>
+            <a:ext cx="890016" cy="301752"/>
           </a:xfrm>
           <a:prstGeom prst="roundRect">
             <a:avLst>
-              <a:gd name="adj" fmla="val 9600"/>
+              <a:gd name="adj" fmla="val 24242"/>
+            </a:avLst>
+          </a:prstGeom>
+          <a:solidFill>
+            <a:srgbClr val="2F8A28"/>
+          </a:solidFill>
+          <a:ln w="12700">
+            <a:solidFill>
+              <a:srgbClr val="2F8A28"/>
+            </a:solidFill>
+            <a:prstDash val="solid"/>
+          </a:ln>
+        </p:spPr>
+      </p:sp>
+      <p:sp>
+        <p:nvSpPr>
+          <p:cNvPr id="20" name="Text 18"/>
+          <p:cNvSpPr/>
+          <p:nvPr/>
+        </p:nvSpPr>
+        <p:spPr>
+          <a:xfrm>
+            <a:off x="8964168" y="3322015"/>
+            <a:ext cx="816864" cy="146304"/>
+          </a:xfrm>
+          <a:prstGeom prst="rect">
+            <a:avLst/>
+          </a:prstGeom>
+          <a:noFill/>
+          <a:ln/>
+        </p:spPr>
+        <p:txBody>
+          <a:bodyPr wrap="square" lIns="0" tIns="0" rIns="0" bIns="0" rtlCol="0" anchor="ctr">
+            <a:normAutofit/>
+          </a:bodyPr>
+          <a:lstStyle/>
+          <a:p>
+            <a:pPr algn="ctr" indent="0" marL="0">
+              <a:buNone/>
+            </a:pPr>
+            <a:r>
+              <a:rPr lang="en-US" sz="880" b="1" dirty="0">
+                <a:solidFill>
+                  <a:srgbClr val="FFFFFF"/>
+                </a:solidFill>
+                <a:latin typeface="Aptos" pitchFamily="34" charset="0"/>
+                <a:ea typeface="Aptos" pitchFamily="34" charset="-122"/>
+                <a:cs typeface="Aptos" pitchFamily="34" charset="-120"/>
+              </a:rPr>
+              <a:t>Control</a:t>
+            </a:r>
+            <a:endParaRPr lang="en-US" sz="880" dirty="0"/>
+          </a:p>
+        </p:txBody>
+      </p:sp>
+      <p:sp>
+        <p:nvSpPr>
+          <p:cNvPr id="21" name="Shape 19"/>
+          <p:cNvSpPr/>
+          <p:nvPr/>
+        </p:nvSpPr>
+        <p:spPr>
+          <a:xfrm>
+            <a:off x="9982200" y="3248863"/>
+            <a:ext cx="890016" cy="301752"/>
+          </a:xfrm>
+          <a:prstGeom prst="roundRect">
+            <a:avLst>
+              <a:gd name="adj" fmla="val 24242"/>
+            </a:avLst>
+          </a:prstGeom>
+          <a:solidFill>
+            <a:srgbClr val="6A4CA3"/>
+          </a:solidFill>
+          <a:ln w="12700">
+            <a:solidFill>
+              <a:srgbClr val="6A4CA3"/>
+            </a:solidFill>
+            <a:prstDash val="solid"/>
+          </a:ln>
+        </p:spPr>
+      </p:sp>
+      <p:sp>
+        <p:nvSpPr>
+          <p:cNvPr id="22" name="Text 20"/>
+          <p:cNvSpPr/>
+          <p:nvPr/>
+        </p:nvSpPr>
+        <p:spPr>
+          <a:xfrm>
+            <a:off x="10018776" y="3322015"/>
+            <a:ext cx="816864" cy="146304"/>
+          </a:xfrm>
+          <a:prstGeom prst="rect">
+            <a:avLst/>
+          </a:prstGeom>
+          <a:noFill/>
+          <a:ln/>
+        </p:spPr>
+        <p:txBody>
+          <a:bodyPr wrap="square" lIns="0" tIns="0" rIns="0" bIns="0" rtlCol="0" anchor="ctr">
+            <a:normAutofit/>
+          </a:bodyPr>
+          <a:lstStyle/>
+          <a:p>
+            <a:pPr algn="ctr" indent="0" marL="0">
+              <a:buNone/>
+            </a:pPr>
+            <a:r>
+              <a:rPr lang="en-US" sz="880" b="1" dirty="0">
+                <a:solidFill>
+                  <a:srgbClr val="FFFFFF"/>
+                </a:solidFill>
+                <a:latin typeface="Aptos" pitchFamily="34" charset="0"/>
+                <a:ea typeface="Aptos" pitchFamily="34" charset="-122"/>
+                <a:cs typeface="Aptos" pitchFamily="34" charset="-120"/>
+              </a:rPr>
+              <a:t>Monitor</a:t>
+            </a:r>
+            <a:endParaRPr lang="en-US" sz="880" dirty="0"/>
+          </a:p>
+        </p:txBody>
+      </p:sp>
+      <p:sp>
+        <p:nvSpPr>
+          <p:cNvPr id="23" name="Text 21"/>
+          <p:cNvSpPr/>
+          <p:nvPr/>
+        </p:nvSpPr>
+        <p:spPr>
+          <a:xfrm>
+            <a:off x="7854696" y="3742639"/>
+            <a:ext cx="3035808" cy="365760"/>
+          </a:xfrm>
+          <a:prstGeom prst="rect">
+            <a:avLst/>
+          </a:prstGeom>
+          <a:noFill/>
+          <a:ln/>
+        </p:spPr>
+        <p:txBody>
+          <a:bodyPr wrap="square" lIns="254" tIns="254" rIns="254" bIns="254" rtlCol="0" anchor="t">
+            <a:normAutofit/>
+          </a:bodyPr>
+          <a:lstStyle/>
+          <a:p>
+            <a:pPr indent="0" marL="0">
+              <a:buNone/>
+            </a:pPr>
+            <a:r>
+              <a:rPr lang="en-US" sz="1120" dirty="0">
+                <a:solidFill>
+                  <a:srgbClr val="17364A"/>
+                </a:solidFill>
+                <a:latin typeface="Aptos" pitchFamily="34" charset="0"/>
+                <a:ea typeface="Aptos" pitchFamily="34" charset="-122"/>
+                <a:cs typeface="Aptos" pitchFamily="34" charset="-120"/>
+              </a:rPr>
+              <a:t>Responsible use depends on finding risks early, applying safeguards, and watching for drift or harm over time.</a:t>
+            </a:r>
+            <a:endParaRPr lang="en-US" sz="1120" dirty="0"/>
+          </a:p>
+        </p:txBody>
+      </p:sp>
+      <p:sp>
+        <p:nvSpPr>
+          <p:cNvPr id="24" name="Shape 22"/>
+          <p:cNvSpPr/>
+          <p:nvPr/>
+        </p:nvSpPr>
+        <p:spPr>
+          <a:xfrm>
+            <a:off x="7635240" y="4391863"/>
+            <a:ext cx="3474720" cy="1255471"/>
+          </a:xfrm>
+          <a:prstGeom prst="roundRect">
+            <a:avLst>
+              <a:gd name="adj" fmla="val 8740"/>
             </a:avLst>
           </a:prstGeom>
           <a:solidFill>
@@ -14321,13 +14537,13 @@
       </p:sp>
       <p:sp>
         <p:nvSpPr>
-          <p:cNvPr id="17" name="Text 15"/>
-          <p:cNvSpPr/>
-          <p:nvPr/>
-        </p:nvSpPr>
-        <p:spPr>
-          <a:xfrm>
-            <a:off x="7799832" y="4645152"/>
+          <p:cNvPr id="25" name="Text 23"/>
+          <p:cNvSpPr/>
+          <p:nvPr/>
+        </p:nvSpPr>
+        <p:spPr>
+          <a:xfrm>
+            <a:off x="7799832" y="4538167"/>
             <a:ext cx="3145536" cy="256032"/>
           </a:xfrm>
           <a:prstGeom prst="rect">
@@ -14360,14 +14576,14 @@
       </p:sp>
       <p:sp>
         <p:nvSpPr>
-          <p:cNvPr id="18" name="Text 16"/>
-          <p:cNvSpPr/>
-          <p:nvPr/>
-        </p:nvSpPr>
-        <p:spPr>
-          <a:xfrm>
-            <a:off x="7799832" y="4974336"/>
-            <a:ext cx="3145536" cy="576072"/>
+          <p:cNvPr id="26" name="Text 24"/>
+          <p:cNvSpPr/>
+          <p:nvPr/>
+        </p:nvSpPr>
+        <p:spPr>
+          <a:xfrm>
+            <a:off x="7799832" y="4867351"/>
+            <a:ext cx="3145536" cy="688543"/>
           </a:xfrm>
           <a:prstGeom prst="rect">
             <a:avLst/>
@@ -14393,7 +14609,7 @@
                 <a:ea typeface="Aptos" pitchFamily="34" charset="-122"/>
                 <a:cs typeface="Aptos" pitchFamily="34" charset="-120"/>
               </a:rPr>
-              <a:t>Identify what could go wrong, who could be affected, what safeguards are needed, and what evidence should be reviewed.</a:t>
+              <a:t>Identify what could go wrong, who could be affected, what safeguards are needed, and what evidence should be reviewed before use.</a:t>
             </a:r>
             <a:endParaRPr lang="en-US" sz="1320" dirty="0"/>
           </a:p>
@@ -14762,11 +14978,11 @@
         <p:spPr>
           <a:xfrm>
             <a:off x="7635240" y="1325880"/>
-            <a:ext cx="3474720" cy="1325880"/>
+            <a:ext cx="3474720" cy="1207008"/>
           </a:xfrm>
           <a:prstGeom prst="roundRect">
             <a:avLst>
-              <a:gd name="adj" fmla="val 8276"/>
+              <a:gd name="adj" fmla="val 9091"/>
             </a:avLst>
           </a:prstGeom>
           <a:solidFill>
@@ -14828,7 +15044,7 @@
         <p:spPr>
           <a:xfrm>
             <a:off x="7799832" y="1801368"/>
-            <a:ext cx="3145536" cy="758952"/>
+            <a:ext cx="3145536" cy="640080"/>
           </a:xfrm>
           <a:prstGeom prst="rect">
             <a:avLst/>
@@ -14854,7 +15070,7 @@
                 <a:ea typeface="Aptos" pitchFamily="34" charset="-122"/>
                 <a:cs typeface="Aptos" pitchFamily="34" charset="-120"/>
               </a:rPr>
-              <a:t>This module provides national-level training guidance for public health agencies and partners.</a:t>
+              <a:t>This module provides national-level training guidance for public health agencies and.</a:t>
             </a:r>
             <a:endParaRPr lang="en-US" sz="1320" dirty="0"/>
           </a:p>
@@ -14868,12 +15084,12 @@
         </p:nvSpPr>
         <p:spPr>
           <a:xfrm>
-            <a:off x="7635240" y="2788920"/>
-            <a:ext cx="3474720" cy="1536192"/>
+            <a:off x="7635240" y="2670048"/>
+            <a:ext cx="3474720" cy="1377086"/>
           </a:xfrm>
           <a:prstGeom prst="roundRect">
             <a:avLst>
-              <a:gd name="adj" fmla="val 7143"/>
+              <a:gd name="adj" fmla="val 7968"/>
             </a:avLst>
           </a:prstGeom>
           <a:solidFill>
@@ -14895,8 +15111,8 @@
         </p:nvSpPr>
         <p:spPr>
           <a:xfrm>
-            <a:off x="7799832" y="2935224"/>
-            <a:ext cx="3145536" cy="256032"/>
+            <a:off x="7799832" y="2798064"/>
+            <a:ext cx="3145536" cy="237744"/>
           </a:xfrm>
           <a:prstGeom prst="rect">
             <a:avLst/>
@@ -14912,7 +15128,7 @@
               <a:buNone/>
             </a:pPr>
             <a:r>
-              <a:rPr lang="en-US" sz="1300" b="1" dirty="0">
+              <a:rPr lang="en-US" sz="1250" b="1" dirty="0">
                 <a:solidFill>
                   <a:srgbClr val="0068B7"/>
                 </a:solidFill>
@@ -14920,101 +15136,317 @@
                 <a:ea typeface="Aptos" pitchFamily="34" charset="-122"/>
                 <a:cs typeface="Aptos" pitchFamily="34" charset="-120"/>
               </a:rPr>
-              <a:t>Concept checkpoints</a:t>
-            </a:r>
-            <a:endParaRPr lang="en-US" sz="1300" dirty="0"/>
-          </a:p>
-        </p:txBody>
-      </p:sp>
-      <p:sp>
-        <p:nvSpPr>
-          <p:cNvPr id="15" name="Text 13"/>
-          <p:cNvSpPr/>
-          <p:nvPr/>
-        </p:nvSpPr>
-        <p:spPr>
-          <a:xfrm>
-            <a:off x="7818120" y="3300984"/>
-            <a:ext cx="3090672" cy="877824"/>
-          </a:xfrm>
-          <a:prstGeom prst="rect">
-            <a:avLst/>
-          </a:prstGeom>
-          <a:noFill/>
-          <a:ln/>
-        </p:spPr>
-        <p:txBody>
-          <a:bodyPr wrap="square" lIns="508" tIns="508" rIns="508" bIns="508" rtlCol="0" anchor="t">
+              <a:t>Governance pathway</a:t>
+            </a:r>
+            <a:endParaRPr lang="en-US" sz="1250" dirty="0"/>
+          </a:p>
+        </p:txBody>
+      </p:sp>
+      <p:sp>
+        <p:nvSpPr>
+          <p:cNvPr id="15" name="Shape 13"/>
+          <p:cNvSpPr/>
+          <p:nvPr/>
+        </p:nvSpPr>
+        <p:spPr>
+          <a:xfrm>
+            <a:off x="8763000" y="3351276"/>
+            <a:ext cx="164592" cy="0"/>
+          </a:xfrm>
+          <a:prstGeom prst="line">
+            <a:avLst/>
+          </a:prstGeom>
+          <a:noFill/>
+          <a:ln w="15240">
+            <a:solidFill>
+              <a:srgbClr val="8ABBD8"/>
+            </a:solidFill>
+            <a:prstDash val="solid"/>
+          </a:ln>
+        </p:spPr>
+      </p:sp>
+      <p:sp>
+        <p:nvSpPr>
+          <p:cNvPr id="16" name="Shape 14"/>
+          <p:cNvSpPr/>
+          <p:nvPr/>
+        </p:nvSpPr>
+        <p:spPr>
+          <a:xfrm>
+            <a:off x="7872984" y="3200400"/>
+            <a:ext cx="890016" cy="301752"/>
+          </a:xfrm>
+          <a:prstGeom prst="roundRect">
+            <a:avLst>
+              <a:gd name="adj" fmla="val 24242"/>
+            </a:avLst>
+          </a:prstGeom>
+          <a:solidFill>
+            <a:srgbClr val="0068B7"/>
+          </a:solidFill>
+          <a:ln w="12700">
+            <a:solidFill>
+              <a:srgbClr val="0068B7"/>
+            </a:solidFill>
+            <a:prstDash val="solid"/>
+          </a:ln>
+        </p:spPr>
+      </p:sp>
+      <p:sp>
+        <p:nvSpPr>
+          <p:cNvPr id="17" name="Text 15"/>
+          <p:cNvSpPr/>
+          <p:nvPr/>
+        </p:nvSpPr>
+        <p:spPr>
+          <a:xfrm>
+            <a:off x="7909560" y="3273552"/>
+            <a:ext cx="816864" cy="146304"/>
+          </a:xfrm>
+          <a:prstGeom prst="rect">
+            <a:avLst/>
+          </a:prstGeom>
+          <a:noFill/>
+          <a:ln/>
+        </p:spPr>
+        <p:txBody>
+          <a:bodyPr wrap="square" lIns="0" tIns="0" rIns="0" bIns="0" rtlCol="0" anchor="ctr">
             <a:normAutofit/>
           </a:bodyPr>
           <a:lstStyle/>
           <a:p>
-            <a:pPr indent="0" marL="0">
-              <a:buNone/>
-            </a:pPr>
-            <a:r>
-              <a:rPr lang="en-US" sz="1220" dirty="0">
-                <a:solidFill>
-                  <a:srgbClr val="17364A"/>
-                </a:solidFill>
-                <a:latin typeface="Aptos" pitchFamily="34" charset="0"/>
-                <a:ea typeface="Aptos" pitchFamily="34" charset="-122"/>
-                <a:cs typeface="Aptos" pitchFamily="34" charset="-120"/>
-              </a:rPr>
-              <a:t>It is not legal advice and does not replace review by agency legal.</a:t>
-            </a:r>
-            <a:endParaRPr lang="en-US" sz="1220" dirty="0"/>
-          </a:p>
-          <a:p>
-            <a:pPr indent="0" marL="0">
-              <a:buNone/>
-            </a:pPr>
-            <a:r>
-              <a:rPr lang="en-US" sz="1220" dirty="0">
-                <a:solidFill>
-                  <a:srgbClr val="17364A"/>
-                </a:solidFill>
-                <a:latin typeface="Aptos" pitchFamily="34" charset="0"/>
-                <a:ea typeface="Aptos" pitchFamily="34" charset="-122"/>
-                <a:cs typeface="Aptos" pitchFamily="34" charset="-120"/>
-              </a:rPr>
-              <a:t>Requirements may vary by state, locality, territory, Tribe,.</a:t>
-            </a:r>
-            <a:endParaRPr lang="en-US" sz="1220" dirty="0"/>
-          </a:p>
-          <a:p>
-            <a:pPr indent="0" marL="0">
-              <a:buNone/>
-            </a:pPr>
-            <a:r>
-              <a:rPr lang="en-US" sz="1220" dirty="0">
-                <a:solidFill>
-                  <a:srgbClr val="17364A"/>
-                </a:solidFill>
-                <a:latin typeface="Aptos" pitchFamily="34" charset="0"/>
-                <a:ea typeface="Aptos" pitchFamily="34" charset="-122"/>
-                <a:cs typeface="Aptos" pitchFamily="34" charset="-120"/>
-              </a:rPr>
-              <a:t>Learners should use this module to identify the issues that.</a:t>
-            </a:r>
-            <a:endParaRPr lang="en-US" sz="1220" dirty="0"/>
-          </a:p>
-        </p:txBody>
-      </p:sp>
-      <p:sp>
-        <p:nvSpPr>
-          <p:cNvPr id="16" name="Shape 14"/>
-          <p:cNvSpPr/>
-          <p:nvPr/>
-        </p:nvSpPr>
-        <p:spPr>
-          <a:xfrm>
-            <a:off x="7635240" y="4498848"/>
-            <a:ext cx="3474720" cy="1143000"/>
+            <a:pPr algn="ctr" indent="0" marL="0">
+              <a:buNone/>
+            </a:pPr>
+            <a:r>
+              <a:rPr lang="en-US" sz="880" b="1" dirty="0">
+                <a:solidFill>
+                  <a:srgbClr val="FFFFFF"/>
+                </a:solidFill>
+                <a:latin typeface="Aptos" pitchFamily="34" charset="0"/>
+                <a:ea typeface="Aptos" pitchFamily="34" charset="-122"/>
+                <a:cs typeface="Aptos" pitchFamily="34" charset="-120"/>
+              </a:rPr>
+              <a:t>Submit</a:t>
+            </a:r>
+            <a:endParaRPr lang="en-US" sz="880" dirty="0"/>
+          </a:p>
+        </p:txBody>
+      </p:sp>
+      <p:sp>
+        <p:nvSpPr>
+          <p:cNvPr id="18" name="Shape 16"/>
+          <p:cNvSpPr/>
+          <p:nvPr/>
+        </p:nvSpPr>
+        <p:spPr>
+          <a:xfrm>
+            <a:off x="9817608" y="3351276"/>
+            <a:ext cx="164592" cy="0"/>
+          </a:xfrm>
+          <a:prstGeom prst="line">
+            <a:avLst/>
+          </a:prstGeom>
+          <a:noFill/>
+          <a:ln w="15240">
+            <a:solidFill>
+              <a:srgbClr val="8ABBD8"/>
+            </a:solidFill>
+            <a:prstDash val="solid"/>
+          </a:ln>
+        </p:spPr>
+      </p:sp>
+      <p:sp>
+        <p:nvSpPr>
+          <p:cNvPr id="19" name="Shape 17"/>
+          <p:cNvSpPr/>
+          <p:nvPr/>
+        </p:nvSpPr>
+        <p:spPr>
+          <a:xfrm>
+            <a:off x="8927592" y="3200400"/>
+            <a:ext cx="890016" cy="301752"/>
           </a:xfrm>
           <a:prstGeom prst="roundRect">
             <a:avLst>
-              <a:gd name="adj" fmla="val 9600"/>
+              <a:gd name="adj" fmla="val 24242"/>
+            </a:avLst>
+          </a:prstGeom>
+          <a:solidFill>
+            <a:srgbClr val="2F8A28"/>
+          </a:solidFill>
+          <a:ln w="12700">
+            <a:solidFill>
+              <a:srgbClr val="2F8A28"/>
+            </a:solidFill>
+            <a:prstDash val="solid"/>
+          </a:ln>
+        </p:spPr>
+      </p:sp>
+      <p:sp>
+        <p:nvSpPr>
+          <p:cNvPr id="20" name="Text 18"/>
+          <p:cNvSpPr/>
+          <p:nvPr/>
+        </p:nvSpPr>
+        <p:spPr>
+          <a:xfrm>
+            <a:off x="8964168" y="3273552"/>
+            <a:ext cx="816864" cy="146304"/>
+          </a:xfrm>
+          <a:prstGeom prst="rect">
+            <a:avLst/>
+          </a:prstGeom>
+          <a:noFill/>
+          <a:ln/>
+        </p:spPr>
+        <p:txBody>
+          <a:bodyPr wrap="square" lIns="0" tIns="0" rIns="0" bIns="0" rtlCol="0" anchor="ctr">
+            <a:normAutofit/>
+          </a:bodyPr>
+          <a:lstStyle/>
+          <a:p>
+            <a:pPr algn="ctr" indent="0" marL="0">
+              <a:buNone/>
+            </a:pPr>
+            <a:r>
+              <a:rPr lang="en-US" sz="880" b="1" dirty="0">
+                <a:solidFill>
+                  <a:srgbClr val="FFFFFF"/>
+                </a:solidFill>
+                <a:latin typeface="Aptos" pitchFamily="34" charset="0"/>
+                <a:ea typeface="Aptos" pitchFamily="34" charset="-122"/>
+                <a:cs typeface="Aptos" pitchFamily="34" charset="-120"/>
+              </a:rPr>
+              <a:t>Review</a:t>
+            </a:r>
+            <a:endParaRPr lang="en-US" sz="880" dirty="0"/>
+          </a:p>
+        </p:txBody>
+      </p:sp>
+      <p:sp>
+        <p:nvSpPr>
+          <p:cNvPr id="21" name="Shape 19"/>
+          <p:cNvSpPr/>
+          <p:nvPr/>
+        </p:nvSpPr>
+        <p:spPr>
+          <a:xfrm>
+            <a:off x="9982200" y="3200400"/>
+            <a:ext cx="890016" cy="301752"/>
+          </a:xfrm>
+          <a:prstGeom prst="roundRect">
+            <a:avLst>
+              <a:gd name="adj" fmla="val 24242"/>
+            </a:avLst>
+          </a:prstGeom>
+          <a:solidFill>
+            <a:srgbClr val="6A4CA3"/>
+          </a:solidFill>
+          <a:ln w="12700">
+            <a:solidFill>
+              <a:srgbClr val="6A4CA3"/>
+            </a:solidFill>
+            <a:prstDash val="solid"/>
+          </a:ln>
+        </p:spPr>
+      </p:sp>
+      <p:sp>
+        <p:nvSpPr>
+          <p:cNvPr id="22" name="Text 20"/>
+          <p:cNvSpPr/>
+          <p:nvPr/>
+        </p:nvSpPr>
+        <p:spPr>
+          <a:xfrm>
+            <a:off x="10018776" y="3273552"/>
+            <a:ext cx="816864" cy="146304"/>
+          </a:xfrm>
+          <a:prstGeom prst="rect">
+            <a:avLst/>
+          </a:prstGeom>
+          <a:noFill/>
+          <a:ln/>
+        </p:spPr>
+        <p:txBody>
+          <a:bodyPr wrap="square" lIns="0" tIns="0" rIns="0" bIns="0" rtlCol="0" anchor="ctr">
+            <a:normAutofit/>
+          </a:bodyPr>
+          <a:lstStyle/>
+          <a:p>
+            <a:pPr algn="ctr" indent="0" marL="0">
+              <a:buNone/>
+            </a:pPr>
+            <a:r>
+              <a:rPr lang="en-US" sz="880" b="1" dirty="0">
+                <a:solidFill>
+                  <a:srgbClr val="FFFFFF"/>
+                </a:solidFill>
+                <a:latin typeface="Aptos" pitchFamily="34" charset="0"/>
+                <a:ea typeface="Aptos" pitchFamily="34" charset="-122"/>
+                <a:cs typeface="Aptos" pitchFamily="34" charset="-120"/>
+              </a:rPr>
+              <a:t>Oversee</a:t>
+            </a:r>
+            <a:endParaRPr lang="en-US" sz="880" dirty="0"/>
+          </a:p>
+        </p:txBody>
+      </p:sp>
+      <p:sp>
+        <p:nvSpPr>
+          <p:cNvPr id="23" name="Text 21"/>
+          <p:cNvSpPr/>
+          <p:nvPr/>
+        </p:nvSpPr>
+        <p:spPr>
+          <a:xfrm>
+            <a:off x="7854696" y="3694176"/>
+            <a:ext cx="3035808" cy="206654"/>
+          </a:xfrm>
+          <a:prstGeom prst="rect">
+            <a:avLst/>
+          </a:prstGeom>
+          <a:noFill/>
+          <a:ln/>
+        </p:spPr>
+        <p:txBody>
+          <a:bodyPr wrap="square" lIns="254" tIns="254" rIns="254" bIns="254" rtlCol="0" anchor="t">
+            <a:normAutofit/>
+          </a:bodyPr>
+          <a:lstStyle/>
+          <a:p>
+            <a:pPr indent="0" marL="0">
+              <a:buNone/>
+            </a:pPr>
+            <a:r>
+              <a:rPr lang="en-US" sz="1120" dirty="0">
+                <a:solidFill>
+                  <a:srgbClr val="17364A"/>
+                </a:solidFill>
+                <a:latin typeface="Aptos" pitchFamily="34" charset="0"/>
+                <a:ea typeface="Aptos" pitchFamily="34" charset="-122"/>
+                <a:cs typeface="Aptos" pitchFamily="34" charset="-120"/>
+              </a:rPr>
+              <a:t>A proposed AI use should move through documented review before it becomes an operational workflow.</a:t>
+            </a:r>
+            <a:endParaRPr lang="en-US" sz="1120" dirty="0"/>
+          </a:p>
+        </p:txBody>
+      </p:sp>
+      <p:sp>
+        <p:nvSpPr>
+          <p:cNvPr id="24" name="Shape 22"/>
+          <p:cNvSpPr/>
+          <p:nvPr/>
+        </p:nvSpPr>
+        <p:spPr>
+          <a:xfrm>
+            <a:off x="7635240" y="4184294"/>
+            <a:ext cx="3474720" cy="1466698"/>
+          </a:xfrm>
+          <a:prstGeom prst="roundRect">
+            <a:avLst>
+              <a:gd name="adj" fmla="val 7481"/>
             </a:avLst>
           </a:prstGeom>
           <a:solidFill>
@@ -15030,13 +15462,13 @@
       </p:sp>
       <p:sp>
         <p:nvSpPr>
-          <p:cNvPr id="17" name="Text 15"/>
-          <p:cNvSpPr/>
-          <p:nvPr/>
-        </p:nvSpPr>
-        <p:spPr>
-          <a:xfrm>
-            <a:off x="7799832" y="4645152"/>
+          <p:cNvPr id="25" name="Text 23"/>
+          <p:cNvSpPr/>
+          <p:nvPr/>
+        </p:nvSpPr>
+        <p:spPr>
+          <a:xfrm>
+            <a:off x="7799832" y="4330598"/>
             <a:ext cx="3145536" cy="256032"/>
           </a:xfrm>
           <a:prstGeom prst="rect">
@@ -15069,14 +15501,14 @@
       </p:sp>
       <p:sp>
         <p:nvSpPr>
-          <p:cNvPr id="18" name="Text 16"/>
-          <p:cNvSpPr/>
-          <p:nvPr/>
-        </p:nvSpPr>
-        <p:spPr>
-          <a:xfrm>
-            <a:off x="7799832" y="4974336"/>
-            <a:ext cx="3145536" cy="576072"/>
+          <p:cNvPr id="26" name="Text 24"/>
+          <p:cNvSpPr/>
+          <p:nvPr/>
+        </p:nvSpPr>
+        <p:spPr>
+          <a:xfrm>
+            <a:off x="7799832" y="4659782"/>
+            <a:ext cx="3145536" cy="899770"/>
           </a:xfrm>
           <a:prstGeom prst="rect">
             <a:avLst/>
@@ -15102,7 +15534,7 @@
                 <a:ea typeface="Aptos" pitchFamily="34" charset="-122"/>
                 <a:cs typeface="Aptos" pitchFamily="34" charset="-120"/>
               </a:rPr>
-              <a:t>Translate this concept into clear decision rights, review steps, documentation expectations, and escalation paths before.</a:t>
+              <a:t>Translate this concept into clear decision rights, review steps, documentation expectations, and escalation paths before an AI-supported workflow is approved.</a:t>
             </a:r>
             <a:endParaRPr lang="en-US" sz="1320" dirty="0"/>
           </a:p>
@@ -15471,11 +15903,11 @@
         <p:spPr>
           <a:xfrm>
             <a:off x="7635240" y="1325880"/>
-            <a:ext cx="3474720" cy="1325880"/>
+            <a:ext cx="3474720" cy="1255471"/>
           </a:xfrm>
           <a:prstGeom prst="roundRect">
             <a:avLst>
-              <a:gd name="adj" fmla="val 8276"/>
+              <a:gd name="adj" fmla="val 8740"/>
             </a:avLst>
           </a:prstGeom>
           <a:solidFill>
@@ -15537,7 +15969,7 @@
         <p:spPr>
           <a:xfrm>
             <a:off x="7799832" y="1801368"/>
-            <a:ext cx="3145536" cy="758952"/>
+            <a:ext cx="3145536" cy="688543"/>
           </a:xfrm>
           <a:prstGeom prst="rect">
             <a:avLst/>
@@ -15577,7 +16009,7 @@
         </p:nvSpPr>
         <p:spPr>
           <a:xfrm>
-            <a:off x="7635240" y="2788920"/>
+            <a:off x="7635240" y="2718511"/>
             <a:ext cx="3474720" cy="1536192"/>
           </a:xfrm>
           <a:prstGeom prst="roundRect">
@@ -15604,8 +16036,8 @@
         </p:nvSpPr>
         <p:spPr>
           <a:xfrm>
-            <a:off x="7799832" y="2935224"/>
-            <a:ext cx="3145536" cy="256032"/>
+            <a:off x="7799832" y="2846527"/>
+            <a:ext cx="3145536" cy="237744"/>
           </a:xfrm>
           <a:prstGeom prst="rect">
             <a:avLst/>
@@ -15621,7 +16053,7 @@
               <a:buNone/>
             </a:pPr>
             <a:r>
-              <a:rPr lang="en-US" sz="1300" b="1" dirty="0">
+              <a:rPr lang="en-US" sz="1250" b="1" dirty="0">
                 <a:solidFill>
                   <a:srgbClr val="0068B7"/>
                 </a:solidFill>
@@ -15629,101 +16061,317 @@
                 <a:ea typeface="Aptos" pitchFamily="34" charset="-122"/>
                 <a:cs typeface="Aptos" pitchFamily="34" charset="-120"/>
               </a:rPr>
-              <a:t>Concept checkpoints</a:t>
-            </a:r>
-            <a:endParaRPr lang="en-US" sz="1300" dirty="0"/>
-          </a:p>
-        </p:txBody>
-      </p:sp>
-      <p:sp>
-        <p:nvSpPr>
-          <p:cNvPr id="15" name="Text 13"/>
-          <p:cNvSpPr/>
-          <p:nvPr/>
-        </p:nvSpPr>
-        <p:spPr>
-          <a:xfrm>
-            <a:off x="7818120" y="3300984"/>
-            <a:ext cx="3090672" cy="877824"/>
-          </a:xfrm>
-          <a:prstGeom prst="rect">
-            <a:avLst/>
-          </a:prstGeom>
-          <a:noFill/>
-          <a:ln/>
-        </p:spPr>
-        <p:txBody>
-          <a:bodyPr wrap="square" lIns="508" tIns="508" rIns="508" bIns="508" rtlCol="0" anchor="t">
+              <a:t>Risk control loop</a:t>
+            </a:r>
+            <a:endParaRPr lang="en-US" sz="1250" dirty="0"/>
+          </a:p>
+        </p:txBody>
+      </p:sp>
+      <p:sp>
+        <p:nvSpPr>
+          <p:cNvPr id="15" name="Shape 13"/>
+          <p:cNvSpPr/>
+          <p:nvPr/>
+        </p:nvSpPr>
+        <p:spPr>
+          <a:xfrm>
+            <a:off x="8763000" y="3399739"/>
+            <a:ext cx="164592" cy="0"/>
+          </a:xfrm>
+          <a:prstGeom prst="line">
+            <a:avLst/>
+          </a:prstGeom>
+          <a:noFill/>
+          <a:ln w="15240">
+            <a:solidFill>
+              <a:srgbClr val="8ABBD8"/>
+            </a:solidFill>
+            <a:prstDash val="solid"/>
+          </a:ln>
+        </p:spPr>
+      </p:sp>
+      <p:sp>
+        <p:nvSpPr>
+          <p:cNvPr id="16" name="Shape 14"/>
+          <p:cNvSpPr/>
+          <p:nvPr/>
+        </p:nvSpPr>
+        <p:spPr>
+          <a:xfrm>
+            <a:off x="7872984" y="3248863"/>
+            <a:ext cx="890016" cy="301752"/>
+          </a:xfrm>
+          <a:prstGeom prst="roundRect">
+            <a:avLst>
+              <a:gd name="adj" fmla="val 24242"/>
+            </a:avLst>
+          </a:prstGeom>
+          <a:solidFill>
+            <a:srgbClr val="0068B7"/>
+          </a:solidFill>
+          <a:ln w="12700">
+            <a:solidFill>
+              <a:srgbClr val="0068B7"/>
+            </a:solidFill>
+            <a:prstDash val="solid"/>
+          </a:ln>
+        </p:spPr>
+      </p:sp>
+      <p:sp>
+        <p:nvSpPr>
+          <p:cNvPr id="17" name="Text 15"/>
+          <p:cNvSpPr/>
+          <p:nvPr/>
+        </p:nvSpPr>
+        <p:spPr>
+          <a:xfrm>
+            <a:off x="7909560" y="3322015"/>
+            <a:ext cx="816864" cy="146304"/>
+          </a:xfrm>
+          <a:prstGeom prst="rect">
+            <a:avLst/>
+          </a:prstGeom>
+          <a:noFill/>
+          <a:ln/>
+        </p:spPr>
+        <p:txBody>
+          <a:bodyPr wrap="square" lIns="0" tIns="0" rIns="0" bIns="0" rtlCol="0" anchor="ctr">
             <a:normAutofit/>
           </a:bodyPr>
           <a:lstStyle/>
           <a:p>
-            <a:pPr indent="0" marL="0">
-              <a:buNone/>
-            </a:pPr>
-            <a:r>
-              <a:rPr lang="en-US" sz="1220" dirty="0">
-                <a:solidFill>
-                  <a:srgbClr val="17364A"/>
-                </a:solidFill>
-                <a:latin typeface="Aptos" pitchFamily="34" charset="0"/>
-                <a:ea typeface="Aptos" pitchFamily="34" charset="-122"/>
-                <a:cs typeface="Aptos" pitchFamily="34" charset="-120"/>
-              </a:rPr>
-              <a:t>A generative AI tool might be acceptable for drafting internal.</a:t>
-            </a:r>
-            <a:endParaRPr lang="en-US" sz="1220" dirty="0"/>
-          </a:p>
-          <a:p>
-            <a:pPr indent="0" marL="0">
-              <a:buNone/>
-            </a:pPr>
-            <a:r>
-              <a:rPr lang="en-US" sz="1220" dirty="0">
-                <a:solidFill>
-                  <a:srgbClr val="17364A"/>
-                </a:solidFill>
-                <a:latin typeface="Aptos" pitchFamily="34" charset="0"/>
-                <a:ea typeface="Aptos" pitchFamily="34" charset="-122"/>
-                <a:cs typeface="Aptos" pitchFamily="34" charset="-120"/>
-              </a:rPr>
-              <a:t>An agentic workflow might be acceptable for creating a draft task.</a:t>
-            </a:r>
-            <a:endParaRPr lang="en-US" sz="1220" dirty="0"/>
-          </a:p>
-          <a:p>
-            <a:pPr indent="0" marL="0">
-              <a:buNone/>
-            </a:pPr>
-            <a:r>
-              <a:rPr lang="en-US" sz="1220" dirty="0">
-                <a:solidFill>
-                  <a:srgbClr val="17364A"/>
-                </a:solidFill>
-                <a:latin typeface="Aptos" pitchFamily="34" charset="0"/>
-                <a:ea typeface="Aptos" pitchFamily="34" charset="-122"/>
-                <a:cs typeface="Aptos" pitchFamily="34" charset="-120"/>
-              </a:rPr>
-              <a:t>Risk appetite helps agencies explain these distinctions.</a:t>
-            </a:r>
-            <a:endParaRPr lang="en-US" sz="1220" dirty="0"/>
-          </a:p>
-        </p:txBody>
-      </p:sp>
-      <p:sp>
-        <p:nvSpPr>
-          <p:cNvPr id="16" name="Shape 14"/>
-          <p:cNvSpPr/>
-          <p:nvPr/>
-        </p:nvSpPr>
-        <p:spPr>
-          <a:xfrm>
-            <a:off x="7635240" y="4498848"/>
-            <a:ext cx="3474720" cy="1143000"/>
+            <a:pPr algn="ctr" indent="0" marL="0">
+              <a:buNone/>
+            </a:pPr>
+            <a:r>
+              <a:rPr lang="en-US" sz="880" b="1" dirty="0">
+                <a:solidFill>
+                  <a:srgbClr val="FFFFFF"/>
+                </a:solidFill>
+                <a:latin typeface="Aptos" pitchFamily="34" charset="0"/>
+                <a:ea typeface="Aptos" pitchFamily="34" charset="-122"/>
+                <a:cs typeface="Aptos" pitchFamily="34" charset="-120"/>
+              </a:rPr>
+              <a:t>Identify</a:t>
+            </a:r>
+            <a:endParaRPr lang="en-US" sz="880" dirty="0"/>
+          </a:p>
+        </p:txBody>
+      </p:sp>
+      <p:sp>
+        <p:nvSpPr>
+          <p:cNvPr id="18" name="Shape 16"/>
+          <p:cNvSpPr/>
+          <p:nvPr/>
+        </p:nvSpPr>
+        <p:spPr>
+          <a:xfrm>
+            <a:off x="9817608" y="3399739"/>
+            <a:ext cx="164592" cy="0"/>
+          </a:xfrm>
+          <a:prstGeom prst="line">
+            <a:avLst/>
+          </a:prstGeom>
+          <a:noFill/>
+          <a:ln w="15240">
+            <a:solidFill>
+              <a:srgbClr val="8ABBD8"/>
+            </a:solidFill>
+            <a:prstDash val="solid"/>
+          </a:ln>
+        </p:spPr>
+      </p:sp>
+      <p:sp>
+        <p:nvSpPr>
+          <p:cNvPr id="19" name="Shape 17"/>
+          <p:cNvSpPr/>
+          <p:nvPr/>
+        </p:nvSpPr>
+        <p:spPr>
+          <a:xfrm>
+            <a:off x="8927592" y="3248863"/>
+            <a:ext cx="890016" cy="301752"/>
           </a:xfrm>
           <a:prstGeom prst="roundRect">
             <a:avLst>
-              <a:gd name="adj" fmla="val 9600"/>
+              <a:gd name="adj" fmla="val 24242"/>
+            </a:avLst>
+          </a:prstGeom>
+          <a:solidFill>
+            <a:srgbClr val="2F8A28"/>
+          </a:solidFill>
+          <a:ln w="12700">
+            <a:solidFill>
+              <a:srgbClr val="2F8A28"/>
+            </a:solidFill>
+            <a:prstDash val="solid"/>
+          </a:ln>
+        </p:spPr>
+      </p:sp>
+      <p:sp>
+        <p:nvSpPr>
+          <p:cNvPr id="20" name="Text 18"/>
+          <p:cNvSpPr/>
+          <p:nvPr/>
+        </p:nvSpPr>
+        <p:spPr>
+          <a:xfrm>
+            <a:off x="8964168" y="3322015"/>
+            <a:ext cx="816864" cy="146304"/>
+          </a:xfrm>
+          <a:prstGeom prst="rect">
+            <a:avLst/>
+          </a:prstGeom>
+          <a:noFill/>
+          <a:ln/>
+        </p:spPr>
+        <p:txBody>
+          <a:bodyPr wrap="square" lIns="0" tIns="0" rIns="0" bIns="0" rtlCol="0" anchor="ctr">
+            <a:normAutofit/>
+          </a:bodyPr>
+          <a:lstStyle/>
+          <a:p>
+            <a:pPr algn="ctr" indent="0" marL="0">
+              <a:buNone/>
+            </a:pPr>
+            <a:r>
+              <a:rPr lang="en-US" sz="880" b="1" dirty="0">
+                <a:solidFill>
+                  <a:srgbClr val="FFFFFF"/>
+                </a:solidFill>
+                <a:latin typeface="Aptos" pitchFamily="34" charset="0"/>
+                <a:ea typeface="Aptos" pitchFamily="34" charset="-122"/>
+                <a:cs typeface="Aptos" pitchFamily="34" charset="-120"/>
+              </a:rPr>
+              <a:t>Control</a:t>
+            </a:r>
+            <a:endParaRPr lang="en-US" sz="880" dirty="0"/>
+          </a:p>
+        </p:txBody>
+      </p:sp>
+      <p:sp>
+        <p:nvSpPr>
+          <p:cNvPr id="21" name="Shape 19"/>
+          <p:cNvSpPr/>
+          <p:nvPr/>
+        </p:nvSpPr>
+        <p:spPr>
+          <a:xfrm>
+            <a:off x="9982200" y="3248863"/>
+            <a:ext cx="890016" cy="301752"/>
+          </a:xfrm>
+          <a:prstGeom prst="roundRect">
+            <a:avLst>
+              <a:gd name="adj" fmla="val 24242"/>
+            </a:avLst>
+          </a:prstGeom>
+          <a:solidFill>
+            <a:srgbClr val="6A4CA3"/>
+          </a:solidFill>
+          <a:ln w="12700">
+            <a:solidFill>
+              <a:srgbClr val="6A4CA3"/>
+            </a:solidFill>
+            <a:prstDash val="solid"/>
+          </a:ln>
+        </p:spPr>
+      </p:sp>
+      <p:sp>
+        <p:nvSpPr>
+          <p:cNvPr id="22" name="Text 20"/>
+          <p:cNvSpPr/>
+          <p:nvPr/>
+        </p:nvSpPr>
+        <p:spPr>
+          <a:xfrm>
+            <a:off x="10018776" y="3322015"/>
+            <a:ext cx="816864" cy="146304"/>
+          </a:xfrm>
+          <a:prstGeom prst="rect">
+            <a:avLst/>
+          </a:prstGeom>
+          <a:noFill/>
+          <a:ln/>
+        </p:spPr>
+        <p:txBody>
+          <a:bodyPr wrap="square" lIns="0" tIns="0" rIns="0" bIns="0" rtlCol="0" anchor="ctr">
+            <a:normAutofit/>
+          </a:bodyPr>
+          <a:lstStyle/>
+          <a:p>
+            <a:pPr algn="ctr" indent="0" marL="0">
+              <a:buNone/>
+            </a:pPr>
+            <a:r>
+              <a:rPr lang="en-US" sz="880" b="1" dirty="0">
+                <a:solidFill>
+                  <a:srgbClr val="FFFFFF"/>
+                </a:solidFill>
+                <a:latin typeface="Aptos" pitchFamily="34" charset="0"/>
+                <a:ea typeface="Aptos" pitchFamily="34" charset="-122"/>
+                <a:cs typeface="Aptos" pitchFamily="34" charset="-120"/>
+              </a:rPr>
+              <a:t>Monitor</a:t>
+            </a:r>
+            <a:endParaRPr lang="en-US" sz="880" dirty="0"/>
+          </a:p>
+        </p:txBody>
+      </p:sp>
+      <p:sp>
+        <p:nvSpPr>
+          <p:cNvPr id="23" name="Text 21"/>
+          <p:cNvSpPr/>
+          <p:nvPr/>
+        </p:nvSpPr>
+        <p:spPr>
+          <a:xfrm>
+            <a:off x="7854696" y="3742639"/>
+            <a:ext cx="3035808" cy="365760"/>
+          </a:xfrm>
+          <a:prstGeom prst="rect">
+            <a:avLst/>
+          </a:prstGeom>
+          <a:noFill/>
+          <a:ln/>
+        </p:spPr>
+        <p:txBody>
+          <a:bodyPr wrap="square" lIns="254" tIns="254" rIns="254" bIns="254" rtlCol="0" anchor="t">
+            <a:normAutofit/>
+          </a:bodyPr>
+          <a:lstStyle/>
+          <a:p>
+            <a:pPr indent="0" marL="0">
+              <a:buNone/>
+            </a:pPr>
+            <a:r>
+              <a:rPr lang="en-US" sz="1120" dirty="0">
+                <a:solidFill>
+                  <a:srgbClr val="17364A"/>
+                </a:solidFill>
+                <a:latin typeface="Aptos" pitchFamily="34" charset="0"/>
+                <a:ea typeface="Aptos" pitchFamily="34" charset="-122"/>
+                <a:cs typeface="Aptos" pitchFamily="34" charset="-120"/>
+              </a:rPr>
+              <a:t>Responsible use depends on finding risks early, applying safeguards, and watching for drift or harm over time.</a:t>
+            </a:r>
+            <a:endParaRPr lang="en-US" sz="1120" dirty="0"/>
+          </a:p>
+        </p:txBody>
+      </p:sp>
+      <p:sp>
+        <p:nvSpPr>
+          <p:cNvPr id="24" name="Shape 22"/>
+          <p:cNvSpPr/>
+          <p:nvPr/>
+        </p:nvSpPr>
+        <p:spPr>
+          <a:xfrm>
+            <a:off x="7635240" y="4391863"/>
+            <a:ext cx="3474720" cy="1255471"/>
+          </a:xfrm>
+          <a:prstGeom prst="roundRect">
+            <a:avLst>
+              <a:gd name="adj" fmla="val 8740"/>
             </a:avLst>
           </a:prstGeom>
           <a:solidFill>
@@ -15739,13 +16387,13 @@
       </p:sp>
       <p:sp>
         <p:nvSpPr>
-          <p:cNvPr id="17" name="Text 15"/>
-          <p:cNvSpPr/>
-          <p:nvPr/>
-        </p:nvSpPr>
-        <p:spPr>
-          <a:xfrm>
-            <a:off x="7799832" y="4645152"/>
+          <p:cNvPr id="25" name="Text 23"/>
+          <p:cNvSpPr/>
+          <p:nvPr/>
+        </p:nvSpPr>
+        <p:spPr>
+          <a:xfrm>
+            <a:off x="7799832" y="4538167"/>
             <a:ext cx="3145536" cy="256032"/>
           </a:xfrm>
           <a:prstGeom prst="rect">
@@ -15778,14 +16426,14 @@
       </p:sp>
       <p:sp>
         <p:nvSpPr>
-          <p:cNvPr id="18" name="Text 16"/>
-          <p:cNvSpPr/>
-          <p:nvPr/>
-        </p:nvSpPr>
-        <p:spPr>
-          <a:xfrm>
-            <a:off x="7799832" y="4974336"/>
-            <a:ext cx="3145536" cy="576072"/>
+          <p:cNvPr id="26" name="Text 24"/>
+          <p:cNvSpPr/>
+          <p:nvPr/>
+        </p:nvSpPr>
+        <p:spPr>
+          <a:xfrm>
+            <a:off x="7799832" y="4867351"/>
+            <a:ext cx="3145536" cy="688543"/>
           </a:xfrm>
           <a:prstGeom prst="rect">
             <a:avLst/>
@@ -15811,7 +16459,7 @@
                 <a:ea typeface="Aptos" pitchFamily="34" charset="-122"/>
                 <a:cs typeface="Aptos" pitchFamily="34" charset="-120"/>
               </a:rPr>
-              <a:t>Identify what could go wrong, who could be affected, what safeguards are needed, and what evidence should be reviewed.</a:t>
+              <a:t>Identify what could go wrong, who could be affected, what safeguards are needed, and what evidence should be reviewed before use.</a:t>
             </a:r>
             <a:endParaRPr lang="en-US" sz="1320" dirty="0"/>
           </a:p>
@@ -16180,11 +16828,11 @@
         <p:spPr>
           <a:xfrm>
             <a:off x="7635240" y="1325880"/>
-            <a:ext cx="3474720" cy="1325880"/>
+            <a:ext cx="3474720" cy="1255471"/>
           </a:xfrm>
           <a:prstGeom prst="roundRect">
             <a:avLst>
-              <a:gd name="adj" fmla="val 8276"/>
+              <a:gd name="adj" fmla="val 8740"/>
             </a:avLst>
           </a:prstGeom>
           <a:solidFill>
@@ -16246,7 +16894,7 @@
         <p:spPr>
           <a:xfrm>
             <a:off x="7799832" y="1801368"/>
-            <a:ext cx="3145536" cy="758952"/>
+            <a:ext cx="3145536" cy="688543"/>
           </a:xfrm>
           <a:prstGeom prst="rect">
             <a:avLst/>
@@ -16286,7 +16934,7 @@
         </p:nvSpPr>
         <p:spPr>
           <a:xfrm>
-            <a:off x="7635240" y="2788920"/>
+            <a:off x="7635240" y="2718511"/>
             <a:ext cx="3474720" cy="1536192"/>
           </a:xfrm>
           <a:prstGeom prst="roundRect">
@@ -16313,7 +16961,7 @@
         </p:nvSpPr>
         <p:spPr>
           <a:xfrm>
-            <a:off x="7799832" y="2935224"/>
+            <a:off x="7799832" y="2864815"/>
             <a:ext cx="3145536" cy="256032"/>
           </a:xfrm>
           <a:prstGeom prst="rect">
@@ -16352,7 +17000,7 @@
         </p:nvSpPr>
         <p:spPr>
           <a:xfrm>
-            <a:off x="7818120" y="3300984"/>
+            <a:off x="7818120" y="3230575"/>
             <a:ext cx="3090672" cy="877824"/>
           </a:xfrm>
           <a:prstGeom prst="rect">
@@ -16427,12 +17075,12 @@
         </p:nvSpPr>
         <p:spPr>
           <a:xfrm>
-            <a:off x="7635240" y="4498848"/>
-            <a:ext cx="3474720" cy="1143000"/>
+            <a:off x="7635240" y="4391863"/>
+            <a:ext cx="3474720" cy="1255471"/>
           </a:xfrm>
           <a:prstGeom prst="roundRect">
             <a:avLst>
-              <a:gd name="adj" fmla="val 9600"/>
+              <a:gd name="adj" fmla="val 8740"/>
             </a:avLst>
           </a:prstGeom>
           <a:solidFill>
@@ -16454,7 +17102,7 @@
         </p:nvSpPr>
         <p:spPr>
           <a:xfrm>
-            <a:off x="7799832" y="4645152"/>
+            <a:off x="7799832" y="4538167"/>
             <a:ext cx="3145536" cy="256032"/>
           </a:xfrm>
           <a:prstGeom prst="rect">
@@ -16493,8 +17141,8 @@
         </p:nvSpPr>
         <p:spPr>
           <a:xfrm>
-            <a:off x="7799832" y="4974336"/>
-            <a:ext cx="3145536" cy="576072"/>
+            <a:off x="7799832" y="4867351"/>
+            <a:ext cx="3145536" cy="688543"/>
           </a:xfrm>
           <a:prstGeom prst="rect">
             <a:avLst/>
@@ -16520,7 +17168,7 @@
                 <a:ea typeface="Aptos" pitchFamily="34" charset="-122"/>
                 <a:cs typeface="Aptos" pitchFamily="34" charset="-120"/>
               </a:rPr>
-              <a:t>Identify what could go wrong, who could be affected, what safeguards are needed, and what evidence should be reviewed.</a:t>
+              <a:t>Identify what could go wrong, who could be affected, what safeguards are needed, and what evidence should be reviewed before use.</a:t>
             </a:r>
             <a:endParaRPr lang="en-US" sz="1320" dirty="0"/>
           </a:p>

--- a/downloads/presentations/modules/gov-410.pptx
+++ b/downloads/presentations/modules/gov-410.pptx
@@ -3243,8 +3243,8 @@
         </p:nvSpPr>
         <p:spPr>
           <a:xfrm>
-            <a:off x="868680" y="1508760"/>
-            <a:ext cx="6309360" cy="4160520"/>
+            <a:off x="822960" y="1463040"/>
+            <a:ext cx="6565392" cy="4343400"/>
           </a:xfrm>
           <a:prstGeom prst="rect">
             <a:avLst/>
@@ -3262,7 +3262,7 @@
               <a:buNone/>
             </a:pPr>
             <a:r>
-              <a:rPr lang="en-US" sz="2100" dirty="0">
+              <a:rPr lang="en-US" sz="1920" dirty="0">
                 <a:solidFill>
                   <a:srgbClr val="003A63"/>
                 </a:solidFill>
@@ -3270,16 +3270,16 @@
                 <a:ea typeface="Aptos" pitchFamily="34" charset="-122"/>
                 <a:cs typeface="Aptos" pitchFamily="34" charset="-120"/>
               </a:rPr>
-              <a:t>• Risk appetite should be expressed in plain language and translated into operating rules.</a:t>
-            </a:r>
-            <a:endParaRPr lang="en-US" sz="2100" dirty="0"/>
-          </a:p>
-          <a:p>
-            <a:pPr indent="0" marL="0">
-              <a:buNone/>
-            </a:pPr>
-            <a:r>
-              <a:rPr lang="en-US" sz="2100" dirty="0">
+              <a:t>• Risk appetite should be expressed in plain language and translated into.</a:t>
+            </a:r>
+            <a:endParaRPr lang="en-US" sz="1920" dirty="0"/>
+          </a:p>
+          <a:p>
+            <a:pPr indent="0" marL="0">
+              <a:buNone/>
+            </a:pPr>
+            <a:r>
+              <a:rPr lang="en-US" sz="1920" dirty="0">
                 <a:solidFill>
                   <a:srgbClr val="003A63"/>
                 </a:solidFill>
@@ -3287,16 +3287,16 @@
                 <a:ea typeface="Aptos" pitchFamily="34" charset="-122"/>
                 <a:cs typeface="Aptos" pitchFamily="34" charset="-120"/>
               </a:rPr>
-              <a:t>• For example, an agency might state that it encourages low-risk AI uses that reduce internal.</a:t>
-            </a:r>
-            <a:endParaRPr lang="en-US" sz="2100" dirty="0"/>
-          </a:p>
-          <a:p>
-            <a:pPr indent="0" marL="0">
-              <a:buNone/>
-            </a:pPr>
-            <a:r>
-              <a:rPr lang="en-US" sz="2100" dirty="0">
+              <a:t>• For example, an agency might state that it encourages low-risk AI uses that.</a:t>
+            </a:r>
+            <a:endParaRPr lang="en-US" sz="1920" dirty="0"/>
+          </a:p>
+          <a:p>
+            <a:pPr indent="0" marL="0">
+              <a:buNone/>
+            </a:pPr>
+            <a:r>
+              <a:rPr lang="en-US" sz="1920" dirty="0">
                 <a:solidFill>
                   <a:srgbClr val="003A63"/>
                 </a:solidFill>
@@ -3304,9 +3304,9 @@
                 <a:ea typeface="Aptos" pitchFamily="34" charset="-122"/>
                 <a:cs typeface="Aptos" pitchFamily="34" charset="-120"/>
               </a:rPr>
-              <a:t>• It might state that it will consider moderate-risk uses involving operational data only with.</a:t>
-            </a:r>
-            <a:endParaRPr lang="en-US" sz="2100" dirty="0"/>
+              <a:t>• It might state that it will consider moderate-risk uses involving.</a:t>
+            </a:r>
+            <a:endParaRPr lang="en-US" sz="1920" dirty="0"/>
           </a:p>
         </p:txBody>
       </p:sp>
@@ -3318,12 +3318,12 @@
         </p:nvSpPr>
         <p:spPr>
           <a:xfrm>
-            <a:off x="7635240" y="1325880"/>
-            <a:ext cx="3474720" cy="1207008"/>
+            <a:off x="7543800" y="1325880"/>
+            <a:ext cx="3611880" cy="1261872"/>
           </a:xfrm>
           <a:prstGeom prst="roundRect">
             <a:avLst>
-              <a:gd name="adj" fmla="val 9091"/>
+              <a:gd name="adj" fmla="val 8696"/>
             </a:avLst>
           </a:prstGeom>
           <a:solidFill>
@@ -3345,8 +3345,8 @@
         </p:nvSpPr>
         <p:spPr>
           <a:xfrm>
-            <a:off x="7799832" y="1472184"/>
-            <a:ext cx="3145536" cy="256032"/>
+            <a:off x="7708392" y="1453896"/>
+            <a:ext cx="3282696" cy="228600"/>
           </a:xfrm>
           <a:prstGeom prst="rect">
             <a:avLst/>
@@ -3362,7 +3362,7 @@
               <a:buNone/>
             </a:pPr>
             <a:r>
-              <a:rPr lang="en-US" sz="1300" b="1" dirty="0">
+              <a:rPr lang="en-US" sz="1220" b="1" dirty="0">
                 <a:solidFill>
                   <a:srgbClr val="0068B7"/>
                 </a:solidFill>
@@ -3372,7 +3372,7 @@
               </a:rPr>
               <a:t>Governance lens</a:t>
             </a:r>
-            <a:endParaRPr lang="en-US" sz="1300" dirty="0"/>
+            <a:endParaRPr lang="en-US" sz="1220" dirty="0"/>
           </a:p>
         </p:txBody>
       </p:sp>
@@ -3384,8 +3384,8 @@
         </p:nvSpPr>
         <p:spPr>
           <a:xfrm>
-            <a:off x="7799832" y="1801368"/>
-            <a:ext cx="3145536" cy="640080"/>
+            <a:off x="7708392" y="1764792"/>
+            <a:ext cx="3282696" cy="749808"/>
           </a:xfrm>
           <a:prstGeom prst="rect">
             <a:avLst/>
@@ -3403,7 +3403,7 @@
               <a:buNone/>
             </a:pPr>
             <a:r>
-              <a:rPr lang="en-US" sz="1320" dirty="0">
+              <a:rPr lang="en-US" sz="1220" dirty="0">
                 <a:solidFill>
                   <a:srgbClr val="17364A"/>
                 </a:solidFill>
@@ -3411,9 +3411,9 @@
                 <a:ea typeface="Aptos" pitchFamily="34" charset="-122"/>
                 <a:cs typeface="Aptos" pitchFamily="34" charset="-120"/>
               </a:rPr>
-              <a:t>Risk appetite should be expressed in plain language and translated into operating rules.</a:t>
-            </a:r>
-            <a:endParaRPr lang="en-US" sz="1320" dirty="0"/>
+              <a:t>Risk appetite should be expressed in plain language and translated into.</a:t>
+            </a:r>
+            <a:endParaRPr lang="en-US" sz="1220" dirty="0"/>
           </a:p>
         </p:txBody>
       </p:sp>
@@ -3425,12 +3425,12 @@
         </p:nvSpPr>
         <p:spPr>
           <a:xfrm>
-            <a:off x="7635240" y="2670048"/>
-            <a:ext cx="3474720" cy="1377086"/>
+            <a:off x="7543800" y="2724912"/>
+            <a:ext cx="3611880" cy="1527048"/>
           </a:xfrm>
           <a:prstGeom prst="roundRect">
             <a:avLst>
-              <a:gd name="adj" fmla="val 7968"/>
+              <a:gd name="adj" fmla="val 7186"/>
             </a:avLst>
           </a:prstGeom>
           <a:solidFill>
@@ -3452,8 +3452,8 @@
         </p:nvSpPr>
         <p:spPr>
           <a:xfrm>
-            <a:off x="7799832" y="2816352"/>
-            <a:ext cx="3145536" cy="256032"/>
+            <a:off x="7708392" y="2852928"/>
+            <a:ext cx="3282696" cy="228600"/>
           </a:xfrm>
           <a:prstGeom prst="rect">
             <a:avLst/>
@@ -3469,7 +3469,7 @@
               <a:buNone/>
             </a:pPr>
             <a:r>
-              <a:rPr lang="en-US" sz="1300" b="1" dirty="0">
+              <a:rPr lang="en-US" sz="1220" b="1" dirty="0">
                 <a:solidFill>
                   <a:srgbClr val="0068B7"/>
                 </a:solidFill>
@@ -3479,7 +3479,7 @@
               </a:rPr>
               <a:t>Concept checkpoints</a:t>
             </a:r>
-            <a:endParaRPr lang="en-US" sz="1300" dirty="0"/>
+            <a:endParaRPr lang="en-US" sz="1220" dirty="0"/>
           </a:p>
         </p:txBody>
       </p:sp>
@@ -3491,8 +3491,8 @@
         </p:nvSpPr>
         <p:spPr>
           <a:xfrm>
-            <a:off x="7818120" y="3182112"/>
-            <a:ext cx="3090672" cy="718718"/>
+            <a:off x="7726680" y="3182112"/>
+            <a:ext cx="3227832" cy="960120"/>
           </a:xfrm>
           <a:prstGeom prst="rect">
             <a:avLst/>
@@ -3510,7 +3510,7 @@
               <a:buNone/>
             </a:pPr>
             <a:r>
-              <a:rPr lang="en-US" sz="1220" dirty="0">
+              <a:rPr lang="en-US" sz="1140" dirty="0">
                 <a:solidFill>
                   <a:srgbClr val="17364A"/>
                 </a:solidFill>
@@ -3518,16 +3518,16 @@
                 <a:ea typeface="Aptos" pitchFamily="34" charset="-122"/>
                 <a:cs typeface="Aptos" pitchFamily="34" charset="-120"/>
               </a:rPr>
-              <a:t>For example, an agency might state that it encourages low-risk AI.</a:t>
-            </a:r>
-            <a:endParaRPr lang="en-US" sz="1220" dirty="0"/>
-          </a:p>
-          <a:p>
-            <a:pPr indent="0" marL="0">
-              <a:buNone/>
-            </a:pPr>
-            <a:r>
-              <a:rPr lang="en-US" sz="1220" dirty="0">
+              <a:t>For example, an agency might state that it.</a:t>
+            </a:r>
+            <a:endParaRPr lang="en-US" sz="1140" dirty="0"/>
+          </a:p>
+          <a:p>
+            <a:pPr indent="0" marL="0">
+              <a:buNone/>
+            </a:pPr>
+            <a:r>
+              <a:rPr lang="en-US" sz="1140" dirty="0">
                 <a:solidFill>
                   <a:srgbClr val="17364A"/>
                 </a:solidFill>
@@ -3535,16 +3535,16 @@
                 <a:ea typeface="Aptos" pitchFamily="34" charset="-122"/>
                 <a:cs typeface="Aptos" pitchFamily="34" charset="-120"/>
               </a:rPr>
-              <a:t>It might state that it will consider moderate-risk uses involving.</a:t>
-            </a:r>
-            <a:endParaRPr lang="en-US" sz="1220" dirty="0"/>
-          </a:p>
-          <a:p>
-            <a:pPr indent="0" marL="0">
-              <a:buNone/>
-            </a:pPr>
-            <a:r>
-              <a:rPr lang="en-US" sz="1220" dirty="0">
+              <a:t>It might state that it will consider moderate-risk.</a:t>
+            </a:r>
+            <a:endParaRPr lang="en-US" sz="1140" dirty="0"/>
+          </a:p>
+          <a:p>
+            <a:pPr indent="0" marL="0">
+              <a:buNone/>
+            </a:pPr>
+            <a:r>
+              <a:rPr lang="en-US" sz="1140" dirty="0">
                 <a:solidFill>
                   <a:srgbClr val="17364A"/>
                 </a:solidFill>
@@ -3552,9 +3552,9 @@
                 <a:ea typeface="Aptos" pitchFamily="34" charset="-122"/>
                 <a:cs typeface="Aptos" pitchFamily="34" charset="-120"/>
               </a:rPr>
-              <a:t>It might state that it does not permit AI to make final public.</a:t>
-            </a:r>
-            <a:endParaRPr lang="en-US" sz="1220" dirty="0"/>
+              <a:t>It might state that it does not permit AI to make.</a:t>
+            </a:r>
+            <a:endParaRPr lang="en-US" sz="1140" dirty="0"/>
           </a:p>
         </p:txBody>
       </p:sp>
@@ -3566,12 +3566,12 @@
         </p:nvSpPr>
         <p:spPr>
           <a:xfrm>
-            <a:off x="7635240" y="4184294"/>
-            <a:ext cx="3474720" cy="1466698"/>
+            <a:off x="7543800" y="4389120"/>
+            <a:ext cx="3611880" cy="1261872"/>
           </a:xfrm>
           <a:prstGeom prst="roundRect">
             <a:avLst>
-              <a:gd name="adj" fmla="val 7481"/>
+              <a:gd name="adj" fmla="val 8696"/>
             </a:avLst>
           </a:prstGeom>
           <a:solidFill>
@@ -3593,8 +3593,8 @@
         </p:nvSpPr>
         <p:spPr>
           <a:xfrm>
-            <a:off x="7799832" y="4330598"/>
-            <a:ext cx="3145536" cy="256032"/>
+            <a:off x="7708392" y="4517136"/>
+            <a:ext cx="3282696" cy="228600"/>
           </a:xfrm>
           <a:prstGeom prst="rect">
             <a:avLst/>
@@ -3610,7 +3610,7 @@
               <a:buNone/>
             </a:pPr>
             <a:r>
-              <a:rPr lang="en-US" sz="1300" b="1" dirty="0">
+              <a:rPr lang="en-US" sz="1220" b="1" dirty="0">
                 <a:solidFill>
                   <a:srgbClr val="0068B7"/>
                 </a:solidFill>
@@ -3620,7 +3620,7 @@
               </a:rPr>
               <a:t>What to document</a:t>
             </a:r>
-            <a:endParaRPr lang="en-US" sz="1300" dirty="0"/>
+            <a:endParaRPr lang="en-US" sz="1220" dirty="0"/>
           </a:p>
         </p:txBody>
       </p:sp>
@@ -3632,8 +3632,8 @@
         </p:nvSpPr>
         <p:spPr>
           <a:xfrm>
-            <a:off x="7799832" y="4659782"/>
-            <a:ext cx="3145536" cy="899770"/>
+            <a:off x="7708392" y="4828032"/>
+            <a:ext cx="3282696" cy="749808"/>
           </a:xfrm>
           <a:prstGeom prst="rect">
             <a:avLst/>
@@ -3651,7 +3651,7 @@
               <a:buNone/>
             </a:pPr>
             <a:r>
-              <a:rPr lang="en-US" sz="1320" dirty="0">
+              <a:rPr lang="en-US" sz="1220" dirty="0">
                 <a:solidFill>
                   <a:srgbClr val="17364A"/>
                 </a:solidFill>
@@ -3659,9 +3659,9 @@
                 <a:ea typeface="Aptos" pitchFamily="34" charset="-122"/>
                 <a:cs typeface="Aptos" pitchFamily="34" charset="-120"/>
               </a:rPr>
-              <a:t>Translate this concept into clear decision rights, review steps, documentation expectations, and escalation paths before an AI-supported workflow is approved.</a:t>
-            </a:r>
-            <a:endParaRPr lang="en-US" sz="1320" dirty="0"/>
+              <a:t>Translate this concept into clear decision rights, review steps, documentation.</a:t>
+            </a:r>
+            <a:endParaRPr lang="en-US" sz="1220" dirty="0"/>
           </a:p>
         </p:txBody>
       </p:sp>
@@ -3952,8 +3952,8 @@
         </p:nvSpPr>
         <p:spPr>
           <a:xfrm>
-            <a:off x="868680" y="1508760"/>
-            <a:ext cx="6309360" cy="4160520"/>
+            <a:off x="822960" y="1463040"/>
+            <a:ext cx="6565392" cy="4343400"/>
           </a:xfrm>
           <a:prstGeom prst="rect">
             <a:avLst/>
@@ -3971,7 +3971,7 @@
               <a:buNone/>
             </a:pPr>
             <a:r>
-              <a:rPr lang="en-US" sz="2100" dirty="0">
+              <a:rPr lang="en-US" sz="1920" dirty="0">
                 <a:solidFill>
                   <a:srgbClr val="003A63"/>
                 </a:solidFill>
@@ -3981,14 +3981,14 @@
               </a:rPr>
               <a:t>• A common failure mode is vague risk language.</a:t>
             </a:r>
-            <a:endParaRPr lang="en-US" sz="2100" dirty="0"/>
-          </a:p>
-          <a:p>
-            <a:pPr indent="0" marL="0">
-              <a:buNone/>
-            </a:pPr>
-            <a:r>
-              <a:rPr lang="en-US" sz="2100" dirty="0">
+            <a:endParaRPr lang="en-US" sz="1920" dirty="0"/>
+          </a:p>
+          <a:p>
+            <a:pPr indent="0" marL="0">
+              <a:buNone/>
+            </a:pPr>
+            <a:r>
+              <a:rPr lang="en-US" sz="1920" dirty="0">
                 <a:solidFill>
                   <a:srgbClr val="003A63"/>
                 </a:solidFill>
@@ -3998,14 +3998,14 @@
               </a:rPr>
               <a:t>• Phrases like 'use AI responsibly' do not help staff decide what is allowed.</a:t>
             </a:r>
-            <a:endParaRPr lang="en-US" sz="2100" dirty="0"/>
-          </a:p>
-          <a:p>
-            <a:pPr indent="0" marL="0">
-              <a:buNone/>
-            </a:pPr>
-            <a:r>
-              <a:rPr lang="en-US" sz="2100" dirty="0">
+            <a:endParaRPr lang="en-US" sz="1920" dirty="0"/>
+          </a:p>
+          <a:p>
+            <a:pPr indent="0" marL="0">
+              <a:buNone/>
+            </a:pPr>
+            <a:r>
+              <a:rPr lang="en-US" sz="1920" dirty="0">
                 <a:solidFill>
                   <a:srgbClr val="003A63"/>
                 </a:solidFill>
@@ -4013,9 +4013,9 @@
                 <a:ea typeface="Aptos" pitchFamily="34" charset="-122"/>
                 <a:cs typeface="Aptos" pitchFamily="34" charset="-120"/>
               </a:rPr>
-              <a:t>• A guardrail is to define concrete examples of encouraged, conditional, restricted, and.</a:t>
-            </a:r>
-            <a:endParaRPr lang="en-US" sz="2100" dirty="0"/>
+              <a:t>• A guardrail is to define concrete examples of encouraged, conditional,.</a:t>
+            </a:r>
+            <a:endParaRPr lang="en-US" sz="1920" dirty="0"/>
           </a:p>
         </p:txBody>
       </p:sp>
@@ -4027,12 +4027,12 @@
         </p:nvSpPr>
         <p:spPr>
           <a:xfrm>
-            <a:off x="7635240" y="1325880"/>
-            <a:ext cx="3474720" cy="1207008"/>
+            <a:off x="7543800" y="1325880"/>
+            <a:ext cx="3611880" cy="1261872"/>
           </a:xfrm>
           <a:prstGeom prst="roundRect">
             <a:avLst>
-              <a:gd name="adj" fmla="val 9091"/>
+              <a:gd name="adj" fmla="val 8696"/>
             </a:avLst>
           </a:prstGeom>
           <a:solidFill>
@@ -4054,8 +4054,8 @@
         </p:nvSpPr>
         <p:spPr>
           <a:xfrm>
-            <a:off x="7799832" y="1472184"/>
-            <a:ext cx="3145536" cy="256032"/>
+            <a:off x="7708392" y="1453896"/>
+            <a:ext cx="3282696" cy="228600"/>
           </a:xfrm>
           <a:prstGeom prst="rect">
             <a:avLst/>
@@ -4071,7 +4071,7 @@
               <a:buNone/>
             </a:pPr>
             <a:r>
-              <a:rPr lang="en-US" sz="1300" b="1" dirty="0">
+              <a:rPr lang="en-US" sz="1220" b="1" dirty="0">
                 <a:solidFill>
                   <a:srgbClr val="0068B7"/>
                 </a:solidFill>
@@ -4081,7 +4081,7 @@
               </a:rPr>
               <a:t>Risk check</a:t>
             </a:r>
-            <a:endParaRPr lang="en-US" sz="1300" dirty="0"/>
+            <a:endParaRPr lang="en-US" sz="1220" dirty="0"/>
           </a:p>
         </p:txBody>
       </p:sp>
@@ -4093,8 +4093,8 @@
         </p:nvSpPr>
         <p:spPr>
           <a:xfrm>
-            <a:off x="7799832" y="1801368"/>
-            <a:ext cx="3145536" cy="640080"/>
+            <a:off x="7708392" y="1764792"/>
+            <a:ext cx="3282696" cy="749808"/>
           </a:xfrm>
           <a:prstGeom prst="rect">
             <a:avLst/>
@@ -4112,7 +4112,7 @@
               <a:buNone/>
             </a:pPr>
             <a:r>
-              <a:rPr lang="en-US" sz="1320" dirty="0">
+              <a:rPr lang="en-US" sz="1220" dirty="0">
                 <a:solidFill>
                   <a:srgbClr val="17364A"/>
                 </a:solidFill>
@@ -4122,7 +4122,7 @@
               </a:rPr>
               <a:t>A common failure mode is vague risk language.</a:t>
             </a:r>
-            <a:endParaRPr lang="en-US" sz="1320" dirty="0"/>
+            <a:endParaRPr lang="en-US" sz="1220" dirty="0"/>
           </a:p>
         </p:txBody>
       </p:sp>
@@ -4134,12 +4134,12 @@
         </p:nvSpPr>
         <p:spPr>
           <a:xfrm>
-            <a:off x="7635240" y="2670048"/>
-            <a:ext cx="3474720" cy="1536192"/>
+            <a:off x="7543800" y="2724912"/>
+            <a:ext cx="3611880" cy="1527048"/>
           </a:xfrm>
           <a:prstGeom prst="roundRect">
             <a:avLst>
-              <a:gd name="adj" fmla="val 7143"/>
+              <a:gd name="adj" fmla="val 7186"/>
             </a:avLst>
           </a:prstGeom>
           <a:solidFill>
@@ -4161,8 +4161,8 @@
         </p:nvSpPr>
         <p:spPr>
           <a:xfrm>
-            <a:off x="7799832" y="2816352"/>
-            <a:ext cx="3145536" cy="256032"/>
+            <a:off x="7708392" y="2852928"/>
+            <a:ext cx="3282696" cy="228600"/>
           </a:xfrm>
           <a:prstGeom prst="rect">
             <a:avLst/>
@@ -4178,7 +4178,7 @@
               <a:buNone/>
             </a:pPr>
             <a:r>
-              <a:rPr lang="en-US" sz="1300" b="1" dirty="0">
+              <a:rPr lang="en-US" sz="1220" b="1" dirty="0">
                 <a:solidFill>
                   <a:srgbClr val="0068B7"/>
                 </a:solidFill>
@@ -4188,7 +4188,7 @@
               </a:rPr>
               <a:t>Concept checkpoints</a:t>
             </a:r>
-            <a:endParaRPr lang="en-US" sz="1300" dirty="0"/>
+            <a:endParaRPr lang="en-US" sz="1220" dirty="0"/>
           </a:p>
         </p:txBody>
       </p:sp>
@@ -4200,8 +4200,8 @@
         </p:nvSpPr>
         <p:spPr>
           <a:xfrm>
-            <a:off x="7818120" y="3182112"/>
-            <a:ext cx="3090672" cy="877824"/>
+            <a:off x="7726680" y="3182112"/>
+            <a:ext cx="3227832" cy="960120"/>
           </a:xfrm>
           <a:prstGeom prst="rect">
             <a:avLst/>
@@ -4219,7 +4219,7 @@
               <a:buNone/>
             </a:pPr>
             <a:r>
-              <a:rPr lang="en-US" sz="1220" dirty="0">
+              <a:rPr lang="en-US" sz="1140" dirty="0">
                 <a:solidFill>
                   <a:srgbClr val="17364A"/>
                 </a:solidFill>
@@ -4229,14 +4229,14 @@
               </a:rPr>
               <a:t>Another risk is risk appetite that ignores equity.</a:t>
             </a:r>
-            <a:endParaRPr lang="en-US" sz="1220" dirty="0"/>
-          </a:p>
-          <a:p>
-            <a:pPr indent="0" marL="0">
-              <a:buNone/>
-            </a:pPr>
-            <a:r>
-              <a:rPr lang="en-US" sz="1220" dirty="0">
+            <a:endParaRPr lang="en-US" sz="1140" dirty="0"/>
+          </a:p>
+          <a:p>
+            <a:pPr indent="0" marL="0">
+              <a:buNone/>
+            </a:pPr>
+            <a:r>
+              <a:rPr lang="en-US" sz="1140" dirty="0">
                 <a:solidFill>
                   <a:srgbClr val="17364A"/>
                 </a:solidFill>
@@ -4244,16 +4244,16 @@
                 <a:ea typeface="Aptos" pitchFamily="34" charset="-122"/>
                 <a:cs typeface="Aptos" pitchFamily="34" charset="-120"/>
               </a:rPr>
-              <a:t>A tool may appear operationally useful while shifting burden to.</a:t>
-            </a:r>
-            <a:endParaRPr lang="en-US" sz="1220" dirty="0"/>
-          </a:p>
-          <a:p>
-            <a:pPr indent="0" marL="0">
-              <a:buNone/>
-            </a:pPr>
-            <a:r>
-              <a:rPr lang="en-US" sz="1220" dirty="0">
+              <a:t>A tool may appear operationally useful while.</a:t>
+            </a:r>
+            <a:endParaRPr lang="en-US" sz="1140" dirty="0"/>
+          </a:p>
+          <a:p>
+            <a:pPr indent="0" marL="0">
+              <a:buNone/>
+            </a:pPr>
+            <a:r>
+              <a:rPr lang="en-US" sz="1140" dirty="0">
                 <a:solidFill>
                   <a:srgbClr val="17364A"/>
                 </a:solidFill>
@@ -4261,9 +4261,9 @@
                 <a:ea typeface="Aptos" pitchFamily="34" charset="-122"/>
                 <a:cs typeface="Aptos" pitchFamily="34" charset="-120"/>
               </a:rPr>
-              <a:t>A guardrail is to require equity impact review for uses that.</a:t>
-            </a:r>
-            <a:endParaRPr lang="en-US" sz="1220" dirty="0"/>
+              <a:t>A guardrail is to require equity impact review for.</a:t>
+            </a:r>
+            <a:endParaRPr lang="en-US" sz="1140" dirty="0"/>
           </a:p>
         </p:txBody>
       </p:sp>
@@ -4275,12 +4275,12 @@
         </p:nvSpPr>
         <p:spPr>
           <a:xfrm>
-            <a:off x="7635240" y="4343400"/>
-            <a:ext cx="3474720" cy="1255471"/>
+            <a:off x="7543800" y="4389120"/>
+            <a:ext cx="3611880" cy="1261872"/>
           </a:xfrm>
           <a:prstGeom prst="roundRect">
             <a:avLst>
-              <a:gd name="adj" fmla="val 8740"/>
+              <a:gd name="adj" fmla="val 8696"/>
             </a:avLst>
           </a:prstGeom>
           <a:solidFill>
@@ -4302,8 +4302,8 @@
         </p:nvSpPr>
         <p:spPr>
           <a:xfrm>
-            <a:off x="7799832" y="4489704"/>
-            <a:ext cx="3145536" cy="256032"/>
+            <a:off x="7708392" y="4517136"/>
+            <a:ext cx="3282696" cy="228600"/>
           </a:xfrm>
           <a:prstGeom prst="rect">
             <a:avLst/>
@@ -4319,7 +4319,7 @@
               <a:buNone/>
             </a:pPr>
             <a:r>
-              <a:rPr lang="en-US" sz="1300" b="1" dirty="0">
+              <a:rPr lang="en-US" sz="1220" b="1" dirty="0">
                 <a:solidFill>
                   <a:srgbClr val="0068B7"/>
                 </a:solidFill>
@@ -4329,7 +4329,7 @@
               </a:rPr>
               <a:t>Safeguard to plan</a:t>
             </a:r>
-            <a:endParaRPr lang="en-US" sz="1300" dirty="0"/>
+            <a:endParaRPr lang="en-US" sz="1220" dirty="0"/>
           </a:p>
         </p:txBody>
       </p:sp>
@@ -4341,8 +4341,8 @@
         </p:nvSpPr>
         <p:spPr>
           <a:xfrm>
-            <a:off x="7799832" y="4818888"/>
-            <a:ext cx="3145536" cy="688543"/>
+            <a:off x="7708392" y="4828032"/>
+            <a:ext cx="3282696" cy="749808"/>
           </a:xfrm>
           <a:prstGeom prst="rect">
             <a:avLst/>
@@ -4360,7 +4360,7 @@
               <a:buNone/>
             </a:pPr>
             <a:r>
-              <a:rPr lang="en-US" sz="1320" dirty="0">
+              <a:rPr lang="en-US" sz="1220" dirty="0">
                 <a:solidFill>
                   <a:srgbClr val="17364A"/>
                 </a:solidFill>
@@ -4368,9 +4368,9 @@
                 <a:ea typeface="Aptos" pitchFamily="34" charset="-122"/>
                 <a:cs typeface="Aptos" pitchFamily="34" charset="-120"/>
               </a:rPr>
-              <a:t>Identify what could go wrong, who could be affected, what safeguards are needed, and what evidence should be reviewed before use.</a:t>
-            </a:r>
-            <a:endParaRPr lang="en-US" sz="1320" dirty="0"/>
+              <a:t>Identify what could go wrong, who could be affected, what safeguards are needed,.</a:t>
+            </a:r>
+            <a:endParaRPr lang="en-US" sz="1220" dirty="0"/>
           </a:p>
         </p:txBody>
       </p:sp>
@@ -4661,8 +4661,8 @@
         </p:nvSpPr>
         <p:spPr>
           <a:xfrm>
-            <a:off x="868680" y="1508760"/>
-            <a:ext cx="6309360" cy="4160520"/>
+            <a:off x="822960" y="1463040"/>
+            <a:ext cx="6565392" cy="4343400"/>
           </a:xfrm>
           <a:prstGeom prst="rect">
             <a:avLst/>
@@ -4680,7 +4680,7 @@
               <a:buNone/>
             </a:pPr>
             <a:r>
-              <a:rPr lang="en-US" sz="2100" dirty="0">
+              <a:rPr lang="en-US" sz="1920" dirty="0">
                 <a:solidFill>
                   <a:srgbClr val="003A63"/>
                 </a:solidFill>
@@ -4690,14 +4690,14 @@
               </a:rPr>
               <a:t>• Risk appetite applies differently across AI types.</a:t>
             </a:r>
-            <a:endParaRPr lang="en-US" sz="2100" dirty="0"/>
-          </a:p>
-          <a:p>
-            <a:pPr indent="0" marL="0">
-              <a:buNone/>
-            </a:pPr>
-            <a:r>
-              <a:rPr lang="en-US" sz="2100" dirty="0">
+            <a:endParaRPr lang="en-US" sz="1920" dirty="0"/>
+          </a:p>
+          <a:p>
+            <a:pPr indent="0" marL="0">
+              <a:buNone/>
+            </a:pPr>
+            <a:r>
+              <a:rPr lang="en-US" sz="1920" dirty="0">
                 <a:solidFill>
                   <a:srgbClr val="003A63"/>
                 </a:solidFill>
@@ -4705,16 +4705,16 @@
                 <a:ea typeface="Aptos" pitchFamily="34" charset="-122"/>
                 <a:cs typeface="Aptos" pitchFamily="34" charset="-120"/>
               </a:rPr>
-              <a:t>• Generative AI for internal drafting may fall into a lower-risk category when reviewed by humans.</a:t>
-            </a:r>
-            <a:endParaRPr lang="en-US" sz="2100" dirty="0"/>
-          </a:p>
-          <a:p>
-            <a:pPr indent="0" marL="0">
-              <a:buNone/>
-            </a:pPr>
-            <a:r>
-              <a:rPr lang="en-US" sz="2100" dirty="0">
+              <a:t>• Generative AI for internal drafting may fall into a lower-risk category when.</a:t>
+            </a:r>
+            <a:endParaRPr lang="en-US" sz="1920" dirty="0"/>
+          </a:p>
+          <a:p>
+            <a:pPr indent="0" marL="0">
+              <a:buNone/>
+            </a:pPr>
+            <a:r>
+              <a:rPr lang="en-US" sz="1920" dirty="0">
                 <a:solidFill>
                   <a:srgbClr val="003A63"/>
                 </a:solidFill>
@@ -4722,9 +4722,9 @@
                 <a:ea typeface="Aptos" pitchFamily="34" charset="-122"/>
                 <a:cs typeface="Aptos" pitchFamily="34" charset="-120"/>
               </a:rPr>
-              <a:t>• Predictive models used for prioritization require stronger validation and monitoring.</a:t>
-            </a:r>
-            <a:endParaRPr lang="en-US" sz="2100" dirty="0"/>
+              <a:t>• Predictive models used for prioritization require stronger validation and.</a:t>
+            </a:r>
+            <a:endParaRPr lang="en-US" sz="1920" dirty="0"/>
           </a:p>
         </p:txBody>
       </p:sp>
@@ -4736,12 +4736,12 @@
         </p:nvSpPr>
         <p:spPr>
           <a:xfrm>
-            <a:off x="7635240" y="1325880"/>
-            <a:ext cx="3474720" cy="1207008"/>
+            <a:off x="7543800" y="1325880"/>
+            <a:ext cx="3611880" cy="1261872"/>
           </a:xfrm>
           <a:prstGeom prst="roundRect">
             <a:avLst>
-              <a:gd name="adj" fmla="val 9091"/>
+              <a:gd name="adj" fmla="val 8696"/>
             </a:avLst>
           </a:prstGeom>
           <a:solidFill>
@@ -4763,8 +4763,8 @@
         </p:nvSpPr>
         <p:spPr>
           <a:xfrm>
-            <a:off x="7799832" y="1472184"/>
-            <a:ext cx="3145536" cy="256032"/>
+            <a:off x="7708392" y="1453896"/>
+            <a:ext cx="3282696" cy="228600"/>
           </a:xfrm>
           <a:prstGeom prst="rect">
             <a:avLst/>
@@ -4780,7 +4780,7 @@
               <a:buNone/>
             </a:pPr>
             <a:r>
-              <a:rPr lang="en-US" sz="1300" b="1" dirty="0">
+              <a:rPr lang="en-US" sz="1220" b="1" dirty="0">
                 <a:solidFill>
                   <a:srgbClr val="0068B7"/>
                 </a:solidFill>
@@ -4790,7 +4790,7 @@
               </a:rPr>
               <a:t>Risk check</a:t>
             </a:r>
-            <a:endParaRPr lang="en-US" sz="1300" dirty="0"/>
+            <a:endParaRPr lang="en-US" sz="1220" dirty="0"/>
           </a:p>
         </p:txBody>
       </p:sp>
@@ -4802,8 +4802,8 @@
         </p:nvSpPr>
         <p:spPr>
           <a:xfrm>
-            <a:off x="7799832" y="1801368"/>
-            <a:ext cx="3145536" cy="640080"/>
+            <a:off x="7708392" y="1764792"/>
+            <a:ext cx="3282696" cy="749808"/>
           </a:xfrm>
           <a:prstGeom prst="rect">
             <a:avLst/>
@@ -4821,7 +4821,7 @@
               <a:buNone/>
             </a:pPr>
             <a:r>
-              <a:rPr lang="en-US" sz="1320" dirty="0">
+              <a:rPr lang="en-US" sz="1220" dirty="0">
                 <a:solidFill>
                   <a:srgbClr val="17364A"/>
                 </a:solidFill>
@@ -4831,7 +4831,7 @@
               </a:rPr>
               <a:t>Risk appetite applies differently across AI types.</a:t>
             </a:r>
-            <a:endParaRPr lang="en-US" sz="1320" dirty="0"/>
+            <a:endParaRPr lang="en-US" sz="1220" dirty="0"/>
           </a:p>
         </p:txBody>
       </p:sp>
@@ -4843,12 +4843,12 @@
         </p:nvSpPr>
         <p:spPr>
           <a:xfrm>
-            <a:off x="7635240" y="2670048"/>
-            <a:ext cx="3474720" cy="1536192"/>
+            <a:off x="7543800" y="2724912"/>
+            <a:ext cx="3611880" cy="1527048"/>
           </a:xfrm>
           <a:prstGeom prst="roundRect">
             <a:avLst>
-              <a:gd name="adj" fmla="val 7143"/>
+              <a:gd name="adj" fmla="val 7186"/>
             </a:avLst>
           </a:prstGeom>
           <a:solidFill>
@@ -4870,8 +4870,8 @@
         </p:nvSpPr>
         <p:spPr>
           <a:xfrm>
-            <a:off x="7799832" y="2816352"/>
-            <a:ext cx="3145536" cy="256032"/>
+            <a:off x="7708392" y="2852928"/>
+            <a:ext cx="3282696" cy="228600"/>
           </a:xfrm>
           <a:prstGeom prst="rect">
             <a:avLst/>
@@ -4887,7 +4887,7 @@
               <a:buNone/>
             </a:pPr>
             <a:r>
-              <a:rPr lang="en-US" sz="1300" b="1" dirty="0">
+              <a:rPr lang="en-US" sz="1220" b="1" dirty="0">
                 <a:solidFill>
                   <a:srgbClr val="0068B7"/>
                 </a:solidFill>
@@ -4897,7 +4897,7 @@
               </a:rPr>
               <a:t>Concept checkpoints</a:t>
             </a:r>
-            <a:endParaRPr lang="en-US" sz="1300" dirty="0"/>
+            <a:endParaRPr lang="en-US" sz="1220" dirty="0"/>
           </a:p>
         </p:txBody>
       </p:sp>
@@ -4909,8 +4909,8 @@
         </p:nvSpPr>
         <p:spPr>
           <a:xfrm>
-            <a:off x="7818120" y="3182112"/>
-            <a:ext cx="3090672" cy="877824"/>
+            <a:off x="7726680" y="3182112"/>
+            <a:ext cx="3227832" cy="960120"/>
           </a:xfrm>
           <a:prstGeom prst="rect">
             <a:avLst/>
@@ -4928,7 +4928,7 @@
               <a:buNone/>
             </a:pPr>
             <a:r>
-              <a:rPr lang="en-US" sz="1220" dirty="0">
+              <a:rPr lang="en-US" sz="1140" dirty="0">
                 <a:solidFill>
                   <a:srgbClr val="17364A"/>
                 </a:solidFill>
@@ -4936,16 +4936,16 @@
                 <a:ea typeface="Aptos" pitchFamily="34" charset="-122"/>
                 <a:cs typeface="Aptos" pitchFamily="34" charset="-120"/>
               </a:rPr>
-              <a:t>Agentic tools that can take system actions require strict limits,.</a:t>
-            </a:r>
-            <a:endParaRPr lang="en-US" sz="1220" dirty="0"/>
-          </a:p>
-          <a:p>
-            <a:pPr indent="0" marL="0">
-              <a:buNone/>
-            </a:pPr>
-            <a:r>
-              <a:rPr lang="en-US" sz="1220" dirty="0">
+              <a:t>Agentic tools that can take system actions require.</a:t>
+            </a:r>
+            <a:endParaRPr lang="en-US" sz="1140" dirty="0"/>
+          </a:p>
+          <a:p>
+            <a:pPr indent="0" marL="0">
+              <a:buNone/>
+            </a:pPr>
+            <a:r>
+              <a:rPr lang="en-US" sz="1140" dirty="0">
                 <a:solidFill>
                   <a:srgbClr val="17364A"/>
                 </a:solidFill>
@@ -4953,9 +4953,9 @@
                 <a:ea typeface="Aptos" pitchFamily="34" charset="-122"/>
                 <a:cs typeface="Aptos" pitchFamily="34" charset="-120"/>
               </a:rPr>
-              <a:t>Risk appetite helps define these boundaries in advance.</a:t>
-            </a:r>
-            <a:endParaRPr lang="en-US" sz="1220" dirty="0"/>
+              <a:t>Risk appetite helps define these boundaries in.</a:t>
+            </a:r>
+            <a:endParaRPr lang="en-US" sz="1140" dirty="0"/>
           </a:p>
         </p:txBody>
       </p:sp>
@@ -4967,12 +4967,12 @@
         </p:nvSpPr>
         <p:spPr>
           <a:xfrm>
-            <a:off x="7635240" y="4343400"/>
-            <a:ext cx="3474720" cy="1255471"/>
+            <a:off x="7543800" y="4389120"/>
+            <a:ext cx="3611880" cy="1261872"/>
           </a:xfrm>
           <a:prstGeom prst="roundRect">
             <a:avLst>
-              <a:gd name="adj" fmla="val 8740"/>
+              <a:gd name="adj" fmla="val 8696"/>
             </a:avLst>
           </a:prstGeom>
           <a:solidFill>
@@ -4994,8 +4994,8 @@
         </p:nvSpPr>
         <p:spPr>
           <a:xfrm>
-            <a:off x="7799832" y="4489704"/>
-            <a:ext cx="3145536" cy="256032"/>
+            <a:off x="7708392" y="4517136"/>
+            <a:ext cx="3282696" cy="228600"/>
           </a:xfrm>
           <a:prstGeom prst="rect">
             <a:avLst/>
@@ -5011,7 +5011,7 @@
               <a:buNone/>
             </a:pPr>
             <a:r>
-              <a:rPr lang="en-US" sz="1300" b="1" dirty="0">
+              <a:rPr lang="en-US" sz="1220" b="1" dirty="0">
                 <a:solidFill>
                   <a:srgbClr val="0068B7"/>
                 </a:solidFill>
@@ -5021,7 +5021,7 @@
               </a:rPr>
               <a:t>Safeguard to plan</a:t>
             </a:r>
-            <a:endParaRPr lang="en-US" sz="1300" dirty="0"/>
+            <a:endParaRPr lang="en-US" sz="1220" dirty="0"/>
           </a:p>
         </p:txBody>
       </p:sp>
@@ -5033,8 +5033,8 @@
         </p:nvSpPr>
         <p:spPr>
           <a:xfrm>
-            <a:off x="7799832" y="4818888"/>
-            <a:ext cx="3145536" cy="688543"/>
+            <a:off x="7708392" y="4828032"/>
+            <a:ext cx="3282696" cy="749808"/>
           </a:xfrm>
           <a:prstGeom prst="rect">
             <a:avLst/>
@@ -5052,7 +5052,7 @@
               <a:buNone/>
             </a:pPr>
             <a:r>
-              <a:rPr lang="en-US" sz="1320" dirty="0">
+              <a:rPr lang="en-US" sz="1220" dirty="0">
                 <a:solidFill>
                   <a:srgbClr val="17364A"/>
                 </a:solidFill>
@@ -5060,9 +5060,9 @@
                 <a:ea typeface="Aptos" pitchFamily="34" charset="-122"/>
                 <a:cs typeface="Aptos" pitchFamily="34" charset="-120"/>
               </a:rPr>
-              <a:t>Identify what could go wrong, who could be affected, what safeguards are needed, and what evidence should be reviewed before use.</a:t>
-            </a:r>
-            <a:endParaRPr lang="en-US" sz="1320" dirty="0"/>
+              <a:t>Identify what could go wrong, who could be affected, what safeguards are needed,.</a:t>
+            </a:r>
+            <a:endParaRPr lang="en-US" sz="1220" dirty="0"/>
           </a:p>
         </p:txBody>
       </p:sp>
@@ -5353,8 +5353,8 @@
         </p:nvSpPr>
         <p:spPr>
           <a:xfrm>
-            <a:off x="868680" y="1508760"/>
-            <a:ext cx="6309360" cy="4160520"/>
+            <a:off x="822960" y="1463040"/>
+            <a:ext cx="6565392" cy="4343400"/>
           </a:xfrm>
           <a:prstGeom prst="rect">
             <a:avLst/>
@@ -5372,7 +5372,7 @@
               <a:buNone/>
             </a:pPr>
             <a:r>
-              <a:rPr lang="en-US" sz="2100" dirty="0">
+              <a:rPr lang="en-US" sz="1920" dirty="0">
                 <a:solidFill>
                   <a:srgbClr val="003A63"/>
                 </a:solidFill>
@@ -5380,16 +5380,16 @@
                 <a:ea typeface="Aptos" pitchFamily="34" charset="-122"/>
                 <a:cs typeface="Aptos" pitchFamily="34" charset="-120"/>
               </a:rPr>
-              <a:t>• Which current or proposed AI use case in your agency raises this leadership or governance.</a:t>
-            </a:r>
-            <a:endParaRPr lang="en-US" sz="2100" dirty="0"/>
-          </a:p>
-          <a:p>
-            <a:pPr indent="0" marL="0">
-              <a:buNone/>
-            </a:pPr>
-            <a:r>
-              <a:rPr lang="en-US" sz="2100" dirty="0">
+              <a:t>• Which current or proposed AI use case in your agency raises this leadership.</a:t>
+            </a:r>
+            <a:endParaRPr lang="en-US" sz="1920" dirty="0"/>
+          </a:p>
+          <a:p>
+            <a:pPr indent="0" marL="0">
+              <a:buNone/>
+            </a:pPr>
+            <a:r>
+              <a:rPr lang="en-US" sz="1920" dirty="0">
                 <a:solidFill>
                   <a:srgbClr val="003A63"/>
                 </a:solidFill>
@@ -5397,16 +5397,16 @@
                 <a:ea typeface="Aptos" pitchFamily="34" charset="-122"/>
                 <a:cs typeface="Aptos" pitchFamily="34" charset="-120"/>
               </a:rPr>
-              <a:t>• Who currently has authority to make decisions about this issue, and is that authority.</a:t>
-            </a:r>
-            <a:endParaRPr lang="en-US" sz="2100" dirty="0"/>
-          </a:p>
-          <a:p>
-            <a:pPr indent="0" marL="0">
-              <a:buNone/>
-            </a:pPr>
-            <a:r>
-              <a:rPr lang="en-US" sz="2100" dirty="0">
+              <a:t>• Who currently has authority to make decisions about this issue, and is that.</a:t>
+            </a:r>
+            <a:endParaRPr lang="en-US" sz="1920" dirty="0"/>
+          </a:p>
+          <a:p>
+            <a:pPr indent="0" marL="0">
+              <a:buNone/>
+            </a:pPr>
+            <a:r>
+              <a:rPr lang="en-US" sz="1920" dirty="0">
                 <a:solidFill>
                   <a:srgbClr val="003A63"/>
                 </a:solidFill>
@@ -5414,9 +5414,9 @@
                 <a:ea typeface="Aptos" pitchFamily="34" charset="-122"/>
                 <a:cs typeface="Aptos" pitchFamily="34" charset="-120"/>
               </a:rPr>
-              <a:t>• What evidence would governance or leadership need before approving the use case?</a:t>
-            </a:r>
-            <a:endParaRPr lang="en-US" sz="2100" dirty="0"/>
+              <a:t>• What evidence would governance or leadership need before approving the use.</a:t>
+            </a:r>
+            <a:endParaRPr lang="en-US" sz="1920" dirty="0"/>
           </a:p>
         </p:txBody>
       </p:sp>
@@ -5428,12 +5428,12 @@
         </p:nvSpPr>
         <p:spPr>
           <a:xfrm>
-            <a:off x="7635240" y="1325880"/>
-            <a:ext cx="3474720" cy="1255471"/>
+            <a:off x="7543800" y="1325880"/>
+            <a:ext cx="3611880" cy="1261872"/>
           </a:xfrm>
           <a:prstGeom prst="roundRect">
             <a:avLst>
-              <a:gd name="adj" fmla="val 8740"/>
+              <a:gd name="adj" fmla="val 8696"/>
             </a:avLst>
           </a:prstGeom>
           <a:solidFill>
@@ -5455,8 +5455,8 @@
         </p:nvSpPr>
         <p:spPr>
           <a:xfrm>
-            <a:off x="7799832" y="1472184"/>
-            <a:ext cx="3145536" cy="256032"/>
+            <a:off x="7708392" y="1453896"/>
+            <a:ext cx="3282696" cy="228600"/>
           </a:xfrm>
           <a:prstGeom prst="rect">
             <a:avLst/>
@@ -5472,7 +5472,7 @@
               <a:buNone/>
             </a:pPr>
             <a:r>
-              <a:rPr lang="en-US" sz="1300" b="1" dirty="0">
+              <a:rPr lang="en-US" sz="1220" b="1" dirty="0">
                 <a:solidFill>
                   <a:srgbClr val="0068B7"/>
                 </a:solidFill>
@@ -5482,7 +5482,7 @@
               </a:rPr>
               <a:t>Risk check</a:t>
             </a:r>
-            <a:endParaRPr lang="en-US" sz="1300" dirty="0"/>
+            <a:endParaRPr lang="en-US" sz="1220" dirty="0"/>
           </a:p>
         </p:txBody>
       </p:sp>
@@ -5494,8 +5494,8 @@
         </p:nvSpPr>
         <p:spPr>
           <a:xfrm>
-            <a:off x="7799832" y="1801368"/>
-            <a:ext cx="3145536" cy="688543"/>
+            <a:off x="7708392" y="1764792"/>
+            <a:ext cx="3282696" cy="749808"/>
           </a:xfrm>
           <a:prstGeom prst="rect">
             <a:avLst/>
@@ -5513,7 +5513,7 @@
               <a:buNone/>
             </a:pPr>
             <a:r>
-              <a:rPr lang="en-US" sz="1320" dirty="0">
+              <a:rPr lang="en-US" sz="1220" dirty="0">
                 <a:solidFill>
                   <a:srgbClr val="17364A"/>
                 </a:solidFill>
@@ -5521,9 +5521,9 @@
                 <a:ea typeface="Aptos" pitchFamily="34" charset="-122"/>
                 <a:cs typeface="Aptos" pitchFamily="34" charset="-120"/>
               </a:rPr>
-              <a:t>Which current or proposed AI use case in your agency raises this leadership or governance issue most.</a:t>
-            </a:r>
-            <a:endParaRPr lang="en-US" sz="1320" dirty="0"/>
+              <a:t>Which current or proposed AI use case in your agency raises this leadership or.</a:t>
+            </a:r>
+            <a:endParaRPr lang="en-US" sz="1220" dirty="0"/>
           </a:p>
         </p:txBody>
       </p:sp>
@@ -5535,12 +5535,12 @@
         </p:nvSpPr>
         <p:spPr>
           <a:xfrm>
-            <a:off x="7635240" y="2718511"/>
-            <a:ext cx="3474720" cy="1536192"/>
+            <a:off x="7543800" y="2724912"/>
+            <a:ext cx="3611880" cy="1527048"/>
           </a:xfrm>
           <a:prstGeom prst="roundRect">
             <a:avLst>
-              <a:gd name="adj" fmla="val 7143"/>
+              <a:gd name="adj" fmla="val 7186"/>
             </a:avLst>
           </a:prstGeom>
           <a:solidFill>
@@ -5562,8 +5562,8 @@
         </p:nvSpPr>
         <p:spPr>
           <a:xfrm>
-            <a:off x="7799832" y="2864815"/>
-            <a:ext cx="3145536" cy="256032"/>
+            <a:off x="7708392" y="2852928"/>
+            <a:ext cx="3282696" cy="228600"/>
           </a:xfrm>
           <a:prstGeom prst="rect">
             <a:avLst/>
@@ -5579,7 +5579,7 @@
               <a:buNone/>
             </a:pPr>
             <a:r>
-              <a:rPr lang="en-US" sz="1300" b="1" dirty="0">
+              <a:rPr lang="en-US" sz="1220" b="1" dirty="0">
                 <a:solidFill>
                   <a:srgbClr val="0068B7"/>
                 </a:solidFill>
@@ -5589,7 +5589,7 @@
               </a:rPr>
               <a:t>Concept checkpoints</a:t>
             </a:r>
-            <a:endParaRPr lang="en-US" sz="1300" dirty="0"/>
+            <a:endParaRPr lang="en-US" sz="1220" dirty="0"/>
           </a:p>
         </p:txBody>
       </p:sp>
@@ -5601,8 +5601,8 @@
         </p:nvSpPr>
         <p:spPr>
           <a:xfrm>
-            <a:off x="7818120" y="3230575"/>
-            <a:ext cx="3090672" cy="877824"/>
+            <a:off x="7726680" y="3182112"/>
+            <a:ext cx="3227832" cy="960120"/>
           </a:xfrm>
           <a:prstGeom prst="rect">
             <a:avLst/>
@@ -5620,7 +5620,7 @@
               <a:buNone/>
             </a:pPr>
             <a:r>
-              <a:rPr lang="en-US" sz="1220" dirty="0">
+              <a:rPr lang="en-US" sz="1140" dirty="0">
                 <a:solidFill>
                   <a:srgbClr val="17364A"/>
                 </a:solidFill>
@@ -5628,16 +5628,16 @@
                 <a:ea typeface="Aptos" pitchFamily="34" charset="-122"/>
                 <a:cs typeface="Aptos" pitchFamily="34" charset="-120"/>
               </a:rPr>
-              <a:t>Which current or proposed AI use case in your agency raises this.</a:t>
-            </a:r>
-            <a:endParaRPr lang="en-US" sz="1220" dirty="0"/>
-          </a:p>
-          <a:p>
-            <a:pPr indent="0" marL="0">
-              <a:buNone/>
-            </a:pPr>
-            <a:r>
-              <a:rPr lang="en-US" sz="1220" dirty="0">
+              <a:t>Which current or proposed AI use case in your.</a:t>
+            </a:r>
+            <a:endParaRPr lang="en-US" sz="1140" dirty="0"/>
+          </a:p>
+          <a:p>
+            <a:pPr indent="0" marL="0">
+              <a:buNone/>
+            </a:pPr>
+            <a:r>
+              <a:rPr lang="en-US" sz="1140" dirty="0">
                 <a:solidFill>
                   <a:srgbClr val="17364A"/>
                 </a:solidFill>
@@ -5645,16 +5645,16 @@
                 <a:ea typeface="Aptos" pitchFamily="34" charset="-122"/>
                 <a:cs typeface="Aptos" pitchFamily="34" charset="-120"/>
               </a:rPr>
-              <a:t>Who currently has authority to make decisions about this issue,.</a:t>
-            </a:r>
-            <a:endParaRPr lang="en-US" sz="1220" dirty="0"/>
-          </a:p>
-          <a:p>
-            <a:pPr indent="0" marL="0">
-              <a:buNone/>
-            </a:pPr>
-            <a:r>
-              <a:rPr lang="en-US" sz="1220" dirty="0">
+              <a:t>Who currently has authority to make decisions.</a:t>
+            </a:r>
+            <a:endParaRPr lang="en-US" sz="1140" dirty="0"/>
+          </a:p>
+          <a:p>
+            <a:pPr indent="0" marL="0">
+              <a:buNone/>
+            </a:pPr>
+            <a:r>
+              <a:rPr lang="en-US" sz="1140" dirty="0">
                 <a:solidFill>
                   <a:srgbClr val="17364A"/>
                 </a:solidFill>
@@ -5662,9 +5662,9 @@
                 <a:ea typeface="Aptos" pitchFamily="34" charset="-122"/>
                 <a:cs typeface="Aptos" pitchFamily="34" charset="-120"/>
               </a:rPr>
-              <a:t>What evidence would governance or leadership need before approving.</a:t>
-            </a:r>
-            <a:endParaRPr lang="en-US" sz="1220" dirty="0"/>
+              <a:t>What evidence would governance or leadership need.</a:t>
+            </a:r>
+            <a:endParaRPr lang="en-US" sz="1140" dirty="0"/>
           </a:p>
         </p:txBody>
       </p:sp>
@@ -5676,12 +5676,12 @@
         </p:nvSpPr>
         <p:spPr>
           <a:xfrm>
-            <a:off x="7635240" y="4391863"/>
-            <a:ext cx="3474720" cy="1255471"/>
+            <a:off x="7543800" y="4389120"/>
+            <a:ext cx="3611880" cy="1261872"/>
           </a:xfrm>
           <a:prstGeom prst="roundRect">
             <a:avLst>
-              <a:gd name="adj" fmla="val 8740"/>
+              <a:gd name="adj" fmla="val 8696"/>
             </a:avLst>
           </a:prstGeom>
           <a:solidFill>
@@ -5703,8 +5703,8 @@
         </p:nvSpPr>
         <p:spPr>
           <a:xfrm>
-            <a:off x="7799832" y="4538167"/>
-            <a:ext cx="3145536" cy="256032"/>
+            <a:off x="7708392" y="4517136"/>
+            <a:ext cx="3282696" cy="228600"/>
           </a:xfrm>
           <a:prstGeom prst="rect">
             <a:avLst/>
@@ -5720,7 +5720,7 @@
               <a:buNone/>
             </a:pPr>
             <a:r>
-              <a:rPr lang="en-US" sz="1300" b="1" dirty="0">
+              <a:rPr lang="en-US" sz="1220" b="1" dirty="0">
                 <a:solidFill>
                   <a:srgbClr val="0068B7"/>
                 </a:solidFill>
@@ -5730,7 +5730,7 @@
               </a:rPr>
               <a:t>Safeguard to plan</a:t>
             </a:r>
-            <a:endParaRPr lang="en-US" sz="1300" dirty="0"/>
+            <a:endParaRPr lang="en-US" sz="1220" dirty="0"/>
           </a:p>
         </p:txBody>
       </p:sp>
@@ -5742,8 +5742,8 @@
         </p:nvSpPr>
         <p:spPr>
           <a:xfrm>
-            <a:off x="7799832" y="4867351"/>
-            <a:ext cx="3145536" cy="688543"/>
+            <a:off x="7708392" y="4828032"/>
+            <a:ext cx="3282696" cy="749808"/>
           </a:xfrm>
           <a:prstGeom prst="rect">
             <a:avLst/>
@@ -5761,7 +5761,7 @@
               <a:buNone/>
             </a:pPr>
             <a:r>
-              <a:rPr lang="en-US" sz="1320" dirty="0">
+              <a:rPr lang="en-US" sz="1220" dirty="0">
                 <a:solidFill>
                   <a:srgbClr val="17364A"/>
                 </a:solidFill>
@@ -5769,9 +5769,9 @@
                 <a:ea typeface="Aptos" pitchFamily="34" charset="-122"/>
                 <a:cs typeface="Aptos" pitchFamily="34" charset="-120"/>
               </a:rPr>
-              <a:t>Identify what could go wrong, who could be affected, what safeguards are needed, and what evidence should be reviewed before use.</a:t>
-            </a:r>
-            <a:endParaRPr lang="en-US" sz="1320" dirty="0"/>
+              <a:t>Identify what could go wrong, who could be affected, what safeguards are needed,.</a:t>
+            </a:r>
+            <a:endParaRPr lang="en-US" sz="1220" dirty="0"/>
           </a:p>
         </p:txBody>
       </p:sp>
@@ -6062,8 +6062,8 @@
         </p:nvSpPr>
         <p:spPr>
           <a:xfrm>
-            <a:off x="868680" y="1508760"/>
-            <a:ext cx="6309360" cy="4160520"/>
+            <a:off x="822960" y="1463040"/>
+            <a:ext cx="6565392" cy="4343400"/>
           </a:xfrm>
           <a:prstGeom prst="rect">
             <a:avLst/>
@@ -6081,7 +6081,7 @@
               <a:buNone/>
             </a:pPr>
             <a:r>
-              <a:rPr lang="en-US" sz="2100" dirty="0">
+              <a:rPr lang="en-US" sz="1920" dirty="0">
                 <a:solidFill>
                   <a:srgbClr val="003A63"/>
                 </a:solidFill>
@@ -6089,16 +6089,16 @@
                 <a:ea typeface="Aptos" pitchFamily="34" charset="-122"/>
                 <a:cs typeface="Aptos" pitchFamily="34" charset="-120"/>
               </a:rPr>
-              <a:t>• Which staff, partners, or communities would be affected if this issue were handled poorly?</a:t>
-            </a:r>
-            <a:endParaRPr lang="en-US" sz="2100" dirty="0"/>
-          </a:p>
-          <a:p>
-            <a:pPr indent="0" marL="0">
-              <a:buNone/>
-            </a:pPr>
-            <a:r>
-              <a:rPr lang="en-US" sz="2100" dirty="0">
+              <a:t>• Which staff, partners, or communities would be affected if this issue were.</a:t>
+            </a:r>
+            <a:endParaRPr lang="en-US" sz="1920" dirty="0"/>
+          </a:p>
+          <a:p>
+            <a:pPr indent="0" marL="0">
+              <a:buNone/>
+            </a:pPr>
+            <a:r>
+              <a:rPr lang="en-US" sz="1920" dirty="0">
                 <a:solidFill>
                   <a:srgbClr val="003A63"/>
                 </a:solidFill>
@@ -6106,9 +6106,9 @@
                 <a:ea typeface="Aptos" pitchFamily="34" charset="-122"/>
                 <a:cs typeface="Aptos" pitchFamily="34" charset="-120"/>
               </a:rPr>
-              <a:t>• What policy, process, or artifact should be created or updated after this module?</a:t>
-            </a:r>
-            <a:endParaRPr lang="en-US" sz="2100" dirty="0"/>
+              <a:t>• What policy, process, or artifact should be created or updated after this.</a:t>
+            </a:r>
+            <a:endParaRPr lang="en-US" sz="1920" dirty="0"/>
           </a:p>
         </p:txBody>
       </p:sp>
@@ -6120,12 +6120,12 @@
         </p:nvSpPr>
         <p:spPr>
           <a:xfrm>
-            <a:off x="7635240" y="1325880"/>
-            <a:ext cx="3474720" cy="1207008"/>
+            <a:off x="7543800" y="1325880"/>
+            <a:ext cx="3611880" cy="1261872"/>
           </a:xfrm>
           <a:prstGeom prst="roundRect">
             <a:avLst>
-              <a:gd name="adj" fmla="val 9091"/>
+              <a:gd name="adj" fmla="val 8696"/>
             </a:avLst>
           </a:prstGeom>
           <a:solidFill>
@@ -6147,8 +6147,8 @@
         </p:nvSpPr>
         <p:spPr>
           <a:xfrm>
-            <a:off x="7799832" y="1472184"/>
-            <a:ext cx="3145536" cy="256032"/>
+            <a:off x="7708392" y="1453896"/>
+            <a:ext cx="3282696" cy="228600"/>
           </a:xfrm>
           <a:prstGeom prst="rect">
             <a:avLst/>
@@ -6164,7 +6164,7 @@
               <a:buNone/>
             </a:pPr>
             <a:r>
-              <a:rPr lang="en-US" sz="1300" b="1" dirty="0">
+              <a:rPr lang="en-US" sz="1220" b="1" dirty="0">
                 <a:solidFill>
                   <a:srgbClr val="0068B7"/>
                 </a:solidFill>
@@ -6174,7 +6174,7 @@
               </a:rPr>
               <a:t>Risk check</a:t>
             </a:r>
-            <a:endParaRPr lang="en-US" sz="1300" dirty="0"/>
+            <a:endParaRPr lang="en-US" sz="1220" dirty="0"/>
           </a:p>
         </p:txBody>
       </p:sp>
@@ -6186,8 +6186,8 @@
         </p:nvSpPr>
         <p:spPr>
           <a:xfrm>
-            <a:off x="7799832" y="1801368"/>
-            <a:ext cx="3145536" cy="640080"/>
+            <a:off x="7708392" y="1764792"/>
+            <a:ext cx="3282696" cy="749808"/>
           </a:xfrm>
           <a:prstGeom prst="rect">
             <a:avLst/>
@@ -6205,7 +6205,7 @@
               <a:buNone/>
             </a:pPr>
             <a:r>
-              <a:rPr lang="en-US" sz="1320" dirty="0">
+              <a:rPr lang="en-US" sz="1220" dirty="0">
                 <a:solidFill>
                   <a:srgbClr val="17364A"/>
                 </a:solidFill>
@@ -6213,9 +6213,9 @@
                 <a:ea typeface="Aptos" pitchFamily="34" charset="-122"/>
                 <a:cs typeface="Aptos" pitchFamily="34" charset="-120"/>
               </a:rPr>
-              <a:t>Which staff, partners, or communities would be affected if this issue were handled.</a:t>
-            </a:r>
-            <a:endParaRPr lang="en-US" sz="1320" dirty="0"/>
+              <a:t>Which staff, partners, or communities would be affected if this issue were.</a:t>
+            </a:r>
+            <a:endParaRPr lang="en-US" sz="1220" dirty="0"/>
           </a:p>
         </p:txBody>
       </p:sp>
@@ -6227,12 +6227,12 @@
         </p:nvSpPr>
         <p:spPr>
           <a:xfrm>
-            <a:off x="7635240" y="2670048"/>
-            <a:ext cx="3474720" cy="1536192"/>
+            <a:off x="7543800" y="2724912"/>
+            <a:ext cx="3611880" cy="1527048"/>
           </a:xfrm>
           <a:prstGeom prst="roundRect">
             <a:avLst>
-              <a:gd name="adj" fmla="val 7143"/>
+              <a:gd name="adj" fmla="val 7186"/>
             </a:avLst>
           </a:prstGeom>
           <a:solidFill>
@@ -6254,8 +6254,8 @@
         </p:nvSpPr>
         <p:spPr>
           <a:xfrm>
-            <a:off x="7799832" y="2816352"/>
-            <a:ext cx="3145536" cy="256032"/>
+            <a:off x="7708392" y="2852928"/>
+            <a:ext cx="3282696" cy="228600"/>
           </a:xfrm>
           <a:prstGeom prst="rect">
             <a:avLst/>
@@ -6271,7 +6271,7 @@
               <a:buNone/>
             </a:pPr>
             <a:r>
-              <a:rPr lang="en-US" sz="1300" b="1" dirty="0">
+              <a:rPr lang="en-US" sz="1220" b="1" dirty="0">
                 <a:solidFill>
                   <a:srgbClr val="0068B7"/>
                 </a:solidFill>
@@ -6281,7 +6281,7 @@
               </a:rPr>
               <a:t>Concept checkpoints</a:t>
             </a:r>
-            <a:endParaRPr lang="en-US" sz="1300" dirty="0"/>
+            <a:endParaRPr lang="en-US" sz="1220" dirty="0"/>
           </a:p>
         </p:txBody>
       </p:sp>
@@ -6293,8 +6293,8 @@
         </p:nvSpPr>
         <p:spPr>
           <a:xfrm>
-            <a:off x="7818120" y="3182112"/>
-            <a:ext cx="3090672" cy="877824"/>
+            <a:off x="7726680" y="3182112"/>
+            <a:ext cx="3227832" cy="960120"/>
           </a:xfrm>
           <a:prstGeom prst="rect">
             <a:avLst/>
@@ -6312,7 +6312,7 @@
               <a:buNone/>
             </a:pPr>
             <a:r>
-              <a:rPr lang="en-US" sz="1220" dirty="0">
+              <a:rPr lang="en-US" sz="1140" dirty="0">
                 <a:solidFill>
                   <a:srgbClr val="17364A"/>
                 </a:solidFill>
@@ -6320,16 +6320,16 @@
                 <a:ea typeface="Aptos" pitchFamily="34" charset="-122"/>
                 <a:cs typeface="Aptos" pitchFamily="34" charset="-120"/>
               </a:rPr>
-              <a:t>Which staff, partners, or communities would be affected if this.</a:t>
-            </a:r>
-            <a:endParaRPr lang="en-US" sz="1220" dirty="0"/>
-          </a:p>
-          <a:p>
-            <a:pPr indent="0" marL="0">
-              <a:buNone/>
-            </a:pPr>
-            <a:r>
-              <a:rPr lang="en-US" sz="1220" dirty="0">
+              <a:t>Which staff, partners, or communities would be.</a:t>
+            </a:r>
+            <a:endParaRPr lang="en-US" sz="1140" dirty="0"/>
+          </a:p>
+          <a:p>
+            <a:pPr indent="0" marL="0">
+              <a:buNone/>
+            </a:pPr>
+            <a:r>
+              <a:rPr lang="en-US" sz="1140" dirty="0">
                 <a:solidFill>
                   <a:srgbClr val="17364A"/>
                 </a:solidFill>
@@ -6337,9 +6337,9 @@
                 <a:ea typeface="Aptos" pitchFamily="34" charset="-122"/>
                 <a:cs typeface="Aptos" pitchFamily="34" charset="-120"/>
               </a:rPr>
-              <a:t>What policy, process, or artifact should be created or updated.</a:t>
-            </a:r>
-            <a:endParaRPr lang="en-US" sz="1220" dirty="0"/>
+              <a:t>What policy, process, or artifact should be.</a:t>
+            </a:r>
+            <a:endParaRPr lang="en-US" sz="1140" dirty="0"/>
           </a:p>
         </p:txBody>
       </p:sp>
@@ -6351,12 +6351,12 @@
         </p:nvSpPr>
         <p:spPr>
           <a:xfrm>
-            <a:off x="7635240" y="4343400"/>
-            <a:ext cx="3474720" cy="1255471"/>
+            <a:off x="7543800" y="4389120"/>
+            <a:ext cx="3611880" cy="1261872"/>
           </a:xfrm>
           <a:prstGeom prst="roundRect">
             <a:avLst>
-              <a:gd name="adj" fmla="val 8740"/>
+              <a:gd name="adj" fmla="val 8696"/>
             </a:avLst>
           </a:prstGeom>
           <a:solidFill>
@@ -6378,8 +6378,8 @@
         </p:nvSpPr>
         <p:spPr>
           <a:xfrm>
-            <a:off x="7799832" y="4489704"/>
-            <a:ext cx="3145536" cy="256032"/>
+            <a:off x="7708392" y="4517136"/>
+            <a:ext cx="3282696" cy="228600"/>
           </a:xfrm>
           <a:prstGeom prst="rect">
             <a:avLst/>
@@ -6395,7 +6395,7 @@
               <a:buNone/>
             </a:pPr>
             <a:r>
-              <a:rPr lang="en-US" sz="1300" b="1" dirty="0">
+              <a:rPr lang="en-US" sz="1220" b="1" dirty="0">
                 <a:solidFill>
                   <a:srgbClr val="0068B7"/>
                 </a:solidFill>
@@ -6405,7 +6405,7 @@
               </a:rPr>
               <a:t>Safeguard to plan</a:t>
             </a:r>
-            <a:endParaRPr lang="en-US" sz="1300" dirty="0"/>
+            <a:endParaRPr lang="en-US" sz="1220" dirty="0"/>
           </a:p>
         </p:txBody>
       </p:sp>
@@ -6417,8 +6417,8 @@
         </p:nvSpPr>
         <p:spPr>
           <a:xfrm>
-            <a:off x="7799832" y="4818888"/>
-            <a:ext cx="3145536" cy="688543"/>
+            <a:off x="7708392" y="4828032"/>
+            <a:ext cx="3282696" cy="749808"/>
           </a:xfrm>
           <a:prstGeom prst="rect">
             <a:avLst/>
@@ -6436,7 +6436,7 @@
               <a:buNone/>
             </a:pPr>
             <a:r>
-              <a:rPr lang="en-US" sz="1320" dirty="0">
+              <a:rPr lang="en-US" sz="1220" dirty="0">
                 <a:solidFill>
                   <a:srgbClr val="17364A"/>
                 </a:solidFill>
@@ -6444,9 +6444,9 @@
                 <a:ea typeface="Aptos" pitchFamily="34" charset="-122"/>
                 <a:cs typeface="Aptos" pitchFamily="34" charset="-120"/>
               </a:rPr>
-              <a:t>Identify what could go wrong, who could be affected, what safeguards are needed, and what evidence should be reviewed before use.</a:t>
-            </a:r>
-            <a:endParaRPr lang="en-US" sz="1320" dirty="0"/>
+              <a:t>Identify what could go wrong, who could be affected, what safeguards are needed,.</a:t>
+            </a:r>
+            <a:endParaRPr lang="en-US" sz="1220" dirty="0"/>
           </a:p>
         </p:txBody>
       </p:sp>
@@ -6737,8 +6737,8 @@
         </p:nvSpPr>
         <p:spPr>
           <a:xfrm>
-            <a:off x="868680" y="1508760"/>
-            <a:ext cx="6309360" cy="4160520"/>
+            <a:off x="822960" y="1463040"/>
+            <a:ext cx="6565392" cy="4343400"/>
           </a:xfrm>
           <a:prstGeom prst="rect">
             <a:avLst/>
@@ -6756,7 +6756,7 @@
               <a:buNone/>
             </a:pPr>
             <a:r>
-              <a:rPr lang="en-US" sz="2100" dirty="0">
+              <a:rPr lang="en-US" sz="1920" dirty="0">
                 <a:solidFill>
                   <a:srgbClr val="003A63"/>
                 </a:solidFill>
@@ -6764,9 +6764,9 @@
                 <a:ea typeface="Aptos" pitchFamily="34" charset="-122"/>
                 <a:cs typeface="Aptos" pitchFamily="34" charset="-120"/>
               </a:rPr>
-              <a:t>• Draft a risk appetite statement and a risk tolerance table for at least four AI use categories:.</a:t>
-            </a:r>
-            <a:endParaRPr lang="en-US" sz="2100" dirty="0"/>
+              <a:t>• Draft a risk appetite statement and a risk tolerance table for at least four.</a:t>
+            </a:r>
+            <a:endParaRPr lang="en-US" sz="1920" dirty="0"/>
           </a:p>
         </p:txBody>
       </p:sp>
@@ -6778,12 +6778,12 @@
         </p:nvSpPr>
         <p:spPr>
           <a:xfrm>
-            <a:off x="7635240" y="1325880"/>
-            <a:ext cx="3474720" cy="1255471"/>
+            <a:off x="7543800" y="1325880"/>
+            <a:ext cx="3611880" cy="1261872"/>
           </a:xfrm>
           <a:prstGeom prst="roundRect">
             <a:avLst>
-              <a:gd name="adj" fmla="val 8740"/>
+              <a:gd name="adj" fmla="val 8696"/>
             </a:avLst>
           </a:prstGeom>
           <a:solidFill>
@@ -6805,8 +6805,8 @@
         </p:nvSpPr>
         <p:spPr>
           <a:xfrm>
-            <a:off x="7799832" y="1472184"/>
-            <a:ext cx="3145536" cy="256032"/>
+            <a:off x="7708392" y="1453896"/>
+            <a:ext cx="3282696" cy="228600"/>
           </a:xfrm>
           <a:prstGeom prst="rect">
             <a:avLst/>
@@ -6822,7 +6822,7 @@
               <a:buNone/>
             </a:pPr>
             <a:r>
-              <a:rPr lang="en-US" sz="1300" b="1" dirty="0">
+              <a:rPr lang="en-US" sz="1220" b="1" dirty="0">
                 <a:solidFill>
                   <a:srgbClr val="0068B7"/>
                 </a:solidFill>
@@ -6832,7 +6832,7 @@
               </a:rPr>
               <a:t>Risk check</a:t>
             </a:r>
-            <a:endParaRPr lang="en-US" sz="1300" dirty="0"/>
+            <a:endParaRPr lang="en-US" sz="1220" dirty="0"/>
           </a:p>
         </p:txBody>
       </p:sp>
@@ -6844,8 +6844,8 @@
         </p:nvSpPr>
         <p:spPr>
           <a:xfrm>
-            <a:off x="7799832" y="1801368"/>
-            <a:ext cx="3145536" cy="688543"/>
+            <a:off x="7708392" y="1764792"/>
+            <a:ext cx="3282696" cy="749808"/>
           </a:xfrm>
           <a:prstGeom prst="rect">
             <a:avLst/>
@@ -6863,7 +6863,7 @@
               <a:buNone/>
             </a:pPr>
             <a:r>
-              <a:rPr lang="en-US" sz="1320" dirty="0">
+              <a:rPr lang="en-US" sz="1220" dirty="0">
                 <a:solidFill>
                   <a:srgbClr val="17364A"/>
                 </a:solidFill>
@@ -6871,9 +6871,9 @@
                 <a:ea typeface="Aptos" pitchFamily="34" charset="-122"/>
                 <a:cs typeface="Aptos" pitchFamily="34" charset="-120"/>
               </a:rPr>
-              <a:t>Draft a risk appetite statement and a risk tolerance table for at least four AI use categories:.</a:t>
-            </a:r>
-            <a:endParaRPr lang="en-US" sz="1320" dirty="0"/>
+              <a:t>Draft a risk appetite statement and a risk tolerance table for at least four AI.</a:t>
+            </a:r>
+            <a:endParaRPr lang="en-US" sz="1220" dirty="0"/>
           </a:p>
         </p:txBody>
       </p:sp>
@@ -6885,12 +6885,12 @@
         </p:nvSpPr>
         <p:spPr>
           <a:xfrm>
-            <a:off x="7635240" y="2718511"/>
-            <a:ext cx="3474720" cy="1328623"/>
+            <a:off x="7543800" y="2724912"/>
+            <a:ext cx="3611880" cy="1527048"/>
           </a:xfrm>
           <a:prstGeom prst="roundRect">
             <a:avLst>
-              <a:gd name="adj" fmla="val 8259"/>
+              <a:gd name="adj" fmla="val 7186"/>
             </a:avLst>
           </a:prstGeom>
           <a:solidFill>
@@ -6912,8 +6912,8 @@
         </p:nvSpPr>
         <p:spPr>
           <a:xfrm>
-            <a:off x="7799832" y="2864815"/>
-            <a:ext cx="3145536" cy="256032"/>
+            <a:off x="7708392" y="2852928"/>
+            <a:ext cx="3282696" cy="228600"/>
           </a:xfrm>
           <a:prstGeom prst="rect">
             <a:avLst/>
@@ -6929,7 +6929,7 @@
               <a:buNone/>
             </a:pPr>
             <a:r>
-              <a:rPr lang="en-US" sz="1300" b="1" dirty="0">
+              <a:rPr lang="en-US" sz="1220" b="1" dirty="0">
                 <a:solidFill>
                   <a:srgbClr val="0068B7"/>
                 </a:solidFill>
@@ -6939,7 +6939,7 @@
               </a:rPr>
               <a:t>Concept checkpoints</a:t>
             </a:r>
-            <a:endParaRPr lang="en-US" sz="1300" dirty="0"/>
+            <a:endParaRPr lang="en-US" sz="1220" dirty="0"/>
           </a:p>
         </p:txBody>
       </p:sp>
@@ -6951,8 +6951,8 @@
         </p:nvSpPr>
         <p:spPr>
           <a:xfrm>
-            <a:off x="7818120" y="3230575"/>
-            <a:ext cx="3090672" cy="670255"/>
+            <a:off x="7726680" y="3182112"/>
+            <a:ext cx="3227832" cy="960120"/>
           </a:xfrm>
           <a:prstGeom prst="rect">
             <a:avLst/>
@@ -6970,7 +6970,7 @@
               <a:buNone/>
             </a:pPr>
             <a:r>
-              <a:rPr lang="en-US" sz="1220" dirty="0">
+              <a:rPr lang="en-US" sz="1140" dirty="0">
                 <a:solidFill>
                   <a:srgbClr val="17364A"/>
                 </a:solidFill>
@@ -6978,9 +6978,9 @@
                 <a:ea typeface="Aptos" pitchFamily="34" charset="-122"/>
                 <a:cs typeface="Aptos" pitchFamily="34" charset="-120"/>
               </a:rPr>
-              <a:t>Draft a risk appetite statement and a risk tolerance table for at.</a:t>
-            </a:r>
-            <a:endParaRPr lang="en-US" sz="1220" dirty="0"/>
+              <a:t>Draft a risk appetite statement and a risk.</a:t>
+            </a:r>
+            <a:endParaRPr lang="en-US" sz="1140" dirty="0"/>
           </a:p>
         </p:txBody>
       </p:sp>
@@ -6992,12 +6992,12 @@
         </p:nvSpPr>
         <p:spPr>
           <a:xfrm>
-            <a:off x="7635240" y="4184294"/>
-            <a:ext cx="3474720" cy="1466698"/>
+            <a:off x="7543800" y="4389120"/>
+            <a:ext cx="3611880" cy="1261872"/>
           </a:xfrm>
           <a:prstGeom prst="roundRect">
             <a:avLst>
-              <a:gd name="adj" fmla="val 7481"/>
+              <a:gd name="adj" fmla="val 8696"/>
             </a:avLst>
           </a:prstGeom>
           <a:solidFill>
@@ -7019,8 +7019,8 @@
         </p:nvSpPr>
         <p:spPr>
           <a:xfrm>
-            <a:off x="7799832" y="4330598"/>
-            <a:ext cx="3145536" cy="256032"/>
+            <a:off x="7708392" y="4517136"/>
+            <a:ext cx="3282696" cy="228600"/>
           </a:xfrm>
           <a:prstGeom prst="rect">
             <a:avLst/>
@@ -7036,7 +7036,7 @@
               <a:buNone/>
             </a:pPr>
             <a:r>
-              <a:rPr lang="en-US" sz="1300" b="1" dirty="0">
+              <a:rPr lang="en-US" sz="1220" b="1" dirty="0">
                 <a:solidFill>
                   <a:srgbClr val="0068B7"/>
                 </a:solidFill>
@@ -7046,7 +7046,7 @@
               </a:rPr>
               <a:t>Safeguard to plan</a:t>
             </a:r>
-            <a:endParaRPr lang="en-US" sz="1300" dirty="0"/>
+            <a:endParaRPr lang="en-US" sz="1220" dirty="0"/>
           </a:p>
         </p:txBody>
       </p:sp>
@@ -7058,8 +7058,8 @@
         </p:nvSpPr>
         <p:spPr>
           <a:xfrm>
-            <a:off x="7799832" y="4659782"/>
-            <a:ext cx="3145536" cy="899770"/>
+            <a:off x="7708392" y="4828032"/>
+            <a:ext cx="3282696" cy="749808"/>
           </a:xfrm>
           <a:prstGeom prst="rect">
             <a:avLst/>
@@ -7077,7 +7077,7 @@
               <a:buNone/>
             </a:pPr>
             <a:r>
-              <a:rPr lang="en-US" sz="1320" dirty="0">
+              <a:rPr lang="en-US" sz="1220" dirty="0">
                 <a:solidFill>
                   <a:srgbClr val="17364A"/>
                 </a:solidFill>
@@ -7085,9 +7085,9 @@
                 <a:ea typeface="Aptos" pitchFamily="34" charset="-122"/>
                 <a:cs typeface="Aptos" pitchFamily="34" charset="-120"/>
               </a:rPr>
-              <a:t>Use the assignment to test whether you can explain the concept, apply it to a realistic public health situation, and identify what would need review before the work moves forward.</a:t>
-            </a:r>
-            <a:endParaRPr lang="en-US" sz="1320" dirty="0"/>
+              <a:t>Use the assignment to test whether you can explain the concept, apply it to a.</a:t>
+            </a:r>
+            <a:endParaRPr lang="en-US" sz="1220" dirty="0"/>
           </a:p>
         </p:txBody>
       </p:sp>
@@ -7378,8 +7378,8 @@
         </p:nvSpPr>
         <p:spPr>
           <a:xfrm>
-            <a:off x="868680" y="1508760"/>
-            <a:ext cx="6309360" cy="4160520"/>
+            <a:off x="822960" y="1463040"/>
+            <a:ext cx="6565392" cy="4343400"/>
           </a:xfrm>
           <a:prstGeom prst="rect">
             <a:avLst/>
@@ -7397,7 +7397,7 @@
               <a:buNone/>
             </a:pPr>
             <a:r>
-              <a:rPr lang="en-US" sz="2100" dirty="0">
+              <a:rPr lang="en-US" sz="1920" dirty="0">
                 <a:solidFill>
                   <a:srgbClr val="003A63"/>
                 </a:solidFill>
@@ -7407,14 +7407,14 @@
               </a:rPr>
               <a:t>• Choose a real or realistic public health AI use case.</a:t>
             </a:r>
-            <a:endParaRPr lang="en-US" sz="2100" dirty="0"/>
-          </a:p>
-          <a:p>
-            <a:pPr indent="0" marL="0">
-              <a:buNone/>
-            </a:pPr>
-            <a:r>
-              <a:rPr lang="en-US" sz="2100" dirty="0">
+            <a:endParaRPr lang="en-US" sz="1920" dirty="0"/>
+          </a:p>
+          <a:p>
+            <a:pPr indent="0" marL="0">
+              <a:buNone/>
+            </a:pPr>
+            <a:r>
+              <a:rPr lang="en-US" sz="1920" dirty="0">
                 <a:solidFill>
                   <a:srgbClr val="003A63"/>
                 </a:solidFill>
@@ -7422,16 +7422,16 @@
                 <a:ea typeface="Aptos" pitchFamily="34" charset="-122"/>
                 <a:cs typeface="Aptos" pitchFamily="34" charset="-120"/>
               </a:rPr>
-              <a:t>• Document assumptions, unresolved questions, and which agency roles would need to review the.</a:t>
-            </a:r>
-            <a:endParaRPr lang="en-US" sz="2100" dirty="0"/>
-          </a:p>
-          <a:p>
-            <a:pPr indent="0" marL="0">
-              <a:buNone/>
-            </a:pPr>
-            <a:r>
-              <a:rPr lang="en-US" sz="2100" dirty="0">
+              <a:t>• Document assumptions, unresolved questions, and which agency roles would.</a:t>
+            </a:r>
+            <a:endParaRPr lang="en-US" sz="1920" dirty="0"/>
+          </a:p>
+          <a:p>
+            <a:pPr indent="0" marL="0">
+              <a:buNone/>
+            </a:pPr>
+            <a:r>
+              <a:rPr lang="en-US" sz="1920" dirty="0">
                 <a:solidFill>
                   <a:srgbClr val="003A63"/>
                 </a:solidFill>
@@ -7439,9 +7439,9 @@
                 <a:ea typeface="Aptos" pitchFamily="34" charset="-122"/>
                 <a:cs typeface="Aptos" pitchFamily="34" charset="-120"/>
               </a:rPr>
-              <a:t>• The exercise should produce a work product that could support governance review, leadership.</a:t>
-            </a:r>
-            <a:endParaRPr lang="en-US" sz="2100" dirty="0"/>
+              <a:t>• The exercise should produce a work product that could support governance.</a:t>
+            </a:r>
+            <a:endParaRPr lang="en-US" sz="1920" dirty="0"/>
           </a:p>
         </p:txBody>
       </p:sp>
@@ -7453,12 +7453,12 @@
         </p:nvSpPr>
         <p:spPr>
           <a:xfrm>
-            <a:off x="7635240" y="1325880"/>
-            <a:ext cx="3474720" cy="1207008"/>
+            <a:off x="7543800" y="1325880"/>
+            <a:ext cx="3611880" cy="1261872"/>
           </a:xfrm>
           <a:prstGeom prst="roundRect">
             <a:avLst>
-              <a:gd name="adj" fmla="val 9091"/>
+              <a:gd name="adj" fmla="val 8696"/>
             </a:avLst>
           </a:prstGeom>
           <a:solidFill>
@@ -7480,8 +7480,8 @@
         </p:nvSpPr>
         <p:spPr>
           <a:xfrm>
-            <a:off x="7799832" y="1472184"/>
-            <a:ext cx="3145536" cy="256032"/>
+            <a:off x="7708392" y="1453896"/>
+            <a:ext cx="3282696" cy="228600"/>
           </a:xfrm>
           <a:prstGeom prst="rect">
             <a:avLst/>
@@ -7497,7 +7497,7 @@
               <a:buNone/>
             </a:pPr>
             <a:r>
-              <a:rPr lang="en-US" sz="1300" b="1" dirty="0">
+              <a:rPr lang="en-US" sz="1220" b="1" dirty="0">
                 <a:solidFill>
                   <a:srgbClr val="0068B7"/>
                 </a:solidFill>
@@ -7507,7 +7507,7 @@
               </a:rPr>
               <a:t>Risk check</a:t>
             </a:r>
-            <a:endParaRPr lang="en-US" sz="1300" dirty="0"/>
+            <a:endParaRPr lang="en-US" sz="1220" dirty="0"/>
           </a:p>
         </p:txBody>
       </p:sp>
@@ -7519,8 +7519,8 @@
         </p:nvSpPr>
         <p:spPr>
           <a:xfrm>
-            <a:off x="7799832" y="1801368"/>
-            <a:ext cx="3145536" cy="640080"/>
+            <a:off x="7708392" y="1764792"/>
+            <a:ext cx="3282696" cy="749808"/>
           </a:xfrm>
           <a:prstGeom prst="rect">
             <a:avLst/>
@@ -7538,7 +7538,7 @@
               <a:buNone/>
             </a:pPr>
             <a:r>
-              <a:rPr lang="en-US" sz="1320" dirty="0">
+              <a:rPr lang="en-US" sz="1220" dirty="0">
                 <a:solidFill>
                   <a:srgbClr val="17364A"/>
                 </a:solidFill>
@@ -7548,7 +7548,7 @@
               </a:rPr>
               <a:t>Choose a real or realistic public health AI use case.</a:t>
             </a:r>
-            <a:endParaRPr lang="en-US" sz="1320" dirty="0"/>
+            <a:endParaRPr lang="en-US" sz="1220" dirty="0"/>
           </a:p>
         </p:txBody>
       </p:sp>
@@ -7560,12 +7560,12 @@
         </p:nvSpPr>
         <p:spPr>
           <a:xfrm>
-            <a:off x="7635240" y="2670048"/>
-            <a:ext cx="3474720" cy="1536192"/>
+            <a:off x="7543800" y="2724912"/>
+            <a:ext cx="3611880" cy="1527048"/>
           </a:xfrm>
           <a:prstGeom prst="roundRect">
             <a:avLst>
-              <a:gd name="adj" fmla="val 7143"/>
+              <a:gd name="adj" fmla="val 7186"/>
             </a:avLst>
           </a:prstGeom>
           <a:solidFill>
@@ -7587,8 +7587,8 @@
         </p:nvSpPr>
         <p:spPr>
           <a:xfrm>
-            <a:off x="7799832" y="2816352"/>
-            <a:ext cx="3145536" cy="256032"/>
+            <a:off x="7708392" y="2852928"/>
+            <a:ext cx="3282696" cy="228600"/>
           </a:xfrm>
           <a:prstGeom prst="rect">
             <a:avLst/>
@@ -7604,7 +7604,7 @@
               <a:buNone/>
             </a:pPr>
             <a:r>
-              <a:rPr lang="en-US" sz="1300" b="1" dirty="0">
+              <a:rPr lang="en-US" sz="1220" b="1" dirty="0">
                 <a:solidFill>
                   <a:srgbClr val="0068B7"/>
                 </a:solidFill>
@@ -7614,7 +7614,7 @@
               </a:rPr>
               <a:t>Concept checkpoints</a:t>
             </a:r>
-            <a:endParaRPr lang="en-US" sz="1300" dirty="0"/>
+            <a:endParaRPr lang="en-US" sz="1220" dirty="0"/>
           </a:p>
         </p:txBody>
       </p:sp>
@@ -7626,8 +7626,8 @@
         </p:nvSpPr>
         <p:spPr>
           <a:xfrm>
-            <a:off x="7818120" y="3182112"/>
-            <a:ext cx="3090672" cy="877824"/>
+            <a:off x="7726680" y="3182112"/>
+            <a:ext cx="3227832" cy="960120"/>
           </a:xfrm>
           <a:prstGeom prst="rect">
             <a:avLst/>
@@ -7645,7 +7645,7 @@
               <a:buNone/>
             </a:pPr>
             <a:r>
-              <a:rPr lang="en-US" sz="1220" dirty="0">
+              <a:rPr lang="en-US" sz="1140" dirty="0">
                 <a:solidFill>
                   <a:srgbClr val="17364A"/>
                 </a:solidFill>
@@ -7653,16 +7653,16 @@
                 <a:ea typeface="Aptos" pitchFamily="34" charset="-122"/>
                 <a:cs typeface="Aptos" pitchFamily="34" charset="-120"/>
               </a:rPr>
-              <a:t>Document assumptions, unresolved questions, and which agency roles.</a:t>
-            </a:r>
-            <a:endParaRPr lang="en-US" sz="1220" dirty="0"/>
-          </a:p>
-          <a:p>
-            <a:pPr indent="0" marL="0">
-              <a:buNone/>
-            </a:pPr>
-            <a:r>
-              <a:rPr lang="en-US" sz="1220" dirty="0">
+              <a:t>Document assumptions, unresolved questions, and.</a:t>
+            </a:r>
+            <a:endParaRPr lang="en-US" sz="1140" dirty="0"/>
+          </a:p>
+          <a:p>
+            <a:pPr indent="0" marL="0">
+              <a:buNone/>
+            </a:pPr>
+            <a:r>
+              <a:rPr lang="en-US" sz="1140" dirty="0">
                 <a:solidFill>
                   <a:srgbClr val="17364A"/>
                 </a:solidFill>
@@ -7670,9 +7670,9 @@
                 <a:ea typeface="Aptos" pitchFamily="34" charset="-122"/>
                 <a:cs typeface="Aptos" pitchFamily="34" charset="-120"/>
               </a:rPr>
-              <a:t>The exercise should produce a work product that could support.</a:t>
-            </a:r>
-            <a:endParaRPr lang="en-US" sz="1220" dirty="0"/>
+              <a:t>The exercise should produce a work product that.</a:t>
+            </a:r>
+            <a:endParaRPr lang="en-US" sz="1140" dirty="0"/>
           </a:p>
         </p:txBody>
       </p:sp>
@@ -7684,12 +7684,12 @@
         </p:nvSpPr>
         <p:spPr>
           <a:xfrm>
-            <a:off x="7635240" y="4343400"/>
-            <a:ext cx="3474720" cy="1255471"/>
+            <a:off x="7543800" y="4389120"/>
+            <a:ext cx="3611880" cy="1261872"/>
           </a:xfrm>
           <a:prstGeom prst="roundRect">
             <a:avLst>
-              <a:gd name="adj" fmla="val 8740"/>
+              <a:gd name="adj" fmla="val 8696"/>
             </a:avLst>
           </a:prstGeom>
           <a:solidFill>
@@ -7711,8 +7711,8 @@
         </p:nvSpPr>
         <p:spPr>
           <a:xfrm>
-            <a:off x="7799832" y="4489704"/>
-            <a:ext cx="3145536" cy="256032"/>
+            <a:off x="7708392" y="4517136"/>
+            <a:ext cx="3282696" cy="228600"/>
           </a:xfrm>
           <a:prstGeom prst="rect">
             <a:avLst/>
@@ -7728,7 +7728,7 @@
               <a:buNone/>
             </a:pPr>
             <a:r>
-              <a:rPr lang="en-US" sz="1300" b="1" dirty="0">
+              <a:rPr lang="en-US" sz="1220" b="1" dirty="0">
                 <a:solidFill>
                   <a:srgbClr val="0068B7"/>
                 </a:solidFill>
@@ -7738,7 +7738,7 @@
               </a:rPr>
               <a:t>Safeguard to plan</a:t>
             </a:r>
-            <a:endParaRPr lang="en-US" sz="1300" dirty="0"/>
+            <a:endParaRPr lang="en-US" sz="1220" dirty="0"/>
           </a:p>
         </p:txBody>
       </p:sp>
@@ -7750,8 +7750,8 @@
         </p:nvSpPr>
         <p:spPr>
           <a:xfrm>
-            <a:off x="7799832" y="4818888"/>
-            <a:ext cx="3145536" cy="688543"/>
+            <a:off x="7708392" y="4828032"/>
+            <a:ext cx="3282696" cy="749808"/>
           </a:xfrm>
           <a:prstGeom prst="rect">
             <a:avLst/>
@@ -7769,7 +7769,7 @@
               <a:buNone/>
             </a:pPr>
             <a:r>
-              <a:rPr lang="en-US" sz="1320" dirty="0">
+              <a:rPr lang="en-US" sz="1220" dirty="0">
                 <a:solidFill>
                   <a:srgbClr val="17364A"/>
                 </a:solidFill>
@@ -7777,9 +7777,9 @@
                 <a:ea typeface="Aptos" pitchFamily="34" charset="-122"/>
                 <a:cs typeface="Aptos" pitchFamily="34" charset="-120"/>
               </a:rPr>
-              <a:t>Identify what could go wrong, who could be affected, what safeguards are needed, and what evidence should be reviewed before use.</a:t>
-            </a:r>
-            <a:endParaRPr lang="en-US" sz="1320" dirty="0"/>
+              <a:t>Identify what could go wrong, who could be affected, what safeguards are needed,.</a:t>
+            </a:r>
+            <a:endParaRPr lang="en-US" sz="1220" dirty="0"/>
           </a:p>
         </p:txBody>
       </p:sp>
@@ -8070,8 +8070,8 @@
         </p:nvSpPr>
         <p:spPr>
           <a:xfrm>
-            <a:off x="868680" y="1508760"/>
-            <a:ext cx="6309360" cy="4160520"/>
+            <a:off x="822960" y="1463040"/>
+            <a:ext cx="6565392" cy="4343400"/>
           </a:xfrm>
           <a:prstGeom prst="rect">
             <a:avLst/>
@@ -8089,7 +8089,7 @@
               <a:buNone/>
             </a:pPr>
             <a:r>
-              <a:rPr lang="en-US" sz="2100" dirty="0">
+              <a:rPr lang="en-US" sz="1920" dirty="0">
                 <a:solidFill>
                   <a:srgbClr val="003A63"/>
                 </a:solidFill>
@@ -8097,9 +8097,9 @@
                 <a:ea typeface="Aptos" pitchFamily="34" charset="-122"/>
                 <a:cs typeface="Aptos" pitchFamily="34" charset="-120"/>
               </a:rPr>
-              <a:t>• AI risk appetite statement; risk tolerance table; prohibited-use examples; mitigation and.</a:t>
-            </a:r>
-            <a:endParaRPr lang="en-US" sz="2100" dirty="0"/>
+              <a:t>• AI risk appetite statement; risk tolerance table; prohibited-use examples;.</a:t>
+            </a:r>
+            <a:endParaRPr lang="en-US" sz="1920" dirty="0"/>
           </a:p>
         </p:txBody>
       </p:sp>
@@ -8111,12 +8111,12 @@
         </p:nvSpPr>
         <p:spPr>
           <a:xfrm>
-            <a:off x="7635240" y="1325880"/>
-            <a:ext cx="3474720" cy="1255471"/>
+            <a:off x="7543800" y="1325880"/>
+            <a:ext cx="3611880" cy="1261872"/>
           </a:xfrm>
           <a:prstGeom prst="roundRect">
             <a:avLst>
-              <a:gd name="adj" fmla="val 8740"/>
+              <a:gd name="adj" fmla="val 8696"/>
             </a:avLst>
           </a:prstGeom>
           <a:solidFill>
@@ -8138,8 +8138,8 @@
         </p:nvSpPr>
         <p:spPr>
           <a:xfrm>
-            <a:off x="7799832" y="1472184"/>
-            <a:ext cx="3145536" cy="256032"/>
+            <a:off x="7708392" y="1453896"/>
+            <a:ext cx="3282696" cy="228600"/>
           </a:xfrm>
           <a:prstGeom prst="rect">
             <a:avLst/>
@@ -8155,7 +8155,7 @@
               <a:buNone/>
             </a:pPr>
             <a:r>
-              <a:rPr lang="en-US" sz="1300" b="1" dirty="0">
+              <a:rPr lang="en-US" sz="1220" b="1" dirty="0">
                 <a:solidFill>
                   <a:srgbClr val="0068B7"/>
                 </a:solidFill>
@@ -8165,7 +8165,7 @@
               </a:rPr>
               <a:t>Risk check</a:t>
             </a:r>
-            <a:endParaRPr lang="en-US" sz="1300" dirty="0"/>
+            <a:endParaRPr lang="en-US" sz="1220" dirty="0"/>
           </a:p>
         </p:txBody>
       </p:sp>
@@ -8177,8 +8177,8 @@
         </p:nvSpPr>
         <p:spPr>
           <a:xfrm>
-            <a:off x="7799832" y="1801368"/>
-            <a:ext cx="3145536" cy="688543"/>
+            <a:off x="7708392" y="1764792"/>
+            <a:ext cx="3282696" cy="749808"/>
           </a:xfrm>
           <a:prstGeom prst="rect">
             <a:avLst/>
@@ -8196,7 +8196,7 @@
               <a:buNone/>
             </a:pPr>
             <a:r>
-              <a:rPr lang="en-US" sz="1320" dirty="0">
+              <a:rPr lang="en-US" sz="1220" dirty="0">
                 <a:solidFill>
                   <a:srgbClr val="17364A"/>
                 </a:solidFill>
@@ -8204,9 +8204,9 @@
                 <a:ea typeface="Aptos" pitchFamily="34" charset="-122"/>
                 <a:cs typeface="Aptos" pitchFamily="34" charset="-120"/>
               </a:rPr>
-              <a:t>AI risk appetite statement; risk tolerance table; prohibited-use examples; mitigation and escalation.</a:t>
-            </a:r>
-            <a:endParaRPr lang="en-US" sz="1320" dirty="0"/>
+              <a:t>AI risk appetite statement; risk tolerance table; prohibited-use examples;.</a:t>
+            </a:r>
+            <a:endParaRPr lang="en-US" sz="1220" dirty="0"/>
           </a:p>
         </p:txBody>
       </p:sp>
@@ -8218,12 +8218,12 @@
         </p:nvSpPr>
         <p:spPr>
           <a:xfrm>
-            <a:off x="7635240" y="2718511"/>
-            <a:ext cx="3474720" cy="1536192"/>
+            <a:off x="7543800" y="2724912"/>
+            <a:ext cx="3611880" cy="1527048"/>
           </a:xfrm>
           <a:prstGeom prst="roundRect">
             <a:avLst>
-              <a:gd name="adj" fmla="val 7143"/>
+              <a:gd name="adj" fmla="val 7186"/>
             </a:avLst>
           </a:prstGeom>
           <a:solidFill>
@@ -8245,8 +8245,8 @@
         </p:nvSpPr>
         <p:spPr>
           <a:xfrm>
-            <a:off x="7799832" y="2864815"/>
-            <a:ext cx="3145536" cy="256032"/>
+            <a:off x="7708392" y="2852928"/>
+            <a:ext cx="3282696" cy="228600"/>
           </a:xfrm>
           <a:prstGeom prst="rect">
             <a:avLst/>
@@ -8262,7 +8262,7 @@
               <a:buNone/>
             </a:pPr>
             <a:r>
-              <a:rPr lang="en-US" sz="1300" b="1" dirty="0">
+              <a:rPr lang="en-US" sz="1220" b="1" dirty="0">
                 <a:solidFill>
                   <a:srgbClr val="0068B7"/>
                 </a:solidFill>
@@ -8272,7 +8272,7 @@
               </a:rPr>
               <a:t>Concept checkpoints</a:t>
             </a:r>
-            <a:endParaRPr lang="en-US" sz="1300" dirty="0"/>
+            <a:endParaRPr lang="en-US" sz="1220" dirty="0"/>
           </a:p>
         </p:txBody>
       </p:sp>
@@ -8284,8 +8284,8 @@
         </p:nvSpPr>
         <p:spPr>
           <a:xfrm>
-            <a:off x="7818120" y="3230575"/>
-            <a:ext cx="3090672" cy="877824"/>
+            <a:off x="7726680" y="3182112"/>
+            <a:ext cx="3227832" cy="960120"/>
           </a:xfrm>
           <a:prstGeom prst="rect">
             <a:avLst/>
@@ -8303,7 +8303,7 @@
               <a:buNone/>
             </a:pPr>
             <a:r>
-              <a:rPr lang="en-US" sz="1220" dirty="0">
+              <a:rPr lang="en-US" sz="1140" dirty="0">
                 <a:solidFill>
                   <a:srgbClr val="17364A"/>
                 </a:solidFill>
@@ -8311,9 +8311,9 @@
                 <a:ea typeface="Aptos" pitchFamily="34" charset="-122"/>
                 <a:cs typeface="Aptos" pitchFamily="34" charset="-120"/>
               </a:rPr>
-              <a:t>AI risk appetite statement; risk tolerance table; prohibited-use.</a:t>
-            </a:r>
-            <a:endParaRPr lang="en-US" sz="1220" dirty="0"/>
+              <a:t>AI risk appetite statement; risk tolerance table;.</a:t>
+            </a:r>
+            <a:endParaRPr lang="en-US" sz="1140" dirty="0"/>
           </a:p>
         </p:txBody>
       </p:sp>
@@ -8325,12 +8325,12 @@
         </p:nvSpPr>
         <p:spPr>
           <a:xfrm>
-            <a:off x="7635240" y="4391863"/>
-            <a:ext cx="3474720" cy="1255471"/>
+            <a:off x="7543800" y="4389120"/>
+            <a:ext cx="3611880" cy="1261872"/>
           </a:xfrm>
           <a:prstGeom prst="roundRect">
             <a:avLst>
-              <a:gd name="adj" fmla="val 8740"/>
+              <a:gd name="adj" fmla="val 8696"/>
             </a:avLst>
           </a:prstGeom>
           <a:solidFill>
@@ -8352,8 +8352,8 @@
         </p:nvSpPr>
         <p:spPr>
           <a:xfrm>
-            <a:off x="7799832" y="4538167"/>
-            <a:ext cx="3145536" cy="256032"/>
+            <a:off x="7708392" y="4517136"/>
+            <a:ext cx="3282696" cy="228600"/>
           </a:xfrm>
           <a:prstGeom prst="rect">
             <a:avLst/>
@@ -8369,7 +8369,7 @@
               <a:buNone/>
             </a:pPr>
             <a:r>
-              <a:rPr lang="en-US" sz="1300" b="1" dirty="0">
+              <a:rPr lang="en-US" sz="1220" b="1" dirty="0">
                 <a:solidFill>
                   <a:srgbClr val="0068B7"/>
                 </a:solidFill>
@@ -8379,7 +8379,7 @@
               </a:rPr>
               <a:t>Safeguard to plan</a:t>
             </a:r>
-            <a:endParaRPr lang="en-US" sz="1300" dirty="0"/>
+            <a:endParaRPr lang="en-US" sz="1220" dirty="0"/>
           </a:p>
         </p:txBody>
       </p:sp>
@@ -8391,8 +8391,8 @@
         </p:nvSpPr>
         <p:spPr>
           <a:xfrm>
-            <a:off x="7799832" y="4867351"/>
-            <a:ext cx="3145536" cy="688543"/>
+            <a:off x="7708392" y="4828032"/>
+            <a:ext cx="3282696" cy="749808"/>
           </a:xfrm>
           <a:prstGeom prst="rect">
             <a:avLst/>
@@ -8410,7 +8410,7 @@
               <a:buNone/>
             </a:pPr>
             <a:r>
-              <a:rPr lang="en-US" sz="1320" dirty="0">
+              <a:rPr lang="en-US" sz="1220" dirty="0">
                 <a:solidFill>
                   <a:srgbClr val="17364A"/>
                 </a:solidFill>
@@ -8418,9 +8418,9 @@
                 <a:ea typeface="Aptos" pitchFamily="34" charset="-122"/>
                 <a:cs typeface="Aptos" pitchFamily="34" charset="-120"/>
               </a:rPr>
-              <a:t>Identify what could go wrong, who could be affected, what safeguards are needed, and what evidence should be reviewed before use.</a:t>
-            </a:r>
-            <a:endParaRPr lang="en-US" sz="1320" dirty="0"/>
+              <a:t>Identify what could go wrong, who could be affected, what safeguards are needed,.</a:t>
+            </a:r>
+            <a:endParaRPr lang="en-US" sz="1220" dirty="0"/>
           </a:p>
         </p:txBody>
       </p:sp>
@@ -8711,8 +8711,8 @@
         </p:nvSpPr>
         <p:spPr>
           <a:xfrm>
-            <a:off x="868680" y="1508760"/>
-            <a:ext cx="6309360" cy="4160520"/>
+            <a:off x="822960" y="1463040"/>
+            <a:ext cx="6565392" cy="4343400"/>
           </a:xfrm>
           <a:prstGeom prst="rect">
             <a:avLst/>
@@ -8730,7 +8730,7 @@
               <a:buNone/>
             </a:pPr>
             <a:r>
-              <a:rPr lang="en-US" sz="2100" dirty="0">
+              <a:rPr lang="en-US" sz="1920" dirty="0">
                 <a:solidFill>
                   <a:srgbClr val="003A63"/>
                 </a:solidFill>
@@ -8738,9 +8738,9 @@
                 <a:ea typeface="Aptos" pitchFamily="34" charset="-122"/>
                 <a:cs typeface="Aptos" pitchFamily="34" charset="-120"/>
               </a:rPr>
-              <a:t>• AI risk appetite statement; risk tolerance table; prohibited-use examples; mitigation and.</a:t>
-            </a:r>
-            <a:endParaRPr lang="en-US" sz="2100" dirty="0"/>
+              <a:t>• AI risk appetite statement; risk tolerance table; prohibited-use examples;.</a:t>
+            </a:r>
+            <a:endParaRPr lang="en-US" sz="1920" dirty="0"/>
           </a:p>
         </p:txBody>
       </p:sp>
@@ -8752,12 +8752,12 @@
         </p:nvSpPr>
         <p:spPr>
           <a:xfrm>
-            <a:off x="7635240" y="1325880"/>
-            <a:ext cx="3474720" cy="1255471"/>
+            <a:off x="7543800" y="1325880"/>
+            <a:ext cx="3611880" cy="1261872"/>
           </a:xfrm>
           <a:prstGeom prst="roundRect">
             <a:avLst>
-              <a:gd name="adj" fmla="val 8740"/>
+              <a:gd name="adj" fmla="val 8696"/>
             </a:avLst>
           </a:prstGeom>
           <a:solidFill>
@@ -8779,8 +8779,8 @@
         </p:nvSpPr>
         <p:spPr>
           <a:xfrm>
-            <a:off x="7799832" y="1472184"/>
-            <a:ext cx="3145536" cy="256032"/>
+            <a:off x="7708392" y="1453896"/>
+            <a:ext cx="3282696" cy="228600"/>
           </a:xfrm>
           <a:prstGeom prst="rect">
             <a:avLst/>
@@ -8796,7 +8796,7 @@
               <a:buNone/>
             </a:pPr>
             <a:r>
-              <a:rPr lang="en-US" sz="1300" b="1" dirty="0">
+              <a:rPr lang="en-US" sz="1220" b="1" dirty="0">
                 <a:solidFill>
                   <a:srgbClr val="0068B7"/>
                 </a:solidFill>
@@ -8806,7 +8806,7 @@
               </a:rPr>
               <a:t>Risk check</a:t>
             </a:r>
-            <a:endParaRPr lang="en-US" sz="1300" dirty="0"/>
+            <a:endParaRPr lang="en-US" sz="1220" dirty="0"/>
           </a:p>
         </p:txBody>
       </p:sp>
@@ -8818,8 +8818,8 @@
         </p:nvSpPr>
         <p:spPr>
           <a:xfrm>
-            <a:off x="7799832" y="1801368"/>
-            <a:ext cx="3145536" cy="688543"/>
+            <a:off x="7708392" y="1764792"/>
+            <a:ext cx="3282696" cy="749808"/>
           </a:xfrm>
           <a:prstGeom prst="rect">
             <a:avLst/>
@@ -8837,7 +8837,7 @@
               <a:buNone/>
             </a:pPr>
             <a:r>
-              <a:rPr lang="en-US" sz="1320" dirty="0">
+              <a:rPr lang="en-US" sz="1220" dirty="0">
                 <a:solidFill>
                   <a:srgbClr val="17364A"/>
                 </a:solidFill>
@@ -8845,9 +8845,9 @@
                 <a:ea typeface="Aptos" pitchFamily="34" charset="-122"/>
                 <a:cs typeface="Aptos" pitchFamily="34" charset="-120"/>
               </a:rPr>
-              <a:t>AI risk appetite statement; risk tolerance table; prohibited-use examples; mitigation and escalation.</a:t>
-            </a:r>
-            <a:endParaRPr lang="en-US" sz="1320" dirty="0"/>
+              <a:t>AI risk appetite statement; risk tolerance table; prohibited-use examples;.</a:t>
+            </a:r>
+            <a:endParaRPr lang="en-US" sz="1220" dirty="0"/>
           </a:p>
         </p:txBody>
       </p:sp>
@@ -8859,12 +8859,12 @@
         </p:nvSpPr>
         <p:spPr>
           <a:xfrm>
-            <a:off x="7635240" y="2718511"/>
-            <a:ext cx="3474720" cy="1328623"/>
+            <a:off x="7543800" y="2724912"/>
+            <a:ext cx="3611880" cy="1527048"/>
           </a:xfrm>
           <a:prstGeom prst="roundRect">
             <a:avLst>
-              <a:gd name="adj" fmla="val 8259"/>
+              <a:gd name="adj" fmla="val 7186"/>
             </a:avLst>
           </a:prstGeom>
           <a:solidFill>
@@ -8886,8 +8886,8 @@
         </p:nvSpPr>
         <p:spPr>
           <a:xfrm>
-            <a:off x="7799832" y="2864815"/>
-            <a:ext cx="3145536" cy="256032"/>
+            <a:off x="7708392" y="2852928"/>
+            <a:ext cx="3282696" cy="228600"/>
           </a:xfrm>
           <a:prstGeom prst="rect">
             <a:avLst/>
@@ -8903,7 +8903,7 @@
               <a:buNone/>
             </a:pPr>
             <a:r>
-              <a:rPr lang="en-US" sz="1300" b="1" dirty="0">
+              <a:rPr lang="en-US" sz="1220" b="1" dirty="0">
                 <a:solidFill>
                   <a:srgbClr val="0068B7"/>
                 </a:solidFill>
@@ -8913,7 +8913,7 @@
               </a:rPr>
               <a:t>Concept checkpoints</a:t>
             </a:r>
-            <a:endParaRPr lang="en-US" sz="1300" dirty="0"/>
+            <a:endParaRPr lang="en-US" sz="1220" dirty="0"/>
           </a:p>
         </p:txBody>
       </p:sp>
@@ -8925,8 +8925,8 @@
         </p:nvSpPr>
         <p:spPr>
           <a:xfrm>
-            <a:off x="7818120" y="3230575"/>
-            <a:ext cx="3090672" cy="670255"/>
+            <a:off x="7726680" y="3182112"/>
+            <a:ext cx="3227832" cy="960120"/>
           </a:xfrm>
           <a:prstGeom prst="rect">
             <a:avLst/>
@@ -8944,7 +8944,7 @@
               <a:buNone/>
             </a:pPr>
             <a:r>
-              <a:rPr lang="en-US" sz="1220" dirty="0">
+              <a:rPr lang="en-US" sz="1140" dirty="0">
                 <a:solidFill>
                   <a:srgbClr val="17364A"/>
                 </a:solidFill>
@@ -8952,9 +8952,9 @@
                 <a:ea typeface="Aptos" pitchFamily="34" charset="-122"/>
                 <a:cs typeface="Aptos" pitchFamily="34" charset="-120"/>
               </a:rPr>
-              <a:t>AI risk appetite statement; risk tolerance table; prohibited-use.</a:t>
-            </a:r>
-            <a:endParaRPr lang="en-US" sz="1220" dirty="0"/>
+              <a:t>AI risk appetite statement; risk tolerance table;.</a:t>
+            </a:r>
+            <a:endParaRPr lang="en-US" sz="1140" dirty="0"/>
           </a:p>
         </p:txBody>
       </p:sp>
@@ -8966,12 +8966,12 @@
         </p:nvSpPr>
         <p:spPr>
           <a:xfrm>
-            <a:off x="7635240" y="4184294"/>
-            <a:ext cx="3474720" cy="1466698"/>
+            <a:off x="7543800" y="4389120"/>
+            <a:ext cx="3611880" cy="1261872"/>
           </a:xfrm>
           <a:prstGeom prst="roundRect">
             <a:avLst>
-              <a:gd name="adj" fmla="val 7481"/>
+              <a:gd name="adj" fmla="val 8696"/>
             </a:avLst>
           </a:prstGeom>
           <a:solidFill>
@@ -8993,8 +8993,8 @@
         </p:nvSpPr>
         <p:spPr>
           <a:xfrm>
-            <a:off x="7799832" y="4330598"/>
-            <a:ext cx="3145536" cy="256032"/>
+            <a:off x="7708392" y="4517136"/>
+            <a:ext cx="3282696" cy="228600"/>
           </a:xfrm>
           <a:prstGeom prst="rect">
             <a:avLst/>
@@ -9010,7 +9010,7 @@
               <a:buNone/>
             </a:pPr>
             <a:r>
-              <a:rPr lang="en-US" sz="1300" b="1" dirty="0">
+              <a:rPr lang="en-US" sz="1220" b="1" dirty="0">
                 <a:solidFill>
                   <a:srgbClr val="0068B7"/>
                 </a:solidFill>
@@ -9020,7 +9020,7 @@
               </a:rPr>
               <a:t>Safeguard to plan</a:t>
             </a:r>
-            <a:endParaRPr lang="en-US" sz="1300" dirty="0"/>
+            <a:endParaRPr lang="en-US" sz="1220" dirty="0"/>
           </a:p>
         </p:txBody>
       </p:sp>
@@ -9032,8 +9032,8 @@
         </p:nvSpPr>
         <p:spPr>
           <a:xfrm>
-            <a:off x="7799832" y="4659782"/>
-            <a:ext cx="3145536" cy="899770"/>
+            <a:off x="7708392" y="4828032"/>
+            <a:ext cx="3282696" cy="749808"/>
           </a:xfrm>
           <a:prstGeom prst="rect">
             <a:avLst/>
@@ -9051,7 +9051,7 @@
               <a:buNone/>
             </a:pPr>
             <a:r>
-              <a:rPr lang="en-US" sz="1320" dirty="0">
+              <a:rPr lang="en-US" sz="1220" dirty="0">
                 <a:solidFill>
                   <a:srgbClr val="17364A"/>
                 </a:solidFill>
@@ -9059,9 +9059,9 @@
                 <a:ea typeface="Aptos" pitchFamily="34" charset="-122"/>
                 <a:cs typeface="Aptos" pitchFamily="34" charset="-120"/>
               </a:rPr>
-              <a:t>Use the assignment to test whether you can explain the concept, apply it to a realistic public health situation, and identify what would need review before the work moves forward.</a:t>
-            </a:r>
-            <a:endParaRPr lang="en-US" sz="1320" dirty="0"/>
+              <a:t>Use the assignment to test whether you can explain the concept, apply it to a.</a:t>
+            </a:r>
+            <a:endParaRPr lang="en-US" sz="1220" dirty="0"/>
           </a:p>
         </p:txBody>
       </p:sp>
@@ -9352,8 +9352,8 @@
         </p:nvSpPr>
         <p:spPr>
           <a:xfrm>
-            <a:off x="868680" y="1508760"/>
-            <a:ext cx="6309360" cy="4160520"/>
+            <a:off x="822960" y="1463040"/>
+            <a:ext cx="6565392" cy="4343400"/>
           </a:xfrm>
           <a:prstGeom prst="rect">
             <a:avLst/>
@@ -9371,7 +9371,7 @@
               <a:buNone/>
             </a:pPr>
             <a:r>
-              <a:rPr lang="en-US" sz="2100" dirty="0">
+              <a:rPr lang="en-US" sz="1920" dirty="0">
                 <a:solidFill>
                   <a:srgbClr val="003A63"/>
                 </a:solidFill>
@@ -9379,16 +9379,16 @@
                 <a:ea typeface="Aptos" pitchFamily="34" charset="-122"/>
                 <a:cs typeface="Aptos" pitchFamily="34" charset="-120"/>
               </a:rPr>
-              <a:t>• 1. What is the strongest reason this module topic belongs in AI leadership and governance.</a:t>
-            </a:r>
-            <a:endParaRPr lang="en-US" sz="2100" dirty="0"/>
-          </a:p>
-          <a:p>
-            <a:pPr indent="0" marL="0">
-              <a:buNone/>
-            </a:pPr>
-            <a:r>
-              <a:rPr lang="en-US" sz="2100" dirty="0">
+              <a:t>• 1. What is the strongest reason this module topic belongs in AI leadership.</a:t>
+            </a:r>
+            <a:endParaRPr lang="en-US" sz="1920" dirty="0"/>
+          </a:p>
+          <a:p>
+            <a:pPr indent="0" marL="0">
+              <a:buNone/>
+            </a:pPr>
+            <a:r>
+              <a:rPr lang="en-US" sz="1920" dirty="0">
                 <a:solidFill>
                   <a:srgbClr val="003A63"/>
                 </a:solidFill>
@@ -9398,14 +9398,14 @@
               </a:rPr>
               <a:t>• 2. Which practice best supports accountable public health AI governance?</a:t>
             </a:r>
-            <a:endParaRPr lang="en-US" sz="2100" dirty="0"/>
-          </a:p>
-          <a:p>
-            <a:pPr indent="0" marL="0">
-              <a:buNone/>
-            </a:pPr>
-            <a:r>
-              <a:rPr lang="en-US" sz="2100" dirty="0">
+            <a:endParaRPr lang="en-US" sz="1920" dirty="0"/>
+          </a:p>
+          <a:p>
+            <a:pPr indent="0" marL="0">
+              <a:buNone/>
+            </a:pPr>
+            <a:r>
+              <a:rPr lang="en-US" sz="1920" dirty="0">
                 <a:solidFill>
                   <a:srgbClr val="003A63"/>
                 </a:solidFill>
@@ -9413,9 +9413,9 @@
                 <a:ea typeface="Aptos" pitchFamily="34" charset="-122"/>
                 <a:cs typeface="Aptos" pitchFamily="34" charset="-120"/>
               </a:rPr>
-              <a:t>• 3. When should an AI use case be escalated for leadership or governance review?</a:t>
-            </a:r>
-            <a:endParaRPr lang="en-US" sz="2100" dirty="0"/>
+              <a:t>• 3. When should an AI use case be escalated for leadership or governance.</a:t>
+            </a:r>
+            <a:endParaRPr lang="en-US" sz="1920" dirty="0"/>
           </a:p>
         </p:txBody>
       </p:sp>
@@ -9427,12 +9427,12 @@
         </p:nvSpPr>
         <p:spPr>
           <a:xfrm>
-            <a:off x="7635240" y="1325880"/>
-            <a:ext cx="3474720" cy="1255471"/>
+            <a:off x="7543800" y="1325880"/>
+            <a:ext cx="3611880" cy="1261872"/>
           </a:xfrm>
           <a:prstGeom prst="roundRect">
             <a:avLst>
-              <a:gd name="adj" fmla="val 8740"/>
+              <a:gd name="adj" fmla="val 8696"/>
             </a:avLst>
           </a:prstGeom>
           <a:solidFill>
@@ -9454,8 +9454,8 @@
         </p:nvSpPr>
         <p:spPr>
           <a:xfrm>
-            <a:off x="7799832" y="1472184"/>
-            <a:ext cx="3145536" cy="256032"/>
+            <a:off x="7708392" y="1453896"/>
+            <a:ext cx="3282696" cy="228600"/>
           </a:xfrm>
           <a:prstGeom prst="rect">
             <a:avLst/>
@@ -9471,7 +9471,7 @@
               <a:buNone/>
             </a:pPr>
             <a:r>
-              <a:rPr lang="en-US" sz="1300" b="1" dirty="0">
+              <a:rPr lang="en-US" sz="1220" b="1" dirty="0">
                 <a:solidFill>
                   <a:srgbClr val="0068B7"/>
                 </a:solidFill>
@@ -9481,7 +9481,7 @@
               </a:rPr>
               <a:t>Risk check</a:t>
             </a:r>
-            <a:endParaRPr lang="en-US" sz="1300" dirty="0"/>
+            <a:endParaRPr lang="en-US" sz="1220" dirty="0"/>
           </a:p>
         </p:txBody>
       </p:sp>
@@ -9493,8 +9493,8 @@
         </p:nvSpPr>
         <p:spPr>
           <a:xfrm>
-            <a:off x="7799832" y="1801368"/>
-            <a:ext cx="3145536" cy="688543"/>
+            <a:off x="7708392" y="1764792"/>
+            <a:ext cx="3282696" cy="749808"/>
           </a:xfrm>
           <a:prstGeom prst="rect">
             <a:avLst/>
@@ -9512,7 +9512,7 @@
               <a:buNone/>
             </a:pPr>
             <a:r>
-              <a:rPr lang="en-US" sz="1320" dirty="0">
+              <a:rPr lang="en-US" sz="1220" dirty="0">
                 <a:solidFill>
                   <a:srgbClr val="17364A"/>
                 </a:solidFill>
@@ -9520,9 +9520,9 @@
                 <a:ea typeface="Aptos" pitchFamily="34" charset="-122"/>
                 <a:cs typeface="Aptos" pitchFamily="34" charset="-120"/>
               </a:rPr>
-              <a:t>1. What is the strongest reason this module topic belongs in AI leadership and governance training?</a:t>
-            </a:r>
-            <a:endParaRPr lang="en-US" sz="1320" dirty="0"/>
+              <a:t>1. What is the strongest reason this module topic belongs in AI leadership and.</a:t>
+            </a:r>
+            <a:endParaRPr lang="en-US" sz="1220" dirty="0"/>
           </a:p>
         </p:txBody>
       </p:sp>
@@ -9534,12 +9534,12 @@
         </p:nvSpPr>
         <p:spPr>
           <a:xfrm>
-            <a:off x="7635240" y="2718511"/>
-            <a:ext cx="3474720" cy="1328623"/>
+            <a:off x="7543800" y="2724912"/>
+            <a:ext cx="3611880" cy="1527048"/>
           </a:xfrm>
           <a:prstGeom prst="roundRect">
             <a:avLst>
-              <a:gd name="adj" fmla="val 8259"/>
+              <a:gd name="adj" fmla="val 7186"/>
             </a:avLst>
           </a:prstGeom>
           <a:solidFill>
@@ -9561,8 +9561,8 @@
         </p:nvSpPr>
         <p:spPr>
           <a:xfrm>
-            <a:off x="7799832" y="2864815"/>
-            <a:ext cx="3145536" cy="256032"/>
+            <a:off x="7708392" y="2852928"/>
+            <a:ext cx="3282696" cy="228600"/>
           </a:xfrm>
           <a:prstGeom prst="rect">
             <a:avLst/>
@@ -9578,7 +9578,7 @@
               <a:buNone/>
             </a:pPr>
             <a:r>
-              <a:rPr lang="en-US" sz="1300" b="1" dirty="0">
+              <a:rPr lang="en-US" sz="1220" b="1" dirty="0">
                 <a:solidFill>
                   <a:srgbClr val="0068B7"/>
                 </a:solidFill>
@@ -9588,7 +9588,7 @@
               </a:rPr>
               <a:t>Concept checkpoints</a:t>
             </a:r>
-            <a:endParaRPr lang="en-US" sz="1300" dirty="0"/>
+            <a:endParaRPr lang="en-US" sz="1220" dirty="0"/>
           </a:p>
         </p:txBody>
       </p:sp>
@@ -9600,8 +9600,8 @@
         </p:nvSpPr>
         <p:spPr>
           <a:xfrm>
-            <a:off x="7818120" y="3230575"/>
-            <a:ext cx="3090672" cy="670255"/>
+            <a:off x="7726680" y="3182112"/>
+            <a:ext cx="3227832" cy="960120"/>
           </a:xfrm>
           <a:prstGeom prst="rect">
             <a:avLst/>
@@ -9619,7 +9619,7 @@
               <a:buNone/>
             </a:pPr>
             <a:r>
-              <a:rPr lang="en-US" sz="1220" dirty="0">
+              <a:rPr lang="en-US" sz="1140" dirty="0">
                 <a:solidFill>
                   <a:srgbClr val="17364A"/>
                 </a:solidFill>
@@ -9629,14 +9629,14 @@
               </a:rPr>
               <a:t>1.</a:t>
             </a:r>
-            <a:endParaRPr lang="en-US" sz="1220" dirty="0"/>
-          </a:p>
-          <a:p>
-            <a:pPr indent="0" marL="0">
-              <a:buNone/>
-            </a:pPr>
-            <a:r>
-              <a:rPr lang="en-US" sz="1220" dirty="0">
+            <a:endParaRPr lang="en-US" sz="1140" dirty="0"/>
+          </a:p>
+          <a:p>
+            <a:pPr indent="0" marL="0">
+              <a:buNone/>
+            </a:pPr>
+            <a:r>
+              <a:rPr lang="en-US" sz="1140" dirty="0">
                 <a:solidFill>
                   <a:srgbClr val="17364A"/>
                 </a:solidFill>
@@ -9644,16 +9644,16 @@
                 <a:ea typeface="Aptos" pitchFamily="34" charset="-122"/>
                 <a:cs typeface="Aptos" pitchFamily="34" charset="-120"/>
               </a:rPr>
-              <a:t>What is the strongest reason this module topic belongs in AI.</a:t>
-            </a:r>
-            <a:endParaRPr lang="en-US" sz="1220" dirty="0"/>
-          </a:p>
-          <a:p>
-            <a:pPr indent="0" marL="0">
-              <a:buNone/>
-            </a:pPr>
-            <a:r>
-              <a:rPr lang="en-US" sz="1220" dirty="0">
+              <a:t>What is the strongest reason this module topic.</a:t>
+            </a:r>
+            <a:endParaRPr lang="en-US" sz="1140" dirty="0"/>
+          </a:p>
+          <a:p>
+            <a:pPr indent="0" marL="0">
+              <a:buNone/>
+            </a:pPr>
+            <a:r>
+              <a:rPr lang="en-US" sz="1140" dirty="0">
                 <a:solidFill>
                   <a:srgbClr val="17364A"/>
                 </a:solidFill>
@@ -9663,7 +9663,7 @@
               </a:rPr>
               <a:t>2.</a:t>
             </a:r>
-            <a:endParaRPr lang="en-US" sz="1220" dirty="0"/>
+            <a:endParaRPr lang="en-US" sz="1140" dirty="0"/>
           </a:p>
         </p:txBody>
       </p:sp>
@@ -9675,12 +9675,12 @@
         </p:nvSpPr>
         <p:spPr>
           <a:xfrm>
-            <a:off x="7635240" y="4184294"/>
-            <a:ext cx="3474720" cy="1466698"/>
+            <a:off x="7543800" y="4389120"/>
+            <a:ext cx="3611880" cy="1261872"/>
           </a:xfrm>
           <a:prstGeom prst="roundRect">
             <a:avLst>
-              <a:gd name="adj" fmla="val 7481"/>
+              <a:gd name="adj" fmla="val 8696"/>
             </a:avLst>
           </a:prstGeom>
           <a:solidFill>
@@ -9702,8 +9702,8 @@
         </p:nvSpPr>
         <p:spPr>
           <a:xfrm>
-            <a:off x="7799832" y="4330598"/>
-            <a:ext cx="3145536" cy="256032"/>
+            <a:off x="7708392" y="4517136"/>
+            <a:ext cx="3282696" cy="228600"/>
           </a:xfrm>
           <a:prstGeom prst="rect">
             <a:avLst/>
@@ -9719,7 +9719,7 @@
               <a:buNone/>
             </a:pPr>
             <a:r>
-              <a:rPr lang="en-US" sz="1300" b="1" dirty="0">
+              <a:rPr lang="en-US" sz="1220" b="1" dirty="0">
                 <a:solidFill>
                   <a:srgbClr val="0068B7"/>
                 </a:solidFill>
@@ -9729,7 +9729,7 @@
               </a:rPr>
               <a:t>Safeguard to plan</a:t>
             </a:r>
-            <a:endParaRPr lang="en-US" sz="1300" dirty="0"/>
+            <a:endParaRPr lang="en-US" sz="1220" dirty="0"/>
           </a:p>
         </p:txBody>
       </p:sp>
@@ -9741,8 +9741,8 @@
         </p:nvSpPr>
         <p:spPr>
           <a:xfrm>
-            <a:off x="7799832" y="4659782"/>
-            <a:ext cx="3145536" cy="899770"/>
+            <a:off x="7708392" y="4828032"/>
+            <a:ext cx="3282696" cy="749808"/>
           </a:xfrm>
           <a:prstGeom prst="rect">
             <a:avLst/>
@@ -9760,7 +9760,7 @@
               <a:buNone/>
             </a:pPr>
             <a:r>
-              <a:rPr lang="en-US" sz="1320" dirty="0">
+              <a:rPr lang="en-US" sz="1220" dirty="0">
                 <a:solidFill>
                   <a:srgbClr val="17364A"/>
                 </a:solidFill>
@@ -9768,9 +9768,9 @@
                 <a:ea typeface="Aptos" pitchFamily="34" charset="-122"/>
                 <a:cs typeface="Aptos" pitchFamily="34" charset="-120"/>
               </a:rPr>
-              <a:t>Use the assignment to test whether you can explain the concept, apply it to a realistic public health situation, and identify what would need review before the work moves forward.</a:t>
-            </a:r>
-            <a:endParaRPr lang="en-US" sz="1320" dirty="0"/>
+              <a:t>Use the assignment to test whether you can explain the concept, apply it to a.</a:t>
+            </a:r>
+            <a:endParaRPr lang="en-US" sz="1220" dirty="0"/>
           </a:p>
         </p:txBody>
       </p:sp>
@@ -10088,7 +10088,7 @@
                 <a:ea typeface="Aptos" pitchFamily="34" charset="-122"/>
                 <a:cs typeface="Aptos" pitchFamily="34" charset="-120"/>
               </a:rPr>
-              <a:t>• Leaders cannot manage AI risk effectively unless they define how much risk the agency is.</a:t>
+              <a:t>• Leaders cannot manage AI risk effectively unless they define how much risk.</a:t>
             </a:r>
             <a:endParaRPr lang="en-US" sz="2100" dirty="0"/>
           </a:p>
@@ -10105,7 +10105,7 @@
                 <a:ea typeface="Aptos" pitchFamily="34" charset="-122"/>
                 <a:cs typeface="Aptos" pitchFamily="34" charset="-120"/>
               </a:rPr>
-              <a:t>• Risk appetite describes the broad level of risk an organization is willing to take in pursuit.</a:t>
+              <a:t>• Risk appetite describes the broad level of risk an organization is willing.</a:t>
             </a:r>
             <a:endParaRPr lang="en-US" sz="2100" dirty="0"/>
           </a:p>
@@ -10122,7 +10122,7 @@
                 <a:ea typeface="Aptos" pitchFamily="34" charset="-122"/>
                 <a:cs typeface="Aptos" pitchFamily="34" charset="-120"/>
               </a:rPr>
-              <a:t>• Risk tolerance translates that appetite into practical thresholds, conditions, and limits for.</a:t>
+              <a:t>• Risk tolerance translates that appetite into practical thresholds,.</a:t>
             </a:r>
             <a:endParaRPr lang="en-US" sz="2100" dirty="0"/>
           </a:p>
@@ -10163,8 +10163,8 @@
         </p:nvSpPr>
         <p:spPr>
           <a:xfrm>
-            <a:off x="8074152" y="1563624"/>
-            <a:ext cx="2825496" cy="256032"/>
+            <a:off x="8074152" y="1545336"/>
+            <a:ext cx="2825496" cy="228600"/>
           </a:xfrm>
           <a:prstGeom prst="rect">
             <a:avLst/>
@@ -10180,7 +10180,7 @@
               <a:buNone/>
             </a:pPr>
             <a:r>
-              <a:rPr lang="en-US" sz="1300" b="1" dirty="0">
+              <a:rPr lang="en-US" sz="1220" b="1" dirty="0">
                 <a:solidFill>
                   <a:srgbClr val="0068B7"/>
                 </a:solidFill>
@@ -10190,7 +10190,7 @@
               </a:rPr>
               <a:t>Module details</a:t>
             </a:r>
-            <a:endParaRPr lang="en-US" sz="1300" dirty="0"/>
+            <a:endParaRPr lang="en-US" sz="1220" dirty="0"/>
           </a:p>
         </p:txBody>
       </p:sp>
@@ -10202,8 +10202,8 @@
         </p:nvSpPr>
         <p:spPr>
           <a:xfrm>
-            <a:off x="8074152" y="1892808"/>
-            <a:ext cx="2825496" cy="1353312"/>
+            <a:off x="8074152" y="1856232"/>
+            <a:ext cx="2825496" cy="1408176"/>
           </a:xfrm>
           <a:prstGeom prst="rect">
             <a:avLst/>
@@ -10221,7 +10221,7 @@
               <a:buNone/>
             </a:pPr>
             <a:r>
-              <a:rPr lang="en-US" sz="1320" dirty="0">
+              <a:rPr lang="en-US" sz="1220" dirty="0">
                 <a:solidFill>
                   <a:srgbClr val="17364A"/>
                 </a:solidFill>
@@ -10229,9 +10229,9 @@
                 <a:ea typeface="Aptos" pitchFamily="34" charset="-122"/>
                 <a:cs typeface="Aptos" pitchFamily="34" charset="-120"/>
               </a:rPr>
-              <a:t>Level: advanced/leadership Primary track: Governance and Security Track Appears in tracks: governance-security</a:t>
-            </a:r>
-            <a:endParaRPr lang="en-US" sz="1320" dirty="0"/>
+              <a:t>Level: advanced/leadership Primary track: Governance and Security Track Appears.</a:t>
+            </a:r>
+            <a:endParaRPr lang="en-US" sz="1220" dirty="0"/>
           </a:p>
         </p:txBody>
       </p:sp>
@@ -10270,8 +10270,8 @@
         </p:nvSpPr>
         <p:spPr>
           <a:xfrm>
-            <a:off x="8074152" y="3822192"/>
-            <a:ext cx="2825496" cy="256032"/>
+            <a:off x="8074152" y="3803904"/>
+            <a:ext cx="2825496" cy="228600"/>
           </a:xfrm>
           <a:prstGeom prst="rect">
             <a:avLst/>
@@ -10287,7 +10287,7 @@
               <a:buNone/>
             </a:pPr>
             <a:r>
-              <a:rPr lang="en-US" sz="1300" b="1" dirty="0">
+              <a:rPr lang="en-US" sz="1220" b="1" dirty="0">
                 <a:solidFill>
                   <a:srgbClr val="0068B7"/>
                 </a:solidFill>
@@ -10297,7 +10297,7 @@
               </a:rPr>
               <a:t>Learning sequence</a:t>
             </a:r>
-            <a:endParaRPr lang="en-US" sz="1300" dirty="0"/>
+            <a:endParaRPr lang="en-US" sz="1220" dirty="0"/>
           </a:p>
         </p:txBody>
       </p:sp>
@@ -10309,8 +10309,8 @@
         </p:nvSpPr>
         <p:spPr>
           <a:xfrm>
-            <a:off x="8092440" y="4187952"/>
-            <a:ext cx="2770632" cy="1033272"/>
+            <a:off x="8092440" y="4133088"/>
+            <a:ext cx="2770632" cy="1124712"/>
           </a:xfrm>
           <a:prstGeom prst="rect">
             <a:avLst/>
@@ -10328,7 +10328,7 @@
               <a:buNone/>
             </a:pPr>
             <a:r>
-              <a:rPr lang="en-US" sz="1220" dirty="0">
+              <a:rPr lang="en-US" sz="1140" dirty="0">
                 <a:solidFill>
                   <a:srgbClr val="17364A"/>
                 </a:solidFill>
@@ -10338,14 +10338,14 @@
               </a:rPr>
               <a:t>Read the module for shared vocabulary and context.</a:t>
             </a:r>
-            <a:endParaRPr lang="en-US" sz="1220" dirty="0"/>
-          </a:p>
-          <a:p>
-            <a:pPr indent="0" marL="0">
-              <a:buNone/>
-            </a:pPr>
-            <a:r>
-              <a:rPr lang="en-US" sz="1220" dirty="0">
+            <a:endParaRPr lang="en-US" sz="1140" dirty="0"/>
+          </a:p>
+          <a:p>
+            <a:pPr indent="0" marL="0">
+              <a:buNone/>
+            </a:pPr>
+            <a:r>
+              <a:rPr lang="en-US" sz="1140" dirty="0">
                 <a:solidFill>
                   <a:srgbClr val="17364A"/>
                 </a:solidFill>
@@ -10353,16 +10353,16 @@
                 <a:ea typeface="Aptos" pitchFamily="34" charset="-122"/>
                 <a:cs typeface="Aptos" pitchFamily="34" charset="-120"/>
               </a:rPr>
-              <a:t>Complete the practical exercise to apply the concept.</a:t>
-            </a:r>
-            <a:endParaRPr lang="en-US" sz="1220" dirty="0"/>
-          </a:p>
-          <a:p>
-            <a:pPr indent="0" marL="0">
-              <a:buNone/>
-            </a:pPr>
-            <a:r>
-              <a:rPr lang="en-US" sz="1220" dirty="0">
+              <a:t>Complete the practical exercise to apply the.</a:t>
+            </a:r>
+            <a:endParaRPr lang="en-US" sz="1140" dirty="0"/>
+          </a:p>
+          <a:p>
+            <a:pPr indent="0" marL="0">
+              <a:buNone/>
+            </a:pPr>
+            <a:r>
+              <a:rPr lang="en-US" sz="1140" dirty="0">
                 <a:solidFill>
                   <a:srgbClr val="17364A"/>
                 </a:solidFill>
@@ -10372,7 +10372,7 @@
               </a:rPr>
               <a:t>Use the notes and references for deeper review.</a:t>
             </a:r>
-            <a:endParaRPr lang="en-US" sz="1220" dirty="0"/>
+            <a:endParaRPr lang="en-US" sz="1140" dirty="0"/>
           </a:p>
         </p:txBody>
       </p:sp>
@@ -10663,8 +10663,8 @@
         </p:nvSpPr>
         <p:spPr>
           <a:xfrm>
-            <a:off x="868680" y="1508760"/>
-            <a:ext cx="6309360" cy="4160520"/>
+            <a:off x="822960" y="1463040"/>
+            <a:ext cx="6565392" cy="4343400"/>
           </a:xfrm>
           <a:prstGeom prst="rect">
             <a:avLst/>
@@ -10682,7 +10682,7 @@
               <a:buNone/>
             </a:pPr>
             <a:r>
-              <a:rPr lang="en-US" sz="2100" dirty="0">
+              <a:rPr lang="en-US" sz="1920" dirty="0">
                 <a:solidFill>
                   <a:srgbClr val="003A63"/>
                 </a:solidFill>
@@ -10692,14 +10692,14 @@
               </a:rPr>
               <a:t>• NIST Artificial Intelligence Risk Management Framework (AI RMF 1.0):.</a:t>
             </a:r>
-            <a:endParaRPr lang="en-US" sz="2100" dirty="0"/>
-          </a:p>
-          <a:p>
-            <a:pPr indent="0" marL="0">
-              <a:buNone/>
-            </a:pPr>
-            <a:r>
-              <a:rPr lang="en-US" sz="2100" dirty="0">
+            <a:endParaRPr lang="en-US" sz="1920" dirty="0"/>
+          </a:p>
+          <a:p>
+            <a:pPr indent="0" marL="0">
+              <a:buNone/>
+            </a:pPr>
+            <a:r>
+              <a:rPr lang="en-US" sz="1920" dirty="0">
                 <a:solidFill>
                   <a:srgbClr val="003A63"/>
                 </a:solidFill>
@@ -10709,14 +10709,14 @@
               </a:rPr>
               <a:t>• NIST Generative AI Profile:.</a:t>
             </a:r>
-            <a:endParaRPr lang="en-US" sz="2100" dirty="0"/>
-          </a:p>
-          <a:p>
-            <a:pPr indent="0" marL="0">
-              <a:buNone/>
-            </a:pPr>
-            <a:r>
-              <a:rPr lang="en-US" sz="2100" dirty="0">
+            <a:endParaRPr lang="en-US" sz="1920" dirty="0"/>
+          </a:p>
+          <a:p>
+            <a:pPr indent="0" marL="0">
+              <a:buNone/>
+            </a:pPr>
+            <a:r>
+              <a:rPr lang="en-US" sz="1920" dirty="0">
                 <a:solidFill>
                   <a:srgbClr val="003A63"/>
                 </a:solidFill>
@@ -10726,7 +10726,7 @@
               </a:rPr>
               <a:t>• NIST Privacy Framework</a:t>
             </a:r>
-            <a:endParaRPr lang="en-US" sz="2100" dirty="0"/>
+            <a:endParaRPr lang="en-US" sz="1920" dirty="0"/>
           </a:p>
         </p:txBody>
       </p:sp>
@@ -10738,12 +10738,12 @@
         </p:nvSpPr>
         <p:spPr>
           <a:xfrm>
-            <a:off x="7635240" y="1325880"/>
-            <a:ext cx="3474720" cy="1207008"/>
+            <a:off x="7543800" y="1325880"/>
+            <a:ext cx="3611880" cy="1261872"/>
           </a:xfrm>
           <a:prstGeom prst="roundRect">
             <a:avLst>
-              <a:gd name="adj" fmla="val 9091"/>
+              <a:gd name="adj" fmla="val 8696"/>
             </a:avLst>
           </a:prstGeom>
           <a:solidFill>
@@ -10765,8 +10765,8 @@
         </p:nvSpPr>
         <p:spPr>
           <a:xfrm>
-            <a:off x="7799832" y="1472184"/>
-            <a:ext cx="3145536" cy="256032"/>
+            <a:off x="7708392" y="1453896"/>
+            <a:ext cx="3282696" cy="228600"/>
           </a:xfrm>
           <a:prstGeom prst="rect">
             <a:avLst/>
@@ -10782,7 +10782,7 @@
               <a:buNone/>
             </a:pPr>
             <a:r>
-              <a:rPr lang="en-US" sz="1300" b="1" dirty="0">
+              <a:rPr lang="en-US" sz="1220" b="1" dirty="0">
                 <a:solidFill>
                   <a:srgbClr val="0068B7"/>
                 </a:solidFill>
@@ -10792,7 +10792,7 @@
               </a:rPr>
               <a:t>Risk check</a:t>
             </a:r>
-            <a:endParaRPr lang="en-US" sz="1300" dirty="0"/>
+            <a:endParaRPr lang="en-US" sz="1220" dirty="0"/>
           </a:p>
         </p:txBody>
       </p:sp>
@@ -10804,8 +10804,8 @@
         </p:nvSpPr>
         <p:spPr>
           <a:xfrm>
-            <a:off x="7799832" y="1801368"/>
-            <a:ext cx="3145536" cy="640080"/>
+            <a:off x="7708392" y="1764792"/>
+            <a:ext cx="3282696" cy="749808"/>
           </a:xfrm>
           <a:prstGeom prst="rect">
             <a:avLst/>
@@ -10823,7 +10823,7 @@
               <a:buNone/>
             </a:pPr>
             <a:r>
-              <a:rPr lang="en-US" sz="1320" dirty="0">
+              <a:rPr lang="en-US" sz="1220" dirty="0">
                 <a:solidFill>
                   <a:srgbClr val="17364A"/>
                 </a:solidFill>
@@ -10833,7 +10833,7 @@
               </a:rPr>
               <a:t>NIST Artificial Intelligence Risk Management Framework (AI RMF 1.0):.</a:t>
             </a:r>
-            <a:endParaRPr lang="en-US" sz="1320" dirty="0"/>
+            <a:endParaRPr lang="en-US" sz="1220" dirty="0"/>
           </a:p>
         </p:txBody>
       </p:sp>
@@ -10845,12 +10845,12 @@
         </p:nvSpPr>
         <p:spPr>
           <a:xfrm>
-            <a:off x="7635240" y="2670048"/>
-            <a:ext cx="3474720" cy="1536192"/>
+            <a:off x="7543800" y="2724912"/>
+            <a:ext cx="3611880" cy="1527048"/>
           </a:xfrm>
           <a:prstGeom prst="roundRect">
             <a:avLst>
-              <a:gd name="adj" fmla="val 7143"/>
+              <a:gd name="adj" fmla="val 7186"/>
             </a:avLst>
           </a:prstGeom>
           <a:solidFill>
@@ -10872,8 +10872,8 @@
         </p:nvSpPr>
         <p:spPr>
           <a:xfrm>
-            <a:off x="7799832" y="2816352"/>
-            <a:ext cx="3145536" cy="256032"/>
+            <a:off x="7708392" y="2852928"/>
+            <a:ext cx="3282696" cy="228600"/>
           </a:xfrm>
           <a:prstGeom prst="rect">
             <a:avLst/>
@@ -10889,7 +10889,7 @@
               <a:buNone/>
             </a:pPr>
             <a:r>
-              <a:rPr lang="en-US" sz="1300" b="1" dirty="0">
+              <a:rPr lang="en-US" sz="1220" b="1" dirty="0">
                 <a:solidFill>
                   <a:srgbClr val="0068B7"/>
                 </a:solidFill>
@@ -10899,7 +10899,7 @@
               </a:rPr>
               <a:t>Concept checkpoints</a:t>
             </a:r>
-            <a:endParaRPr lang="en-US" sz="1300" dirty="0"/>
+            <a:endParaRPr lang="en-US" sz="1220" dirty="0"/>
           </a:p>
         </p:txBody>
       </p:sp>
@@ -10911,8 +10911,8 @@
         </p:nvSpPr>
         <p:spPr>
           <a:xfrm>
-            <a:off x="7818120" y="3182112"/>
-            <a:ext cx="3090672" cy="877824"/>
+            <a:off x="7726680" y="3182112"/>
+            <a:ext cx="3227832" cy="960120"/>
           </a:xfrm>
           <a:prstGeom prst="rect">
             <a:avLst/>
@@ -10930,7 +10930,7 @@
               <a:buNone/>
             </a:pPr>
             <a:r>
-              <a:rPr lang="en-US" sz="1220" dirty="0">
+              <a:rPr lang="en-US" sz="1140" dirty="0">
                 <a:solidFill>
                   <a:srgbClr val="17364A"/>
                 </a:solidFill>
@@ -10938,16 +10938,16 @@
                 <a:ea typeface="Aptos" pitchFamily="34" charset="-122"/>
                 <a:cs typeface="Aptos" pitchFamily="34" charset="-120"/>
               </a:rPr>
-              <a:t>NIST Artificial Intelligence Risk Management Framework (AI RMF.</a:t>
-            </a:r>
-            <a:endParaRPr lang="en-US" sz="1220" dirty="0"/>
-          </a:p>
-          <a:p>
-            <a:pPr indent="0" marL="0">
-              <a:buNone/>
-            </a:pPr>
-            <a:r>
-              <a:rPr lang="en-US" sz="1220" dirty="0">
+              <a:t>NIST Artificial Intelligence Risk Management.</a:t>
+            </a:r>
+            <a:endParaRPr lang="en-US" sz="1140" dirty="0"/>
+          </a:p>
+          <a:p>
+            <a:pPr indent="0" marL="0">
+              <a:buNone/>
+            </a:pPr>
+            <a:r>
+              <a:rPr lang="en-US" sz="1140" dirty="0">
                 <a:solidFill>
                   <a:srgbClr val="17364A"/>
                 </a:solidFill>
@@ -10955,16 +10955,16 @@
                 <a:ea typeface="Aptos" pitchFamily="34" charset="-122"/>
                 <a:cs typeface="Aptos" pitchFamily="34" charset="-120"/>
               </a:rPr>
-              <a:t>CDC Public Health Data Strategy and Data Modernization resources:.</a:t>
-            </a:r>
-            <a:endParaRPr lang="en-US" sz="1220" dirty="0"/>
-          </a:p>
-          <a:p>
-            <a:pPr indent="0" marL="0">
-              <a:buNone/>
-            </a:pPr>
-            <a:r>
-              <a:rPr lang="en-US" sz="1220" dirty="0">
+              <a:t>CDC Public Health Data Strategy and Data.</a:t>
+            </a:r>
+            <a:endParaRPr lang="en-US" sz="1140" dirty="0"/>
+          </a:p>
+          <a:p>
+            <a:pPr indent="0" marL="0">
+              <a:buNone/>
+            </a:pPr>
+            <a:r>
+              <a:rPr lang="en-US" sz="1140" dirty="0">
                 <a:solidFill>
                   <a:srgbClr val="17364A"/>
                 </a:solidFill>
@@ -10972,9 +10972,9 @@
                 <a:ea typeface="Aptos" pitchFamily="34" charset="-122"/>
                 <a:cs typeface="Aptos" pitchFamily="34" charset="-120"/>
               </a:rPr>
-              <a:t>WHO Ethics and Governance of Artificial Intelligence for Health:.</a:t>
-            </a:r>
-            <a:endParaRPr lang="en-US" sz="1220" dirty="0"/>
+              <a:t>WHO Ethics and Governance of Artificial.</a:t>
+            </a:r>
+            <a:endParaRPr lang="en-US" sz="1140" dirty="0"/>
           </a:p>
         </p:txBody>
       </p:sp>
@@ -10986,12 +10986,12 @@
         </p:nvSpPr>
         <p:spPr>
           <a:xfrm>
-            <a:off x="7635240" y="4343400"/>
-            <a:ext cx="3474720" cy="1255471"/>
+            <a:off x="7543800" y="4389120"/>
+            <a:ext cx="3611880" cy="1261872"/>
           </a:xfrm>
           <a:prstGeom prst="roundRect">
             <a:avLst>
-              <a:gd name="adj" fmla="val 8740"/>
+              <a:gd name="adj" fmla="val 8696"/>
             </a:avLst>
           </a:prstGeom>
           <a:solidFill>
@@ -11013,8 +11013,8 @@
         </p:nvSpPr>
         <p:spPr>
           <a:xfrm>
-            <a:off x="7799832" y="4489704"/>
-            <a:ext cx="3145536" cy="256032"/>
+            <a:off x="7708392" y="4517136"/>
+            <a:ext cx="3282696" cy="228600"/>
           </a:xfrm>
           <a:prstGeom prst="rect">
             <a:avLst/>
@@ -11030,7 +11030,7 @@
               <a:buNone/>
             </a:pPr>
             <a:r>
-              <a:rPr lang="en-US" sz="1300" b="1" dirty="0">
+              <a:rPr lang="en-US" sz="1220" b="1" dirty="0">
                 <a:solidFill>
                   <a:srgbClr val="0068B7"/>
                 </a:solidFill>
@@ -11040,7 +11040,7 @@
               </a:rPr>
               <a:t>Safeguard to plan</a:t>
             </a:r>
-            <a:endParaRPr lang="en-US" sz="1300" dirty="0"/>
+            <a:endParaRPr lang="en-US" sz="1220" dirty="0"/>
           </a:p>
         </p:txBody>
       </p:sp>
@@ -11052,8 +11052,8 @@
         </p:nvSpPr>
         <p:spPr>
           <a:xfrm>
-            <a:off x="7799832" y="4818888"/>
-            <a:ext cx="3145536" cy="688543"/>
+            <a:off x="7708392" y="4828032"/>
+            <a:ext cx="3282696" cy="749808"/>
           </a:xfrm>
           <a:prstGeom prst="rect">
             <a:avLst/>
@@ -11071,7 +11071,7 @@
               <a:buNone/>
             </a:pPr>
             <a:r>
-              <a:rPr lang="en-US" sz="1320" dirty="0">
+              <a:rPr lang="en-US" sz="1220" dirty="0">
                 <a:solidFill>
                   <a:srgbClr val="17364A"/>
                 </a:solidFill>
@@ -11079,9 +11079,9 @@
                 <a:ea typeface="Aptos" pitchFamily="34" charset="-122"/>
                 <a:cs typeface="Aptos" pitchFamily="34" charset="-120"/>
               </a:rPr>
-              <a:t>Identify what could go wrong, who could be affected, what safeguards are needed, and what evidence should be reviewed before use.</a:t>
-            </a:r>
-            <a:endParaRPr lang="en-US" sz="1320" dirty="0"/>
+              <a:t>Identify what could go wrong, who could be affected, what safeguards are needed,.</a:t>
+            </a:r>
+            <a:endParaRPr lang="en-US" sz="1220" dirty="0"/>
           </a:p>
         </p:txBody>
       </p:sp>
@@ -11372,8 +11372,8 @@
         </p:nvSpPr>
         <p:spPr>
           <a:xfrm>
-            <a:off x="868680" y="1508760"/>
-            <a:ext cx="6309360" cy="4160520"/>
+            <a:off x="822960" y="1463040"/>
+            <a:ext cx="6565392" cy="4343400"/>
           </a:xfrm>
           <a:prstGeom prst="rect">
             <a:avLst/>
@@ -11391,7 +11391,7 @@
               <a:buNone/>
             </a:pPr>
             <a:r>
-              <a:rPr lang="en-US" sz="2100" dirty="0">
+              <a:rPr lang="en-US" sz="1920" dirty="0">
                 <a:solidFill>
                   <a:srgbClr val="003A63"/>
                 </a:solidFill>
@@ -11399,16 +11399,16 @@
                 <a:ea typeface="Aptos" pitchFamily="34" charset="-122"/>
                 <a:cs typeface="Aptos" pitchFamily="34" charset="-120"/>
               </a:rPr>
-              <a:t>• OMB Memorandum M-24-10 on federal AI governance, risk management, and innovation, where.</a:t>
-            </a:r>
-            <a:endParaRPr lang="en-US" sz="2100" dirty="0"/>
-          </a:p>
-          <a:p>
-            <a:pPr indent="0" marL="0">
-              <a:buNone/>
-            </a:pPr>
-            <a:r>
-              <a:rPr lang="en-US" sz="2100" dirty="0">
+              <a:t>• OMB Memorandum M-24-10 on federal AI governance, risk management, and.</a:t>
+            </a:r>
+            <a:endParaRPr lang="en-US" sz="1920" dirty="0"/>
+          </a:p>
+          <a:p>
+            <a:pPr indent="0" marL="0">
+              <a:buNone/>
+            </a:pPr>
+            <a:r>
+              <a:rPr lang="en-US" sz="1920" dirty="0">
                 <a:solidFill>
                   <a:srgbClr val="003A63"/>
                 </a:solidFill>
@@ -11416,9 +11416,9 @@
                 <a:ea typeface="Aptos" pitchFamily="34" charset="-122"/>
                 <a:cs typeface="Aptos" pitchFamily="34" charset="-120"/>
               </a:rPr>
-              <a:t>• Agency strategic plans, procurement policies, privacy policies, cybersecurity policies, records.</a:t>
-            </a:r>
-            <a:endParaRPr lang="en-US" sz="2100" dirty="0"/>
+              <a:t>• Agency strategic plans, procurement policies, privacy policies,.</a:t>
+            </a:r>
+            <a:endParaRPr lang="en-US" sz="1920" dirty="0"/>
           </a:p>
         </p:txBody>
       </p:sp>
@@ -11430,12 +11430,12 @@
         </p:nvSpPr>
         <p:spPr>
           <a:xfrm>
-            <a:off x="7635240" y="1325880"/>
-            <a:ext cx="3474720" cy="1255471"/>
+            <a:off x="7543800" y="1325880"/>
+            <a:ext cx="3611880" cy="1261872"/>
           </a:xfrm>
           <a:prstGeom prst="roundRect">
             <a:avLst>
-              <a:gd name="adj" fmla="val 8740"/>
+              <a:gd name="adj" fmla="val 8696"/>
             </a:avLst>
           </a:prstGeom>
           <a:solidFill>
@@ -11457,8 +11457,8 @@
         </p:nvSpPr>
         <p:spPr>
           <a:xfrm>
-            <a:off x="7799832" y="1472184"/>
-            <a:ext cx="3145536" cy="256032"/>
+            <a:off x="7708392" y="1453896"/>
+            <a:ext cx="3282696" cy="228600"/>
           </a:xfrm>
           <a:prstGeom prst="rect">
             <a:avLst/>
@@ -11474,7 +11474,7 @@
               <a:buNone/>
             </a:pPr>
             <a:r>
-              <a:rPr lang="en-US" sz="1300" b="1" dirty="0">
+              <a:rPr lang="en-US" sz="1220" b="1" dirty="0">
                 <a:solidFill>
                   <a:srgbClr val="0068B7"/>
                 </a:solidFill>
@@ -11484,7 +11484,7 @@
               </a:rPr>
               <a:t>Risk check</a:t>
             </a:r>
-            <a:endParaRPr lang="en-US" sz="1300" dirty="0"/>
+            <a:endParaRPr lang="en-US" sz="1220" dirty="0"/>
           </a:p>
         </p:txBody>
       </p:sp>
@@ -11496,8 +11496,8 @@
         </p:nvSpPr>
         <p:spPr>
           <a:xfrm>
-            <a:off x="7799832" y="1801368"/>
-            <a:ext cx="3145536" cy="688543"/>
+            <a:off x="7708392" y="1764792"/>
+            <a:ext cx="3282696" cy="749808"/>
           </a:xfrm>
           <a:prstGeom prst="rect">
             <a:avLst/>
@@ -11515,7 +11515,7 @@
               <a:buNone/>
             </a:pPr>
             <a:r>
-              <a:rPr lang="en-US" sz="1320" dirty="0">
+              <a:rPr lang="en-US" sz="1220" dirty="0">
                 <a:solidFill>
                   <a:srgbClr val="17364A"/>
                 </a:solidFill>
@@ -11523,9 +11523,9 @@
                 <a:ea typeface="Aptos" pitchFamily="34" charset="-122"/>
                 <a:cs typeface="Aptos" pitchFamily="34" charset="-120"/>
               </a:rPr>
-              <a:t>OMB Memorandum M-24-10 on federal AI governance, risk management, and innovation, where relevant to.</a:t>
-            </a:r>
-            <a:endParaRPr lang="en-US" sz="1320" dirty="0"/>
+              <a:t>OMB Memorandum M-24-10 on federal AI governance, risk management, and.</a:t>
+            </a:r>
+            <a:endParaRPr lang="en-US" sz="1220" dirty="0"/>
           </a:p>
         </p:txBody>
       </p:sp>
@@ -11537,12 +11537,12 @@
         </p:nvSpPr>
         <p:spPr>
           <a:xfrm>
-            <a:off x="7635240" y="2718511"/>
-            <a:ext cx="3474720" cy="1536192"/>
+            <a:off x="7543800" y="2724912"/>
+            <a:ext cx="3611880" cy="1527048"/>
           </a:xfrm>
           <a:prstGeom prst="roundRect">
             <a:avLst>
-              <a:gd name="adj" fmla="val 7143"/>
+              <a:gd name="adj" fmla="val 7186"/>
             </a:avLst>
           </a:prstGeom>
           <a:solidFill>
@@ -11564,8 +11564,8 @@
         </p:nvSpPr>
         <p:spPr>
           <a:xfrm>
-            <a:off x="7799832" y="2864815"/>
-            <a:ext cx="3145536" cy="256032"/>
+            <a:off x="7708392" y="2852928"/>
+            <a:ext cx="3282696" cy="228600"/>
           </a:xfrm>
           <a:prstGeom prst="rect">
             <a:avLst/>
@@ -11581,7 +11581,7 @@
               <a:buNone/>
             </a:pPr>
             <a:r>
-              <a:rPr lang="en-US" sz="1300" b="1" dirty="0">
+              <a:rPr lang="en-US" sz="1220" b="1" dirty="0">
                 <a:solidFill>
                   <a:srgbClr val="0068B7"/>
                 </a:solidFill>
@@ -11591,7 +11591,7 @@
               </a:rPr>
               <a:t>Concept checkpoints</a:t>
             </a:r>
-            <a:endParaRPr lang="en-US" sz="1300" dirty="0"/>
+            <a:endParaRPr lang="en-US" sz="1220" dirty="0"/>
           </a:p>
         </p:txBody>
       </p:sp>
@@ -11603,8 +11603,8 @@
         </p:nvSpPr>
         <p:spPr>
           <a:xfrm>
-            <a:off x="7818120" y="3230575"/>
-            <a:ext cx="3090672" cy="877824"/>
+            <a:off x="7726680" y="3182112"/>
+            <a:ext cx="3227832" cy="960120"/>
           </a:xfrm>
           <a:prstGeom prst="rect">
             <a:avLst/>
@@ -11622,7 +11622,7 @@
               <a:buNone/>
             </a:pPr>
             <a:r>
-              <a:rPr lang="en-US" sz="1220" dirty="0">
+              <a:rPr lang="en-US" sz="1140" dirty="0">
                 <a:solidFill>
                   <a:srgbClr val="17364A"/>
                 </a:solidFill>
@@ -11630,16 +11630,16 @@
                 <a:ea typeface="Aptos" pitchFamily="34" charset="-122"/>
                 <a:cs typeface="Aptos" pitchFamily="34" charset="-120"/>
               </a:rPr>
-              <a:t>OMB Memorandum M-24-10 on federal AI governance, risk management,.</a:t>
-            </a:r>
-            <a:endParaRPr lang="en-US" sz="1220" dirty="0"/>
-          </a:p>
-          <a:p>
-            <a:pPr indent="0" marL="0">
-              <a:buNone/>
-            </a:pPr>
-            <a:r>
-              <a:rPr lang="en-US" sz="1220" dirty="0">
+              <a:t>OMB Memorandum M-24-10 on federal AI governance,.</a:t>
+            </a:r>
+            <a:endParaRPr lang="en-US" sz="1140" dirty="0"/>
+          </a:p>
+          <a:p>
+            <a:pPr indent="0" marL="0">
+              <a:buNone/>
+            </a:pPr>
+            <a:r>
+              <a:rPr lang="en-US" sz="1140" dirty="0">
                 <a:solidFill>
                   <a:srgbClr val="17364A"/>
                 </a:solidFill>
@@ -11647,9 +11647,9 @@
                 <a:ea typeface="Aptos" pitchFamily="34" charset="-122"/>
                 <a:cs typeface="Aptos" pitchFamily="34" charset="-120"/>
               </a:rPr>
-              <a:t>Agency strategic plans, procurement policies, privacy policies,.</a:t>
-            </a:r>
-            <a:endParaRPr lang="en-US" sz="1220" dirty="0"/>
+              <a:t>Agency strategic plans, procurement policies,.</a:t>
+            </a:r>
+            <a:endParaRPr lang="en-US" sz="1140" dirty="0"/>
           </a:p>
         </p:txBody>
       </p:sp>
@@ -11661,12 +11661,12 @@
         </p:nvSpPr>
         <p:spPr>
           <a:xfrm>
-            <a:off x="7635240" y="4391863"/>
-            <a:ext cx="3474720" cy="1255471"/>
+            <a:off x="7543800" y="4389120"/>
+            <a:ext cx="3611880" cy="1261872"/>
           </a:xfrm>
           <a:prstGeom prst="roundRect">
             <a:avLst>
-              <a:gd name="adj" fmla="val 8740"/>
+              <a:gd name="adj" fmla="val 8696"/>
             </a:avLst>
           </a:prstGeom>
           <a:solidFill>
@@ -11688,8 +11688,8 @@
         </p:nvSpPr>
         <p:spPr>
           <a:xfrm>
-            <a:off x="7799832" y="4538167"/>
-            <a:ext cx="3145536" cy="256032"/>
+            <a:off x="7708392" y="4517136"/>
+            <a:ext cx="3282696" cy="228600"/>
           </a:xfrm>
           <a:prstGeom prst="rect">
             <a:avLst/>
@@ -11705,7 +11705,7 @@
               <a:buNone/>
             </a:pPr>
             <a:r>
-              <a:rPr lang="en-US" sz="1300" b="1" dirty="0">
+              <a:rPr lang="en-US" sz="1220" b="1" dirty="0">
                 <a:solidFill>
                   <a:srgbClr val="0068B7"/>
                 </a:solidFill>
@@ -11715,7 +11715,7 @@
               </a:rPr>
               <a:t>Safeguard to plan</a:t>
             </a:r>
-            <a:endParaRPr lang="en-US" sz="1300" dirty="0"/>
+            <a:endParaRPr lang="en-US" sz="1220" dirty="0"/>
           </a:p>
         </p:txBody>
       </p:sp>
@@ -11727,8 +11727,8 @@
         </p:nvSpPr>
         <p:spPr>
           <a:xfrm>
-            <a:off x="7799832" y="4867351"/>
-            <a:ext cx="3145536" cy="688543"/>
+            <a:off x="7708392" y="4828032"/>
+            <a:ext cx="3282696" cy="749808"/>
           </a:xfrm>
           <a:prstGeom prst="rect">
             <a:avLst/>
@@ -11746,7 +11746,7 @@
               <a:buNone/>
             </a:pPr>
             <a:r>
-              <a:rPr lang="en-US" sz="1320" dirty="0">
+              <a:rPr lang="en-US" sz="1220" dirty="0">
                 <a:solidFill>
                   <a:srgbClr val="17364A"/>
                 </a:solidFill>
@@ -11754,9 +11754,9 @@
                 <a:ea typeface="Aptos" pitchFamily="34" charset="-122"/>
                 <a:cs typeface="Aptos" pitchFamily="34" charset="-120"/>
               </a:rPr>
-              <a:t>Identify what could go wrong, who could be affected, what safeguards are needed, and what evidence should be reviewed before use.</a:t>
-            </a:r>
-            <a:endParaRPr lang="en-US" sz="1320" dirty="0"/>
+              <a:t>Identify what could go wrong, who could be affected, what safeguards are needed,.</a:t>
+            </a:r>
+            <a:endParaRPr lang="en-US" sz="1220" dirty="0"/>
           </a:p>
         </p:txBody>
       </p:sp>
@@ -12074,7 +12074,7 @@
                 <a:ea typeface="Aptos" pitchFamily="34" charset="-122"/>
                 <a:cs typeface="Aptos" pitchFamily="34" charset="-120"/>
               </a:rPr>
-              <a:t>• Play 11: Build and Deploy AI Solutions - This lesson informs Play 11 by helping learners.</a:t>
+              <a:t>• Play 11: Build and Deploy AI Solutions - This lesson informs Play 11 by.</a:t>
             </a:r>
             <a:endParaRPr lang="en-US" sz="1900" dirty="0"/>
           </a:p>
@@ -12091,7 +12091,7 @@
                 <a:ea typeface="Aptos" pitchFamily="34" charset="-122"/>
                 <a:cs typeface="Aptos" pitchFamily="34" charset="-120"/>
               </a:rPr>
-              <a:t>• Play 7: Prioritize Use Cases - This lesson informs Play 7 by helping learners connect the.</a:t>
+              <a:t>• Play 7: Prioritize Use Cases - This lesson informs Play 7 by helping.</a:t>
             </a:r>
             <a:endParaRPr lang="en-US" sz="1900" dirty="0"/>
           </a:p>
@@ -12108,7 +12108,7 @@
                 <a:ea typeface="Aptos" pitchFamily="34" charset="-122"/>
                 <a:cs typeface="Aptos" pitchFamily="34" charset="-120"/>
               </a:rPr>
-              <a:t>• Play 1: Vision &amp; Guardrails - This lesson informs Play 1 by helping learners connect the.</a:t>
+              <a:t>• Play 1: Vision &amp; Guardrails - This lesson informs Play 1 by helping learners.</a:t>
             </a:r>
             <a:endParaRPr lang="en-US" sz="1900" dirty="0"/>
           </a:p>
@@ -12125,7 +12125,7 @@
                 <a:ea typeface="Aptos" pitchFamily="34" charset="-122"/>
                 <a:cs typeface="Aptos" pitchFamily="34" charset="-120"/>
               </a:rPr>
-              <a:t>• Play 3: Establish AI Governance - This lesson informs Play 3 by helping learners connect the.</a:t>
+              <a:t>• Play 3: Establish AI Governance - This lesson informs Play 3 by helping.</a:t>
             </a:r>
             <a:endParaRPr lang="en-US" sz="1900" dirty="0"/>
           </a:p>
@@ -12166,8 +12166,8 @@
         </p:nvSpPr>
         <p:spPr>
           <a:xfrm>
-            <a:off x="8211312" y="1563624"/>
-            <a:ext cx="2734056" cy="256032"/>
+            <a:off x="8211312" y="1545336"/>
+            <a:ext cx="2734056" cy="228600"/>
           </a:xfrm>
           <a:prstGeom prst="rect">
             <a:avLst/>
@@ -12183,7 +12183,7 @@
               <a:buNone/>
             </a:pPr>
             <a:r>
-              <a:rPr lang="en-US" sz="1300" b="1" dirty="0">
+              <a:rPr lang="en-US" sz="1220" b="1" dirty="0">
                 <a:solidFill>
                   <a:srgbClr val="0068B7"/>
                 </a:solidFill>
@@ -12193,7 +12193,7 @@
               </a:rPr>
               <a:t>Apply the lesson</a:t>
             </a:r>
-            <a:endParaRPr lang="en-US" sz="1300" dirty="0"/>
+            <a:endParaRPr lang="en-US" sz="1220" dirty="0"/>
           </a:p>
         </p:txBody>
       </p:sp>
@@ -12205,8 +12205,8 @@
         </p:nvSpPr>
         <p:spPr>
           <a:xfrm>
-            <a:off x="8211312" y="1892808"/>
-            <a:ext cx="2734056" cy="1536192"/>
+            <a:off x="8211312" y="1856232"/>
+            <a:ext cx="2734056" cy="1591056"/>
           </a:xfrm>
           <a:prstGeom prst="rect">
             <a:avLst/>
@@ -12224,7 +12224,7 @@
               <a:buNone/>
             </a:pPr>
             <a:r>
-              <a:rPr lang="en-US" sz="1320" dirty="0">
+              <a:rPr lang="en-US" sz="1220" dirty="0">
                 <a:solidFill>
                   <a:srgbClr val="17364A"/>
                 </a:solidFill>
@@ -12232,9 +12232,9 @@
                 <a:ea typeface="Aptos" pitchFamily="34" charset="-122"/>
                 <a:cs typeface="Aptos" pitchFamily="34" charset="-120"/>
               </a:rPr>
-              <a:t>Use the related plays to identify decisions, participants, timing, approvals, and documentation needed for responsible implementation.</a:t>
-            </a:r>
-            <a:endParaRPr lang="en-US" sz="1320" dirty="0"/>
+              <a:t>Use the related plays to identify decisions, participants, timing, approvals,.</a:t>
+            </a:r>
+            <a:endParaRPr lang="en-US" sz="1220" dirty="0"/>
           </a:p>
         </p:txBody>
       </p:sp>
@@ -12273,8 +12273,8 @@
         </p:nvSpPr>
         <p:spPr>
           <a:xfrm>
-            <a:off x="8211312" y="3941064"/>
-            <a:ext cx="2734056" cy="256032"/>
+            <a:off x="8211312" y="3922776"/>
+            <a:ext cx="2734056" cy="228600"/>
           </a:xfrm>
           <a:prstGeom prst="rect">
             <a:avLst/>
@@ -12290,7 +12290,7 @@
               <a:buNone/>
             </a:pPr>
             <a:r>
-              <a:rPr lang="en-US" sz="1300" b="1" dirty="0">
+              <a:rPr lang="en-US" sz="1220" b="1" dirty="0">
                 <a:solidFill>
                   <a:srgbClr val="0068B7"/>
                 </a:solidFill>
@@ -12300,7 +12300,7 @@
               </a:rPr>
               <a:t>Use the play links to</a:t>
             </a:r>
-            <a:endParaRPr lang="en-US" sz="1300" dirty="0"/>
+            <a:endParaRPr lang="en-US" sz="1220" dirty="0"/>
           </a:p>
         </p:txBody>
       </p:sp>
@@ -12312,8 +12312,8 @@
         </p:nvSpPr>
         <p:spPr>
           <a:xfrm>
-            <a:off x="8229600" y="4306824"/>
-            <a:ext cx="2679192" cy="941832"/>
+            <a:off x="8229600" y="4251960"/>
+            <a:ext cx="2679192" cy="1033272"/>
           </a:xfrm>
           <a:prstGeom prst="rect">
             <a:avLst/>
@@ -12331,7 +12331,7 @@
               <a:buNone/>
             </a:pPr>
             <a:r>
-              <a:rPr lang="en-US" sz="1220" dirty="0">
+              <a:rPr lang="en-US" sz="1140" dirty="0">
                 <a:solidFill>
                   <a:srgbClr val="17364A"/>
                 </a:solidFill>
@@ -12341,14 +12341,14 @@
               </a:rPr>
               <a:t>Locate the decision point in the playbook sequence.</a:t>
             </a:r>
-            <a:endParaRPr lang="en-US" sz="1220" dirty="0"/>
-          </a:p>
-          <a:p>
-            <a:pPr indent="0" marL="0">
-              <a:buNone/>
-            </a:pPr>
-            <a:r>
-              <a:rPr lang="en-US" sz="1220" dirty="0">
+            <a:endParaRPr lang="en-US" sz="1140" dirty="0"/>
+          </a:p>
+          <a:p>
+            <a:pPr indent="0" marL="0">
+              <a:buNone/>
+            </a:pPr>
+            <a:r>
+              <a:rPr lang="en-US" sz="1140" dirty="0">
                 <a:solidFill>
                   <a:srgbClr val="17364A"/>
                 </a:solidFill>
@@ -12358,14 +12358,14 @@
               </a:rPr>
               <a:t>Identify who should participate in the work.</a:t>
             </a:r>
-            <a:endParaRPr lang="en-US" sz="1220" dirty="0"/>
-          </a:p>
-          <a:p>
-            <a:pPr indent="0" marL="0">
-              <a:buNone/>
-            </a:pPr>
-            <a:r>
-              <a:rPr lang="en-US" sz="1220" dirty="0">
+            <a:endParaRPr lang="en-US" sz="1140" dirty="0"/>
+          </a:p>
+          <a:p>
+            <a:pPr indent="0" marL="0">
+              <a:buNone/>
+            </a:pPr>
+            <a:r>
+              <a:rPr lang="en-US" sz="1140" dirty="0">
                 <a:solidFill>
                   <a:srgbClr val="17364A"/>
                 </a:solidFill>
@@ -12373,9 +12373,9 @@
                 <a:ea typeface="Aptos" pitchFamily="34" charset="-122"/>
                 <a:cs typeface="Aptos" pitchFamily="34" charset="-120"/>
               </a:rPr>
-              <a:t>Document the review, approval, or implementation step.</a:t>
-            </a:r>
-            <a:endParaRPr lang="en-US" sz="1220" dirty="0"/>
+              <a:t>Document the review, approval, or implementation.</a:t>
+            </a:r>
+            <a:endParaRPr lang="en-US" sz="1140" dirty="0"/>
           </a:p>
         </p:txBody>
       </p:sp>
@@ -12693,7 +12693,7 @@
                 <a:ea typeface="Aptos" pitchFamily="34" charset="-122"/>
                 <a:cs typeface="Aptos" pitchFamily="34" charset="-120"/>
               </a:rPr>
-              <a:t>• Tool 1: AI Vision &amp; Principles Workshop (Workshop) - Use AI Vision &amp; Principles Workshop to.</a:t>
+              <a:t>• Tool 1: AI Vision &amp; Principles Workshop (Workshop) - Use AI Vision &amp;.</a:t>
             </a:r>
             <a:endParaRPr lang="en-US" sz="1850" dirty="0"/>
           </a:p>
@@ -12710,7 +12710,7 @@
                 <a:ea typeface="Aptos" pitchFamily="34" charset="-122"/>
                 <a:cs typeface="Aptos" pitchFamily="34" charset="-120"/>
               </a:rPr>
-              <a:t>• Tool 3: Equity Impact Assessment Checklist (Checklist) - Use this tool to complete or.</a:t>
+              <a:t>• Tool 3: Equity Impact Assessment Checklist (Checklist) - Use this tool to.</a:t>
             </a:r>
             <a:endParaRPr lang="en-US" sz="1850" dirty="0"/>
           </a:p>
@@ -12727,7 +12727,7 @@
                 <a:ea typeface="Aptos" pitchFamily="34" charset="-122"/>
                 <a:cs typeface="Aptos" pitchFamily="34" charset="-120"/>
               </a:rPr>
-              <a:t>• Tool 4: AI Policy Landscape Scan (Worksheet) - Use AI Policy Landscape Scan to translate this.</a:t>
+              <a:t>• Tool 4: AI Policy Landscape Scan (Worksheet) - Use AI Policy Landscape Scan.</a:t>
             </a:r>
             <a:endParaRPr lang="en-US" sz="1850" dirty="0"/>
           </a:p>
@@ -12744,7 +12744,7 @@
                 <a:ea typeface="Aptos" pitchFamily="34" charset="-122"/>
                 <a:cs typeface="Aptos" pitchFamily="34" charset="-120"/>
               </a:rPr>
-              <a:t>• Tool 5: AI Environmental and Resource Impact Review (Checklist) - Use AI Environmental and.</a:t>
+              <a:t>• Tool 5: AI Environmental and Resource Impact Review (Checklist) - Use AI.</a:t>
             </a:r>
             <a:endParaRPr lang="en-US" sz="1850" dirty="0"/>
           </a:p>
@@ -12785,8 +12785,8 @@
         </p:nvSpPr>
         <p:spPr>
           <a:xfrm>
-            <a:off x="8211312" y="1563624"/>
-            <a:ext cx="2734056" cy="256032"/>
+            <a:off x="8211312" y="1545336"/>
+            <a:ext cx="2734056" cy="228600"/>
           </a:xfrm>
           <a:prstGeom prst="rect">
             <a:avLst/>
@@ -12802,7 +12802,7 @@
               <a:buNone/>
             </a:pPr>
             <a:r>
-              <a:rPr lang="en-US" sz="1300" b="1" dirty="0">
+              <a:rPr lang="en-US" sz="1220" b="1" dirty="0">
                 <a:solidFill>
                   <a:srgbClr val="0068B7"/>
                 </a:solidFill>
@@ -12812,7 +12812,7 @@
               </a:rPr>
               <a:t>Use the tools</a:t>
             </a:r>
-            <a:endParaRPr lang="en-US" sz="1300" dirty="0"/>
+            <a:endParaRPr lang="en-US" sz="1220" dirty="0"/>
           </a:p>
         </p:txBody>
       </p:sp>
@@ -12824,8 +12824,8 @@
         </p:nvSpPr>
         <p:spPr>
           <a:xfrm>
-            <a:off x="8211312" y="1892808"/>
-            <a:ext cx="2734056" cy="1536192"/>
+            <a:off x="8211312" y="1856232"/>
+            <a:ext cx="2734056" cy="1591056"/>
           </a:xfrm>
           <a:prstGeom prst="rect">
             <a:avLst/>
@@ -12843,7 +12843,7 @@
               <a:buNone/>
             </a:pPr>
             <a:r>
-              <a:rPr lang="en-US" sz="1320" dirty="0">
+              <a:rPr lang="en-US" sz="1220" dirty="0">
                 <a:solidFill>
                   <a:srgbClr val="17364A"/>
                 </a:solidFill>
@@ -12851,9 +12851,9 @@
                 <a:ea typeface="Aptos" pitchFamily="34" charset="-122"/>
                 <a:cs typeface="Aptos" pitchFamily="34" charset="-120"/>
               </a:rPr>
-              <a:t>Use linked tools when your department needs a structured worksheet, template, checklist, review process, or documentation artifact.</a:t>
-            </a:r>
-            <a:endParaRPr lang="en-US" sz="1320" dirty="0"/>
+              <a:t>Use linked tools when your department needs a structured worksheet, template,.</a:t>
+            </a:r>
+            <a:endParaRPr lang="en-US" sz="1220" dirty="0"/>
           </a:p>
         </p:txBody>
       </p:sp>
@@ -12892,8 +12892,8 @@
         </p:nvSpPr>
         <p:spPr>
           <a:xfrm>
-            <a:off x="8211312" y="3941064"/>
-            <a:ext cx="2734056" cy="256032"/>
+            <a:off x="8211312" y="3922776"/>
+            <a:ext cx="2734056" cy="228600"/>
           </a:xfrm>
           <a:prstGeom prst="rect">
             <a:avLst/>
@@ -12909,7 +12909,7 @@
               <a:buNone/>
             </a:pPr>
             <a:r>
-              <a:rPr lang="en-US" sz="1300" b="1" dirty="0">
+              <a:rPr lang="en-US" sz="1220" b="1" dirty="0">
                 <a:solidFill>
                   <a:srgbClr val="0068B7"/>
                 </a:solidFill>
@@ -12919,7 +12919,7 @@
               </a:rPr>
               <a:t>Tool selection cues</a:t>
             </a:r>
-            <a:endParaRPr lang="en-US" sz="1300" dirty="0"/>
+            <a:endParaRPr lang="en-US" sz="1220" dirty="0"/>
           </a:p>
         </p:txBody>
       </p:sp>
@@ -12931,8 +12931,8 @@
         </p:nvSpPr>
         <p:spPr>
           <a:xfrm>
-            <a:off x="8229600" y="4306824"/>
-            <a:ext cx="2679192" cy="941832"/>
+            <a:off x="8229600" y="4251960"/>
+            <a:ext cx="2679192" cy="1033272"/>
           </a:xfrm>
           <a:prstGeom prst="rect">
             <a:avLst/>
@@ -12950,7 +12950,7 @@
               <a:buNone/>
             </a:pPr>
             <a:r>
-              <a:rPr lang="en-US" sz="1220" dirty="0">
+              <a:rPr lang="en-US" sz="1140" dirty="0">
                 <a:solidFill>
                   <a:srgbClr val="17364A"/>
                 </a:solidFill>
@@ -12960,14 +12960,14 @@
               </a:rPr>
               <a:t>Use a tool when no comparable local process exists.</a:t>
             </a:r>
-            <a:endParaRPr lang="en-US" sz="1220" dirty="0"/>
-          </a:p>
-          <a:p>
-            <a:pPr indent="0" marL="0">
-              <a:buNone/>
-            </a:pPr>
-            <a:r>
-              <a:rPr lang="en-US" sz="1220" dirty="0">
+            <a:endParaRPr lang="en-US" sz="1140" dirty="0"/>
+          </a:p>
+          <a:p>
+            <a:pPr indent="0" marL="0">
+              <a:buNone/>
+            </a:pPr>
+            <a:r>
+              <a:rPr lang="en-US" sz="1140" dirty="0">
                 <a:solidFill>
                   <a:srgbClr val="17364A"/>
                 </a:solidFill>
@@ -12975,16 +12975,16 @@
                 <a:ea typeface="Aptos" pitchFamily="34" charset="-122"/>
                 <a:cs typeface="Aptos" pitchFamily="34" charset="-120"/>
               </a:rPr>
-              <a:t>Adapt existing department templates when they already fit the.</a:t>
-            </a:r>
-            <a:endParaRPr lang="en-US" sz="1220" dirty="0"/>
-          </a:p>
-          <a:p>
-            <a:pPr indent="0" marL="0">
-              <a:buNone/>
-            </a:pPr>
-            <a:r>
-              <a:rPr lang="en-US" sz="1220" dirty="0">
+              <a:t>Adapt existing department templates when they.</a:t>
+            </a:r>
+            <a:endParaRPr lang="en-US" sz="1140" dirty="0"/>
+          </a:p>
+          <a:p>
+            <a:pPr indent="0" marL="0">
+              <a:buNone/>
+            </a:pPr>
+            <a:r>
+              <a:rPr lang="en-US" sz="1140" dirty="0">
                 <a:solidFill>
                   <a:srgbClr val="17364A"/>
                 </a:solidFill>
@@ -12992,9 +12992,9 @@
                 <a:ea typeface="Aptos" pitchFamily="34" charset="-122"/>
                 <a:cs typeface="Aptos" pitchFamily="34" charset="-120"/>
               </a:rPr>
-              <a:t>Save the completed artifact as evidence of the decision.</a:t>
-            </a:r>
-            <a:endParaRPr lang="en-US" sz="1220" dirty="0"/>
+              <a:t>Save the completed artifact as evidence of the.</a:t>
+            </a:r>
+            <a:endParaRPr lang="en-US" sz="1140" dirty="0"/>
           </a:p>
         </p:txBody>
       </p:sp>
@@ -13285,8 +13285,8 @@
         </p:nvSpPr>
         <p:spPr>
           <a:xfrm>
-            <a:off x="868680" y="1508760"/>
-            <a:ext cx="6309360" cy="4160520"/>
+            <a:off x="822960" y="1463040"/>
+            <a:ext cx="6565392" cy="4343400"/>
           </a:xfrm>
           <a:prstGeom prst="rect">
             <a:avLst/>
@@ -13304,7 +13304,7 @@
               <a:buNone/>
             </a:pPr>
             <a:r>
-              <a:rPr lang="en-US" sz="2100" dirty="0">
+              <a:rPr lang="en-US" sz="1920" dirty="0">
                 <a:solidFill>
                   <a:srgbClr val="003A63"/>
                 </a:solidFill>
@@ -13312,16 +13312,16 @@
                 <a:ea typeface="Aptos" pitchFamily="34" charset="-122"/>
                 <a:cs typeface="Aptos" pitchFamily="34" charset="-120"/>
               </a:rPr>
-              <a:t>• Explain the difference between risk appetite, risk tolerance, and risk acceptance.</a:t>
-            </a:r>
-            <a:endParaRPr lang="en-US" sz="2100" dirty="0"/>
-          </a:p>
-          <a:p>
-            <a:pPr indent="0" marL="0">
-              <a:buNone/>
-            </a:pPr>
-            <a:r>
-              <a:rPr lang="en-US" sz="2100" dirty="0">
+              <a:t>• Explain the difference between risk appetite, risk tolerance, and risk.</a:t>
+            </a:r>
+            <a:endParaRPr lang="en-US" sz="1920" dirty="0"/>
+          </a:p>
+          <a:p>
+            <a:pPr indent="0" marL="0">
+              <a:buNone/>
+            </a:pPr>
+            <a:r>
+              <a:rPr lang="en-US" sz="1920" dirty="0">
                 <a:solidFill>
                   <a:srgbClr val="003A63"/>
                 </a:solidFill>
@@ -13329,16 +13329,16 @@
                 <a:ea typeface="Aptos" pitchFamily="34" charset="-122"/>
                 <a:cs typeface="Aptos" pitchFamily="34" charset="-120"/>
               </a:rPr>
-              <a:t>• Identify AI uses that may be low, moderate, high, or unacceptable risk in a public health.</a:t>
-            </a:r>
-            <a:endParaRPr lang="en-US" sz="2100" dirty="0"/>
-          </a:p>
-          <a:p>
-            <a:pPr indent="0" marL="0">
-              <a:buNone/>
-            </a:pPr>
-            <a:r>
-              <a:rPr lang="en-US" sz="2100" dirty="0">
+              <a:t>• Identify AI uses that may be low, moderate, high, or unacceptable risk in a.</a:t>
+            </a:r>
+            <a:endParaRPr lang="en-US" sz="1920" dirty="0"/>
+          </a:p>
+          <a:p>
+            <a:pPr indent="0" marL="0">
+              <a:buNone/>
+            </a:pPr>
+            <a:r>
+              <a:rPr lang="en-US" sz="1920" dirty="0">
                 <a:solidFill>
                   <a:srgbClr val="003A63"/>
                 </a:solidFill>
@@ -13348,7 +13348,7 @@
               </a:rPr>
               <a:t>• Develop risk tolerance statements for different AI use categories.</a:t>
             </a:r>
-            <a:endParaRPr lang="en-US" sz="2100" dirty="0"/>
+            <a:endParaRPr lang="en-US" sz="1920" dirty="0"/>
           </a:p>
         </p:txBody>
       </p:sp>
@@ -13360,12 +13360,12 @@
         </p:nvSpPr>
         <p:spPr>
           <a:xfrm>
-            <a:off x="7635240" y="1325880"/>
-            <a:ext cx="3474720" cy="1207008"/>
+            <a:off x="7543800" y="1325880"/>
+            <a:ext cx="3611880" cy="1261872"/>
           </a:xfrm>
           <a:prstGeom prst="roundRect">
             <a:avLst>
-              <a:gd name="adj" fmla="val 9091"/>
+              <a:gd name="adj" fmla="val 8696"/>
             </a:avLst>
           </a:prstGeom>
           <a:solidFill>
@@ -13387,8 +13387,8 @@
         </p:nvSpPr>
         <p:spPr>
           <a:xfrm>
-            <a:off x="7799832" y="1472184"/>
-            <a:ext cx="3145536" cy="256032"/>
+            <a:off x="7708392" y="1453896"/>
+            <a:ext cx="3282696" cy="228600"/>
           </a:xfrm>
           <a:prstGeom prst="rect">
             <a:avLst/>
@@ -13404,7 +13404,7 @@
               <a:buNone/>
             </a:pPr>
             <a:r>
-              <a:rPr lang="en-US" sz="1300" b="1" dirty="0">
+              <a:rPr lang="en-US" sz="1220" b="1" dirty="0">
                 <a:solidFill>
                   <a:srgbClr val="0068B7"/>
                 </a:solidFill>
@@ -13414,7 +13414,7 @@
               </a:rPr>
               <a:t>Risk check</a:t>
             </a:r>
-            <a:endParaRPr lang="en-US" sz="1300" dirty="0"/>
+            <a:endParaRPr lang="en-US" sz="1220" dirty="0"/>
           </a:p>
         </p:txBody>
       </p:sp>
@@ -13426,8 +13426,8 @@
         </p:nvSpPr>
         <p:spPr>
           <a:xfrm>
-            <a:off x="7799832" y="1801368"/>
-            <a:ext cx="3145536" cy="640080"/>
+            <a:off x="7708392" y="1764792"/>
+            <a:ext cx="3282696" cy="749808"/>
           </a:xfrm>
           <a:prstGeom prst="rect">
             <a:avLst/>
@@ -13445,7 +13445,7 @@
               <a:buNone/>
             </a:pPr>
             <a:r>
-              <a:rPr lang="en-US" sz="1320" dirty="0">
+              <a:rPr lang="en-US" sz="1220" dirty="0">
                 <a:solidFill>
                   <a:srgbClr val="17364A"/>
                 </a:solidFill>
@@ -13455,7 +13455,7 @@
               </a:rPr>
               <a:t>Explain the difference between risk appetite, risk tolerance, and risk acceptance.</a:t>
             </a:r>
-            <a:endParaRPr lang="en-US" sz="1320" dirty="0"/>
+            <a:endParaRPr lang="en-US" sz="1220" dirty="0"/>
           </a:p>
         </p:txBody>
       </p:sp>
@@ -13467,12 +13467,12 @@
         </p:nvSpPr>
         <p:spPr>
           <a:xfrm>
-            <a:off x="7635240" y="2670048"/>
-            <a:ext cx="3474720" cy="1377086"/>
+            <a:off x="7543800" y="2724912"/>
+            <a:ext cx="3611880" cy="1527048"/>
           </a:xfrm>
           <a:prstGeom prst="roundRect">
             <a:avLst>
-              <a:gd name="adj" fmla="val 7968"/>
+              <a:gd name="adj" fmla="val 7186"/>
             </a:avLst>
           </a:prstGeom>
           <a:solidFill>
@@ -13494,8 +13494,8 @@
         </p:nvSpPr>
         <p:spPr>
           <a:xfrm>
-            <a:off x="7799832" y="2816352"/>
-            <a:ext cx="3145536" cy="256032"/>
+            <a:off x="7708392" y="2852928"/>
+            <a:ext cx="3282696" cy="228600"/>
           </a:xfrm>
           <a:prstGeom prst="rect">
             <a:avLst/>
@@ -13511,7 +13511,7 @@
               <a:buNone/>
             </a:pPr>
             <a:r>
-              <a:rPr lang="en-US" sz="1300" b="1" dirty="0">
+              <a:rPr lang="en-US" sz="1220" b="1" dirty="0">
                 <a:solidFill>
                   <a:srgbClr val="0068B7"/>
                 </a:solidFill>
@@ -13521,7 +13521,7 @@
               </a:rPr>
               <a:t>Concept checkpoints</a:t>
             </a:r>
-            <a:endParaRPr lang="en-US" sz="1300" dirty="0"/>
+            <a:endParaRPr lang="en-US" sz="1220" dirty="0"/>
           </a:p>
         </p:txBody>
       </p:sp>
@@ -13533,8 +13533,8 @@
         </p:nvSpPr>
         <p:spPr>
           <a:xfrm>
-            <a:off x="7818120" y="3182112"/>
-            <a:ext cx="3090672" cy="718718"/>
+            <a:off x="7726680" y="3182112"/>
+            <a:ext cx="3227832" cy="960120"/>
           </a:xfrm>
           <a:prstGeom prst="rect">
             <a:avLst/>
@@ -13552,7 +13552,7 @@
               <a:buNone/>
             </a:pPr>
             <a:r>
-              <a:rPr lang="en-US" sz="1220" dirty="0">
+              <a:rPr lang="en-US" sz="1140" dirty="0">
                 <a:solidFill>
                   <a:srgbClr val="17364A"/>
                 </a:solidFill>
@@ -13560,16 +13560,16 @@
                 <a:ea typeface="Aptos" pitchFamily="34" charset="-122"/>
                 <a:cs typeface="Aptos" pitchFamily="34" charset="-120"/>
               </a:rPr>
-              <a:t>Connect risk tolerance to review level, safeguards, monitoring,.</a:t>
-            </a:r>
-            <a:endParaRPr lang="en-US" sz="1220" dirty="0"/>
-          </a:p>
-          <a:p>
-            <a:pPr indent="0" marL="0">
-              <a:buNone/>
-            </a:pPr>
-            <a:r>
-              <a:rPr lang="en-US" sz="1220" dirty="0">
+              <a:t>Connect risk tolerance to review level,.</a:t>
+            </a:r>
+            <a:endParaRPr lang="en-US" sz="1140" dirty="0"/>
+          </a:p>
+          <a:p>
+            <a:pPr indent="0" marL="0">
+              <a:buNone/>
+            </a:pPr>
+            <a:r>
+              <a:rPr lang="en-US" sz="1140" dirty="0">
                 <a:solidFill>
                   <a:srgbClr val="17364A"/>
                 </a:solidFill>
@@ -13577,9 +13577,9 @@
                 <a:ea typeface="Aptos" pitchFamily="34" charset="-122"/>
                 <a:cs typeface="Aptos" pitchFamily="34" charset="-120"/>
               </a:rPr>
-              <a:t>Produce a draft AI risk appetite statement for leadership or.</a:t>
-            </a:r>
-            <a:endParaRPr lang="en-US" sz="1220" dirty="0"/>
+              <a:t>Produce a draft AI risk appetite statement for.</a:t>
+            </a:r>
+            <a:endParaRPr lang="en-US" sz="1140" dirty="0"/>
           </a:p>
         </p:txBody>
       </p:sp>
@@ -13591,12 +13591,12 @@
         </p:nvSpPr>
         <p:spPr>
           <a:xfrm>
-            <a:off x="7635240" y="4184294"/>
-            <a:ext cx="3474720" cy="1466698"/>
+            <a:off x="7543800" y="4389120"/>
+            <a:ext cx="3611880" cy="1261872"/>
           </a:xfrm>
           <a:prstGeom prst="roundRect">
             <a:avLst>
-              <a:gd name="adj" fmla="val 7481"/>
+              <a:gd name="adj" fmla="val 8696"/>
             </a:avLst>
           </a:prstGeom>
           <a:solidFill>
@@ -13618,8 +13618,8 @@
         </p:nvSpPr>
         <p:spPr>
           <a:xfrm>
-            <a:off x="7799832" y="4330598"/>
-            <a:ext cx="3145536" cy="256032"/>
+            <a:off x="7708392" y="4517136"/>
+            <a:ext cx="3282696" cy="228600"/>
           </a:xfrm>
           <a:prstGeom prst="rect">
             <a:avLst/>
@@ -13635,7 +13635,7 @@
               <a:buNone/>
             </a:pPr>
             <a:r>
-              <a:rPr lang="en-US" sz="1300" b="1" dirty="0">
+              <a:rPr lang="en-US" sz="1220" b="1" dirty="0">
                 <a:solidFill>
                   <a:srgbClr val="0068B7"/>
                 </a:solidFill>
@@ -13645,7 +13645,7 @@
               </a:rPr>
               <a:t>Safeguard to plan</a:t>
             </a:r>
-            <a:endParaRPr lang="en-US" sz="1300" dirty="0"/>
+            <a:endParaRPr lang="en-US" sz="1220" dirty="0"/>
           </a:p>
         </p:txBody>
       </p:sp>
@@ -13657,8 +13657,8 @@
         </p:nvSpPr>
         <p:spPr>
           <a:xfrm>
-            <a:off x="7799832" y="4659782"/>
-            <a:ext cx="3145536" cy="899770"/>
+            <a:off x="7708392" y="4828032"/>
+            <a:ext cx="3282696" cy="749808"/>
           </a:xfrm>
           <a:prstGeom prst="rect">
             <a:avLst/>
@@ -13676,7 +13676,7 @@
               <a:buNone/>
             </a:pPr>
             <a:r>
-              <a:rPr lang="en-US" sz="1320" dirty="0">
+              <a:rPr lang="en-US" sz="1220" dirty="0">
                 <a:solidFill>
                   <a:srgbClr val="17364A"/>
                 </a:solidFill>
@@ -13684,9 +13684,9 @@
                 <a:ea typeface="Aptos" pitchFamily="34" charset="-122"/>
                 <a:cs typeface="Aptos" pitchFamily="34" charset="-120"/>
               </a:rPr>
-              <a:t>Use the assignment to test whether you can explain the concept, apply it to a realistic public health situation, and identify what would need review before the work moves forward.</a:t>
-            </a:r>
-            <a:endParaRPr lang="en-US" sz="1320" dirty="0"/>
+              <a:t>Use the assignment to test whether you can explain the concept, apply it to a.</a:t>
+            </a:r>
+            <a:endParaRPr lang="en-US" sz="1220" dirty="0"/>
           </a:p>
         </p:txBody>
       </p:sp>
@@ -13977,8 +13977,8 @@
         </p:nvSpPr>
         <p:spPr>
           <a:xfrm>
-            <a:off x="868680" y="1508760"/>
-            <a:ext cx="6309360" cy="4160520"/>
+            <a:off x="822960" y="1463040"/>
+            <a:ext cx="6565392" cy="4343400"/>
           </a:xfrm>
           <a:prstGeom prst="rect">
             <a:avLst/>
@@ -13996,7 +13996,7 @@
               <a:buNone/>
             </a:pPr>
             <a:r>
-              <a:rPr lang="en-US" sz="2100" dirty="0">
+              <a:rPr lang="en-US" sz="1920" dirty="0">
                 <a:solidFill>
                   <a:srgbClr val="003A63"/>
                 </a:solidFill>
@@ -14004,16 +14004,16 @@
                 <a:ea typeface="Aptos" pitchFamily="34" charset="-122"/>
                 <a:cs typeface="Aptos" pitchFamily="34" charset="-120"/>
               </a:rPr>
-              <a:t>• Leaders cannot manage AI risk effectively unless they define how much risk the agency is.</a:t>
-            </a:r>
-            <a:endParaRPr lang="en-US" sz="2100" dirty="0"/>
-          </a:p>
-          <a:p>
-            <a:pPr indent="0" marL="0">
-              <a:buNone/>
-            </a:pPr>
-            <a:r>
-              <a:rPr lang="en-US" sz="2100" dirty="0">
+              <a:t>• Leaders cannot manage AI risk effectively unless they define how much risk.</a:t>
+            </a:r>
+            <a:endParaRPr lang="en-US" sz="1920" dirty="0"/>
+          </a:p>
+          <a:p>
+            <a:pPr indent="0" marL="0">
+              <a:buNone/>
+            </a:pPr>
+            <a:r>
+              <a:rPr lang="en-US" sz="1920" dirty="0">
                 <a:solidFill>
                   <a:srgbClr val="003A63"/>
                 </a:solidFill>
@@ -14021,16 +14021,16 @@
                 <a:ea typeface="Aptos" pitchFamily="34" charset="-122"/>
                 <a:cs typeface="Aptos" pitchFamily="34" charset="-120"/>
               </a:rPr>
-              <a:t>• Risk appetite describes the broad level of risk an organization is willing to take in pursuit.</a:t>
-            </a:r>
-            <a:endParaRPr lang="en-US" sz="2100" dirty="0"/>
-          </a:p>
-          <a:p>
-            <a:pPr indent="0" marL="0">
-              <a:buNone/>
-            </a:pPr>
-            <a:r>
-              <a:rPr lang="en-US" sz="2100" dirty="0">
+              <a:t>• Risk appetite describes the broad level of risk an organization is willing.</a:t>
+            </a:r>
+            <a:endParaRPr lang="en-US" sz="1920" dirty="0"/>
+          </a:p>
+          <a:p>
+            <a:pPr indent="0" marL="0">
+              <a:buNone/>
+            </a:pPr>
+            <a:r>
+              <a:rPr lang="en-US" sz="1920" dirty="0">
                 <a:solidFill>
                   <a:srgbClr val="003A63"/>
                 </a:solidFill>
@@ -14038,9 +14038,9 @@
                 <a:ea typeface="Aptos" pitchFamily="34" charset="-122"/>
                 <a:cs typeface="Aptos" pitchFamily="34" charset="-120"/>
               </a:rPr>
-              <a:t>• Risk tolerance translates that appetite into practical thresholds, conditions, and limits for.</a:t>
-            </a:r>
-            <a:endParaRPr lang="en-US" sz="2100" dirty="0"/>
+              <a:t>• Risk tolerance translates that appetite into practical thresholds,.</a:t>
+            </a:r>
+            <a:endParaRPr lang="en-US" sz="1920" dirty="0"/>
           </a:p>
         </p:txBody>
       </p:sp>
@@ -14052,12 +14052,12 @@
         </p:nvSpPr>
         <p:spPr>
           <a:xfrm>
-            <a:off x="7635240" y="1325880"/>
-            <a:ext cx="3474720" cy="1255471"/>
+            <a:off x="7543800" y="1325880"/>
+            <a:ext cx="3611880" cy="1261872"/>
           </a:xfrm>
           <a:prstGeom prst="roundRect">
             <a:avLst>
-              <a:gd name="adj" fmla="val 8740"/>
+              <a:gd name="adj" fmla="val 8696"/>
             </a:avLst>
           </a:prstGeom>
           <a:solidFill>
@@ -14079,8 +14079,8 @@
         </p:nvSpPr>
         <p:spPr>
           <a:xfrm>
-            <a:off x="7799832" y="1472184"/>
-            <a:ext cx="3145536" cy="256032"/>
+            <a:off x="7708392" y="1453896"/>
+            <a:ext cx="3282696" cy="228600"/>
           </a:xfrm>
           <a:prstGeom prst="rect">
             <a:avLst/>
@@ -14096,7 +14096,7 @@
               <a:buNone/>
             </a:pPr>
             <a:r>
-              <a:rPr lang="en-US" sz="1300" b="1" dirty="0">
+              <a:rPr lang="en-US" sz="1220" b="1" dirty="0">
                 <a:solidFill>
                   <a:srgbClr val="0068B7"/>
                 </a:solidFill>
@@ -14106,7 +14106,7 @@
               </a:rPr>
               <a:t>Risk check</a:t>
             </a:r>
-            <a:endParaRPr lang="en-US" sz="1300" dirty="0"/>
+            <a:endParaRPr lang="en-US" sz="1220" dirty="0"/>
           </a:p>
         </p:txBody>
       </p:sp>
@@ -14118,8 +14118,8 @@
         </p:nvSpPr>
         <p:spPr>
           <a:xfrm>
-            <a:off x="7799832" y="1801368"/>
-            <a:ext cx="3145536" cy="688543"/>
+            <a:off x="7708392" y="1764792"/>
+            <a:ext cx="3282696" cy="749808"/>
           </a:xfrm>
           <a:prstGeom prst="rect">
             <a:avLst/>
@@ -14137,7 +14137,7 @@
               <a:buNone/>
             </a:pPr>
             <a:r>
-              <a:rPr lang="en-US" sz="1320" dirty="0">
+              <a:rPr lang="en-US" sz="1220" dirty="0">
                 <a:solidFill>
                   <a:srgbClr val="17364A"/>
                 </a:solidFill>
@@ -14145,9 +14145,9 @@
                 <a:ea typeface="Aptos" pitchFamily="34" charset="-122"/>
                 <a:cs typeface="Aptos" pitchFamily="34" charset="-120"/>
               </a:rPr>
-              <a:t>Leaders cannot manage AI risk effectively unless they define how much risk the agency is willing to.</a:t>
-            </a:r>
-            <a:endParaRPr lang="en-US" sz="1320" dirty="0"/>
+              <a:t>Leaders cannot manage AI risk effectively unless they define how much risk the.</a:t>
+            </a:r>
+            <a:endParaRPr lang="en-US" sz="1220" dirty="0"/>
           </a:p>
         </p:txBody>
       </p:sp>
@@ -14159,12 +14159,12 @@
         </p:nvSpPr>
         <p:spPr>
           <a:xfrm>
-            <a:off x="7635240" y="2718511"/>
-            <a:ext cx="3474720" cy="1536192"/>
+            <a:off x="7543800" y="2724912"/>
+            <a:ext cx="3611880" cy="1527048"/>
           </a:xfrm>
           <a:prstGeom prst="roundRect">
             <a:avLst>
-              <a:gd name="adj" fmla="val 7143"/>
+              <a:gd name="adj" fmla="val 7186"/>
             </a:avLst>
           </a:prstGeom>
           <a:solidFill>
@@ -14186,24 +14186,26 @@
         </p:nvSpPr>
         <p:spPr>
           <a:xfrm>
-            <a:off x="7799832" y="2846527"/>
-            <a:ext cx="3145536" cy="237744"/>
-          </a:xfrm>
-          <a:prstGeom prst="rect">
-            <a:avLst/>
-          </a:prstGeom>
-          <a:noFill/>
-          <a:ln/>
-        </p:spPr>
-        <p:txBody>
-          <a:bodyPr wrap="square" lIns="0" tIns="0" rIns="0" bIns="0" rtlCol="0" anchor="ctr"/>
-          <a:lstStyle/>
-          <a:p>
-            <a:pPr indent="0" marL="0">
-              <a:buNone/>
-            </a:pPr>
-            <a:r>
-              <a:rPr lang="en-US" sz="1250" b="1" dirty="0">
+            <a:off x="7708392" y="2852928"/>
+            <a:ext cx="3282696" cy="219456"/>
+          </a:xfrm>
+          <a:prstGeom prst="rect">
+            <a:avLst/>
+          </a:prstGeom>
+          <a:noFill/>
+          <a:ln/>
+        </p:spPr>
+        <p:txBody>
+          <a:bodyPr wrap="square" lIns="0" tIns="0" rIns="0" bIns="0" rtlCol="0" anchor="ctr">
+            <a:normAutofit/>
+          </a:bodyPr>
+          <a:lstStyle/>
+          <a:p>
+            <a:pPr indent="0" marL="0">
+              <a:buNone/>
+            </a:pPr>
+            <a:r>
+              <a:rPr lang="en-US" sz="1160" b="1" dirty="0">
                 <a:solidFill>
                   <a:srgbClr val="0068B7"/>
                 </a:solidFill>
@@ -14213,7 +14215,7 @@
               </a:rPr>
               <a:t>Risk control loop</a:t>
             </a:r>
-            <a:endParaRPr lang="en-US" sz="1250" dirty="0"/>
+            <a:endParaRPr lang="en-US" sz="1160" dirty="0"/>
           </a:p>
         </p:txBody>
       </p:sp>
@@ -14225,7 +14227,7 @@
         </p:nvSpPr>
         <p:spPr>
           <a:xfrm>
-            <a:off x="8763000" y="3399739"/>
+            <a:off x="8717280" y="3406140"/>
             <a:ext cx="164592" cy="0"/>
           </a:xfrm>
           <a:prstGeom prst="line">
@@ -14248,8 +14250,8 @@
         </p:nvSpPr>
         <p:spPr>
           <a:xfrm>
-            <a:off x="7872984" y="3248863"/>
-            <a:ext cx="890016" cy="301752"/>
+            <a:off x="7781544" y="3255264"/>
+            <a:ext cx="935736" cy="301752"/>
           </a:xfrm>
           <a:prstGeom prst="roundRect">
             <a:avLst>
@@ -14275,8 +14277,8 @@
         </p:nvSpPr>
         <p:spPr>
           <a:xfrm>
-            <a:off x="7909560" y="3322015"/>
-            <a:ext cx="816864" cy="146304"/>
+            <a:off x="7818120" y="3328416"/>
+            <a:ext cx="862584" cy="146304"/>
           </a:xfrm>
           <a:prstGeom prst="rect">
             <a:avLst/>
@@ -14316,7 +14318,7 @@
         </p:nvSpPr>
         <p:spPr>
           <a:xfrm>
-            <a:off x="9817608" y="3399739"/>
+            <a:off x="9817608" y="3406140"/>
             <a:ext cx="164592" cy="0"/>
           </a:xfrm>
           <a:prstGeom prst="line">
@@ -14339,8 +14341,8 @@
         </p:nvSpPr>
         <p:spPr>
           <a:xfrm>
-            <a:off x="8927592" y="3248863"/>
-            <a:ext cx="890016" cy="301752"/>
+            <a:off x="8881872" y="3255264"/>
+            <a:ext cx="935736" cy="301752"/>
           </a:xfrm>
           <a:prstGeom prst="roundRect">
             <a:avLst>
@@ -14366,8 +14368,8 @@
         </p:nvSpPr>
         <p:spPr>
           <a:xfrm>
-            <a:off x="8964168" y="3322015"/>
-            <a:ext cx="816864" cy="146304"/>
+            <a:off x="8918448" y="3328416"/>
+            <a:ext cx="862584" cy="146304"/>
           </a:xfrm>
           <a:prstGeom prst="rect">
             <a:avLst/>
@@ -14407,8 +14409,8 @@
         </p:nvSpPr>
         <p:spPr>
           <a:xfrm>
-            <a:off x="9982200" y="3248863"/>
-            <a:ext cx="890016" cy="301752"/>
+            <a:off x="9982200" y="3255264"/>
+            <a:ext cx="935736" cy="301752"/>
           </a:xfrm>
           <a:prstGeom prst="roundRect">
             <a:avLst>
@@ -14434,8 +14436,8 @@
         </p:nvSpPr>
         <p:spPr>
           <a:xfrm>
-            <a:off x="10018776" y="3322015"/>
-            <a:ext cx="816864" cy="146304"/>
+            <a:off x="10018776" y="3328416"/>
+            <a:ext cx="862584" cy="146304"/>
           </a:xfrm>
           <a:prstGeom prst="rect">
             <a:avLst/>
@@ -14475,8 +14477,8 @@
         </p:nvSpPr>
         <p:spPr>
           <a:xfrm>
-            <a:off x="7854696" y="3742639"/>
-            <a:ext cx="3035808" cy="365760"/>
+            <a:off x="7763256" y="3749040"/>
+            <a:ext cx="3172968" cy="356616"/>
           </a:xfrm>
           <a:prstGeom prst="rect">
             <a:avLst/>
@@ -14494,7 +14496,7 @@
               <a:buNone/>
             </a:pPr>
             <a:r>
-              <a:rPr lang="en-US" sz="1120" dirty="0">
+              <a:rPr lang="en-US" sz="1040" dirty="0">
                 <a:solidFill>
                   <a:srgbClr val="17364A"/>
                 </a:solidFill>
@@ -14502,9 +14504,9 @@
                 <a:ea typeface="Aptos" pitchFamily="34" charset="-122"/>
                 <a:cs typeface="Aptos" pitchFamily="34" charset="-120"/>
               </a:rPr>
-              <a:t>Responsible use depends on finding risks early, applying safeguards, and watching for drift or harm over time.</a:t>
-            </a:r>
-            <a:endParaRPr lang="en-US" sz="1120" dirty="0"/>
+              <a:t>Responsible use depends on finding risks early, applying safeguards,.</a:t>
+            </a:r>
+            <a:endParaRPr lang="en-US" sz="1040" dirty="0"/>
           </a:p>
         </p:txBody>
       </p:sp>
@@ -14516,12 +14518,12 @@
         </p:nvSpPr>
         <p:spPr>
           <a:xfrm>
-            <a:off x="7635240" y="4391863"/>
-            <a:ext cx="3474720" cy="1255471"/>
+            <a:off x="7543800" y="4389120"/>
+            <a:ext cx="3611880" cy="1261872"/>
           </a:xfrm>
           <a:prstGeom prst="roundRect">
             <a:avLst>
-              <a:gd name="adj" fmla="val 8740"/>
+              <a:gd name="adj" fmla="val 8696"/>
             </a:avLst>
           </a:prstGeom>
           <a:solidFill>
@@ -14543,8 +14545,8 @@
         </p:nvSpPr>
         <p:spPr>
           <a:xfrm>
-            <a:off x="7799832" y="4538167"/>
-            <a:ext cx="3145536" cy="256032"/>
+            <a:off x="7708392" y="4517136"/>
+            <a:ext cx="3282696" cy="228600"/>
           </a:xfrm>
           <a:prstGeom prst="rect">
             <a:avLst/>
@@ -14560,7 +14562,7 @@
               <a:buNone/>
             </a:pPr>
             <a:r>
-              <a:rPr lang="en-US" sz="1300" b="1" dirty="0">
+              <a:rPr lang="en-US" sz="1220" b="1" dirty="0">
                 <a:solidFill>
                   <a:srgbClr val="0068B7"/>
                 </a:solidFill>
@@ -14570,7 +14572,7 @@
               </a:rPr>
               <a:t>Safeguard to plan</a:t>
             </a:r>
-            <a:endParaRPr lang="en-US" sz="1300" dirty="0"/>
+            <a:endParaRPr lang="en-US" sz="1220" dirty="0"/>
           </a:p>
         </p:txBody>
       </p:sp>
@@ -14582,8 +14584,8 @@
         </p:nvSpPr>
         <p:spPr>
           <a:xfrm>
-            <a:off x="7799832" y="4867351"/>
-            <a:ext cx="3145536" cy="688543"/>
+            <a:off x="7708392" y="4828032"/>
+            <a:ext cx="3282696" cy="749808"/>
           </a:xfrm>
           <a:prstGeom prst="rect">
             <a:avLst/>
@@ -14601,7 +14603,7 @@
               <a:buNone/>
             </a:pPr>
             <a:r>
-              <a:rPr lang="en-US" sz="1320" dirty="0">
+              <a:rPr lang="en-US" sz="1220" dirty="0">
                 <a:solidFill>
                   <a:srgbClr val="17364A"/>
                 </a:solidFill>
@@ -14609,9 +14611,9 @@
                 <a:ea typeface="Aptos" pitchFamily="34" charset="-122"/>
                 <a:cs typeface="Aptos" pitchFamily="34" charset="-120"/>
               </a:rPr>
-              <a:t>Identify what could go wrong, who could be affected, what safeguards are needed, and what evidence should be reviewed before use.</a:t>
-            </a:r>
-            <a:endParaRPr lang="en-US" sz="1320" dirty="0"/>
+              <a:t>Identify what could go wrong, who could be affected, what safeguards are needed,.</a:t>
+            </a:r>
+            <a:endParaRPr lang="en-US" sz="1220" dirty="0"/>
           </a:p>
         </p:txBody>
       </p:sp>
@@ -14902,8 +14904,8 @@
         </p:nvSpPr>
         <p:spPr>
           <a:xfrm>
-            <a:off x="868680" y="1508760"/>
-            <a:ext cx="6309360" cy="4160520"/>
+            <a:off x="822960" y="1463040"/>
+            <a:ext cx="6565392" cy="4343400"/>
           </a:xfrm>
           <a:prstGeom prst="rect">
             <a:avLst/>
@@ -14921,7 +14923,7 @@
               <a:buNone/>
             </a:pPr>
             <a:r>
-              <a:rPr lang="en-US" sz="2100" dirty="0">
+              <a:rPr lang="en-US" sz="1920" dirty="0">
                 <a:solidFill>
                   <a:srgbClr val="003A63"/>
                 </a:solidFill>
@@ -14929,16 +14931,16 @@
                 <a:ea typeface="Aptos" pitchFamily="34" charset="-122"/>
                 <a:cs typeface="Aptos" pitchFamily="34" charset="-120"/>
               </a:rPr>
-              <a:t>• This module provides national-level training guidance for public health agencies and partners.</a:t>
-            </a:r>
-            <a:endParaRPr lang="en-US" sz="2100" dirty="0"/>
-          </a:p>
-          <a:p>
-            <a:pPr indent="0" marL="0">
-              <a:buNone/>
-            </a:pPr>
-            <a:r>
-              <a:rPr lang="en-US" sz="2100" dirty="0">
+              <a:t>• This module provides national-level training guidance for public health.</a:t>
+            </a:r>
+            <a:endParaRPr lang="en-US" sz="1920" dirty="0"/>
+          </a:p>
+          <a:p>
+            <a:pPr indent="0" marL="0">
+              <a:buNone/>
+            </a:pPr>
+            <a:r>
+              <a:rPr lang="en-US" sz="1920" dirty="0">
                 <a:solidFill>
                   <a:srgbClr val="003A63"/>
                 </a:solidFill>
@@ -14946,16 +14948,16 @@
                 <a:ea typeface="Aptos" pitchFamily="34" charset="-122"/>
                 <a:cs typeface="Aptos" pitchFamily="34" charset="-120"/>
               </a:rPr>
-              <a:t>• It is not legal advice and does not replace review by agency legal counsel, privacy officers,.</a:t>
-            </a:r>
-            <a:endParaRPr lang="en-US" sz="2100" dirty="0"/>
-          </a:p>
-          <a:p>
-            <a:pPr indent="0" marL="0">
-              <a:buNone/>
-            </a:pPr>
-            <a:r>
-              <a:rPr lang="en-US" sz="2100" dirty="0">
+              <a:t>• It is not legal advice and does not replace review by agency legal counsel,.</a:t>
+            </a:r>
+            <a:endParaRPr lang="en-US" sz="1920" dirty="0"/>
+          </a:p>
+          <a:p>
+            <a:pPr indent="0" marL="0">
+              <a:buNone/>
+            </a:pPr>
+            <a:r>
+              <a:rPr lang="en-US" sz="1920" dirty="0">
                 <a:solidFill>
                   <a:srgbClr val="003A63"/>
                 </a:solidFill>
@@ -14963,9 +14965,9 @@
                 <a:ea typeface="Aptos" pitchFamily="34" charset="-122"/>
                 <a:cs typeface="Aptos" pitchFamily="34" charset="-120"/>
               </a:rPr>
-              <a:t>• Requirements may vary by state, locality, territory, Tribe, agency, funding source,.</a:t>
-            </a:r>
-            <a:endParaRPr lang="en-US" sz="2100" dirty="0"/>
+              <a:t>• Requirements may vary by state, locality, territory, Tribe, agency, funding.</a:t>
+            </a:r>
+            <a:endParaRPr lang="en-US" sz="1920" dirty="0"/>
           </a:p>
         </p:txBody>
       </p:sp>
@@ -14977,12 +14979,12 @@
         </p:nvSpPr>
         <p:spPr>
           <a:xfrm>
-            <a:off x="7635240" y="1325880"/>
-            <a:ext cx="3474720" cy="1207008"/>
+            <a:off x="7543800" y="1325880"/>
+            <a:ext cx="3611880" cy="1261872"/>
           </a:xfrm>
           <a:prstGeom prst="roundRect">
             <a:avLst>
-              <a:gd name="adj" fmla="val 9091"/>
+              <a:gd name="adj" fmla="val 8696"/>
             </a:avLst>
           </a:prstGeom>
           <a:solidFill>
@@ -15004,8 +15006,8 @@
         </p:nvSpPr>
         <p:spPr>
           <a:xfrm>
-            <a:off x="7799832" y="1472184"/>
-            <a:ext cx="3145536" cy="256032"/>
+            <a:off x="7708392" y="1453896"/>
+            <a:ext cx="3282696" cy="228600"/>
           </a:xfrm>
           <a:prstGeom prst="rect">
             <a:avLst/>
@@ -15021,7 +15023,7 @@
               <a:buNone/>
             </a:pPr>
             <a:r>
-              <a:rPr lang="en-US" sz="1300" b="1" dirty="0">
+              <a:rPr lang="en-US" sz="1220" b="1" dirty="0">
                 <a:solidFill>
                   <a:srgbClr val="0068B7"/>
                 </a:solidFill>
@@ -15031,7 +15033,7 @@
               </a:rPr>
               <a:t>Governance lens</a:t>
             </a:r>
-            <a:endParaRPr lang="en-US" sz="1300" dirty="0"/>
+            <a:endParaRPr lang="en-US" sz="1220" dirty="0"/>
           </a:p>
         </p:txBody>
       </p:sp>
@@ -15043,8 +15045,8 @@
         </p:nvSpPr>
         <p:spPr>
           <a:xfrm>
-            <a:off x="7799832" y="1801368"/>
-            <a:ext cx="3145536" cy="640080"/>
+            <a:off x="7708392" y="1764792"/>
+            <a:ext cx="3282696" cy="749808"/>
           </a:xfrm>
           <a:prstGeom prst="rect">
             <a:avLst/>
@@ -15062,7 +15064,7 @@
               <a:buNone/>
             </a:pPr>
             <a:r>
-              <a:rPr lang="en-US" sz="1320" dirty="0">
+              <a:rPr lang="en-US" sz="1220" dirty="0">
                 <a:solidFill>
                   <a:srgbClr val="17364A"/>
                 </a:solidFill>
@@ -15070,9 +15072,9 @@
                 <a:ea typeface="Aptos" pitchFamily="34" charset="-122"/>
                 <a:cs typeface="Aptos" pitchFamily="34" charset="-120"/>
               </a:rPr>
-              <a:t>This module provides national-level training guidance for public health agencies and.</a:t>
-            </a:r>
-            <a:endParaRPr lang="en-US" sz="1320" dirty="0"/>
+              <a:t>This module provides national-level training guidance for public health agencies.</a:t>
+            </a:r>
+            <a:endParaRPr lang="en-US" sz="1220" dirty="0"/>
           </a:p>
         </p:txBody>
       </p:sp>
@@ -15084,12 +15086,12 @@
         </p:nvSpPr>
         <p:spPr>
           <a:xfrm>
-            <a:off x="7635240" y="2670048"/>
-            <a:ext cx="3474720" cy="1377086"/>
+            <a:off x="7543800" y="2724912"/>
+            <a:ext cx="3611880" cy="1527048"/>
           </a:xfrm>
           <a:prstGeom prst="roundRect">
             <a:avLst>
-              <a:gd name="adj" fmla="val 7968"/>
+              <a:gd name="adj" fmla="val 7186"/>
             </a:avLst>
           </a:prstGeom>
           <a:solidFill>
@@ -15111,24 +15113,26 @@
         </p:nvSpPr>
         <p:spPr>
           <a:xfrm>
-            <a:off x="7799832" y="2798064"/>
-            <a:ext cx="3145536" cy="237744"/>
-          </a:xfrm>
-          <a:prstGeom prst="rect">
-            <a:avLst/>
-          </a:prstGeom>
-          <a:noFill/>
-          <a:ln/>
-        </p:spPr>
-        <p:txBody>
-          <a:bodyPr wrap="square" lIns="0" tIns="0" rIns="0" bIns="0" rtlCol="0" anchor="ctr"/>
-          <a:lstStyle/>
-          <a:p>
-            <a:pPr indent="0" marL="0">
-              <a:buNone/>
-            </a:pPr>
-            <a:r>
-              <a:rPr lang="en-US" sz="1250" b="1" dirty="0">
+            <a:off x="7708392" y="2852928"/>
+            <a:ext cx="3282696" cy="219456"/>
+          </a:xfrm>
+          <a:prstGeom prst="rect">
+            <a:avLst/>
+          </a:prstGeom>
+          <a:noFill/>
+          <a:ln/>
+        </p:spPr>
+        <p:txBody>
+          <a:bodyPr wrap="square" lIns="0" tIns="0" rIns="0" bIns="0" rtlCol="0" anchor="ctr">
+            <a:normAutofit/>
+          </a:bodyPr>
+          <a:lstStyle/>
+          <a:p>
+            <a:pPr indent="0" marL="0">
+              <a:buNone/>
+            </a:pPr>
+            <a:r>
+              <a:rPr lang="en-US" sz="1160" b="1" dirty="0">
                 <a:solidFill>
                   <a:srgbClr val="0068B7"/>
                 </a:solidFill>
@@ -15138,7 +15142,7 @@
               </a:rPr>
               <a:t>Governance pathway</a:t>
             </a:r>
-            <a:endParaRPr lang="en-US" sz="1250" dirty="0"/>
+            <a:endParaRPr lang="en-US" sz="1160" dirty="0"/>
           </a:p>
         </p:txBody>
       </p:sp>
@@ -15150,7 +15154,7 @@
         </p:nvSpPr>
         <p:spPr>
           <a:xfrm>
-            <a:off x="8763000" y="3351276"/>
+            <a:off x="8717280" y="3406140"/>
             <a:ext cx="164592" cy="0"/>
           </a:xfrm>
           <a:prstGeom prst="line">
@@ -15173,8 +15177,8 @@
         </p:nvSpPr>
         <p:spPr>
           <a:xfrm>
-            <a:off x="7872984" y="3200400"/>
-            <a:ext cx="890016" cy="301752"/>
+            <a:off x="7781544" y="3255264"/>
+            <a:ext cx="935736" cy="301752"/>
           </a:xfrm>
           <a:prstGeom prst="roundRect">
             <a:avLst>
@@ -15200,8 +15204,8 @@
         </p:nvSpPr>
         <p:spPr>
           <a:xfrm>
-            <a:off x="7909560" y="3273552"/>
-            <a:ext cx="816864" cy="146304"/>
+            <a:off x="7818120" y="3328416"/>
+            <a:ext cx="862584" cy="146304"/>
           </a:xfrm>
           <a:prstGeom prst="rect">
             <a:avLst/>
@@ -15241,7 +15245,7 @@
         </p:nvSpPr>
         <p:spPr>
           <a:xfrm>
-            <a:off x="9817608" y="3351276"/>
+            <a:off x="9817608" y="3406140"/>
             <a:ext cx="164592" cy="0"/>
           </a:xfrm>
           <a:prstGeom prst="line">
@@ -15264,8 +15268,8 @@
         </p:nvSpPr>
         <p:spPr>
           <a:xfrm>
-            <a:off x="8927592" y="3200400"/>
-            <a:ext cx="890016" cy="301752"/>
+            <a:off x="8881872" y="3255264"/>
+            <a:ext cx="935736" cy="301752"/>
           </a:xfrm>
           <a:prstGeom prst="roundRect">
             <a:avLst>
@@ -15291,8 +15295,8 @@
         </p:nvSpPr>
         <p:spPr>
           <a:xfrm>
-            <a:off x="8964168" y="3273552"/>
-            <a:ext cx="816864" cy="146304"/>
+            <a:off x="8918448" y="3328416"/>
+            <a:ext cx="862584" cy="146304"/>
           </a:xfrm>
           <a:prstGeom prst="rect">
             <a:avLst/>
@@ -15332,8 +15336,8 @@
         </p:nvSpPr>
         <p:spPr>
           <a:xfrm>
-            <a:off x="9982200" y="3200400"/>
-            <a:ext cx="890016" cy="301752"/>
+            <a:off x="9982200" y="3255264"/>
+            <a:ext cx="935736" cy="301752"/>
           </a:xfrm>
           <a:prstGeom prst="roundRect">
             <a:avLst>
@@ -15359,8 +15363,8 @@
         </p:nvSpPr>
         <p:spPr>
           <a:xfrm>
-            <a:off x="10018776" y="3273552"/>
-            <a:ext cx="816864" cy="146304"/>
+            <a:off x="10018776" y="3328416"/>
+            <a:ext cx="862584" cy="146304"/>
           </a:xfrm>
           <a:prstGeom prst="rect">
             <a:avLst/>
@@ -15400,8 +15404,8 @@
         </p:nvSpPr>
         <p:spPr>
           <a:xfrm>
-            <a:off x="7854696" y="3694176"/>
-            <a:ext cx="3035808" cy="206654"/>
+            <a:off x="7763256" y="3749040"/>
+            <a:ext cx="3172968" cy="356616"/>
           </a:xfrm>
           <a:prstGeom prst="rect">
             <a:avLst/>
@@ -15419,7 +15423,7 @@
               <a:buNone/>
             </a:pPr>
             <a:r>
-              <a:rPr lang="en-US" sz="1120" dirty="0">
+              <a:rPr lang="en-US" sz="1040" dirty="0">
                 <a:solidFill>
                   <a:srgbClr val="17364A"/>
                 </a:solidFill>
@@ -15427,9 +15431,9 @@
                 <a:ea typeface="Aptos" pitchFamily="34" charset="-122"/>
                 <a:cs typeface="Aptos" pitchFamily="34" charset="-120"/>
               </a:rPr>
-              <a:t>A proposed AI use should move through documented review before it becomes an operational workflow.</a:t>
-            </a:r>
-            <a:endParaRPr lang="en-US" sz="1120" dirty="0"/>
+              <a:t>A proposed AI use should move through documented review before it.</a:t>
+            </a:r>
+            <a:endParaRPr lang="en-US" sz="1040" dirty="0"/>
           </a:p>
         </p:txBody>
       </p:sp>
@@ -15441,12 +15445,12 @@
         </p:nvSpPr>
         <p:spPr>
           <a:xfrm>
-            <a:off x="7635240" y="4184294"/>
-            <a:ext cx="3474720" cy="1466698"/>
+            <a:off x="7543800" y="4389120"/>
+            <a:ext cx="3611880" cy="1261872"/>
           </a:xfrm>
           <a:prstGeom prst="roundRect">
             <a:avLst>
-              <a:gd name="adj" fmla="val 7481"/>
+              <a:gd name="adj" fmla="val 8696"/>
             </a:avLst>
           </a:prstGeom>
           <a:solidFill>
@@ -15468,8 +15472,8 @@
         </p:nvSpPr>
         <p:spPr>
           <a:xfrm>
-            <a:off x="7799832" y="4330598"/>
-            <a:ext cx="3145536" cy="256032"/>
+            <a:off x="7708392" y="4517136"/>
+            <a:ext cx="3282696" cy="228600"/>
           </a:xfrm>
           <a:prstGeom prst="rect">
             <a:avLst/>
@@ -15485,7 +15489,7 @@
               <a:buNone/>
             </a:pPr>
             <a:r>
-              <a:rPr lang="en-US" sz="1300" b="1" dirty="0">
+              <a:rPr lang="en-US" sz="1220" b="1" dirty="0">
                 <a:solidFill>
                   <a:srgbClr val="0068B7"/>
                 </a:solidFill>
@@ -15495,7 +15499,7 @@
               </a:rPr>
               <a:t>What to document</a:t>
             </a:r>
-            <a:endParaRPr lang="en-US" sz="1300" dirty="0"/>
+            <a:endParaRPr lang="en-US" sz="1220" dirty="0"/>
           </a:p>
         </p:txBody>
       </p:sp>
@@ -15507,8 +15511,8 @@
         </p:nvSpPr>
         <p:spPr>
           <a:xfrm>
-            <a:off x="7799832" y="4659782"/>
-            <a:ext cx="3145536" cy="899770"/>
+            <a:off x="7708392" y="4828032"/>
+            <a:ext cx="3282696" cy="749808"/>
           </a:xfrm>
           <a:prstGeom prst="rect">
             <a:avLst/>
@@ -15526,7 +15530,7 @@
               <a:buNone/>
             </a:pPr>
             <a:r>
-              <a:rPr lang="en-US" sz="1320" dirty="0">
+              <a:rPr lang="en-US" sz="1220" dirty="0">
                 <a:solidFill>
                   <a:srgbClr val="17364A"/>
                 </a:solidFill>
@@ -15534,9 +15538,9 @@
                 <a:ea typeface="Aptos" pitchFamily="34" charset="-122"/>
                 <a:cs typeface="Aptos" pitchFamily="34" charset="-120"/>
               </a:rPr>
-              <a:t>Translate this concept into clear decision rights, review steps, documentation expectations, and escalation paths before an AI-supported workflow is approved.</a:t>
-            </a:r>
-            <a:endParaRPr lang="en-US" sz="1320" dirty="0"/>
+              <a:t>Translate this concept into clear decision rights, review steps, documentation.</a:t>
+            </a:r>
+            <a:endParaRPr lang="en-US" sz="1220" dirty="0"/>
           </a:p>
         </p:txBody>
       </p:sp>
@@ -15827,8 +15831,8 @@
         </p:nvSpPr>
         <p:spPr>
           <a:xfrm>
-            <a:off x="868680" y="1508760"/>
-            <a:ext cx="6309360" cy="4160520"/>
+            <a:off x="822960" y="1463040"/>
+            <a:ext cx="6565392" cy="4343400"/>
           </a:xfrm>
           <a:prstGeom prst="rect">
             <a:avLst/>
@@ -15846,7 +15850,7 @@
               <a:buNone/>
             </a:pPr>
             <a:r>
-              <a:rPr lang="en-US" sz="2100" dirty="0">
+              <a:rPr lang="en-US" sz="1920" dirty="0">
                 <a:solidFill>
                   <a:srgbClr val="003A63"/>
                 </a:solidFill>
@@ -15854,16 +15858,16 @@
                 <a:ea typeface="Aptos" pitchFamily="34" charset="-122"/>
                 <a:cs typeface="Aptos" pitchFamily="34" charset="-120"/>
               </a:rPr>
-              <a:t>• Public health agencies make risk decisions every day, but AI can make those decisions less.</a:t>
-            </a:r>
-            <a:endParaRPr lang="en-US" sz="2100" dirty="0"/>
-          </a:p>
-          <a:p>
-            <a:pPr indent="0" marL="0">
-              <a:buNone/>
-            </a:pPr>
-            <a:r>
-              <a:rPr lang="en-US" sz="2100" dirty="0">
+              <a:t>• Public health agencies make risk decisions every day, but AI can make those.</a:t>
+            </a:r>
+            <a:endParaRPr lang="en-US" sz="1920" dirty="0"/>
+          </a:p>
+          <a:p>
+            <a:pPr indent="0" marL="0">
+              <a:buNone/>
+            </a:pPr>
+            <a:r>
+              <a:rPr lang="en-US" sz="1920" dirty="0">
                 <a:solidFill>
                   <a:srgbClr val="003A63"/>
                 </a:solidFill>
@@ -15871,16 +15875,16 @@
                 <a:ea typeface="Aptos" pitchFamily="34" charset="-122"/>
                 <a:cs typeface="Aptos" pitchFamily="34" charset="-120"/>
               </a:rPr>
-              <a:t>• A generative AI tool might be acceptable for drafting internal meeting notes but not for.</a:t>
-            </a:r>
-            <a:endParaRPr lang="en-US" sz="2100" dirty="0"/>
-          </a:p>
-          <a:p>
-            <a:pPr indent="0" marL="0">
-              <a:buNone/>
-            </a:pPr>
-            <a:r>
-              <a:rPr lang="en-US" sz="2100" dirty="0">
+              <a:t>• A generative AI tool might be acceptable for drafting internal meeting notes.</a:t>
+            </a:r>
+            <a:endParaRPr lang="en-US" sz="1920" dirty="0"/>
+          </a:p>
+          <a:p>
+            <a:pPr indent="0" marL="0">
+              <a:buNone/>
+            </a:pPr>
+            <a:r>
+              <a:rPr lang="en-US" sz="1920" dirty="0">
                 <a:solidFill>
                   <a:srgbClr val="003A63"/>
                 </a:solidFill>
@@ -15888,9 +15892,9 @@
                 <a:ea typeface="Aptos" pitchFamily="34" charset="-122"/>
                 <a:cs typeface="Aptos" pitchFamily="34" charset="-120"/>
               </a:rPr>
-              <a:t>• A predictive model might be acceptable for planning staffing levels but not for denying.</a:t>
-            </a:r>
-            <a:endParaRPr lang="en-US" sz="2100" dirty="0"/>
+              <a:t>• A predictive model might be acceptable for planning staffing levels but not.</a:t>
+            </a:r>
+            <a:endParaRPr lang="en-US" sz="1920" dirty="0"/>
           </a:p>
         </p:txBody>
       </p:sp>
@@ -15902,12 +15906,12 @@
         </p:nvSpPr>
         <p:spPr>
           <a:xfrm>
-            <a:off x="7635240" y="1325880"/>
-            <a:ext cx="3474720" cy="1255471"/>
+            <a:off x="7543800" y="1325880"/>
+            <a:ext cx="3611880" cy="1261872"/>
           </a:xfrm>
           <a:prstGeom prst="roundRect">
             <a:avLst>
-              <a:gd name="adj" fmla="val 8740"/>
+              <a:gd name="adj" fmla="val 8696"/>
             </a:avLst>
           </a:prstGeom>
           <a:solidFill>
@@ -15929,8 +15933,8 @@
         </p:nvSpPr>
         <p:spPr>
           <a:xfrm>
-            <a:off x="7799832" y="1472184"/>
-            <a:ext cx="3145536" cy="256032"/>
+            <a:off x="7708392" y="1453896"/>
+            <a:ext cx="3282696" cy="228600"/>
           </a:xfrm>
           <a:prstGeom prst="rect">
             <a:avLst/>
@@ -15946,7 +15950,7 @@
               <a:buNone/>
             </a:pPr>
             <a:r>
-              <a:rPr lang="en-US" sz="1300" b="1" dirty="0">
+              <a:rPr lang="en-US" sz="1220" b="1" dirty="0">
                 <a:solidFill>
                   <a:srgbClr val="0068B7"/>
                 </a:solidFill>
@@ -15956,7 +15960,7 @@
               </a:rPr>
               <a:t>Risk check</a:t>
             </a:r>
-            <a:endParaRPr lang="en-US" sz="1300" dirty="0"/>
+            <a:endParaRPr lang="en-US" sz="1220" dirty="0"/>
           </a:p>
         </p:txBody>
       </p:sp>
@@ -15968,8 +15972,8 @@
         </p:nvSpPr>
         <p:spPr>
           <a:xfrm>
-            <a:off x="7799832" y="1801368"/>
-            <a:ext cx="3145536" cy="688543"/>
+            <a:off x="7708392" y="1764792"/>
+            <a:ext cx="3282696" cy="749808"/>
           </a:xfrm>
           <a:prstGeom prst="rect">
             <a:avLst/>
@@ -15987,7 +15991,7 @@
               <a:buNone/>
             </a:pPr>
             <a:r>
-              <a:rPr lang="en-US" sz="1320" dirty="0">
+              <a:rPr lang="en-US" sz="1220" dirty="0">
                 <a:solidFill>
                   <a:srgbClr val="17364A"/>
                 </a:solidFill>
@@ -15995,9 +15999,9 @@
                 <a:ea typeface="Aptos" pitchFamily="34" charset="-122"/>
                 <a:cs typeface="Aptos" pitchFamily="34" charset="-120"/>
               </a:rPr>
-              <a:t>Public health agencies make risk decisions every day, but AI can make those decisions less visible.</a:t>
-            </a:r>
-            <a:endParaRPr lang="en-US" sz="1320" dirty="0"/>
+              <a:t>Public health agencies make risk decisions every day, but AI can make those.</a:t>
+            </a:r>
+            <a:endParaRPr lang="en-US" sz="1220" dirty="0"/>
           </a:p>
         </p:txBody>
       </p:sp>
@@ -16009,12 +16013,12 @@
         </p:nvSpPr>
         <p:spPr>
           <a:xfrm>
-            <a:off x="7635240" y="2718511"/>
-            <a:ext cx="3474720" cy="1536192"/>
+            <a:off x="7543800" y="2724912"/>
+            <a:ext cx="3611880" cy="1527048"/>
           </a:xfrm>
           <a:prstGeom prst="roundRect">
             <a:avLst>
-              <a:gd name="adj" fmla="val 7143"/>
+              <a:gd name="adj" fmla="val 7186"/>
             </a:avLst>
           </a:prstGeom>
           <a:solidFill>
@@ -16036,24 +16040,26 @@
         </p:nvSpPr>
         <p:spPr>
           <a:xfrm>
-            <a:off x="7799832" y="2846527"/>
-            <a:ext cx="3145536" cy="237744"/>
-          </a:xfrm>
-          <a:prstGeom prst="rect">
-            <a:avLst/>
-          </a:prstGeom>
-          <a:noFill/>
-          <a:ln/>
-        </p:spPr>
-        <p:txBody>
-          <a:bodyPr wrap="square" lIns="0" tIns="0" rIns="0" bIns="0" rtlCol="0" anchor="ctr"/>
-          <a:lstStyle/>
-          <a:p>
-            <a:pPr indent="0" marL="0">
-              <a:buNone/>
-            </a:pPr>
-            <a:r>
-              <a:rPr lang="en-US" sz="1250" b="1" dirty="0">
+            <a:off x="7708392" y="2852928"/>
+            <a:ext cx="3282696" cy="219456"/>
+          </a:xfrm>
+          <a:prstGeom prst="rect">
+            <a:avLst/>
+          </a:prstGeom>
+          <a:noFill/>
+          <a:ln/>
+        </p:spPr>
+        <p:txBody>
+          <a:bodyPr wrap="square" lIns="0" tIns="0" rIns="0" bIns="0" rtlCol="0" anchor="ctr">
+            <a:normAutofit/>
+          </a:bodyPr>
+          <a:lstStyle/>
+          <a:p>
+            <a:pPr indent="0" marL="0">
+              <a:buNone/>
+            </a:pPr>
+            <a:r>
+              <a:rPr lang="en-US" sz="1160" b="1" dirty="0">
                 <a:solidFill>
                   <a:srgbClr val="0068B7"/>
                 </a:solidFill>
@@ -16063,7 +16069,7 @@
               </a:rPr>
               <a:t>Risk control loop</a:t>
             </a:r>
-            <a:endParaRPr lang="en-US" sz="1250" dirty="0"/>
+            <a:endParaRPr lang="en-US" sz="1160" dirty="0"/>
           </a:p>
         </p:txBody>
       </p:sp>
@@ -16075,7 +16081,7 @@
         </p:nvSpPr>
         <p:spPr>
           <a:xfrm>
-            <a:off x="8763000" y="3399739"/>
+            <a:off x="8717280" y="3406140"/>
             <a:ext cx="164592" cy="0"/>
           </a:xfrm>
           <a:prstGeom prst="line">
@@ -16098,8 +16104,8 @@
         </p:nvSpPr>
         <p:spPr>
           <a:xfrm>
-            <a:off x="7872984" y="3248863"/>
-            <a:ext cx="890016" cy="301752"/>
+            <a:off x="7781544" y="3255264"/>
+            <a:ext cx="935736" cy="301752"/>
           </a:xfrm>
           <a:prstGeom prst="roundRect">
             <a:avLst>
@@ -16125,8 +16131,8 @@
         </p:nvSpPr>
         <p:spPr>
           <a:xfrm>
-            <a:off x="7909560" y="3322015"/>
-            <a:ext cx="816864" cy="146304"/>
+            <a:off x="7818120" y="3328416"/>
+            <a:ext cx="862584" cy="146304"/>
           </a:xfrm>
           <a:prstGeom prst="rect">
             <a:avLst/>
@@ -16166,7 +16172,7 @@
         </p:nvSpPr>
         <p:spPr>
           <a:xfrm>
-            <a:off x="9817608" y="3399739"/>
+            <a:off x="9817608" y="3406140"/>
             <a:ext cx="164592" cy="0"/>
           </a:xfrm>
           <a:prstGeom prst="line">
@@ -16189,8 +16195,8 @@
         </p:nvSpPr>
         <p:spPr>
           <a:xfrm>
-            <a:off x="8927592" y="3248863"/>
-            <a:ext cx="890016" cy="301752"/>
+            <a:off x="8881872" y="3255264"/>
+            <a:ext cx="935736" cy="301752"/>
           </a:xfrm>
           <a:prstGeom prst="roundRect">
             <a:avLst>
@@ -16216,8 +16222,8 @@
         </p:nvSpPr>
         <p:spPr>
           <a:xfrm>
-            <a:off x="8964168" y="3322015"/>
-            <a:ext cx="816864" cy="146304"/>
+            <a:off x="8918448" y="3328416"/>
+            <a:ext cx="862584" cy="146304"/>
           </a:xfrm>
           <a:prstGeom prst="rect">
             <a:avLst/>
@@ -16257,8 +16263,8 @@
         </p:nvSpPr>
         <p:spPr>
           <a:xfrm>
-            <a:off x="9982200" y="3248863"/>
-            <a:ext cx="890016" cy="301752"/>
+            <a:off x="9982200" y="3255264"/>
+            <a:ext cx="935736" cy="301752"/>
           </a:xfrm>
           <a:prstGeom prst="roundRect">
             <a:avLst>
@@ -16284,8 +16290,8 @@
         </p:nvSpPr>
         <p:spPr>
           <a:xfrm>
-            <a:off x="10018776" y="3322015"/>
-            <a:ext cx="816864" cy="146304"/>
+            <a:off x="10018776" y="3328416"/>
+            <a:ext cx="862584" cy="146304"/>
           </a:xfrm>
           <a:prstGeom prst="rect">
             <a:avLst/>
@@ -16325,8 +16331,8 @@
         </p:nvSpPr>
         <p:spPr>
           <a:xfrm>
-            <a:off x="7854696" y="3742639"/>
-            <a:ext cx="3035808" cy="365760"/>
+            <a:off x="7763256" y="3749040"/>
+            <a:ext cx="3172968" cy="356616"/>
           </a:xfrm>
           <a:prstGeom prst="rect">
             <a:avLst/>
@@ -16344,7 +16350,7 @@
               <a:buNone/>
             </a:pPr>
             <a:r>
-              <a:rPr lang="en-US" sz="1120" dirty="0">
+              <a:rPr lang="en-US" sz="1040" dirty="0">
                 <a:solidFill>
                   <a:srgbClr val="17364A"/>
                 </a:solidFill>
@@ -16352,9 +16358,9 @@
                 <a:ea typeface="Aptos" pitchFamily="34" charset="-122"/>
                 <a:cs typeface="Aptos" pitchFamily="34" charset="-120"/>
               </a:rPr>
-              <a:t>Responsible use depends on finding risks early, applying safeguards, and watching for drift or harm over time.</a:t>
-            </a:r>
-            <a:endParaRPr lang="en-US" sz="1120" dirty="0"/>
+              <a:t>Responsible use depends on finding risks early, applying safeguards,.</a:t>
+            </a:r>
+            <a:endParaRPr lang="en-US" sz="1040" dirty="0"/>
           </a:p>
         </p:txBody>
       </p:sp>
@@ -16366,12 +16372,12 @@
         </p:nvSpPr>
         <p:spPr>
           <a:xfrm>
-            <a:off x="7635240" y="4391863"/>
-            <a:ext cx="3474720" cy="1255471"/>
+            <a:off x="7543800" y="4389120"/>
+            <a:ext cx="3611880" cy="1261872"/>
           </a:xfrm>
           <a:prstGeom prst="roundRect">
             <a:avLst>
-              <a:gd name="adj" fmla="val 8740"/>
+              <a:gd name="adj" fmla="val 8696"/>
             </a:avLst>
           </a:prstGeom>
           <a:solidFill>
@@ -16393,8 +16399,8 @@
         </p:nvSpPr>
         <p:spPr>
           <a:xfrm>
-            <a:off x="7799832" y="4538167"/>
-            <a:ext cx="3145536" cy="256032"/>
+            <a:off x="7708392" y="4517136"/>
+            <a:ext cx="3282696" cy="228600"/>
           </a:xfrm>
           <a:prstGeom prst="rect">
             <a:avLst/>
@@ -16410,7 +16416,7 @@
               <a:buNone/>
             </a:pPr>
             <a:r>
-              <a:rPr lang="en-US" sz="1300" b="1" dirty="0">
+              <a:rPr lang="en-US" sz="1220" b="1" dirty="0">
                 <a:solidFill>
                   <a:srgbClr val="0068B7"/>
                 </a:solidFill>
@@ -16420,7 +16426,7 @@
               </a:rPr>
               <a:t>Safeguard to plan</a:t>
             </a:r>
-            <a:endParaRPr lang="en-US" sz="1300" dirty="0"/>
+            <a:endParaRPr lang="en-US" sz="1220" dirty="0"/>
           </a:p>
         </p:txBody>
       </p:sp>
@@ -16432,8 +16438,8 @@
         </p:nvSpPr>
         <p:spPr>
           <a:xfrm>
-            <a:off x="7799832" y="4867351"/>
-            <a:ext cx="3145536" cy="688543"/>
+            <a:off x="7708392" y="4828032"/>
+            <a:ext cx="3282696" cy="749808"/>
           </a:xfrm>
           <a:prstGeom prst="rect">
             <a:avLst/>
@@ -16451,7 +16457,7 @@
               <a:buNone/>
             </a:pPr>
             <a:r>
-              <a:rPr lang="en-US" sz="1320" dirty="0">
+              <a:rPr lang="en-US" sz="1220" dirty="0">
                 <a:solidFill>
                   <a:srgbClr val="17364A"/>
                 </a:solidFill>
@@ -16459,9 +16465,9 @@
                 <a:ea typeface="Aptos" pitchFamily="34" charset="-122"/>
                 <a:cs typeface="Aptos" pitchFamily="34" charset="-120"/>
               </a:rPr>
-              <a:t>Identify what could go wrong, who could be affected, what safeguards are needed, and what evidence should be reviewed before use.</a:t>
-            </a:r>
-            <a:endParaRPr lang="en-US" sz="1320" dirty="0"/>
+              <a:t>Identify what could go wrong, who could be affected, what safeguards are needed,.</a:t>
+            </a:r>
+            <a:endParaRPr lang="en-US" sz="1220" dirty="0"/>
           </a:p>
         </p:txBody>
       </p:sp>
@@ -16752,8 +16758,8 @@
         </p:nvSpPr>
         <p:spPr>
           <a:xfrm>
-            <a:off x="868680" y="1508760"/>
-            <a:ext cx="6309360" cy="4160520"/>
+            <a:off x="822960" y="1463040"/>
+            <a:ext cx="6565392" cy="4343400"/>
           </a:xfrm>
           <a:prstGeom prst="rect">
             <a:avLst/>
@@ -16771,7 +16777,7 @@
               <a:buNone/>
             </a:pPr>
             <a:r>
-              <a:rPr lang="en-US" sz="2100" dirty="0">
+              <a:rPr lang="en-US" sz="1920" dirty="0">
                 <a:solidFill>
                   <a:srgbClr val="003A63"/>
                 </a:solidFill>
@@ -16779,16 +16785,16 @@
                 <a:ea typeface="Aptos" pitchFamily="34" charset="-122"/>
                 <a:cs typeface="Aptos" pitchFamily="34" charset="-120"/>
               </a:rPr>
-              <a:t>• An agency may define a higher risk appetite for internal administrative uses that do not.</a:t>
-            </a:r>
-            <a:endParaRPr lang="en-US" sz="2100" dirty="0"/>
-          </a:p>
-          <a:p>
-            <a:pPr indent="0" marL="0">
-              <a:buNone/>
-            </a:pPr>
-            <a:r>
-              <a:rPr lang="en-US" sz="2100" dirty="0">
+              <a:t>• An agency may define a higher risk appetite for internal administrative uses.</a:t>
+            </a:r>
+            <a:endParaRPr lang="en-US" sz="1920" dirty="0"/>
+          </a:p>
+          <a:p>
+            <a:pPr indent="0" marL="0">
+              <a:buNone/>
+            </a:pPr>
+            <a:r>
+              <a:rPr lang="en-US" sz="1920" dirty="0">
                 <a:solidFill>
                   <a:srgbClr val="003A63"/>
                 </a:solidFill>
@@ -16796,16 +16802,16 @@
                 <a:ea typeface="Aptos" pitchFamily="34" charset="-122"/>
                 <a:cs typeface="Aptos" pitchFamily="34" charset="-120"/>
               </a:rPr>
-              <a:t>• It may define a moderate appetite for staff-facing decision support when human review,.</a:t>
-            </a:r>
-            <a:endParaRPr lang="en-US" sz="2100" dirty="0"/>
-          </a:p>
-          <a:p>
-            <a:pPr indent="0" marL="0">
-              <a:buNone/>
-            </a:pPr>
-            <a:r>
-              <a:rPr lang="en-US" sz="2100" dirty="0">
+              <a:t>• It may define a moderate appetite for staff-facing decision support when.</a:t>
+            </a:r>
+            <a:endParaRPr lang="en-US" sz="1920" dirty="0"/>
+          </a:p>
+          <a:p>
+            <a:pPr indent="0" marL="0">
+              <a:buNone/>
+            </a:pPr>
+            <a:r>
+              <a:rPr lang="en-US" sz="1920" dirty="0">
                 <a:solidFill>
                   <a:srgbClr val="003A63"/>
                 </a:solidFill>
@@ -16813,9 +16819,9 @@
                 <a:ea typeface="Aptos" pitchFamily="34" charset="-122"/>
                 <a:cs typeface="Aptos" pitchFamily="34" charset="-120"/>
               </a:rPr>
-              <a:t>• It may define a very low appetite for unsupervised public-facing advice, automated eligibility.</a:t>
-            </a:r>
-            <a:endParaRPr lang="en-US" sz="2100" dirty="0"/>
+              <a:t>• It may define a very low appetite for unsupervised public-facing advice,.</a:t>
+            </a:r>
+            <a:endParaRPr lang="en-US" sz="1920" dirty="0"/>
           </a:p>
         </p:txBody>
       </p:sp>
@@ -16827,12 +16833,12 @@
         </p:nvSpPr>
         <p:spPr>
           <a:xfrm>
-            <a:off x="7635240" y="1325880"/>
-            <a:ext cx="3474720" cy="1255471"/>
+            <a:off x="7543800" y="1325880"/>
+            <a:ext cx="3611880" cy="1261872"/>
           </a:xfrm>
           <a:prstGeom prst="roundRect">
             <a:avLst>
-              <a:gd name="adj" fmla="val 8740"/>
+              <a:gd name="adj" fmla="val 8696"/>
             </a:avLst>
           </a:prstGeom>
           <a:solidFill>
@@ -16854,8 +16860,8 @@
         </p:nvSpPr>
         <p:spPr>
           <a:xfrm>
-            <a:off x="7799832" y="1472184"/>
-            <a:ext cx="3145536" cy="256032"/>
+            <a:off x="7708392" y="1453896"/>
+            <a:ext cx="3282696" cy="228600"/>
           </a:xfrm>
           <a:prstGeom prst="rect">
             <a:avLst/>
@@ -16871,7 +16877,7 @@
               <a:buNone/>
             </a:pPr>
             <a:r>
-              <a:rPr lang="en-US" sz="1300" b="1" dirty="0">
+              <a:rPr lang="en-US" sz="1220" b="1" dirty="0">
                 <a:solidFill>
                   <a:srgbClr val="0068B7"/>
                 </a:solidFill>
@@ -16881,7 +16887,7 @@
               </a:rPr>
               <a:t>Risk check</a:t>
             </a:r>
-            <a:endParaRPr lang="en-US" sz="1300" dirty="0"/>
+            <a:endParaRPr lang="en-US" sz="1220" dirty="0"/>
           </a:p>
         </p:txBody>
       </p:sp>
@@ -16893,8 +16899,8 @@
         </p:nvSpPr>
         <p:spPr>
           <a:xfrm>
-            <a:off x="7799832" y="1801368"/>
-            <a:ext cx="3145536" cy="688543"/>
+            <a:off x="7708392" y="1764792"/>
+            <a:ext cx="3282696" cy="749808"/>
           </a:xfrm>
           <a:prstGeom prst="rect">
             <a:avLst/>
@@ -16912,7 +16918,7 @@
               <a:buNone/>
             </a:pPr>
             <a:r>
-              <a:rPr lang="en-US" sz="1320" dirty="0">
+              <a:rPr lang="en-US" sz="1220" dirty="0">
                 <a:solidFill>
                   <a:srgbClr val="17364A"/>
                 </a:solidFill>
@@ -16920,9 +16926,9 @@
                 <a:ea typeface="Aptos" pitchFamily="34" charset="-122"/>
                 <a:cs typeface="Aptos" pitchFamily="34" charset="-120"/>
               </a:rPr>
-              <a:t>An agency may define a higher risk appetite for internal administrative uses that do not involve.</a:t>
-            </a:r>
-            <a:endParaRPr lang="en-US" sz="1320" dirty="0"/>
+              <a:t>An agency may define a higher risk appetite for internal administrative uses.</a:t>
+            </a:r>
+            <a:endParaRPr lang="en-US" sz="1220" dirty="0"/>
           </a:p>
         </p:txBody>
       </p:sp>
@@ -16934,12 +16940,12 @@
         </p:nvSpPr>
         <p:spPr>
           <a:xfrm>
-            <a:off x="7635240" y="2718511"/>
-            <a:ext cx="3474720" cy="1536192"/>
+            <a:off x="7543800" y="2724912"/>
+            <a:ext cx="3611880" cy="1527048"/>
           </a:xfrm>
           <a:prstGeom prst="roundRect">
             <a:avLst>
-              <a:gd name="adj" fmla="val 7143"/>
+              <a:gd name="adj" fmla="val 7186"/>
             </a:avLst>
           </a:prstGeom>
           <a:solidFill>
@@ -16961,8 +16967,8 @@
         </p:nvSpPr>
         <p:spPr>
           <a:xfrm>
-            <a:off x="7799832" y="2864815"/>
-            <a:ext cx="3145536" cy="256032"/>
+            <a:off x="7708392" y="2852928"/>
+            <a:ext cx="3282696" cy="228600"/>
           </a:xfrm>
           <a:prstGeom prst="rect">
             <a:avLst/>
@@ -16978,7 +16984,7 @@
               <a:buNone/>
             </a:pPr>
             <a:r>
-              <a:rPr lang="en-US" sz="1300" b="1" dirty="0">
+              <a:rPr lang="en-US" sz="1220" b="1" dirty="0">
                 <a:solidFill>
                   <a:srgbClr val="0068B7"/>
                 </a:solidFill>
@@ -16988,7 +16994,7 @@
               </a:rPr>
               <a:t>Concept checkpoints</a:t>
             </a:r>
-            <a:endParaRPr lang="en-US" sz="1300" dirty="0"/>
+            <a:endParaRPr lang="en-US" sz="1220" dirty="0"/>
           </a:p>
         </p:txBody>
       </p:sp>
@@ -17000,8 +17006,8 @@
         </p:nvSpPr>
         <p:spPr>
           <a:xfrm>
-            <a:off x="7818120" y="3230575"/>
-            <a:ext cx="3090672" cy="877824"/>
+            <a:off x="7726680" y="3182112"/>
+            <a:ext cx="3227832" cy="960120"/>
           </a:xfrm>
           <a:prstGeom prst="rect">
             <a:avLst/>
@@ -17019,7 +17025,7 @@
               <a:buNone/>
             </a:pPr>
             <a:r>
-              <a:rPr lang="en-US" sz="1220" dirty="0">
+              <a:rPr lang="en-US" sz="1140" dirty="0">
                 <a:solidFill>
                   <a:srgbClr val="17364A"/>
                 </a:solidFill>
@@ -17027,16 +17033,16 @@
                 <a:ea typeface="Aptos" pitchFamily="34" charset="-122"/>
                 <a:cs typeface="Aptos" pitchFamily="34" charset="-120"/>
               </a:rPr>
-              <a:t>An agency may define a higher risk appetite for internal.</a:t>
-            </a:r>
-            <a:endParaRPr lang="en-US" sz="1220" dirty="0"/>
-          </a:p>
-          <a:p>
-            <a:pPr indent="0" marL="0">
-              <a:buNone/>
-            </a:pPr>
-            <a:r>
-              <a:rPr lang="en-US" sz="1220" dirty="0">
+              <a:t>An agency may define a higher risk appetite for.</a:t>
+            </a:r>
+            <a:endParaRPr lang="en-US" sz="1140" dirty="0"/>
+          </a:p>
+          <a:p>
+            <a:pPr indent="0" marL="0">
+              <a:buNone/>
+            </a:pPr>
+            <a:r>
+              <a:rPr lang="en-US" sz="1140" dirty="0">
                 <a:solidFill>
                   <a:srgbClr val="17364A"/>
                 </a:solidFill>
@@ -17044,16 +17050,16 @@
                 <a:ea typeface="Aptos" pitchFamily="34" charset="-122"/>
                 <a:cs typeface="Aptos" pitchFamily="34" charset="-120"/>
               </a:rPr>
-              <a:t>It may define a moderate appetite for staff-facing decision.</a:t>
-            </a:r>
-            <a:endParaRPr lang="en-US" sz="1220" dirty="0"/>
-          </a:p>
-          <a:p>
-            <a:pPr indent="0" marL="0">
-              <a:buNone/>
-            </a:pPr>
-            <a:r>
-              <a:rPr lang="en-US" sz="1220" dirty="0">
+              <a:t>It may define a moderate appetite for staff-facing.</a:t>
+            </a:r>
+            <a:endParaRPr lang="en-US" sz="1140" dirty="0"/>
+          </a:p>
+          <a:p>
+            <a:pPr indent="0" marL="0">
+              <a:buNone/>
+            </a:pPr>
+            <a:r>
+              <a:rPr lang="en-US" sz="1140" dirty="0">
                 <a:solidFill>
                   <a:srgbClr val="17364A"/>
                 </a:solidFill>
@@ -17061,9 +17067,9 @@
                 <a:ea typeface="Aptos" pitchFamily="34" charset="-122"/>
                 <a:cs typeface="Aptos" pitchFamily="34" charset="-120"/>
               </a:rPr>
-              <a:t>It may define a very low appetite for unsupervised public-facing.</a:t>
-            </a:r>
-            <a:endParaRPr lang="en-US" sz="1220" dirty="0"/>
+              <a:t>It may define a very low appetite for unsupervised.</a:t>
+            </a:r>
+            <a:endParaRPr lang="en-US" sz="1140" dirty="0"/>
           </a:p>
         </p:txBody>
       </p:sp>
@@ -17075,12 +17081,12 @@
         </p:nvSpPr>
         <p:spPr>
           <a:xfrm>
-            <a:off x="7635240" y="4391863"/>
-            <a:ext cx="3474720" cy="1255471"/>
+            <a:off x="7543800" y="4389120"/>
+            <a:ext cx="3611880" cy="1261872"/>
           </a:xfrm>
           <a:prstGeom prst="roundRect">
             <a:avLst>
-              <a:gd name="adj" fmla="val 8740"/>
+              <a:gd name="adj" fmla="val 8696"/>
             </a:avLst>
           </a:prstGeom>
           <a:solidFill>
@@ -17102,8 +17108,8 @@
         </p:nvSpPr>
         <p:spPr>
           <a:xfrm>
-            <a:off x="7799832" y="4538167"/>
-            <a:ext cx="3145536" cy="256032"/>
+            <a:off x="7708392" y="4517136"/>
+            <a:ext cx="3282696" cy="228600"/>
           </a:xfrm>
           <a:prstGeom prst="rect">
             <a:avLst/>
@@ -17119,7 +17125,7 @@
               <a:buNone/>
             </a:pPr>
             <a:r>
-              <a:rPr lang="en-US" sz="1300" b="1" dirty="0">
+              <a:rPr lang="en-US" sz="1220" b="1" dirty="0">
                 <a:solidFill>
                   <a:srgbClr val="0068B7"/>
                 </a:solidFill>
@@ -17129,7 +17135,7 @@
               </a:rPr>
               <a:t>Safeguard to plan</a:t>
             </a:r>
-            <a:endParaRPr lang="en-US" sz="1300" dirty="0"/>
+            <a:endParaRPr lang="en-US" sz="1220" dirty="0"/>
           </a:p>
         </p:txBody>
       </p:sp>
@@ -17141,8 +17147,8 @@
         </p:nvSpPr>
         <p:spPr>
           <a:xfrm>
-            <a:off x="7799832" y="4867351"/>
-            <a:ext cx="3145536" cy="688543"/>
+            <a:off x="7708392" y="4828032"/>
+            <a:ext cx="3282696" cy="749808"/>
           </a:xfrm>
           <a:prstGeom prst="rect">
             <a:avLst/>
@@ -17160,7 +17166,7 @@
               <a:buNone/>
             </a:pPr>
             <a:r>
-              <a:rPr lang="en-US" sz="1320" dirty="0">
+              <a:rPr lang="en-US" sz="1220" dirty="0">
                 <a:solidFill>
                   <a:srgbClr val="17364A"/>
                 </a:solidFill>
@@ -17168,9 +17174,9 @@
                 <a:ea typeface="Aptos" pitchFamily="34" charset="-122"/>
                 <a:cs typeface="Aptos" pitchFamily="34" charset="-120"/>
               </a:rPr>
-              <a:t>Identify what could go wrong, who could be affected, what safeguards are needed, and what evidence should be reviewed before use.</a:t>
-            </a:r>
-            <a:endParaRPr lang="en-US" sz="1320" dirty="0"/>
+              <a:t>Identify what could go wrong, who could be affected, what safeguards are needed,.</a:t>
+            </a:r>
+            <a:endParaRPr lang="en-US" sz="1220" dirty="0"/>
           </a:p>
         </p:txBody>
       </p:sp>

--- a/downloads/presentations/modules/gov-410.pptx
+++ b/downloads/presentations/modules/gov-410.pptx
@@ -9379,7 +9379,7 @@
                 <a:ea typeface="Aptos" pitchFamily="34" charset="-122"/>
                 <a:cs typeface="Aptos" pitchFamily="34" charset="-120"/>
               </a:rPr>
-              <a:t>• 1. What is the strongest reason this module topic belongs in AI leadership.</a:t>
+              <a:t>1. What is the strongest reason this module topic belongs in AI leadership.</a:t>
             </a:r>
             <a:endParaRPr lang="en-US" sz="1920" dirty="0"/>
           </a:p>
@@ -9396,7 +9396,7 @@
                 <a:ea typeface="Aptos" pitchFamily="34" charset="-122"/>
                 <a:cs typeface="Aptos" pitchFamily="34" charset="-120"/>
               </a:rPr>
-              <a:t>• 2. Which practice best supports accountable public health AI governance?</a:t>
+              <a:t>2. Which practice best supports accountable public health AI governance?</a:t>
             </a:r>
             <a:endParaRPr lang="en-US" sz="1920" dirty="0"/>
           </a:p>
@@ -9413,7 +9413,7 @@
                 <a:ea typeface="Aptos" pitchFamily="34" charset="-122"/>
                 <a:cs typeface="Aptos" pitchFamily="34" charset="-120"/>
               </a:rPr>
-              <a:t>• 3. When should an AI use case be escalated for leadership or governance.</a:t>
+              <a:t>3. When should an AI use case be escalated for leadership or governance.</a:t>
             </a:r>
             <a:endParaRPr lang="en-US" sz="1920" dirty="0"/>
           </a:p>
@@ -9520,7 +9520,7 @@
                 <a:ea typeface="Aptos" pitchFamily="34" charset="-122"/>
                 <a:cs typeface="Aptos" pitchFamily="34" charset="-120"/>
               </a:rPr>
-              <a:t>1. What is the strongest reason this module topic belongs in AI leadership and.</a:t>
+              <a:t>What is the strongest reason this module topic belongs in AI leadership and.</a:t>
             </a:r>
             <a:endParaRPr lang="en-US" sz="1220" dirty="0"/>
           </a:p>
@@ -9627,41 +9627,7 @@
                 <a:ea typeface="Aptos" pitchFamily="34" charset="-122"/>
                 <a:cs typeface="Aptos" pitchFamily="34" charset="-120"/>
               </a:rPr>
-              <a:t>1.</a:t>
-            </a:r>
-            <a:endParaRPr lang="en-US" sz="1140" dirty="0"/>
-          </a:p>
-          <a:p>
-            <a:pPr indent="0" marL="0">
-              <a:buNone/>
-            </a:pPr>
-            <a:r>
-              <a:rPr lang="en-US" sz="1140" dirty="0">
-                <a:solidFill>
-                  <a:srgbClr val="17364A"/>
-                </a:solidFill>
-                <a:latin typeface="Aptos" pitchFamily="34" charset="0"/>
-                <a:ea typeface="Aptos" pitchFamily="34" charset="-122"/>
-                <a:cs typeface="Aptos" pitchFamily="34" charset="-120"/>
-              </a:rPr>
               <a:t>What is the strongest reason this module topic.</a:t>
-            </a:r>
-            <a:endParaRPr lang="en-US" sz="1140" dirty="0"/>
-          </a:p>
-          <a:p>
-            <a:pPr indent="0" marL="0">
-              <a:buNone/>
-            </a:pPr>
-            <a:r>
-              <a:rPr lang="en-US" sz="1140" dirty="0">
-                <a:solidFill>
-                  <a:srgbClr val="17364A"/>
-                </a:solidFill>
-                <a:latin typeface="Aptos" pitchFamily="34" charset="0"/>
-                <a:ea typeface="Aptos" pitchFamily="34" charset="-122"/>
-                <a:cs typeface="Aptos" pitchFamily="34" charset="-120"/>
-              </a:rPr>
-              <a:t>2.</a:t>
             </a:r>
             <a:endParaRPr lang="en-US" sz="1140" dirty="0"/>
           </a:p>
